--- a/library/lectures/lec-04/rendered/lec-04.pptx
+++ b/library/lectures/lec-04/rendered/lec-04.pptx
@@ -6658,11 +6658,11 @@
             <a:avLst/>
           </a:prstGeom>
           <a:solidFill>
-            <a:srgbClr val="D9F0E0"/>
+            <a:srgbClr val="E3EEF3"/>
           </a:solidFill>
           <a:ln w="10160">
             <a:solidFill>
-              <a:srgbClr val="2E8B57"/>
+              <a:srgbClr val="1C7293"/>
             </a:solidFill>
           </a:ln>
           <a:effectLst/>
@@ -6719,7 +6719,7 @@
             <a:r>
               <a:rPr sz="2000" b="1" i="0">
                 <a:solidFill>
-                  <a:srgbClr val="2E8B57"/>
+                  <a:srgbClr val="1C7293"/>
                 </a:solidFill>
                 <a:latin typeface="Arial"/>
               </a:rPr>
@@ -6783,11 +6783,11 @@
             <a:avLst/>
           </a:prstGeom>
           <a:solidFill>
-            <a:srgbClr val="F8D7DA"/>
+            <a:srgbClr val="D7DBE4"/>
           </a:solidFill>
           <a:ln w="10160">
             <a:solidFill>
-              <a:srgbClr val="C0392B"/>
+              <a:srgbClr val="21295C"/>
             </a:solidFill>
           </a:ln>
           <a:effectLst/>
@@ -6844,7 +6844,7 @@
             <a:r>
               <a:rPr sz="2000" b="1" i="0">
                 <a:solidFill>
-                  <a:srgbClr val="C0392B"/>
+                  <a:srgbClr val="21295C"/>
                 </a:solidFill>
                 <a:latin typeface="Arial"/>
               </a:rPr>
@@ -7033,11 +7033,11 @@
             <a:avLst/>
           </a:prstGeom>
           <a:solidFill>
-            <a:srgbClr val="D9F0E0"/>
+            <a:srgbClr val="D9E2EC"/>
           </a:solidFill>
           <a:ln w="10160">
             <a:solidFill>
-              <a:srgbClr val="2E8B57"/>
+              <a:srgbClr val="065A82"/>
             </a:solidFill>
           </a:ln>
           <a:effectLst/>
@@ -7094,7 +7094,7 @@
             <a:r>
               <a:rPr sz="2000" b="1" i="0">
                 <a:solidFill>
-                  <a:srgbClr val="2E8B57"/>
+                  <a:srgbClr val="065A82"/>
                 </a:solidFill>
                 <a:latin typeface="Arial"/>
               </a:rPr>
@@ -7774,13 +7774,13 @@
               </a:lnSpc>
             </a:pPr>
             <a:r>
-              <a:rPr sz="1300" b="1" i="0">
+              <a:rPr sz="1200" b="1" i="0">
                 <a:solidFill>
                   <a:srgbClr val="21295C"/>
                 </a:solidFill>
                 <a:latin typeface="Arial"/>
               </a:rPr>
-              <a:t>CheXNet (Rajpurkar 2017): sens 0.96 · spec 0.93  →  PPV ~8% при prev 1% (skрининг)  ·  ~78% при prev 30% (госпиталь).</a:t>
+              <a:t>CheXNet (Rajpurkar 2017): sens 0.94–0.96 · spec 0.89–0.93 (range).  Для PPV math берём sens 0.94 / spec 0.89  →  PPV ~8% при prev 1% (скрининг)  ·  ~78% при prev 30% (госпиталь).</a:t>
             </a:r>
           </a:p>
         </p:txBody>
@@ -7819,7 +7819,7 @@
                 </a:solidFill>
                 <a:latin typeface="Arial"/>
               </a:rPr>
-              <a:t>Та же модель, та же accuracy — разные PPV. Знать prevalence в deployment population — обязательно.</a:t>
+              <a:t>Та же модель, та же accuracy — разные PPV. Operating point зависит от threshold + патологии.</a:t>
             </a:r>
           </a:p>
         </p:txBody>
@@ -8454,7 +8454,7 @@
         <p:spPr>
           <a:xfrm>
             <a:off x="6355080" y="3200399"/>
-            <a:ext cx="4572000" cy="274320"/>
+            <a:ext cx="4023360" cy="274320"/>
           </a:xfrm>
           <a:prstGeom prst="rect">
             <a:avLst/>
@@ -8493,7 +8493,7 @@
         <p:spPr>
           <a:xfrm>
             <a:off x="6355080" y="3428999"/>
-            <a:ext cx="4572000" cy="502920"/>
+            <a:ext cx="4023360" cy="502920"/>
           </a:xfrm>
           <a:prstGeom prst="rect">
             <a:avLst/>
@@ -8532,7 +8532,7 @@
         <p:spPr>
           <a:xfrm>
             <a:off x="6355080" y="3977639"/>
-            <a:ext cx="4572000" cy="502920"/>
+            <a:ext cx="4023360" cy="502920"/>
           </a:xfrm>
           <a:prstGeom prst="rect">
             <a:avLst/>
@@ -8570,8 +8570,8 @@
         </p:nvSpPr>
         <p:spPr>
           <a:xfrm>
-            <a:off x="10835640" y="3200399"/>
-            <a:ext cx="822960" cy="365760"/>
+            <a:off x="10469880" y="3154679"/>
+            <a:ext cx="1234440" cy="548640"/>
           </a:xfrm>
           <a:prstGeom prst="roundRect">
             <a:avLst>
@@ -8616,8 +8616,8 @@
         </p:nvSpPr>
         <p:spPr>
           <a:xfrm>
-            <a:off x="10835640" y="3200399"/>
-            <a:ext cx="822960" cy="365760"/>
+            <a:off x="10469880" y="3154679"/>
+            <a:ext cx="1234440" cy="548640"/>
           </a:xfrm>
           <a:prstGeom prst="rect">
             <a:avLst/>
@@ -8636,7 +8636,7 @@
               </a:lnSpc>
             </a:pPr>
             <a:r>
-              <a:rPr sz="1100" b="1" i="0">
+              <a:rPr sz="1800" b="1" i="0">
                 <a:solidFill>
                   <a:srgbClr val="FFFFFF"/>
                 </a:solidFill>
@@ -8924,7 +8924,7 @@
                 </a:solidFill>
                 <a:latin typeface="Arial"/>
               </a:rPr>
-              <a:t>GPT-4 alone 76.3%  ·  врач+GPT-4 73.7%  (p = 0.60)</a:t>
+              <a:t>GPT-4 alone 76%  ·  врач+GPT-4 74%  (p = 0.60)</a:t>
             </a:r>
           </a:p>
         </p:txBody>
@@ -11840,7 +11840,7 @@
             <a:r>
               <a:rPr sz="1800" b="1" i="0">
                 <a:solidFill>
-                  <a:srgbClr val="2E8B57"/>
+                  <a:srgbClr val="028090"/>
                 </a:solidFill>
                 <a:latin typeface="Arial"/>
               </a:rPr>
@@ -11883,7 +11883,7 @@
                 </a:solidFill>
                 <a:latin typeface="Arial"/>
               </a:rPr>
-              <a:t>(s12) — обещание сбылось</a:t>
+              <a:t>обещание сбылось</a:t>
             </a:r>
           </a:p>
         </p:txBody>
@@ -11905,9 +11905,9 @@
             </a:avLst>
           </a:prstGeom>
           <a:solidFill>
-            <a:srgbClr val="FEF5E0"/>
+            <a:srgbClr val="F4F7FA"/>
           </a:solidFill>
-          <a:ln w="19050">
+          <a:ln w="25400">
             <a:solidFill>
               <a:srgbClr val="F0AB00"/>
             </a:solidFill>
@@ -12033,7 +12033,7 @@
                 </a:solidFill>
                 <a:latin typeface="Arial"/>
               </a:rPr>
-              <a:t>(s17a) — peer-reviewed Phase IIa</a:t>
+              <a:t>peer-reviewed Phase IIa</a:t>
             </a:r>
           </a:p>
         </p:txBody>
@@ -12055,9 +12055,9 @@
             </a:avLst>
           </a:prstGeom>
           <a:solidFill>
-            <a:srgbClr val="FEF5E0"/>
+            <a:srgbClr val="F4F7FA"/>
           </a:solidFill>
-          <a:ln w="19050">
+          <a:ln w="25400">
             <a:solidFill>
               <a:srgbClr val="F0AB00"/>
             </a:solidFill>
@@ -12183,7 +12183,7 @@
                 </a:solidFill>
                 <a:latin typeface="Arial"/>
               </a:rPr>
-              <a:t>(s17b) — discontinued</a:t>
+              <a:t>discontinued</a:t>
             </a:r>
           </a:p>
         </p:txBody>
@@ -12222,7 +12222,7 @@
                 </a:solidFill>
                 <a:latin typeface="Arial"/>
               </a:rPr>
-              <a:t>Mid-lecture re-orientation. Дальше — где AI ускоряет drug discovery (s15) и две истории (s17a/s17b).</a:t>
+              <a:t>Mid-lecture re-orientation. Дальше — где AI ускоряет drug discovery и две истории.</a:t>
             </a:r>
           </a:p>
         </p:txBody>
@@ -16271,7 +16271,7 @@
             </a:avLst>
           </a:prstGeom>
           <a:solidFill>
-            <a:srgbClr val="FEF5E0"/>
+            <a:srgbClr val="F4F7FA"/>
           </a:solidFill>
           <a:ln w="31750">
             <a:solidFill>
@@ -16428,8 +16428,8 @@
         </p:nvSpPr>
         <p:spPr>
           <a:xfrm>
-            <a:off x="502920" y="4983480"/>
-            <a:ext cx="11247120" cy="914400"/>
+            <a:off x="502920" y="4754880"/>
+            <a:ext cx="11247120" cy="685800"/>
           </a:xfrm>
           <a:prstGeom prst="roundRect">
             <a:avLst>
@@ -16476,8 +16476,8 @@
         </p:nvSpPr>
         <p:spPr>
           <a:xfrm>
-            <a:off x="685800" y="5056632"/>
-            <a:ext cx="10881360" cy="768096"/>
+            <a:off x="685800" y="4828032"/>
+            <a:ext cx="10881360" cy="539496"/>
           </a:xfrm>
           <a:prstGeom prst="rect">
             <a:avLst/>
@@ -16496,43 +16496,115 @@
               </a:lnSpc>
             </a:pPr>
             <a:r>
-              <a:rPr sz="1400" b="1" i="0">
+              <a:rPr sz="1300" b="1" i="0">
                 <a:solidFill>
                   <a:srgbClr val="21295C"/>
                 </a:solidFill>
                 <a:latin typeface="Arial"/>
               </a:rPr>
-              <a:t>60 mg QD → +98.4 mL FVC vs −20.3 mL placebo (12 weeks)  ·  Δ ~118 mL.
-Idiopathic Pulmonary Fibrosis (IPF) — clinically significant FVC delta.</a:t>
-            </a:r>
-          </a:p>
-        </p:txBody>
-      </p:sp>
-      <p:sp>
-        <p:nvSpPr>
-          <p:cNvPr id="21" name="TextBox 20"/>
-          <p:cNvSpPr txBox="1"/>
-          <p:nvPr/>
-        </p:nvSpPr>
-        <p:spPr>
-          <a:xfrm>
-            <a:off x="502920" y="6080760"/>
-            <a:ext cx="11247120" cy="365760"/>
-          </a:xfrm>
-          <a:prstGeom prst="rect">
-            <a:avLst/>
-          </a:prstGeom>
-          <a:noFill/>
-        </p:spPr>
-        <p:txBody>
-          <a:bodyPr wrap="square" lIns="0" rIns="0" tIns="0" bIns="0" anchor="t">
-            <a:spAutoFit/>
-          </a:bodyPr>
-          <a:lstStyle/>
-          <a:p>
-            <a:pPr algn="l">
-              <a:lnSpc>
-                <a:spcPct val="115000"/>
+              <a:t>60 mg QD → +98.4 mL FVC (forced vital capacity) vs −20.3 mL placebo (12 weeks)  ·  Δ ~118 mL. IPF — clinically significant.</a:t>
+            </a:r>
+          </a:p>
+        </p:txBody>
+      </p:sp>
+      <p:sp>
+        <p:nvSpPr>
+          <p:cNvPr id="21" name="Rounded Rectangle 20"/>
+          <p:cNvSpPr/>
+          <p:nvPr/>
+        </p:nvSpPr>
+        <p:spPr>
+          <a:xfrm>
+            <a:off x="502920" y="5532120"/>
+            <a:ext cx="11247120" cy="868680"/>
+          </a:xfrm>
+          <a:prstGeom prst="roundRect">
+            <a:avLst>
+              <a:gd name="adj" fmla="val 25000"/>
+            </a:avLst>
+          </a:prstGeom>
+          <a:solidFill>
+            <a:srgbClr val="F4F7FA"/>
+          </a:solidFill>
+          <a:ln w="19050">
+            <a:solidFill>
+              <a:srgbClr val="1C7293"/>
+            </a:solidFill>
+          </a:ln>
+          <a:effectLst/>
+        </p:spPr>
+        <p:style>
+          <a:lnRef idx="1">
+            <a:schemeClr val="accent1"/>
+          </a:lnRef>
+          <a:fillRef idx="3">
+            <a:schemeClr val="accent1"/>
+          </a:fillRef>
+          <a:effectRef idx="2">
+            <a:schemeClr val="accent1"/>
+          </a:effectRef>
+          <a:fontRef idx="minor">
+            <a:schemeClr val="lt1"/>
+          </a:fontRef>
+        </p:style>
+        <p:txBody>
+          <a:bodyPr rtlCol="0" anchor="ctr"/>
+          <a:lstStyle/>
+          <a:p>
+            <a:pPr algn="ctr"/>
+          </a:p>
+        </p:txBody>
+      </p:sp>
+      <p:sp>
+        <p:nvSpPr>
+          <p:cNvPr id="22" name="TextBox 21"/>
+          <p:cNvSpPr txBox="1"/>
+          <p:nvPr/>
+        </p:nvSpPr>
+        <p:spPr>
+          <a:xfrm>
+            <a:off x="777240" y="5623559"/>
+            <a:ext cx="10698480" cy="685800"/>
+          </a:xfrm>
+          <a:prstGeom prst="rect">
+            <a:avLst/>
+          </a:prstGeom>
+          <a:noFill/>
+        </p:spPr>
+        <p:txBody>
+          <a:bodyPr wrap="square" lIns="0" rIns="0" tIns="0" bIns="0" anchor="t">
+            <a:spAutoFit/>
+          </a:bodyPr>
+          <a:lstStyle/>
+          <a:p>
+            <a:pPr algn="l">
+              <a:lnSpc>
+                <a:spcPct val="130000"/>
+              </a:lnSpc>
+            </a:pPr>
+            <a:r>
+              <a:rPr sz="1200" b="1" i="0">
+                <a:solidFill>
+                  <a:srgbClr val="028090"/>
+                </a:solidFill>
+                <a:latin typeface="Arial"/>
+              </a:rPr>
+              <a:t>RU context (2024–2025 preclinical): </a:t>
+            </a:r>
+            <a:r>
+              <a:rPr sz="1100" b="0" i="0">
+                <a:solidFill>
+                  <a:srgbClr val="21295C"/>
+                </a:solidFill>
+                <a:latin typeface="Arial"/>
+              </a:rPr>
+              <a:t>Сбер AI Lab + AIRI + Р-Фарм — Alliance #1 CD137 онкология (май 2024); Alliance #2 Alzheimer (ноябрь 2025); MADD (ITMO+Сбер, EMNLP 2025); DiMA (AIRI, ICML 2025).</a:t>
+            </a:r>
+          </a:p>
+          <a:p>
+            <a:pPr algn="l">
+              <a:lnSpc>
+                <a:spcPct val="130000"/>
               </a:lnSpc>
             </a:pPr>
             <a:r>
@@ -16542,14 +16614,14 @@
                 </a:solidFill>
                 <a:latin typeface="Arial"/>
               </a:rPr>
-              <a:t>Verifiable: peer-reviewed publication. Self-reported: 18-month timeline vs traditional 4–5 years.</a:t>
-            </a:r>
-          </a:p>
-        </p:txBody>
-      </p:sp>
-      <p:sp>
-        <p:nvSpPr>
-          <p:cNvPr id="22" name="TextBox 21"/>
+              <a:t>Все программы — preclinical: 0 RU-designed препаратов в клинических испытаниях на май 2026.</a:t>
+            </a:r>
+          </a:p>
+        </p:txBody>
+      </p:sp>
+      <p:sp>
+        <p:nvSpPr>
+          <p:cNvPr id="23" name="TextBox 22"/>
           <p:cNvSpPr txBox="1"/>
           <p:nvPr/>
         </p:nvSpPr>
@@ -16581,7 +16653,7 @@
                 </a:solidFill>
                 <a:latin typeface="Arial"/>
               </a:rPr>
-              <a:t>PubMed 40461817 · NCT05938920 · Insilico Medicine press June 2025.</a:t>
+              <a:t>PubMed 40461817 · NCT05938920 · Nature Medicine июнь 2025 · MADD EMNLP 2025 · DiMA ICML 2025.</a:t>
             </a:r>
           </a:p>
         </p:txBody>
@@ -16943,11 +17015,11 @@
             </a:avLst>
           </a:prstGeom>
           <a:solidFill>
-            <a:srgbClr val="F0E5D8"/>
+            <a:srgbClr val="F4F7FA"/>
           </a:solidFill>
           <a:ln w="31750">
             <a:solidFill>
-              <a:srgbClr val="F0AB00"/>
+              <a:srgbClr val="4A556B"/>
             </a:solidFill>
           </a:ln>
           <a:effectLst/>
@@ -17043,11 +17115,11 @@
             <a:r>
               <a:rPr sz="1600" b="1" i="0">
                 <a:solidFill>
-                  <a:srgbClr val="C0392B"/>
-                </a:solidFill>
-                <a:latin typeface="Arial"/>
-              </a:rPr>
-              <a:t>Phase 1
+                  <a:srgbClr val="21295C"/>
+                </a:solidFill>
+                <a:latin typeface="Arial"/>
+              </a:rPr>
+              <a:t>✕ Phase 1
 DISCONTINUED</a:t>
             </a:r>
           </a:p>
@@ -17393,7 +17465,7 @@
             <a:r>
               <a:rPr sz="1600" b="1" i="0">
                 <a:solidFill>
-                  <a:srgbClr val="2E8B57"/>
+                  <a:srgbClr val="028090"/>
                 </a:solidFill>
                 <a:latin typeface="Arial"/>
               </a:rPr>
@@ -18027,9 +18099,9 @@
             </a:avLst>
           </a:prstGeom>
           <a:solidFill>
-            <a:srgbClr val="FEF5E0"/>
+            <a:srgbClr val="F4F7FA"/>
           </a:solidFill>
-          <a:ln w="19050">
+          <a:ln w="25400">
             <a:solidFill>
               <a:srgbClr val="F0AB00"/>
             </a:solidFill>
@@ -18939,6 +19011,45 @@
                 <a:latin typeface="Arial"/>
               </a:rPr>
               <a:t>→ Проектируйте с PCCP в уме: data drift, retraining triggers, threshold updates — план ex ante.</a:t>
+            </a:r>
+          </a:p>
+        </p:txBody>
+      </p:sp>
+      <p:sp>
+        <p:nvSpPr>
+          <p:cNvPr id="39" name="TextBox 38"/>
+          <p:cNvSpPr txBox="1"/>
+          <p:nvPr/>
+        </p:nvSpPr>
+        <p:spPr>
+          <a:xfrm>
+            <a:off x="502920" y="6720840"/>
+            <a:ext cx="11247120" cy="182880"/>
+          </a:xfrm>
+          <a:prstGeom prst="rect">
+            <a:avLst/>
+          </a:prstGeom>
+          <a:noFill/>
+        </p:spPr>
+        <p:txBody>
+          <a:bodyPr wrap="square" lIns="0" rIns="0" tIns="0" bIns="0" anchor="t">
+            <a:spAutoFit/>
+          </a:bodyPr>
+          <a:lstStyle/>
+          <a:p>
+            <a:pPr algn="l">
+              <a:lnSpc>
+                <a:spcPct val="115000"/>
+              </a:lnSpc>
+            </a:pPr>
+            <a:r>
+              <a:rPr sz="1000" b="0" i="1">
+                <a:solidFill>
+                  <a:srgbClr val="1C7293"/>
+                </a:solidFill>
+                <a:latin typeface="Arial"/>
+              </a:rPr>
+              <a:t>SaMD — Software as Medical Device (FDA category) · MDR — EU Medical Device Regulation</a:t>
             </a:r>
           </a:p>
         </p:txBody>
@@ -19344,7 +19455,7 @@
                 </a:solidFill>
                 <a:latin typeface="Arial"/>
               </a:rPr>
-              <a:t>10 мин · LO4 · web-chat + критическая оценка</a:t>
+              <a:t>Web-chat + критическая оценка ответа.</a:t>
             </a:r>
           </a:p>
         </p:txBody>
@@ -20807,457 +20918,72 @@
           </a:p>
         </p:txBody>
       </p:sp>
-      <p:sp>
-        <p:nvSpPr>
-          <p:cNvPr id="5" name="Rounded Rectangle 4"/>
-          <p:cNvSpPr/>
-          <p:nvPr/>
-        </p:nvSpPr>
-        <p:spPr>
-          <a:xfrm>
-            <a:off x="777240" y="2057400"/>
-            <a:ext cx="4572000" cy="3657600"/>
-          </a:xfrm>
-          <a:prstGeom prst="roundRect">
-            <a:avLst>
-              <a:gd name="adj" fmla="val 5000"/>
-            </a:avLst>
-          </a:prstGeom>
-          <a:solidFill>
-            <a:srgbClr val="21295C"/>
-          </a:solidFill>
-          <a:ln>
-            <a:noFill/>
-          </a:ln>
-          <a:effectLst/>
-        </p:spPr>
-        <p:style>
-          <a:lnRef idx="1">
-            <a:schemeClr val="accent1"/>
-          </a:lnRef>
-          <a:fillRef idx="3">
-            <a:schemeClr val="accent1"/>
-          </a:fillRef>
-          <a:effectRef idx="2">
-            <a:schemeClr val="accent1"/>
-          </a:effectRef>
-          <a:fontRef idx="minor">
-            <a:schemeClr val="lt1"/>
-          </a:fontRef>
-        </p:style>
-        <p:txBody>
-          <a:bodyPr rtlCol="0" anchor="ctr"/>
-          <a:lstStyle/>
-          <a:p>
-            <a:pPr algn="ctr"/>
-          </a:p>
-        </p:txBody>
-      </p:sp>
-      <p:sp>
-        <p:nvSpPr>
-          <p:cNvPr id="6" name="Rounded Rectangle 5"/>
-          <p:cNvSpPr/>
-          <p:nvPr/>
-        </p:nvSpPr>
-        <p:spPr>
-          <a:xfrm>
-            <a:off x="1600200" y="3337560"/>
-            <a:ext cx="502920" cy="502920"/>
-          </a:xfrm>
-          <a:prstGeom prst="roundRect">
-            <a:avLst>
-              <a:gd name="adj" fmla="val 50000"/>
-            </a:avLst>
-          </a:prstGeom>
-          <a:solidFill>
-            <a:srgbClr val="F4F7FA"/>
-          </a:solidFill>
-          <a:ln>
-            <a:noFill/>
-          </a:ln>
-          <a:effectLst/>
-        </p:spPr>
-        <p:style>
-          <a:lnRef idx="1">
-            <a:schemeClr val="accent1"/>
-          </a:lnRef>
-          <a:fillRef idx="3">
-            <a:schemeClr val="accent1"/>
-          </a:fillRef>
-          <a:effectRef idx="2">
-            <a:schemeClr val="accent1"/>
-          </a:effectRef>
-          <a:fontRef idx="minor">
-            <a:schemeClr val="lt1"/>
-          </a:fontRef>
-        </p:style>
-        <p:txBody>
-          <a:bodyPr rtlCol="0" anchor="ctr"/>
-          <a:lstStyle/>
-          <a:p>
-            <a:pPr algn="ctr"/>
+      <p:pic>
+        <p:nvPicPr>
+          <p:cNvPr id="5" name="Picture 4" descr="s20-harvard-ai-regulation.jpg"/>
+          <p:cNvPicPr>
+            <a:picLocks noChangeAspect="1"/>
+          </p:cNvPicPr>
+          <p:nvPr/>
+        </p:nvPicPr>
+        <p:blipFill>
+          <a:blip r:embed="rId2"/>
+          <a:stretch>
+            <a:fillRect/>
+          </a:stretch>
+        </p:blipFill>
+        <p:spPr>
+          <a:xfrm>
+            <a:off x="731520" y="1965960"/>
+            <a:ext cx="4663440" cy="3703320"/>
+          </a:xfrm>
+          <a:prstGeom prst="rect">
+            <a:avLst/>
+          </a:prstGeom>
+        </p:spPr>
+      </p:pic>
+      <p:sp>
+        <p:nvSpPr>
+          <p:cNvPr id="6" name="TextBox 5"/>
+          <p:cNvSpPr txBox="1"/>
+          <p:nvPr/>
+        </p:nvSpPr>
+        <p:spPr>
+          <a:xfrm>
+            <a:off x="777240" y="5715000"/>
+            <a:ext cx="4572000" cy="320040"/>
+          </a:xfrm>
+          <a:prstGeom prst="rect">
+            <a:avLst/>
+          </a:prstGeom>
+          <a:noFill/>
+        </p:spPr>
+        <p:txBody>
+          <a:bodyPr wrap="square" lIns="0" rIns="0" tIns="0" bIns="0" anchor="t">
+            <a:spAutoFit/>
+          </a:bodyPr>
+          <a:lstStyle/>
+          <a:p>
+            <a:pPr algn="ctr">
+              <a:lnSpc>
+                <a:spcPct val="115000"/>
+              </a:lnSpc>
+            </a:pPr>
+            <a:r>
+              <a:rPr sz="1100" b="0" i="1">
+                <a:solidFill>
+                  <a:srgbClr val="1C7293"/>
+                </a:solidFill>
+                <a:latin typeface="Arial"/>
+              </a:rPr>
+              <a:t>Harvard Gazette — AI healthcare regulation (Jan 2026)</a:t>
+            </a:r>
           </a:p>
         </p:txBody>
       </p:sp>
       <p:sp>
         <p:nvSpPr>
           <p:cNvPr id="7" name="Rounded Rectangle 6"/>
-          <p:cNvSpPr/>
-          <p:nvPr/>
-        </p:nvSpPr>
-        <p:spPr>
-          <a:xfrm>
-            <a:off x="1417320" y="3931920"/>
-            <a:ext cx="868680" cy="1280160"/>
-          </a:xfrm>
-          <a:prstGeom prst="roundRect">
-            <a:avLst>
-              <a:gd name="adj" fmla="val 15000"/>
-            </a:avLst>
-          </a:prstGeom>
-          <a:solidFill>
-            <a:srgbClr val="1C7293"/>
-          </a:solidFill>
-          <a:ln>
-            <a:noFill/>
-          </a:ln>
-          <a:effectLst/>
-        </p:spPr>
-        <p:style>
-          <a:lnRef idx="1">
-            <a:schemeClr val="accent1"/>
-          </a:lnRef>
-          <a:fillRef idx="3">
-            <a:schemeClr val="accent1"/>
-          </a:fillRef>
-          <a:effectRef idx="2">
-            <a:schemeClr val="accent1"/>
-          </a:effectRef>
-          <a:fontRef idx="minor">
-            <a:schemeClr val="lt1"/>
-          </a:fontRef>
-        </p:style>
-        <p:txBody>
-          <a:bodyPr rtlCol="0" anchor="ctr"/>
-          <a:lstStyle/>
-          <a:p>
-            <a:pPr algn="ctr"/>
-          </a:p>
-        </p:txBody>
-      </p:sp>
-      <p:sp>
-        <p:nvSpPr>
-          <p:cNvPr id="8" name="Rounded Rectangle 7"/>
-          <p:cNvSpPr/>
-          <p:nvPr/>
-        </p:nvSpPr>
-        <p:spPr>
-          <a:xfrm>
-            <a:off x="2971800" y="3337560"/>
-            <a:ext cx="502920" cy="502920"/>
-          </a:xfrm>
-          <a:prstGeom prst="roundRect">
-            <a:avLst>
-              <a:gd name="adj" fmla="val 50000"/>
-            </a:avLst>
-          </a:prstGeom>
-          <a:solidFill>
-            <a:srgbClr val="F4F7FA"/>
-          </a:solidFill>
-          <a:ln>
-            <a:noFill/>
-          </a:ln>
-          <a:effectLst/>
-        </p:spPr>
-        <p:style>
-          <a:lnRef idx="1">
-            <a:schemeClr val="accent1"/>
-          </a:lnRef>
-          <a:fillRef idx="3">
-            <a:schemeClr val="accent1"/>
-          </a:fillRef>
-          <a:effectRef idx="2">
-            <a:schemeClr val="accent1"/>
-          </a:effectRef>
-          <a:fontRef idx="minor">
-            <a:schemeClr val="lt1"/>
-          </a:fontRef>
-        </p:style>
-        <p:txBody>
-          <a:bodyPr rtlCol="0" anchor="ctr"/>
-          <a:lstStyle/>
-          <a:p>
-            <a:pPr algn="ctr"/>
-          </a:p>
-        </p:txBody>
-      </p:sp>
-      <p:sp>
-        <p:nvSpPr>
-          <p:cNvPr id="9" name="Rounded Rectangle 8"/>
-          <p:cNvSpPr/>
-          <p:nvPr/>
-        </p:nvSpPr>
-        <p:spPr>
-          <a:xfrm>
-            <a:off x="2788920" y="3931920"/>
-            <a:ext cx="868680" cy="1280160"/>
-          </a:xfrm>
-          <a:prstGeom prst="roundRect">
-            <a:avLst>
-              <a:gd name="adj" fmla="val 15000"/>
-            </a:avLst>
-          </a:prstGeom>
-          <a:solidFill>
-            <a:srgbClr val="1C7293"/>
-          </a:solidFill>
-          <a:ln>
-            <a:noFill/>
-          </a:ln>
-          <a:effectLst/>
-        </p:spPr>
-        <p:style>
-          <a:lnRef idx="1">
-            <a:schemeClr val="accent1"/>
-          </a:lnRef>
-          <a:fillRef idx="3">
-            <a:schemeClr val="accent1"/>
-          </a:fillRef>
-          <a:effectRef idx="2">
-            <a:schemeClr val="accent1"/>
-          </a:effectRef>
-          <a:fontRef idx="minor">
-            <a:schemeClr val="lt1"/>
-          </a:fontRef>
-        </p:style>
-        <p:txBody>
-          <a:bodyPr rtlCol="0" anchor="ctr"/>
-          <a:lstStyle/>
-          <a:p>
-            <a:pPr algn="ctr"/>
-          </a:p>
-        </p:txBody>
-      </p:sp>
-      <p:sp>
-        <p:nvSpPr>
-          <p:cNvPr id="10" name="Rounded Rectangle 9"/>
-          <p:cNvSpPr/>
-          <p:nvPr/>
-        </p:nvSpPr>
-        <p:spPr>
-          <a:xfrm>
-            <a:off x="4343400" y="3337560"/>
-            <a:ext cx="502920" cy="502920"/>
-          </a:xfrm>
-          <a:prstGeom prst="roundRect">
-            <a:avLst>
-              <a:gd name="adj" fmla="val 50000"/>
-            </a:avLst>
-          </a:prstGeom>
-          <a:solidFill>
-            <a:srgbClr val="F4F7FA"/>
-          </a:solidFill>
-          <a:ln>
-            <a:noFill/>
-          </a:ln>
-          <a:effectLst/>
-        </p:spPr>
-        <p:style>
-          <a:lnRef idx="1">
-            <a:schemeClr val="accent1"/>
-          </a:lnRef>
-          <a:fillRef idx="3">
-            <a:schemeClr val="accent1"/>
-          </a:fillRef>
-          <a:effectRef idx="2">
-            <a:schemeClr val="accent1"/>
-          </a:effectRef>
-          <a:fontRef idx="minor">
-            <a:schemeClr val="lt1"/>
-          </a:fontRef>
-        </p:style>
-        <p:txBody>
-          <a:bodyPr rtlCol="0" anchor="ctr"/>
-          <a:lstStyle/>
-          <a:p>
-            <a:pPr algn="ctr"/>
-          </a:p>
-        </p:txBody>
-      </p:sp>
-      <p:sp>
-        <p:nvSpPr>
-          <p:cNvPr id="11" name="Rounded Rectangle 10"/>
-          <p:cNvSpPr/>
-          <p:nvPr/>
-        </p:nvSpPr>
-        <p:spPr>
-          <a:xfrm>
-            <a:off x="4160520" y="3931920"/>
-            <a:ext cx="868680" cy="1280160"/>
-          </a:xfrm>
-          <a:prstGeom prst="roundRect">
-            <a:avLst>
-              <a:gd name="adj" fmla="val 15000"/>
-            </a:avLst>
-          </a:prstGeom>
-          <a:solidFill>
-            <a:srgbClr val="1C7293"/>
-          </a:solidFill>
-          <a:ln>
-            <a:noFill/>
-          </a:ln>
-          <a:effectLst/>
-        </p:spPr>
-        <p:style>
-          <a:lnRef idx="1">
-            <a:schemeClr val="accent1"/>
-          </a:lnRef>
-          <a:fillRef idx="3">
-            <a:schemeClr val="accent1"/>
-          </a:fillRef>
-          <a:effectRef idx="2">
-            <a:schemeClr val="accent1"/>
-          </a:effectRef>
-          <a:fontRef idx="minor">
-            <a:schemeClr val="lt1"/>
-          </a:fontRef>
-        </p:style>
-        <p:txBody>
-          <a:bodyPr rtlCol="0" anchor="ctr"/>
-          <a:lstStyle/>
-          <a:p>
-            <a:pPr algn="ctr"/>
-          </a:p>
-        </p:txBody>
-      </p:sp>
-      <p:sp>
-        <p:nvSpPr>
-          <p:cNvPr id="12" name="Rounded Rectangle 11"/>
-          <p:cNvSpPr/>
-          <p:nvPr/>
-        </p:nvSpPr>
-        <p:spPr>
-          <a:xfrm>
-            <a:off x="1417320" y="5074920"/>
-            <a:ext cx="3291839" cy="640080"/>
-          </a:xfrm>
-          <a:prstGeom prst="roundRect">
-            <a:avLst>
-              <a:gd name="adj" fmla="val 5000"/>
-            </a:avLst>
-          </a:prstGeom>
-          <a:solidFill>
-            <a:srgbClr val="F4F7FA"/>
-          </a:solidFill>
-          <a:ln w="25400">
-            <a:solidFill>
-              <a:srgbClr val="F0AB00"/>
-            </a:solidFill>
-          </a:ln>
-          <a:effectLst/>
-        </p:spPr>
-        <p:style>
-          <a:lnRef idx="1">
-            <a:schemeClr val="accent1"/>
-          </a:lnRef>
-          <a:fillRef idx="3">
-            <a:schemeClr val="accent1"/>
-          </a:fillRef>
-          <a:effectRef idx="2">
-            <a:schemeClr val="accent1"/>
-          </a:effectRef>
-          <a:fontRef idx="minor">
-            <a:schemeClr val="lt1"/>
-          </a:fontRef>
-        </p:style>
-        <p:txBody>
-          <a:bodyPr rtlCol="0" anchor="ctr"/>
-          <a:lstStyle/>
-          <a:p>
-            <a:pPr algn="ctr"/>
-          </a:p>
-        </p:txBody>
-      </p:sp>
-      <p:sp>
-        <p:nvSpPr>
-          <p:cNvPr id="13" name="TextBox 12"/>
-          <p:cNvSpPr txBox="1"/>
-          <p:nvPr/>
-        </p:nvSpPr>
-        <p:spPr>
-          <a:xfrm>
-            <a:off x="1417320" y="5074920"/>
-            <a:ext cx="3291839" cy="640080"/>
-          </a:xfrm>
-          <a:prstGeom prst="rect">
-            <a:avLst/>
-          </a:prstGeom>
-          <a:noFill/>
-        </p:spPr>
-        <p:txBody>
-          <a:bodyPr wrap="square" lIns="0" rIns="0" tIns="0" bIns="0" anchor="ctr">
-            <a:spAutoFit/>
-          </a:bodyPr>
-          <a:lstStyle/>
-          <a:p>
-            <a:pPr algn="ctr">
-              <a:lnSpc>
-                <a:spcPct val="115000"/>
-              </a:lnSpc>
-            </a:pPr>
-            <a:r>
-              <a:rPr sz="1300" b="1" i="0">
-                <a:solidFill>
-                  <a:srgbClr val="21295C"/>
-                </a:solidFill>
-                <a:latin typeface="Arial"/>
-              </a:rPr>
-              <a:t>AI heatmap + dx</a:t>
-            </a:r>
-          </a:p>
-        </p:txBody>
-      </p:sp>
-      <p:sp>
-        <p:nvSpPr>
-          <p:cNvPr id="14" name="TextBox 13"/>
-          <p:cNvSpPr txBox="1"/>
-          <p:nvPr/>
-        </p:nvSpPr>
-        <p:spPr>
-          <a:xfrm>
-            <a:off x="777240" y="5760720"/>
-            <a:ext cx="4572000" cy="320040"/>
-          </a:xfrm>
-          <a:prstGeom prst="rect">
-            <a:avLst/>
-          </a:prstGeom>
-          <a:noFill/>
-        </p:spPr>
-        <p:txBody>
-          <a:bodyPr wrap="square" lIns="0" rIns="0" tIns="0" bIns="0" anchor="t">
-            <a:spAutoFit/>
-          </a:bodyPr>
-          <a:lstStyle/>
-          <a:p>
-            <a:pPr algn="ctr">
-              <a:lnSpc>
-                <a:spcPct val="115000"/>
-              </a:lnSpc>
-            </a:pPr>
-            <a:r>
-              <a:rPr sz="1100" b="0" i="1">
-                <a:solidFill>
-                  <a:srgbClr val="1C7293"/>
-                </a:solidFill>
-                <a:latin typeface="Arial"/>
-              </a:rPr>
-              <a:t>Медицинская команда + AI: схематично</a:t>
-            </a:r>
-          </a:p>
-        </p:txBody>
-      </p:sp>
-      <p:sp>
-        <p:nvSpPr>
-          <p:cNvPr id="15" name="Rounded Rectangle 14"/>
           <p:cNvSpPr/>
           <p:nvPr/>
         </p:nvSpPr>
@@ -21305,7 +21031,7 @@
       </p:sp>
       <p:sp>
         <p:nvSpPr>
-          <p:cNvPr id="16" name="TextBox 15"/>
+          <p:cNvPr id="8" name="TextBox 7"/>
           <p:cNvSpPr txBox="1"/>
           <p:nvPr/>
         </p:nvSpPr>
@@ -21344,109 +21070,7 @@
       </p:sp>
       <p:pic>
         <p:nvPicPr>
-          <p:cNvPr id="17" name="Picture 16" descr="lucide-scale-blue.png"/>
-          <p:cNvPicPr>
-            <a:picLocks noChangeAspect="1"/>
-          </p:cNvPicPr>
-          <p:nvPr/>
-        </p:nvPicPr>
-        <p:blipFill>
-          <a:blip r:embed="rId2"/>
-          <a:stretch>
-            <a:fillRect/>
-          </a:stretch>
-        </p:blipFill>
-        <p:spPr>
-          <a:xfrm>
-            <a:off x="6172200" y="2697479"/>
-            <a:ext cx="731520" cy="731520"/>
-          </a:xfrm>
-          <a:prstGeom prst="rect">
-            <a:avLst/>
-          </a:prstGeom>
-        </p:spPr>
-      </p:pic>
-      <p:sp>
-        <p:nvSpPr>
-          <p:cNvPr id="18" name="TextBox 17"/>
-          <p:cNvSpPr txBox="1"/>
-          <p:nvPr/>
-        </p:nvSpPr>
-        <p:spPr>
-          <a:xfrm>
-            <a:off x="7040880" y="2651760"/>
-            <a:ext cx="4526279" cy="457200"/>
-          </a:xfrm>
-          <a:prstGeom prst="rect">
-            <a:avLst/>
-          </a:prstGeom>
-          <a:noFill/>
-        </p:spPr>
-        <p:txBody>
-          <a:bodyPr wrap="square" lIns="0" rIns="0" tIns="0" bIns="0" anchor="t">
-            <a:spAutoFit/>
-          </a:bodyPr>
-          <a:lstStyle/>
-          <a:p>
-            <a:pPr algn="l">
-              <a:lnSpc>
-                <a:spcPct val="115000"/>
-              </a:lnSpc>
-            </a:pPr>
-            <a:r>
-              <a:rPr sz="1600" b="1" i="0">
-                <a:solidFill>
-                  <a:srgbClr val="065A82"/>
-                </a:solidFill>
-                <a:latin typeface="Arial"/>
-              </a:rPr>
-              <a:t>1.  Bias в medical AI</a:t>
-            </a:r>
-          </a:p>
-        </p:txBody>
-      </p:sp>
-      <p:sp>
-        <p:nvSpPr>
-          <p:cNvPr id="19" name="TextBox 18"/>
-          <p:cNvSpPr txBox="1"/>
-          <p:nvPr/>
-        </p:nvSpPr>
-        <p:spPr>
-          <a:xfrm>
-            <a:off x="7040880" y="3154679"/>
-            <a:ext cx="4526279" cy="457200"/>
-          </a:xfrm>
-          <a:prstGeom prst="rect">
-            <a:avLst/>
-          </a:prstGeom>
-          <a:noFill/>
-        </p:spPr>
-        <p:txBody>
-          <a:bodyPr wrap="square" lIns="0" rIns="0" tIns="0" bIns="0" anchor="t">
-            <a:spAutoFit/>
-          </a:bodyPr>
-          <a:lstStyle/>
-          <a:p>
-            <a:pPr algn="l">
-              <a:lnSpc>
-                <a:spcPct val="130000"/>
-              </a:lnSpc>
-            </a:pPr>
-            <a:r>
-              <a:rPr sz="1200" b="0" i="1">
-                <a:solidFill>
-                  <a:srgbClr val="21295C"/>
-                </a:solidFill>
-                <a:latin typeface="Arial"/>
-              </a:rPr>
-              <a:t>Obermeyer 2019 deep-dive</a:t>
-            </a:r>
-          </a:p>
-        </p:txBody>
-      </p:sp>
-      <p:pic>
-        <p:nvPicPr>
-          <p:cNvPr id="20" name="Picture 19" descr="lucide-message-circle-warning-blue.png"/>
+          <p:cNvPr id="9" name="Picture 8" descr="lucide-scale-blue.png"/>
           <p:cNvPicPr>
             <a:picLocks noChangeAspect="1"/>
           </p:cNvPicPr>
@@ -21460,7 +21084,7 @@
         </p:blipFill>
         <p:spPr>
           <a:xfrm>
-            <a:off x="6172200" y="3886200"/>
+            <a:off x="6172200" y="2697479"/>
             <a:ext cx="731520" cy="731520"/>
           </a:xfrm>
           <a:prstGeom prst="rect">
@@ -21470,13 +21094,13 @@
       </p:pic>
       <p:sp>
         <p:nvSpPr>
-          <p:cNvPr id="21" name="TextBox 20"/>
-          <p:cNvSpPr txBox="1"/>
-          <p:nvPr/>
-        </p:nvSpPr>
-        <p:spPr>
-          <a:xfrm>
-            <a:off x="7040880" y="3840479"/>
+          <p:cNvPr id="10" name="TextBox 9"/>
+          <p:cNvSpPr txBox="1"/>
+          <p:nvPr/>
+        </p:nvSpPr>
+        <p:spPr>
+          <a:xfrm>
+            <a:off x="7040880" y="2651760"/>
             <a:ext cx="4526279" cy="457200"/>
           </a:xfrm>
           <a:prstGeom prst="rect">
@@ -21502,20 +21126,20 @@
                 </a:solidFill>
                 <a:latin typeface="Arial"/>
               </a:rPr>
-              <a:t>2.  LLM anti-pattern</a:t>
-            </a:r>
-          </a:p>
-        </p:txBody>
-      </p:sp>
-      <p:sp>
-        <p:nvSpPr>
-          <p:cNvPr id="22" name="TextBox 21"/>
-          <p:cNvSpPr txBox="1"/>
-          <p:nvPr/>
-        </p:nvSpPr>
-        <p:spPr>
-          <a:xfrm>
-            <a:off x="7040880" y="4343400"/>
+              <a:t>1.  Bias в medical AI</a:t>
+            </a:r>
+          </a:p>
+        </p:txBody>
+      </p:sp>
+      <p:sp>
+        <p:nvSpPr>
+          <p:cNvPr id="11" name="TextBox 10"/>
+          <p:cNvSpPr txBox="1"/>
+          <p:nvPr/>
+        </p:nvSpPr>
+        <p:spPr>
+          <a:xfrm>
+            <a:off x="7040880" y="3154679"/>
             <a:ext cx="4526279" cy="457200"/>
           </a:xfrm>
           <a:prstGeom prst="rect">
@@ -21541,14 +21165,14 @@
                 </a:solidFill>
                 <a:latin typeface="Arial"/>
               </a:rPr>
-              <a:t>NEDA Tessa + adversarial + 40M self-dx</a:t>
+              <a:t>Obermeyer 2019 deep-dive</a:t>
             </a:r>
           </a:p>
         </p:txBody>
       </p:sp>
       <p:pic>
         <p:nvPicPr>
-          <p:cNvPr id="23" name="Picture 22" descr="lucide-shield-check-blue.png"/>
+          <p:cNvPr id="12" name="Picture 11" descr="lucide-message-circle-warning-blue.png"/>
           <p:cNvPicPr>
             <a:picLocks noChangeAspect="1"/>
           </p:cNvPicPr>
@@ -21562,6 +21186,108 @@
         </p:blipFill>
         <p:spPr>
           <a:xfrm>
+            <a:off x="6172200" y="3886200"/>
+            <a:ext cx="731520" cy="731520"/>
+          </a:xfrm>
+          <a:prstGeom prst="rect">
+            <a:avLst/>
+          </a:prstGeom>
+        </p:spPr>
+      </p:pic>
+      <p:sp>
+        <p:nvSpPr>
+          <p:cNvPr id="13" name="TextBox 12"/>
+          <p:cNvSpPr txBox="1"/>
+          <p:nvPr/>
+        </p:nvSpPr>
+        <p:spPr>
+          <a:xfrm>
+            <a:off x="7040880" y="3840479"/>
+            <a:ext cx="4526279" cy="457200"/>
+          </a:xfrm>
+          <a:prstGeom prst="rect">
+            <a:avLst/>
+          </a:prstGeom>
+          <a:noFill/>
+        </p:spPr>
+        <p:txBody>
+          <a:bodyPr wrap="square" lIns="0" rIns="0" tIns="0" bIns="0" anchor="t">
+            <a:spAutoFit/>
+          </a:bodyPr>
+          <a:lstStyle/>
+          <a:p>
+            <a:pPr algn="l">
+              <a:lnSpc>
+                <a:spcPct val="115000"/>
+              </a:lnSpc>
+            </a:pPr>
+            <a:r>
+              <a:rPr sz="1600" b="1" i="0">
+                <a:solidFill>
+                  <a:srgbClr val="065A82"/>
+                </a:solidFill>
+                <a:latin typeface="Arial"/>
+              </a:rPr>
+              <a:t>2.  LLM anti-pattern</a:t>
+            </a:r>
+          </a:p>
+        </p:txBody>
+      </p:sp>
+      <p:sp>
+        <p:nvSpPr>
+          <p:cNvPr id="14" name="TextBox 13"/>
+          <p:cNvSpPr txBox="1"/>
+          <p:nvPr/>
+        </p:nvSpPr>
+        <p:spPr>
+          <a:xfrm>
+            <a:off x="7040880" y="4343400"/>
+            <a:ext cx="4526279" cy="457200"/>
+          </a:xfrm>
+          <a:prstGeom prst="rect">
+            <a:avLst/>
+          </a:prstGeom>
+          <a:noFill/>
+        </p:spPr>
+        <p:txBody>
+          <a:bodyPr wrap="square" lIns="0" rIns="0" tIns="0" bIns="0" anchor="t">
+            <a:spAutoFit/>
+          </a:bodyPr>
+          <a:lstStyle/>
+          <a:p>
+            <a:pPr algn="l">
+              <a:lnSpc>
+                <a:spcPct val="130000"/>
+              </a:lnSpc>
+            </a:pPr>
+            <a:r>
+              <a:rPr sz="1200" b="0" i="1">
+                <a:solidFill>
+                  <a:srgbClr val="21295C"/>
+                </a:solidFill>
+                <a:latin typeface="Arial"/>
+              </a:rPr>
+              <a:t>NEDA Tessa + adversarial + 40M self-dx</a:t>
+            </a:r>
+          </a:p>
+        </p:txBody>
+      </p:sp>
+      <p:pic>
+        <p:nvPicPr>
+          <p:cNvPr id="15" name="Picture 14" descr="lucide-shield-check-blue.png"/>
+          <p:cNvPicPr>
+            <a:picLocks noChangeAspect="1"/>
+          </p:cNvPicPr>
+          <p:nvPr/>
+        </p:nvPicPr>
+        <p:blipFill>
+          <a:blip r:embed="rId5"/>
+          <a:stretch>
+            <a:fillRect/>
+          </a:stretch>
+        </p:blipFill>
+        <p:spPr>
+          <a:xfrm>
             <a:off x="6172200" y="5074920"/>
             <a:ext cx="731520" cy="731520"/>
           </a:xfrm>
@@ -21572,7 +21298,7 @@
       </p:pic>
       <p:sp>
         <p:nvSpPr>
-          <p:cNvPr id="24" name="TextBox 23"/>
+          <p:cNvPr id="16" name="TextBox 15"/>
           <p:cNvSpPr txBox="1"/>
           <p:nvPr/>
         </p:nvSpPr>
@@ -21611,7 +21337,7 @@
       </p:sp>
       <p:sp>
         <p:nvSpPr>
-          <p:cNvPr id="25" name="TextBox 24"/>
+          <p:cNvPr id="17" name="TextBox 16"/>
           <p:cNvSpPr txBox="1"/>
           <p:nvPr/>
         </p:nvSpPr>
@@ -21650,7 +21376,7 @@
       </p:sp>
       <p:sp>
         <p:nvSpPr>
-          <p:cNvPr id="26" name="Rounded Rectangle 25"/>
+          <p:cNvPr id="18" name="Rounded Rectangle 17"/>
           <p:cNvSpPr/>
           <p:nvPr/>
         </p:nvSpPr>
@@ -21698,7 +21424,7 @@
       </p:sp>
       <p:sp>
         <p:nvSpPr>
-          <p:cNvPr id="27" name="TextBox 26"/>
+          <p:cNvPr id="19" name="TextBox 18"/>
           <p:cNvSpPr txBox="1"/>
           <p:nvPr/>
         </p:nvSpPr>
@@ -22960,11 +22686,11 @@
         <p:spPr>
           <a:xfrm>
             <a:off x="502920" y="1645920"/>
-            <a:ext cx="11247120" cy="1417320"/>
+            <a:ext cx="11247120" cy="1298448"/>
           </a:xfrm>
           <a:prstGeom prst="roundRect">
             <a:avLst>
-              <a:gd name="adj" fmla="val 21505"/>
+              <a:gd name="adj" fmla="val 23474"/>
             </a:avLst>
           </a:prstGeom>
           <a:solidFill>
@@ -23015,8 +22741,8 @@
         </p:blipFill>
         <p:spPr>
           <a:xfrm>
-            <a:off x="777240" y="1874519"/>
-            <a:ext cx="868680" cy="868680"/>
+            <a:off x="777240" y="1847088"/>
+            <a:ext cx="777240" cy="777240"/>
           </a:xfrm>
           <a:prstGeom prst="rect">
             <a:avLst/>
@@ -23031,8 +22757,8 @@
         </p:nvSpPr>
         <p:spPr>
           <a:xfrm>
-            <a:off x="1828800" y="1828800"/>
-            <a:ext cx="4114800" cy="457200"/>
+            <a:off x="1737360" y="1810512"/>
+            <a:ext cx="4114800" cy="411480"/>
           </a:xfrm>
           <a:prstGeom prst="rect">
             <a:avLst/>
@@ -23051,7 +22777,7 @@
               </a:lnSpc>
             </a:pPr>
             <a:r>
-              <a:rPr sz="1700" b="1" i="0">
+              <a:rPr sz="1600" b="1" i="0">
                 <a:solidFill>
                   <a:srgbClr val="21295C"/>
                 </a:solidFill>
@@ -23070,8 +22796,8 @@
         </p:nvSpPr>
         <p:spPr>
           <a:xfrm>
-            <a:off x="1828800" y="2331720"/>
-            <a:ext cx="2286000" cy="320040"/>
+            <a:off x="1737360" y="2249424"/>
+            <a:ext cx="2286000" cy="292608"/>
           </a:xfrm>
           <a:prstGeom prst="roundRect">
             <a:avLst>
@@ -23116,8 +22842,8 @@
         </p:nvSpPr>
         <p:spPr>
           <a:xfrm>
-            <a:off x="1828800" y="2331720"/>
-            <a:ext cx="2286000" cy="320040"/>
+            <a:off x="1737360" y="2249424"/>
+            <a:ext cx="2286000" cy="292608"/>
           </a:xfrm>
           <a:prstGeom prst="rect">
             <a:avLst/>
@@ -23155,7 +22881,7 @@
         </p:nvSpPr>
         <p:spPr>
           <a:xfrm>
-            <a:off x="1828800" y="2743200"/>
+            <a:off x="1737360" y="2606040"/>
             <a:ext cx="4114800" cy="274320"/>
           </a:xfrm>
           <a:prstGeom prst="rect">
@@ -23194,7 +22920,7 @@
         </p:nvSpPr>
         <p:spPr>
           <a:xfrm>
-            <a:off x="6263640" y="1965960"/>
+            <a:off x="6172200" y="1929384"/>
             <a:ext cx="91440" cy="91440"/>
           </a:xfrm>
           <a:prstGeom prst="roundRect">
@@ -23240,27 +22966,27 @@
         </p:nvSpPr>
         <p:spPr>
           <a:xfrm>
-            <a:off x="6446520" y="1828800"/>
-            <a:ext cx="5166360" cy="365760"/>
-          </a:xfrm>
-          <a:prstGeom prst="rect">
-            <a:avLst/>
-          </a:prstGeom>
-          <a:noFill/>
-        </p:spPr>
-        <p:txBody>
-          <a:bodyPr wrap="square" lIns="0" rIns="0" tIns="0" bIns="0" anchor="t">
-            <a:spAutoFit/>
-          </a:bodyPr>
-          <a:lstStyle/>
-          <a:p>
-            <a:pPr algn="l">
-              <a:lnSpc>
-                <a:spcPct val="130000"/>
-              </a:lnSpc>
-            </a:pPr>
-            <a:r>
-              <a:rPr sz="1200" b="0" i="0">
+            <a:off x="6355080" y="1810512"/>
+            <a:ext cx="5257800" cy="347472"/>
+          </a:xfrm>
+          <a:prstGeom prst="rect">
+            <a:avLst/>
+          </a:prstGeom>
+          <a:noFill/>
+        </p:spPr>
+        <p:txBody>
+          <a:bodyPr wrap="square" lIns="0" rIns="0" tIns="0" bIns="0" anchor="t">
+            <a:spAutoFit/>
+          </a:bodyPr>
+          <a:lstStyle/>
+          <a:p>
+            <a:pPr algn="l">
+              <a:lnSpc>
+                <a:spcPct val="125000"/>
+              </a:lnSpc>
+            </a:pPr>
+            <a:r>
+              <a:rPr sz="1100" b="0" i="0">
                 <a:solidFill>
                   <a:srgbClr val="21295C"/>
                 </a:solidFill>
@@ -23279,7 +23005,7 @@
         </p:nvSpPr>
         <p:spPr>
           <a:xfrm>
-            <a:off x="6263640" y="2350008"/>
+            <a:off x="6172200" y="2276856"/>
             <a:ext cx="91440" cy="91440"/>
           </a:xfrm>
           <a:prstGeom prst="roundRect">
@@ -23325,33 +23051,33 @@
         </p:nvSpPr>
         <p:spPr>
           <a:xfrm>
-            <a:off x="6446520" y="2212848"/>
-            <a:ext cx="5166360" cy="365760"/>
-          </a:xfrm>
-          <a:prstGeom prst="rect">
-            <a:avLst/>
-          </a:prstGeom>
-          <a:noFill/>
-        </p:spPr>
-        <p:txBody>
-          <a:bodyPr wrap="square" lIns="0" rIns="0" tIns="0" bIns="0" anchor="t">
-            <a:spAutoFit/>
-          </a:bodyPr>
-          <a:lstStyle/>
-          <a:p>
-            <a:pPr algn="l">
-              <a:lnSpc>
-                <a:spcPct val="130000"/>
-              </a:lnSpc>
-            </a:pPr>
-            <a:r>
-              <a:rPr sz="1200" b="0" i="0">
+            <a:off x="6355080" y="2157984"/>
+            <a:ext cx="5257800" cy="347472"/>
+          </a:xfrm>
+          <a:prstGeom prst="rect">
+            <a:avLst/>
+          </a:prstGeom>
+          <a:noFill/>
+        </p:spPr>
+        <p:txBody>
+          <a:bodyPr wrap="square" lIns="0" rIns="0" tIns="0" bIns="0" anchor="t">
+            <a:spAutoFit/>
+          </a:bodyPr>
+          <a:lstStyle/>
+          <a:p>
+            <a:pPr algn="l">
+              <a:lnSpc>
+                <a:spcPct val="125000"/>
+              </a:lnSpc>
+            </a:pPr>
+            <a:r>
+              <a:rPr sz="1100" b="0" i="0">
                 <a:solidFill>
                   <a:srgbClr val="21295C"/>
                 </a:solidFill>
                 <a:latin typeface="Arial"/>
               </a:rPr>
-              <a:t>Март 2023: Cass → generative БЕЗ NEDA approval</a:t>
+              <a:t>Начало 2023: Cass → generative БЕЗ NEDA approval</a:t>
             </a:r>
           </a:p>
         </p:txBody>
@@ -23364,7 +23090,7 @@
         </p:nvSpPr>
         <p:spPr>
           <a:xfrm>
-            <a:off x="6263640" y="2734056"/>
+            <a:off x="6172200" y="2624328"/>
             <a:ext cx="91440" cy="91440"/>
           </a:xfrm>
           <a:prstGeom prst="roundRect">
@@ -23410,27 +23136,27 @@
         </p:nvSpPr>
         <p:spPr>
           <a:xfrm>
-            <a:off x="6446520" y="2596896"/>
-            <a:ext cx="5166360" cy="365760"/>
-          </a:xfrm>
-          <a:prstGeom prst="rect">
-            <a:avLst/>
-          </a:prstGeom>
-          <a:noFill/>
-        </p:spPr>
-        <p:txBody>
-          <a:bodyPr wrap="square" lIns="0" rIns="0" tIns="0" bIns="0" anchor="t">
-            <a:spAutoFit/>
-          </a:bodyPr>
-          <a:lstStyle/>
-          <a:p>
-            <a:pPr algn="l">
-              <a:lnSpc>
-                <a:spcPct val="130000"/>
-              </a:lnSpc>
-            </a:pPr>
-            <a:r>
-              <a:rPr sz="1200" b="0" i="0">
+            <a:off x="6355080" y="2505456"/>
+            <a:ext cx="5257800" cy="347472"/>
+          </a:xfrm>
+          <a:prstGeom prst="rect">
+            <a:avLst/>
+          </a:prstGeom>
+          <a:noFill/>
+        </p:spPr>
+        <p:txBody>
+          <a:bodyPr wrap="square" lIns="0" rIns="0" tIns="0" bIns="0" anchor="t">
+            <a:spAutoFit/>
+          </a:bodyPr>
+          <a:lstStyle/>
+          <a:p>
+            <a:pPr algn="l">
+              <a:lnSpc>
+                <a:spcPct val="125000"/>
+              </a:lnSpc>
+            </a:pPr>
+            <a:r>
+              <a:rPr sz="1100" b="0" i="0">
                 <a:solidFill>
                   <a:srgbClr val="21295C"/>
                 </a:solidFill>
@@ -23449,12 +23175,12 @@
         </p:nvSpPr>
         <p:spPr>
           <a:xfrm>
-            <a:off x="502920" y="3154680"/>
-            <a:ext cx="11247120" cy="1417320"/>
+            <a:off x="502920" y="3017520"/>
+            <a:ext cx="11247120" cy="1298448"/>
           </a:xfrm>
           <a:prstGeom prst="roundRect">
             <a:avLst>
-              <a:gd name="adj" fmla="val 21505"/>
+              <a:gd name="adj" fmla="val 23474"/>
             </a:avLst>
           </a:prstGeom>
           <a:solidFill>
@@ -23505,8 +23231,8 @@
         </p:blipFill>
         <p:spPr>
           <a:xfrm>
-            <a:off x="777240" y="3383280"/>
-            <a:ext cx="868680" cy="868680"/>
+            <a:off x="777240" y="3218688"/>
+            <a:ext cx="777240" cy="777240"/>
           </a:xfrm>
           <a:prstGeom prst="rect">
             <a:avLst/>
@@ -23521,8 +23247,8 @@
         </p:nvSpPr>
         <p:spPr>
           <a:xfrm>
-            <a:off x="1828800" y="3337560"/>
-            <a:ext cx="4114800" cy="457200"/>
+            <a:off x="1737360" y="3182112"/>
+            <a:ext cx="4114800" cy="411480"/>
           </a:xfrm>
           <a:prstGeom prst="rect">
             <a:avLst/>
@@ -23541,7 +23267,7 @@
               </a:lnSpc>
             </a:pPr>
             <a:r>
-              <a:rPr sz="1700" b="1" i="0">
+              <a:rPr sz="1600" b="1" i="0">
                 <a:solidFill>
                   <a:srgbClr val="21295C"/>
                 </a:solidFill>
@@ -23560,8 +23286,8 @@
         </p:nvSpPr>
         <p:spPr>
           <a:xfrm>
-            <a:off x="1828800" y="3840480"/>
-            <a:ext cx="2286000" cy="320040"/>
+            <a:off x="1737360" y="3621024"/>
+            <a:ext cx="2286000" cy="292608"/>
           </a:xfrm>
           <a:prstGeom prst="roundRect">
             <a:avLst>
@@ -23606,8 +23332,8 @@
         </p:nvSpPr>
         <p:spPr>
           <a:xfrm>
-            <a:off x="1828800" y="3840480"/>
-            <a:ext cx="2286000" cy="320040"/>
+            <a:off x="1737360" y="3621024"/>
+            <a:ext cx="2286000" cy="292608"/>
           </a:xfrm>
           <a:prstGeom prst="rect">
             <a:avLst/>
@@ -23645,7 +23371,7 @@
         </p:nvSpPr>
         <p:spPr>
           <a:xfrm>
-            <a:off x="1828800" y="4251960"/>
+            <a:off x="1737360" y="3977639"/>
             <a:ext cx="4114800" cy="274320"/>
           </a:xfrm>
           <a:prstGeom prst="rect">
@@ -23684,7 +23410,7 @@
         </p:nvSpPr>
         <p:spPr>
           <a:xfrm>
-            <a:off x="6263640" y="3474720"/>
+            <a:off x="6172200" y="3300984"/>
             <a:ext cx="91440" cy="91440"/>
           </a:xfrm>
           <a:prstGeom prst="roundRect">
@@ -23730,27 +23456,27 @@
         </p:nvSpPr>
         <p:spPr>
           <a:xfrm>
-            <a:off x="6446520" y="3337560"/>
-            <a:ext cx="5166360" cy="365760"/>
-          </a:xfrm>
-          <a:prstGeom prst="rect">
-            <a:avLst/>
-          </a:prstGeom>
-          <a:noFill/>
-        </p:spPr>
-        <p:txBody>
-          <a:bodyPr wrap="square" lIns="0" rIns="0" tIns="0" bIns="0" anchor="t">
-            <a:spAutoFit/>
-          </a:bodyPr>
-          <a:lstStyle/>
-          <a:p>
-            <a:pPr algn="l">
-              <a:lnSpc>
-                <a:spcPct val="130000"/>
-              </a:lnSpc>
-            </a:pPr>
-            <a:r>
-              <a:rPr sz="1200" b="0" i="0">
+            <a:off x="6355080" y="3182112"/>
+            <a:ext cx="5257800" cy="347472"/>
+          </a:xfrm>
+          <a:prstGeom prst="rect">
+            <a:avLst/>
+          </a:prstGeom>
+          <a:noFill/>
+        </p:spPr>
+        <p:txBody>
+          <a:bodyPr wrap="square" lIns="0" rIns="0" tIns="0" bIns="0" anchor="t">
+            <a:spAutoFit/>
+          </a:bodyPr>
+          <a:lstStyle/>
+          <a:p>
+            <a:pPr algn="l">
+              <a:lnSpc>
+                <a:spcPct val="125000"/>
+              </a:lnSpc>
+            </a:pPr>
+            <a:r>
+              <a:rPr sz="1100" b="0" i="0">
                 <a:solidFill>
                   <a:srgbClr val="21295C"/>
                 </a:solidFill>
@@ -23769,7 +23495,7 @@
         </p:nvSpPr>
         <p:spPr>
           <a:xfrm>
-            <a:off x="6263640" y="3858768"/>
+            <a:off x="6172200" y="3648456"/>
             <a:ext cx="91440" cy="91440"/>
           </a:xfrm>
           <a:prstGeom prst="roundRect">
@@ -23815,27 +23541,27 @@
         </p:nvSpPr>
         <p:spPr>
           <a:xfrm>
-            <a:off x="6446520" y="3721608"/>
-            <a:ext cx="5166360" cy="365760"/>
-          </a:xfrm>
-          <a:prstGeom prst="rect">
-            <a:avLst/>
-          </a:prstGeom>
-          <a:noFill/>
-        </p:spPr>
-        <p:txBody>
-          <a:bodyPr wrap="square" lIns="0" rIns="0" tIns="0" bIns="0" anchor="t">
-            <a:spAutoFit/>
-          </a:bodyPr>
-          <a:lstStyle/>
-          <a:p>
-            <a:pPr algn="l">
-              <a:lnSpc>
-                <a:spcPct val="130000"/>
-              </a:lnSpc>
-            </a:pPr>
-            <a:r>
-              <a:rPr sz="1200" b="0" i="0">
+            <a:off x="6355080" y="3529584"/>
+            <a:ext cx="5257800" cy="347472"/>
+          </a:xfrm>
+          <a:prstGeom prst="rect">
+            <a:avLst/>
+          </a:prstGeom>
+          <a:noFill/>
+        </p:spPr>
+        <p:txBody>
+          <a:bodyPr wrap="square" lIns="0" rIns="0" tIns="0" bIns="0" anchor="t">
+            <a:spAutoFit/>
+          </a:bodyPr>
+          <a:lstStyle/>
+          <a:p>
+            <a:pPr algn="l">
+              <a:lnSpc>
+                <a:spcPct val="125000"/>
+              </a:lnSpc>
+            </a:pPr>
+            <a:r>
+              <a:rPr sz="1100" b="0" i="0">
                 <a:solidFill>
                   <a:srgbClr val="21295C"/>
                 </a:solidFill>
@@ -23854,7 +23580,7 @@
         </p:nvSpPr>
         <p:spPr>
           <a:xfrm>
-            <a:off x="6263640" y="4242816"/>
+            <a:off x="6172200" y="3995928"/>
             <a:ext cx="91440" cy="91440"/>
           </a:xfrm>
           <a:prstGeom prst="roundRect">
@@ -23900,27 +23626,27 @@
         </p:nvSpPr>
         <p:spPr>
           <a:xfrm>
-            <a:off x="6446520" y="4105656"/>
-            <a:ext cx="5166360" cy="365760"/>
-          </a:xfrm>
-          <a:prstGeom prst="rect">
-            <a:avLst/>
-          </a:prstGeom>
-          <a:noFill/>
-        </p:spPr>
-        <p:txBody>
-          <a:bodyPr wrap="square" lIns="0" rIns="0" tIns="0" bIns="0" anchor="t">
-            <a:spAutoFit/>
-          </a:bodyPr>
-          <a:lstStyle/>
-          <a:p>
-            <a:pPr algn="l">
-              <a:lnSpc>
-                <a:spcPct val="130000"/>
-              </a:lnSpc>
-            </a:pPr>
-            <a:r>
-              <a:rPr sz="1200" b="0" i="0">
+            <a:off x="6355080" y="3877056"/>
+            <a:ext cx="5257800" cy="347472"/>
+          </a:xfrm>
+          <a:prstGeom prst="rect">
+            <a:avLst/>
+          </a:prstGeom>
+          <a:noFill/>
+        </p:spPr>
+        <p:txBody>
+          <a:bodyPr wrap="square" lIns="0" rIns="0" tIns="0" bIns="0" anchor="t">
+            <a:spAutoFit/>
+          </a:bodyPr>
+          <a:lstStyle/>
+          <a:p>
+            <a:pPr algn="l">
+              <a:lnSpc>
+                <a:spcPct val="125000"/>
+              </a:lnSpc>
+            </a:pPr>
+            <a:r>
+              <a:rPr sz="1100" b="0" i="0">
                 <a:solidFill>
                   <a:srgbClr val="21295C"/>
                 </a:solidFill>
@@ -23939,12 +23665,12 @@
         </p:nvSpPr>
         <p:spPr>
           <a:xfrm>
-            <a:off x="502920" y="4663440"/>
-            <a:ext cx="11247120" cy="1417320"/>
+            <a:off x="502920" y="4389120"/>
+            <a:ext cx="11247120" cy="1298448"/>
           </a:xfrm>
           <a:prstGeom prst="roundRect">
             <a:avLst>
-              <a:gd name="adj" fmla="val 21505"/>
+              <a:gd name="adj" fmla="val 23474"/>
             </a:avLst>
           </a:prstGeom>
           <a:solidFill>
@@ -23995,8 +23721,8 @@
         </p:blipFill>
         <p:spPr>
           <a:xfrm>
-            <a:off x="777240" y="4892040"/>
-            <a:ext cx="868680" cy="868680"/>
+            <a:off x="777240" y="4590288"/>
+            <a:ext cx="777240" cy="777240"/>
           </a:xfrm>
           <a:prstGeom prst="rect">
             <a:avLst/>
@@ -24011,8 +23737,8 @@
         </p:nvSpPr>
         <p:spPr>
           <a:xfrm>
-            <a:off x="1828800" y="4846320"/>
-            <a:ext cx="4114800" cy="457200"/>
+            <a:off x="1737360" y="4553712"/>
+            <a:ext cx="4114800" cy="411480"/>
           </a:xfrm>
           <a:prstGeom prst="rect">
             <a:avLst/>
@@ -24031,7 +23757,7 @@
               </a:lnSpc>
             </a:pPr>
             <a:r>
-              <a:rPr sz="1700" b="1" i="0">
+              <a:rPr sz="1600" b="1" i="0">
                 <a:solidFill>
                   <a:srgbClr val="21295C"/>
                 </a:solidFill>
@@ -24050,8 +23776,8 @@
         </p:nvSpPr>
         <p:spPr>
           <a:xfrm>
-            <a:off x="1828800" y="5349240"/>
-            <a:ext cx="2286000" cy="320040"/>
+            <a:off x="1737360" y="4992624"/>
+            <a:ext cx="2286000" cy="292608"/>
           </a:xfrm>
           <a:prstGeom prst="roundRect">
             <a:avLst>
@@ -24096,8 +23822,8 @@
         </p:nvSpPr>
         <p:spPr>
           <a:xfrm>
-            <a:off x="1828800" y="5349240"/>
-            <a:ext cx="2286000" cy="320040"/>
+            <a:off x="1737360" y="4992624"/>
+            <a:ext cx="2286000" cy="292608"/>
           </a:xfrm>
           <a:prstGeom prst="rect">
             <a:avLst/>
@@ -24135,7 +23861,7 @@
         </p:nvSpPr>
         <p:spPr>
           <a:xfrm>
-            <a:off x="1828800" y="5760720"/>
+            <a:off x="1737360" y="5349240"/>
             <a:ext cx="4114800" cy="274320"/>
           </a:xfrm>
           <a:prstGeom prst="rect">
@@ -24174,7 +23900,7 @@
         </p:nvSpPr>
         <p:spPr>
           <a:xfrm>
-            <a:off x="6263640" y="4983480"/>
+            <a:off x="6172200" y="4672583"/>
             <a:ext cx="91440" cy="91440"/>
           </a:xfrm>
           <a:prstGeom prst="roundRect">
@@ -24220,27 +23946,27 @@
         </p:nvSpPr>
         <p:spPr>
           <a:xfrm>
-            <a:off x="6446520" y="4846320"/>
-            <a:ext cx="5166360" cy="365760"/>
-          </a:xfrm>
-          <a:prstGeom prst="rect">
-            <a:avLst/>
-          </a:prstGeom>
-          <a:noFill/>
-        </p:spPr>
-        <p:txBody>
-          <a:bodyPr wrap="square" lIns="0" rIns="0" tIns="0" bIns="0" anchor="t">
-            <a:spAutoFit/>
-          </a:bodyPr>
-          <a:lstStyle/>
-          <a:p>
-            <a:pPr algn="l">
-              <a:lnSpc>
-                <a:spcPct val="130000"/>
-              </a:lnSpc>
-            </a:pPr>
-            <a:r>
-              <a:rPr sz="1200" b="0" i="0">
+            <a:off x="6355080" y="4553712"/>
+            <a:ext cx="5257800" cy="347472"/>
+          </a:xfrm>
+          <a:prstGeom prst="rect">
+            <a:avLst/>
+          </a:prstGeom>
+          <a:noFill/>
+        </p:spPr>
+        <p:txBody>
+          <a:bodyPr wrap="square" lIns="0" rIns="0" tIns="0" bIns="0" anchor="t">
+            <a:spAutoFit/>
+          </a:bodyPr>
+          <a:lstStyle/>
+          <a:p>
+            <a:pPr algn="l">
+              <a:lnSpc>
+                <a:spcPct val="125000"/>
+              </a:lnSpc>
+            </a:pPr>
+            <a:r>
+              <a:rPr sz="1100" b="0" i="0">
                 <a:solidFill>
                   <a:srgbClr val="21295C"/>
                 </a:solidFill>
@@ -24259,7 +23985,7 @@
         </p:nvSpPr>
         <p:spPr>
           <a:xfrm>
-            <a:off x="6263640" y="5367528"/>
+            <a:off x="6172200" y="5020055"/>
             <a:ext cx="91440" cy="91440"/>
           </a:xfrm>
           <a:prstGeom prst="roundRect">
@@ -24305,27 +24031,27 @@
         </p:nvSpPr>
         <p:spPr>
           <a:xfrm>
-            <a:off x="6446520" y="5230368"/>
-            <a:ext cx="5166360" cy="365760"/>
-          </a:xfrm>
-          <a:prstGeom prst="rect">
-            <a:avLst/>
-          </a:prstGeom>
-          <a:noFill/>
-        </p:spPr>
-        <p:txBody>
-          <a:bodyPr wrap="square" lIns="0" rIns="0" tIns="0" bIns="0" anchor="t">
-            <a:spAutoFit/>
-          </a:bodyPr>
-          <a:lstStyle/>
-          <a:p>
-            <a:pPr algn="l">
-              <a:lnSpc>
-                <a:spcPct val="130000"/>
-              </a:lnSpc>
-            </a:pPr>
-            <a:r>
-              <a:rPr sz="1200" b="0" i="0">
+            <a:off x="6355080" y="4901183"/>
+            <a:ext cx="5257800" cy="347472"/>
+          </a:xfrm>
+          <a:prstGeom prst="rect">
+            <a:avLst/>
+          </a:prstGeom>
+          <a:noFill/>
+        </p:spPr>
+        <p:txBody>
+          <a:bodyPr wrap="square" lIns="0" rIns="0" tIns="0" bIns="0" anchor="t">
+            <a:spAutoFit/>
+          </a:bodyPr>
+          <a:lstStyle/>
+          <a:p>
+            <a:pPr algn="l">
+              <a:lnSpc>
+                <a:spcPct val="125000"/>
+              </a:lnSpc>
+            </a:pPr>
+            <a:r>
+              <a:rPr sz="1100" b="0" i="0">
                 <a:solidFill>
                   <a:srgbClr val="21295C"/>
                 </a:solidFill>
@@ -24344,7 +24070,7 @@
         </p:nvSpPr>
         <p:spPr>
           <a:xfrm>
-            <a:off x="6263640" y="5751576"/>
+            <a:off x="6172200" y="5367527"/>
             <a:ext cx="91440" cy="91440"/>
           </a:xfrm>
           <a:prstGeom prst="roundRect">
@@ -24390,27 +24116,27 @@
         </p:nvSpPr>
         <p:spPr>
           <a:xfrm>
-            <a:off x="6446520" y="5614416"/>
-            <a:ext cx="5166360" cy="365760"/>
-          </a:xfrm>
-          <a:prstGeom prst="rect">
-            <a:avLst/>
-          </a:prstGeom>
-          <a:noFill/>
-        </p:spPr>
-        <p:txBody>
-          <a:bodyPr wrap="square" lIns="0" rIns="0" tIns="0" bIns="0" anchor="t">
-            <a:spAutoFit/>
-          </a:bodyPr>
-          <a:lstStyle/>
-          <a:p>
-            <a:pPr algn="l">
-              <a:lnSpc>
-                <a:spcPct val="130000"/>
-              </a:lnSpc>
-            </a:pPr>
-            <a:r>
-              <a:rPr sz="1200" b="0" i="0">
+            <a:off x="6355080" y="5248655"/>
+            <a:ext cx="5257800" cy="347472"/>
+          </a:xfrm>
+          <a:prstGeom prst="rect">
+            <a:avLst/>
+          </a:prstGeom>
+          <a:noFill/>
+        </p:spPr>
+        <p:txBody>
+          <a:bodyPr wrap="square" lIns="0" rIns="0" tIns="0" bIns="0" anchor="t">
+            <a:spAutoFit/>
+          </a:bodyPr>
+          <a:lstStyle/>
+          <a:p>
+            <a:pPr algn="l">
+              <a:lnSpc>
+                <a:spcPct val="125000"/>
+              </a:lnSpc>
+            </a:pPr>
+            <a:r>
+              <a:rPr sz="1100" b="0" i="0">
                 <a:solidFill>
                   <a:srgbClr val="21295C"/>
                 </a:solidFill>
@@ -24429,8 +24155,8 @@
         </p:nvSpPr>
         <p:spPr>
           <a:xfrm>
-            <a:off x="502920" y="6263640"/>
-            <a:ext cx="11247120" cy="457200"/>
+            <a:off x="502920" y="5989320"/>
+            <a:ext cx="11247120" cy="411480"/>
           </a:xfrm>
           <a:prstGeom prst="roundRect">
             <a:avLst>
@@ -24477,8 +24203,8 @@
         </p:nvSpPr>
         <p:spPr>
           <a:xfrm>
-            <a:off x="685800" y="6336792"/>
-            <a:ext cx="10881360" cy="310896"/>
+            <a:off x="685800" y="6062472"/>
+            <a:ext cx="10881360" cy="265176"/>
           </a:xfrm>
           <a:prstGeom prst="rect">
             <a:avLst/>
@@ -24497,13 +24223,52 @@
               </a:lnSpc>
             </a:pPr>
             <a:r>
-              <a:rPr sz="1400" b="1" i="0">
+              <a:rPr sz="1300" b="1" i="0">
                 <a:solidFill>
                   <a:srgbClr val="21295C"/>
                 </a:solidFill>
                 <a:latin typeface="Arial"/>
               </a:rPr>
               <a:t>→ Generative AI ≠ rule-based AI. Vendor design changes могут обойти clinical safety design.</a:t>
+            </a:r>
+          </a:p>
+        </p:txBody>
+      </p:sp>
+      <p:sp>
+        <p:nvSpPr>
+          <p:cNvPr id="42" name="TextBox 41"/>
+          <p:cNvSpPr txBox="1"/>
+          <p:nvPr/>
+        </p:nvSpPr>
+        <p:spPr>
+          <a:xfrm>
+            <a:off x="502920" y="6492240"/>
+            <a:ext cx="11247120" cy="228600"/>
+          </a:xfrm>
+          <a:prstGeom prst="rect">
+            <a:avLst/>
+          </a:prstGeom>
+          <a:noFill/>
+        </p:spPr>
+        <p:txBody>
+          <a:bodyPr wrap="square" lIns="0" rIns="0" tIns="0" bIns="0" anchor="t">
+            <a:spAutoFit/>
+          </a:bodyPr>
+          <a:lstStyle/>
+          <a:p>
+            <a:pPr algn="l">
+              <a:lnSpc>
+                <a:spcPct val="115000"/>
+              </a:lnSpc>
+            </a:pPr>
+            <a:r>
+              <a:rPr sz="1000" b="0" i="1">
+                <a:solidFill>
+                  <a:srgbClr val="6B7685"/>
+                </a:solidFill>
+                <a:latin typeface="Arial"/>
+              </a:rPr>
+              <a:t>Точная дата generative switch — начало 2023 (источники не дают строгий месяц).</a:t>
             </a:r>
           </a:p>
         </p:txBody>
@@ -24554,13 +24319,13 @@
               </a:lnSpc>
             </a:pPr>
             <a:r>
-              <a:rPr sz="2400" b="1" i="0">
+              <a:rPr sz="2200" b="1" i="0">
                 <a:solidFill>
                   <a:srgbClr val="21295C"/>
                 </a:solidFill>
                 <a:latin typeface="Arial"/>
               </a:rPr>
-              <a:t>Медицинские данные — target №1 для атакующих.</a:t>
+              <a:t>Medical AI training datasets наследуют data security risk.</a:t>
             </a:r>
           </a:p>
         </p:txBody>
@@ -24599,7 +24364,7 @@
                 </a:solidFill>
                 <a:latin typeface="Arial"/>
               </a:rPr>
-              <a:t>Change Healthcare (Feb 2024): 190M человек, $2.457 млрд recovery cost.</a:t>
+              <a:t>Change Healthcare (Feb 2024): 190M человек, $2.457 млрд recovery cost — medical data target №1.</a:t>
             </a:r>
           </a:p>
         </p:txBody>
@@ -24617,15 +24382,15 @@
           </a:xfrm>
           <a:prstGeom prst="roundRect">
             <a:avLst>
-              <a:gd name="adj" fmla="val 5000"/>
+              <a:gd name="adj" fmla="val 25000"/>
             </a:avLst>
           </a:prstGeom>
           <a:solidFill>
-            <a:srgbClr val="F8EAEA"/>
+            <a:srgbClr val="F4F7FA"/>
           </a:solidFill>
-          <a:ln w="12700">
+          <a:ln w="19050">
             <a:solidFill>
-              <a:srgbClr val="C0392B"/>
+              <a:srgbClr val="1C7293"/>
             </a:solidFill>
           </a:ln>
           <a:effectLst/>
@@ -24682,11 +24447,11 @@
             <a:r>
               <a:rPr sz="1000" b="1" i="0">
                 <a:solidFill>
-                  <a:srgbClr val="C0392B"/>
-                </a:solidFill>
-                <a:latin typeface="Arial"/>
-              </a:rPr>
-              <a:t>BREAKING (BleepingComputer, Feb 2024)</a:t>
+                  <a:srgbClr val="065A82"/>
+                </a:solidFill>
+                <a:latin typeface="Arial"/>
+              </a:rPr>
+              <a:t>BleepingComputer · 21.02.2024</a:t>
             </a:r>
           </a:p>
         </p:txBody>
@@ -25970,7 +25735,7 @@
                 </a:solidFill>
                 <a:latin typeface="Arial"/>
               </a:rPr>
-              <a:t>FDA · EU NB · Росздравнадзор</a:t>
+              <a:t>FDA · EU NB · Росздравнадзор · high oversight role</a:t>
             </a:r>
           </a:p>
         </p:txBody>
@@ -26159,7 +25924,7 @@
                 </a:solidFill>
                 <a:latin typeface="Arial"/>
               </a:rPr>
-              <a:t>AI = подсказка, не decision</a:t>
+              <a:t>AI = подсказка, не decision · high liability</a:t>
             </a:r>
           </a:p>
         </p:txBody>
@@ -26214,7 +25979,7 @@
       </p:sp>
       <p:pic>
         <p:nvPicPr>
-          <p:cNvPr id="15" name="Picture 14" descr="lucide-code-blue.png"/>
+          <p:cNvPr id="15" name="Picture 14" descr="lucide-building-2-blue.png"/>
           <p:cNvPicPr>
             <a:picLocks noChangeAspect="1"/>
           </p:cNvPicPr>
@@ -26270,7 +26035,7 @@
                 </a:solidFill>
                 <a:latin typeface="Arial"/>
               </a:rPr>
-              <a:t>Vendor</a:t>
+              <a:t>Operator</a:t>
             </a:r>
           </a:p>
         </p:txBody>
@@ -26309,7 +26074,7 @@
                 </a:solidFill>
                 <a:latin typeface="Arial"/>
               </a:rPr>
-              <a:t>Model design · safety claims</a:t>
+              <a:t>Vendor selection · training · deployment</a:t>
             </a:r>
           </a:p>
         </p:txBody>
@@ -26348,7 +26113,7 @@
                 </a:solidFill>
                 <a:latin typeface="Arial"/>
               </a:rPr>
-              <a:t>PCCP updates · post-market surveil.</a:t>
+              <a:t>Больница · клиника · ДЗМ · medium control + liability</a:t>
             </a:r>
           </a:p>
         </p:txBody>
@@ -26403,7 +26168,7 @@
       </p:sp>
       <p:pic>
         <p:nvPicPr>
-          <p:cNvPr id="20" name="Picture 19" descr="lucide-building-2-blue.png"/>
+          <p:cNvPr id="20" name="Picture 19" descr="lucide-code-blue.png"/>
           <p:cNvPicPr>
             <a:picLocks noChangeAspect="1"/>
           </p:cNvPicPr>
@@ -26459,7 +26224,7 @@
                 </a:solidFill>
                 <a:latin typeface="Arial"/>
               </a:rPr>
-              <a:t>Operator</a:t>
+              <a:t>Vendor</a:t>
             </a:r>
           </a:p>
         </p:txBody>
@@ -26498,7 +26263,7 @@
                 </a:solidFill>
                 <a:latin typeface="Arial"/>
               </a:rPr>
-              <a:t>Vendor selection · training</a:t>
+              <a:t>Model design · safety claims</a:t>
             </a:r>
           </a:p>
         </p:txBody>
@@ -26537,7 +26302,7 @@
                 </a:solidFill>
                 <a:latin typeface="Arial"/>
               </a:rPr>
-              <a:t>Больница · клиника · ДЗМ</a:t>
+              <a:t>PCCP updates · post-market surveil. · high control</a:t>
             </a:r>
           </a:p>
         </p:txBody>
@@ -27347,46 +27112,7 @@
       </p:sp>
       <p:sp>
         <p:nvSpPr>
-          <p:cNvPr id="16" name="TextBox 15"/>
-          <p:cNvSpPr txBox="1"/>
-          <p:nvPr/>
-        </p:nvSpPr>
-        <p:spPr>
-          <a:xfrm>
-            <a:off x="777240" y="5577840"/>
-            <a:ext cx="3154679" cy="320040"/>
-          </a:xfrm>
-          <a:prstGeom prst="rect">
-            <a:avLst/>
-          </a:prstGeom>
-          <a:noFill/>
-        </p:spPr>
-        <p:txBody>
-          <a:bodyPr wrap="square" lIns="0" rIns="0" tIns="0" bIns="0" anchor="t">
-            <a:spAutoFit/>
-          </a:bodyPr>
-          <a:lstStyle/>
-          <a:p>
-            <a:pPr algn="l">
-              <a:lnSpc>
-                <a:spcPct val="115000"/>
-              </a:lnSpc>
-            </a:pPr>
-            <a:r>
-              <a:rPr sz="1100" b="1" i="1">
-                <a:solidFill>
-                  <a:srgbClr val="065A82"/>
-                </a:solidFill>
-                <a:latin typeface="Arial"/>
-              </a:rPr>
-              <a:t>LO1, LO2</a:t>
-            </a:r>
-          </a:p>
-        </p:txBody>
-      </p:sp>
-      <p:sp>
-        <p:nvSpPr>
-          <p:cNvPr id="17" name="Rounded Rectangle 16"/>
+          <p:cNvPr id="16" name="Rounded Rectangle 15"/>
           <p:cNvSpPr/>
           <p:nvPr/>
         </p:nvSpPr>
@@ -27434,7 +27160,7 @@
       </p:sp>
       <p:pic>
         <p:nvPicPr>
-          <p:cNvPr id="18" name="Picture 17" descr="lucide-flask-conical-blue.png"/>
+          <p:cNvPr id="17" name="Picture 16" descr="lucide-flask-conical-blue.png"/>
           <p:cNvPicPr>
             <a:picLocks noChangeAspect="1"/>
           </p:cNvPicPr>
@@ -27458,7 +27184,7 @@
       </p:pic>
       <p:sp>
         <p:nvSpPr>
-          <p:cNvPr id="19" name="TextBox 18"/>
+          <p:cNvPr id="18" name="TextBox 17"/>
           <p:cNvSpPr txBox="1"/>
           <p:nvPr/>
         </p:nvSpPr>
@@ -27497,7 +27223,7 @@
       </p:sp>
       <p:sp>
         <p:nvSpPr>
-          <p:cNvPr id="20" name="TextBox 19"/>
+          <p:cNvPr id="19" name="TextBox 18"/>
           <p:cNvSpPr txBox="1"/>
           <p:nvPr/>
         </p:nvSpPr>
@@ -27536,7 +27262,7 @@
       </p:sp>
       <p:sp>
         <p:nvSpPr>
-          <p:cNvPr id="21" name="Rounded Rectangle 20"/>
+          <p:cNvPr id="20" name="Rounded Rectangle 19"/>
           <p:cNvSpPr/>
           <p:nvPr/>
         </p:nvSpPr>
@@ -27582,7 +27308,7 @@
       </p:sp>
       <p:sp>
         <p:nvSpPr>
-          <p:cNvPr id="22" name="TextBox 21"/>
+          <p:cNvPr id="21" name="TextBox 20"/>
           <p:cNvSpPr txBox="1"/>
           <p:nvPr/>
         </p:nvSpPr>
@@ -27621,7 +27347,7 @@
       </p:sp>
       <p:sp>
         <p:nvSpPr>
-          <p:cNvPr id="23" name="Rounded Rectangle 22"/>
+          <p:cNvPr id="22" name="Rounded Rectangle 21"/>
           <p:cNvSpPr/>
           <p:nvPr/>
         </p:nvSpPr>
@@ -27667,7 +27393,7 @@
       </p:sp>
       <p:sp>
         <p:nvSpPr>
-          <p:cNvPr id="24" name="TextBox 23"/>
+          <p:cNvPr id="23" name="TextBox 22"/>
           <p:cNvSpPr txBox="1"/>
           <p:nvPr/>
         </p:nvSpPr>
@@ -27706,7 +27432,7 @@
       </p:sp>
       <p:sp>
         <p:nvSpPr>
-          <p:cNvPr id="25" name="Rounded Rectangle 24"/>
+          <p:cNvPr id="24" name="Rounded Rectangle 23"/>
           <p:cNvSpPr/>
           <p:nvPr/>
         </p:nvSpPr>
@@ -27752,7 +27478,7 @@
       </p:sp>
       <p:sp>
         <p:nvSpPr>
-          <p:cNvPr id="26" name="TextBox 25"/>
+          <p:cNvPr id="25" name="TextBox 24"/>
           <p:cNvSpPr txBox="1"/>
           <p:nvPr/>
         </p:nvSpPr>
@@ -27791,7 +27517,7 @@
       </p:sp>
       <p:sp>
         <p:nvSpPr>
-          <p:cNvPr id="27" name="Rounded Rectangle 26"/>
+          <p:cNvPr id="26" name="Rounded Rectangle 25"/>
           <p:cNvSpPr/>
           <p:nvPr/>
         </p:nvSpPr>
@@ -27837,7 +27563,7 @@
       </p:sp>
       <p:sp>
         <p:nvSpPr>
-          <p:cNvPr id="28" name="TextBox 27"/>
+          <p:cNvPr id="27" name="TextBox 26"/>
           <p:cNvSpPr txBox="1"/>
           <p:nvPr/>
         </p:nvSpPr>
@@ -27876,46 +27602,7 @@
       </p:sp>
       <p:sp>
         <p:nvSpPr>
-          <p:cNvPr id="29" name="TextBox 28"/>
-          <p:cNvSpPr txBox="1"/>
-          <p:nvPr/>
-        </p:nvSpPr>
-        <p:spPr>
-          <a:xfrm>
-            <a:off x="4617720" y="5577840"/>
-            <a:ext cx="3154679" cy="320040"/>
-          </a:xfrm>
-          <a:prstGeom prst="rect">
-            <a:avLst/>
-          </a:prstGeom>
-          <a:noFill/>
-        </p:spPr>
-        <p:txBody>
-          <a:bodyPr wrap="square" lIns="0" rIns="0" tIns="0" bIns="0" anchor="t">
-            <a:spAutoFit/>
-          </a:bodyPr>
-          <a:lstStyle/>
-          <a:p>
-            <a:pPr algn="l">
-              <a:lnSpc>
-                <a:spcPct val="115000"/>
-              </a:lnSpc>
-            </a:pPr>
-            <a:r>
-              <a:rPr sz="1100" b="1" i="1">
-                <a:solidFill>
-                  <a:srgbClr val="065A82"/>
-                </a:solidFill>
-                <a:latin typeface="Arial"/>
-              </a:rPr>
-              <a:t>LO2, LO3</a:t>
-            </a:r>
-          </a:p>
-        </p:txBody>
-      </p:sp>
-      <p:sp>
-        <p:nvSpPr>
-          <p:cNvPr id="30" name="Rounded Rectangle 29"/>
+          <p:cNvPr id="28" name="Rounded Rectangle 27"/>
           <p:cNvSpPr/>
           <p:nvPr/>
         </p:nvSpPr>
@@ -27963,7 +27650,7 @@
       </p:sp>
       <p:pic>
         <p:nvPicPr>
-          <p:cNvPr id="31" name="Picture 30" descr="lucide-users-blue.png"/>
+          <p:cNvPr id="29" name="Picture 28" descr="lucide-users-blue.png"/>
           <p:cNvPicPr>
             <a:picLocks noChangeAspect="1"/>
           </p:cNvPicPr>
@@ -27987,7 +27674,7 @@
       </p:pic>
       <p:sp>
         <p:nvSpPr>
-          <p:cNvPr id="32" name="TextBox 31"/>
+          <p:cNvPr id="30" name="TextBox 29"/>
           <p:cNvSpPr txBox="1"/>
           <p:nvPr/>
         </p:nvSpPr>
@@ -28026,7 +27713,7 @@
       </p:sp>
       <p:sp>
         <p:nvSpPr>
-          <p:cNvPr id="33" name="TextBox 32"/>
+          <p:cNvPr id="31" name="TextBox 30"/>
           <p:cNvSpPr txBox="1"/>
           <p:nvPr/>
         </p:nvSpPr>
@@ -28065,7 +27752,7 @@
       </p:sp>
       <p:sp>
         <p:nvSpPr>
-          <p:cNvPr id="34" name="Rounded Rectangle 33"/>
+          <p:cNvPr id="32" name="Rounded Rectangle 31"/>
           <p:cNvSpPr/>
           <p:nvPr/>
         </p:nvSpPr>
@@ -28111,7 +27798,7 @@
       </p:sp>
       <p:sp>
         <p:nvSpPr>
-          <p:cNvPr id="35" name="TextBox 34"/>
+          <p:cNvPr id="33" name="TextBox 32"/>
           <p:cNvSpPr txBox="1"/>
           <p:nvPr/>
         </p:nvSpPr>
@@ -28150,7 +27837,7 @@
       </p:sp>
       <p:sp>
         <p:nvSpPr>
-          <p:cNvPr id="36" name="Rounded Rectangle 35"/>
+          <p:cNvPr id="34" name="Rounded Rectangle 33"/>
           <p:cNvSpPr/>
           <p:nvPr/>
         </p:nvSpPr>
@@ -28196,7 +27883,7 @@
       </p:sp>
       <p:sp>
         <p:nvSpPr>
-          <p:cNvPr id="37" name="TextBox 36"/>
+          <p:cNvPr id="35" name="TextBox 34"/>
           <p:cNvSpPr txBox="1"/>
           <p:nvPr/>
         </p:nvSpPr>
@@ -28235,7 +27922,7 @@
       </p:sp>
       <p:sp>
         <p:nvSpPr>
-          <p:cNvPr id="38" name="Rounded Rectangle 37"/>
+          <p:cNvPr id="36" name="Rounded Rectangle 35"/>
           <p:cNvSpPr/>
           <p:nvPr/>
         </p:nvSpPr>
@@ -28281,7 +27968,7 @@
       </p:sp>
       <p:sp>
         <p:nvSpPr>
-          <p:cNvPr id="39" name="TextBox 38"/>
+          <p:cNvPr id="37" name="TextBox 36"/>
           <p:cNvSpPr txBox="1"/>
           <p:nvPr/>
         </p:nvSpPr>
@@ -28313,14 +28000,14 @@
                 </a:solidFill>
                 <a:latin typeface="Arial"/>
               </a:rPr>
-              <a:t>3 принципа → черновик Lec 9</a:t>
-            </a:r>
-          </a:p>
-        </p:txBody>
-      </p:sp>
-      <p:sp>
-        <p:nvSpPr>
-          <p:cNvPr id="40" name="Rounded Rectangle 39"/>
+              <a:t>3 принципа → черновик следующей лекции</a:t>
+            </a:r>
+          </a:p>
+        </p:txBody>
+      </p:sp>
+      <p:sp>
+        <p:nvSpPr>
+          <p:cNvPr id="38" name="Rounded Rectangle 37"/>
           <p:cNvSpPr/>
           <p:nvPr/>
         </p:nvSpPr>
@@ -28366,7 +28053,7 @@
       </p:sp>
       <p:sp>
         <p:nvSpPr>
-          <p:cNvPr id="41" name="TextBox 40"/>
+          <p:cNvPr id="39" name="TextBox 38"/>
           <p:cNvSpPr txBox="1"/>
           <p:nvPr/>
         </p:nvSpPr>
@@ -28398,53 +28085,14 @@
                 </a:solidFill>
                 <a:latin typeface="Arial"/>
               </a:rPr>
-              <a:t>Personal версия → Lec 14</a:t>
-            </a:r>
-          </a:p>
-        </p:txBody>
-      </p:sp>
-      <p:sp>
-        <p:nvSpPr>
-          <p:cNvPr id="42" name="TextBox 41"/>
-          <p:cNvSpPr txBox="1"/>
-          <p:nvPr/>
-        </p:nvSpPr>
-        <p:spPr>
-          <a:xfrm>
-            <a:off x="8458200" y="5577840"/>
-            <a:ext cx="3154679" cy="320040"/>
-          </a:xfrm>
-          <a:prstGeom prst="rect">
-            <a:avLst/>
-          </a:prstGeom>
-          <a:noFill/>
-        </p:spPr>
-        <p:txBody>
-          <a:bodyPr wrap="square" lIns="0" rIns="0" tIns="0" bIns="0" anchor="t">
-            <a:spAutoFit/>
-          </a:bodyPr>
-          <a:lstStyle/>
-          <a:p>
-            <a:pPr algn="l">
-              <a:lnSpc>
-                <a:spcPct val="115000"/>
-              </a:lnSpc>
-            </a:pPr>
-            <a:r>
-              <a:rPr sz="1100" b="1" i="1">
-                <a:solidFill>
-                  <a:srgbClr val="21295C"/>
-                </a:solidFill>
-                <a:latin typeface="Arial"/>
-              </a:rPr>
-              <a:t>LO3, LO8</a:t>
-            </a:r>
-          </a:p>
-        </p:txBody>
-      </p:sp>
-      <p:sp>
-        <p:nvSpPr>
-          <p:cNvPr id="43" name="Rounded Rectangle 42"/>
+              <a:t>Personal версия → последняя лекция</a:t>
+            </a:r>
+          </a:p>
+        </p:txBody>
+      </p:sp>
+      <p:sp>
+        <p:nvSpPr>
+          <p:cNvPr id="40" name="Rounded Rectangle 39"/>
           <p:cNvSpPr/>
           <p:nvPr/>
         </p:nvSpPr>
@@ -28492,7 +28140,7 @@
       </p:sp>
       <p:sp>
         <p:nvSpPr>
-          <p:cNvPr id="44" name="TextBox 43"/>
+          <p:cNvPr id="41" name="TextBox 40"/>
           <p:cNvSpPr txBox="1"/>
           <p:nvPr/>
         </p:nvSpPr>
@@ -28524,7 +28172,7 @@
                 </a:solidFill>
                 <a:latin typeface="Arial"/>
               </a:rPr>
-              <a:t>→ 3 takeaways = input для черновика чек-листа на Lec 9. Не финальный синтез — input.</a:t>
+              <a:t>→ 3 takeaways = input для черновика чек-листа на следующей лекции. Не финальный синтез — input.</a:t>
             </a:r>
           </a:p>
         </p:txBody>
@@ -28603,317 +28251,72 @@
           </a:p>
         </p:txBody>
       </p:sp>
-      <p:sp>
-        <p:nvSpPr>
-          <p:cNvPr id="3" name="Rounded Rectangle 2"/>
-          <p:cNvSpPr/>
-          <p:nvPr/>
-        </p:nvSpPr>
+      <p:pic>
+        <p:nvPicPr>
+          <p:cNvPr id="3" name="Picture 2" descr="s27-ama-trust-ai.jpg"/>
+          <p:cNvPicPr>
+            <a:picLocks noChangeAspect="1"/>
+          </p:cNvPicPr>
+          <p:nvPr/>
+        </p:nvPicPr>
+        <p:blipFill>
+          <a:blip r:embed="rId2"/>
+          <a:stretch>
+            <a:fillRect/>
+          </a:stretch>
+        </p:blipFill>
         <p:spPr>
           <a:xfrm>
             <a:off x="777240" y="1143000"/>
-            <a:ext cx="4480560" cy="4480559"/>
-          </a:xfrm>
-          <a:prstGeom prst="roundRect">
-            <a:avLst>
-              <a:gd name="adj" fmla="val 5000"/>
-            </a:avLst>
-          </a:prstGeom>
-          <a:solidFill>
-            <a:srgbClr val="21295C"/>
-          </a:solidFill>
-          <a:ln>
-            <a:noFill/>
-          </a:ln>
-          <a:effectLst/>
-        </p:spPr>
-        <p:style>
-          <a:lnRef idx="1">
-            <a:schemeClr val="accent1"/>
-          </a:lnRef>
-          <a:fillRef idx="3">
-            <a:schemeClr val="accent1"/>
-          </a:fillRef>
-          <a:effectRef idx="2">
-            <a:schemeClr val="accent1"/>
-          </a:effectRef>
-          <a:fontRef idx="minor">
-            <a:schemeClr val="lt1"/>
-          </a:fontRef>
-        </p:style>
-        <p:txBody>
-          <a:bodyPr rtlCol="0" anchor="ctr"/>
-          <a:lstStyle/>
-          <a:p>
-            <a:pPr algn="ctr"/>
-          </a:p>
-        </p:txBody>
-      </p:sp>
-      <p:sp>
-        <p:nvSpPr>
-          <p:cNvPr id="4" name="Rounded Rectangle 3"/>
-          <p:cNvSpPr/>
-          <p:nvPr/>
-        </p:nvSpPr>
-        <p:spPr>
-          <a:xfrm>
-            <a:off x="1417320" y="1691640"/>
-            <a:ext cx="640080" cy="640080"/>
-          </a:xfrm>
-          <a:prstGeom prst="roundRect">
-            <a:avLst>
-              <a:gd name="adj" fmla="val 50000"/>
-            </a:avLst>
-          </a:prstGeom>
-          <a:solidFill>
-            <a:srgbClr val="F4F7FA"/>
-          </a:solidFill>
-          <a:ln>
-            <a:noFill/>
-          </a:ln>
-          <a:effectLst/>
-        </p:spPr>
-        <p:style>
-          <a:lnRef idx="1">
-            <a:schemeClr val="accent1"/>
-          </a:lnRef>
-          <a:fillRef idx="3">
-            <a:schemeClr val="accent1"/>
-          </a:fillRef>
-          <a:effectRef idx="2">
-            <a:schemeClr val="accent1"/>
-          </a:effectRef>
-          <a:fontRef idx="minor">
-            <a:schemeClr val="lt1"/>
-          </a:fontRef>
-        </p:style>
-        <p:txBody>
-          <a:bodyPr rtlCol="0" anchor="ctr"/>
-          <a:lstStyle/>
-          <a:p>
-            <a:pPr algn="ctr"/>
+            <a:ext cx="4480560" cy="4297679"/>
+          </a:xfrm>
+          <a:prstGeom prst="rect">
+            <a:avLst/>
+          </a:prstGeom>
+        </p:spPr>
+      </p:pic>
+      <p:sp>
+        <p:nvSpPr>
+          <p:cNvPr id="4" name="TextBox 3"/>
+          <p:cNvSpPr txBox="1"/>
+          <p:nvPr/>
+        </p:nvSpPr>
+        <p:spPr>
+          <a:xfrm>
+            <a:off x="777240" y="5486399"/>
+            <a:ext cx="4480560" cy="320040"/>
+          </a:xfrm>
+          <a:prstGeom prst="rect">
+            <a:avLst/>
+          </a:prstGeom>
+          <a:noFill/>
+        </p:spPr>
+        <p:txBody>
+          <a:bodyPr wrap="square" lIns="0" rIns="0" tIns="0" bIns="0" anchor="t">
+            <a:spAutoFit/>
+          </a:bodyPr>
+          <a:lstStyle/>
+          <a:p>
+            <a:pPr algn="ctr">
+              <a:lnSpc>
+                <a:spcPct val="115000"/>
+              </a:lnSpc>
+            </a:pPr>
+            <a:r>
+              <a:rPr sz="1100" b="0" i="1">
+                <a:solidFill>
+                  <a:srgbClr val="1C7293"/>
+                </a:solidFill>
+                <a:latin typeface="Arial"/>
+              </a:rPr>
+              <a:t>AMA — AI Trust Index, physicians + patients (ama-assn.org)</a:t>
+            </a:r>
           </a:p>
         </p:txBody>
       </p:sp>
       <p:sp>
         <p:nvSpPr>
           <p:cNvPr id="5" name="Rounded Rectangle 4"/>
-          <p:cNvSpPr/>
-          <p:nvPr/>
-        </p:nvSpPr>
-        <p:spPr>
-          <a:xfrm>
-            <a:off x="1234440" y="2423160"/>
-            <a:ext cx="1005840" cy="1463040"/>
-          </a:xfrm>
-          <a:prstGeom prst="roundRect">
-            <a:avLst>
-              <a:gd name="adj" fmla="val 15000"/>
-            </a:avLst>
-          </a:prstGeom>
-          <a:solidFill>
-            <a:srgbClr val="1C7293"/>
-          </a:solidFill>
-          <a:ln>
-            <a:noFill/>
-          </a:ln>
-          <a:effectLst/>
-        </p:spPr>
-        <p:style>
-          <a:lnRef idx="1">
-            <a:schemeClr val="accent1"/>
-          </a:lnRef>
-          <a:fillRef idx="3">
-            <a:schemeClr val="accent1"/>
-          </a:fillRef>
-          <a:effectRef idx="2">
-            <a:schemeClr val="accent1"/>
-          </a:effectRef>
-          <a:fontRef idx="minor">
-            <a:schemeClr val="lt1"/>
-          </a:fontRef>
-        </p:style>
-        <p:txBody>
-          <a:bodyPr rtlCol="0" anchor="ctr"/>
-          <a:lstStyle/>
-          <a:p>
-            <a:pPr algn="ctr"/>
-          </a:p>
-        </p:txBody>
-      </p:sp>
-      <p:sp>
-        <p:nvSpPr>
-          <p:cNvPr id="6" name="Rounded Rectangle 5"/>
-          <p:cNvSpPr/>
-          <p:nvPr/>
-        </p:nvSpPr>
-        <p:spPr>
-          <a:xfrm>
-            <a:off x="3246120" y="1874519"/>
-            <a:ext cx="594360" cy="594360"/>
-          </a:xfrm>
-          <a:prstGeom prst="roundRect">
-            <a:avLst>
-              <a:gd name="adj" fmla="val 50000"/>
-            </a:avLst>
-          </a:prstGeom>
-          <a:solidFill>
-            <a:srgbClr val="FEF5E0"/>
-          </a:solidFill>
-          <a:ln>
-            <a:noFill/>
-          </a:ln>
-          <a:effectLst/>
-        </p:spPr>
-        <p:style>
-          <a:lnRef idx="1">
-            <a:schemeClr val="accent1"/>
-          </a:lnRef>
-          <a:fillRef idx="3">
-            <a:schemeClr val="accent1"/>
-          </a:fillRef>
-          <a:effectRef idx="2">
-            <a:schemeClr val="accent1"/>
-          </a:effectRef>
-          <a:fontRef idx="minor">
-            <a:schemeClr val="lt1"/>
-          </a:fontRef>
-        </p:style>
-        <p:txBody>
-          <a:bodyPr rtlCol="0" anchor="ctr"/>
-          <a:lstStyle/>
-          <a:p>
-            <a:pPr algn="ctr"/>
-          </a:p>
-        </p:txBody>
-      </p:sp>
-      <p:sp>
-        <p:nvSpPr>
-          <p:cNvPr id="7" name="Rounded Rectangle 6"/>
-          <p:cNvSpPr/>
-          <p:nvPr/>
-        </p:nvSpPr>
-        <p:spPr>
-          <a:xfrm>
-            <a:off x="3063239" y="2560320"/>
-            <a:ext cx="914400" cy="1371600"/>
-          </a:xfrm>
-          <a:prstGeom prst="roundRect">
-            <a:avLst>
-              <a:gd name="adj" fmla="val 15000"/>
-            </a:avLst>
-          </a:prstGeom>
-          <a:solidFill>
-            <a:srgbClr val="F0AB00"/>
-          </a:solidFill>
-          <a:ln>
-            <a:noFill/>
-          </a:ln>
-          <a:effectLst/>
-        </p:spPr>
-        <p:style>
-          <a:lnRef idx="1">
-            <a:schemeClr val="accent1"/>
-          </a:lnRef>
-          <a:fillRef idx="3">
-            <a:schemeClr val="accent1"/>
-          </a:fillRef>
-          <a:effectRef idx="2">
-            <a:schemeClr val="accent1"/>
-          </a:effectRef>
-          <a:fontRef idx="minor">
-            <a:schemeClr val="lt1"/>
-          </a:fontRef>
-        </p:style>
-        <p:txBody>
-          <a:bodyPr rtlCol="0" anchor="ctr"/>
-          <a:lstStyle/>
-          <a:p>
-            <a:pPr algn="ctr"/>
-          </a:p>
-        </p:txBody>
-      </p:sp>
-      <p:sp>
-        <p:nvSpPr>
-          <p:cNvPr id="8" name="TextBox 7"/>
-          <p:cNvSpPr txBox="1"/>
-          <p:nvPr/>
-        </p:nvSpPr>
-        <p:spPr>
-          <a:xfrm>
-            <a:off x="777240" y="4343400"/>
-            <a:ext cx="4480560" cy="365760"/>
-          </a:xfrm>
-          <a:prstGeom prst="rect">
-            <a:avLst/>
-          </a:prstGeom>
-          <a:noFill/>
-        </p:spPr>
-        <p:txBody>
-          <a:bodyPr wrap="square" lIns="0" rIns="0" tIns="0" bIns="0" anchor="ctr">
-            <a:spAutoFit/>
-          </a:bodyPr>
-          <a:lstStyle/>
-          <a:p>
-            <a:pPr algn="ctr">
-              <a:lnSpc>
-                <a:spcPct val="115000"/>
-              </a:lnSpc>
-            </a:pPr>
-            <a:r>
-              <a:rPr sz="1400" b="1" i="0">
-                <a:solidFill>
-                  <a:srgbClr val="FFFFFF"/>
-                </a:solidFill>
-                <a:latin typeface="Arial"/>
-              </a:rPr>
-              <a:t>Human stays central</a:t>
-            </a:r>
-          </a:p>
-        </p:txBody>
-      </p:sp>
-      <p:sp>
-        <p:nvSpPr>
-          <p:cNvPr id="9" name="TextBox 8"/>
-          <p:cNvSpPr txBox="1"/>
-          <p:nvPr/>
-        </p:nvSpPr>
-        <p:spPr>
-          <a:xfrm>
-            <a:off x="777240" y="5669279"/>
-            <a:ext cx="4480560" cy="320040"/>
-          </a:xfrm>
-          <a:prstGeom prst="rect">
-            <a:avLst/>
-          </a:prstGeom>
-          <a:noFill/>
-        </p:spPr>
-        <p:txBody>
-          <a:bodyPr wrap="square" lIns="0" rIns="0" tIns="0" bIns="0" anchor="t">
-            <a:spAutoFit/>
-          </a:bodyPr>
-          <a:lstStyle/>
-          <a:p>
-            <a:pPr algn="ctr">
-              <a:lnSpc>
-                <a:spcPct val="115000"/>
-              </a:lnSpc>
-            </a:pPr>
-            <a:r>
-              <a:rPr sz="1100" b="0" i="1">
-                <a:solidFill>
-                  <a:srgbClr val="1C7293"/>
-                </a:solidFill>
-                <a:latin typeface="Arial"/>
-              </a:rPr>
-              <a:t>Врач + пациент: explanation moment (schematic)</a:t>
-            </a:r>
-          </a:p>
-        </p:txBody>
-      </p:sp>
-      <p:sp>
-        <p:nvSpPr>
-          <p:cNvPr id="10" name="Rounded Rectangle 9"/>
           <p:cNvSpPr/>
           <p:nvPr/>
         </p:nvSpPr>
@@ -28961,7 +28364,7 @@
       </p:sp>
       <p:sp>
         <p:nvSpPr>
-          <p:cNvPr id="11" name="TextBox 10"/>
+          <p:cNvPr id="6" name="TextBox 5"/>
           <p:cNvSpPr txBox="1"/>
           <p:nvPr/>
         </p:nvSpPr>
@@ -29073,7 +28476,7 @@
       </p:sp>
       <p:sp>
         <p:nvSpPr>
-          <p:cNvPr id="12" name="TextBox 11"/>
+          <p:cNvPr id="7" name="TextBox 6"/>
           <p:cNvSpPr txBox="1"/>
           <p:nvPr/>
         </p:nvSpPr>
@@ -29112,7 +28515,7 @@
       </p:sp>
       <p:sp>
         <p:nvSpPr>
-          <p:cNvPr id="13" name="TextBox 12"/>
+          <p:cNvPr id="8" name="TextBox 7"/>
           <p:cNvSpPr txBox="1"/>
           <p:nvPr/>
         </p:nvSpPr>
@@ -29201,7 +28604,7 @@
                 </a:solidFill>
                 <a:latin typeface="Arial"/>
               </a:rPr>
-              <a:t>Что дальше: Лекция 6 + черновик чек-листа на Lec 9.</a:t>
+              <a:t>Что дальше: Лекция 6 + черновик чек-листа.</a:t>
             </a:r>
           </a:p>
         </p:txBody>
@@ -29240,7 +28643,7 @@
                 </a:solidFill>
                 <a:latin typeface="Arial"/>
               </a:rPr>
-              <a:t>3 принципа сегодня — input для черновика чек-листа на Лекции 9.</a:t>
+              <a:t>3 принципа сегодня — input для черновика чек-листа на следующей лекции по этике.</a:t>
             </a:r>
           </a:p>
         </p:txBody>
@@ -29253,1241 +28656,12 @@
         </p:nvSpPr>
         <p:spPr>
           <a:xfrm>
-            <a:off x="502920" y="1691640"/>
-            <a:ext cx="769402" cy="457200"/>
+            <a:off x="502920" y="2011680"/>
+            <a:ext cx="5486400" cy="3291840"/>
           </a:xfrm>
           <a:prstGeom prst="roundRect">
             <a:avLst>
-              <a:gd name="adj" fmla="val 30000"/>
-            </a:avLst>
-          </a:prstGeom>
-          <a:solidFill>
-            <a:srgbClr val="065A82"/>
-          </a:solidFill>
-          <a:ln>
-            <a:noFill/>
-          </a:ln>
-          <a:effectLst/>
-        </p:spPr>
-        <p:style>
-          <a:lnRef idx="1">
-            <a:schemeClr val="accent1"/>
-          </a:lnRef>
-          <a:fillRef idx="3">
-            <a:schemeClr val="accent1"/>
-          </a:fillRef>
-          <a:effectRef idx="2">
-            <a:schemeClr val="accent1"/>
-          </a:effectRef>
-          <a:fontRef idx="minor">
-            <a:schemeClr val="lt1"/>
-          </a:fontRef>
-        </p:style>
-        <p:txBody>
-          <a:bodyPr rtlCol="0" anchor="ctr"/>
-          <a:lstStyle/>
-          <a:p>
-            <a:pPr algn="ctr"/>
-          </a:p>
-        </p:txBody>
-      </p:sp>
-      <p:sp>
-        <p:nvSpPr>
-          <p:cNvPr id="5" name="TextBox 4"/>
-          <p:cNvSpPr txBox="1"/>
-          <p:nvPr/>
-        </p:nvSpPr>
-        <p:spPr>
-          <a:xfrm>
-            <a:off x="502920" y="1764792"/>
-            <a:ext cx="769402" cy="310896"/>
-          </a:xfrm>
-          <a:prstGeom prst="rect">
-            <a:avLst/>
-          </a:prstGeom>
-          <a:noFill/>
-        </p:spPr>
-        <p:txBody>
-          <a:bodyPr wrap="square" lIns="0" rIns="0" tIns="0" bIns="0" anchor="ctr">
-            <a:spAutoFit/>
-          </a:bodyPr>
-          <a:lstStyle/>
-          <a:p>
-            <a:pPr algn="ctr">
-              <a:lnSpc>
-                <a:spcPct val="115000"/>
-              </a:lnSpc>
-            </a:pPr>
-            <a:r>
-              <a:rPr sz="1200" b="1" i="0">
-                <a:solidFill>
-                  <a:srgbClr val="FFFFFF"/>
-                </a:solidFill>
-                <a:latin typeface="Arial"/>
-              </a:rPr>
-              <a:t>1</a:t>
-            </a:r>
-          </a:p>
-        </p:txBody>
-      </p:sp>
-      <p:sp>
-        <p:nvSpPr>
-          <p:cNvPr id="6" name="Rounded Rectangle 5"/>
-          <p:cNvSpPr/>
-          <p:nvPr/>
-        </p:nvSpPr>
-        <p:spPr>
-          <a:xfrm>
-            <a:off x="1308898" y="1691640"/>
-            <a:ext cx="769402" cy="457200"/>
-          </a:xfrm>
-          <a:prstGeom prst="roundRect">
-            <a:avLst>
-              <a:gd name="adj" fmla="val 30000"/>
-            </a:avLst>
-          </a:prstGeom>
-          <a:solidFill>
-            <a:srgbClr val="065A82"/>
-          </a:solidFill>
-          <a:ln>
-            <a:noFill/>
-          </a:ln>
-          <a:effectLst/>
-        </p:spPr>
-        <p:style>
-          <a:lnRef idx="1">
-            <a:schemeClr val="accent1"/>
-          </a:lnRef>
-          <a:fillRef idx="3">
-            <a:schemeClr val="accent1"/>
-          </a:fillRef>
-          <a:effectRef idx="2">
-            <a:schemeClr val="accent1"/>
-          </a:effectRef>
-          <a:fontRef idx="minor">
-            <a:schemeClr val="lt1"/>
-          </a:fontRef>
-        </p:style>
-        <p:txBody>
-          <a:bodyPr rtlCol="0" anchor="ctr"/>
-          <a:lstStyle/>
-          <a:p>
-            <a:pPr algn="ctr"/>
-          </a:p>
-        </p:txBody>
-      </p:sp>
-      <p:sp>
-        <p:nvSpPr>
-          <p:cNvPr id="7" name="TextBox 6"/>
-          <p:cNvSpPr txBox="1"/>
-          <p:nvPr/>
-        </p:nvSpPr>
-        <p:spPr>
-          <a:xfrm>
-            <a:off x="1308898" y="1764792"/>
-            <a:ext cx="769402" cy="310896"/>
-          </a:xfrm>
-          <a:prstGeom prst="rect">
-            <a:avLst/>
-          </a:prstGeom>
-          <a:noFill/>
-        </p:spPr>
-        <p:txBody>
-          <a:bodyPr wrap="square" lIns="0" rIns="0" tIns="0" bIns="0" anchor="ctr">
-            <a:spAutoFit/>
-          </a:bodyPr>
-          <a:lstStyle/>
-          <a:p>
-            <a:pPr algn="ctr">
-              <a:lnSpc>
-                <a:spcPct val="115000"/>
-              </a:lnSpc>
-            </a:pPr>
-            <a:r>
-              <a:rPr sz="1200" b="1" i="0">
-                <a:solidFill>
-                  <a:srgbClr val="FFFFFF"/>
-                </a:solidFill>
-                <a:latin typeface="Arial"/>
-              </a:rPr>
-              <a:t>2</a:t>
-            </a:r>
-          </a:p>
-        </p:txBody>
-      </p:sp>
-      <p:sp>
-        <p:nvSpPr>
-          <p:cNvPr id="8" name="Rounded Rectangle 7"/>
-          <p:cNvSpPr/>
-          <p:nvPr/>
-        </p:nvSpPr>
-        <p:spPr>
-          <a:xfrm>
-            <a:off x="2114876" y="1691640"/>
-            <a:ext cx="769402" cy="457200"/>
-          </a:xfrm>
-          <a:prstGeom prst="roundRect">
-            <a:avLst>
-              <a:gd name="adj" fmla="val 30000"/>
-            </a:avLst>
-          </a:prstGeom>
-          <a:solidFill>
-            <a:srgbClr val="065A82"/>
-          </a:solidFill>
-          <a:ln>
-            <a:noFill/>
-          </a:ln>
-          <a:effectLst/>
-        </p:spPr>
-        <p:style>
-          <a:lnRef idx="1">
-            <a:schemeClr val="accent1"/>
-          </a:lnRef>
-          <a:fillRef idx="3">
-            <a:schemeClr val="accent1"/>
-          </a:fillRef>
-          <a:effectRef idx="2">
-            <a:schemeClr val="accent1"/>
-          </a:effectRef>
-          <a:fontRef idx="minor">
-            <a:schemeClr val="lt1"/>
-          </a:fontRef>
-        </p:style>
-        <p:txBody>
-          <a:bodyPr rtlCol="0" anchor="ctr"/>
-          <a:lstStyle/>
-          <a:p>
-            <a:pPr algn="ctr"/>
-          </a:p>
-        </p:txBody>
-      </p:sp>
-      <p:sp>
-        <p:nvSpPr>
-          <p:cNvPr id="9" name="TextBox 8"/>
-          <p:cNvSpPr txBox="1"/>
-          <p:nvPr/>
-        </p:nvSpPr>
-        <p:spPr>
-          <a:xfrm>
-            <a:off x="2114876" y="1764792"/>
-            <a:ext cx="769402" cy="310896"/>
-          </a:xfrm>
-          <a:prstGeom prst="rect">
-            <a:avLst/>
-          </a:prstGeom>
-          <a:noFill/>
-        </p:spPr>
-        <p:txBody>
-          <a:bodyPr wrap="square" lIns="0" rIns="0" tIns="0" bIns="0" anchor="ctr">
-            <a:spAutoFit/>
-          </a:bodyPr>
-          <a:lstStyle/>
-          <a:p>
-            <a:pPr algn="ctr">
-              <a:lnSpc>
-                <a:spcPct val="115000"/>
-              </a:lnSpc>
-            </a:pPr>
-            <a:r>
-              <a:rPr sz="1200" b="1" i="0">
-                <a:solidFill>
-                  <a:srgbClr val="FFFFFF"/>
-                </a:solidFill>
-                <a:latin typeface="Arial"/>
-              </a:rPr>
-              <a:t>3</a:t>
-            </a:r>
-          </a:p>
-        </p:txBody>
-      </p:sp>
-      <p:sp>
-        <p:nvSpPr>
-          <p:cNvPr id="10" name="Rounded Rectangle 9"/>
-          <p:cNvSpPr/>
-          <p:nvPr/>
-        </p:nvSpPr>
-        <p:spPr>
-          <a:xfrm>
-            <a:off x="2920854" y="1691640"/>
-            <a:ext cx="769402" cy="457200"/>
-          </a:xfrm>
-          <a:prstGeom prst="roundRect">
-            <a:avLst>
-              <a:gd name="adj" fmla="val 30000"/>
-            </a:avLst>
-          </a:prstGeom>
-          <a:solidFill>
-            <a:srgbClr val="F0AB00"/>
-          </a:solidFill>
-          <a:ln>
-            <a:noFill/>
-          </a:ln>
-          <a:effectLst/>
-        </p:spPr>
-        <p:style>
-          <a:lnRef idx="1">
-            <a:schemeClr val="accent1"/>
-          </a:lnRef>
-          <a:fillRef idx="3">
-            <a:schemeClr val="accent1"/>
-          </a:fillRef>
-          <a:effectRef idx="2">
-            <a:schemeClr val="accent1"/>
-          </a:effectRef>
-          <a:fontRef idx="minor">
-            <a:schemeClr val="lt1"/>
-          </a:fontRef>
-        </p:style>
-        <p:txBody>
-          <a:bodyPr rtlCol="0" anchor="ctr"/>
-          <a:lstStyle/>
-          <a:p>
-            <a:pPr algn="ctr"/>
-          </a:p>
-        </p:txBody>
-      </p:sp>
-      <p:sp>
-        <p:nvSpPr>
-          <p:cNvPr id="11" name="TextBox 10"/>
-          <p:cNvSpPr txBox="1"/>
-          <p:nvPr/>
-        </p:nvSpPr>
-        <p:spPr>
-          <a:xfrm>
-            <a:off x="2920854" y="1764792"/>
-            <a:ext cx="769402" cy="310896"/>
-          </a:xfrm>
-          <a:prstGeom prst="rect">
-            <a:avLst/>
-          </a:prstGeom>
-          <a:noFill/>
-        </p:spPr>
-        <p:txBody>
-          <a:bodyPr wrap="square" lIns="0" rIns="0" tIns="0" bIns="0" anchor="ctr">
-            <a:spAutoFit/>
-          </a:bodyPr>
-          <a:lstStyle/>
-          <a:p>
-            <a:pPr algn="ctr">
-              <a:lnSpc>
-                <a:spcPct val="115000"/>
-              </a:lnSpc>
-            </a:pPr>
-            <a:r>
-              <a:rPr sz="1200" b="1" i="0">
-                <a:solidFill>
-                  <a:srgbClr val="FFFFFF"/>
-                </a:solidFill>
-                <a:latin typeface="Arial"/>
-              </a:rPr>
-              <a:t>4</a:t>
-            </a:r>
-          </a:p>
-        </p:txBody>
-      </p:sp>
-      <p:sp>
-        <p:nvSpPr>
-          <p:cNvPr id="12" name="Rounded Rectangle 11"/>
-          <p:cNvSpPr/>
-          <p:nvPr/>
-        </p:nvSpPr>
-        <p:spPr>
-          <a:xfrm>
-            <a:off x="3726833" y="1691640"/>
-            <a:ext cx="769402" cy="457200"/>
-          </a:xfrm>
-          <a:prstGeom prst="roundRect">
-            <a:avLst>
-              <a:gd name="adj" fmla="val 30000"/>
-            </a:avLst>
-          </a:prstGeom>
-          <a:solidFill>
-            <a:srgbClr val="E6F2F4"/>
-          </a:solidFill>
-          <a:ln>
-            <a:noFill/>
-          </a:ln>
-          <a:effectLst/>
-        </p:spPr>
-        <p:style>
-          <a:lnRef idx="1">
-            <a:schemeClr val="accent1"/>
-          </a:lnRef>
-          <a:fillRef idx="3">
-            <a:schemeClr val="accent1"/>
-          </a:fillRef>
-          <a:effectRef idx="2">
-            <a:schemeClr val="accent1"/>
-          </a:effectRef>
-          <a:fontRef idx="minor">
-            <a:schemeClr val="lt1"/>
-          </a:fontRef>
-        </p:style>
-        <p:txBody>
-          <a:bodyPr rtlCol="0" anchor="ctr"/>
-          <a:lstStyle/>
-          <a:p>
-            <a:pPr algn="ctr"/>
-          </a:p>
-        </p:txBody>
-      </p:sp>
-      <p:sp>
-        <p:nvSpPr>
-          <p:cNvPr id="13" name="TextBox 12"/>
-          <p:cNvSpPr txBox="1"/>
-          <p:nvPr/>
-        </p:nvSpPr>
-        <p:spPr>
-          <a:xfrm>
-            <a:off x="3726833" y="1764792"/>
-            <a:ext cx="769402" cy="310896"/>
-          </a:xfrm>
-          <a:prstGeom prst="rect">
-            <a:avLst/>
-          </a:prstGeom>
-          <a:noFill/>
-        </p:spPr>
-        <p:txBody>
-          <a:bodyPr wrap="square" lIns="0" rIns="0" tIns="0" bIns="0" anchor="ctr">
-            <a:spAutoFit/>
-          </a:bodyPr>
-          <a:lstStyle/>
-          <a:p>
-            <a:pPr algn="ctr">
-              <a:lnSpc>
-                <a:spcPct val="115000"/>
-              </a:lnSpc>
-            </a:pPr>
-            <a:r>
-              <a:rPr sz="1200" b="1" i="0">
-                <a:solidFill>
-                  <a:srgbClr val="028090"/>
-                </a:solidFill>
-                <a:latin typeface="Arial"/>
-              </a:rPr>
-              <a:t>К1</a:t>
-            </a:r>
-          </a:p>
-        </p:txBody>
-      </p:sp>
-      <p:sp>
-        <p:nvSpPr>
-          <p:cNvPr id="14" name="Rounded Rectangle 13"/>
-          <p:cNvSpPr/>
-          <p:nvPr/>
-        </p:nvSpPr>
-        <p:spPr>
-          <a:xfrm>
-            <a:off x="4532811" y="1691640"/>
-            <a:ext cx="769402" cy="457200"/>
-          </a:xfrm>
-          <a:prstGeom prst="roundRect">
-            <a:avLst>
-              <a:gd name="adj" fmla="val 30000"/>
-            </a:avLst>
-          </a:prstGeom>
-          <a:solidFill>
-            <a:srgbClr val="E5EAF0"/>
-          </a:solidFill>
-          <a:ln>
-            <a:noFill/>
-          </a:ln>
-          <a:effectLst/>
-        </p:spPr>
-        <p:style>
-          <a:lnRef idx="1">
-            <a:schemeClr val="accent1"/>
-          </a:lnRef>
-          <a:fillRef idx="3">
-            <a:schemeClr val="accent1"/>
-          </a:fillRef>
-          <a:effectRef idx="2">
-            <a:schemeClr val="accent1"/>
-          </a:effectRef>
-          <a:fontRef idx="minor">
-            <a:schemeClr val="lt1"/>
-          </a:fontRef>
-        </p:style>
-        <p:txBody>
-          <a:bodyPr rtlCol="0" anchor="ctr"/>
-          <a:lstStyle/>
-          <a:p>
-            <a:pPr algn="ctr"/>
-          </a:p>
-        </p:txBody>
-      </p:sp>
-      <p:sp>
-        <p:nvSpPr>
-          <p:cNvPr id="15" name="TextBox 14"/>
-          <p:cNvSpPr txBox="1"/>
-          <p:nvPr/>
-        </p:nvSpPr>
-        <p:spPr>
-          <a:xfrm>
-            <a:off x="4532811" y="1764792"/>
-            <a:ext cx="769402" cy="310896"/>
-          </a:xfrm>
-          <a:prstGeom prst="rect">
-            <a:avLst/>
-          </a:prstGeom>
-          <a:noFill/>
-        </p:spPr>
-        <p:txBody>
-          <a:bodyPr wrap="square" lIns="0" rIns="0" tIns="0" bIns="0" anchor="ctr">
-            <a:spAutoFit/>
-          </a:bodyPr>
-          <a:lstStyle/>
-          <a:p>
-            <a:pPr algn="ctr">
-              <a:lnSpc>
-                <a:spcPct val="115000"/>
-              </a:lnSpc>
-            </a:pPr>
-            <a:r>
-              <a:rPr sz="1200" b="1" i="0">
-                <a:solidFill>
-                  <a:srgbClr val="6B7685"/>
-                </a:solidFill>
-                <a:latin typeface="Arial"/>
-              </a:rPr>
-              <a:t>6</a:t>
-            </a:r>
-          </a:p>
-        </p:txBody>
-      </p:sp>
-      <p:sp>
-        <p:nvSpPr>
-          <p:cNvPr id="16" name="Rounded Rectangle 15"/>
-          <p:cNvSpPr/>
-          <p:nvPr/>
-        </p:nvSpPr>
-        <p:spPr>
-          <a:xfrm>
-            <a:off x="5338789" y="1691640"/>
-            <a:ext cx="769402" cy="457200"/>
-          </a:xfrm>
-          <a:prstGeom prst="roundRect">
-            <a:avLst>
-              <a:gd name="adj" fmla="val 30000"/>
-            </a:avLst>
-          </a:prstGeom>
-          <a:solidFill>
-            <a:srgbClr val="E5EAF0"/>
-          </a:solidFill>
-          <a:ln>
-            <a:noFill/>
-          </a:ln>
-          <a:effectLst/>
-        </p:spPr>
-        <p:style>
-          <a:lnRef idx="1">
-            <a:schemeClr val="accent1"/>
-          </a:lnRef>
-          <a:fillRef idx="3">
-            <a:schemeClr val="accent1"/>
-          </a:fillRef>
-          <a:effectRef idx="2">
-            <a:schemeClr val="accent1"/>
-          </a:effectRef>
-          <a:fontRef idx="minor">
-            <a:schemeClr val="lt1"/>
-          </a:fontRef>
-        </p:style>
-        <p:txBody>
-          <a:bodyPr rtlCol="0" anchor="ctr"/>
-          <a:lstStyle/>
-          <a:p>
-            <a:pPr algn="ctr"/>
-          </a:p>
-        </p:txBody>
-      </p:sp>
-      <p:sp>
-        <p:nvSpPr>
-          <p:cNvPr id="17" name="TextBox 16"/>
-          <p:cNvSpPr txBox="1"/>
-          <p:nvPr/>
-        </p:nvSpPr>
-        <p:spPr>
-          <a:xfrm>
-            <a:off x="5338789" y="1764792"/>
-            <a:ext cx="769402" cy="310896"/>
-          </a:xfrm>
-          <a:prstGeom prst="rect">
-            <a:avLst/>
-          </a:prstGeom>
-          <a:noFill/>
-        </p:spPr>
-        <p:txBody>
-          <a:bodyPr wrap="square" lIns="0" rIns="0" tIns="0" bIns="0" anchor="ctr">
-            <a:spAutoFit/>
-          </a:bodyPr>
-          <a:lstStyle/>
-          <a:p>
-            <a:pPr algn="ctr">
-              <a:lnSpc>
-                <a:spcPct val="115000"/>
-              </a:lnSpc>
-            </a:pPr>
-            <a:r>
-              <a:rPr sz="1200" b="1" i="0">
-                <a:solidFill>
-                  <a:srgbClr val="6B7685"/>
-                </a:solidFill>
-                <a:latin typeface="Arial"/>
-              </a:rPr>
-              <a:t>7</a:t>
-            </a:r>
-          </a:p>
-        </p:txBody>
-      </p:sp>
-      <p:sp>
-        <p:nvSpPr>
-          <p:cNvPr id="18" name="Rounded Rectangle 17"/>
-          <p:cNvSpPr/>
-          <p:nvPr/>
-        </p:nvSpPr>
-        <p:spPr>
-          <a:xfrm>
-            <a:off x="6144768" y="1691640"/>
-            <a:ext cx="769402" cy="457200"/>
-          </a:xfrm>
-          <a:prstGeom prst="roundRect">
-            <a:avLst>
-              <a:gd name="adj" fmla="val 30000"/>
-            </a:avLst>
-          </a:prstGeom>
-          <a:solidFill>
-            <a:srgbClr val="E5EAF0"/>
-          </a:solidFill>
-          <a:ln>
-            <a:noFill/>
-          </a:ln>
-          <a:effectLst/>
-        </p:spPr>
-        <p:style>
-          <a:lnRef idx="1">
-            <a:schemeClr val="accent1"/>
-          </a:lnRef>
-          <a:fillRef idx="3">
-            <a:schemeClr val="accent1"/>
-          </a:fillRef>
-          <a:effectRef idx="2">
-            <a:schemeClr val="accent1"/>
-          </a:effectRef>
-          <a:fontRef idx="minor">
-            <a:schemeClr val="lt1"/>
-          </a:fontRef>
-        </p:style>
-        <p:txBody>
-          <a:bodyPr rtlCol="0" anchor="ctr"/>
-          <a:lstStyle/>
-          <a:p>
-            <a:pPr algn="ctr"/>
-          </a:p>
-        </p:txBody>
-      </p:sp>
-      <p:sp>
-        <p:nvSpPr>
-          <p:cNvPr id="19" name="TextBox 18"/>
-          <p:cNvSpPr txBox="1"/>
-          <p:nvPr/>
-        </p:nvSpPr>
-        <p:spPr>
-          <a:xfrm>
-            <a:off x="6144768" y="1764792"/>
-            <a:ext cx="769402" cy="310896"/>
-          </a:xfrm>
-          <a:prstGeom prst="rect">
-            <a:avLst/>
-          </a:prstGeom>
-          <a:noFill/>
-        </p:spPr>
-        <p:txBody>
-          <a:bodyPr wrap="square" lIns="0" rIns="0" tIns="0" bIns="0" anchor="ctr">
-            <a:spAutoFit/>
-          </a:bodyPr>
-          <a:lstStyle/>
-          <a:p>
-            <a:pPr algn="ctr">
-              <a:lnSpc>
-                <a:spcPct val="115000"/>
-              </a:lnSpc>
-            </a:pPr>
-            <a:r>
-              <a:rPr sz="1200" b="1" i="0">
-                <a:solidFill>
-                  <a:srgbClr val="6B7685"/>
-                </a:solidFill>
-                <a:latin typeface="Arial"/>
-              </a:rPr>
-              <a:t>8</a:t>
-            </a:r>
-          </a:p>
-        </p:txBody>
-      </p:sp>
-      <p:sp>
-        <p:nvSpPr>
-          <p:cNvPr id="20" name="Rounded Rectangle 19"/>
-          <p:cNvSpPr/>
-          <p:nvPr/>
-        </p:nvSpPr>
-        <p:spPr>
-          <a:xfrm>
-            <a:off x="6950746" y="1691640"/>
-            <a:ext cx="769402" cy="457200"/>
-          </a:xfrm>
-          <a:prstGeom prst="roundRect">
-            <a:avLst>
-              <a:gd name="adj" fmla="val 30000"/>
-            </a:avLst>
-          </a:prstGeom>
-          <a:solidFill>
-            <a:srgbClr val="E5EAF0"/>
-          </a:solidFill>
-          <a:ln>
-            <a:noFill/>
-          </a:ln>
-          <a:effectLst/>
-        </p:spPr>
-        <p:style>
-          <a:lnRef idx="1">
-            <a:schemeClr val="accent1"/>
-          </a:lnRef>
-          <a:fillRef idx="3">
-            <a:schemeClr val="accent1"/>
-          </a:fillRef>
-          <a:effectRef idx="2">
-            <a:schemeClr val="accent1"/>
-          </a:effectRef>
-          <a:fontRef idx="minor">
-            <a:schemeClr val="lt1"/>
-          </a:fontRef>
-        </p:style>
-        <p:txBody>
-          <a:bodyPr rtlCol="0" anchor="ctr"/>
-          <a:lstStyle/>
-          <a:p>
-            <a:pPr algn="ctr"/>
-          </a:p>
-        </p:txBody>
-      </p:sp>
-      <p:sp>
-        <p:nvSpPr>
-          <p:cNvPr id="21" name="TextBox 20"/>
-          <p:cNvSpPr txBox="1"/>
-          <p:nvPr/>
-        </p:nvSpPr>
-        <p:spPr>
-          <a:xfrm>
-            <a:off x="6950746" y="1764792"/>
-            <a:ext cx="769402" cy="310896"/>
-          </a:xfrm>
-          <a:prstGeom prst="rect">
-            <a:avLst/>
-          </a:prstGeom>
-          <a:noFill/>
-        </p:spPr>
-        <p:txBody>
-          <a:bodyPr wrap="square" lIns="0" rIns="0" tIns="0" bIns="0" anchor="ctr">
-            <a:spAutoFit/>
-          </a:bodyPr>
-          <a:lstStyle/>
-          <a:p>
-            <a:pPr algn="ctr">
-              <a:lnSpc>
-                <a:spcPct val="115000"/>
-              </a:lnSpc>
-            </a:pPr>
-            <a:r>
-              <a:rPr sz="1200" b="1" i="0">
-                <a:solidFill>
-                  <a:srgbClr val="6B7685"/>
-                </a:solidFill>
-                <a:latin typeface="Arial"/>
-              </a:rPr>
-              <a:t>9</a:t>
-            </a:r>
-          </a:p>
-        </p:txBody>
-      </p:sp>
-      <p:sp>
-        <p:nvSpPr>
-          <p:cNvPr id="22" name="Rounded Rectangle 21"/>
-          <p:cNvSpPr/>
-          <p:nvPr/>
-        </p:nvSpPr>
-        <p:spPr>
-          <a:xfrm>
-            <a:off x="7756724" y="1691640"/>
-            <a:ext cx="769402" cy="457200"/>
-          </a:xfrm>
-          <a:prstGeom prst="roundRect">
-            <a:avLst>
-              <a:gd name="adj" fmla="val 30000"/>
-            </a:avLst>
-          </a:prstGeom>
-          <a:solidFill>
-            <a:srgbClr val="E5EAF0"/>
-          </a:solidFill>
-          <a:ln>
-            <a:noFill/>
-          </a:ln>
-          <a:effectLst/>
-        </p:spPr>
-        <p:style>
-          <a:lnRef idx="1">
-            <a:schemeClr val="accent1"/>
-          </a:lnRef>
-          <a:fillRef idx="3">
-            <a:schemeClr val="accent1"/>
-          </a:fillRef>
-          <a:effectRef idx="2">
-            <a:schemeClr val="accent1"/>
-          </a:effectRef>
-          <a:fontRef idx="minor">
-            <a:schemeClr val="lt1"/>
-          </a:fontRef>
-        </p:style>
-        <p:txBody>
-          <a:bodyPr rtlCol="0" anchor="ctr"/>
-          <a:lstStyle/>
-          <a:p>
-            <a:pPr algn="ctr"/>
-          </a:p>
-        </p:txBody>
-      </p:sp>
-      <p:sp>
-        <p:nvSpPr>
-          <p:cNvPr id="23" name="TextBox 22"/>
-          <p:cNvSpPr txBox="1"/>
-          <p:nvPr/>
-        </p:nvSpPr>
-        <p:spPr>
-          <a:xfrm>
-            <a:off x="7756724" y="1764792"/>
-            <a:ext cx="769402" cy="310896"/>
-          </a:xfrm>
-          <a:prstGeom prst="rect">
-            <a:avLst/>
-          </a:prstGeom>
-          <a:noFill/>
-        </p:spPr>
-        <p:txBody>
-          <a:bodyPr wrap="square" lIns="0" rIns="0" tIns="0" bIns="0" anchor="ctr">
-            <a:spAutoFit/>
-          </a:bodyPr>
-          <a:lstStyle/>
-          <a:p>
-            <a:pPr algn="ctr">
-              <a:lnSpc>
-                <a:spcPct val="115000"/>
-              </a:lnSpc>
-            </a:pPr>
-            <a:r>
-              <a:rPr sz="1200" b="1" i="0">
-                <a:solidFill>
-                  <a:srgbClr val="6B7685"/>
-                </a:solidFill>
-                <a:latin typeface="Arial"/>
-              </a:rPr>
-              <a:t>10</a:t>
-            </a:r>
-          </a:p>
-        </p:txBody>
-      </p:sp>
-      <p:sp>
-        <p:nvSpPr>
-          <p:cNvPr id="24" name="Rounded Rectangle 23"/>
-          <p:cNvSpPr/>
-          <p:nvPr/>
-        </p:nvSpPr>
-        <p:spPr>
-          <a:xfrm>
-            <a:off x="8562702" y="1691640"/>
-            <a:ext cx="769402" cy="457200"/>
-          </a:xfrm>
-          <a:prstGeom prst="roundRect">
-            <a:avLst>
-              <a:gd name="adj" fmla="val 30000"/>
-            </a:avLst>
-          </a:prstGeom>
-          <a:solidFill>
-            <a:srgbClr val="E5EAF0"/>
-          </a:solidFill>
-          <a:ln>
-            <a:noFill/>
-          </a:ln>
-          <a:effectLst/>
-        </p:spPr>
-        <p:style>
-          <a:lnRef idx="1">
-            <a:schemeClr val="accent1"/>
-          </a:lnRef>
-          <a:fillRef idx="3">
-            <a:schemeClr val="accent1"/>
-          </a:fillRef>
-          <a:effectRef idx="2">
-            <a:schemeClr val="accent1"/>
-          </a:effectRef>
-          <a:fontRef idx="minor">
-            <a:schemeClr val="lt1"/>
-          </a:fontRef>
-        </p:style>
-        <p:txBody>
-          <a:bodyPr rtlCol="0" anchor="ctr"/>
-          <a:lstStyle/>
-          <a:p>
-            <a:pPr algn="ctr"/>
-          </a:p>
-        </p:txBody>
-      </p:sp>
-      <p:sp>
-        <p:nvSpPr>
-          <p:cNvPr id="25" name="TextBox 24"/>
-          <p:cNvSpPr txBox="1"/>
-          <p:nvPr/>
-        </p:nvSpPr>
-        <p:spPr>
-          <a:xfrm>
-            <a:off x="8562702" y="1764792"/>
-            <a:ext cx="769402" cy="310896"/>
-          </a:xfrm>
-          <a:prstGeom prst="rect">
-            <a:avLst/>
-          </a:prstGeom>
-          <a:noFill/>
-        </p:spPr>
-        <p:txBody>
-          <a:bodyPr wrap="square" lIns="0" rIns="0" tIns="0" bIns="0" anchor="ctr">
-            <a:spAutoFit/>
-          </a:bodyPr>
-          <a:lstStyle/>
-          <a:p>
-            <a:pPr algn="ctr">
-              <a:lnSpc>
-                <a:spcPct val="115000"/>
-              </a:lnSpc>
-            </a:pPr>
-            <a:r>
-              <a:rPr sz="1200" b="1" i="0">
-                <a:solidFill>
-                  <a:srgbClr val="6B7685"/>
-                </a:solidFill>
-                <a:latin typeface="Arial"/>
-              </a:rPr>
-              <a:t>11</a:t>
-            </a:r>
-          </a:p>
-        </p:txBody>
-      </p:sp>
-      <p:sp>
-        <p:nvSpPr>
-          <p:cNvPr id="26" name="Rounded Rectangle 25"/>
-          <p:cNvSpPr/>
-          <p:nvPr/>
-        </p:nvSpPr>
-        <p:spPr>
-          <a:xfrm>
-            <a:off x="9368681" y="1691640"/>
-            <a:ext cx="769402" cy="457200"/>
-          </a:xfrm>
-          <a:prstGeom prst="roundRect">
-            <a:avLst>
-              <a:gd name="adj" fmla="val 30000"/>
-            </a:avLst>
-          </a:prstGeom>
-          <a:solidFill>
-            <a:srgbClr val="E5EAF0"/>
-          </a:solidFill>
-          <a:ln>
-            <a:noFill/>
-          </a:ln>
-          <a:effectLst/>
-        </p:spPr>
-        <p:style>
-          <a:lnRef idx="1">
-            <a:schemeClr val="accent1"/>
-          </a:lnRef>
-          <a:fillRef idx="3">
-            <a:schemeClr val="accent1"/>
-          </a:fillRef>
-          <a:effectRef idx="2">
-            <a:schemeClr val="accent1"/>
-          </a:effectRef>
-          <a:fontRef idx="minor">
-            <a:schemeClr val="lt1"/>
-          </a:fontRef>
-        </p:style>
-        <p:txBody>
-          <a:bodyPr rtlCol="0" anchor="ctr"/>
-          <a:lstStyle/>
-          <a:p>
-            <a:pPr algn="ctr"/>
-          </a:p>
-        </p:txBody>
-      </p:sp>
-      <p:sp>
-        <p:nvSpPr>
-          <p:cNvPr id="27" name="TextBox 26"/>
-          <p:cNvSpPr txBox="1"/>
-          <p:nvPr/>
-        </p:nvSpPr>
-        <p:spPr>
-          <a:xfrm>
-            <a:off x="9368681" y="1764792"/>
-            <a:ext cx="769402" cy="310896"/>
-          </a:xfrm>
-          <a:prstGeom prst="rect">
-            <a:avLst/>
-          </a:prstGeom>
-          <a:noFill/>
-        </p:spPr>
-        <p:txBody>
-          <a:bodyPr wrap="square" lIns="0" rIns="0" tIns="0" bIns="0" anchor="ctr">
-            <a:spAutoFit/>
-          </a:bodyPr>
-          <a:lstStyle/>
-          <a:p>
-            <a:pPr algn="ctr">
-              <a:lnSpc>
-                <a:spcPct val="115000"/>
-              </a:lnSpc>
-            </a:pPr>
-            <a:r>
-              <a:rPr sz="1200" b="1" i="0">
-                <a:solidFill>
-                  <a:srgbClr val="6B7685"/>
-                </a:solidFill>
-                <a:latin typeface="Arial"/>
-              </a:rPr>
-              <a:t>12</a:t>
-            </a:r>
-          </a:p>
-        </p:txBody>
-      </p:sp>
-      <p:sp>
-        <p:nvSpPr>
-          <p:cNvPr id="28" name="Rounded Rectangle 27"/>
-          <p:cNvSpPr/>
-          <p:nvPr/>
-        </p:nvSpPr>
-        <p:spPr>
-          <a:xfrm>
-            <a:off x="10174659" y="1691640"/>
-            <a:ext cx="769402" cy="457200"/>
-          </a:xfrm>
-          <a:prstGeom prst="roundRect">
-            <a:avLst>
-              <a:gd name="adj" fmla="val 30000"/>
-            </a:avLst>
-          </a:prstGeom>
-          <a:solidFill>
-            <a:srgbClr val="E5EAF0"/>
-          </a:solidFill>
-          <a:ln>
-            <a:noFill/>
-          </a:ln>
-          <a:effectLst/>
-        </p:spPr>
-        <p:style>
-          <a:lnRef idx="1">
-            <a:schemeClr val="accent1"/>
-          </a:lnRef>
-          <a:fillRef idx="3">
-            <a:schemeClr val="accent1"/>
-          </a:fillRef>
-          <a:effectRef idx="2">
-            <a:schemeClr val="accent1"/>
-          </a:effectRef>
-          <a:fontRef idx="minor">
-            <a:schemeClr val="lt1"/>
-          </a:fontRef>
-        </p:style>
-        <p:txBody>
-          <a:bodyPr rtlCol="0" anchor="ctr"/>
-          <a:lstStyle/>
-          <a:p>
-            <a:pPr algn="ctr"/>
-          </a:p>
-        </p:txBody>
-      </p:sp>
-      <p:sp>
-        <p:nvSpPr>
-          <p:cNvPr id="29" name="TextBox 28"/>
-          <p:cNvSpPr txBox="1"/>
-          <p:nvPr/>
-        </p:nvSpPr>
-        <p:spPr>
-          <a:xfrm>
-            <a:off x="10174659" y="1764792"/>
-            <a:ext cx="769402" cy="310896"/>
-          </a:xfrm>
-          <a:prstGeom prst="rect">
-            <a:avLst/>
-          </a:prstGeom>
-          <a:noFill/>
-        </p:spPr>
-        <p:txBody>
-          <a:bodyPr wrap="square" lIns="0" rIns="0" tIns="0" bIns="0" anchor="ctr">
-            <a:spAutoFit/>
-          </a:bodyPr>
-          <a:lstStyle/>
-          <a:p>
-            <a:pPr algn="ctr">
-              <a:lnSpc>
-                <a:spcPct val="115000"/>
-              </a:lnSpc>
-            </a:pPr>
-            <a:r>
-              <a:rPr sz="1200" b="1" i="0">
-                <a:solidFill>
-                  <a:srgbClr val="6B7685"/>
-                </a:solidFill>
-                <a:latin typeface="Arial"/>
-              </a:rPr>
-              <a:t>13</a:t>
-            </a:r>
-          </a:p>
-        </p:txBody>
-      </p:sp>
-      <p:sp>
-        <p:nvSpPr>
-          <p:cNvPr id="30" name="Rounded Rectangle 29"/>
-          <p:cNvSpPr/>
-          <p:nvPr/>
-        </p:nvSpPr>
-        <p:spPr>
-          <a:xfrm>
-            <a:off x="10980637" y="1691640"/>
-            <a:ext cx="769402" cy="457200"/>
-          </a:xfrm>
-          <a:prstGeom prst="roundRect">
-            <a:avLst>
-              <a:gd name="adj" fmla="val 30000"/>
-            </a:avLst>
-          </a:prstGeom>
-          <a:solidFill>
-            <a:srgbClr val="E5EAF0"/>
-          </a:solidFill>
-          <a:ln>
-            <a:noFill/>
-          </a:ln>
-          <a:effectLst/>
-        </p:spPr>
-        <p:style>
-          <a:lnRef idx="1">
-            <a:schemeClr val="accent1"/>
-          </a:lnRef>
-          <a:fillRef idx="3">
-            <a:schemeClr val="accent1"/>
-          </a:fillRef>
-          <a:effectRef idx="2">
-            <a:schemeClr val="accent1"/>
-          </a:effectRef>
-          <a:fontRef idx="minor">
-            <a:schemeClr val="lt1"/>
-          </a:fontRef>
-        </p:style>
-        <p:txBody>
-          <a:bodyPr rtlCol="0" anchor="ctr"/>
-          <a:lstStyle/>
-          <a:p>
-            <a:pPr algn="ctr"/>
-          </a:p>
-        </p:txBody>
-      </p:sp>
-      <p:sp>
-        <p:nvSpPr>
-          <p:cNvPr id="31" name="TextBox 30"/>
-          <p:cNvSpPr txBox="1"/>
-          <p:nvPr/>
-        </p:nvSpPr>
-        <p:spPr>
-          <a:xfrm>
-            <a:off x="10980637" y="1764792"/>
-            <a:ext cx="769402" cy="310896"/>
-          </a:xfrm>
-          <a:prstGeom prst="rect">
-            <a:avLst/>
-          </a:prstGeom>
-          <a:noFill/>
-        </p:spPr>
-        <p:txBody>
-          <a:bodyPr wrap="square" lIns="0" rIns="0" tIns="0" bIns="0" anchor="ctr">
-            <a:spAutoFit/>
-          </a:bodyPr>
-          <a:lstStyle/>
-          <a:p>
-            <a:pPr algn="ctr">
-              <a:lnSpc>
-                <a:spcPct val="115000"/>
-              </a:lnSpc>
-            </a:pPr>
-            <a:r>
-              <a:rPr sz="1200" b="1" i="0">
-                <a:solidFill>
-                  <a:srgbClr val="6B7685"/>
-                </a:solidFill>
-                <a:latin typeface="Arial"/>
-              </a:rPr>
-              <a:t>14</a:t>
-            </a:r>
-          </a:p>
-        </p:txBody>
-      </p:sp>
-      <p:sp>
-        <p:nvSpPr>
-          <p:cNvPr id="32" name="TextBox 31"/>
-          <p:cNvSpPr txBox="1"/>
-          <p:nvPr/>
-        </p:nvSpPr>
-        <p:spPr>
-          <a:xfrm>
-            <a:off x="502920" y="2240280"/>
-            <a:ext cx="11247120" cy="320040"/>
-          </a:xfrm>
-          <a:prstGeom prst="rect">
-            <a:avLst/>
-          </a:prstGeom>
-          <a:noFill/>
-        </p:spPr>
-        <p:txBody>
-          <a:bodyPr wrap="square" lIns="0" rIns="0" tIns="0" bIns="0" anchor="t">
-            <a:spAutoFit/>
-          </a:bodyPr>
-          <a:lstStyle/>
-          <a:p>
-            <a:pPr algn="ctr">
-              <a:lnSpc>
-                <a:spcPct val="115000"/>
-              </a:lnSpc>
-            </a:pPr>
-            <a:r>
-              <a:rPr sz="1100" b="0" i="1">
-                <a:solidFill>
-                  <a:srgbClr val="1C7293"/>
-                </a:solidFill>
-                <a:latin typeface="Arial"/>
-              </a:rPr>
-              <a:t>Лекция 4 (сейчас, gold)  ·  Колоквиум 1 (К1)  ·  Лекция 6 (далее)</a:t>
-            </a:r>
-          </a:p>
-        </p:txBody>
-      </p:sp>
-      <p:sp>
-        <p:nvSpPr>
-          <p:cNvPr id="33" name="Rounded Rectangle 32"/>
-          <p:cNvSpPr/>
-          <p:nvPr/>
-        </p:nvSpPr>
-        <p:spPr>
-          <a:xfrm>
-            <a:off x="502920" y="2926080"/>
-            <a:ext cx="5486400" cy="2743200"/>
-          </a:xfrm>
-          <a:prstGeom prst="roundRect">
-            <a:avLst>
-              <a:gd name="adj" fmla="val 11111"/>
+              <a:gd name="adj" fmla="val 9259"/>
             </a:avLst>
           </a:prstGeom>
           <a:solidFill>
@@ -30524,7 +28698,7 @@
       </p:sp>
       <p:pic>
         <p:nvPicPr>
-          <p:cNvPr id="34" name="Picture 33" descr="lucide-tractor-blue.png"/>
+          <p:cNvPr id="5" name="Picture 4" descr="lucide-tractor-blue.png"/>
           <p:cNvPicPr>
             <a:picLocks noChangeAspect="1"/>
           </p:cNvPicPr>
@@ -30538,7 +28712,7 @@
         </p:blipFill>
         <p:spPr>
           <a:xfrm>
-            <a:off x="777240" y="3246120"/>
+            <a:off x="777240" y="2331720"/>
             <a:ext cx="914400" cy="914400"/>
           </a:xfrm>
           <a:prstGeom prst="rect">
@@ -30548,13 +28722,13 @@
       </p:pic>
       <p:sp>
         <p:nvSpPr>
-          <p:cNvPr id="35" name="TextBox 34"/>
-          <p:cNvSpPr txBox="1"/>
-          <p:nvPr/>
-        </p:nvSpPr>
-        <p:spPr>
-          <a:xfrm>
-            <a:off x="1828800" y="3291840"/>
+          <p:cNvPr id="6" name="TextBox 5"/>
+          <p:cNvSpPr txBox="1"/>
+          <p:nvPr/>
+        </p:nvSpPr>
+        <p:spPr>
+          <a:xfrm>
+            <a:off x="1828800" y="2377440"/>
             <a:ext cx="3474720" cy="548640"/>
           </a:xfrm>
           <a:prstGeom prst="rect">
@@ -30587,13 +28761,13 @@
       </p:sp>
       <p:sp>
         <p:nvSpPr>
-          <p:cNvPr id="36" name="TextBox 35"/>
-          <p:cNvSpPr txBox="1"/>
-          <p:nvPr/>
-        </p:nvSpPr>
-        <p:spPr>
-          <a:xfrm>
-            <a:off x="777240" y="4343400"/>
+          <p:cNvPr id="7" name="TextBox 6"/>
+          <p:cNvSpPr txBox="1"/>
+          <p:nvPr/>
+        </p:nvSpPr>
+        <p:spPr>
+          <a:xfrm>
+            <a:off x="777240" y="3429000"/>
             <a:ext cx="5029200" cy="502920"/>
           </a:xfrm>
           <a:prstGeom prst="rect">
@@ -30626,13 +28800,13 @@
       </p:sp>
       <p:sp>
         <p:nvSpPr>
-          <p:cNvPr id="37" name="TextBox 36"/>
-          <p:cNvSpPr txBox="1"/>
-          <p:nvPr/>
-        </p:nvSpPr>
-        <p:spPr>
-          <a:xfrm>
-            <a:off x="777240" y="4800600"/>
+          <p:cNvPr id="8" name="TextBox 7"/>
+          <p:cNvSpPr txBox="1"/>
+          <p:nvPr/>
+        </p:nvSpPr>
+        <p:spPr>
+          <a:xfrm>
+            <a:off x="777240" y="3886200"/>
             <a:ext cx="5029200" cy="457200"/>
           </a:xfrm>
           <a:prstGeom prst="rect">
@@ -30674,13 +28848,13 @@
       </p:sp>
       <p:sp>
         <p:nvSpPr>
-          <p:cNvPr id="38" name="TextBox 37"/>
-          <p:cNvSpPr txBox="1"/>
-          <p:nvPr/>
-        </p:nvSpPr>
-        <p:spPr>
-          <a:xfrm>
-            <a:off x="777240" y="5303520"/>
+          <p:cNvPr id="9" name="TextBox 8"/>
+          <p:cNvSpPr txBox="1"/>
+          <p:nvPr/>
+        </p:nvSpPr>
+        <p:spPr>
+          <a:xfrm>
+            <a:off x="777240" y="4389120"/>
             <a:ext cx="5029200" cy="320040"/>
           </a:xfrm>
           <a:prstGeom prst="rect">
@@ -30713,18 +28887,18 @@
       </p:sp>
       <p:sp>
         <p:nvSpPr>
-          <p:cNvPr id="39" name="Rounded Rectangle 38"/>
+          <p:cNvPr id="10" name="Rounded Rectangle 9"/>
           <p:cNvSpPr/>
           <p:nvPr/>
         </p:nvSpPr>
         <p:spPr>
           <a:xfrm>
-            <a:off x="6263640" y="2926080"/>
-            <a:ext cx="5486400" cy="2743200"/>
+            <a:off x="6263640" y="2011680"/>
+            <a:ext cx="5486400" cy="3291840"/>
           </a:xfrm>
           <a:prstGeom prst="roundRect">
             <a:avLst>
-              <a:gd name="adj" fmla="val 11111"/>
+              <a:gd name="adj" fmla="val 9259"/>
             </a:avLst>
           </a:prstGeom>
           <a:solidFill>
@@ -30761,7 +28935,7 @@
       </p:sp>
       <p:pic>
         <p:nvPicPr>
-          <p:cNvPr id="40" name="Picture 39" descr="lucide-arrow-right-circle-blue.png"/>
+          <p:cNvPr id="11" name="Picture 10" descr="lucide-arrow-right-circle-blue.png"/>
           <p:cNvPicPr>
             <a:picLocks noChangeAspect="1"/>
           </p:cNvPicPr>
@@ -30775,7 +28949,7 @@
         </p:blipFill>
         <p:spPr>
           <a:xfrm>
-            <a:off x="6537959" y="3246120"/>
+            <a:off x="6537959" y="2331720"/>
             <a:ext cx="914400" cy="914400"/>
           </a:xfrm>
           <a:prstGeom prst="rect">
@@ -30785,13 +28959,13 @@
       </p:pic>
       <p:sp>
         <p:nvSpPr>
-          <p:cNvPr id="41" name="TextBox 40"/>
-          <p:cNvSpPr txBox="1"/>
-          <p:nvPr/>
-        </p:nvSpPr>
-        <p:spPr>
-          <a:xfrm>
-            <a:off x="7589519" y="3291840"/>
+          <p:cNvPr id="12" name="TextBox 11"/>
+          <p:cNvSpPr txBox="1"/>
+          <p:nvPr/>
+        </p:nvSpPr>
+        <p:spPr>
+          <a:xfrm>
+            <a:off x="7589519" y="2377440"/>
             <a:ext cx="3977639" cy="548640"/>
           </a:xfrm>
           <a:prstGeom prst="rect">
@@ -30824,13 +28998,13 @@
       </p:sp>
       <p:sp>
         <p:nvSpPr>
-          <p:cNvPr id="42" name="TextBox 41"/>
-          <p:cNvSpPr txBox="1"/>
-          <p:nvPr/>
-        </p:nvSpPr>
-        <p:spPr>
-          <a:xfrm>
-            <a:off x="6537959" y="4297680"/>
+          <p:cNvPr id="13" name="TextBox 12"/>
+          <p:cNvSpPr txBox="1"/>
+          <p:nvPr/>
+        </p:nvSpPr>
+        <p:spPr>
+          <a:xfrm>
+            <a:off x="6537959" y="3383280"/>
             <a:ext cx="5029200" cy="1371600"/>
           </a:xfrm>
           <a:prstGeom prst="rect">
@@ -30865,7 +29039,7 @@
       </p:sp>
       <p:sp>
         <p:nvSpPr>
-          <p:cNvPr id="43" name="Rounded Rectangle 42"/>
+          <p:cNvPr id="14" name="Rounded Rectangle 13"/>
           <p:cNvSpPr/>
           <p:nvPr/>
         </p:nvSpPr>
@@ -30913,7 +29087,7 @@
       </p:sp>
       <p:sp>
         <p:nvSpPr>
-          <p:cNvPr id="44" name="TextBox 43"/>
+          <p:cNvPr id="15" name="TextBox 14"/>
           <p:cNvSpPr txBox="1"/>
           <p:nvPr/>
         </p:nvSpPr>
@@ -30945,7 +29119,7 @@
                 </a:solidFill>
                 <a:latin typeface="Arial"/>
               </a:rPr>
-              <a:t>Опционально: найти 1 case medical AI в news + apply 4-actor framework (s24). Не оценивается; тренировка навыка.</a:t>
+              <a:t>Опционально: найти 1 case medical AI в news + apply 4-actor framework. Не оценивается; тренировка навыка.</a:t>
             </a:r>
           </a:p>
         </p:txBody>
@@ -32619,35 +30793,50 @@
                 </a:solidFill>
                 <a:latin typeface="Arial"/>
               </a:rPr>
-              <a:t>FDA AI/ML-Enabled Medical Devices — cumulative 2015→2025</a:t>
-            </a:r>
-          </a:p>
-        </p:txBody>
-      </p:sp>
-      <p:pic>
-        <p:nvPicPr>
-          <p:cNvPr id="5" name="Picture 4" descr="c1-fda-bar.png"/>
-          <p:cNvPicPr>
-            <a:picLocks noChangeAspect="1"/>
-          </p:cNvPicPr>
-          <p:nvPr/>
-        </p:nvPicPr>
-        <p:blipFill>
-          <a:blip r:embed="rId2"/>
-          <a:stretch>
-            <a:fillRect/>
-          </a:stretch>
-        </p:blipFill>
-        <p:spPr>
-          <a:xfrm>
-            <a:off x="1173480" y="2331720"/>
-            <a:ext cx="5334000" cy="3200400"/>
-          </a:xfrm>
-          <a:prstGeom prst="rect">
-            <a:avLst/>
-          </a:prstGeom>
-        </p:spPr>
-      </p:pic>
+              <a:t>FDA — AI/ML-Enabled Medical Devices</a:t>
+            </a:r>
+          </a:p>
+        </p:txBody>
+      </p:sp>
+      <p:sp>
+        <p:nvSpPr>
+          <p:cNvPr id="5" name="TextBox 4"/>
+          <p:cNvSpPr txBox="1"/>
+          <p:nvPr/>
+        </p:nvSpPr>
+        <p:spPr>
+          <a:xfrm>
+            <a:off x="777240" y="2286000"/>
+            <a:ext cx="6126480" cy="320040"/>
+          </a:xfrm>
+          <a:prstGeom prst="rect">
+            <a:avLst/>
+          </a:prstGeom>
+          <a:noFill/>
+        </p:spPr>
+        <p:txBody>
+          <a:bodyPr wrap="square" lIns="0" rIns="0" tIns="0" bIns="0" anchor="t">
+            <a:spAutoFit/>
+          </a:bodyPr>
+          <a:lstStyle/>
+          <a:p>
+            <a:pPr algn="l">
+              <a:lnSpc>
+                <a:spcPct val="115000"/>
+              </a:lnSpc>
+            </a:pPr>
+            <a:r>
+              <a:rPr sz="1200" b="0" i="1">
+                <a:solidFill>
+                  <a:srgbClr val="1C7293"/>
+                </a:solidFill>
+                <a:latin typeface="Arial"/>
+              </a:rPr>
+              <a:t>cumulative · end-2025</a:t>
+            </a:r>
+          </a:p>
+        </p:txBody>
+      </p:sp>
       <p:sp>
         <p:nvSpPr>
           <p:cNvPr id="6" name="TextBox 5"/>
@@ -32656,8 +30845,8 @@
         </p:nvSpPr>
         <p:spPr>
           <a:xfrm>
-            <a:off x="777240" y="5577840"/>
-            <a:ext cx="6126480" cy="320040"/>
+            <a:off x="777240" y="2788920"/>
+            <a:ext cx="6126480" cy="1828800"/>
           </a:xfrm>
           <a:prstGeom prst="rect">
             <a:avLst/>
@@ -32672,24 +30861,297 @@
           <a:p>
             <a:pPr algn="ctr">
               <a:lnSpc>
+                <a:spcPct val="100000"/>
+              </a:lnSpc>
+            </a:pPr>
+            <a:r>
+              <a:rPr sz="14000" b="1" i="0">
+                <a:solidFill>
+                  <a:srgbClr val="F0AB00"/>
+                </a:solidFill>
+                <a:latin typeface="Arial"/>
+              </a:rPr>
+              <a:t>1 451</a:t>
+            </a:r>
+          </a:p>
+        </p:txBody>
+      </p:sp>
+      <p:sp>
+        <p:nvSpPr>
+          <p:cNvPr id="7" name="TextBox 6"/>
+          <p:cNvSpPr txBox="1"/>
+          <p:nvPr/>
+        </p:nvSpPr>
+        <p:spPr>
+          <a:xfrm>
+            <a:off x="777240" y="4663440"/>
+            <a:ext cx="6126480" cy="365760"/>
+          </a:xfrm>
+          <a:prstGeom prst="rect">
+            <a:avLst/>
+          </a:prstGeom>
+          <a:noFill/>
+        </p:spPr>
+        <p:txBody>
+          <a:bodyPr wrap="square" lIns="0" rIns="0" tIns="0" bIns="0" anchor="t">
+            <a:spAutoFit/>
+          </a:bodyPr>
+          <a:lstStyle/>
+          <a:p>
+            <a:pPr algn="ctr">
+              <a:lnSpc>
                 <a:spcPct val="115000"/>
               </a:lnSpc>
             </a:pPr>
             <a:r>
+              <a:rPr sz="1500" b="0" i="1">
+                <a:solidFill>
+                  <a:srgbClr val="21295C"/>
+                </a:solidFill>
+                <a:latin typeface="Arial"/>
+              </a:rPr>
+              <a:t>одобрено к концу 2025</a:t>
+            </a:r>
+          </a:p>
+        </p:txBody>
+      </p:sp>
+      <p:sp>
+        <p:nvSpPr>
+          <p:cNvPr id="8" name="TextBox 7"/>
+          <p:cNvSpPr txBox="1"/>
+          <p:nvPr/>
+        </p:nvSpPr>
+        <p:spPr>
+          <a:xfrm>
+            <a:off x="777240" y="5212080"/>
+            <a:ext cx="2042160" cy="411480"/>
+          </a:xfrm>
+          <a:prstGeom prst="rect">
+            <a:avLst/>
+          </a:prstGeom>
+          <a:noFill/>
+        </p:spPr>
+        <p:txBody>
+          <a:bodyPr wrap="square" lIns="0" rIns="0" tIns="0" bIns="0" anchor="t">
+            <a:spAutoFit/>
+          </a:bodyPr>
+          <a:lstStyle/>
+          <a:p>
+            <a:pPr algn="ctr">
+              <a:lnSpc>
+                <a:spcPct val="100000"/>
+              </a:lnSpc>
+            </a:pPr>
+            <a:r>
+              <a:rPr sz="2200" b="1" i="0">
+                <a:solidFill>
+                  <a:srgbClr val="065A82"/>
+                </a:solidFill>
+                <a:latin typeface="Arial"/>
+              </a:rPr>
+              <a:t>76%</a:t>
+            </a:r>
+          </a:p>
+        </p:txBody>
+      </p:sp>
+      <p:sp>
+        <p:nvSpPr>
+          <p:cNvPr id="9" name="TextBox 8"/>
+          <p:cNvSpPr txBox="1"/>
+          <p:nvPr/>
+        </p:nvSpPr>
+        <p:spPr>
+          <a:xfrm>
+            <a:off x="777240" y="5623560"/>
+            <a:ext cx="2042160" cy="320040"/>
+          </a:xfrm>
+          <a:prstGeom prst="rect">
+            <a:avLst/>
+          </a:prstGeom>
+          <a:noFill/>
+        </p:spPr>
+        <p:txBody>
+          <a:bodyPr wrap="square" lIns="0" rIns="0" tIns="0" bIns="0" anchor="t">
+            <a:spAutoFit/>
+          </a:bodyPr>
+          <a:lstStyle/>
+          <a:p>
+            <a:pPr algn="ctr">
+              <a:lnSpc>
+                <a:spcPct val="115000"/>
+              </a:lnSpc>
+            </a:pPr>
+            <a:r>
               <a:rPr sz="1100" b="0" i="1">
                 <a:solidFill>
-                  <a:srgbClr val="1C7293"/>
-                </a:solidFill>
-                <a:latin typeface="Arial"/>
-              </a:rPr>
-              <a:t>76% — радиология. FDA AI/ML list, end-2025 (1 451).</a:t>
-            </a:r>
-          </a:p>
-        </p:txBody>
-      </p:sp>
-      <p:sp>
-        <p:nvSpPr>
-          <p:cNvPr id="7" name="Rounded Rectangle 6"/>
+                  <a:srgbClr val="6B7685"/>
+                </a:solidFill>
+                <a:latin typeface="Arial"/>
+              </a:rPr>
+              <a:t>радиология (CV)</a:t>
+            </a:r>
+          </a:p>
+        </p:txBody>
+      </p:sp>
+      <p:sp>
+        <p:nvSpPr>
+          <p:cNvPr id="10" name="TextBox 9"/>
+          <p:cNvSpPr txBox="1"/>
+          <p:nvPr/>
+        </p:nvSpPr>
+        <p:spPr>
+          <a:xfrm>
+            <a:off x="2819400" y="5212080"/>
+            <a:ext cx="2042160" cy="411480"/>
+          </a:xfrm>
+          <a:prstGeom prst="rect">
+            <a:avLst/>
+          </a:prstGeom>
+          <a:noFill/>
+        </p:spPr>
+        <p:txBody>
+          <a:bodyPr wrap="square" lIns="0" rIns="0" tIns="0" bIns="0" anchor="t">
+            <a:spAutoFit/>
+          </a:bodyPr>
+          <a:lstStyle/>
+          <a:p>
+            <a:pPr algn="ctr">
+              <a:lnSpc>
+                <a:spcPct val="100000"/>
+              </a:lnSpc>
+            </a:pPr>
+            <a:r>
+              <a:rPr sz="2200" b="1" i="0">
+                <a:solidFill>
+                  <a:srgbClr val="065A82"/>
+                </a:solidFill>
+                <a:latin typeface="Arial"/>
+              </a:rPr>
+              <a:t>+295</a:t>
+            </a:r>
+          </a:p>
+        </p:txBody>
+      </p:sp>
+      <p:sp>
+        <p:nvSpPr>
+          <p:cNvPr id="11" name="TextBox 10"/>
+          <p:cNvSpPr txBox="1"/>
+          <p:nvPr/>
+        </p:nvSpPr>
+        <p:spPr>
+          <a:xfrm>
+            <a:off x="2819400" y="5623560"/>
+            <a:ext cx="2042160" cy="320040"/>
+          </a:xfrm>
+          <a:prstGeom prst="rect">
+            <a:avLst/>
+          </a:prstGeom>
+          <a:noFill/>
+        </p:spPr>
+        <p:txBody>
+          <a:bodyPr wrap="square" lIns="0" rIns="0" tIns="0" bIns="0" anchor="t">
+            <a:spAutoFit/>
+          </a:bodyPr>
+          <a:lstStyle/>
+          <a:p>
+            <a:pPr algn="ctr">
+              <a:lnSpc>
+                <a:spcPct val="115000"/>
+              </a:lnSpc>
+            </a:pPr>
+            <a:r>
+              <a:rPr sz="1100" b="0" i="1">
+                <a:solidFill>
+                  <a:srgbClr val="6B7685"/>
+                </a:solidFill>
+                <a:latin typeface="Arial"/>
+              </a:rPr>
+              <a:t>новых в 2025</a:t>
+            </a:r>
+          </a:p>
+        </p:txBody>
+      </p:sp>
+      <p:sp>
+        <p:nvSpPr>
+          <p:cNvPr id="12" name="TextBox 11"/>
+          <p:cNvSpPr txBox="1"/>
+          <p:nvPr/>
+        </p:nvSpPr>
+        <p:spPr>
+          <a:xfrm>
+            <a:off x="4861560" y="5212080"/>
+            <a:ext cx="2042160" cy="411480"/>
+          </a:xfrm>
+          <a:prstGeom prst="rect">
+            <a:avLst/>
+          </a:prstGeom>
+          <a:noFill/>
+        </p:spPr>
+        <p:txBody>
+          <a:bodyPr wrap="square" lIns="0" rIns="0" tIns="0" bIns="0" anchor="t">
+            <a:spAutoFit/>
+          </a:bodyPr>
+          <a:lstStyle/>
+          <a:p>
+            <a:pPr algn="ctr">
+              <a:lnSpc>
+                <a:spcPct val="100000"/>
+              </a:lnSpc>
+            </a:pPr>
+            <a:r>
+              <a:rPr sz="2200" b="1" i="0">
+                <a:solidFill>
+                  <a:srgbClr val="065A82"/>
+                </a:solidFill>
+                <a:latin typeface="Arial"/>
+              </a:rPr>
+              <a:t>+258</a:t>
+            </a:r>
+          </a:p>
+        </p:txBody>
+      </p:sp>
+      <p:sp>
+        <p:nvSpPr>
+          <p:cNvPr id="13" name="TextBox 12"/>
+          <p:cNvSpPr txBox="1"/>
+          <p:nvPr/>
+        </p:nvSpPr>
+        <p:spPr>
+          <a:xfrm>
+            <a:off x="4861560" y="5623560"/>
+            <a:ext cx="2042160" cy="320040"/>
+          </a:xfrm>
+          <a:prstGeom prst="rect">
+            <a:avLst/>
+          </a:prstGeom>
+          <a:noFill/>
+        </p:spPr>
+        <p:txBody>
+          <a:bodyPr wrap="square" lIns="0" rIns="0" tIns="0" bIns="0" anchor="t">
+            <a:spAutoFit/>
+          </a:bodyPr>
+          <a:lstStyle/>
+          <a:p>
+            <a:pPr algn="ctr">
+              <a:lnSpc>
+                <a:spcPct val="115000"/>
+              </a:lnSpc>
+            </a:pPr>
+            <a:r>
+              <a:rPr sz="1100" b="0" i="1">
+                <a:solidFill>
+                  <a:srgbClr val="6B7685"/>
+                </a:solidFill>
+                <a:latin typeface="Arial"/>
+              </a:rPr>
+              <a:t>новых в 2024</a:t>
+            </a:r>
+          </a:p>
+        </p:txBody>
+      </p:sp>
+      <p:sp>
+        <p:nvSpPr>
+          <p:cNvPr id="14" name="Rounded Rectangle 13"/>
           <p:cNvSpPr/>
           <p:nvPr/>
         </p:nvSpPr>
@@ -32737,7 +31199,7 @@
       </p:sp>
       <p:sp>
         <p:nvSpPr>
-          <p:cNvPr id="8" name="TextBox 7"/>
+          <p:cNvPr id="15" name="TextBox 14"/>
           <p:cNvSpPr txBox="1"/>
           <p:nvPr/>
         </p:nvSpPr>
@@ -32776,7 +31238,7 @@
       </p:sp>
       <p:sp>
         <p:nvSpPr>
-          <p:cNvPr id="9" name="TextBox 8"/>
+          <p:cNvPr id="16" name="TextBox 15"/>
           <p:cNvSpPr txBox="1"/>
           <p:nvPr/>
         </p:nvSpPr>
@@ -32815,7 +31277,7 @@
       </p:sp>
       <p:sp>
         <p:nvSpPr>
-          <p:cNvPr id="10" name="TextBox 9"/>
+          <p:cNvPr id="17" name="TextBox 16"/>
           <p:cNvSpPr txBox="1"/>
           <p:nvPr/>
         </p:nvSpPr>
@@ -32854,7 +31316,7 @@
       </p:sp>
       <p:sp>
         <p:nvSpPr>
-          <p:cNvPr id="11" name="TextBox 10"/>
+          <p:cNvPr id="18" name="TextBox 17"/>
           <p:cNvSpPr txBox="1"/>
           <p:nvPr/>
         </p:nvSpPr>
@@ -32893,7 +31355,7 @@
       </p:sp>
       <p:sp>
         <p:nvSpPr>
-          <p:cNvPr id="12" name="TextBox 11"/>
+          <p:cNvPr id="19" name="TextBox 18"/>
           <p:cNvSpPr txBox="1"/>
           <p:nvPr/>
         </p:nvSpPr>
@@ -32932,7 +31394,7 @@
       </p:sp>
       <p:sp>
         <p:nvSpPr>
-          <p:cNvPr id="13" name="TextBox 12"/>
+          <p:cNvPr id="20" name="TextBox 19"/>
           <p:cNvSpPr txBox="1"/>
           <p:nvPr/>
         </p:nvSpPr>
@@ -32971,7 +31433,7 @@
       </p:sp>
       <p:sp>
         <p:nvSpPr>
-          <p:cNvPr id="14" name="TextBox 13"/>
+          <p:cNvPr id="21" name="TextBox 20"/>
           <p:cNvSpPr txBox="1"/>
           <p:nvPr/>
         </p:nvSpPr>
@@ -33010,7 +31472,7 @@
       </p:sp>
       <p:sp>
         <p:nvSpPr>
-          <p:cNvPr id="15" name="TextBox 14"/>
+          <p:cNvPr id="22" name="TextBox 21"/>
           <p:cNvSpPr txBox="1"/>
           <p:nvPr/>
         </p:nvSpPr>
@@ -33049,7 +31511,7 @@
       </p:sp>
       <p:sp>
         <p:nvSpPr>
-          <p:cNvPr id="16" name="TextBox 15"/>
+          <p:cNvPr id="23" name="TextBox 22"/>
           <p:cNvSpPr txBox="1"/>
           <p:nvPr/>
         </p:nvSpPr>
@@ -33088,7 +31550,7 @@
       </p:sp>
       <p:sp>
         <p:nvSpPr>
-          <p:cNvPr id="17" name="TextBox 16"/>
+          <p:cNvPr id="24" name="TextBox 23"/>
           <p:cNvSpPr txBox="1"/>
           <p:nvPr/>
         </p:nvSpPr>
@@ -33127,7 +31589,7 @@
       </p:sp>
       <p:sp>
         <p:nvSpPr>
-          <p:cNvPr id="18" name="TextBox 17"/>
+          <p:cNvPr id="25" name="TextBox 24"/>
           <p:cNvSpPr txBox="1"/>
           <p:nvPr/>
         </p:nvSpPr>
@@ -33166,7 +31628,7 @@
       </p:sp>
       <p:sp>
         <p:nvSpPr>
-          <p:cNvPr id="19" name="TextBox 18"/>
+          <p:cNvPr id="26" name="TextBox 25"/>
           <p:cNvSpPr txBox="1"/>
           <p:nvPr/>
         </p:nvSpPr>
@@ -33205,7 +31667,7 @@
       </p:sp>
       <p:sp>
         <p:nvSpPr>
-          <p:cNvPr id="20" name="TextBox 19"/>
+          <p:cNvPr id="27" name="TextBox 26"/>
           <p:cNvSpPr txBox="1"/>
           <p:nvPr/>
         </p:nvSpPr>
@@ -33244,7 +31706,7 @@
       </p:sp>
       <p:sp>
         <p:nvSpPr>
-          <p:cNvPr id="21" name="TextBox 20"/>
+          <p:cNvPr id="28" name="TextBox 27"/>
           <p:cNvSpPr txBox="1"/>
           <p:nvPr/>
         </p:nvSpPr>
@@ -33283,7 +31745,7 @@
       </p:sp>
       <p:sp>
         <p:nvSpPr>
-          <p:cNvPr id="22" name="TextBox 21"/>
+          <p:cNvPr id="29" name="TextBox 28"/>
           <p:cNvSpPr txBox="1"/>
           <p:nvPr/>
         </p:nvSpPr>
@@ -34133,7 +32595,7 @@
       </p:sp>
       <p:pic>
         <p:nvPicPr>
-          <p:cNvPr id="20" name="Picture 19" descr="s05-doctor-workflow.png"/>
+          <p:cNvPr id="20" name="Picture 19" descr="s05-stat-fda-ai.jpg"/>
           <p:cNvPicPr>
             <a:picLocks noChangeAspect="1"/>
           </p:cNvPicPr>
@@ -34147,7 +32609,7 @@
         </p:blipFill>
         <p:spPr>
           <a:xfrm>
-            <a:off x="6858000" y="3794760"/>
+            <a:off x="6858000" y="3749039"/>
             <a:ext cx="4663440" cy="1874519"/>
           </a:xfrm>
           <a:prstGeom prst="rect">
@@ -34163,7 +32625,7 @@
         </p:nvSpPr>
         <p:spPr>
           <a:xfrm>
-            <a:off x="6858000" y="5760720"/>
+            <a:off x="6858000" y="5715000"/>
             <a:ext cx="4663440" cy="320040"/>
           </a:xfrm>
           <a:prstGeom prst="rect">
@@ -34189,7 +32651,7 @@
                 </a:solidFill>
                 <a:latin typeface="Arial"/>
               </a:rPr>
-              <a:t>Врач + AI: типичный workflow 2026 (schematic, CC0-style)</a:t>
+              <a:t>STAT News — AI Prognosis (statnews.com, 13.05.2026)</a:t>
             </a:r>
           </a:p>
         </p:txBody>
@@ -35295,7 +33757,7 @@
                 </a:solidFill>
                 <a:latin typeface="Arial"/>
               </a:rPr>
-              <a:t>Фокус лекции — gold dots: AI-диагностика (s9–s13) + Drug discovery (s15–s17).</a:t>
+              <a:t>Фокус лекции — gold dots: AI-диагностика + Drug discovery.</a:t>
             </a:r>
           </a:p>
         </p:txBody>
@@ -36988,11 +35450,11 @@
             </a:avLst>
           </a:prstGeom>
           <a:solidFill>
-            <a:srgbClr val="F4F7FA"/>
+            <a:srgbClr val="FEF5E0"/>
           </a:solidFill>
           <a:ln w="19050">
             <a:solidFill>
-              <a:srgbClr val="1C7293"/>
+              <a:srgbClr val="F0AB00"/>
             </a:solidFill>
           </a:ln>
           <a:effectLst/>
@@ -37036,7 +35498,7 @@
             </a:avLst>
           </a:prstGeom>
           <a:solidFill>
-            <a:srgbClr val="065A82"/>
+            <a:srgbClr val="F0AB00"/>
           </a:solidFill>
           <a:ln>
             <a:noFill/>
@@ -37095,7 +35557,7 @@
             <a:r>
               <a:rPr sz="1500" b="1" i="0">
                 <a:solidFill>
-                  <a:srgbClr val="FFFFFF"/>
+                  <a:srgbClr val="21295C"/>
                 </a:solidFill>
                 <a:latin typeface="Arial"/>
               </a:rPr>
@@ -37139,8 +35601,8 @@
                 <a:latin typeface="Arial"/>
               </a:rPr>
               <a:t>CNN / ViT
-(pre-trained +
-medical fine-tune)</a:t>
+(не LLM)
+medical fine-tune</a:t>
             </a:r>
           </a:p>
         </p:txBody>
@@ -37254,7 +35716,7 @@
             </a:avLst>
           </a:prstGeom>
           <a:solidFill>
-            <a:srgbClr val="21295C"/>
+            <a:srgbClr val="065A82"/>
           </a:solidFill>
           <a:ln>
             <a:noFill/>
@@ -37358,7 +35820,7 @@
               </a:rPr>
               <a:t>Probability +
 heatmap / bbox
-(Grad-CAM)</a:t>
+(Grad-CAM*)</a:t>
             </a:r>
           </a:p>
         </p:txBody>
@@ -37421,179 +35883,6 @@
           <a:prstGeom prst="roundRect">
             <a:avLst>
               <a:gd name="adj" fmla="val 12820"/>
-            </a:avLst>
-          </a:prstGeom>
-          <a:solidFill>
-            <a:srgbClr val="FEF5E0"/>
-          </a:solidFill>
-          <a:ln w="19050">
-            <a:solidFill>
-              <a:srgbClr val="F0AB00"/>
-            </a:solidFill>
-          </a:ln>
-          <a:effectLst/>
-        </p:spPr>
-        <p:style>
-          <a:lnRef idx="1">
-            <a:schemeClr val="accent1"/>
-          </a:lnRef>
-          <a:fillRef idx="3">
-            <a:schemeClr val="accent1"/>
-          </a:fillRef>
-          <a:effectRef idx="2">
-            <a:schemeClr val="accent1"/>
-          </a:effectRef>
-          <a:fontRef idx="minor">
-            <a:schemeClr val="lt1"/>
-          </a:fontRef>
-        </p:style>
-        <p:txBody>
-          <a:bodyPr rtlCol="0" anchor="ctr"/>
-          <a:lstStyle/>
-          <a:p>
-            <a:pPr algn="ctr"/>
-          </a:p>
-        </p:txBody>
-      </p:sp>
-      <p:sp>
-        <p:nvSpPr>
-          <p:cNvPr id="20" name="Rounded Rectangle 19"/>
-          <p:cNvSpPr/>
-          <p:nvPr/>
-        </p:nvSpPr>
-        <p:spPr>
-          <a:xfrm>
-            <a:off x="9498330" y="2011680"/>
-            <a:ext cx="2068830" cy="502920"/>
-          </a:xfrm>
-          <a:prstGeom prst="roundRect">
-            <a:avLst>
-              <a:gd name="adj" fmla="val 20000"/>
-            </a:avLst>
-          </a:prstGeom>
-          <a:solidFill>
-            <a:srgbClr val="F0AB00"/>
-          </a:solidFill>
-          <a:ln>
-            <a:noFill/>
-          </a:ln>
-          <a:effectLst/>
-        </p:spPr>
-        <p:style>
-          <a:lnRef idx="1">
-            <a:schemeClr val="accent1"/>
-          </a:lnRef>
-          <a:fillRef idx="3">
-            <a:schemeClr val="accent1"/>
-          </a:fillRef>
-          <a:effectRef idx="2">
-            <a:schemeClr val="accent1"/>
-          </a:effectRef>
-          <a:fontRef idx="minor">
-            <a:schemeClr val="lt1"/>
-          </a:fontRef>
-        </p:style>
-        <p:txBody>
-          <a:bodyPr rtlCol="0" anchor="ctr"/>
-          <a:lstStyle/>
-          <a:p>
-            <a:pPr algn="ctr"/>
-          </a:p>
-        </p:txBody>
-      </p:sp>
-      <p:sp>
-        <p:nvSpPr>
-          <p:cNvPr id="21" name="TextBox 20"/>
-          <p:cNvSpPr txBox="1"/>
-          <p:nvPr/>
-        </p:nvSpPr>
-        <p:spPr>
-          <a:xfrm>
-            <a:off x="9498330" y="2011680"/>
-            <a:ext cx="2068830" cy="502920"/>
-          </a:xfrm>
-          <a:prstGeom prst="rect">
-            <a:avLst/>
-          </a:prstGeom>
-          <a:noFill/>
-        </p:spPr>
-        <p:txBody>
-          <a:bodyPr wrap="square" lIns="0" rIns="0" tIns="0" bIns="0" anchor="ctr">
-            <a:spAutoFit/>
-          </a:bodyPr>
-          <a:lstStyle/>
-          <a:p>
-            <a:pPr algn="ctr">
-              <a:lnSpc>
-                <a:spcPct val="115000"/>
-              </a:lnSpc>
-            </a:pPr>
-            <a:r>
-              <a:rPr sz="1500" b="1" i="0">
-                <a:solidFill>
-                  <a:srgbClr val="21295C"/>
-                </a:solidFill>
-                <a:latin typeface="Arial"/>
-              </a:rPr>
-              <a:t>4. Workflow</a:t>
-            </a:r>
-          </a:p>
-        </p:txBody>
-      </p:sp>
-      <p:sp>
-        <p:nvSpPr>
-          <p:cNvPr id="22" name="TextBox 21"/>
-          <p:cNvSpPr txBox="1"/>
-          <p:nvPr/>
-        </p:nvSpPr>
-        <p:spPr>
-          <a:xfrm>
-            <a:off x="9498330" y="2606040"/>
-            <a:ext cx="2068830" cy="1463040"/>
-          </a:xfrm>
-          <a:prstGeom prst="rect">
-            <a:avLst/>
-          </a:prstGeom>
-          <a:noFill/>
-        </p:spPr>
-        <p:txBody>
-          <a:bodyPr wrap="square" lIns="0" rIns="0" tIns="0" bIns="0" anchor="ctr">
-            <a:spAutoFit/>
-          </a:bodyPr>
-          <a:lstStyle/>
-          <a:p>
-            <a:pPr algn="ctr">
-              <a:lnSpc>
-                <a:spcPct val="130000"/>
-              </a:lnSpc>
-            </a:pPr>
-            <a:r>
-              <a:rPr sz="1300" b="0" i="0">
-                <a:solidFill>
-                  <a:srgbClr val="21295C"/>
-                </a:solidFill>
-                <a:latin typeface="Arial"/>
-              </a:rPr>
-              <a:t>Врач: decision
-+ verify + sign</a:t>
-            </a:r>
-          </a:p>
-        </p:txBody>
-      </p:sp>
-      <p:sp>
-        <p:nvSpPr>
-          <p:cNvPr id="23" name="Rounded Rectangle 22"/>
-          <p:cNvSpPr/>
-          <p:nvPr/>
-        </p:nvSpPr>
-        <p:spPr>
-          <a:xfrm>
-            <a:off x="502920" y="4434840"/>
-            <a:ext cx="11247120" cy="2103120"/>
-          </a:xfrm>
-          <a:prstGeom prst="roundRect">
-            <a:avLst>
-              <a:gd name="adj" fmla="val 14492"/>
             </a:avLst>
           </a:prstGeom>
           <a:solidFill>
@@ -37630,6 +35919,179 @@
       </p:sp>
       <p:sp>
         <p:nvSpPr>
+          <p:cNvPr id="20" name="Rounded Rectangle 19"/>
+          <p:cNvSpPr/>
+          <p:nvPr/>
+        </p:nvSpPr>
+        <p:spPr>
+          <a:xfrm>
+            <a:off x="9498330" y="2011680"/>
+            <a:ext cx="2068830" cy="502920"/>
+          </a:xfrm>
+          <a:prstGeom prst="roundRect">
+            <a:avLst>
+              <a:gd name="adj" fmla="val 20000"/>
+            </a:avLst>
+          </a:prstGeom>
+          <a:solidFill>
+            <a:srgbClr val="21295C"/>
+          </a:solidFill>
+          <a:ln>
+            <a:noFill/>
+          </a:ln>
+          <a:effectLst/>
+        </p:spPr>
+        <p:style>
+          <a:lnRef idx="1">
+            <a:schemeClr val="accent1"/>
+          </a:lnRef>
+          <a:fillRef idx="3">
+            <a:schemeClr val="accent1"/>
+          </a:fillRef>
+          <a:effectRef idx="2">
+            <a:schemeClr val="accent1"/>
+          </a:effectRef>
+          <a:fontRef idx="minor">
+            <a:schemeClr val="lt1"/>
+          </a:fontRef>
+        </p:style>
+        <p:txBody>
+          <a:bodyPr rtlCol="0" anchor="ctr"/>
+          <a:lstStyle/>
+          <a:p>
+            <a:pPr algn="ctr"/>
+          </a:p>
+        </p:txBody>
+      </p:sp>
+      <p:sp>
+        <p:nvSpPr>
+          <p:cNvPr id="21" name="TextBox 20"/>
+          <p:cNvSpPr txBox="1"/>
+          <p:nvPr/>
+        </p:nvSpPr>
+        <p:spPr>
+          <a:xfrm>
+            <a:off x="9498330" y="2011680"/>
+            <a:ext cx="2068830" cy="502920"/>
+          </a:xfrm>
+          <a:prstGeom prst="rect">
+            <a:avLst/>
+          </a:prstGeom>
+          <a:noFill/>
+        </p:spPr>
+        <p:txBody>
+          <a:bodyPr wrap="square" lIns="0" rIns="0" tIns="0" bIns="0" anchor="ctr">
+            <a:spAutoFit/>
+          </a:bodyPr>
+          <a:lstStyle/>
+          <a:p>
+            <a:pPr algn="ctr">
+              <a:lnSpc>
+                <a:spcPct val="115000"/>
+              </a:lnSpc>
+            </a:pPr>
+            <a:r>
+              <a:rPr sz="1500" b="1" i="0">
+                <a:solidFill>
+                  <a:srgbClr val="FFFFFF"/>
+                </a:solidFill>
+                <a:latin typeface="Arial"/>
+              </a:rPr>
+              <a:t>4. Workflow</a:t>
+            </a:r>
+          </a:p>
+        </p:txBody>
+      </p:sp>
+      <p:sp>
+        <p:nvSpPr>
+          <p:cNvPr id="22" name="TextBox 21"/>
+          <p:cNvSpPr txBox="1"/>
+          <p:nvPr/>
+        </p:nvSpPr>
+        <p:spPr>
+          <a:xfrm>
+            <a:off x="9498330" y="2606040"/>
+            <a:ext cx="2068830" cy="1463040"/>
+          </a:xfrm>
+          <a:prstGeom prst="rect">
+            <a:avLst/>
+          </a:prstGeom>
+          <a:noFill/>
+        </p:spPr>
+        <p:txBody>
+          <a:bodyPr wrap="square" lIns="0" rIns="0" tIns="0" bIns="0" anchor="ctr">
+            <a:spAutoFit/>
+          </a:bodyPr>
+          <a:lstStyle/>
+          <a:p>
+            <a:pPr algn="ctr">
+              <a:lnSpc>
+                <a:spcPct val="130000"/>
+              </a:lnSpc>
+            </a:pPr>
+            <a:r>
+              <a:rPr sz="1300" b="0" i="0">
+                <a:solidFill>
+                  <a:srgbClr val="21295C"/>
+                </a:solidFill>
+                <a:latin typeface="Arial"/>
+              </a:rPr>
+              <a:t>Врач: decision
++ verify + sign</a:t>
+            </a:r>
+          </a:p>
+        </p:txBody>
+      </p:sp>
+      <p:sp>
+        <p:nvSpPr>
+          <p:cNvPr id="23" name="Rounded Rectangle 22"/>
+          <p:cNvSpPr/>
+          <p:nvPr/>
+        </p:nvSpPr>
+        <p:spPr>
+          <a:xfrm>
+            <a:off x="502920" y="4434840"/>
+            <a:ext cx="11247120" cy="2103120"/>
+          </a:xfrm>
+          <a:prstGeom prst="roundRect">
+            <a:avLst>
+              <a:gd name="adj" fmla="val 14492"/>
+            </a:avLst>
+          </a:prstGeom>
+          <a:solidFill>
+            <a:srgbClr val="F4F7FA"/>
+          </a:solidFill>
+          <a:ln w="19050">
+            <a:solidFill>
+              <a:srgbClr val="1C7293"/>
+            </a:solidFill>
+          </a:ln>
+          <a:effectLst/>
+        </p:spPr>
+        <p:style>
+          <a:lnRef idx="1">
+            <a:schemeClr val="accent1"/>
+          </a:lnRef>
+          <a:fillRef idx="3">
+            <a:schemeClr val="accent1"/>
+          </a:fillRef>
+          <a:effectRef idx="2">
+            <a:schemeClr val="accent1"/>
+          </a:effectRef>
+          <a:fontRef idx="minor">
+            <a:schemeClr val="lt1"/>
+          </a:fontRef>
+        </p:style>
+        <p:txBody>
+          <a:bodyPr rtlCol="0" anchor="ctr"/>
+          <a:lstStyle/>
+          <a:p>
+            <a:pPr algn="ctr"/>
+          </a:p>
+        </p:txBody>
+      </p:sp>
+      <p:sp>
+        <p:nvSpPr>
           <p:cNvPr id="24" name="TextBox 23"/>
           <p:cNvSpPr txBox="1"/>
           <p:nvPr/>
@@ -37725,7 +36187,7 @@
                 </a:solidFill>
                 <a:latin typeface="Arial"/>
               </a:rPr>
-              <a:t>Image → CNN/ViT → probability vector + heatmap. Heatmap = Grad-CAM (Selvaraju 2017): какие пиксели вносили вклад в предсказание. Врач — decision-maker, AI — decision support.</a:t>
+              <a:t>Image → CNN/ViT → probability vector + heatmap. Heatmap = Grad-CAM (визуальная attribution heatmap, Selvaraju 2017): какие пиксели вносили вклад в предсказание. Врач — decision-maker, AI — decision support.</a:t>
             </a:r>
           </a:p>
         </p:txBody>
@@ -37764,7 +36226,7 @@
                 </a:solidFill>
                 <a:latin typeface="Arial"/>
               </a:rPr>
-              <a:t>Rajpurkar et al. arXiv:1711.05225 · Selvaraju et al. arXiv:1610.02391 (Grad-CAM).</a:t>
+              <a:t>*Grad-CAM — визуальная attribution. DenseNet — CNN-архитектура. Rajpurkar arXiv:1711.05225 · Selvaraju arXiv:1610.02391.</a:t>
             </a:r>
           </a:p>
         </p:txBody>

--- a/library/lectures/lec-04/rendered/lec-04.pptx
+++ b/library/lectures/lec-04/rendered/lec-04.pptx
@@ -6074,7 +6074,7 @@
                 </a:solidFill>
                 <a:latin typeface="Arial"/>
               </a:rPr>
-              <a:t>~3 sec inference</a:t>
+              <a:t>~3 сек инференса</a:t>
             </a:r>
             <a:r>
               <a:rPr sz="1500" b="0" i="0">
@@ -6108,7 +6108,7 @@
                 </a:solidFill>
                 <a:latin typeface="Arial"/>
               </a:rPr>
-              <a:t>18 патологий: pneumonia, cardiomegaly, atelectasis…</a:t>
+              <a:t>18 патологий: пневмония, кардиомегалия, ателектаз…</a:t>
             </a:r>
           </a:p>
         </p:txBody>
@@ -6178,7 +6178,7 @@
         <p:spPr>
           <a:xfrm>
             <a:off x="6245352" y="976579"/>
-            <a:ext cx="5431536" cy="3258921"/>
+            <a:ext cx="5431535" cy="3258921"/>
           </a:xfrm>
           <a:prstGeom prst="rect">
             <a:avLst/>
@@ -6219,7 +6219,7 @@
                 </a:solidFill>
                 <a:latin typeface="Arial"/>
               </a:rPr>
-              <a:t>Chester AI · mlmed.org/tools/xray/ · heatmap + 18 классов</a:t>
+              <a:t>Chester AI · mlmed.org/tools/xray/ · тепловая карта + 18 классов</a:t>
             </a:r>
           </a:p>
         </p:txBody>
@@ -6258,7 +6258,7 @@
                 </a:solidFill>
                 <a:latin typeface="Arial"/>
               </a:rPr>
-              <a:t>Cohen et al. 2019 (arXiv:1901.11210) · backup PNG (live demo при наличии интернета)</a:t>
+              <a:t>Cohen et al. 2019 (arXiv:1901.11210) · резервный PNG (живой демо — при наличии интернета)</a:t>
             </a:r>
           </a:p>
         </p:txBody>
@@ -6315,7 +6315,7 @@
                 </a:solidFill>
                 <a:latin typeface="Arial"/>
               </a:rPr>
-              <a:t>Для медицинского AI «accuracy» недостаточна.</a:t>
+              <a:t>Для медицинского AI «точности» (accuracy) недостаточно.</a:t>
             </a:r>
           </a:p>
         </p:txBody>
@@ -6348,13 +6348,13 @@
               </a:lnSpc>
             </a:pPr>
             <a:r>
-              <a:rPr sz="1400" b="0" i="1">
+              <a:rPr sz="1300" b="0" i="1">
                 <a:solidFill>
                   <a:srgbClr val="065A82"/>
                 </a:solidFill>
                 <a:latin typeface="Arial"/>
               </a:rPr>
-              <a:t>Sens · Spec · Prevalence · PPV. Sens/spec не зависят от prevalence; PPV — зависит.</a:t>
+              <a:t>Чувствительность · специфичность · распространённость · PPV. Sens/spec не зависят от prev; PPV — зависит.</a:t>
             </a:r>
           </a:p>
         </p:txBody>
@@ -6441,7 +6441,7 @@
                 </a:solidFill>
                 <a:latin typeface="Arial"/>
               </a:rPr>
-              <a:t>2 × 2 confusion matrix</a:t>
+              <a:t>Матрица ошибок 2 × 2</a:t>
             </a:r>
           </a:p>
         </p:txBody>
@@ -6480,7 +6480,7 @@
                 </a:solidFill>
                 <a:latin typeface="Arial"/>
               </a:rPr>
-              <a:t>AI prediction →</a:t>
+              <a:t>предсказание AI →</a:t>
             </a:r>
           </a:p>
         </p:txBody>
@@ -6519,7 +6519,7 @@
                 </a:solidFill>
                 <a:latin typeface="Arial"/>
               </a:rPr>
-              <a:t>positive</a:t>
+              <a:t>положит.</a:t>
             </a:r>
           </a:p>
         </p:txBody>
@@ -6558,7 +6558,7 @@
                 </a:solidFill>
                 <a:latin typeface="Arial"/>
               </a:rPr>
-              <a:t>negative</a:t>
+              <a:t>отрицат.</a:t>
             </a:r>
           </a:p>
         </p:txBody>
@@ -6597,9 +6597,9 @@
                 </a:solidFill>
                 <a:latin typeface="Arial"/>
               </a:rPr>
-              <a:t>Truth
+              <a:t>истина
 ↓
-sick</a:t>
+болен</a:t>
             </a:r>
           </a:p>
         </p:txBody>
@@ -6638,7 +6638,7 @@
                 </a:solidFill>
                 <a:latin typeface="Arial"/>
               </a:rPr>
-              <a:t>healthy</a:t>
+              <a:t>здоров</a:t>
             </a:r>
           </a:p>
         </p:txBody>
@@ -6762,7 +6762,7 @@
                 </a:solidFill>
                 <a:latin typeface="Arial"/>
               </a:rPr>
-              <a:t>true positive
+              <a:t>истинно-полож.
 правильно нашли</a:t>
             </a:r>
           </a:p>
@@ -6887,7 +6887,7 @@
                 </a:solidFill>
                 <a:latin typeface="Arial"/>
               </a:rPr>
-              <a:t>false negative
+              <a:t>ложно-отрицат.
 пропустили больного</a:t>
             </a:r>
           </a:p>
@@ -7012,7 +7012,7 @@
                 </a:solidFill>
                 <a:latin typeface="Arial"/>
               </a:rPr>
-              <a:t>false positive
+              <a:t>ложно-полож.
 ложная тревога</a:t>
             </a:r>
           </a:p>
@@ -7137,7 +7137,7 @@
                 </a:solidFill>
                 <a:latin typeface="Arial"/>
               </a:rPr>
-              <a:t>true negative
+              <a:t>истинно-отрицат.
 правильно отпустили</a:t>
             </a:r>
           </a:p>
@@ -7239,7 +7239,7 @@
         <p:spPr>
           <a:xfrm>
             <a:off x="6263640" y="2286000"/>
-            <a:ext cx="1554480" cy="365760"/>
+            <a:ext cx="2240280" cy="365760"/>
           </a:xfrm>
           <a:prstGeom prst="rect">
             <a:avLst/>
@@ -7258,13 +7258,13 @@
               </a:lnSpc>
             </a:pPr>
             <a:r>
-              <a:rPr sz="1600" b="1" i="0">
+              <a:rPr sz="1400" b="1" i="0">
                 <a:solidFill>
                   <a:srgbClr val="21295C"/>
                 </a:solidFill>
                 <a:latin typeface="Arial"/>
               </a:rPr>
-              <a:t>Sensitivity</a:t>
+              <a:t>Чувствительность</a:t>
             </a:r>
           </a:p>
         </p:txBody>
@@ -7356,7 +7356,7 @@
         <p:spPr>
           <a:xfrm>
             <a:off x="6263640" y="2999232"/>
-            <a:ext cx="1554480" cy="365760"/>
+            <a:ext cx="2240280" cy="365760"/>
           </a:xfrm>
           <a:prstGeom prst="rect">
             <a:avLst/>
@@ -7375,13 +7375,13 @@
               </a:lnSpc>
             </a:pPr>
             <a:r>
-              <a:rPr sz="1600" b="1" i="0">
+              <a:rPr sz="1400" b="1" i="0">
                 <a:solidFill>
                   <a:srgbClr val="21295C"/>
                 </a:solidFill>
                 <a:latin typeface="Arial"/>
               </a:rPr>
-              <a:t>Specificity</a:t>
+              <a:t>Специфичность</a:t>
             </a:r>
           </a:p>
         </p:txBody>
@@ -7473,7 +7473,7 @@
         <p:spPr>
           <a:xfrm>
             <a:off x="6263640" y="3712464"/>
-            <a:ext cx="1554480" cy="365760"/>
+            <a:ext cx="2240280" cy="365760"/>
           </a:xfrm>
           <a:prstGeom prst="rect">
             <a:avLst/>
@@ -7492,13 +7492,13 @@
               </a:lnSpc>
             </a:pPr>
             <a:r>
-              <a:rPr sz="1600" b="1" i="0">
+              <a:rPr sz="1400" b="1" i="0">
                 <a:solidFill>
                   <a:srgbClr val="21295C"/>
                 </a:solidFill>
                 <a:latin typeface="Arial"/>
               </a:rPr>
-              <a:t>Prevalence</a:t>
+              <a:t>Распространённость</a:t>
             </a:r>
           </a:p>
         </p:txBody>
@@ -7537,7 +7537,7 @@
                 </a:solidFill>
                 <a:latin typeface="Liberation Mono"/>
               </a:rPr>
-              <a:t>(TP+FN) / Total</a:t>
+              <a:t>(TP+FN) / всего</a:t>
             </a:r>
           </a:p>
         </p:txBody>
@@ -7590,7 +7590,7 @@
         <p:spPr>
           <a:xfrm>
             <a:off x="6263640" y="4425696"/>
-            <a:ext cx="1554480" cy="365760"/>
+            <a:ext cx="2240280" cy="365760"/>
           </a:xfrm>
           <a:prstGeom prst="rect">
             <a:avLst/>
@@ -7609,7 +7609,7 @@
               </a:lnSpc>
             </a:pPr>
             <a:r>
-              <a:rPr sz="1600" b="1" i="0">
+              <a:rPr sz="1400" b="1" i="0">
                 <a:solidFill>
                   <a:srgbClr val="F0AB00"/>
                 </a:solidFill>
@@ -7693,7 +7693,7 @@
                 </a:solidFill>
                 <a:latin typeface="Arial"/>
               </a:rPr>
-              <a:t>если AI сказал болен, вер-ть</a:t>
+              <a:t>если AI сказал «болен» — насколько верить</a:t>
             </a:r>
           </a:p>
         </p:txBody>
@@ -7780,7 +7780,7 @@
                 </a:solidFill>
                 <a:latin typeface="Arial"/>
               </a:rPr>
-              <a:t>CheXNet (Rajpurkar 2017): sens 0.94–0.96 · spec 0.89–0.93 (range).  Для PPV math берём sens 0.94 / spec 0.89  →  PPV ~8% при prev 1% (скрининг)  ·  ~78% при prev 30% (госпиталь).</a:t>
+              <a:t>CheXNet (Rajpurkar 2017): чувствительность 0.94–0.96 · специфичность 0.89–0.93 (диапазон). Для расчёта PPV берём sens 0.94 / spec 0.89  →  PPV ~8% при prev 1% (скрининг)  ·  ~78% при prev 30% (госпиталь).</a:t>
             </a:r>
           </a:p>
         </p:txBody>
@@ -7819,7 +7819,7 @@
                 </a:solidFill>
                 <a:latin typeface="Arial"/>
               </a:rPr>
-              <a:t>Та же модель, та же accuracy — разные PPV. Operating point зависит от threshold + патологии.</a:t>
+              <a:t>Та же модель, та же accuracy — разные PPV. Рабочая точка (operating point) зависит от порога + патологии.</a:t>
             </a:r>
           </a:p>
         </p:txBody>
@@ -7876,7 +7876,7 @@
                 </a:solidFill>
                 <a:latin typeface="Arial"/>
               </a:rPr>
-              <a:t>Imaging — AI+врач &gt; врач. Reasoning — augmentation gap.</a:t>
+              <a:t>Визуализация: AI+врач &gt; врач. Рассуждения: парадокс augmentation.</a:t>
             </a:r>
           </a:p>
         </p:txBody>
@@ -7915,7 +7915,7 @@
                 </a:solidFill>
                 <a:latin typeface="Arial"/>
               </a:rPr>
-              <a:t>Вопрос «AI или врач» поставлен неправильно. Правильный — «какая задача и какой workflow».</a:t>
+              <a:t>Вопрос «AI или врач» поставлен неправильно. Правильный — «какая задача и какой рабочий процесс».</a:t>
             </a:r>
           </a:p>
         </p:txBody>
@@ -8016,7 +8016,7 @@
         <p:spPr>
           <a:xfrm>
             <a:off x="685800" y="2011680"/>
-            <a:ext cx="2743200" cy="411480"/>
+            <a:ext cx="2743200" cy="502920"/>
           </a:xfrm>
           <a:prstGeom prst="rect">
             <a:avLst/>
@@ -8041,7 +8041,7 @@
                 </a:solidFill>
                 <a:latin typeface="Arial"/>
               </a:rPr>
-              <a:t>Lancet Digital Health — meta-analysis 14 prospective</a:t>
+              <a:t>Lancet Digital Health — мета-анализ, 14 проспективных</a:t>
             </a:r>
           </a:p>
         </p:txBody>
@@ -8055,7 +8055,7 @@
         <p:spPr>
           <a:xfrm>
             <a:off x="3657600" y="1645919"/>
-            <a:ext cx="2468880" cy="411480"/>
+            <a:ext cx="2468880" cy="274320"/>
           </a:xfrm>
           <a:prstGeom prst="rect">
             <a:avLst/>
@@ -8080,7 +8080,7 @@
                 </a:solidFill>
                 <a:latin typeface="Arial"/>
               </a:rPr>
-              <a:t>Domain</a:t>
+              <a:t>Область</a:t>
             </a:r>
           </a:p>
         </p:txBody>
@@ -8113,13 +8113,13 @@
               </a:lnSpc>
             </a:pPr>
             <a:r>
-              <a:rPr sz="1300" b="0" i="0">
+              <a:rPr sz="1200" b="0" i="0">
                 <a:solidFill>
                   <a:srgbClr val="21295C"/>
                 </a:solidFill>
                 <a:latin typeface="Arial"/>
               </a:rPr>
-              <a:t>Imaging meta-analysis</a:t>
+              <a:t>Мета-анализ по визуализации</a:t>
             </a:r>
           </a:p>
         </p:txBody>
@@ -8158,7 +8158,7 @@
                 </a:solidFill>
                 <a:latin typeface="Arial"/>
               </a:rPr>
-              <a:t>Result</a:t>
+              <a:t>Результат</a:t>
             </a:r>
           </a:p>
         </p:txBody>
@@ -8191,13 +8191,13 @@
               </a:lnSpc>
             </a:pPr>
             <a:r>
-              <a:rPr sz="1300" b="0" i="0">
+              <a:rPr sz="1200" b="0" i="0">
                 <a:solidFill>
                   <a:srgbClr val="21295C"/>
                 </a:solidFill>
                 <a:latin typeface="Arial"/>
               </a:rPr>
-              <a:t>pooled sens AI 0.87  ·  врач 0.85</a:t>
+              <a:t>объединённая чувствительность: AI 0.87  ·  врач 0.85</a:t>
             </a:r>
           </a:p>
         </p:txBody>
@@ -8337,7 +8337,7 @@
         <p:spPr>
           <a:xfrm>
             <a:off x="685800" y="3566159"/>
-            <a:ext cx="2743200" cy="411480"/>
+            <a:ext cx="2743200" cy="502920"/>
           </a:xfrm>
           <a:prstGeom prst="rect">
             <a:avLst/>
@@ -8376,7 +8376,7 @@
         <p:spPr>
           <a:xfrm>
             <a:off x="3657600" y="3200399"/>
-            <a:ext cx="2468880" cy="411480"/>
+            <a:ext cx="2468880" cy="274320"/>
           </a:xfrm>
           <a:prstGeom prst="rect">
             <a:avLst/>
@@ -8401,7 +8401,7 @@
                 </a:solidFill>
                 <a:latin typeface="Arial"/>
               </a:rPr>
-              <a:t>Domain</a:t>
+              <a:t>Область</a:t>
             </a:r>
           </a:p>
         </p:txBody>
@@ -8434,13 +8434,13 @@
               </a:lnSpc>
             </a:pPr>
             <a:r>
-              <a:rPr sz="1300" b="0" i="0">
+              <a:rPr sz="1200" b="0" i="0">
                 <a:solidFill>
                   <a:srgbClr val="21295C"/>
                 </a:solidFill>
                 <a:latin typeface="Arial"/>
               </a:rPr>
-              <a:t>Mammography RCT, n &gt; 100 000 (Sweden)</a:t>
+              <a:t>РКИ маммографии, n &gt; 100 000 (Швеция)</a:t>
             </a:r>
           </a:p>
         </p:txBody>
@@ -8479,7 +8479,7 @@
                 </a:solidFill>
                 <a:latin typeface="Arial"/>
               </a:rPr>
-              <a:t>Result</a:t>
+              <a:t>Результат</a:t>
             </a:r>
           </a:p>
         </p:txBody>
@@ -8512,13 +8512,13 @@
               </a:lnSpc>
             </a:pPr>
             <a:r>
-              <a:rPr sz="1300" b="1" i="0">
+              <a:rPr sz="1200" b="1" i="0">
                 <a:solidFill>
                   <a:srgbClr val="21295C"/>
                 </a:solidFill>
                 <a:latin typeface="Arial"/>
               </a:rPr>
-              <a:t>sens 80.5% (AI) vs 73.8% (стандарт)  ·  workload −44%  ·  interval cancer −12%</a:t>
+              <a:t>чувствит. 80.5% (AI) vs 73.8% (стандарт)  ·  нагрузка −44%  ·  интервальный рак −12%</a:t>
             </a:r>
           </a:p>
         </p:txBody>
@@ -8557,7 +8557,7 @@
                 </a:solidFill>
                 <a:latin typeface="Arial"/>
               </a:rPr>
-              <a:t>→ AI+радиолог → значимо лучше каждого alone</a:t>
+              <a:t>→ AI+радиолог — значимо лучше каждого по отдельности</a:t>
             </a:r>
           </a:p>
         </p:txBody>
@@ -8636,13 +8636,13 @@
               </a:lnSpc>
             </a:pPr>
             <a:r>
-              <a:rPr sz="1800" b="1" i="0">
+              <a:rPr sz="1400" b="1" i="0">
                 <a:solidFill>
                   <a:srgbClr val="FFFFFF"/>
                 </a:solidFill>
                 <a:latin typeface="Arial"/>
               </a:rPr>
-              <a:t>WIN</a:t>
+              <a:t>ПОБЕДА</a:t>
             </a:r>
           </a:p>
         </p:txBody>
@@ -8743,7 +8743,7 @@
         <p:spPr>
           <a:xfrm>
             <a:off x="685800" y="5120640"/>
-            <a:ext cx="2743200" cy="411480"/>
+            <a:ext cx="2743200" cy="502920"/>
           </a:xfrm>
           <a:prstGeom prst="rect">
             <a:avLst/>
@@ -8768,7 +8768,7 @@
                 </a:solidFill>
                 <a:latin typeface="Arial"/>
               </a:rPr>
-              <a:t>JAMA Network Open (Oct 2024)</a:t>
+              <a:t>JAMA Network Open (окт. 2024)</a:t>
             </a:r>
           </a:p>
         </p:txBody>
@@ -8782,7 +8782,7 @@
         <p:spPr>
           <a:xfrm>
             <a:off x="3657600" y="4754880"/>
-            <a:ext cx="2468880" cy="411480"/>
+            <a:ext cx="2468880" cy="274320"/>
           </a:xfrm>
           <a:prstGeom prst="rect">
             <a:avLst/>
@@ -8807,7 +8807,7 @@
                 </a:solidFill>
                 <a:latin typeface="Arial"/>
               </a:rPr>
-              <a:t>Domain</a:t>
+              <a:t>Область</a:t>
             </a:r>
           </a:p>
         </p:txBody>
@@ -8840,13 +8840,13 @@
               </a:lnSpc>
             </a:pPr>
             <a:r>
-              <a:rPr sz="1300" b="0" i="0">
+              <a:rPr sz="1200" b="0" i="0">
                 <a:solidFill>
                   <a:srgbClr val="21295C"/>
                 </a:solidFill>
                 <a:latin typeface="Arial"/>
               </a:rPr>
-              <a:t>Clinical reasoning, 50 врачей</a:t>
+              <a:t>Клинические рассуждения, 50 врачей</a:t>
             </a:r>
           </a:p>
         </p:txBody>
@@ -8885,7 +8885,7 @@
                 </a:solidFill>
                 <a:latin typeface="Arial"/>
               </a:rPr>
-              <a:t>Result</a:t>
+              <a:t>Результат</a:t>
             </a:r>
           </a:p>
         </p:txBody>
@@ -8918,13 +8918,13 @@
               </a:lnSpc>
             </a:pPr>
             <a:r>
-              <a:rPr sz="1300" b="0" i="0">
+              <a:rPr sz="1200" b="0" i="0">
                 <a:solidFill>
                   <a:srgbClr val="21295C"/>
                 </a:solidFill>
                 <a:latin typeface="Arial"/>
               </a:rPr>
-              <a:t>GPT-4 alone 76%  ·  врач+GPT-4 74%  (p = 0.60)</a:t>
+              <a:t>GPT-4 в одиночку 76%  ·  врач+GPT-4 74%  (p = 0.60)</a:t>
             </a:r>
           </a:p>
         </p:txBody>
@@ -8963,7 +8963,7 @@
                 </a:solidFill>
                 <a:latin typeface="Arial"/>
               </a:rPr>
-              <a:t>→ Augmentation gap: AI не helped human reasoning</a:t>
+              <a:t>→ Парадокс augmentation — AI не улучшил рассуждения врача</a:t>
             </a:r>
           </a:p>
         </p:txBody>
@@ -9059,7 +9059,7 @@
                 </a:solidFill>
                 <a:latin typeface="Arial"/>
               </a:rPr>
-              <a:t>mosmed.ai — обещание сбылось в operational форме.</a:t>
+              <a:t>mosmed.ai — обещание сбылось на уровне эксплуатации.</a:t>
             </a:r>
           </a:p>
         </p:txBody>
@@ -9098,7 +9098,7 @@
                 </a:solidFill>
                 <a:latin typeface="Arial"/>
               </a:rPr>
-              <a:t>5 лет production · 14M+ исследований · 74 региона · 70 AI-сервисов.</a:t>
+              <a:t>5 лет в эксплуатации · 14 млн+ исследований · 74 региона · 70 AI-сервисов.</a:t>
             </a:r>
           </a:p>
         </p:txBody>
@@ -9224,7 +9224,7 @@
                 </a:solidFill>
                 <a:latin typeface="Arial"/>
               </a:rPr>
-              <a:t>КТ / МРТ / X-ray</a:t>
+              <a:t>КТ / МРТ / рентген</a:t>
             </a:r>
           </a:p>
         </p:txBody>
@@ -9356,7 +9356,7 @@
                 <a:latin typeface="Arial"/>
               </a:rPr>
               <a:t>mosmed.ai
-cloud</a:t>
+облако</a:t>
             </a:r>
           </a:p>
         </p:txBody>
@@ -9395,7 +9395,7 @@
                 </a:solidFill>
                 <a:latin typeface="Arial"/>
               </a:rPr>
-              <a:t>federated AI-platform</a:t>
+              <a:t>федеративная AI-платформа</a:t>
             </a:r>
           </a:p>
         </p:txBody>
@@ -9565,7 +9565,7 @@
                 </a:solidFill>
                 <a:latin typeface="Arial"/>
               </a:rPr>
-              <a:t>70 services
+              <a:t>70 сервисов
 43 области</a:t>
             </a:r>
           </a:p>
@@ -9697,7 +9697,7 @@
                 </a:solidFill>
                 <a:latin typeface="Arial"/>
               </a:rPr>
-              <a:t>Врач + 2nd opinion</a:t>
+              <a:t>Врач + 2-е мнение</a:t>
             </a:r>
           </a:p>
         </p:txBody>
@@ -9736,8 +9736,8 @@
                 </a:solidFill>
                 <a:latin typeface="Arial"/>
               </a:rPr>
-              <a:t>decision
-+ verify</a:t>
+              <a:t>решение
++ верификация</a:t>
             </a:r>
           </a:p>
         </p:txBody>
@@ -10241,7 +10241,7 @@
                 </a:solidFill>
                 <a:latin typeface="Arial"/>
               </a:rPr>
-              <a:t>изображений processed</a:t>
+              <a:t>обработанных изображений</a:t>
             </a:r>
           </a:p>
         </p:txBody>
@@ -10493,7 +10493,7 @@
                 </a:solidFill>
                 <a:latin typeface="Arial"/>
               </a:rPr>
-              <a:t>нац. стандартов · 300+ datasets</a:t>
+              <a:t>нац. стандартов · 300+ датасетов</a:t>
             </a:r>
           </a:p>
         </p:txBody>
@@ -10532,7 +10532,7 @@
                 </a:solidFill>
                 <a:latin typeface="Arial"/>
               </a:rPr>
-              <a:t>mos.ru AI Leaders Award · Remedium 2025 · Healthcare ME 2026. Federated platform: Сбер AI Lab, Care Mentor AI, Третье Мнение, Webiomed.</a:t>
+              <a:t>mos.ru AI Leaders Award · Remedium 2025 · Healthcare ME 2026. Федеративная платформа: Сбер AI Lab, Care Mentor AI, Третье Мнение, Webiomed.</a:t>
             </a:r>
           </a:p>
         </p:txBody>
@@ -10589,7 +10589,7 @@
                 </a:solidFill>
                 <a:latin typeface="Arial"/>
               </a:rPr>
-              <a:t>Bias = consequence design choices, не bug.</a:t>
+              <a:t>Смещение (bias) = следствие дизайна, а не баг.</a:t>
             </a:r>
           </a:p>
         </p:txBody>
@@ -10628,7 +10628,7 @@
                 </a:solidFill>
                 <a:latin typeface="Arial"/>
               </a:rPr>
-              <a:t>AI хорошо работает в распределении обучения. Outside — может проваливаться unfairly.</a:t>
+              <a:t>AI хорошо работает в распределении обучения. За его пределами — может проваливаться несправедливо.</a:t>
             </a:r>
           </a:p>
         </p:txBody>
@@ -10739,7 +10739,7 @@
                 </a:solidFill>
                 <a:latin typeface="Arial"/>
               </a:rPr>
-              <a:t>Dermatology — skin tone</a:t>
+              <a:t>Дерматология — тон кожи</a:t>
             </a:r>
           </a:p>
         </p:txBody>
@@ -10824,7 +10824,7 @@
                 </a:solidFill>
                 <a:latin typeface="Arial"/>
               </a:rPr>
-              <a:t>Mechanism: training datasets (ISIC) перепредставляют светлую кожу</a:t>
+              <a:t>Механизм: датасеты обучения (ISIC) перепредставляют светлую кожу</a:t>
             </a:r>
           </a:p>
         </p:txBody>
@@ -10909,7 +10909,7 @@
                 </a:solidFill>
                 <a:latin typeface="Arial"/>
               </a:rPr>
-              <a:t>Evidence: Daneshjou 2022 — sens ↓ 20–30% на коже Фитцпатрика V–VI</a:t>
+              <a:t>Доказательство: Daneshjou 2022 — чувствит. ↓ 20–30% на коже Фитцпатрика V–VI</a:t>
             </a:r>
           </a:p>
         </p:txBody>
@@ -10994,7 +10994,7 @@
                 </a:solidFill>
                 <a:latin typeface="Arial"/>
               </a:rPr>
-              <a:t>Fix: fine-tuning на DDI закрыл gap; AI &gt; дерматолога на тёмной коже</a:t>
+              <a:t>Исправление: дообучение на DDI закрыло разрыв; AI &gt; дерматолога на тёмной коже</a:t>
             </a:r>
           </a:p>
         </p:txBody>
@@ -11144,7 +11144,7 @@
                 </a:solidFill>
                 <a:latin typeface="Arial"/>
               </a:rPr>
-              <a:t>Pulse oximeter — racial bias</a:t>
+              <a:t>Пульсоксиметр — расовое смещение</a:t>
             </a:r>
           </a:p>
         </p:txBody>
@@ -11229,7 +11229,7 @@
                 </a:solidFill>
                 <a:latin typeface="Arial"/>
               </a:rPr>
-              <a:t>Mechanism: sensor systematically overestimates SpO2 на dark skin</a:t>
+              <a:t>Механизм: датчик систематически завышает SpO2 на тёмной коже</a:t>
             </a:r>
           </a:p>
         </p:txBody>
@@ -11314,7 +11314,7 @@
                 </a:solidFill>
                 <a:latin typeface="Arial"/>
               </a:rPr>
-              <a:t>Evidence: Sjoding 2020 NEJM — гипоксия пропускается чаще у Black</a:t>
+              <a:t>Доказательство: Sjoding 2020 NEJM — гипоксия чаще пропускается у Black-пациентов</a:t>
             </a:r>
           </a:p>
         </p:txBody>
@@ -11399,7 +11399,7 @@
                 </a:solidFill>
                 <a:latin typeface="Arial"/>
               </a:rPr>
-              <a:t>AI implication: модели с SpO2 input feature наследуют sensor bias</a:t>
+              <a:t>Что значит для AI: модели с SpO2 на входе наследуют ошибку датчика</a:t>
             </a:r>
           </a:p>
         </p:txBody>
@@ -11525,7 +11525,7 @@
                 </a:solidFill>
                 <a:latin typeface="Arial"/>
               </a:rPr>
-              <a:t>→ Validation set должен покрывать deployment population. Не academic point — профессиональная ответственность.</a:t>
+              <a:t>→ Валидационный набор должен покрывать целевую популяцию. Не академическая тонкость — профессиональная ответственность.</a:t>
             </a:r>
           </a:p>
         </p:txBody>
@@ -11621,7 +11621,7 @@
                 </a:solidFill>
                 <a:latin typeface="Arial"/>
               </a:rPr>
-              <a:t>AI-диагностика — обещание сбылось (mosmed: 14M+ исследований, 74 региона).</a:t>
+              <a:t>AI-диагностика — обещание сбылось (mosmed.ai: 14 млн+ исследований, 74 региона).</a:t>
             </a:r>
           </a:p>
         </p:txBody>
@@ -11702,22 +11702,22 @@
               </a:lnSpc>
             </a:pPr>
             <a:r>
-              <a:rPr sz="2800" b="1" i="0">
+              <a:rPr sz="2600" b="1" i="0">
                 <a:solidFill>
                   <a:srgbClr val="21295C"/>
                 </a:solidFill>
                 <a:latin typeface="Arial"/>
               </a:rPr>
-              <a:t>Drug discovery — </a:t>
-            </a:r>
-            <a:r>
-              <a:rPr sz="2800" b="1" i="0">
+              <a:t>Разработка лекарств — </a:t>
+            </a:r>
+            <a:r>
+              <a:rPr sz="2600" b="1" i="0">
                 <a:solidFill>
                   <a:srgbClr val="F0AB00"/>
                 </a:solidFill>
                 <a:latin typeface="Arial"/>
               </a:rPr>
-              <a:t>обещали 10× быстрее.</a:t>
+              <a:t>обещали в 10 раз быстрее.</a:t>
             </a:r>
           </a:p>
           <a:p>
@@ -11727,7 +11727,7 @@
               </a:lnSpc>
             </a:pPr>
             <a:r>
-              <a:rPr sz="2800" b="1" i="0">
+              <a:rPr sz="2600" b="1" i="0">
                 <a:solidFill>
                   <a:srgbClr val="21295C"/>
                 </a:solidFill>
@@ -12033,7 +12033,7 @@
                 </a:solidFill>
                 <a:latin typeface="Arial"/>
               </a:rPr>
-              <a:t>peer-reviewed Phase IIa</a:t>
+              <a:t>Phase IIa с рецензированием</a:t>
             </a:r>
           </a:p>
         </p:txBody>
@@ -12183,7 +12183,7 @@
                 </a:solidFill>
                 <a:latin typeface="Arial"/>
               </a:rPr>
-              <a:t>discontinued</a:t>
+              <a:t>программа закрыта</a:t>
             </a:r>
           </a:p>
         </p:txBody>
@@ -12222,7 +12222,7 @@
                 </a:solidFill>
                 <a:latin typeface="Arial"/>
               </a:rPr>
-              <a:t>Mid-lecture re-orientation. Дальше — где AI ускоряет drug discovery и две истории.</a:t>
+              <a:t>Промежуточная пересборка. Дальше — где AI ускоряет разработку лекарств и две истории.</a:t>
             </a:r>
           </a:p>
         </p:txBody>
@@ -12279,7 +12279,7 @@
                 </a:solidFill>
                 <a:latin typeface="Arial"/>
               </a:rPr>
-              <a:t>AI ускоряет discovery, не clinical trials.</a:t>
+              <a:t>AI ускоряет открытие, не клинические испытания.</a:t>
             </a:r>
           </a:p>
         </p:txBody>
@@ -12318,7 +12318,7 @@
                 </a:solidFill>
                 <a:latin typeface="Arial"/>
               </a:rPr>
-              <a:t>10–15 лет · $1–2 млрд · ~6.7% success rate. AI ускоряет stages 1–3.</a:t>
+              <a:t>10–15 лет · $1–2 млрд · ~6.7% успеха. AI ускоряет стадии 1–3.</a:t>
             </a:r>
           </a:p>
         </p:txBody>
@@ -12405,7 +12405,7 @@
                 </a:solidFill>
                 <a:latin typeface="Arial"/>
               </a:rPr>
-              <a:t>AI ускоряет значительно (4–5 лет → 12–18 мес)</a:t>
+              <a:t>AI ускоряет значительно (4–5 лет → 12–18 месяцев)</a:t>
             </a:r>
           </a:p>
         </p:txBody>
@@ -12492,7 +12492,7 @@
                 </a:solidFill>
                 <a:latin typeface="Arial"/>
               </a:rPr>
-              <a:t>AI помогает marginally — биология</a:t>
+              <a:t>AI помогает слабо — это биология</a:t>
             </a:r>
           </a:p>
         </p:txBody>
@@ -12603,7 +12603,8 @@
                 </a:solidFill>
                 <a:latin typeface="Arial"/>
               </a:rPr>
-              <a:t>1. Target ID</a:t>
+              <a:t>1. Поиск
+мишени</a:t>
             </a:r>
           </a:p>
         </p:txBody>
@@ -12798,7 +12799,8 @@
                 </a:solidFill>
                 <a:latin typeface="Arial"/>
               </a:rPr>
-              <a:t>2. Hit discovery</a:t>
+              <a:t>2. Поиск
+кандидатов</a:t>
             </a:r>
           </a:p>
         </p:txBody>
@@ -12994,7 +12996,8 @@
                 </a:solidFill>
                 <a:latin typeface="Arial"/>
               </a:rPr>
-              <a:t>3. Lead opt.</a:t>
+              <a:t>3. Оптимиз.
+кандидатов</a:t>
             </a:r>
           </a:p>
         </p:txBody>
@@ -13033,7 +13036,7 @@
                 </a:solidFill>
                 <a:latin typeface="Arial"/>
               </a:rPr>
-              <a:t>Simulation
+              <a:t>Симуляция
 + ML</a:t>
             </a:r>
           </a:p>
@@ -13189,7 +13192,8 @@
                 </a:solidFill>
                 <a:latin typeface="Arial"/>
               </a:rPr>
-              <a:t>4. Preclinical</a:t>
+              <a:t>4. Доклинич.
+испытания</a:t>
             </a:r>
           </a:p>
         </p:txBody>
@@ -13228,8 +13232,8 @@
                 </a:solidFill>
                 <a:latin typeface="Arial"/>
               </a:rPr>
-              <a:t>Toxicity
-predict</a:t>
+              <a:t>Прогноз
+токсичности</a:t>
             </a:r>
           </a:p>
         </p:txBody>
@@ -13384,7 +13388,8 @@
                 </a:solidFill>
                 <a:latin typeface="Arial"/>
               </a:rPr>
-              <a:t>5. Clinical I/II/III</a:t>
+              <a:t>5. Клинич.
+I/II/III</a:t>
             </a:r>
           </a:p>
         </p:txBody>
@@ -13423,8 +13428,8 @@
                 </a:solidFill>
                 <a:latin typeface="Arial"/>
               </a:rPr>
-              <a:t>Patient
-stratification</a:t>
+              <a:t>Стратиф.
+пациентов</a:t>
             </a:r>
           </a:p>
         </p:txBody>
@@ -13511,7 +13516,7 @@
                 </a:solidFill>
                 <a:latin typeface="Arial"/>
               </a:rPr>
-              <a:t>→ ~90% clinical attrition rate — AI не меняет. Биология, не алгоритм.</a:t>
+              <a:t>→ ~90% отсева на клинических — AI не меняет. Это биология, а не алгоритм.</a:t>
             </a:r>
           </a:p>
         </p:txBody>
@@ -13544,13 +13549,13 @@
               </a:lnSpc>
             </a:pPr>
             <a:r>
-              <a:rPr sz="1500" b="1" i="0">
+              <a:rPr sz="1400" b="1" i="0">
                 <a:solidFill>
                   <a:srgbClr val="21295C"/>
                 </a:solidFill>
                 <a:latin typeface="Arial"/>
               </a:rPr>
-              <a:t>«AI ускорил design» (verified) ≠ «AI ускорил approval» (не verified).</a:t>
+              <a:t>«AI ускорил дизайн молекулы» (подтверждено) ≠ «AI ускорил одобрение препарата» (не подтверждено).</a:t>
             </a:r>
           </a:p>
         </p:txBody>
@@ -13646,7 +13651,7 @@
                 </a:solidFill>
                 <a:latin typeface="Arial"/>
               </a:rPr>
-              <a:t>AlphaFold 200M+; AlphaProteo проектирует binders de novo.</a:t>
+              <a:t>AlphaFold: 200 млн+ структур. AlphaProteo: связующие белки de novo.</a:t>
             </a:r>
           </a:p>
         </p:txBody>
@@ -13685,7 +13690,7 @@
                 </a:solidFill>
                 <a:latin typeface="Arial"/>
               </a:rPr>
-              <a:t>Решённая задача 50-летней давности · Нобель по химии 2024 (Hassabis + Jumper + Baker).</a:t>
+              <a:t>Задача 50-летней давности — решена · Нобель по химии 2024 (Hassabis + Jumper + Baker).</a:t>
             </a:r>
           </a:p>
         </p:txBody>
@@ -13772,7 +13777,7 @@
                 </a:solidFill>
                 <a:latin typeface="Arial"/>
               </a:rPr>
-              <a:t>AlphaFold DB</a:t>
+              <a:t>База AlphaFold</a:t>
             </a:r>
           </a:p>
         </p:txBody>
@@ -13850,7 +13855,7 @@
                 </a:solidFill>
                 <a:latin typeface="Arial"/>
               </a:rPr>
-              <a:t>structures</a:t>
+              <a:t>структур белков</a:t>
             </a:r>
           </a:p>
         </p:txBody>
@@ -13889,7 +13894,7 @@
                 </a:solidFill>
                 <a:latin typeface="Arial"/>
               </a:rPr>
-              <a:t>alphafold.ebi.ac.uk · open, free</a:t>
+              <a:t>alphafold.ebi.ac.uk · открытый, бесплатный доступ</a:t>
             </a:r>
           </a:p>
         </p:txBody>
@@ -13976,7 +13981,7 @@
                 </a:solidFill>
                 <a:latin typeface="Arial"/>
               </a:rPr>
-              <a:t>AlphaProteo (Sep 2024)</a:t>
+              <a:t>AlphaProteo (сент. 2024)</a:t>
             </a:r>
           </a:p>
         </p:txBody>
@@ -14054,7 +14059,7 @@
                 </a:solidFill>
                 <a:latin typeface="Arial"/>
               </a:rPr>
-              <a:t>success rate BHRF1</a:t>
+              <a:t>успешных связываний BHRF1</a:t>
             </a:r>
           </a:p>
         </p:txBody>
@@ -14093,7 +14098,7 @@
                 </a:solidFill>
                 <a:latin typeface="Arial"/>
               </a:rPr>
-              <a:t>First AI binder для VEGF-A · 3–300× affinity</a:t>
+              <a:t>Первый AI-связующий для VEGF-A · аффинность в 3–300×</a:t>
             </a:r>
           </a:p>
         </p:txBody>
@@ -14258,7 +14263,7 @@
                 </a:solidFill>
                 <a:latin typeface="Arial"/>
               </a:rPr>
-              <a:t>accuracy PoseBusters</a:t>
+              <a:t>точности на PoseBusters</a:t>
             </a:r>
           </a:p>
         </p:txBody>
@@ -14297,7 +14302,7 @@
                 </a:solidFill>
                 <a:latin typeface="Arial"/>
               </a:rPr>
-              <a:t>Protein–ligand interactions · diffusion-based</a:t>
+              <a:t>Взаимодействия белок–лиганд · diffusion-based</a:t>
             </a:r>
           </a:p>
         </p:txBody>
@@ -15580,7 +15585,7 @@
                 </a:solidFill>
                 <a:latin typeface="Arial"/>
               </a:rPr>
-              <a:t>3D protein structure (schematic)</a:t>
+              <a:t>3D-структура белка (схематично)</a:t>
             </a:r>
           </a:p>
         </p:txBody>
@@ -15761,7 +15766,7 @@
                 </a:solidFill>
                 <a:latin typeface="Arial"/>
               </a:rPr>
-              <a:t>Rentosertib — первый AI-designed drug с peer-reviewed Phase IIa.</a:t>
+              <a:t>Rentosertib — первый AI-препарат с рецензированным Phase IIa.</a:t>
             </a:r>
           </a:p>
         </p:txBody>
@@ -15965,8 +15970,8 @@
                 </a:solidFill>
                 <a:latin typeface="Arial"/>
               </a:rPr>
-              <a:t>AI-driven target ID
-→ preclinical candidate</a:t>
+              <a:t>Поиск мишени с AI
+→ доклинический кандидат</a:t>
             </a:r>
           </a:p>
         </p:txBody>
@@ -16005,7 +16010,7 @@
                 </a:solidFill>
                 <a:latin typeface="Arial"/>
               </a:rPr>
-              <a:t>— ~18 мес vs 4–5 лет</a:t>
+              <a:t>— ~18 месяцев против 4–5 лет</a:t>
             </a:r>
           </a:p>
         </p:txBody>
@@ -16131,7 +16136,7 @@
                 </a:solidFill>
                 <a:latin typeface="Arial"/>
               </a:rPr>
-              <a:t>Окт 2024</a:t>
+              <a:t>Окт. 2024</a:t>
             </a:r>
           </a:p>
         </p:txBody>
@@ -16170,8 +16175,8 @@
                 </a:solidFill>
                 <a:latin typeface="Arial"/>
               </a:rPr>
-              <a:t>Topline Phase IIa
-results announced</a:t>
+              <a:t>Объявлены топ-результаты
+Phase IIa</a:t>
             </a:r>
           </a:p>
         </p:txBody>
@@ -16210,7 +16215,7 @@
                 </a:solidFill>
                 <a:latin typeface="Arial"/>
               </a:rPr>
-              <a:t>— Insilico press release</a:t>
+              <a:t>— Пресс-релиз Insilico</a:t>
             </a:r>
           </a:p>
         </p:txBody>
@@ -16376,7 +16381,7 @@
                 <a:latin typeface="Arial"/>
               </a:rPr>
               <a:t>Nature Medicine
-peer-reviewed RCT n=71</a:t>
+рецензированное РКИ n=71</a:t>
             </a:r>
           </a:p>
         </p:txBody>
@@ -16415,7 +16420,7 @@
                 </a:solidFill>
                 <a:latin typeface="Arial"/>
               </a:rPr>
-              <a:t>— 21 China sites · IPF</a:t>
+              <a:t>— 21 центр в Китае · ИЛФ</a:t>
             </a:r>
           </a:p>
         </p:txBody>
@@ -16496,13 +16501,13 @@
               </a:lnSpc>
             </a:pPr>
             <a:r>
-              <a:rPr sz="1300" b="1" i="0">
+              <a:rPr sz="1200" b="1" i="0">
                 <a:solidFill>
                   <a:srgbClr val="21295C"/>
                 </a:solidFill>
                 <a:latin typeface="Arial"/>
               </a:rPr>
-              <a:t>60 mg QD → +98.4 mL FVC (forced vital capacity) vs −20.3 mL placebo (12 weeks)  ·  Δ ~118 mL. IPF — clinically significant.</a:t>
+              <a:t>60 мг 1× в день → +98.4 мл ФЖЕЛ (форсиров. жизн. ёмкость лёгких) vs −20.3 мл плацебо (12 недель)  ·  Δ ~118 мл. ИЛФ — клинически значимо.</a:t>
             </a:r>
           </a:p>
         </p:txBody>
@@ -16589,7 +16594,7 @@
                 </a:solidFill>
                 <a:latin typeface="Arial"/>
               </a:rPr>
-              <a:t>RU context (2024–2025 preclinical): </a:t>
+              <a:t>Российский контекст (2024–2025, доклинические): </a:t>
             </a:r>
             <a:r>
               <a:rPr sz="1100" b="0" i="0">
@@ -16598,7 +16603,7 @@
                 </a:solidFill>
                 <a:latin typeface="Arial"/>
               </a:rPr>
-              <a:t>Сбер AI Lab + AIRI + Р-Фарм — Alliance #1 CD137 онкология (май 2024); Alliance #2 Alzheimer (ноябрь 2025); MADD (ITMO+Сбер, EMNLP 2025); DiMA (AIRI, ICML 2025).</a:t>
+              <a:t>Сбер AI Lab + AIRI + Р-Фарм — Альянс №1 CD137 онкология (май 2024); Альянс №2 Альцгеймер (ноябрь 2025); MADD (ИТМО+Сбер, EMNLP 2025); DiMA (AIRI, ICML 2025).</a:t>
             </a:r>
           </a:p>
           <a:p>
@@ -16614,7 +16619,7 @@
                 </a:solidFill>
                 <a:latin typeface="Arial"/>
               </a:rPr>
-              <a:t>Все программы — preclinical: 0 RU-designed препаратов в клинических испытаниях на май 2026.</a:t>
+              <a:t>Все программы — доклинические: 0 препаратов российской разработки в клинических испытаниях на май 2026.</a:t>
             </a:r>
           </a:p>
         </p:txBody>
@@ -16710,7 +16715,7 @@
                 </a:solidFill>
                 <a:latin typeface="Arial"/>
               </a:rPr>
-              <a:t>DSP-1181 — reality check: AI ускорил design, не clinical.</a:t>
+              <a:t>DSP-1181 — проверка реальностью: AI ускорил дизайн, не клинику.</a:t>
             </a:r>
           </a:p>
         </p:txBody>
@@ -16749,7 +16754,7 @@
                 </a:solidFill>
                 <a:latin typeface="Arial"/>
               </a:rPr>
-              <a:t>«Первый AI-designed drug в clinical trials» (2020) → Phase 1 discontinued (2022).</a:t>
+              <a:t>«Первый AI-разработанный препарат в клинических испытаниях» (2020) → Phase 1 закрыта (2022).</a:t>
             </a:r>
           </a:p>
         </p:txBody>
@@ -16914,7 +16919,7 @@
                 </a:solidFill>
                 <a:latin typeface="Arial"/>
               </a:rPr>
-              <a:t>Phase 1 entry
+              <a:t>Вход в Phase 1
 Exscientia + Sumitomo</a:t>
             </a:r>
           </a:p>
@@ -16954,7 +16959,7 @@
                 </a:solidFill>
                 <a:latin typeface="Arial"/>
               </a:rPr>
-              <a:t>— OCD · Japan · 12 мес vs 4–5 лет</a:t>
+              <a:t>— ОКР · Япония · 12 мес vs 4–5 лет</a:t>
             </a:r>
           </a:p>
         </p:txBody>
@@ -17120,7 +17125,7 @@
                 <a:latin typeface="Arial"/>
               </a:rPr>
               <a:t>✕ Phase 1
-DISCONTINUED</a:t>
+ЗАКРЫТА</a:t>
             </a:r>
           </a:p>
         </p:txBody>
@@ -17159,7 +17164,7 @@
                 </a:solidFill>
                 <a:latin typeface="Arial"/>
               </a:rPr>
-              <a:t>— Cause not specified</a:t>
+              <a:t>— Причина не указана</a:t>
             </a:r>
           </a:p>
         </p:txBody>
@@ -17324,8 +17329,8 @@
                 </a:solidFill>
                 <a:latin typeface="Arial"/>
               </a:rPr>
-              <a:t>Synapse status:
-Discontinued</a:t>
+              <a:t>Статус Synapse:
+программа закрыта</a:t>
             </a:r>
           </a:p>
         </p:txBody>
@@ -17364,7 +17369,7 @@
                 </a:solidFill>
                 <a:latin typeface="Arial"/>
               </a:rPr>
-              <a:t>— Current R&amp;D status</a:t>
+              <a:t>— Текущий R&amp;D-статус</a:t>
             </a:r>
           </a:p>
         </p:txBody>
@@ -17445,16 +17450,16 @@
               </a:lnSpc>
             </a:pPr>
             <a:r>
-              <a:rPr sz="1800" b="1" i="0">
+              <a:rPr sz="1600" b="1" i="0">
                 <a:solidFill>
                   <a:srgbClr val="065A82"/>
                 </a:solidFill>
                 <a:latin typeface="Arial"/>
               </a:rPr>
-              <a:t>AI ускорил design</a:t>
-            </a:r>
-            <a:r>
-              <a:rPr sz="1600" b="0" i="0">
+              <a:t>AI ускорил дизайн молекулы</a:t>
+            </a:r>
+            <a:r>
+              <a:rPr sz="1500" b="0" i="0">
                 <a:solidFill>
                   <a:srgbClr val="21295C"/>
                 </a:solidFill>
@@ -17463,13 +17468,38 @@
               <a:t>  (12 мес vs 4–5 лет) — </a:t>
             </a:r>
             <a:r>
+              <a:rPr sz="1500" b="1" i="0">
+                <a:solidFill>
+                  <a:srgbClr val="028090"/>
+                </a:solidFill>
+                <a:latin typeface="Arial"/>
+              </a:rPr>
+              <a:t>подтверждено.</a:t>
+            </a:r>
+          </a:p>
+          <a:p>
+            <a:pPr algn="l">
+              <a:lnSpc>
+                <a:spcPct val="130000"/>
+              </a:lnSpc>
+            </a:pPr>
+            <a:r>
               <a:rPr sz="1600" b="1" i="0">
                 <a:solidFill>
-                  <a:srgbClr val="028090"/>
-                </a:solidFill>
-                <a:latin typeface="Arial"/>
-              </a:rPr>
-              <a:t>verified.</a:t>
+                  <a:srgbClr val="065A82"/>
+                </a:solidFill>
+                <a:latin typeface="Arial"/>
+              </a:rPr>
+              <a:t>Клиническая эффективность</a:t>
+            </a:r>
+            <a:r>
+              <a:rPr sz="1500" b="0" i="0">
+                <a:solidFill>
+                  <a:srgbClr val="21295C"/>
+                </a:solidFill>
+                <a:latin typeface="Arial"/>
+              </a:rPr>
+              <a:t>  — отдельная задача биологии.</a:t>
             </a:r>
           </a:p>
           <a:p>
@@ -17479,47 +17509,22 @@
               </a:lnSpc>
             </a:pPr>
             <a:r>
-              <a:rPr sz="1800" b="1" i="0">
-                <a:solidFill>
-                  <a:srgbClr val="065A82"/>
-                </a:solidFill>
-                <a:latin typeface="Arial"/>
-              </a:rPr>
-              <a:t>Clinical efficacy</a:t>
-            </a:r>
-            <a:r>
-              <a:rPr sz="1600" b="0" i="0">
-                <a:solidFill>
-                  <a:srgbClr val="21295C"/>
-                </a:solidFill>
-                <a:latin typeface="Arial"/>
-              </a:rPr>
-              <a:t>  — отдельная задача биологии.</a:t>
-            </a:r>
-          </a:p>
-          <a:p>
-            <a:pPr algn="l">
-              <a:lnSpc>
-                <a:spcPct val="130000"/>
-              </a:lnSpc>
-            </a:pPr>
-            <a:r>
-              <a:rPr sz="1400" b="0" i="1">
+              <a:rPr sz="1300" b="0" i="1">
                 <a:solidFill>
                   <a:srgbClr val="6B7685"/>
                 </a:solidFill>
                 <a:latin typeface="Arial"/>
               </a:rPr>
-              <a:t>«AI drug = быстро + эффективно»</a:t>
-            </a:r>
-            <a:r>
-              <a:rPr sz="1400" b="0" i="1">
+              <a:t>«AI-препарат = быстро + эффективно»</a:t>
+            </a:r>
+            <a:r>
+              <a:rPr sz="1300" b="0" i="1">
                 <a:solidFill>
                   <a:srgbClr val="6B7685"/>
                 </a:solidFill>
                 <a:latin typeface="Arial"/>
               </a:rPr>
-              <a:t>  — две объединённые в рекламе claim'ы.</a:t>
+              <a:t>  — два независимых тезиса, объединённых маркетингом.</a:t>
             </a:r>
           </a:p>
         </p:txBody>
@@ -17615,7 +17620,7 @@
                 </a:solidFill>
                 <a:latin typeface="Arial"/>
               </a:rPr>
-              <a:t>Medical AI = high-risk во всех 3 крупных юрисдикциях.</a:t>
+              <a:t>Медицинский AI = высокий риск во всех 3 крупных юрисдикциях.</a:t>
             </a:r>
           </a:p>
         </p:txBody>
@@ -17654,7 +17659,7 @@
                 </a:solidFill>
                 <a:latin typeface="Arial"/>
               </a:rPr>
-              <a:t>Approaches отличаются процессами, не principles.</a:t>
+              <a:t>Подходы отличаются процессами, а не принципами.</a:t>
             </a:r>
           </a:p>
         </p:txBody>
@@ -17804,7 +17809,7 @@
                 </a:solidFill>
                 <a:latin typeface="Arial"/>
               </a:rPr>
-              <a:t>Framework</a:t>
+              <a:t>Структура</a:t>
             </a:r>
           </a:p>
         </p:txBody>
@@ -17843,7 +17848,7 @@
                 </a:solidFill>
                 <a:latin typeface="Arial"/>
               </a:rPr>
-              <a:t>SaMD + AI/ML-specific</a:t>
+              <a:t>SaMD + специальные правила для AI/ML</a:t>
             </a:r>
           </a:p>
         </p:txBody>
@@ -17882,7 +17887,7 @@
                 </a:solidFill>
                 <a:latin typeface="Arial"/>
               </a:rPr>
-              <a:t>PCCP final</a:t>
+              <a:t>PCCP финализирован</a:t>
             </a:r>
           </a:p>
         </p:txBody>
@@ -17999,7 +18004,7 @@
                 </a:solidFill>
                 <a:latin typeface="Arial"/>
               </a:rPr>
-              <a:t>каждое обновление = new submission (12–18 мес)</a:t>
+              <a:t>каждое обновление = новое разрешение (12–18 мес)</a:t>
             </a:r>
           </a:p>
         </p:txBody>
@@ -18077,7 +18082,7 @@
                 </a:solidFill>
                 <a:latin typeface="Arial"/>
               </a:rPr>
-              <a:t>vendor pre-declares допустимые updates</a:t>
+              <a:t>вендор заранее декларирует допустимые обновления</a:t>
             </a:r>
           </a:p>
         </p:txBody>
@@ -18188,7 +18193,7 @@
                 </a:solidFill>
                 <a:latin typeface="Arial"/>
               </a:rPr>
-              <a:t>EU (AI Act)</a:t>
+              <a:t>ЕС (AI Act)</a:t>
             </a:r>
           </a:p>
         </p:txBody>
@@ -18227,7 +18232,7 @@
                 </a:solidFill>
                 <a:latin typeface="Arial"/>
               </a:rPr>
-              <a:t>Regulator</a:t>
+              <a:t>Регулятор</a:t>
             </a:r>
           </a:p>
         </p:txBody>
@@ -18266,7 +18271,7 @@
                 </a:solidFill>
                 <a:latin typeface="Arial"/>
               </a:rPr>
-              <a:t>EU Commission + Notified Bodies</a:t>
+              <a:t>Европейская комиссия + Notified Bodies</a:t>
             </a:r>
           </a:p>
         </p:txBody>
@@ -18305,7 +18310,7 @@
                 </a:solidFill>
                 <a:latin typeface="Arial"/>
               </a:rPr>
-              <a:t>Базис</a:t>
+              <a:t>Основание</a:t>
             </a:r>
           </a:p>
         </p:txBody>
@@ -18344,7 +18349,7 @@
                 </a:solidFill>
                 <a:latin typeface="Arial"/>
               </a:rPr>
-              <a:t>Article 6 + Annex III (high-risk)</a:t>
+              <a:t>Article 6 + Annex III (высокий риск)</a:t>
             </a:r>
           </a:p>
         </p:txBody>
@@ -18383,7 +18388,7 @@
                 </a:solidFill>
                 <a:latin typeface="Arial"/>
               </a:rPr>
-              <a:t>⚠ 2 авг 2026</a:t>
+              <a:t>⚠ 2 авг. 2026</a:t>
             </a:r>
           </a:p>
         </p:txBody>
@@ -18422,7 +18427,7 @@
                 </a:solidFill>
                 <a:latin typeface="Arial"/>
               </a:rPr>
-              <a:t>Annex III high-risk → 2.5 мес после лекции</a:t>
+              <a:t>Annex III высокий риск → 2.5 мес после лекции</a:t>
             </a:r>
           </a:p>
         </p:txBody>
@@ -18461,7 +18466,7 @@
                 </a:solidFill>
                 <a:latin typeface="Arial"/>
               </a:rPr>
-              <a:t>⚠ 2 авг 2027</a:t>
+              <a:t>⚠ 2 авг. 2027</a:t>
             </a:r>
           </a:p>
         </p:txBody>
@@ -18500,7 +18505,7 @@
                 </a:solidFill>
                 <a:latin typeface="Arial"/>
               </a:rPr>
-              <a:t>MDR full compliance для medical AI</a:t>
+              <a:t>MDR — полное соответствие для медицинского AI</a:t>
             </a:r>
           </a:p>
         </p:txBody>
@@ -18650,7 +18655,7 @@
                 </a:solidFill>
                 <a:latin typeface="Arial"/>
               </a:rPr>
-              <a:t>Registered</a:t>
+              <a:t>Зарегистрировано</a:t>
             </a:r>
           </a:p>
         </p:txBody>
@@ -18689,7 +18694,7 @@
                 </a:solidFill>
                 <a:latin typeface="Arial"/>
               </a:rPr>
-              <a:t>57 AI-медизделий (52 RF + 5 foreign)</a:t>
+              <a:t>57 AI-медизделий (52 РФ + 5 зарубежных)</a:t>
             </a:r>
           </a:p>
         </p:txBody>
@@ -18728,7 +18733,7 @@
                 </a:solidFill>
                 <a:latin typeface="Arial"/>
               </a:rPr>
-              <a:t>Expedited</a:t>
+              <a:t>Ускоренный режим</a:t>
             </a:r>
           </a:p>
         </p:txBody>
@@ -18884,7 +18889,7 @@
                 </a:solidFill>
                 <a:latin typeface="Arial"/>
               </a:rPr>
-              <a:t>Дата-локализация</a:t>
+              <a:t>Локализация данных</a:t>
             </a:r>
           </a:p>
         </p:txBody>
@@ -18937,7 +18942,7 @@
         <p:spPr>
           <a:xfrm>
             <a:off x="502920" y="6263640"/>
-            <a:ext cx="11247120" cy="457200"/>
+            <a:ext cx="11247120" cy="365760"/>
           </a:xfrm>
           <a:prstGeom prst="roundRect">
             <a:avLst>
@@ -18985,7 +18990,7 @@
         <p:spPr>
           <a:xfrm>
             <a:off x="685800" y="6336792"/>
-            <a:ext cx="10881360" cy="310896"/>
+            <a:ext cx="10881360" cy="219456"/>
           </a:xfrm>
           <a:prstGeom prst="rect">
             <a:avLst/>
@@ -19004,13 +19009,13 @@
               </a:lnSpc>
             </a:pPr>
             <a:r>
-              <a:rPr sz="1300" b="1" i="0">
+              <a:rPr sz="1200" b="1" i="0">
                 <a:solidFill>
                   <a:srgbClr val="21295C"/>
                 </a:solidFill>
                 <a:latin typeface="Arial"/>
               </a:rPr>
-              <a:t>→ Проектируйте с PCCP в уме: data drift, retraining triggers, threshold updates — план ex ante.</a:t>
+              <a:t>→ Проектируйте с PCCP в уме: дрейф данных, триггеры переобучения, обновления порогов — план заранее.</a:t>
             </a:r>
           </a:p>
         </p:txBody>
@@ -19023,7 +19028,7 @@
         </p:nvSpPr>
         <p:spPr>
           <a:xfrm>
-            <a:off x="502920" y="6720840"/>
+            <a:off x="502920" y="6629400"/>
             <a:ext cx="11247120" cy="182880"/>
           </a:xfrm>
           <a:prstGeom prst="rect">
@@ -19049,7 +19054,7 @@
                 </a:solidFill>
                 <a:latin typeface="Arial"/>
               </a:rPr>
-              <a:t>SaMD — Software as Medical Device (FDA category) · MDR — EU Medical Device Regulation</a:t>
+              <a:t>SaMD — Software as Medical Device (категория FDA) · MDR — EU Medical Device Regulation</a:t>
             </a:r>
           </a:p>
         </p:txBody>
@@ -19455,7 +19460,7 @@
                 </a:solidFill>
                 <a:latin typeface="Arial"/>
               </a:rPr>
-              <a:t>Web-chat + критическая оценка ответа.</a:t>
+              <a:t>Web-чат + критическая оценка ответа.</a:t>
             </a:r>
           </a:p>
         </p:txBody>
@@ -19627,7 +19632,7 @@
                 </a:solidFill>
                 <a:latin typeface="Arial"/>
               </a:rPr>
-              <a:t>Step 1  ·  3 мин</a:t>
+              <a:t>Шаг 1  ·  3 мин</a:t>
             </a:r>
           </a:p>
         </p:txBody>
@@ -19666,7 +19671,7 @@
                 </a:solidFill>
                 <a:latin typeface="Arial"/>
               </a:rPr>
-              <a:t>Открой web-chat (ChatGPT / Claude / YandexGPT / GigaChat). Введи промпт ниже:</a:t>
+              <a:t>Открой web-чат (ChatGPT / Claude / YandexGPT / GigaChat). Введи промпт ниже:</a:t>
             </a:r>
           </a:p>
         </p:txBody>
@@ -19790,7 +19795,7 @@
                 </a:solidFill>
                 <a:latin typeface="Arial"/>
               </a:rPr>
-              <a:t>Step 2  ·  3 мин</a:t>
+              <a:t>Шаг 2  ·  3 мин</a:t>
             </a:r>
           </a:p>
         </p:txBody>
@@ -19829,7 +19834,7 @@
                 </a:solidFill>
                 <a:latin typeface="Arial"/>
               </a:rPr>
-              <a:t>Отметь карандашом: 1 неточность ИЛИ 1 unverifiable claim ИЛИ 1 слишком абстрактное место.</a:t>
+              <a:t>Отметь карандашом: 1 неточность ИЛИ 1 непроверяемое утверждение ИЛИ 1 слишком абстрактное место.</a:t>
             </a:r>
           </a:p>
         </p:txBody>
@@ -19953,7 +19958,7 @@
                 </a:solidFill>
                 <a:latin typeface="Arial"/>
               </a:rPr>
-              <a:t>Step 3  ·  4 мин — reveal</a:t>
+              <a:t>Шаг 3  ·  4 мин — разбор</a:t>
             </a:r>
           </a:p>
         </p:txBody>
@@ -19992,7 +19997,7 @@
                 </a:solidFill>
                 <a:latin typeface="Arial"/>
               </a:rPr>
-              <a:t>Лектор спросит — 2–3 студента читают (1 мин). Лектор покажет control-ответ.</a:t>
+              <a:t>Лектор спросит — 2–3 студента читают (1 мин). Лектор покажет эталонный ответ.</a:t>
             </a:r>
           </a:p>
         </p:txBody>
@@ -20112,13 +20117,13 @@
               </a:lnSpc>
             </a:pPr>
             <a:r>
-              <a:rPr sz="1200" b="0" i="1">
+              <a:rPr sz="1100" b="0" i="1">
                 <a:solidFill>
                   <a:srgbClr val="21295C"/>
                 </a:solidFill>
                 <a:latin typeface="Liberation Mono"/>
               </a:rPr>
-              <a:t>«Объясни мне, что такое sensitivity и specificity для AI-диагностики на конкретном примере (mammography screening). Объясни как для студента 2 курса техн. вуза, со знанием базовой probability.»</a:t>
+              <a:t>«Объясни мне, что такое чувствительность и специфичность для AI-диагностики на конкретном примере (скрининг маммографии). Объясни как для студента 2 курса техн. вуза, со знанием базовой теории вероятностей.»</a:t>
             </a:r>
           </a:p>
         </p:txBody>
@@ -20205,7 +20210,7 @@
                 </a:solidFill>
                 <a:latin typeface="Arial"/>
               </a:rPr>
-              <a:t>Control-ответ (готовится накануне)</a:t>
+              <a:t>Эталонный ответ (готовится накануне)</a:t>
             </a:r>
           </a:p>
         </p:txBody>
@@ -20292,7 +20297,7 @@
                 </a:solidFill>
                 <a:latin typeface="Arial"/>
               </a:rPr>
-              <a:t>Sensitivity — это доля...</a:t>
+              <a:t>Чувствительность — доля...</a:t>
             </a:r>
           </a:p>
         </p:txBody>
@@ -20331,7 +20336,7 @@
                 </a:solidFill>
                 <a:latin typeface="Arial"/>
               </a:rPr>
-              <a:t>...правильно поймал AI.</a:t>
+              <a:t>...правильно пойманных AI.</a:t>
             </a:r>
           </a:p>
         </p:txBody>
@@ -20448,7 +20453,7 @@
                 </a:solidFill>
                 <a:latin typeface="Arial"/>
               </a:rPr>
-              <a:t>Specificity — это доля...</a:t>
+              <a:t>Специфичность — доля...</a:t>
             </a:r>
           </a:p>
         </p:txBody>
@@ -20487,7 +20492,7 @@
                 </a:solidFill>
                 <a:latin typeface="Arial"/>
               </a:rPr>
-              <a:t>...правильно отпустил.</a:t>
+              <a:t>...правильно отпущенных.</a:t>
             </a:r>
           </a:p>
         </p:txBody>
@@ -20604,7 +20609,7 @@
                 </a:solidFill>
                 <a:latin typeface="Arial"/>
               </a:rPr>
-              <a:t>Mammography примеры:</a:t>
+              <a:t>Маммография — пример:</a:t>
             </a:r>
           </a:p>
         </p:txBody>
@@ -20769,7 +20774,7 @@
                 </a:solidFill>
                 <a:latin typeface="Arial"/>
               </a:rPr>
-              <a:t>Цель — paragraph-level critique. AI отлично объясняет — паттерн. AI даёт цифры без citation — анти-паттерн.</a:t>
+              <a:t>Цель — критика на уровне абзаца. AI отлично объясняет — это паттерн. AI даёт цифры без источника — антипаттерн.</a:t>
             </a:r>
           </a:p>
         </p:txBody>
@@ -20920,7 +20925,7 @@
       </p:sp>
       <p:pic>
         <p:nvPicPr>
-          <p:cNvPr id="5" name="Picture 4" descr="s20-harvard-ai-regulation.jpg"/>
+          <p:cNvPr id="5" name="Picture 4" descr="s20-medical-team.jpg"/>
           <p:cNvPicPr>
             <a:picLocks noChangeAspect="1"/>
           </p:cNvPicPr>
@@ -20934,8 +20939,8 @@
         </p:blipFill>
         <p:spPr>
           <a:xfrm>
-            <a:off x="731520" y="1965960"/>
-            <a:ext cx="4663440" cy="3703320"/>
+            <a:off x="1832901" y="1965960"/>
+            <a:ext cx="2460678" cy="3703320"/>
           </a:xfrm>
           <a:prstGeom prst="rect">
             <a:avLst/>
@@ -20976,7 +20981,7 @@
                 </a:solidFill>
                 <a:latin typeface="Arial"/>
               </a:rPr>
-              <a:t>Harvard Gazette — AI healthcare regulation (Jan 2026)</a:t>
+              <a:t>Каждый AI-диагноз заканчивается этим — взаимодействием врача с пациентом.</a:t>
             </a:r>
           </a:p>
         </p:txBody>
@@ -21126,7 +21131,7 @@
                 </a:solidFill>
                 <a:latin typeface="Arial"/>
               </a:rPr>
-              <a:t>1.  Bias в medical AI</a:t>
+              <a:t>1.  Смещение (bias) в медицинском AI</a:t>
             </a:r>
           </a:p>
         </p:txBody>
@@ -21165,7 +21170,7 @@
                 </a:solidFill>
                 <a:latin typeface="Arial"/>
               </a:rPr>
-              <a:t>Obermeyer 2019 deep-dive</a:t>
+              <a:t>Глубокий разбор: Obermeyer 2019</a:t>
             </a:r>
           </a:p>
         </p:txBody>
@@ -21228,7 +21233,7 @@
                 </a:solidFill>
                 <a:latin typeface="Arial"/>
               </a:rPr>
-              <a:t>2.  LLM anti-pattern</a:t>
+              <a:t>2.  LLM-антипаттерны</a:t>
             </a:r>
           </a:p>
         </p:txBody>
@@ -21267,7 +21272,7 @@
                 </a:solidFill>
                 <a:latin typeface="Arial"/>
               </a:rPr>
-              <a:t>NEDA Tessa + adversarial + 40M self-dx</a:t>
+              <a:t>NEDA Tessa + adversarial + 40 млн самодиагностик</a:t>
             </a:r>
           </a:p>
         </p:txBody>
@@ -21330,7 +21335,7 @@
                 </a:solidFill>
                 <a:latin typeface="Arial"/>
               </a:rPr>
-              <a:t>3.  Безопасность данных + responsibility</a:t>
+              <a:t>3.  Безопасность данных + ответственность</a:t>
             </a:r>
           </a:p>
         </p:txBody>
@@ -21369,7 +21374,7 @@
                 </a:solidFill>
                 <a:latin typeface="Arial"/>
               </a:rPr>
-              <a:t>Change Healthcare + 4-actor framework</a:t>
+              <a:t>Change Healthcare + рамка 4 актёров</a:t>
             </a:r>
           </a:p>
         </p:txBody>
@@ -21456,7 +21461,7 @@
                 </a:solidFill>
                 <a:latin typeface="Arial"/>
               </a:rPr>
-              <a:t>→ Думать про границы сразу, на стадии design — не post-hoc после первого инцидента.</a:t>
+              <a:t>→ Думать про границы сразу, на стадии проектирования — не задним числом после первого инцидента.</a:t>
             </a:r>
           </a:p>
         </p:txBody>
@@ -21552,7 +21557,7 @@
                 </a:solidFill>
                 <a:latin typeface="Arial"/>
               </a:rPr>
-              <a:t>Commercial AI для 200M Americans systematically underestimated severity для black patients.</a:t>
+              <a:t>Коммерческий AI для 200 млн американцев систематически недооценивал тяжесть болезни у Black-пациентов.</a:t>
             </a:r>
           </a:p>
         </p:txBody>
@@ -21639,7 +21644,7 @@
                 </a:solidFill>
                 <a:latin typeface="Arial"/>
               </a:rPr>
-              <a:t>Goal</a:t>
+              <a:t>Цель</a:t>
             </a:r>
           </a:p>
         </p:txBody>
@@ -21678,9 +21683,9 @@
                 </a:solidFill>
                 <a:latin typeface="Arial"/>
               </a:rPr>
-              <a:t>Identify patients
-needing
-additional care</a:t>
+              <a:t>Найти пациентов,
+кому нужна
+доп. помощь</a:t>
             </a:r>
           </a:p>
         </p:txBody>
@@ -21811,7 +21816,7 @@
                 </a:solidFill>
                 <a:latin typeface="Arial"/>
               </a:rPr>
-              <a:t>Proxy used</a:t>
+              <a:t>Прокси</a:t>
             </a:r>
           </a:p>
         </p:txBody>
@@ -21850,9 +21855,10 @@
                 </a:solidFill>
                 <a:latin typeface="Arial"/>
               </a:rPr>
-              <a:t>Spending on
-previous care
-(не severity)</a:t>
+              <a:t>Расходы на
+предыдущее
+лечение
+(не тяжесть)</a:t>
             </a:r>
           </a:p>
         </p:txBody>
@@ -21983,7 +21989,7 @@
                 </a:solidFill>
                 <a:latin typeface="Arial"/>
               </a:rPr>
-              <a:t>Bias source</a:t>
+              <a:t>Источник смещения</a:t>
             </a:r>
           </a:p>
         </p:txBody>
@@ -22022,8 +22028,8 @@
                 </a:solidFill>
                 <a:latin typeface="Arial"/>
               </a:rPr>
-              <a:t>Black: −$1 800/y
-(access disparities)
+              <a:t>Black: −$1 800/год
+(разный доступ)
 → AI «менее больны»</a:t>
             </a:r>
           </a:p>
@@ -22111,7 +22117,7 @@
                 </a:solidFill>
                 <a:latin typeface="Arial"/>
               </a:rPr>
-              <a:t>При одинаковом risk score у Black:</a:t>
+              <a:t>При одинаковом риск-скоре у Black-пациентов:</a:t>
             </a:r>
           </a:p>
         </p:txBody>
@@ -22228,7 +22234,7 @@
                 </a:solidFill>
                 <a:latin typeface="Arial"/>
               </a:rPr>
-              <a:t>Science 2019 · n ≈ 200M американцев</a:t>
+              <a:t>Science 2019 · n ≈ 200 млн американцев</a:t>
             </a:r>
           </a:p>
         </p:txBody>
@@ -22315,7 +22321,7 @@
                 </a:solidFill>
                 <a:latin typeface="Arial"/>
               </a:rPr>
-              <a:t>Fix: hybrid proxy (cost + chronic conditions)</a:t>
+              <a:t>Исправление: гибридный прокси (расходы + хронические)</a:t>
             </a:r>
           </a:p>
         </p:txBody>
@@ -22405,13 +22411,13 @@
               </a:lnSpc>
             </a:pPr>
             <a:r>
-              <a:rPr sz="1200" b="0" i="0">
+              <a:rPr sz="1100" b="0" i="0">
                 <a:solidFill>
                   <a:srgbClr val="21295C"/>
                 </a:solidFill>
                 <a:latin typeface="Arial"/>
               </a:rPr>
-              <a:t>доля Black patients в high-risk care management programs</a:t>
+              <a:t>доля Black-пациентов в программах ведения пациентов высокого риска</a:t>
             </a:r>
           </a:p>
         </p:txBody>
@@ -22450,7 +22456,7 @@
                 </a:solidFill>
                 <a:latin typeface="Arial"/>
               </a:rPr>
-              <a:t>−84% bias  ·  не теоретический fix — реальные пациенты</a:t>
+              <a:t>−84% смещения  ·  не теория — реальные пациенты</a:t>
             </a:r>
           </a:p>
         </p:txBody>
@@ -22633,7 +22639,7 @@
                 </a:solidFill>
                 <a:latin typeface="Arial"/>
               </a:rPr>
-              <a:t>LLM в медицине ≠ medical AI — 3 documented cases.</a:t>
+              <a:t>LLM в медицине ≠ медицинский AI — 3 задокументированных случая.</a:t>
             </a:r>
           </a:p>
         </p:txBody>
@@ -22666,13 +22672,13 @@
               </a:lnSpc>
             </a:pPr>
             <a:r>
-              <a:rPr sz="1300" b="0" i="1">
+              <a:rPr sz="1200" b="0" i="1">
                 <a:solidFill>
                   <a:srgbClr val="065A82"/>
                 </a:solidFill>
                 <a:latin typeface="Arial"/>
               </a:rPr>
-              <a:t>Vendor accountability · adversarial hallucination · mass self-diagnosis (2025–2026).</a:t>
+              <a:t>Ответственность вендора · состязательные галлюцинации · самодиагностика в массовом масштабе (2025–2026).</a:t>
             </a:r>
           </a:p>
         </p:txBody>
@@ -22783,7 +22789,7 @@
                 </a:solidFill>
                 <a:latin typeface="Arial"/>
               </a:rPr>
-              <a:t>NEDA Tessa scandal</a:t>
+              <a:t>NEDA Tessa — скандал</a:t>
             </a:r>
           </a:p>
         </p:txBody>
@@ -22868,7 +22874,7 @@
                 </a:solidFill>
                 <a:latin typeface="Arial"/>
               </a:rPr>
-              <a:t>vendor accountability</a:t>
+              <a:t>ответственность вендора</a:t>
             </a:r>
           </a:p>
         </p:txBody>
@@ -22907,7 +22913,7 @@
                 </a:solidFill>
                 <a:latin typeface="Arial"/>
               </a:rPr>
-              <a:t>May 2023 · NPR · AI Incident DB #545</a:t>
+              <a:t>Май 2023 · NPR · AI Incident DB #545</a:t>
             </a:r>
           </a:p>
         </p:txBody>
@@ -22992,7 +22998,7 @@
                 </a:solidFill>
                 <a:latin typeface="Arial"/>
               </a:rPr>
-              <a:t>~2018–2022: rule-based, NEDA approved</a:t>
+              <a:t>~2018–2022: rule-based, одобрен NEDA</a:t>
             </a:r>
           </a:p>
         </p:txBody>
@@ -23077,7 +23083,7 @@
                 </a:solidFill>
                 <a:latin typeface="Arial"/>
               </a:rPr>
-              <a:t>Начало 2023: Cass → generative БЕЗ NEDA approval</a:t>
+              <a:t>Начало 2023: Cass → генеративный БЕЗ одобрения NEDA</a:t>
             </a:r>
           </a:p>
         </p:txBody>
@@ -23162,7 +23168,7 @@
                 </a:solidFill>
                 <a:latin typeface="Arial"/>
               </a:rPr>
-              <a:t>30 мая 2023: Maxwell screenshots → suspended 24h</a:t>
+              <a:t>30 мая 2023: скриншоты Maxwell → отключён за 24 часа</a:t>
             </a:r>
           </a:p>
         </p:txBody>
@@ -23273,7 +23279,7 @@
                 </a:solidFill>
                 <a:latin typeface="Arial"/>
               </a:rPr>
-              <a:t>Adversarial hallucination</a:t>
+              <a:t>Состязательные галлюцинации</a:t>
             </a:r>
           </a:p>
         </p:txBody>
@@ -23358,7 +23364,7 @@
                 </a:solidFill>
                 <a:latin typeface="Arial"/>
               </a:rPr>
-              <a:t>83% halluc. rate</a:t>
+              <a:t>галлюцин. 83%</a:t>
             </a:r>
           </a:p>
         </p:txBody>
@@ -23482,7 +23488,7 @@
                 </a:solidFill>
                 <a:latin typeface="Arial"/>
               </a:rPr>
-              <a:t>6 ведущих LLM, 300 clinical vignettes</a:t>
+              <a:t>6 ведущих LLM, 300 клинических виньеток</a:t>
             </a:r>
           </a:p>
         </p:txBody>
@@ -23567,7 +23573,7 @@
                 </a:solidFill>
                 <a:latin typeface="Arial"/>
               </a:rPr>
-              <a:t>С подсаженной фейк-деталью → расширяют в 83% случаев</a:t>
+              <a:t>С подсаженной фейк-деталью → расширяют её в 83% случаев</a:t>
             </a:r>
           </a:p>
         </p:txBody>
@@ -23652,7 +23658,7 @@
                 </a:solidFill>
                 <a:latin typeface="Arial"/>
               </a:rPr>
-              <a:t>Mitigation prompt → halves but ≠ zero</a:t>
+              <a:t>Mitigation-промпт → снижает вдвое, но ≠ ноль</a:t>
             </a:r>
           </a:p>
         </p:txBody>
@@ -23763,7 +23769,7 @@
                 </a:solidFill>
                 <a:latin typeface="Arial"/>
               </a:rPr>
-              <a:t>Self-diagnosis at scale</a:t>
+              <a:t>Самодиагностика в масштабе</a:t>
             </a:r>
           </a:p>
         </p:txBody>
@@ -23848,7 +23854,7 @@
                 </a:solidFill>
                 <a:latin typeface="Arial"/>
               </a:rPr>
-              <a:t>40M Americans</a:t>
+              <a:t>40 млн американцев</a:t>
             </a:r>
           </a:p>
         </p:txBody>
@@ -23972,7 +23978,7 @@
                 </a:solidFill>
                 <a:latin typeface="Arial"/>
               </a:rPr>
-              <a:t>~40M Americans use ChatGPT для health past 3 months</a:t>
+              <a:t>~40 млн американцев использовали ChatGPT для здоровья за 3 месяца</a:t>
             </a:r>
           </a:p>
         </p:txBody>
@@ -24057,7 +24063,7 @@
                 </a:solidFill>
                 <a:latin typeface="Arial"/>
               </a:rPr>
-              <a:t>3 из 5 US adults</a:t>
+              <a:t>3 из 5 совершеннолетних США</a:t>
             </a:r>
           </a:p>
         </p:txBody>
@@ -24229,7 +24235,7 @@
                 </a:solidFill>
                 <a:latin typeface="Arial"/>
               </a:rPr>
-              <a:t>→ Generative AI ≠ rule-based AI. Vendor design changes могут обойти clinical safety design.</a:t>
+              <a:t>→ Генеративный AI ≠ rule-based AI. Изменения дизайна вендором могут обойти clinical-safety проверку.</a:t>
             </a:r>
           </a:p>
         </p:txBody>
@@ -24268,7 +24274,7 @@
                 </a:solidFill>
                 <a:latin typeface="Arial"/>
               </a:rPr>
-              <a:t>Точная дата generative switch — начало 2023 (источники не дают строгий месяц).</a:t>
+              <a:t>Точная дата переключения на генеративный режим — начало 2023 (источники не дают строгий месяц).</a:t>
             </a:r>
           </a:p>
         </p:txBody>
@@ -24325,7 +24331,7 @@
                 </a:solidFill>
                 <a:latin typeface="Arial"/>
               </a:rPr>
-              <a:t>Medical AI training datasets наследуют data security risk.</a:t>
+              <a:t>Обучающие данные медицинского AI наследуют риски безопасности.</a:t>
             </a:r>
           </a:p>
         </p:txBody>
@@ -24358,13 +24364,13 @@
               </a:lnSpc>
             </a:pPr>
             <a:r>
-              <a:rPr sz="1400" b="0" i="1">
+              <a:rPr sz="1300" b="0" i="1">
                 <a:solidFill>
                   <a:srgbClr val="065A82"/>
                 </a:solidFill>
                 <a:latin typeface="Arial"/>
               </a:rPr>
-              <a:t>Change Healthcare (Feb 2024): 190M человек, $2.457 млрд recovery cost — medical data target №1.</a:t>
+              <a:t>Change Healthcare (февр. 2024): 190 млн человек, $2.457 млрд на восстановление — медданные мишень №1.</a:t>
             </a:r>
           </a:p>
         </p:txBody>
@@ -24490,7 +24496,7 @@
                 </a:solidFill>
                 <a:latin typeface="Arial"/>
               </a:rPr>
-              <a:t>UnitedHealth: 190 million Americans impacted by 2024 Change Healthcare data breach</a:t>
+              <a:t>UnitedHealth: 190 млн американцев пострадали от утечки данных Change Healthcare 2024</a:t>
             </a:r>
           </a:p>
         </p:txBody>
@@ -24577,7 +24583,7 @@
                 </a:solidFill>
                 <a:latin typeface="Arial"/>
               </a:rPr>
-              <a:t>190M</a:t>
+              <a:t>190 млн</a:t>
             </a:r>
           </a:p>
         </p:txBody>
@@ -24616,7 +24622,7 @@
                 </a:solidFill>
                 <a:latin typeface="Arial"/>
               </a:rPr>
-              <a:t>Americans affected (~57% US pop)</a:t>
+              <a:t>пострадавших американцев (~57% населения США)</a:t>
             </a:r>
           </a:p>
         </p:txBody>
@@ -24703,7 +24709,7 @@
                 </a:solidFill>
                 <a:latin typeface="Arial"/>
               </a:rPr>
-              <a:t>$2.457B</a:t>
+              <a:t>$2.457 млрд</a:t>
             </a:r>
           </a:p>
         </p:txBody>
@@ -24742,7 +24748,7 @@
                 </a:solidFill>
                 <a:latin typeface="Arial"/>
               </a:rPr>
-              <a:t>recovery cost UHG Q3 2024</a:t>
+              <a:t>стоимость восстановления UHG, 3 кв. 2024</a:t>
             </a:r>
           </a:p>
         </p:txBody>
@@ -24829,7 +24835,7 @@
                 </a:solidFill>
                 <a:latin typeface="Arial"/>
               </a:rPr>
-              <a:t>6 TB</a:t>
+              <a:t>6 ТБ</a:t>
             </a:r>
           </a:p>
         </p:txBody>
@@ -24868,7 +24874,7 @@
                 </a:solidFill>
                 <a:latin typeface="Arial"/>
               </a:rPr>
-              <a:t>exfiltrated</a:t>
+              <a:t>украдено</a:t>
             </a:r>
           </a:p>
         </p:txBody>
@@ -24955,7 +24961,7 @@
                 </a:solidFill>
                 <a:latin typeface="Arial"/>
               </a:rPr>
-              <a:t>Multi-week</a:t>
+              <a:t>Несколько недель</a:t>
             </a:r>
           </a:p>
         </p:txBody>
@@ -24994,7 +25000,7 @@
                 </a:solidFill>
                 <a:latin typeface="Arial"/>
               </a:rPr>
-              <a:t>US claims disruption</a:t>
+              <a:t>сбои в страховых выплатах США</a:t>
             </a:r>
           </a:p>
         </p:txBody>
@@ -25081,7 +25087,7 @@
                 </a:solidFill>
                 <a:latin typeface="Arial"/>
               </a:rPr>
-              <a:t>$22M</a:t>
+              <a:t>$22 млн</a:t>
             </a:r>
           </a:p>
         </p:txBody>
@@ -25120,7 +25126,7 @@
                 </a:solidFill>
                 <a:latin typeface="Arial"/>
               </a:rPr>
-              <a:t>ALPHV/BlackCat ransom</a:t>
+              <a:t>выкуп ALPHV/BlackCat</a:t>
             </a:r>
           </a:p>
         </p:txBody>
@@ -25207,7 +25213,7 @@
                 </a:solidFill>
                 <a:latin typeface="Arial"/>
               </a:rPr>
-              <a:t>AI connection — medical AI training datasets inherit risk</a:t>
+              <a:t>Связь с AI — обучающие датасеты медицинского AI наследуют те же риски</a:t>
             </a:r>
           </a:p>
         </p:txBody>
@@ -25246,7 +25252,7 @@
                 </a:solidFill>
                 <a:latin typeface="Arial"/>
               </a:rPr>
-              <a:t>mosmed.ai = 18M+ images → ransomware target scope. Анонимизация ≠ anonymity (Sweeney 2002 re-identification governor MA).</a:t>
+              <a:t>mosmed.ai = 18 млн+ изображений → расширяет цели для ransomware. Анонимизация ≠ необратимая (Sweeney 2002 — re-identification губернатора Массачусетса).</a:t>
             </a:r>
           </a:p>
         </p:txBody>
@@ -25507,7 +25513,7 @@
                 </a:solidFill>
                 <a:latin typeface="Arial"/>
               </a:rPr>
-              <a:t>Врач решает. AI подсказывает. Final responsibility undivided.</a:t>
+              <a:t>Врач решает. AI подсказывает. Конечная ответственность — неделима.</a:t>
             </a:r>
           </a:p>
         </p:txBody>
@@ -25546,7 +25552,7 @@
                 </a:solidFill>
                 <a:latin typeface="Arial"/>
               </a:rPr>
-              <a:t>4 actors с разной комбинацией technical control × legal liability.</a:t>
+              <a:t>4 актёра с разной комбинацией: технический контроль × юридическая ответственность.</a:t>
             </a:r>
           </a:p>
         </p:txBody>
@@ -25657,7 +25663,7 @@
                 </a:solidFill>
                 <a:latin typeface="Arial"/>
               </a:rPr>
-              <a:t>Regulator</a:t>
+              <a:t>Регулятор</a:t>
             </a:r>
           </a:p>
         </p:txBody>
@@ -25670,7 +25676,7 @@
         </p:nvSpPr>
         <p:spPr>
           <a:xfrm>
-            <a:off x="1554480" y="2697480"/>
+            <a:off x="1554480" y="2560320"/>
             <a:ext cx="4434840" cy="365760"/>
           </a:xfrm>
           <a:prstGeom prst="rect">
@@ -25696,7 +25702,7 @@
                 </a:solidFill>
                 <a:latin typeface="Arial"/>
               </a:rPr>
-              <a:t>Approves · audits · revokes</a:t>
+              <a:t>Одобряет · проверяет · отзывает разрешения</a:t>
             </a:r>
           </a:p>
         </p:txBody>
@@ -25709,33 +25715,33 @@
         </p:nvSpPr>
         <p:spPr>
           <a:xfrm>
-            <a:off x="1554480" y="3063240"/>
-            <a:ext cx="4434840" cy="274320"/>
-          </a:xfrm>
-          <a:prstGeom prst="rect">
-            <a:avLst/>
-          </a:prstGeom>
-          <a:noFill/>
-        </p:spPr>
-        <p:txBody>
-          <a:bodyPr wrap="square" lIns="0" rIns="0" tIns="0" bIns="0" anchor="t">
-            <a:spAutoFit/>
-          </a:bodyPr>
-          <a:lstStyle/>
-          <a:p>
-            <a:pPr algn="l">
-              <a:lnSpc>
-                <a:spcPct val="115000"/>
-              </a:lnSpc>
-            </a:pPr>
-            <a:r>
-              <a:rPr sz="1100" b="0" i="1">
+            <a:off x="1554480" y="2926080"/>
+            <a:ext cx="4434840" cy="502920"/>
+          </a:xfrm>
+          <a:prstGeom prst="rect">
+            <a:avLst/>
+          </a:prstGeom>
+          <a:noFill/>
+        </p:spPr>
+        <p:txBody>
+          <a:bodyPr wrap="square" lIns="0" rIns="0" tIns="0" bIns="0" anchor="t">
+            <a:spAutoFit/>
+          </a:bodyPr>
+          <a:lstStyle/>
+          <a:p>
+            <a:pPr algn="l">
+              <a:lnSpc>
+                <a:spcPct val="120000"/>
+              </a:lnSpc>
+            </a:pPr>
+            <a:r>
+              <a:rPr sz="900" b="0" i="1">
                 <a:solidFill>
                   <a:srgbClr val="6B7685"/>
                 </a:solidFill>
                 <a:latin typeface="Arial"/>
               </a:rPr>
-              <a:t>FDA · EU NB · Росздравнадзор · high oversight role</a:t>
+              <a:t>FDA · EU NB · Росздравнадзор · надзорная роль</a:t>
             </a:r>
           </a:p>
         </p:txBody>
@@ -25859,7 +25865,7 @@
         </p:nvSpPr>
         <p:spPr>
           <a:xfrm>
-            <a:off x="6446520" y="2697480"/>
+            <a:off x="6446520" y="2560320"/>
             <a:ext cx="4434840" cy="365760"/>
           </a:xfrm>
           <a:prstGeom prst="rect">
@@ -25885,7 +25891,7 @@
                 </a:solidFill>
                 <a:latin typeface="Arial"/>
               </a:rPr>
-              <a:t>Final diagnostic decision</a:t>
+              <a:t>Конечный диагностический ответ</a:t>
             </a:r>
           </a:p>
         </p:txBody>
@@ -25898,33 +25904,33 @@
         </p:nvSpPr>
         <p:spPr>
           <a:xfrm>
-            <a:off x="6446520" y="3063240"/>
-            <a:ext cx="4434840" cy="274320"/>
-          </a:xfrm>
-          <a:prstGeom prst="rect">
-            <a:avLst/>
-          </a:prstGeom>
-          <a:noFill/>
-        </p:spPr>
-        <p:txBody>
-          <a:bodyPr wrap="square" lIns="0" rIns="0" tIns="0" bIns="0" anchor="t">
-            <a:spAutoFit/>
-          </a:bodyPr>
-          <a:lstStyle/>
-          <a:p>
-            <a:pPr algn="l">
-              <a:lnSpc>
-                <a:spcPct val="115000"/>
-              </a:lnSpc>
-            </a:pPr>
-            <a:r>
-              <a:rPr sz="1100" b="0" i="1">
+            <a:off x="6446520" y="2926080"/>
+            <a:ext cx="4434840" cy="502920"/>
+          </a:xfrm>
+          <a:prstGeom prst="rect">
+            <a:avLst/>
+          </a:prstGeom>
+          <a:noFill/>
+        </p:spPr>
+        <p:txBody>
+          <a:bodyPr wrap="square" lIns="0" rIns="0" tIns="0" bIns="0" anchor="t">
+            <a:spAutoFit/>
+          </a:bodyPr>
+          <a:lstStyle/>
+          <a:p>
+            <a:pPr algn="l">
+              <a:lnSpc>
+                <a:spcPct val="120000"/>
+              </a:lnSpc>
+            </a:pPr>
+            <a:r>
+              <a:rPr sz="900" b="0" i="1">
                 <a:solidFill>
                   <a:srgbClr val="6B7685"/>
                 </a:solidFill>
                 <a:latin typeface="Arial"/>
               </a:rPr>
-              <a:t>AI = подсказка, не decision · high liability</a:t>
+              <a:t>AI — подсказка, не решение · высокая ответственность</a:t>
             </a:r>
           </a:p>
         </p:txBody>
@@ -26035,7 +26041,7 @@
                 </a:solidFill>
                 <a:latin typeface="Arial"/>
               </a:rPr>
-              <a:t>Operator</a:t>
+              <a:t>Оператор</a:t>
             </a:r>
           </a:p>
         </p:txBody>
@@ -26048,7 +26054,7 @@
         </p:nvSpPr>
         <p:spPr>
           <a:xfrm>
-            <a:off x="1554480" y="4389120"/>
+            <a:off x="1554480" y="4251960"/>
             <a:ext cx="4434840" cy="365760"/>
           </a:xfrm>
           <a:prstGeom prst="rect">
@@ -26074,7 +26080,7 @@
                 </a:solidFill>
                 <a:latin typeface="Arial"/>
               </a:rPr>
-              <a:t>Vendor selection · training · deployment</a:t>
+              <a:t>Выбор вендора · обучение · развёртывание</a:t>
             </a:r>
           </a:p>
         </p:txBody>
@@ -26087,33 +26093,33 @@
         </p:nvSpPr>
         <p:spPr>
           <a:xfrm>
-            <a:off x="1554480" y="4754880"/>
-            <a:ext cx="4434840" cy="274320"/>
-          </a:xfrm>
-          <a:prstGeom prst="rect">
-            <a:avLst/>
-          </a:prstGeom>
-          <a:noFill/>
-        </p:spPr>
-        <p:txBody>
-          <a:bodyPr wrap="square" lIns="0" rIns="0" tIns="0" bIns="0" anchor="t">
-            <a:spAutoFit/>
-          </a:bodyPr>
-          <a:lstStyle/>
-          <a:p>
-            <a:pPr algn="l">
-              <a:lnSpc>
-                <a:spcPct val="115000"/>
-              </a:lnSpc>
-            </a:pPr>
-            <a:r>
-              <a:rPr sz="1100" b="0" i="1">
+            <a:off x="1554480" y="4617720"/>
+            <a:ext cx="4434840" cy="502920"/>
+          </a:xfrm>
+          <a:prstGeom prst="rect">
+            <a:avLst/>
+          </a:prstGeom>
+          <a:noFill/>
+        </p:spPr>
+        <p:txBody>
+          <a:bodyPr wrap="square" lIns="0" rIns="0" tIns="0" bIns="0" anchor="t">
+            <a:spAutoFit/>
+          </a:bodyPr>
+          <a:lstStyle/>
+          <a:p>
+            <a:pPr algn="l">
+              <a:lnSpc>
+                <a:spcPct val="120000"/>
+              </a:lnSpc>
+            </a:pPr>
+            <a:r>
+              <a:rPr sz="900" b="0" i="1">
                 <a:solidFill>
                   <a:srgbClr val="6B7685"/>
                 </a:solidFill>
                 <a:latin typeface="Arial"/>
               </a:rPr>
-              <a:t>Больница · клиника · ДЗМ · medium control + liability</a:t>
+              <a:t>Больница · клиника · ДЗМ · средний контроль</a:t>
             </a:r>
           </a:p>
         </p:txBody>
@@ -26224,7 +26230,7 @@
                 </a:solidFill>
                 <a:latin typeface="Arial"/>
               </a:rPr>
-              <a:t>Vendor</a:t>
+              <a:t>Вендор AI</a:t>
             </a:r>
           </a:p>
         </p:txBody>
@@ -26237,7 +26243,7 @@
         </p:nvSpPr>
         <p:spPr>
           <a:xfrm>
-            <a:off x="6446520" y="4389120"/>
+            <a:off x="6446520" y="4251960"/>
             <a:ext cx="4434840" cy="365760"/>
           </a:xfrm>
           <a:prstGeom prst="rect">
@@ -26263,7 +26269,7 @@
                 </a:solidFill>
                 <a:latin typeface="Arial"/>
               </a:rPr>
-              <a:t>Model design · safety claims</a:t>
+              <a:t>Дизайн модели · заявки на безопасность</a:t>
             </a:r>
           </a:p>
         </p:txBody>
@@ -26276,33 +26282,33 @@
         </p:nvSpPr>
         <p:spPr>
           <a:xfrm>
-            <a:off x="6446520" y="4754880"/>
-            <a:ext cx="4434840" cy="274320"/>
-          </a:xfrm>
-          <a:prstGeom prst="rect">
-            <a:avLst/>
-          </a:prstGeom>
-          <a:noFill/>
-        </p:spPr>
-        <p:txBody>
-          <a:bodyPr wrap="square" lIns="0" rIns="0" tIns="0" bIns="0" anchor="t">
-            <a:spAutoFit/>
-          </a:bodyPr>
-          <a:lstStyle/>
-          <a:p>
-            <a:pPr algn="l">
-              <a:lnSpc>
-                <a:spcPct val="115000"/>
-              </a:lnSpc>
-            </a:pPr>
-            <a:r>
-              <a:rPr sz="1100" b="0" i="1">
+            <a:off x="6446520" y="4617720"/>
+            <a:ext cx="4434840" cy="502920"/>
+          </a:xfrm>
+          <a:prstGeom prst="rect">
+            <a:avLst/>
+          </a:prstGeom>
+          <a:noFill/>
+        </p:spPr>
+        <p:txBody>
+          <a:bodyPr wrap="square" lIns="0" rIns="0" tIns="0" bIns="0" anchor="t">
+            <a:spAutoFit/>
+          </a:bodyPr>
+          <a:lstStyle/>
+          <a:p>
+            <a:pPr algn="l">
+              <a:lnSpc>
+                <a:spcPct val="120000"/>
+              </a:lnSpc>
+            </a:pPr>
+            <a:r>
+              <a:rPr sz="900" b="0" i="1">
                 <a:solidFill>
                   <a:srgbClr val="6B7685"/>
                 </a:solidFill>
                 <a:latin typeface="Arial"/>
               </a:rPr>
-              <a:t>PCCP updates · post-market surveil. · high control</a:t>
+              <a:t>Обновления PCCP · пострыночный мониторинг · высокий контроль</a:t>
             </a:r>
           </a:p>
         </p:txBody>
@@ -26341,7 +26347,7 @@
                 </a:solidFill>
                 <a:latin typeface="Arial"/>
               </a:rPr>
-              <a:t>◄ low control · TECHNICAL CONTROL · high control ►</a:t>
+              <a:t>◄ низкий контроль · ТЕХНИЧЕСКИЙ КОНТРОЛЬ · высокий контроль ►</a:t>
             </a:r>
           </a:p>
         </p:txBody>
@@ -26370,21 +26376,21 @@
           <a:p>
             <a:pPr algn="ctr">
               <a:lnSpc>
-                <a:spcPct val="105000"/>
-              </a:lnSpc>
-            </a:pPr>
-            <a:r>
-              <a:rPr sz="1100" b="1" i="0">
+                <a:spcPct val="115000"/>
+              </a:lnSpc>
+            </a:pPr>
+            <a:r>
+              <a:rPr sz="1000" b="1" i="0">
                 <a:solidFill>
                   <a:srgbClr val="21295C"/>
                 </a:solidFill>
                 <a:latin typeface="Arial"/>
               </a:rPr>
-              <a:t>LIABILITY
-▲
-high
-▼
-low</a:t>
+              <a:t>ОТВЕТ-
+СТВЕН-
+НОСТЬ
+▲ высокая
+▼ низкая</a:t>
             </a:r>
           </a:p>
         </p:txBody>
@@ -26406,11 +26412,11 @@
             </a:avLst>
           </a:prstGeom>
           <a:solidFill>
-            <a:srgbClr val="F4F7FA"/>
+            <a:srgbClr val="FEF5E0"/>
           </a:solidFill>
-          <a:ln w="19050">
+          <a:ln w="25400">
             <a:solidFill>
-              <a:srgbClr val="1C7293"/>
+              <a:srgbClr val="F0AB00"/>
             </a:solidFill>
           </a:ln>
           <a:effectLst/>
@@ -26465,22 +26471,22 @@
               </a:lnSpc>
             </a:pPr>
             <a:r>
-              <a:rPr sz="1900" b="1" i="0">
+              <a:rPr sz="1700" b="1" i="0">
                 <a:solidFill>
                   <a:srgbClr val="21295C"/>
                 </a:solidFill>
                 <a:latin typeface="Arial"/>
               </a:rPr>
-              <a:t>Врач ставит диагноз. AI подсказывает. Final clinical responsibility — </a:t>
-            </a:r>
-            <a:r>
-              <a:rPr sz="1900" b="1" i="0">
+              <a:t>Врач ставит диагноз. AI подсказывает. Конечная клиническая ответственность — </a:t>
+            </a:r>
+            <a:r>
+              <a:rPr sz="1700" b="1" i="0">
                 <a:solidFill>
                   <a:srgbClr val="F0AB00"/>
                 </a:solidFill>
                 <a:latin typeface="Arial"/>
               </a:rPr>
-              <a:t>undivided.</a:t>
+              <a:t>неделима.</a:t>
             </a:r>
           </a:p>
         </p:txBody>
@@ -26576,7 +26582,7 @@
                 </a:solidFill>
                 <a:latin typeface="Arial"/>
               </a:rPr>
-              <a:t>3 takeaways — медицинский AI к 2026 году.</a:t>
+              <a:t>3 главных вывода — медицинский AI к 2026 году.</a:t>
             </a:r>
           </a:p>
         </p:txBody>
@@ -26615,7 +26621,7 @@
                 </a:solidFill>
                 <a:latin typeface="Arial"/>
               </a:rPr>
-              <a:t>Работающая инфраструктура + конкретная responsibility framework.</a:t>
+              <a:t>Работающая инфраструктура + конкретная рамка ответственности.</a:t>
             </a:r>
           </a:p>
         </p:txBody>
@@ -26850,7 +26856,7 @@
                 </a:solidFill>
                 <a:latin typeface="Arial"/>
               </a:rPr>
-              <a:t>mosmed.ai 14M+ исследований</a:t>
+              <a:t>mosmed.ai — 14 млн+ исследований</a:t>
             </a:r>
           </a:p>
         </p:txBody>
@@ -26935,7 +26941,7 @@
                 </a:solidFill>
                 <a:latin typeface="Arial"/>
               </a:rPr>
-              <a:t>FDA 1 451 devices (end-2025)</a:t>
+              <a:t>FDA — 1 451 устройство (к концу 2025)</a:t>
             </a:r>
           </a:p>
         </p:txBody>
@@ -27020,7 +27026,7 @@
                 </a:solidFill>
                 <a:latin typeface="Arial"/>
               </a:rPr>
-              <a:t>MASAI workload −44%</a:t>
+              <a:t>MASAI — нагрузка −44%</a:t>
             </a:r>
           </a:p>
         </p:txBody>
@@ -27105,7 +27111,7 @@
                 </a:solidFill>
                 <a:latin typeface="Arial"/>
               </a:rPr>
-              <a:t>CV-pipeline 2017–2024 уровня</a:t>
+              <a:t>CV-пайплайн уровня 2017–2024</a:t>
             </a:r>
           </a:p>
         </p:txBody>
@@ -27255,7 +27261,7 @@
                 </a:solidFill>
                 <a:latin typeface="Arial"/>
               </a:rPr>
-              <a:t>Drug discovery — частично</a:t>
+              <a:t>Разработка лекарств — частично</a:t>
             </a:r>
           </a:p>
         </p:txBody>
@@ -27340,7 +27346,7 @@
                 </a:solidFill>
                 <a:latin typeface="Arial"/>
               </a:rPr>
-              <a:t>AlphaFold solved · Нобель 2024</a:t>
+              <a:t>AlphaFold решена · Нобель 2024</a:t>
             </a:r>
           </a:p>
         </p:txBody>
@@ -27425,7 +27431,7 @@
                 </a:solidFill>
                 <a:latin typeface="Arial"/>
               </a:rPr>
-              <a:t>Insilico Rentosertib — Phase IIa peer-reviewed</a:t>
+              <a:t>Rentosertib — Phase IIa подтверждён</a:t>
             </a:r>
           </a:p>
         </p:txBody>
@@ -27510,7 +27516,7 @@
                 </a:solidFill>
                 <a:latin typeface="Arial"/>
               </a:rPr>
-              <a:t>DSP-1181 — discontinued</a:t>
+              <a:t>DSP-1181 — программа закрыта</a:t>
             </a:r>
           </a:p>
         </p:txBody>
@@ -27595,7 +27601,7 @@
                 </a:solidFill>
                 <a:latin typeface="Arial"/>
               </a:rPr>
-              <a:t>Clinical attrition unchanged</a:t>
+              <a:t>Отсев на клинических не изменился</a:t>
             </a:r>
           </a:p>
         </p:txBody>
@@ -27915,7 +27921,7 @@
                 </a:solidFill>
                 <a:latin typeface="Arial"/>
               </a:rPr>
-              <a:t>Инженер делает responsibility выполнимой</a:t>
+              <a:t>Инженер делает её выполнимой</a:t>
             </a:r>
           </a:p>
         </p:txBody>
@@ -28000,7 +28006,7 @@
                 </a:solidFill>
                 <a:latin typeface="Arial"/>
               </a:rPr>
-              <a:t>3 принципа → черновик следующей лекции</a:t>
+              <a:t>3 принципа → черновик чек-листа</a:t>
             </a:r>
           </a:p>
         </p:txBody>
@@ -28085,7 +28091,7 @@
                 </a:solidFill>
                 <a:latin typeface="Arial"/>
               </a:rPr>
-              <a:t>Personal версия → последняя лекция</a:t>
+              <a:t>Личная версия → Лекция 14</a:t>
             </a:r>
           </a:p>
         </p:txBody>
@@ -28172,7 +28178,7 @@
                 </a:solidFill>
                 <a:latin typeface="Arial"/>
               </a:rPr>
-              <a:t>→ 3 takeaways = input для черновика чек-листа на следующей лекции. Не финальный синтез — input.</a:t>
+              <a:t>→ 3 вывода = заготовка для черновика чек-листа на следующей лекции. Не финальный синтез — заготовка.</a:t>
             </a:r>
           </a:p>
         </p:txBody>
@@ -28253,7 +28259,7 @@
       </p:sp>
       <p:pic>
         <p:nvPicPr>
-          <p:cNvPr id="3" name="Picture 2" descr="s27-ama-trust-ai.jpg"/>
+          <p:cNvPr id="3" name="Picture 2" descr="s27-doctor-patient.jpg"/>
           <p:cNvPicPr>
             <a:picLocks noChangeAspect="1"/>
           </p:cNvPicPr>
@@ -28267,8 +28273,8 @@
         </p:blipFill>
         <p:spPr>
           <a:xfrm>
-            <a:off x="777240" y="1143000"/>
-            <a:ext cx="4480560" cy="4297679"/>
+            <a:off x="1298448" y="1143000"/>
+            <a:ext cx="3438143" cy="4297679"/>
           </a:xfrm>
           <a:prstGeom prst="rect">
             <a:avLst/>
@@ -28309,7 +28315,7 @@
                 </a:solidFill>
                 <a:latin typeface="Arial"/>
               </a:rPr>
-              <a:t>AMA — AI Trust Index, physicians + patients (ama-assn.org)</a:t>
+              <a:t>Врач — тот, кто берёт ответственность за пациента.</a:t>
             </a:r>
           </a:p>
         </p:txBody>
@@ -28508,7 +28514,7 @@
                 </a:solidFill>
                 <a:latin typeface="Arial"/>
               </a:rPr>
-              <a:t>callback to central question — payoff</a:t>
+              <a:t>Возврат к центральному вопросу — ответ.</a:t>
             </a:r>
           </a:p>
         </p:txBody>
@@ -28547,7 +28553,7 @@
                 </a:solidFill>
                 <a:latin typeface="Arial"/>
               </a:rPr>
-              <a:t>Transparency · validated population · audit-trail — три инженерных принципа в копилку Lec 9.</a:t>
+              <a:t>Прозрачность · валидированная популяция · audit-trail — три инженерных принципа в копилку Лекции 9.</a:t>
             </a:r>
           </a:p>
         </p:txBody>
@@ -28643,7 +28649,7 @@
                 </a:solidFill>
                 <a:latin typeface="Arial"/>
               </a:rPr>
-              <a:t>3 принципа сегодня — input для черновика чек-листа на следующей лекции по этике.</a:t>
+              <a:t>3 принципа сегодня — основа для черновика чек-листа на следующей лекции по этике.</a:t>
             </a:r>
           </a:p>
         </p:txBody>
@@ -28841,7 +28847,7 @@
                 </a:solidFill>
                 <a:latin typeface="Arial"/>
               </a:rPr>
-              <a:t>  эффективности (Russian context)</a:t>
+              <a:t>  эффективности (российский кейс)</a:t>
             </a:r>
           </a:p>
         </p:txBody>
@@ -28880,7 +28886,7 @@
                 </a:solidFill>
                 <a:latin typeface="Arial"/>
               </a:rPr>
-              <a:t>Predictive maintenance · QC · physical AI</a:t>
+              <a:t>Предиктивное обслуживание · контроль качества · физический AI</a:t>
             </a:r>
           </a:p>
         </p:txBody>
@@ -29031,8 +29037,8 @@
                 <a:latin typeface="Arial"/>
               </a:rPr>
               <a:t>3 принципа сегодня
-→ черновик чек-листа на Lec 9
-→ personal версия на Lec 14</a:t>
+→ черновик чек-листа на Лекции 9
+→ личная версия на Лекции 14</a:t>
             </a:r>
           </a:p>
         </p:txBody>
@@ -29119,7 +29125,7 @@
                 </a:solidFill>
                 <a:latin typeface="Arial"/>
               </a:rPr>
-              <a:t>Опционально: найти 1 case medical AI в news + apply 4-actor framework. Не оценивается; тренировка навыка.</a:t>
+              <a:t>Опционально: найти 1 случай медицинского AI в новостях + применить рамку 4 актёров. Не оценивается; тренировка навыка.</a:t>
             </a:r>
           </a:p>
         </p:txBody>
@@ -29469,7 +29475,7 @@
                 </a:solidFill>
                 <a:latin typeface="Arial"/>
               </a:rPr>
-              <a:t>3. Medical AI стартап — первый вопрос о validation?</a:t>
+              <a:t>3. Стартап в медицинском AI — какой первый вопрос про валидацию?</a:t>
             </a:r>
           </a:p>
         </p:txBody>
@@ -29508,7 +29514,7 @@
                 </a:solidFill>
                 <a:latin typeface="Arial"/>
               </a:rPr>
-              <a:t>Курс «AI в разных индустриях» · sem-04 case study · office hours</a:t>
+              <a:t>Курс «AI в разных индустриях» · Семинар-04 — разбор кейса · консультации</a:t>
             </a:r>
           </a:p>
         </p:txBody>
@@ -30706,7 +30712,7 @@
                 </a:solidFill>
                 <a:latin typeface="Arial"/>
               </a:rPr>
-              <a:t>AI в медицине — уже не «будущее», а production-инфраструктура.</a:t>
+              <a:t>AI в медицине — уже не «будущее», а рабочая инфраструктура.</a:t>
             </a:r>
           </a:p>
         </p:txBody>
@@ -30793,7 +30799,7 @@
                 </a:solidFill>
                 <a:latin typeface="Arial"/>
               </a:rPr>
-              <a:t>FDA — AI/ML-Enabled Medical Devices</a:t>
+              <a:t>FDA — AI/ML-устройства, одобренные для медицины</a:t>
             </a:r>
           </a:p>
         </p:txBody>
@@ -30832,7 +30838,7 @@
                 </a:solidFill>
                 <a:latin typeface="Arial"/>
               </a:rPr>
-              <a:t>cumulative · end-2025</a:t>
+              <a:t>накопленным итогом · к концу 2025</a:t>
             </a:r>
           </a:p>
         </p:txBody>
@@ -31205,7 +31211,7 @@
         </p:nvSpPr>
         <p:spPr>
           <a:xfrm>
-            <a:off x="7680960" y="1920240"/>
+            <a:off x="7680960" y="1874520"/>
             <a:ext cx="3931920" cy="411480"/>
           </a:xfrm>
           <a:prstGeom prst="rect">
@@ -31221,56 +31227,56 @@
           <a:p>
             <a:pPr algn="l">
               <a:lnSpc>
+                <a:spcPct val="110000"/>
+              </a:lnSpc>
+            </a:pPr>
+            <a:r>
+              <a:rPr sz="1600" b="1" i="0">
+                <a:solidFill>
+                  <a:srgbClr val="21295C"/>
+                </a:solidFill>
+                <a:latin typeface="Arial"/>
+              </a:rPr>
+              <a:t>mosmed.ai — 5 лет работы</a:t>
+            </a:r>
+          </a:p>
+        </p:txBody>
+      </p:sp>
+      <p:sp>
+        <p:nvSpPr>
+          <p:cNvPr id="16" name="TextBox 15"/>
+          <p:cNvSpPr txBox="1"/>
+          <p:nvPr/>
+        </p:nvSpPr>
+        <p:spPr>
+          <a:xfrm>
+            <a:off x="7680960" y="2331720"/>
+            <a:ext cx="3931920" cy="320040"/>
+          </a:xfrm>
+          <a:prstGeom prst="rect">
+            <a:avLst/>
+          </a:prstGeom>
+          <a:noFill/>
+        </p:spPr>
+        <p:txBody>
+          <a:bodyPr wrap="square" lIns="0" rIns="0" tIns="0" bIns="0" anchor="t">
+            <a:spAutoFit/>
+          </a:bodyPr>
+          <a:lstStyle/>
+          <a:p>
+            <a:pPr algn="l">
+              <a:lnSpc>
                 <a:spcPct val="115000"/>
               </a:lnSpc>
             </a:pPr>
             <a:r>
-              <a:rPr sz="1800" b="1" i="0">
-                <a:solidFill>
-                  <a:srgbClr val="21295C"/>
-                </a:solidFill>
-                <a:latin typeface="Arial"/>
-              </a:rPr>
-              <a:t>mosmed.ai — 5 лет production</a:t>
-            </a:r>
-          </a:p>
-        </p:txBody>
-      </p:sp>
-      <p:sp>
-        <p:nvSpPr>
-          <p:cNvPr id="16" name="TextBox 15"/>
-          <p:cNvSpPr txBox="1"/>
-          <p:nvPr/>
-        </p:nvSpPr>
-        <p:spPr>
-          <a:xfrm>
-            <a:off x="7680960" y="2377440"/>
-            <a:ext cx="3931920" cy="274320"/>
-          </a:xfrm>
-          <a:prstGeom prst="rect">
-            <a:avLst/>
-          </a:prstGeom>
-          <a:noFill/>
-        </p:spPr>
-        <p:txBody>
-          <a:bodyPr wrap="square" lIns="0" rIns="0" tIns="0" bIns="0" anchor="t">
-            <a:spAutoFit/>
-          </a:bodyPr>
-          <a:lstStyle/>
-          <a:p>
-            <a:pPr algn="l">
-              <a:lnSpc>
-                <a:spcPct val="115000"/>
-              </a:lnSpc>
-            </a:pPr>
-            <a:r>
-              <a:rPr sz="1100" b="0" i="1">
+              <a:rPr sz="1000" b="0" i="1">
                 <a:solidFill>
                   <a:srgbClr val="1C7293"/>
                 </a:solidFill>
                 <a:latin typeface="Arial"/>
               </a:rPr>
-              <a:t>ДЗМ Москвы → федеральный MosMedAI (май 2024)</a:t>
+              <a:t>ДЗМ Москвы → MosMedAI (май 2024)</a:t>
             </a:r>
           </a:p>
         </p:txBody>
@@ -31777,7 +31783,7 @@
                 </a:solidFill>
                 <a:latin typeface="Arial"/>
               </a:rPr>
-              <a:t>FDA AI/ML list end-2025 (theimagingwire.com 10.12.2025) · Remedium 2025 · mos.ru AI Leaders Award.</a:t>
+              <a:t>FDA AI/ML list (к концу 2025, theimagingwire.com 10.12.2025) · Remedium 2025 · mos.ru AI Leaders Award.</a:t>
             </a:r>
           </a:p>
         </p:txBody>
@@ -32044,7 +32050,7 @@
                 </a:solidFill>
                 <a:latin typeface="Arial"/>
               </a:rPr>
-              <a:t>Roadmap — 4 раздела</a:t>
+              <a:t>Маршрут лекции — 4 раздела</a:t>
             </a:r>
           </a:p>
         </p:txBody>
@@ -32416,7 +32422,7 @@
                 </a:solidFill>
                 <a:latin typeface="Arial"/>
               </a:rPr>
-              <a:t>Drug discovery — обещания vs реальность</a:t>
+              <a:t>Разработка лекарств — обещания vs реальность</a:t>
             </a:r>
           </a:p>
         </p:txBody>
@@ -32595,7 +32601,7 @@
       </p:sp>
       <p:pic>
         <p:nvPicPr>
-          <p:cNvPr id="20" name="Picture 19" descr="s05-stat-fda-ai.jpg"/>
+          <p:cNvPr id="20" name="Picture 19" descr="s05-doctor-laptop.jpg"/>
           <p:cNvPicPr>
             <a:picLocks noChangeAspect="1"/>
           </p:cNvPicPr>
@@ -32609,8 +32615,8 @@
         </p:blipFill>
         <p:spPr>
           <a:xfrm>
-            <a:off x="6858000" y="3749039"/>
-            <a:ext cx="4663440" cy="1874519"/>
+            <a:off x="7783327" y="3749039"/>
+            <a:ext cx="2812783" cy="1874519"/>
           </a:xfrm>
           <a:prstGeom prst="rect">
             <a:avLst/>
@@ -32651,7 +32657,7 @@
                 </a:solidFill>
                 <a:latin typeface="Arial"/>
               </a:rPr>
-              <a:t>STAT News — AI Prognosis (statnews.com, 13.05.2026)</a:t>
+              <a:t>Врач + ноутбук + стетоскоп — где AI встречает клиническую работу</a:t>
             </a:r>
           </a:p>
         </p:txBody>
@@ -32747,7 +32753,7 @@
                 </a:solidFill>
                 <a:latin typeface="Arial"/>
               </a:rPr>
-              <a:t>AI в медицине — 4 разные индустрии, не один tools-set.</a:t>
+              <a:t>AI в медицине — 4 разные индустрии, не один набор инструментов.</a:t>
             </a:r>
           </a:p>
         </p:txBody>
@@ -32786,7 +32792,7 @@
                 </a:solidFill>
                 <a:latin typeface="Arial"/>
               </a:rPr>
-              <a:t>Modality × Scope = design-driven taxonomy</a:t>
+              <a:t>Модальность данных × охват = карта применений</a:t>
             </a:r>
           </a:p>
         </p:txBody>
@@ -32799,8 +32805,8 @@
         </p:nvSpPr>
         <p:spPr>
           <a:xfrm>
-            <a:off x="1371600" y="1874519"/>
-            <a:ext cx="4709159" cy="1920239"/>
+            <a:off x="1600200" y="1874519"/>
+            <a:ext cx="4594859" cy="1920239"/>
           </a:xfrm>
           <a:prstGeom prst="roundRect">
             <a:avLst>
@@ -32855,7 +32861,7 @@
         </p:blipFill>
         <p:spPr>
           <a:xfrm>
-            <a:off x="1554480" y="2057400"/>
+            <a:off x="1783080" y="2057400"/>
             <a:ext cx="640080" cy="640080"/>
           </a:xfrm>
           <a:prstGeom prst="rect">
@@ -32871,8 +32877,8 @@
         </p:nvSpPr>
         <p:spPr>
           <a:xfrm>
-            <a:off x="2331720" y="2057400"/>
-            <a:ext cx="3657599" cy="502920"/>
+            <a:off x="2560320" y="2011680"/>
+            <a:ext cx="3543299" cy="685800"/>
           </a:xfrm>
           <a:prstGeom prst="rect">
             <a:avLst/>
@@ -32891,7 +32897,7 @@
               </a:lnSpc>
             </a:pPr>
             <a:r>
-              <a:rPr sz="1800" b="1" i="0">
+              <a:rPr sz="1600" b="1" i="0">
                 <a:solidFill>
                   <a:srgbClr val="065A82"/>
                 </a:solidFill>
@@ -32910,8 +32916,8 @@
         </p:nvSpPr>
         <p:spPr>
           <a:xfrm>
-            <a:off x="1554480" y="2880360"/>
-            <a:ext cx="4434840" cy="411480"/>
+            <a:off x="1783080" y="2926080"/>
+            <a:ext cx="4320540" cy="502920"/>
           </a:xfrm>
           <a:prstGeom prst="rect">
             <a:avLst/>
@@ -32936,7 +32942,7 @@
                 </a:solidFill>
                 <a:latin typeface="Arial"/>
               </a:rPr>
-              <a:t>CT · MRI · X-ray · дермато-скан</a:t>
+              <a:t>КТ · МРТ · рентген · дермато-скан</a:t>
             </a:r>
           </a:p>
         </p:txBody>
@@ -32949,8 +32955,8 @@
         </p:nvSpPr>
         <p:spPr>
           <a:xfrm>
-            <a:off x="1554480" y="3337560"/>
-            <a:ext cx="4434840" cy="457200"/>
+            <a:off x="1783080" y="3429000"/>
+            <a:ext cx="4320540" cy="457200"/>
           </a:xfrm>
           <a:prstGeom prst="rect">
             <a:avLst/>
@@ -32988,8 +32994,8 @@
         </p:nvSpPr>
         <p:spPr>
           <a:xfrm>
-            <a:off x="6263640" y="1874519"/>
-            <a:ext cx="4709159" cy="1920239"/>
+            <a:off x="6377940" y="1874519"/>
+            <a:ext cx="4594859" cy="1920239"/>
           </a:xfrm>
           <a:prstGeom prst="roundRect">
             <a:avLst>
@@ -33044,7 +33050,7 @@
         </p:blipFill>
         <p:spPr>
           <a:xfrm>
-            <a:off x="6446520" y="2057400"/>
+            <a:off x="6560820" y="2057400"/>
             <a:ext cx="640080" cy="640080"/>
           </a:xfrm>
           <a:prstGeom prst="rect">
@@ -33060,8 +33066,8 @@
         </p:nvSpPr>
         <p:spPr>
           <a:xfrm>
-            <a:off x="7223760" y="2057400"/>
-            <a:ext cx="3657599" cy="502920"/>
+            <a:off x="7338060" y="2011680"/>
+            <a:ext cx="3543299" cy="685800"/>
           </a:xfrm>
           <a:prstGeom prst="rect">
             <a:avLst/>
@@ -33080,13 +33086,13 @@
               </a:lnSpc>
             </a:pPr>
             <a:r>
-              <a:rPr sz="1800" b="1" i="0">
+              <a:rPr sz="1600" b="1" i="0">
                 <a:solidFill>
                   <a:srgbClr val="1C7293"/>
                 </a:solidFill>
                 <a:latin typeface="Arial"/>
               </a:rPr>
-              <a:t>Population imaging</a:t>
+              <a:t>Популяционная визуализация</a:t>
             </a:r>
           </a:p>
         </p:txBody>
@@ -33099,8 +33105,8 @@
         </p:nvSpPr>
         <p:spPr>
           <a:xfrm>
-            <a:off x="6446520" y="2880360"/>
-            <a:ext cx="4434840" cy="411480"/>
+            <a:off x="6560820" y="2926080"/>
+            <a:ext cx="4320540" cy="502920"/>
           </a:xfrm>
           <a:prstGeom prst="rect">
             <a:avLst/>
@@ -33138,8 +33144,8 @@
         </p:nvSpPr>
         <p:spPr>
           <a:xfrm>
-            <a:off x="6446520" y="3337560"/>
-            <a:ext cx="4434840" cy="457200"/>
+            <a:off x="6560820" y="3429000"/>
+            <a:ext cx="4320540" cy="457200"/>
           </a:xfrm>
           <a:prstGeom prst="rect">
             <a:avLst/>
@@ -33164,7 +33170,7 @@
                 </a:solidFill>
                 <a:latin typeface="Arial"/>
               </a:rPr>
-              <a:t>MASAI (Sweden) · BreastScreen</a:t>
+              <a:t>MASAI (Швеция) · BreastScreen</a:t>
             </a:r>
           </a:p>
         </p:txBody>
@@ -33177,8 +33183,8 @@
         </p:nvSpPr>
         <p:spPr>
           <a:xfrm>
-            <a:off x="1371600" y="3977639"/>
-            <a:ext cx="4709159" cy="1920239"/>
+            <a:off x="1600200" y="3977639"/>
+            <a:ext cx="4594859" cy="1920239"/>
           </a:xfrm>
           <a:prstGeom prst="roundRect">
             <a:avLst>
@@ -33233,7 +33239,7 @@
         </p:blipFill>
         <p:spPr>
           <a:xfrm>
-            <a:off x="1554480" y="4160520"/>
+            <a:off x="1783080" y="4160520"/>
             <a:ext cx="640080" cy="640080"/>
           </a:xfrm>
           <a:prstGeom prst="rect">
@@ -33249,8 +33255,8 @@
         </p:nvSpPr>
         <p:spPr>
           <a:xfrm>
-            <a:off x="2331720" y="4160520"/>
-            <a:ext cx="3657599" cy="502920"/>
+            <a:off x="2560320" y="4114800"/>
+            <a:ext cx="3543299" cy="685800"/>
           </a:xfrm>
           <a:prstGeom prst="rect">
             <a:avLst/>
@@ -33269,13 +33275,13 @@
               </a:lnSpc>
             </a:pPr>
             <a:r>
-              <a:rPr sz="1800" b="1" i="0">
+              <a:rPr sz="1600" b="1" i="0">
                 <a:solidFill>
                   <a:srgbClr val="1C7293"/>
                 </a:solidFill>
                 <a:latin typeface="Arial"/>
               </a:rPr>
-              <a:t>Personalized medicine</a:t>
+              <a:t>Персонализированная медицина</a:t>
             </a:r>
           </a:p>
         </p:txBody>
@@ -33288,8 +33294,8 @@
         </p:nvSpPr>
         <p:spPr>
           <a:xfrm>
-            <a:off x="1554480" y="4983480"/>
-            <a:ext cx="4434840" cy="411480"/>
+            <a:off x="1783080" y="5029200"/>
+            <a:ext cx="4320540" cy="502920"/>
           </a:xfrm>
           <a:prstGeom prst="rect">
             <a:avLst/>
@@ -33314,7 +33320,7 @@
                 </a:solidFill>
                 <a:latin typeface="Arial"/>
               </a:rPr>
-              <a:t>Genomic AI · clinical decision</a:t>
+              <a:t>Геномный AI · клинические решения</a:t>
             </a:r>
           </a:p>
         </p:txBody>
@@ -33327,8 +33333,8 @@
         </p:nvSpPr>
         <p:spPr>
           <a:xfrm>
-            <a:off x="1554480" y="5440680"/>
-            <a:ext cx="4434840" cy="457200"/>
+            <a:off x="1783080" y="5532120"/>
+            <a:ext cx="4320540" cy="457200"/>
           </a:xfrm>
           <a:prstGeom prst="rect">
             <a:avLst/>
@@ -33366,8 +33372,8 @@
         </p:nvSpPr>
         <p:spPr>
           <a:xfrm>
-            <a:off x="6263640" y="3977639"/>
-            <a:ext cx="4709159" cy="1920239"/>
+            <a:off x="6377940" y="3977639"/>
+            <a:ext cx="4594859" cy="1920239"/>
           </a:xfrm>
           <a:prstGeom prst="roundRect">
             <a:avLst>
@@ -33422,7 +33428,7 @@
         </p:blipFill>
         <p:spPr>
           <a:xfrm>
-            <a:off x="6446520" y="4160520"/>
+            <a:off x="6560820" y="4160520"/>
             <a:ext cx="640080" cy="640080"/>
           </a:xfrm>
           <a:prstGeom prst="rect">
@@ -33438,8 +33444,8 @@
         </p:nvSpPr>
         <p:spPr>
           <a:xfrm>
-            <a:off x="7223760" y="4160520"/>
-            <a:ext cx="3657599" cy="502920"/>
+            <a:off x="7338060" y="4114800"/>
+            <a:ext cx="3543299" cy="685800"/>
           </a:xfrm>
           <a:prstGeom prst="rect">
             <a:avLst/>
@@ -33458,13 +33464,13 @@
               </a:lnSpc>
             </a:pPr>
             <a:r>
-              <a:rPr sz="1800" b="1" i="0">
+              <a:rPr sz="1600" b="1" i="0">
                 <a:solidFill>
                   <a:srgbClr val="065A82"/>
                 </a:solidFill>
                 <a:latin typeface="Arial"/>
               </a:rPr>
-              <a:t>Drug discovery + эпид.</a:t>
+              <a:t>Разработка лекарств + эпид.</a:t>
             </a:r>
           </a:p>
         </p:txBody>
@@ -33477,8 +33483,8 @@
         </p:nvSpPr>
         <p:spPr>
           <a:xfrm>
-            <a:off x="6446520" y="4983480"/>
-            <a:ext cx="4434840" cy="411480"/>
+            <a:off x="6560820" y="5029200"/>
+            <a:ext cx="4320540" cy="502920"/>
           </a:xfrm>
           <a:prstGeom prst="rect">
             <a:avLst/>
@@ -33503,7 +33509,7 @@
                 </a:solidFill>
                 <a:latin typeface="Arial"/>
               </a:rPr>
-              <a:t>Generative chemistry · structures</a:t>
+              <a:t>Генеративная химия · структуры белков</a:t>
             </a:r>
           </a:p>
         </p:txBody>
@@ -33516,8 +33522,8 @@
         </p:nvSpPr>
         <p:spPr>
           <a:xfrm>
-            <a:off x="6446520" y="5440680"/>
-            <a:ext cx="4434840" cy="457200"/>
+            <a:off x="6560820" y="5532120"/>
+            <a:ext cx="4320540" cy="457200"/>
           </a:xfrm>
           <a:prstGeom prst="rect">
             <a:avLst/>
@@ -33555,7 +33561,7 @@
         </p:nvSpPr>
         <p:spPr>
           <a:xfrm>
-            <a:off x="1417319" y="1920240"/>
+            <a:off x="1645919" y="1920240"/>
             <a:ext cx="164592" cy="164592"/>
           </a:xfrm>
           <a:prstGeom prst="roundRect">
@@ -33601,7 +33607,7 @@
         </p:nvSpPr>
         <p:spPr>
           <a:xfrm>
-            <a:off x="6309360" y="4023360"/>
+            <a:off x="6423660" y="4023360"/>
             <a:ext cx="164592" cy="164592"/>
           </a:xfrm>
           <a:prstGeom prst="roundRect">
@@ -33647,8 +33653,8 @@
         </p:nvSpPr>
         <p:spPr>
           <a:xfrm>
-            <a:off x="1280160" y="6080759"/>
-            <a:ext cx="9784080" cy="320040"/>
+            <a:off x="1508760" y="6080759"/>
+            <a:ext cx="9555480" cy="320040"/>
           </a:xfrm>
           <a:prstGeom prst="rect">
             <a:avLst/>
@@ -33673,7 +33679,7 @@
                 </a:solidFill>
                 <a:latin typeface="Arial"/>
               </a:rPr>
-              <a:t>◄ single patient        SCOPE        population / pharma ►</a:t>
+              <a:t>◄ один пациент        ОХВАТ        популяция / фарма ►</a:t>
             </a:r>
           </a:p>
         </p:txBody>
@@ -33687,7 +33693,7 @@
         <p:spPr>
           <a:xfrm>
             <a:off x="365760" y="1783080"/>
-            <a:ext cx="822960" cy="4206240"/>
+            <a:ext cx="1051560" cy="4206240"/>
           </a:xfrm>
           <a:prstGeom prst="rect">
             <a:avLst/>
@@ -33702,23 +33708,21 @@
           <a:p>
             <a:pPr algn="ctr">
               <a:lnSpc>
-                <a:spcPct val="105000"/>
-              </a:lnSpc>
-            </a:pPr>
-            <a:r>
-              <a:rPr sz="1100" b="1" i="0">
+                <a:spcPct val="115000"/>
+              </a:lnSpc>
+            </a:pPr>
+            <a:r>
+              <a:rPr sz="1000" b="1" i="0">
                 <a:solidFill>
                   <a:srgbClr val="21295C"/>
                 </a:solidFill>
                 <a:latin typeface="Arial"/>
               </a:rPr>
-              <a:t>MODALITY
-▲
-image/
-signal
-▼
-text/
-molecule</a:t>
+              <a:t>МОДАЛЬНОСТЬ
+▲ изображения /
+   сигналы
+▼ текст /
+   молекулы</a:t>
             </a:r>
           </a:p>
         </p:txBody>
@@ -33757,7 +33761,7 @@
                 </a:solidFill>
                 <a:latin typeface="Arial"/>
               </a:rPr>
-              <a:t>Фокус лекции — gold dots: AI-диагностика + Drug discovery.</a:t>
+              <a:t>Фокус лекции — квадранты с золотыми точками: AI-диагностика + разработка лекарств.</a:t>
             </a:r>
           </a:p>
         </p:txBody>
@@ -33814,7 +33818,7 @@
                 </a:solidFill>
                 <a:latin typeface="Arial"/>
               </a:rPr>
-              <a:t>За 10 лет — от 6 до 1 451 AI-устройств в FDA-list.</a:t>
+              <a:t>За 10 лет — от 6 до 1 451 AI-устройства, одобренных FDA.</a:t>
             </a:r>
           </a:p>
         </p:txBody>
@@ -33964,7 +33968,7 @@
                 </a:solidFill>
                 <a:latin typeface="Arial"/>
               </a:rPr>
-              <a:t>Cumulative AI/ML-enabled medical devices (FDA), end-2025.</a:t>
+              <a:t>AI/ML-устройства, одобренные FDA для медицины · накопленным итогом · к концу 2025.</a:t>
             </a:r>
           </a:p>
         </p:txBody>
@@ -34123,13 +34127,13 @@
               </a:lnSpc>
             </a:pPr>
             <a:r>
-              <a:rPr sz="1100" b="0" i="1">
+              <a:rPr sz="1000" b="0" i="1">
                 <a:solidFill>
                   <a:srgbClr val="6B7685"/>
                 </a:solidFill>
                 <a:latin typeface="Arial"/>
               </a:rPr>
-              <a:t>cumulative · end-2025</a:t>
+              <a:t>накопленным итогом · к концу 2025</a:t>
             </a:r>
           </a:p>
         </p:txBody>
@@ -34324,8 +34328,8 @@
                 </a:solidFill>
                 <a:latin typeface="Arial"/>
               </a:rPr>
-              <a:t>Pivot — 2022–2024:
-exponential acceleration</a:t>
+              <a:t>Перелом — 2022–2024:
+экспоненциальный рост</a:t>
             </a:r>
           </a:p>
         </p:txBody>
@@ -34364,7 +34368,7 @@
                 </a:solidFill>
                 <a:latin typeface="Arial"/>
               </a:rPr>
-              <a:t>FDA AI/ML list (fda.gov, end-2025) · JAMA Network Open systematic review 2025 · The Imaging Wire 10.12.2025.</a:t>
+              <a:t>FDA AI/ML list (fda.gov, к концу 2025) · JAMA Network Open systematic review 2025 · The Imaging Wire 10.12.2025.</a:t>
             </a:r>
           </a:p>
         </p:txBody>
@@ -34421,7 +34425,7 @@
                 </a:solidFill>
                 <a:latin typeface="Arial"/>
               </a:rPr>
-              <a:t>Медицина — инструктивный case для инженера.</a:t>
+              <a:t>Медицина — инструктивный пример для инженера.</a:t>
             </a:r>
           </a:p>
         </p:txBody>
@@ -34460,7 +34464,7 @@
                 </a:solidFill>
                 <a:latin typeface="Arial"/>
               </a:rPr>
-              <a:t>Высокие ставки + строгое регулирование + прозрачная operational scale.</a:t>
+              <a:t>Высокие ставки + строгое регулирование + прозрачные операционные метрики.</a:t>
             </a:r>
           </a:p>
         </p:txBody>
@@ -34649,7 +34653,7 @@
                 </a:solidFill>
                 <a:latin typeface="Arial"/>
               </a:rPr>
-              <a:t>Калибровка confidence, audit-trail, fallback.</a:t>
+              <a:t>Калибровка уверенности модели, audit-trail, fallback-сценарии.</a:t>
             </a:r>
           </a:p>
         </p:txBody>
@@ -34949,7 +34953,7 @@
                 </a:solidFill>
                 <a:latin typeface="Arial"/>
               </a:rPr>
-              <a:t>Прозрачная operational scale</a:t>
+              <a:t>Прозрачные операционные метрики</a:t>
             </a:r>
           </a:p>
         </p:txBody>
@@ -34988,7 +34992,7 @@
                 </a:solidFill>
                 <a:latin typeface="Arial"/>
               </a:rPr>
-              <a:t>mosmed.ai: 14M+ исследований · 74 региона · 70 сервисов.</a:t>
+              <a:t>mosmed.ai: 14 млн+ исследований · 74 региона · 70 сервисов.</a:t>
             </a:r>
           </a:p>
         </p:txBody>
@@ -35171,7 +35175,7 @@
                 </a:solidFill>
                 <a:latin typeface="Arial"/>
               </a:rPr>
-              <a:t>AI-диагностика — это computer vision, не LLM.</a:t>
+              <a:t>AI-диагностика — это компьютерное зрение, не LLM.</a:t>
             </a:r>
           </a:p>
         </p:txBody>
@@ -35210,7 +35214,7 @@
                 </a:solidFill>
                 <a:latin typeface="Arial"/>
               </a:rPr>
-              <a:t>image → label с confidence score. Это не LLM.</a:t>
+              <a:t>изображение → метка с оценкой уверенности. Это не LLM.</a:t>
             </a:r>
           </a:p>
         </p:txBody>
@@ -35343,7 +35347,7 @@
                 </a:solidFill>
                 <a:latin typeface="Arial"/>
               </a:rPr>
-              <a:t>1. Input</a:t>
+              <a:t>1. Вход</a:t>
             </a:r>
           </a:p>
         </p:txBody>
@@ -35561,7 +35565,7 @@
                 </a:solidFill>
                 <a:latin typeface="Arial"/>
               </a:rPr>
-              <a:t>2. Model</a:t>
+              <a:t>2. Модель</a:t>
             </a:r>
           </a:p>
         </p:txBody>
@@ -35602,7 +35606,7 @@
               </a:rPr>
               <a:t>CNN / ViT
 (не LLM)
-medical fine-tune</a:t>
+дообучение на мед. данных</a:t>
             </a:r>
           </a:p>
         </p:txBody>
@@ -35779,7 +35783,7 @@
                 </a:solidFill>
                 <a:latin typeface="Arial"/>
               </a:rPr>
-              <a:t>3. Output</a:t>
+              <a:t>3. Выход</a:t>
             </a:r>
           </a:p>
         </p:txBody>
@@ -35818,8 +35822,8 @@
                 </a:solidFill>
                 <a:latin typeface="Arial"/>
               </a:rPr>
-              <a:t>Probability +
-heatmap / bbox
+              <a:t>Вероятность +
+тепловая карта / bbox
 (Grad-CAM*)</a:t>
             </a:r>
           </a:p>
@@ -35997,7 +36001,7 @@
                 </a:solidFill>
                 <a:latin typeface="Arial"/>
               </a:rPr>
-              <a:t>4. Workflow</a:t>
+              <a:t>4. Внедрение</a:t>
             </a:r>
           </a:p>
         </p:txBody>
@@ -36036,8 +36040,8 @@
                 </a:solidFill>
                 <a:latin typeface="Arial"/>
               </a:rPr>
-              <a:t>Врач: decision
-+ verify + sign</a:t>
+              <a:t>Врач: решение
++ верификация + подпись</a:t>
             </a:r>
           </a:p>
         </p:txBody>
@@ -36124,7 +36128,7 @@
                 </a:solidFill>
                 <a:latin typeface="Arial"/>
               </a:rPr>
-              <a:t>Пример: CheXNet — 121-layer DenseNet, 14 патологий грудной клетки (Rajpurkar et al. 2017)</a:t>
+              <a:t>Пример: CheXNet — 121-слойная DenseNet, 14 патологий грудной клетки (Rajpurkar et al. 2017)</a:t>
             </a:r>
           </a:p>
         </p:txBody>
@@ -36187,7 +36191,7 @@
                 </a:solidFill>
                 <a:latin typeface="Arial"/>
               </a:rPr>
-              <a:t>Image → CNN/ViT → probability vector + heatmap. Heatmap = Grad-CAM (визуальная attribution heatmap, Selvaraju 2017): какие пиксели вносили вклад в предсказание. Врач — decision-maker, AI — decision support.</a:t>
+              <a:t>Изображение → CNN/ViT → вектор вероятностей + тепловая карта. Тепловая карта = Grad-CAM (Selvaraju 2017): какие пиксели вносили вклад в предсказание. Врач принимает решение, AI — помощник.</a:t>
             </a:r>
           </a:p>
         </p:txBody>
@@ -36226,7 +36230,7 @@
                 </a:solidFill>
                 <a:latin typeface="Arial"/>
               </a:rPr>
-              <a:t>*Grad-CAM — визуальная attribution. DenseNet — CNN-архитектура. Rajpurkar arXiv:1711.05225 · Selvaraju arXiv:1610.02391.</a:t>
+              <a:t>*Grad-CAM — визуальная интерпретация решения модели. DenseNet — CNN-архитектура. Rajpurkar arXiv:1711.05225 · Selvaraju arXiv:1610.02391.</a:t>
             </a:r>
           </a:p>
         </p:txBody>

--- a/library/lectures/lec-04/rendered/lec-04.pptx
+++ b/library/lectures/lec-04/rendered/lec-04.pptx
@@ -15215,46 +15215,7 @@
       </p:pic>
       <p:sp>
         <p:nvSpPr>
-          <p:cNvPr id="6" name="TextBox 5"/>
-          <p:cNvSpPr txBox="1"/>
-          <p:nvPr/>
-        </p:nvSpPr>
-        <p:spPr>
-          <a:xfrm>
-            <a:off x="640080" y="3776472"/>
-            <a:ext cx="3931920" cy="292608"/>
-          </a:xfrm>
-          <a:prstGeom prst="rect">
-            <a:avLst/>
-          </a:prstGeom>
-          <a:noFill/>
-        </p:spPr>
-        <p:txBody>
-          <a:bodyPr wrap="square" lIns="0" rIns="0" tIns="0" bIns="0" anchor="t">
-            <a:spAutoFit/>
-          </a:bodyPr>
-          <a:lstStyle/>
-          <a:p>
-            <a:pPr algn="ctr">
-              <a:lnSpc>
-                <a:spcPct val="115000"/>
-              </a:lnSpc>
-            </a:pPr>
-            <a:r>
-              <a:rPr sz="1000" b="0" i="1">
-                <a:solidFill>
-                  <a:srgbClr val="1C7293"/>
-                </a:solidFill>
-                <a:latin typeface="Arial"/>
-              </a:rPr>
-              <a:t>Иллюстрация: фарма-лаборатория — место встречи AI-дизайна и биологии</a:t>
-            </a:r>
-          </a:p>
-        </p:txBody>
-      </p:sp>
-      <p:sp>
-        <p:nvSpPr>
-          <p:cNvPr id="7" name="Rounded Rectangle 6"/>
+          <p:cNvPr id="6" name="Rounded Rectangle 5"/>
           <p:cNvSpPr/>
           <p:nvPr/>
         </p:nvSpPr>
@@ -15302,7 +15263,7 @@
       </p:sp>
       <p:sp>
         <p:nvSpPr>
-          <p:cNvPr id="8" name="TextBox 7"/>
+          <p:cNvPr id="7" name="TextBox 6"/>
           <p:cNvSpPr txBox="1"/>
           <p:nvPr/>
         </p:nvSpPr>
@@ -15383,7 +15344,7 @@
       </p:sp>
       <p:sp>
         <p:nvSpPr>
-          <p:cNvPr id="9" name="Rounded Rectangle 8"/>
+          <p:cNvPr id="8" name="Rounded Rectangle 7"/>
           <p:cNvSpPr/>
           <p:nvPr/>
         </p:nvSpPr>
@@ -15431,7 +15392,7 @@
       </p:sp>
       <p:pic>
         <p:nvPicPr>
-          <p:cNvPr id="10" name="Picture 9" descr="lucide-check-circle-blue.png"/>
+          <p:cNvPr id="9" name="Picture 8" descr="lucide-check-circle-blue.png"/>
           <p:cNvPicPr>
             <a:picLocks noChangeAspect="1"/>
           </p:cNvPicPr>
@@ -15455,7 +15416,7 @@
       </p:pic>
       <p:sp>
         <p:nvSpPr>
-          <p:cNvPr id="11" name="TextBox 10"/>
+          <p:cNvPr id="10" name="TextBox 9"/>
           <p:cNvSpPr txBox="1"/>
           <p:nvPr/>
         </p:nvSpPr>
@@ -15494,7 +15455,7 @@
       </p:sp>
       <p:sp>
         <p:nvSpPr>
-          <p:cNvPr id="12" name="TextBox 11"/>
+          <p:cNvPr id="11" name="TextBox 10"/>
           <p:cNvSpPr txBox="1"/>
           <p:nvPr/>
         </p:nvSpPr>
@@ -15533,7 +15494,7 @@
       </p:sp>
       <p:sp>
         <p:nvSpPr>
-          <p:cNvPr id="13" name="Rounded Rectangle 12"/>
+          <p:cNvPr id="12" name="Rounded Rectangle 11"/>
           <p:cNvSpPr/>
           <p:nvPr/>
         </p:nvSpPr>
@@ -15581,7 +15542,7 @@
       </p:sp>
       <p:pic>
         <p:nvPicPr>
-          <p:cNvPr id="14" name="Picture 13" descr="lucide-help-circle-blue.png"/>
+          <p:cNvPr id="13" name="Picture 12" descr="lucide-help-circle-blue.png"/>
           <p:cNvPicPr>
             <a:picLocks noChangeAspect="1"/>
           </p:cNvPicPr>
@@ -15605,7 +15566,7 @@
       </p:pic>
       <p:sp>
         <p:nvSpPr>
-          <p:cNvPr id="15" name="TextBox 14"/>
+          <p:cNvPr id="14" name="TextBox 13"/>
           <p:cNvSpPr txBox="1"/>
           <p:nvPr/>
         </p:nvSpPr>
@@ -15644,7 +15605,7 @@
       </p:sp>
       <p:sp>
         <p:nvSpPr>
-          <p:cNvPr id="16" name="TextBox 15"/>
+          <p:cNvPr id="15" name="TextBox 14"/>
           <p:cNvSpPr txBox="1"/>
           <p:nvPr/>
         </p:nvSpPr>
@@ -15683,7 +15644,7 @@
       </p:sp>
       <p:sp>
         <p:nvSpPr>
-          <p:cNvPr id="17" name="Rounded Rectangle 16"/>
+          <p:cNvPr id="16" name="Rounded Rectangle 15"/>
           <p:cNvSpPr/>
           <p:nvPr/>
         </p:nvSpPr>
@@ -15731,7 +15692,7 @@
       </p:sp>
       <p:pic>
         <p:nvPicPr>
-          <p:cNvPr id="18" name="Picture 17" descr="lucide-help-circle-blue.png"/>
+          <p:cNvPr id="17" name="Picture 16" descr="lucide-help-circle-blue.png"/>
           <p:cNvPicPr>
             <a:picLocks noChangeAspect="1"/>
           </p:cNvPicPr>
@@ -15755,7 +15716,7 @@
       </p:pic>
       <p:sp>
         <p:nvSpPr>
-          <p:cNvPr id="19" name="TextBox 18"/>
+          <p:cNvPr id="18" name="TextBox 17"/>
           <p:cNvSpPr txBox="1"/>
           <p:nvPr/>
         </p:nvSpPr>
@@ -15794,7 +15755,7 @@
       </p:sp>
       <p:sp>
         <p:nvSpPr>
-          <p:cNvPr id="20" name="TextBox 19"/>
+          <p:cNvPr id="19" name="TextBox 18"/>
           <p:cNvSpPr txBox="1"/>
           <p:nvPr/>
         </p:nvSpPr>
@@ -15833,7 +15794,7 @@
       </p:sp>
       <p:sp>
         <p:nvSpPr>
-          <p:cNvPr id="21" name="TextBox 20"/>
+          <p:cNvPr id="20" name="TextBox 19"/>
           <p:cNvSpPr txBox="1"/>
           <p:nvPr/>
         </p:nvSpPr>
@@ -23880,46 +23841,7 @@
       </p:pic>
       <p:sp>
         <p:nvSpPr>
-          <p:cNvPr id="6" name="TextBox 5"/>
-          <p:cNvSpPr txBox="1"/>
-          <p:nvPr/>
-        </p:nvSpPr>
-        <p:spPr>
-          <a:xfrm>
-            <a:off x="777240" y="5715000"/>
-            <a:ext cx="4572000" cy="320040"/>
-          </a:xfrm>
-          <a:prstGeom prst="rect">
-            <a:avLst/>
-          </a:prstGeom>
-          <a:noFill/>
-        </p:spPr>
-        <p:txBody>
-          <a:bodyPr wrap="square" lIns="0" rIns="0" tIns="0" bIns="0" anchor="t">
-            <a:spAutoFit/>
-          </a:bodyPr>
-          <a:lstStyle/>
-          <a:p>
-            <a:pPr algn="ctr">
-              <a:lnSpc>
-                <a:spcPct val="115000"/>
-              </a:lnSpc>
-            </a:pPr>
-            <a:r>
-              <a:rPr sz="1100" b="0" i="1">
-                <a:solidFill>
-                  <a:srgbClr val="1C7293"/>
-                </a:solidFill>
-                <a:latin typeface="Arial"/>
-              </a:rPr>
-              <a:t>Иллюстрация: каждый AI-диагноз заканчивается этим — взаимодействием врача с пациентом.</a:t>
-            </a:r>
-          </a:p>
-        </p:txBody>
-      </p:sp>
-      <p:sp>
-        <p:nvSpPr>
-          <p:cNvPr id="7" name="Rounded Rectangle 6"/>
+          <p:cNvPr id="6" name="Rounded Rectangle 5"/>
           <p:cNvSpPr/>
           <p:nvPr/>
         </p:nvSpPr>
@@ -23967,7 +23889,7 @@
       </p:sp>
       <p:sp>
         <p:nvSpPr>
-          <p:cNvPr id="8" name="TextBox 7"/>
+          <p:cNvPr id="7" name="TextBox 6"/>
           <p:cNvSpPr txBox="1"/>
           <p:nvPr/>
         </p:nvSpPr>
@@ -24006,7 +23928,7 @@
       </p:sp>
       <p:pic>
         <p:nvPicPr>
-          <p:cNvPr id="9" name="Picture 8" descr="lucide-scale-blue.png"/>
+          <p:cNvPr id="8" name="Picture 7" descr="lucide-scale-blue.png"/>
           <p:cNvPicPr>
             <a:picLocks noChangeAspect="1"/>
           </p:cNvPicPr>
@@ -24030,7 +23952,7 @@
       </p:pic>
       <p:sp>
         <p:nvSpPr>
-          <p:cNvPr id="10" name="TextBox 9"/>
+          <p:cNvPr id="9" name="TextBox 8"/>
           <p:cNvSpPr txBox="1"/>
           <p:nvPr/>
         </p:nvSpPr>
@@ -24069,7 +23991,7 @@
       </p:sp>
       <p:sp>
         <p:nvSpPr>
-          <p:cNvPr id="11" name="TextBox 10"/>
+          <p:cNvPr id="10" name="TextBox 9"/>
           <p:cNvSpPr txBox="1"/>
           <p:nvPr/>
         </p:nvSpPr>
@@ -24108,7 +24030,7 @@
       </p:sp>
       <p:sp>
         <p:nvSpPr>
-          <p:cNvPr id="12" name="TextBox 11"/>
+          <p:cNvPr id="11" name="TextBox 10"/>
           <p:cNvSpPr txBox="1"/>
           <p:nvPr/>
         </p:nvSpPr>
@@ -24147,7 +24069,7 @@
       </p:sp>
       <p:pic>
         <p:nvPicPr>
-          <p:cNvPr id="13" name="Picture 12" descr="lucide-message-circle-warning-blue.png"/>
+          <p:cNvPr id="12" name="Picture 11" descr="lucide-message-circle-warning-blue.png"/>
           <p:cNvPicPr>
             <a:picLocks noChangeAspect="1"/>
           </p:cNvPicPr>
@@ -24171,7 +24093,7 @@
       </p:pic>
       <p:sp>
         <p:nvSpPr>
-          <p:cNvPr id="14" name="TextBox 13"/>
+          <p:cNvPr id="13" name="TextBox 12"/>
           <p:cNvSpPr txBox="1"/>
           <p:nvPr/>
         </p:nvSpPr>
@@ -24210,7 +24132,7 @@
       </p:sp>
       <p:sp>
         <p:nvSpPr>
-          <p:cNvPr id="15" name="TextBox 14"/>
+          <p:cNvPr id="14" name="TextBox 13"/>
           <p:cNvSpPr txBox="1"/>
           <p:nvPr/>
         </p:nvSpPr>
@@ -24249,7 +24171,7 @@
       </p:sp>
       <p:sp>
         <p:nvSpPr>
-          <p:cNvPr id="16" name="TextBox 15"/>
+          <p:cNvPr id="15" name="TextBox 14"/>
           <p:cNvSpPr txBox="1"/>
           <p:nvPr/>
         </p:nvSpPr>
@@ -24288,7 +24210,7 @@
       </p:sp>
       <p:pic>
         <p:nvPicPr>
-          <p:cNvPr id="17" name="Picture 16" descr="lucide-shield-check-blue.png"/>
+          <p:cNvPr id="16" name="Picture 15" descr="lucide-shield-check-blue.png"/>
           <p:cNvPicPr>
             <a:picLocks noChangeAspect="1"/>
           </p:cNvPicPr>
@@ -24312,7 +24234,7 @@
       </p:pic>
       <p:sp>
         <p:nvSpPr>
-          <p:cNvPr id="18" name="TextBox 17"/>
+          <p:cNvPr id="17" name="TextBox 16"/>
           <p:cNvSpPr txBox="1"/>
           <p:nvPr/>
         </p:nvSpPr>
@@ -24351,7 +24273,7 @@
       </p:sp>
       <p:sp>
         <p:nvSpPr>
-          <p:cNvPr id="19" name="TextBox 18"/>
+          <p:cNvPr id="18" name="TextBox 17"/>
           <p:cNvSpPr txBox="1"/>
           <p:nvPr/>
         </p:nvSpPr>
@@ -24390,7 +24312,7 @@
       </p:sp>
       <p:sp>
         <p:nvSpPr>
-          <p:cNvPr id="20" name="TextBox 19"/>
+          <p:cNvPr id="19" name="TextBox 18"/>
           <p:cNvSpPr txBox="1"/>
           <p:nvPr/>
         </p:nvSpPr>
@@ -24429,7 +24351,7 @@
       </p:sp>
       <p:sp>
         <p:nvSpPr>
-          <p:cNvPr id="21" name="Rounded Rectangle 20"/>
+          <p:cNvPr id="20" name="Rounded Rectangle 19"/>
           <p:cNvSpPr/>
           <p:nvPr/>
         </p:nvSpPr>
@@ -24477,7 +24399,7 @@
       </p:sp>
       <p:sp>
         <p:nvSpPr>
-          <p:cNvPr id="22" name="TextBox 21"/>
+          <p:cNvPr id="21" name="TextBox 20"/>
           <p:cNvSpPr txBox="1"/>
           <p:nvPr/>
         </p:nvSpPr>
@@ -33663,46 +33585,7 @@
       </p:pic>
       <p:sp>
         <p:nvSpPr>
-          <p:cNvPr id="4" name="TextBox 3"/>
-          <p:cNvSpPr txBox="1"/>
-          <p:nvPr/>
-        </p:nvSpPr>
-        <p:spPr>
-          <a:xfrm>
-            <a:off x="777240" y="5486399"/>
-            <a:ext cx="4480560" cy="320040"/>
-          </a:xfrm>
-          <a:prstGeom prst="rect">
-            <a:avLst/>
-          </a:prstGeom>
-          <a:noFill/>
-        </p:spPr>
-        <p:txBody>
-          <a:bodyPr wrap="square" lIns="0" rIns="0" tIns="0" bIns="0" anchor="t">
-            <a:spAutoFit/>
-          </a:bodyPr>
-          <a:lstStyle/>
-          <a:p>
-            <a:pPr algn="ctr">
-              <a:lnSpc>
-                <a:spcPct val="115000"/>
-              </a:lnSpc>
-            </a:pPr>
-            <a:r>
-              <a:rPr sz="1100" b="0" i="1">
-                <a:solidFill>
-                  <a:srgbClr val="1C7293"/>
-                </a:solidFill>
-                <a:latin typeface="Arial"/>
-              </a:rPr>
-              <a:t>Иллюстрация: врач — тот, кто берёт ответственность за пациента.</a:t>
-            </a:r>
-          </a:p>
-        </p:txBody>
-      </p:sp>
-      <p:sp>
-        <p:nvSpPr>
-          <p:cNvPr id="5" name="Rounded Rectangle 4"/>
+          <p:cNvPr id="4" name="Rounded Rectangle 3"/>
           <p:cNvSpPr/>
           <p:nvPr/>
         </p:nvSpPr>
@@ -33750,7 +33633,7 @@
       </p:sp>
       <p:sp>
         <p:nvSpPr>
-          <p:cNvPr id="6" name="TextBox 5"/>
+          <p:cNvPr id="5" name="TextBox 4"/>
           <p:cNvSpPr txBox="1"/>
           <p:nvPr/>
         </p:nvSpPr>
@@ -33856,84 +33739,6 @@
                 <a:latin typeface="Arial"/>
               </a:rPr>
               <a:t> решать.</a:t>
-            </a:r>
-          </a:p>
-        </p:txBody>
-      </p:sp>
-      <p:sp>
-        <p:nvSpPr>
-          <p:cNvPr id="7" name="TextBox 6"/>
-          <p:cNvSpPr txBox="1"/>
-          <p:nvPr/>
-        </p:nvSpPr>
-        <p:spPr>
-          <a:xfrm>
-            <a:off x="6126480" y="5623559"/>
-            <a:ext cx="5212080" cy="365760"/>
-          </a:xfrm>
-          <a:prstGeom prst="rect">
-            <a:avLst/>
-          </a:prstGeom>
-          <a:noFill/>
-        </p:spPr>
-        <p:txBody>
-          <a:bodyPr wrap="square" lIns="0" rIns="0" tIns="0" bIns="0" anchor="t">
-            <a:spAutoFit/>
-          </a:bodyPr>
-          <a:lstStyle/>
-          <a:p>
-            <a:pPr algn="l">
-              <a:lnSpc>
-                <a:spcPct val="115000"/>
-              </a:lnSpc>
-            </a:pPr>
-            <a:r>
-              <a:rPr sz="1200" b="0" i="1">
-                <a:solidFill>
-                  <a:srgbClr val="1C7293"/>
-                </a:solidFill>
-                <a:latin typeface="Arial"/>
-              </a:rPr>
-              <a:t>Возврат к центральному вопросу — ответ.</a:t>
-            </a:r>
-          </a:p>
-        </p:txBody>
-      </p:sp>
-      <p:sp>
-        <p:nvSpPr>
-          <p:cNvPr id="8" name="TextBox 7"/>
-          <p:cNvSpPr txBox="1"/>
-          <p:nvPr/>
-        </p:nvSpPr>
-        <p:spPr>
-          <a:xfrm>
-            <a:off x="502920" y="6263640"/>
-            <a:ext cx="11247120" cy="365760"/>
-          </a:xfrm>
-          <a:prstGeom prst="rect">
-            <a:avLst/>
-          </a:prstGeom>
-          <a:noFill/>
-        </p:spPr>
-        <p:txBody>
-          <a:bodyPr wrap="square" lIns="0" rIns="0" tIns="0" bIns="0" anchor="t">
-            <a:spAutoFit/>
-          </a:bodyPr>
-          <a:lstStyle/>
-          <a:p>
-            <a:pPr algn="ctr">
-              <a:lnSpc>
-                <a:spcPct val="115000"/>
-              </a:lnSpc>
-            </a:pPr>
-            <a:r>
-              <a:rPr sz="1200" b="0" i="1">
-                <a:solidFill>
-                  <a:srgbClr val="065A82"/>
-                </a:solidFill>
-                <a:latin typeface="Arial"/>
-              </a:rPr>
-              <a:t>Прозрачность · валидированная популяция · audit-trail — три инженерных принципа в копилку Лекции 9.</a:t>
             </a:r>
           </a:p>
         </p:txBody>
@@ -34419,93 +34224,6 @@
               <a:t>3 принципа сегодня
 → черновик чек-листа на Лекции 9
 → личная версия на Лекции 14</a:t>
-            </a:r>
-          </a:p>
-        </p:txBody>
-      </p:sp>
-      <p:sp>
-        <p:nvSpPr>
-          <p:cNvPr id="14" name="Rounded Rectangle 13"/>
-          <p:cNvSpPr/>
-          <p:nvPr/>
-        </p:nvSpPr>
-        <p:spPr>
-          <a:xfrm>
-            <a:off x="502920" y="5989320"/>
-            <a:ext cx="11247120" cy="594360"/>
-          </a:xfrm>
-          <a:prstGeom prst="roundRect">
-            <a:avLst>
-              <a:gd name="adj" fmla="val 12000"/>
-            </a:avLst>
-          </a:prstGeom>
-          <a:solidFill>
-            <a:srgbClr val="FEF5E0"/>
-          </a:solidFill>
-          <a:ln w="15240">
-            <a:solidFill>
-              <a:srgbClr val="F0AB00"/>
-            </a:solidFill>
-          </a:ln>
-          <a:effectLst/>
-        </p:spPr>
-        <p:style>
-          <a:lnRef idx="1">
-            <a:schemeClr val="accent1"/>
-          </a:lnRef>
-          <a:fillRef idx="3">
-            <a:schemeClr val="accent1"/>
-          </a:fillRef>
-          <a:effectRef idx="2">
-            <a:schemeClr val="accent1"/>
-          </a:effectRef>
-          <a:fontRef idx="minor">
-            <a:schemeClr val="lt1"/>
-          </a:fontRef>
-        </p:style>
-        <p:txBody>
-          <a:bodyPr rtlCol="0" anchor="ctr"/>
-          <a:lstStyle/>
-          <a:p>
-            <a:pPr algn="ctr"/>
-          </a:p>
-        </p:txBody>
-      </p:sp>
-      <p:sp>
-        <p:nvSpPr>
-          <p:cNvPr id="15" name="TextBox 14"/>
-          <p:cNvSpPr txBox="1"/>
-          <p:nvPr/>
-        </p:nvSpPr>
-        <p:spPr>
-          <a:xfrm>
-            <a:off x="685800" y="6062472"/>
-            <a:ext cx="10881360" cy="448056"/>
-          </a:xfrm>
-          <a:prstGeom prst="rect">
-            <a:avLst/>
-          </a:prstGeom>
-          <a:noFill/>
-        </p:spPr>
-        <p:txBody>
-          <a:bodyPr wrap="square" lIns="0" rIns="0" tIns="0" bIns="0" anchor="ctr">
-            <a:spAutoFit/>
-          </a:bodyPr>
-          <a:lstStyle/>
-          <a:p>
-            <a:pPr algn="l">
-              <a:lnSpc>
-                <a:spcPct val="125000"/>
-              </a:lnSpc>
-            </a:pPr>
-            <a:r>
-              <a:rPr sz="1300" b="1" i="0">
-                <a:solidFill>
-                  <a:srgbClr val="21295C"/>
-                </a:solidFill>
-                <a:latin typeface="Arial"/>
-              </a:rPr>
-              <a:t>Опционально: найти 1 случай медицинского AI в новостях + применить рамку 4 актёров. Не оценивается; тренировка навыка.</a:t>
             </a:r>
           </a:p>
         </p:txBody>
@@ -36577,45 +36295,6 @@
           </a:prstGeom>
         </p:spPr>
       </p:pic>
-      <p:sp>
-        <p:nvSpPr>
-          <p:cNvPr id="20" name="TextBox 19"/>
-          <p:cNvSpPr txBox="1"/>
-          <p:nvPr/>
-        </p:nvSpPr>
-        <p:spPr>
-          <a:xfrm>
-            <a:off x="6858000" y="5715000"/>
-            <a:ext cx="4663440" cy="320040"/>
-          </a:xfrm>
-          <a:prstGeom prst="rect">
-            <a:avLst/>
-          </a:prstGeom>
-          <a:noFill/>
-        </p:spPr>
-        <p:txBody>
-          <a:bodyPr wrap="square" lIns="0" rIns="0" tIns="0" bIns="0" anchor="t">
-            <a:spAutoFit/>
-          </a:bodyPr>
-          <a:lstStyle/>
-          <a:p>
-            <a:pPr algn="ctr">
-              <a:lnSpc>
-                <a:spcPct val="115000"/>
-              </a:lnSpc>
-            </a:pPr>
-            <a:r>
-              <a:rPr sz="1100" b="0" i="1">
-                <a:solidFill>
-                  <a:srgbClr val="1C7293"/>
-                </a:solidFill>
-                <a:latin typeface="Arial"/>
-              </a:rPr>
-              <a:t>Иллюстрация: врач + ноутбук + стетоскоп — рабочий процесс с AI в клинике</a:t>
-            </a:r>
-          </a:p>
-        </p:txBody>
-      </p:sp>
     </p:spTree>
   </p:cSld>
   <p:clrMapOvr>
@@ -40290,46 +39969,7 @@
       </p:pic>
       <p:sp>
         <p:nvSpPr>
-          <p:cNvPr id="21" name="TextBox 20"/>
-          <p:cNvSpPr txBox="1"/>
-          <p:nvPr/>
-        </p:nvSpPr>
-        <p:spPr>
-          <a:xfrm>
-            <a:off x="8503920" y="5394960"/>
-            <a:ext cx="3047695" cy="320040"/>
-          </a:xfrm>
-          <a:prstGeom prst="rect">
-            <a:avLst/>
-          </a:prstGeom>
-          <a:noFill/>
-        </p:spPr>
-        <p:txBody>
-          <a:bodyPr wrap="square" lIns="0" rIns="0" tIns="0" bIns="0" anchor="t">
-            <a:spAutoFit/>
-          </a:bodyPr>
-          <a:lstStyle/>
-          <a:p>
-            <a:pPr algn="ctr">
-              <a:lnSpc>
-                <a:spcPct val="115000"/>
-              </a:lnSpc>
-            </a:pPr>
-            <a:r>
-              <a:rPr sz="1000" b="0" i="1">
-                <a:solidFill>
-                  <a:srgbClr val="1C7293"/>
-                </a:solidFill>
-                <a:latin typeface="Arial"/>
-              </a:rPr>
-              <a:t>Иллюстрация: радиолог + AI-рабочая станция</a:t>
-            </a:r>
-          </a:p>
-        </p:txBody>
-      </p:sp>
-      <p:sp>
-        <p:nvSpPr>
-          <p:cNvPr id="22" name="Rounded Rectangle 21"/>
+          <p:cNvPr id="21" name="Rounded Rectangle 20"/>
           <p:cNvSpPr/>
           <p:nvPr/>
         </p:nvSpPr>
@@ -40377,7 +40017,7 @@
       </p:sp>
       <p:sp>
         <p:nvSpPr>
-          <p:cNvPr id="23" name="TextBox 22"/>
+          <p:cNvPr id="22" name="TextBox 21"/>
           <p:cNvSpPr txBox="1"/>
           <p:nvPr/>
         </p:nvSpPr>

--- a/library/lectures/lec-04/rendered/lec-04.pptx
+++ b/library/lectures/lec-04/rendered/lec-04.pptx
@@ -2341,7 +2341,7 @@
           <a:lstStyle/>
           <a:p>
             <a:r>
-              <a:t>Это центральная секция для центрального вопроса лекции. Мы прошли половину пути: AI-диагностика работает, mosmed.ai тому пример; drug discovery частично работает, Rentosertib и DSP-1181 — две стороны одной медали; bias и LLM анти-паттерны реальны. Теперь — кто отвечает, когда AI ошибается. Применяем 4-actor framework: Price 2019, Stanford Technology Law Review; Gerke et al. 2020, Artificial Intelligence in Healthcare, Elsevier. Ответственность распределяется между четырьмя акторами с разной комбинацией technical control × legal liability.</a:t>
+              <a:t>Это центральная секция для центрального вопроса лекции. Мы прошли половину пути: AI-диагностика работает, mosmed.ai тому пример; drug discovery частично работает, Rentosertib и DSP-1181 — две стороны одной медали; bias и LLM анти-паттерны реальны. Теперь — кто отвечает, когда AI ошибается. Применяем 4-actor framework: Price 2019 (U Michigan Law School) и Gerke 2020 (Penn State Dickinson Law) — основа 4-actor framework. Ответственность распределяется между четырьмя акторами с разной комбинацией technical control × legal liability.</a:t>
             </a:r>
           </a:p>
           <a:p/>
@@ -7546,8 +7546,8 @@
                 </a:solidFill>
                 <a:latin typeface="Arial"/>
               </a:rPr>
-              <a:t>Этика и
-ответственность</a:t>
+              <a:t>AI-объяснитель
++ этика</a:t>
             </a:r>
           </a:p>
         </p:txBody>
@@ -14913,8 +14913,8 @@
                 </a:solidFill>
                 <a:latin typeface="Arial"/>
               </a:rPr>
-              <a:t>Этика и
-ответственность</a:t>
+              <a:t>AI-объяснитель
++ этика</a:t>
             </a:r>
           </a:p>
         </p:txBody>
@@ -21900,8 +21900,8 @@
                 </a:solidFill>
                 <a:latin typeface="Arial"/>
               </a:rPr>
-              <a:t>Этика
-и ответственность</a:t>
+              <a:t>AI как объяснитель
+и его границы. Этика.</a:t>
             </a:r>
           </a:p>
         </p:txBody>
@@ -22618,8 +22618,8 @@
                 </a:solidFill>
                 <a:latin typeface="Arial"/>
               </a:rPr>
-              <a:t>Этика и
-ответственность</a:t>
+              <a:t>AI-объяснитель
++ этика</a:t>
             </a:r>
           </a:p>
         </p:txBody>
@@ -29699,7 +29699,7 @@
                 </a:solidFill>
                 <a:latin typeface="Arial"/>
               </a:rPr>
-              <a:t>Price 2019 Stanford TLR · Gerke et al. 2020 (Elsevier) · EU AI Act 2024/1689 Art. 14.</a:t>
+              <a:t>Price 2019 (U Michigan Law School) · Gerke 2020 (Penn State Dickinson Law) · EU AI Act 2024/1689 Art. 14.</a:t>
             </a:r>
           </a:p>
         </p:txBody>
@@ -31700,8 +31700,8 @@
                 </a:solidFill>
                 <a:latin typeface="Arial"/>
               </a:rPr>
-              <a:t>Этика и
-ответственность</a:t>
+              <a:t>AI-объяснитель
++ этика</a:t>
             </a:r>
           </a:p>
         </p:txBody>
@@ -36218,7 +36218,7 @@
                 </a:solidFill>
                 <a:latin typeface="Arial"/>
               </a:rPr>
-              <a:t>Этика и ответственность</a:t>
+              <a:t>AI как объяснитель и его границы. Этика.</a:t>
             </a:r>
           </a:p>
         </p:txBody>
@@ -37151,8 +37151,8 @@
                 </a:solidFill>
                 <a:latin typeface="Arial"/>
               </a:rPr>
-              <a:t>Этика и
-ответственность</a:t>
+              <a:t>AI-объяснитель
++ этика</a:t>
             </a:r>
           </a:p>
         </p:txBody>

--- a/library/lectures/lec-04/rendered/lec-04.pptx
+++ b/library/lectures/lec-04/rendered/lec-04.pptx
@@ -1467,7 +1467,7 @@
           <a:lstStyle/>
           <a:p>
             <a:r>
-              <a:t>Это титульный слайд лекции. Он короткий по смыслу: курс, номер лекции, тема, длительность, дата. Шаблон визуально совпадает с другими лекциями курса — это часть continuity, к которой студент уже привык. Никакого дополнительного контента здесь нет; задача слайда — обозначить точку входа в лекцию и быстро перейти к опросу. Лектор задерживается на нём ровно столько, сколько нужно, чтобы аудитория сориентировалась, и сразу переходит к слайду 3 с тремя вопросами для разогрева. Если читатель проходит лекцию в self-study режиме — этот слайд можно пропускать сразу после фиксации того, что это четвёртая лекция курса «AI в разных индустриях».</a:t>
+              <a:t>Это титульный слайд лекции. Он короткий по смыслу: курс, номер лекции, тема, длительность, дата. Шаблон визуально совпадает с другими лекциями курса — это часть continuity, к которой студент уже привык. Никакого дополнительного контента здесь нет; задача слайда — обозначить точку входа в лекцию и быстро перейти к опросу. Лектор задерживается на нём ровно столько, сколько нужно, чтобы аудитория сориентировалась, и сразу переходит к слайду 3 с тремя вопросами для разогрева. Если читатель проходит лекцию в self-study режиме — этот слайд можно пропускать сразу после фиксации того, что это Лекция 7 курса «AI в разных индустриях» и четвёртая отраслевая лекция (разработка ПО → финансы → инженерное проектирование → медицина).</a:t>
             </a:r>
           </a:p>
         </p:txBody>
@@ -2517,13 +2517,13 @@
           <a:p/>
           <a:p>
             <a:r>
-              <a:t>Структура заключения. Сначала — три главных вывода лекции: AI-диагностика работает, разработка лекарств — частично, ответственность остаётся на враче. Это не финальный синтез, это заготовка для черновика чек-листа, который вы будете дополнять на Лекции 9 по этике.</a:t>
+              <a:t>Структура заключения. Сначала — три главных вывода лекции: AI-диагностика работает, разработка лекарств — частично, ответственность остаётся на враче. Это не финальный синтез, это сырьё для копилки персонального чек-листа, который вы соберёте на финальной Лекции 17 «Систематизация знаний и навыков».</a:t>
             </a:r>
           </a:p>
           <a:p/>
           <a:p>
             <a:r>
-              <a:t>Затем — закрывающая фраза, возврат к центральному вопросу. И тизер Лекции 6 про производство и сельское хозяйство — где AI работает в другом физическом окружении, на другом масштабе и с другими ставками.</a:t>
+              <a:t>Затем — закрывающая фраза, возврат к центральному вопросу. И взгляд вперёд: медицина — четвёртая отраслевая лекция, отраслевой тур продолжается дальше в другие индустрии, где ставки другие, но методологические принципы переносятся.</a:t>
             </a:r>
           </a:p>
           <a:p/>
@@ -2611,7 +2611,7 @@
           <a:p/>
           <a:p>
             <a:r>
-              <a:t>Третий. Ответственность — на враче. AI подсказывает, врач решает. Инженер строит систему так, чтобы responsibility была технически выполнима: transparency и калибровка confidence, audit-trail, деперсонализация данных, post-market monitoring. Конкретные три принципа — transparency + calibration; validation set покрывает deployment population; audit-trail + post-market monitoring — это input для черновика чек-листа на лекции 9 «Этика и регулирование». Не финальный синтез — input. Если в одной фразе: врач ставит диагноз, AI подсказывает, инженер делает так, чтобы врач мог по-настоящему решать.</a:t>
+              <a:t>Третий. Ответственность — на враче. AI подсказывает, врач решает. Инженер строит систему так, чтобы responsibility была технически выполнима: transparency и калибровка confidence, audit-trail, деперсонализация данных, post-market monitoring. Конкретные три принципа — transparency + calibration; validation set покрывает deployment population; audit-trail + post-market monitoring — это вход в копилку персонального чек-листа. Не финальный синтез — сырьё; финал собирается на Лекции 17 «Систематизация знаний и навыков» из всех отраслевых кейсов курса. Если в одной фразе: врач ставит диагноз, AI подсказывает, инженер делает так, чтобы врач мог по-настоящему решать.</a:t>
             </a:r>
           </a:p>
         </p:txBody>
@@ -2763,19 +2763,13 @@
           <a:lstStyle/>
           <a:p>
             <a:r>
-              <a:t>Следующее занятие по расписанию курса — Коллоквиум 1, пятая лекция, охватывающий первые четыре содержательные лекции: введение, AI в разработке ПО, AI в финансах и ритейле, AI в медицине. Коллоквиум включает тестовую часть на классификацию AI-технологий и письменный мини-кейс по триаде «Проблема — Результат — Ограничение». Подготовка к коллоквиуму — это в первую очередь повторение четырёх предыдущих глав методички, включая эту.</a:t>
+              <a:t>Медицина — четвёртая отраслевая лекция курса: отраслевой блок начинается с разработки программного обеспечения, затем финансы и ритейл, затем инженерное проектирование, и теперь медицина — индустрия с наивысшими ставками, человеческой жизнью. Дальше отраслевой тур продолжается. Мы будем переходить в другие индустрии, где ставки качественно другие: не пациент, а оборудование, урожай, инфраструктура. Но многие методологические принципы этой лекции переносятся напрямую — валидация модели на разных популяциях, прозрачность и интерпретируемость выхода, мониторинг качества после развёртывания. Стоимость ошибки меняется от индустрии к индустрии, а инженерная дисциплина оценки AI — нет.</a:t>
             </a:r>
           </a:p>
           <a:p/>
           <a:p>
             <a:r>
-              <a:t>После Коллоквиума 1 — Лекция 6 «AI в производстве и сельском хозяйстве». Здесь главный российский кейс — Cognitive Agro Pilot, более полутора тысяч машин в работе, заявленный прирост эффективности тридцать-сорок процентов. Кроме сельского хозяйства, мы посмотрим predictive maintenance, quality control, collaborative robots, физический AI: дроны-инспекторы, автономный транспорт, digital twins. Из ячейки «медицина» движемся в ячейку «производство»; ставки другие — не пациент, а оборудование и урожай — но многие методологические принципы переносятся: валидация на разных популяциях, transparency, post-market monitoring.</a:t>
-            </a:r>
-          </a:p>
-          <a:p/>
-          <a:p>
-            <a:r>
-              <a:t>И ещё одна важная связь forward. Три принципа responsibility, которые мы сформулировали сегодня — transparency и калибровка; validation set покрывает deployment population; audit-trail и post-market monitoring — это не финальный синтез, а input для черновика чек-листа, который вы создадите на Лекции 9 «Этика и регулирование». На Лекции 14 «Будущее AI» вы превратите этот черновик в personal версию чек-листа из трёх-пяти пунктов. Опциональное домашнее задание для тех, у кого есть время: найти один случай medical AI в новостях за последний месяц (Reuters, STAT News, Habr) и применить к нему 4-actor framework со слайда 24. Не оценивается; для тренировки навыка применения.</a:t>
+              <a:t>Самое важное, что нужно унести с этой лекции, — три наблюдения об ответственном использовании AI в медицине. Первое: AI-выход должен быть интерпретируемым, а его confidence score — калибровано-проверенным. Второе: валидационный датасет должен покрывать ту популяцию, на которой модель реально работает; bias тестируется явно. Третье: должны быть audit-trail и постоянный мониторинг качества в production. Это не финальный синтез — это сырьё, вход в копилку вашего персонального чек-листа ответственного использования AI. Финал собирается не сегодня и не на следующей лекции, а на финальной Лекции 17 «Систематизация знаний и навыков», где вы будете синтезировать чек-лист из всех отраслевых кейсов курса, а не из одного. Один такой кейс — медицинский — у вас теперь есть.</a:t>
             </a:r>
           </a:p>
         </p:txBody>
@@ -18206,7 +18200,7 @@
                 </a:solidFill>
                 <a:latin typeface="Arial"/>
               </a:rPr>
-              <a:t>04</a:t>
+              <a:t>07</a:t>
             </a:r>
           </a:p>
         </p:txBody>
@@ -31066,7 +31060,7 @@
                 </a:solidFill>
                 <a:latin typeface="Arial"/>
               </a:rPr>
-              <a:t>3 наблюдения · тизер Лекции 6 · Q&amp;A</a:t>
+              <a:t>3 наблюдения · что дальше · Q&amp;A</a:t>
             </a:r>
           </a:p>
         </p:txBody>
@@ -33308,7 +33302,7 @@
                 </a:solidFill>
                 <a:latin typeface="Arial"/>
               </a:rPr>
-              <a:t>3 принципа → черновик чек-листа</a:t>
+              <a:t>3 принципа → копилка для синтеза</a:t>
             </a:r>
           </a:p>
         </p:txBody>
@@ -33393,7 +33387,7 @@
                 </a:solidFill>
                 <a:latin typeface="Arial"/>
               </a:rPr>
-              <a:t>Личная версия → Лекция 14</a:t>
+              <a:t>Финал — Лекция 17</a:t>
             </a:r>
           </a:p>
         </p:txBody>
@@ -33480,7 +33474,7 @@
                 </a:solidFill>
                 <a:latin typeface="Arial"/>
               </a:rPr>
-              <a:t>→ 3 вывода = заготовка для черновика чек-листа на следующей лекции. Не финальный синтез — заготовка.</a:t>
+              <a:t>→ 3 вывода = сырьё для копилки чек-листа. Не финальный синтез — финал на Лекции 17.</a:t>
             </a:r>
           </a:p>
         </p:txBody>
@@ -33795,7 +33789,7 @@
                 </a:solidFill>
                 <a:latin typeface="Arial"/>
               </a:rPr>
-              <a:t>Что дальше: Лекция 6 + черновик чек-листа.</a:t>
+              <a:t>Что дальше: место медицины в туре + копилка для синтеза.</a:t>
             </a:r>
           </a:p>
         </p:txBody>
@@ -33834,7 +33828,7 @@
                 </a:solidFill>
                 <a:latin typeface="Arial"/>
               </a:rPr>
-              <a:t>3 принципа сегодня — основа для черновика чек-листа на следующей лекции по этике.</a:t>
+              <a:t>Медицина — четвёртая отраслевая лекция; принципы переносятся, финал синтеза — на Лекции 17.</a:t>
             </a:r>
           </a:p>
         </p:txBody>
@@ -33847,12 +33841,12 @@
         </p:nvSpPr>
         <p:spPr>
           <a:xfrm>
-            <a:off x="502920" y="2011680"/>
-            <a:ext cx="5486400" cy="3291840"/>
+            <a:off x="502920" y="1874519"/>
+            <a:ext cx="5486400" cy="3703320"/>
           </a:xfrm>
           <a:prstGeom prst="roundRect">
             <a:avLst>
-              <a:gd name="adj" fmla="val 9259"/>
+              <a:gd name="adj" fmla="val 8230"/>
             </a:avLst>
           </a:prstGeom>
           <a:solidFill>
@@ -33889,7 +33883,7 @@
       </p:sp>
       <p:pic>
         <p:nvPicPr>
-          <p:cNvPr id="5" name="Picture 4" descr="s28-agriculture.jpg"/>
+          <p:cNvPr id="5" name="Picture 4" descr="lucide-trending-up-blue.png"/>
           <p:cNvPicPr>
             <a:picLocks noChangeAspect="1"/>
           </p:cNvPicPr>
@@ -33903,8 +33897,8 @@
         </p:blipFill>
         <p:spPr>
           <a:xfrm>
-            <a:off x="1986280" y="2240280"/>
-            <a:ext cx="2519680" cy="1417320"/>
+            <a:off x="777240" y="2167127"/>
+            <a:ext cx="777240" cy="777240"/>
           </a:xfrm>
           <a:prstGeom prst="rect">
             <a:avLst/>
@@ -33919,7 +33913,181 @@
         </p:nvSpPr>
         <p:spPr>
           <a:xfrm>
+            <a:off x="1691640" y="2258568"/>
+            <a:ext cx="3611880" cy="594360"/>
+          </a:xfrm>
+          <a:prstGeom prst="rect">
+            <a:avLst/>
+          </a:prstGeom>
+          <a:noFill/>
+        </p:spPr>
+        <p:txBody>
+          <a:bodyPr wrap="square" lIns="0" rIns="0" tIns="0" bIns="0" anchor="t">
+            <a:spAutoFit/>
+          </a:bodyPr>
+          <a:lstStyle/>
+          <a:p>
+            <a:pPr algn="l">
+              <a:lnSpc>
+                <a:spcPct val="115000"/>
+              </a:lnSpc>
+            </a:pPr>
+            <a:r>
+              <a:rPr sz="1800" b="1" i="0">
+                <a:solidFill>
+                  <a:srgbClr val="21295C"/>
+                </a:solidFill>
+                <a:latin typeface="Arial"/>
+              </a:rPr>
+              <a:t>Где мы в отраслевом туре</a:t>
+            </a:r>
+          </a:p>
+        </p:txBody>
+      </p:sp>
+      <p:sp>
+        <p:nvSpPr>
+          <p:cNvPr id="7" name="TextBox 6"/>
+          <p:cNvSpPr txBox="1"/>
+          <p:nvPr/>
+        </p:nvSpPr>
+        <p:spPr>
+          <a:xfrm>
+            <a:off x="777240" y="3154679"/>
+            <a:ext cx="4937760" cy="502920"/>
+          </a:xfrm>
+          <a:prstGeom prst="rect">
+            <a:avLst/>
+          </a:prstGeom>
+          <a:noFill/>
+        </p:spPr>
+        <p:txBody>
+          <a:bodyPr wrap="square" lIns="0" rIns="0" tIns="0" bIns="0" anchor="t">
+            <a:spAutoFit/>
+          </a:bodyPr>
+          <a:lstStyle/>
+          <a:p>
+            <a:pPr algn="l">
+              <a:lnSpc>
+                <a:spcPct val="120000"/>
+              </a:lnSpc>
+            </a:pPr>
+            <a:r>
+              <a:rPr sz="1400" b="0" i="0">
+                <a:solidFill>
+                  <a:srgbClr val="21295C"/>
+                </a:solidFill>
+                <a:latin typeface="Arial"/>
+              </a:rPr>
+              <a:t>Медицина — </a:t>
+            </a:r>
+            <a:r>
+              <a:rPr sz="1400" b="1" i="0">
+                <a:solidFill>
+                  <a:srgbClr val="F0AB00"/>
+                </a:solidFill>
+                <a:latin typeface="Arial"/>
+              </a:rPr>
+              <a:t>четвёртая отраслевая лекция</a:t>
+            </a:r>
+            <a:r>
+              <a:rPr sz="1400" b="0" i="0">
+                <a:solidFill>
+                  <a:srgbClr val="21295C"/>
+                </a:solidFill>
+                <a:latin typeface="Arial"/>
+              </a:rPr>
+              <a:t>.</a:t>
+            </a:r>
+          </a:p>
+        </p:txBody>
+      </p:sp>
+      <p:sp>
+        <p:nvSpPr>
+          <p:cNvPr id="8" name="TextBox 7"/>
+          <p:cNvSpPr txBox="1"/>
+          <p:nvPr/>
+        </p:nvSpPr>
+        <p:spPr>
+          <a:xfrm>
             <a:off x="777240" y="3657600"/>
+            <a:ext cx="4937760" cy="411480"/>
+          </a:xfrm>
+          <a:prstGeom prst="rect">
+            <a:avLst/>
+          </a:prstGeom>
+          <a:noFill/>
+        </p:spPr>
+        <p:txBody>
+          <a:bodyPr wrap="square" lIns="0" rIns="0" tIns="0" bIns="0" anchor="t">
+            <a:spAutoFit/>
+          </a:bodyPr>
+          <a:lstStyle/>
+          <a:p>
+            <a:pPr algn="l">
+              <a:lnSpc>
+                <a:spcPct val="120000"/>
+              </a:lnSpc>
+            </a:pPr>
+            <a:r>
+              <a:rPr sz="1200" b="0" i="1">
+                <a:solidFill>
+                  <a:srgbClr val="1C7293"/>
+                </a:solidFill>
+                <a:latin typeface="Arial"/>
+              </a:rPr>
+              <a:t>ПО → финансы → инженерное проектирование → медицина</a:t>
+            </a:r>
+          </a:p>
+        </p:txBody>
+      </p:sp>
+      <p:sp>
+        <p:nvSpPr>
+          <p:cNvPr id="9" name="TextBox 8"/>
+          <p:cNvSpPr txBox="1"/>
+          <p:nvPr/>
+        </p:nvSpPr>
+        <p:spPr>
+          <a:xfrm>
+            <a:off x="777240" y="4160520"/>
+            <a:ext cx="4937760" cy="1417320"/>
+          </a:xfrm>
+          <a:prstGeom prst="rect">
+            <a:avLst/>
+          </a:prstGeom>
+          <a:noFill/>
+        </p:spPr>
+        <p:txBody>
+          <a:bodyPr wrap="square" lIns="0" rIns="0" tIns="0" bIns="0" anchor="t">
+            <a:spAutoFit/>
+          </a:bodyPr>
+          <a:lstStyle/>
+          <a:p>
+            <a:pPr algn="l">
+              <a:lnSpc>
+                <a:spcPct val="135000"/>
+              </a:lnSpc>
+            </a:pPr>
+            <a:r>
+              <a:rPr sz="1300" b="0" i="0">
+                <a:solidFill>
+                  <a:srgbClr val="21295C"/>
+                </a:solidFill>
+                <a:latin typeface="Arial"/>
+              </a:rPr>
+              <a:t>Дальше тур продолжается — другие индустрии, где ставки другие: не пациент, а оборудование, урожай, инфраструктура.</a:t>
+            </a:r>
+          </a:p>
+        </p:txBody>
+      </p:sp>
+      <p:sp>
+        <p:nvSpPr>
+          <p:cNvPr id="10" name="TextBox 9"/>
+          <p:cNvSpPr txBox="1"/>
+          <p:nvPr/>
+        </p:nvSpPr>
+        <p:spPr>
+          <a:xfrm>
+            <a:off x="777240" y="5184648"/>
             <a:ext cx="4937760" cy="320040"/>
           </a:xfrm>
           <a:prstGeom prst="rect">
@@ -33935,161 +34103,35 @@
           <a:p>
             <a:pPr algn="l">
               <a:lnSpc>
-                <a:spcPct val="120000"/>
-              </a:lnSpc>
-            </a:pPr>
-            <a:r>
-              <a:rPr sz="1500" b="1" i="0">
-                <a:solidFill>
-                  <a:srgbClr val="21295C"/>
-                </a:solidFill>
-                <a:latin typeface="Arial"/>
-              </a:rPr>
-              <a:t>Лекция 6 — Производство и сельское хозяйство</a:t>
-            </a:r>
-          </a:p>
-        </p:txBody>
-      </p:sp>
-      <p:sp>
-        <p:nvSpPr>
-          <p:cNvPr id="7" name="TextBox 6"/>
-          <p:cNvSpPr txBox="1"/>
-          <p:nvPr/>
-        </p:nvSpPr>
-        <p:spPr>
-          <a:xfrm>
-            <a:off x="777240" y="3977639"/>
-            <a:ext cx="4937760" cy="365760"/>
-          </a:xfrm>
-          <a:prstGeom prst="rect">
-            <a:avLst/>
-          </a:prstGeom>
-          <a:noFill/>
-        </p:spPr>
-        <p:txBody>
-          <a:bodyPr wrap="square" lIns="0" rIns="0" tIns="0" bIns="0" anchor="t">
-            <a:spAutoFit/>
-          </a:bodyPr>
-          <a:lstStyle/>
-          <a:p>
-            <a:pPr algn="l">
-              <a:lnSpc>
                 <a:spcPct val="115000"/>
               </a:lnSpc>
             </a:pPr>
             <a:r>
-              <a:rPr sz="1300" b="1" i="0">
-                <a:solidFill>
-                  <a:srgbClr val="21295C"/>
-                </a:solidFill>
-                <a:latin typeface="Arial"/>
-              </a:rPr>
-              <a:t>Cognitive Agro Pilot — 1 500+ машин</a:t>
-            </a:r>
-          </a:p>
-        </p:txBody>
-      </p:sp>
-      <p:sp>
-        <p:nvSpPr>
-          <p:cNvPr id="8" name="TextBox 7"/>
-          <p:cNvSpPr txBox="1"/>
-          <p:nvPr/>
-        </p:nvSpPr>
-        <p:spPr>
-          <a:xfrm>
-            <a:off x="777240" y="4389120"/>
-            <a:ext cx="5029200" cy="411480"/>
-          </a:xfrm>
-          <a:prstGeom prst="rect">
-            <a:avLst/>
-          </a:prstGeom>
-          <a:noFill/>
-        </p:spPr>
-        <p:txBody>
-          <a:bodyPr wrap="square" lIns="0" rIns="0" tIns="0" bIns="0" anchor="ctr">
-            <a:spAutoFit/>
-          </a:bodyPr>
-          <a:lstStyle/>
-          <a:p>
-            <a:pPr algn="l">
-              <a:lnSpc>
-                <a:spcPct val="110000"/>
-              </a:lnSpc>
-            </a:pPr>
-            <a:r>
-              <a:rPr sz="2200" b="1" i="0">
-                <a:solidFill>
-                  <a:srgbClr val="F0AB00"/>
-                </a:solidFill>
-                <a:latin typeface="Arial"/>
-              </a:rPr>
-              <a:t>+30–40%</a:t>
-            </a:r>
-            <a:r>
               <a:rPr sz="1200" b="0" i="1">
                 <a:solidFill>
-                  <a:srgbClr val="21295C"/>
-                </a:solidFill>
-                <a:latin typeface="Arial"/>
-              </a:rPr>
-              <a:t>  эффективности (российский кейс)</a:t>
-            </a:r>
-          </a:p>
-        </p:txBody>
-      </p:sp>
-      <p:sp>
-        <p:nvSpPr>
-          <p:cNvPr id="9" name="TextBox 8"/>
-          <p:cNvSpPr txBox="1"/>
-          <p:nvPr/>
-        </p:nvSpPr>
-        <p:spPr>
-          <a:xfrm>
-            <a:off x="777240" y="4846320"/>
-            <a:ext cx="5029200" cy="320040"/>
-          </a:xfrm>
-          <a:prstGeom prst="rect">
-            <a:avLst/>
-          </a:prstGeom>
-          <a:noFill/>
-        </p:spPr>
-        <p:txBody>
-          <a:bodyPr wrap="square" lIns="0" rIns="0" tIns="0" bIns="0" anchor="t">
-            <a:spAutoFit/>
-          </a:bodyPr>
-          <a:lstStyle/>
-          <a:p>
-            <a:pPr algn="l">
-              <a:lnSpc>
-                <a:spcPct val="115000"/>
-              </a:lnSpc>
-            </a:pPr>
-            <a:r>
-              <a:rPr sz="1100" b="0" i="1">
-                <a:solidFill>
-                  <a:srgbClr val="1C7293"/>
-                </a:solidFill>
-                <a:latin typeface="Arial"/>
-              </a:rPr>
-              <a:t>Предиктивное обслуживание · контроль качества · физический AI</a:t>
-            </a:r>
-          </a:p>
-        </p:txBody>
-      </p:sp>
-      <p:sp>
-        <p:nvSpPr>
-          <p:cNvPr id="10" name="Rounded Rectangle 9"/>
+                  <a:srgbClr val="065A82"/>
+                </a:solidFill>
+                <a:latin typeface="Arial"/>
+              </a:rPr>
+              <a:t>Принципы переносятся: валидация · transparency · monitoring.</a:t>
+            </a:r>
+          </a:p>
+        </p:txBody>
+      </p:sp>
+      <p:sp>
+        <p:nvSpPr>
+          <p:cNvPr id="11" name="Rounded Rectangle 10"/>
           <p:cNvSpPr/>
           <p:nvPr/>
         </p:nvSpPr>
         <p:spPr>
           <a:xfrm>
-            <a:off x="6263640" y="2011680"/>
-            <a:ext cx="5486400" cy="3291840"/>
+            <a:off x="6263640" y="1874519"/>
+            <a:ext cx="5486400" cy="3703320"/>
           </a:xfrm>
           <a:prstGeom prst="roundRect">
             <a:avLst>
-              <a:gd name="adj" fmla="val 9259"/>
+              <a:gd name="adj" fmla="val 8230"/>
             </a:avLst>
           </a:prstGeom>
           <a:solidFill>
@@ -34126,7 +34168,7 @@
       </p:sp>
       <p:pic>
         <p:nvPicPr>
-          <p:cNvPr id="11" name="Picture 10" descr="lucide-arrow-right-circle-blue.png"/>
+          <p:cNvPr id="12" name="Picture 11" descr="lucide-list-checks-blue.png"/>
           <p:cNvPicPr>
             <a:picLocks noChangeAspect="1"/>
           </p:cNvPicPr>
@@ -34140,8 +34182,8 @@
         </p:blipFill>
         <p:spPr>
           <a:xfrm>
-            <a:off x="6537959" y="2331720"/>
-            <a:ext cx="914400" cy="914400"/>
+            <a:off x="6537959" y="2167127"/>
+            <a:ext cx="777240" cy="777240"/>
           </a:xfrm>
           <a:prstGeom prst="rect">
             <a:avLst/>
@@ -34150,14 +34192,14 @@
       </p:pic>
       <p:sp>
         <p:nvSpPr>
-          <p:cNvPr id="12" name="TextBox 11"/>
-          <p:cNvSpPr txBox="1"/>
-          <p:nvPr/>
-        </p:nvSpPr>
-        <p:spPr>
-          <a:xfrm>
-            <a:off x="7589519" y="2377440"/>
-            <a:ext cx="3977639" cy="548640"/>
+          <p:cNvPr id="13" name="TextBox 12"/>
+          <p:cNvSpPr txBox="1"/>
+          <p:nvPr/>
+        </p:nvSpPr>
+        <p:spPr>
+          <a:xfrm>
+            <a:off x="7452360" y="2258568"/>
+            <a:ext cx="4114800" cy="594360"/>
           </a:xfrm>
           <a:prstGeom prst="rect">
             <a:avLst/>
@@ -34172,31 +34214,77 @@
           <a:p>
             <a:pPr algn="l">
               <a:lnSpc>
-                <a:spcPct val="120000"/>
-              </a:lnSpc>
-            </a:pPr>
-            <a:r>
-              <a:rPr sz="1600" b="1" i="0">
+                <a:spcPct val="115000"/>
+              </a:lnSpc>
+            </a:pPr>
+            <a:r>
+              <a:rPr sz="1800" b="1" i="0">
                 <a:solidFill>
                   <a:srgbClr val="21295C"/>
                 </a:solidFill>
                 <a:latin typeface="Arial"/>
               </a:rPr>
-              <a:t>Лекция 9 — Этика и регулирование</a:t>
-            </a:r>
-          </a:p>
-        </p:txBody>
-      </p:sp>
-      <p:sp>
-        <p:nvSpPr>
-          <p:cNvPr id="13" name="TextBox 12"/>
-          <p:cNvSpPr txBox="1"/>
-          <p:nvPr/>
-        </p:nvSpPr>
-        <p:spPr>
-          <a:xfrm>
-            <a:off x="6537959" y="3383280"/>
-            <a:ext cx="5029200" cy="1371600"/>
+              <a:t>3 наблюдения → копилка</a:t>
+            </a:r>
+          </a:p>
+        </p:txBody>
+      </p:sp>
+      <p:sp>
+        <p:nvSpPr>
+          <p:cNvPr id="14" name="Rounded Rectangle 13"/>
+          <p:cNvSpPr/>
+          <p:nvPr/>
+        </p:nvSpPr>
+        <p:spPr>
+          <a:xfrm>
+            <a:off x="6537959" y="3172968"/>
+            <a:ext cx="100584" cy="100584"/>
+          </a:xfrm>
+          <a:prstGeom prst="roundRect">
+            <a:avLst>
+              <a:gd name="adj" fmla="val 50000"/>
+            </a:avLst>
+          </a:prstGeom>
+          <a:solidFill>
+            <a:srgbClr val="065A82"/>
+          </a:solidFill>
+          <a:ln>
+            <a:noFill/>
+          </a:ln>
+          <a:effectLst/>
+        </p:spPr>
+        <p:style>
+          <a:lnRef idx="1">
+            <a:schemeClr val="accent1"/>
+          </a:lnRef>
+          <a:fillRef idx="3">
+            <a:schemeClr val="accent1"/>
+          </a:fillRef>
+          <a:effectRef idx="2">
+            <a:schemeClr val="accent1"/>
+          </a:effectRef>
+          <a:fontRef idx="minor">
+            <a:schemeClr val="lt1"/>
+          </a:fontRef>
+        </p:style>
+        <p:txBody>
+          <a:bodyPr rtlCol="0" anchor="ctr"/>
+          <a:lstStyle/>
+          <a:p>
+            <a:pPr algn="ctr"/>
+          </a:p>
+        </p:txBody>
+      </p:sp>
+      <p:sp>
+        <p:nvSpPr>
+          <p:cNvPr id="15" name="TextBox 14"/>
+          <p:cNvSpPr txBox="1"/>
+          <p:nvPr/>
+        </p:nvSpPr>
+        <p:spPr>
+          <a:xfrm>
+            <a:off x="6766559" y="3108960"/>
+            <a:ext cx="4617720" cy="310896"/>
           </a:xfrm>
           <a:prstGeom prst="rect">
             <a:avLst/>
@@ -34211,19 +34299,430 @@
           <a:p>
             <a:pPr algn="l">
               <a:lnSpc>
-                <a:spcPct val="145000"/>
-              </a:lnSpc>
-            </a:pPr>
-            <a:r>
-              <a:rPr sz="1300" b="0" i="0">
+                <a:spcPct val="110000"/>
+              </a:lnSpc>
+            </a:pPr>
+            <a:r>
+              <a:rPr sz="1300" b="1" i="0">
                 <a:solidFill>
                   <a:srgbClr val="21295C"/>
                 </a:solidFill>
                 <a:latin typeface="Arial"/>
               </a:rPr>
-              <a:t>3 принципа сегодня
-→ черновик чек-листа на Лекции 9
-→ личная версия на Лекции 14</a:t>
+              <a:t>Transparency + calibration</a:t>
+            </a:r>
+          </a:p>
+        </p:txBody>
+      </p:sp>
+      <p:sp>
+        <p:nvSpPr>
+          <p:cNvPr id="16" name="TextBox 15"/>
+          <p:cNvSpPr txBox="1"/>
+          <p:nvPr/>
+        </p:nvSpPr>
+        <p:spPr>
+          <a:xfrm>
+            <a:off x="6766559" y="3419856"/>
+            <a:ext cx="4617720" cy="310896"/>
+          </a:xfrm>
+          <a:prstGeom prst="rect">
+            <a:avLst/>
+          </a:prstGeom>
+          <a:noFill/>
+        </p:spPr>
+        <p:txBody>
+          <a:bodyPr wrap="square" lIns="0" rIns="0" tIns="0" bIns="0" anchor="t">
+            <a:spAutoFit/>
+          </a:bodyPr>
+          <a:lstStyle/>
+          <a:p>
+            <a:pPr algn="l">
+              <a:lnSpc>
+                <a:spcPct val="110000"/>
+              </a:lnSpc>
+            </a:pPr>
+            <a:r>
+              <a:rPr sz="1100" b="0" i="1">
+                <a:solidFill>
+                  <a:srgbClr val="1C7293"/>
+                </a:solidFill>
+                <a:latin typeface="Arial"/>
+              </a:rPr>
+              <a:t>интерпретируемый выход; confidence калибровано-проверен</a:t>
+            </a:r>
+          </a:p>
+        </p:txBody>
+      </p:sp>
+      <p:sp>
+        <p:nvSpPr>
+          <p:cNvPr id="17" name="Rounded Rectangle 16"/>
+          <p:cNvSpPr/>
+          <p:nvPr/>
+        </p:nvSpPr>
+        <p:spPr>
+          <a:xfrm>
+            <a:off x="6537959" y="3886200"/>
+            <a:ext cx="100584" cy="100584"/>
+          </a:xfrm>
+          <a:prstGeom prst="roundRect">
+            <a:avLst>
+              <a:gd name="adj" fmla="val 50000"/>
+            </a:avLst>
+          </a:prstGeom>
+          <a:solidFill>
+            <a:srgbClr val="065A82"/>
+          </a:solidFill>
+          <a:ln>
+            <a:noFill/>
+          </a:ln>
+          <a:effectLst/>
+        </p:spPr>
+        <p:style>
+          <a:lnRef idx="1">
+            <a:schemeClr val="accent1"/>
+          </a:lnRef>
+          <a:fillRef idx="3">
+            <a:schemeClr val="accent1"/>
+          </a:fillRef>
+          <a:effectRef idx="2">
+            <a:schemeClr val="accent1"/>
+          </a:effectRef>
+          <a:fontRef idx="minor">
+            <a:schemeClr val="lt1"/>
+          </a:fontRef>
+        </p:style>
+        <p:txBody>
+          <a:bodyPr rtlCol="0" anchor="ctr"/>
+          <a:lstStyle/>
+          <a:p>
+            <a:pPr algn="ctr"/>
+          </a:p>
+        </p:txBody>
+      </p:sp>
+      <p:sp>
+        <p:nvSpPr>
+          <p:cNvPr id="18" name="TextBox 17"/>
+          <p:cNvSpPr txBox="1"/>
+          <p:nvPr/>
+        </p:nvSpPr>
+        <p:spPr>
+          <a:xfrm>
+            <a:off x="6766559" y="3822191"/>
+            <a:ext cx="4617720" cy="310896"/>
+          </a:xfrm>
+          <a:prstGeom prst="rect">
+            <a:avLst/>
+          </a:prstGeom>
+          <a:noFill/>
+        </p:spPr>
+        <p:txBody>
+          <a:bodyPr wrap="square" lIns="0" rIns="0" tIns="0" bIns="0" anchor="t">
+            <a:spAutoFit/>
+          </a:bodyPr>
+          <a:lstStyle/>
+          <a:p>
+            <a:pPr algn="l">
+              <a:lnSpc>
+                <a:spcPct val="110000"/>
+              </a:lnSpc>
+            </a:pPr>
+            <a:r>
+              <a:rPr sz="1300" b="1" i="0">
+                <a:solidFill>
+                  <a:srgbClr val="21295C"/>
+                </a:solidFill>
+                <a:latin typeface="Arial"/>
+              </a:rPr>
+              <a:t>Validation set покрывает deployment population</a:t>
+            </a:r>
+          </a:p>
+        </p:txBody>
+      </p:sp>
+      <p:sp>
+        <p:nvSpPr>
+          <p:cNvPr id="19" name="TextBox 18"/>
+          <p:cNvSpPr txBox="1"/>
+          <p:nvPr/>
+        </p:nvSpPr>
+        <p:spPr>
+          <a:xfrm>
+            <a:off x="6766559" y="4133087"/>
+            <a:ext cx="4617720" cy="310896"/>
+          </a:xfrm>
+          <a:prstGeom prst="rect">
+            <a:avLst/>
+          </a:prstGeom>
+          <a:noFill/>
+        </p:spPr>
+        <p:txBody>
+          <a:bodyPr wrap="square" lIns="0" rIns="0" tIns="0" bIns="0" anchor="t">
+            <a:spAutoFit/>
+          </a:bodyPr>
+          <a:lstStyle/>
+          <a:p>
+            <a:pPr algn="l">
+              <a:lnSpc>
+                <a:spcPct val="110000"/>
+              </a:lnSpc>
+            </a:pPr>
+            <a:r>
+              <a:rPr sz="1100" b="0" i="1">
+                <a:solidFill>
+                  <a:srgbClr val="1C7293"/>
+                </a:solidFill>
+                <a:latin typeface="Arial"/>
+              </a:rPr>
+              <a:t>bias тестируется явно; датасет репрезентативен</a:t>
+            </a:r>
+          </a:p>
+        </p:txBody>
+      </p:sp>
+      <p:sp>
+        <p:nvSpPr>
+          <p:cNvPr id="20" name="Rounded Rectangle 19"/>
+          <p:cNvSpPr/>
+          <p:nvPr/>
+        </p:nvSpPr>
+        <p:spPr>
+          <a:xfrm>
+            <a:off x="6537959" y="4599432"/>
+            <a:ext cx="100584" cy="100584"/>
+          </a:xfrm>
+          <a:prstGeom prst="roundRect">
+            <a:avLst>
+              <a:gd name="adj" fmla="val 50000"/>
+            </a:avLst>
+          </a:prstGeom>
+          <a:solidFill>
+            <a:srgbClr val="065A82"/>
+          </a:solidFill>
+          <a:ln>
+            <a:noFill/>
+          </a:ln>
+          <a:effectLst/>
+        </p:spPr>
+        <p:style>
+          <a:lnRef idx="1">
+            <a:schemeClr val="accent1"/>
+          </a:lnRef>
+          <a:fillRef idx="3">
+            <a:schemeClr val="accent1"/>
+          </a:fillRef>
+          <a:effectRef idx="2">
+            <a:schemeClr val="accent1"/>
+          </a:effectRef>
+          <a:fontRef idx="minor">
+            <a:schemeClr val="lt1"/>
+          </a:fontRef>
+        </p:style>
+        <p:txBody>
+          <a:bodyPr rtlCol="0" anchor="ctr"/>
+          <a:lstStyle/>
+          <a:p>
+            <a:pPr algn="ctr"/>
+          </a:p>
+        </p:txBody>
+      </p:sp>
+      <p:sp>
+        <p:nvSpPr>
+          <p:cNvPr id="21" name="TextBox 20"/>
+          <p:cNvSpPr txBox="1"/>
+          <p:nvPr/>
+        </p:nvSpPr>
+        <p:spPr>
+          <a:xfrm>
+            <a:off x="6766559" y="4535424"/>
+            <a:ext cx="4617720" cy="310896"/>
+          </a:xfrm>
+          <a:prstGeom prst="rect">
+            <a:avLst/>
+          </a:prstGeom>
+          <a:noFill/>
+        </p:spPr>
+        <p:txBody>
+          <a:bodyPr wrap="square" lIns="0" rIns="0" tIns="0" bIns="0" anchor="t">
+            <a:spAutoFit/>
+          </a:bodyPr>
+          <a:lstStyle/>
+          <a:p>
+            <a:pPr algn="l">
+              <a:lnSpc>
+                <a:spcPct val="110000"/>
+              </a:lnSpc>
+            </a:pPr>
+            <a:r>
+              <a:rPr sz="1300" b="1" i="0">
+                <a:solidFill>
+                  <a:srgbClr val="21295C"/>
+                </a:solidFill>
+                <a:latin typeface="Arial"/>
+              </a:rPr>
+              <a:t>Audit-trail + post-market monitoring</a:t>
+            </a:r>
+          </a:p>
+        </p:txBody>
+      </p:sp>
+      <p:sp>
+        <p:nvSpPr>
+          <p:cNvPr id="22" name="TextBox 21"/>
+          <p:cNvSpPr txBox="1"/>
+          <p:nvPr/>
+        </p:nvSpPr>
+        <p:spPr>
+          <a:xfrm>
+            <a:off x="6766559" y="4846320"/>
+            <a:ext cx="4617720" cy="310896"/>
+          </a:xfrm>
+          <a:prstGeom prst="rect">
+            <a:avLst/>
+          </a:prstGeom>
+          <a:noFill/>
+        </p:spPr>
+        <p:txBody>
+          <a:bodyPr wrap="square" lIns="0" rIns="0" tIns="0" bIns="0" anchor="t">
+            <a:spAutoFit/>
+          </a:bodyPr>
+          <a:lstStyle/>
+          <a:p>
+            <a:pPr algn="l">
+              <a:lnSpc>
+                <a:spcPct val="110000"/>
+              </a:lnSpc>
+            </a:pPr>
+            <a:r>
+              <a:rPr sz="1100" b="0" i="1">
+                <a:solidFill>
+                  <a:srgbClr val="1C7293"/>
+                </a:solidFill>
+                <a:latin typeface="Arial"/>
+              </a:rPr>
+              <a:t>кто/когда/какая версия восстановимо; качество мониторится</a:t>
+            </a:r>
+          </a:p>
+        </p:txBody>
+      </p:sp>
+      <p:sp>
+        <p:nvSpPr>
+          <p:cNvPr id="23" name="TextBox 22"/>
+          <p:cNvSpPr txBox="1"/>
+          <p:nvPr/>
+        </p:nvSpPr>
+        <p:spPr>
+          <a:xfrm>
+            <a:off x="6537959" y="5184648"/>
+            <a:ext cx="4937760" cy="320040"/>
+          </a:xfrm>
+          <a:prstGeom prst="rect">
+            <a:avLst/>
+          </a:prstGeom>
+          <a:noFill/>
+        </p:spPr>
+        <p:txBody>
+          <a:bodyPr wrap="square" lIns="0" rIns="0" tIns="0" bIns="0" anchor="t">
+            <a:spAutoFit/>
+          </a:bodyPr>
+          <a:lstStyle/>
+          <a:p>
+            <a:pPr algn="l">
+              <a:lnSpc>
+                <a:spcPct val="115000"/>
+              </a:lnSpc>
+            </a:pPr>
+            <a:r>
+              <a:rPr sz="1200" b="0" i="1">
+                <a:solidFill>
+                  <a:srgbClr val="065A82"/>
+                </a:solidFill>
+                <a:latin typeface="Arial"/>
+              </a:rPr>
+              <a:t>Это вход в копилку персонального чек-листа.</a:t>
+            </a:r>
+          </a:p>
+        </p:txBody>
+      </p:sp>
+      <p:sp>
+        <p:nvSpPr>
+          <p:cNvPr id="24" name="Rounded Rectangle 23"/>
+          <p:cNvSpPr/>
+          <p:nvPr/>
+        </p:nvSpPr>
+        <p:spPr>
+          <a:xfrm>
+            <a:off x="502920" y="5852160"/>
+            <a:ext cx="11247120" cy="502920"/>
+          </a:xfrm>
+          <a:prstGeom prst="roundRect">
+            <a:avLst>
+              <a:gd name="adj" fmla="val 12000"/>
+            </a:avLst>
+          </a:prstGeom>
+          <a:solidFill>
+            <a:srgbClr val="FEF5E0"/>
+          </a:solidFill>
+          <a:ln w="15240">
+            <a:solidFill>
+              <a:srgbClr val="F0AB00"/>
+            </a:solidFill>
+          </a:ln>
+          <a:effectLst/>
+        </p:spPr>
+        <p:style>
+          <a:lnRef idx="1">
+            <a:schemeClr val="accent1"/>
+          </a:lnRef>
+          <a:fillRef idx="3">
+            <a:schemeClr val="accent1"/>
+          </a:fillRef>
+          <a:effectRef idx="2">
+            <a:schemeClr val="accent1"/>
+          </a:effectRef>
+          <a:fontRef idx="minor">
+            <a:schemeClr val="lt1"/>
+          </a:fontRef>
+        </p:style>
+        <p:txBody>
+          <a:bodyPr rtlCol="0" anchor="ctr"/>
+          <a:lstStyle/>
+          <a:p>
+            <a:pPr algn="ctr"/>
+          </a:p>
+        </p:txBody>
+      </p:sp>
+      <p:sp>
+        <p:nvSpPr>
+          <p:cNvPr id="25" name="TextBox 24"/>
+          <p:cNvSpPr txBox="1"/>
+          <p:nvPr/>
+        </p:nvSpPr>
+        <p:spPr>
+          <a:xfrm>
+            <a:off x="685800" y="5925312"/>
+            <a:ext cx="10881360" cy="356616"/>
+          </a:xfrm>
+          <a:prstGeom prst="rect">
+            <a:avLst/>
+          </a:prstGeom>
+          <a:noFill/>
+        </p:spPr>
+        <p:txBody>
+          <a:bodyPr wrap="square" lIns="0" rIns="0" tIns="0" bIns="0" anchor="ctr">
+            <a:spAutoFit/>
+          </a:bodyPr>
+          <a:lstStyle/>
+          <a:p>
+            <a:pPr algn="l">
+              <a:lnSpc>
+                <a:spcPct val="125000"/>
+              </a:lnSpc>
+            </a:pPr>
+            <a:r>
+              <a:rPr sz="1300" b="1" i="0">
+                <a:solidFill>
+                  <a:srgbClr val="21295C"/>
+                </a:solidFill>
+                <a:latin typeface="Arial"/>
+              </a:rPr>
+              <a:t>Финал синтеза — Лекция 17 «Систематизация знаний и навыков»: сборка чек-листа из всех отраслевых кейсов курса.</a:t>
             </a:r>
           </a:p>
         </p:txBody>

--- a/library/lectures/lec-04/rendered/lec-04.pptx
+++ b/library/lectures/lec-04/rendered/lec-04.pptx
@@ -2001,7 +2001,7 @@
           <a:p/>
           <a:p>
             <a:r>
-              <a:t>Тон последнего раздела — серьёзный, без алармизма. Цель — научить инженера думать о границах сразу, на стадии design, а не post-hoc после первого инцидента. На лекции 9 «Этика и регулирование» вы превратите три принципа отсюда в черновик чек-листа; на лекции 14 «Будущее AI» — финализируете personal версию. Сегодня мы накапливаем материал для синтеза.</a:t>
+              <a:t>Тон последнего раздела — серьёзный, без алармизма. Цель — научить инженера думать о границах сразу, на стадии design, а не post-hoc после первого инцидента. Этика и ответственность — сквозная тема всех лекций курса, не отдельный раздел; три принципа отсюда станут входом в копилку персонального чек-листа. Финал синтеза — на финальной Лекции 17 «Систематизация знаний и навыков», где чек-лист собирается из всех отраслевых кейсов курса. Сегодня мы накапливаем материал для синтеза.</a:t>
             </a:r>
           </a:p>
         </p:txBody>
@@ -2687,7 +2687,7 @@
           <a:p/>
           <a:p>
             <a:r>
-              <a:t>И отсюда — закрывающая фраза, на которой держится профессиональный смысл этой лекции для инженера. Врач ставит диагноз. AI подсказывает. Инженер делает так, чтобы врач мог по-настоящему решать. По-настоящему — это значит с пониманием того, что модель сделала и почему (transparency, Grad-CAM heatmap, confidence score); с уверенностью, что эта модель валидирована именно для той популяции, на которой её сейчас применяют; с возможностью восстановить, кто, когда, с какой версией модели получил такой output — это audit-trail. Эти три инженерных принципа и есть то, что вы построили сегодня в копилку лекции 9. На лекции 14 — финальный личный чек-лист.</a:t>
+              <a:t>И отсюда — закрывающая фраза, на которой держится профессиональный смысл этой лекции для инженера. Врач ставит диагноз. AI подсказывает. Инженер делает так, чтобы врач мог по-настоящему решать. По-настоящему — это значит с пониманием того, что модель сделала и почему (transparency, Grad-CAM heatmap, confidence score); с уверенностью, что эта модель валидирована именно для той популяции, на которой её сейчас применяют; с возможностью восстановить, кто, когда, с какой версией модели получил такой output — это audit-trail. Эти три инженерных принципа и есть то, что вы построили сегодня в копилку персонального чек-листа. Финал — личный чек-лист на финальной Лекции 17 «Систематизация знаний и навыков», который собирается из всех отраслевых кейсов курса.</a:t>
             </a:r>
           </a:p>
           <a:p/>
@@ -2851,7 +2851,7 @@
           <a:p/>
           <a:p>
             <a:r>
-              <a:t>Если кто-то задаёт технический вопрос, требующий глубокого ответа, на который не хватает времени в Q&amp;A — отложите его на office hours или в семинар sem-04, где будет полтора часа на case-анализ medical AI deployment в российском контексте. Финальный beat — поблагодарите за внимание; напомните про семинар; напомните, что готовый материал для копилки лекции 9 уже есть, и сегодняшние три принципа — реальный input в будущий черновик чек-листа.</a:t>
+              <a:t>Если кто-то задаёт технический вопрос, требующий глубокого ответа, на который не хватает времени в Q&amp;A — отложите его на office hours или в семинар sem-04, где будет полтора часа на case-анализ medical AI deployment в российском контексте. Финальный beat — поблагодарите за внимание; напомните про семинар; напомните, что готовый материал для копилки персонального чек-листа уже есть, и сегодняшние три принципа — реальный input в синтез на финальной Лекции 17 «Систематизация знаний и навыков».</a:t>
             </a:r>
           </a:p>
         </p:txBody>
@@ -3009,7 +3009,7 @@
           <a:p/>
           <a:p>
             <a:r>
-              <a:t>На лекции 1 мы спрашивали: где AI работает, где — нет. Сегодня углубляемся: даже там, где AI работает, остаются вопросы ответственности. Эта лекция построена в четыре блока: сначала карта AI в медицине, потом AI-диагностика как зеркало методических проблем, затем drug discovery как баланс сбывшихся и не сбывшихся обещаний, и в конце — этика, безопасность и ответственность. На лекции 9 «Этика и регулирование» вы соберёте из этих четырёх блоков три принципа ответственного использования AI — они станут входом в черновик чек-листа, который вы доработаете на лекции 14. Сегодняшняя лекция — это материал для синтеза, не сам синтез.</a:t>
+              <a:t>На лекции 1 мы спрашивали: где AI работает, где — нет. Сегодня углубляемся: даже там, где AI работает, остаются вопросы ответственности. Эта лекция построена в четыре блока: сначала карта AI в медицине, потом AI-диагностика как зеркало методических проблем, затем drug discovery как баланс сбывшихся и не сбывшихся обещаний, и в конце — этика, безопасность и ответственность. Этика и ответственность — сквозная тема всех лекций курса, не отдельный раздел в конце; из этих четырёх блоков вы вынесете три принципа ответственного использования AI, и они станут входом в копилку персонального чек-листа. Финал синтеза собирается не сегодня и не на следующей лекции, а на финальной Лекции 17 «Систематизация знаний и навыков», где чек-лист собирается из всех отраслевых кейсов курса. Сегодняшняя лекция — это материал для синтеза, не сам синтез.</a:t>
             </a:r>
           </a:p>
         </p:txBody>

--- a/library/lectures/lec-04/rendered/lec-04.pptx
+++ b/library/lectures/lec-04/rendered/lec-04.pptx
@@ -2379,19 +2379,25 @@
           <a:lstStyle/>
           <a:p>
             <a:r>
-              <a:t>Эта лекция — первая отраслевая, и она стоит на фундаменте обзорного Модуля 1. Чтобы не дублировать и не растягивать, зафиксируем явно, что переносится готовым и не переобъясняется, а только применяется к разработке ПО. Из Лекции 1 — слоистая картина «модель, чат, агент, приложение» и понимание промпта; мы пользуемся этим как известным словарём. Из Лекции 2 — механизм, по которому AI выдаёт «почти правильный» текст: ответ генерируется сэмплингом, поэтому правдоподобный не равно верный; мы ссылаемся на это одной фразой там, где это нужно.</a:t>
+              <a:t>Несущая ось всей этой лекции — лестница автономности из четырёх уровней. Они отличаются одной величиной: насколько AI сам определяет последовательность действий, и насколько человек остаётся в цикле.</a:t>
             </a:r>
           </a:p>
           <a:p/>
           <a:p>
             <a:r>
-              <a:t>Из Лекции 3 переносятся четыре блока. Первый — лестница сложности: правило «оставайся на нижней ступени архитектуры, поднимайся только под явное требование задачи». Лестница автономности A→D этой лекции — её прямое отраслевое продолжение. Второй — критерий «когда не ИИ вовсе»: для детерминированной верифицируемой задачи правильная архитектура — обычный код; мы применяем этот критерий к dev-задачам в каждом разделе. Третий — цикл агента plan, act, check, iterate; кодинг-агент Раздела 2 — это ровно этот цикл, применённый к коду. Четвёртый — prompt injection: недоверенный контент в контексте модели может стать командой; в разработке это материализуется как атака CamoLeak.</a:t>
+              <a:t>Уровень A — автодополнение: AI дописывает строку или небольшой блок по контексту файла, человек принимает или отклоняет каждое предложение в момент написания, оставаясь в цикле на каждом токене. Уровень B — мелкие задачи через чат или inline: AI генерирует функцию или фикс по запросу, человек ставит задачу и ревьюит результат после. Уровень C — кодинг-агент: AI планирует, правит много файлов, гоняет тесты и итерирует сам; человек видит итог — pull request — ревьюит его и принимает решение о слиянии. Уровень D — оркестратор: AI берёт задачу прямо из issue-трекера и доводит до PR, иногда несколькими агентами; человек отвечает за стратегию, approval, merge и продакшен-гейт.</a:t>
             </a:r>
           </a:p>
           <a:p/>
           <a:p>
             <a:r>
-              <a:t>Иначе говоря, Лекции 1–3 дали аппарат выбора архитектуры в общем виде; эта лекция берёт одну индустрию и показывает, как аппарат работает на ней — и где именно ломается, если применять AI без суждения. Если эти четыре блока вспоминаются смутно, стоит перечитать соответствующие разделы главы Лекции 3 до этой лекции: дальше они используются как известные.</a:t>
+              <a:t>Три колонки — что делает AI, кто принимает содержательное решение, живой пример — это линза, через которую мы разберём каждый уровень одинаково. Четвёртая ось, типичный риск и точка, где человек обязателен, проявится по ходу разделов 1–4, поэтому здесь её не выписываем, чтобы не перегружать карту.</a:t>
+            </a:r>
+          </a:p>
+          <a:p/>
+          <a:p>
+            <a:r>
+              <a:t>Важно понимать статус этой лестницы. Это дидактическая карта именно этой лекции, course-scaffold-конструкт, а не отраслевой стандарт и не общепринятая классификация: у вендоров и в литературе встречаются другие разбиения. Мы выбрали именно эти четыре уровня, потому что они монотонно наращивают одну величину — степень автономии AI — и потому что это прямое продолжение лестницы сложности Лекции 3: подъём по A→D — это подъём по той же лестнице, и то же правило действует буквально — оставайся на нижней ступени, поднимайся только под явное требование задачи, и чем выше уровень, тем строже должен быть критерий «здесь обязателен человек». Сама ось A→D — нейтральная карта, а не разбор ошибки.</a:t>
             </a:r>
           </a:p>
         </p:txBody>
@@ -2719,19 +2725,25 @@
           <a:lstStyle/>
           <a:p>
             <a:r>
-              <a:t>Сформулируем центральный вопрос, к которому лекция возвращается в каждом разделе: AI пишет код всё лучше — где он реально ускоряет, где замедляет или вредит, и что в работе инженера не делегируется. Первая половина вопроса, «где ускоряет, где вредит», разбирается через лестницу автономности и через «не только код». Вторая половина, «что не делегируется», — сквозная: в конце каждого раздела стоит явный блок «когда здесь человек обязателен», а в финале всё собирается в матрицу решения и чек-лист. Пять явных точек возврата: «почти правильный» код, решение о слиянии, автономный деструктив и perception-gap, безопасность, и Brooks с DORA. Ответом будет не «AI хорош» и не «AI плох», а аппарат, которым инженер для конкретной dev-задачи называет уместный уровень автономии, конфигурацию и точку обязательного человеческого контроля.</a:t>
+              <a:t>Сформулируем центральный вопрос лекции, к которому она возвращается в каждом разделе: AI пишет код всё лучше — где он реально ускоряет, где замедляет или вредит, и что в работе инженера не делегируется.</a:t>
             </a:r>
           </a:p>
           <a:p/>
           <a:p>
             <a:r>
-              <a:t>Несущая ось лекции — лестница автономности: четыре уровня того, насколько самостоятельно AI участвует в разработке. A — автодополнение: AI дописывает строку, человек принимает каждое предложение. B — мелкие задачи через чат: AI генерирует фрагмент, человек ревьюит после. C — кодинг-агент: AI планирует, правит много файлов, человек ревьюит pull request. D — оркестратор: AI берёт задачу из трекера, человек отвечает за стратегию и слияние.</a:t>
+              <a:t>Первая половина вопроса — «где ускоряет, где вредит» — разбирается через лестницу автономности A–D и через раздел «не только код»: тестирование, ревью, безопасность. Вторая половина — «что не делегируется» — сквозная. В конце каждого раздела стоит явный блок «когда здесь человек обязателен», а в финале всё собирается в матрицу решения и чек-лист.</a:t>
             </a:r>
           </a:p>
           <a:p/>
           <a:p>
             <a:r>
-              <a:t>Важный disclaimer, который повторю прямо сейчас. Эта лестница A→D — дидактическая карта именно этой лекции, а не отраслевой стандарт и не общепринятая классификация. В литературе и у вендоров вы встретите другие разбиения. Мы выбрали эти четыре уровня, потому что они монотонно наращивают одну величину — степень, в которой AI сам определяет последовательность действий, — и потому что это прямое продолжение лестницы сложности Лекции 3. Правило действует буквально: чем выше уровень автономии, тем строже должен быть критерий «здесь обязателен человек».</a:t>
+              <a:t>Конкретно мест, где человек обязателен, пять, и мы разберём каждое подробно. Первое — «почти правильный» код, который проходит беглый взгляд, но ломается в проде. Второе — решение о слиянии и ревью pull request: оно про ответственность, а не про зелёные тесты. Третье — деструктивные действия на продакшене, где автономный агент без гейта стирает данные за секунды. Четвёртое — безопасность кода: AI вносит больше уязвимостей и при этом увереннее. Пятое — решение, что вообще строить: существенная сложность по Бруксу, которую не делегируют ни AI, ни количеству агентов.</a:t>
+            </a:r>
+          </a:p>
+          <a:p/>
+          <a:p>
+            <a:r>
+              <a:t>Ответом на центральный вопрос будет не «AI хорош» и не «AI плох», а аппарат, которым инженер для конкретной задачи называет уместный уровень автономии, конфигурацию команды и точку обязательного человеческого контроля. Именно это, а не сам факт, что AI пишет код, — содержание лекции.</a:t>
             </a:r>
           </a:p>
         </p:txBody>
@@ -2801,19 +2813,25 @@
           <a:lstStyle/>
           <a:p>
             <a:r>
-              <a:t>Прежде чем разбирать уровни по отдельности, введём единую рамку, через которую мы будем смотреть на каждый уровень A→D одинаково. Это снимает главный риск перечисления уровней — превращение их в список инструментов вместо аппарата суждения. Для любого уровня автономии мы задаём четыре вопроса. Что делает AI — какой именно объём работы он выполняет самостоятельно на этом уровне. Кто решает — кто принимает содержательное решение: что строить, что принять, что слить. Где человек обязателен — конкретная точка, в которой отсутствие человека превращает уровень из инструмента в источник катастрофы. Типичный риск — характерный режим отказа именно этого уровня.</a:t>
+              <a:t>Прежде чем разбирать уровни по отдельности, зафиксируем несущий принцип, который будет действовать на каждом из них и который объясняет вторую половину центрального вопроса.</a:t>
             </a:r>
           </a:p>
           <a:p/>
           <a:p>
             <a:r>
-              <a:t>Эта рамка — отраслевая проекция правила лестницы Лекции 3: оставайся на нижней ступени, поднимайся только под требование. В разработке это звучит так: не повышай уровень автономии AI без явного требования задачи, которого уровень ниже не закрывает, потому что каждый подъём оплачивается ослаблением человеческого контроля над тем, что попадает в кодовую базу.</a:t>
+              <a:t>Чем выше уровень автономии, тем больше радиус поражения ошибки. На уровне A ошибка — это одна неверная строка, которую человек видит в момент написания. На уровне B это уже целая функция или фикс, который человек ревьюит после генерации. На уровне C это много файлов сразу, и человек видит только итоговый pull request. На уровне D в радиусе действия агента оказываются продакшен-данные и необратимые операции, а человек контролирует только вход — постановку — и выход — слияние и выкладку; всё, что между, происходит автономно.</a:t>
             </a:r>
           </a:p>
           <a:p/>
           <a:p>
             <a:r>
-              <a:t>Покажу масштаб этого размена. Уровень A человек контролирует на каждом токене; уровень D человек контролирует только на входе, при постановке, и на выходе, при слиянии и выкладке в продакшен, а всё между — автономно. Рамка из четырёх вопросов делает явным, что именно вы отдаёте, поднимаясь на уровень выше, и этот «счёт» — не лозунг, а перечень. Мы применяем эту рамку к A и B в этом разделе, к C — в Разделе 2, к D — в Разделе 3, и каждый раз четвёртый вопрос, «где человек обязателен», окажется несущим.</a:t>
+              <a:t>Отсюда прямое следствие: точка, где человек обязателен, не исчезает с подъёмом по лестнице — она смещается и ужесточается. На уровне A контроль распределён по каждому нажатию клавиши; на уровне D он должен быть сконцентрирован в архитектурном гейте, потому что цена пропущенной ошибки несоизмеримо выше. Тот же по сути провал — модель сгенерировала правдоподобное, но неверное — на уровне A стоит одной правки, а на уровне D может стоить стёртой продакшен-базы за девять секунд.</a:t>
+            </a:r>
+          </a:p>
+          <a:p/>
+          <a:p>
+            <a:r>
+              <a:t>Практический вывод, который мы будем применять весь курс: каждый подъём по автономии оплачивается ослаблением человеческого контроля над тем, что попадает в систему. Поэтому поднимать автономию имеет смысл только тогда, когда этого требует задача, и только если под выросшую цену ошибки поставлен соответствующий гейт. Эта ось — цена ошибки — позже станет решающей в матрице выбора уровня.</a:t>
             </a:r>
           </a:p>
         </p:txBody>
@@ -2883,19 +2901,19 @@
           <a:lstStyle/>
           <a:p>
             <a:r>
-              <a:t>Автодополнение, уровень A, — режим, в котором AI-инструмент класса GitHub Copilot дописывает следующую строку или небольшой блок кода по текущему контексту файла, а разработчик принимает предложение или отклоняет. Ключевая характеристика: человек находится в цикле на каждом предложении — нет ни одного фрагмента кода, который попадает в файл, минуя явное «да» разработчика в момент написания. Это самый зрелый и наиболее измеренный уровень.</a:t>
+              <a:t>Спускаемся на первую ступень лестницы. Автодополнение, уровень A, — режим, в котором AI-инструмент класса GitHub Copilot дописывает следующую строку или небольшой блок кода по текущему контексту файла, а разработчик принимает предложение или отклоняет. Ключевая характеристика: человек находится в цикле на каждом предложении — нет ни одного фрагмента кода, который попадает в файл, минуя явное «да» разработчика в момент написания. Это самый зрелый и наиболее измеренный уровень.</a:t>
             </a:r>
           </a:p>
           <a:p/>
           <a:p>
             <a:r>
-              <a:t>Что говорят измерения. В контролируемом лабораторном эксперименте GitHub разработчики, решавшие изолированную задачу с Copilot, завершили её примерно на пятьдесят шесть процентов быстрее. Полевые эксперименты в Microsoft и Accenture дали скромнее и реалистичнее: прирост числа pull request в неделю на семь–двадцать два процента. А на знакомом сложном легаси у экспертов будет минус девятнадцать процентов — это METR, к которому вернёмся в Разделе 3. Коротко о механизме, чтобы число не висело необъяснённым: эксперт уже держит контекст этого кода в голове, и время уходит не на написание, а на объяснение контекста модели и проверку её правдоподобного результата — полный разбор на слайде s17. Один и тот же инструмент даёт ускорение, скромный прирост или замедление в зависимости от задачи и контекста — это не противоречие в данных, это содержательный факт: эффект AI контекстно-зависим, а не универсален.</a:t>
+              <a:t>Что говорят измерения. В контролируемом лабораторном эксперименте GitHub разработчики, решавшие изолированную задачу с Copilot, завершили её примерно на пятьдесят шесть процентов быстрее. Полевые эксперименты в Microsoft и Accenture дали скромнее и реалистичнее: прирост числа pull request в неделю на семь–двадцать два процента. А на знакомом сложном легаси у экспертов будет минус девятнадцать процентов. Коротко о механизме, чтобы число не висело необъяснённым: эксперт уже держит контекст этого кода в голове, и время уходит не на написание, а на объяснение контекста модели и проверку её правдоподобного результата — полный разбор будет дальше. Один и тот же инструмент даёт ускорение, скромный прирост или замедление в зависимости от задачи и контекста — это не противоречие в данных, это содержательный факт: эффект AI контекстно-зависим, а не универсален.</a:t>
             </a:r>
           </a:p>
           <a:p/>
           <a:p>
             <a:r>
-              <a:t>Применим рамку. Что делает AI: предлагает продолжение по контексту. Кто решает: человек, на каждом предложении. Где человек обязателен: собственно везде — это уровень с максимальным человеческим контролем по построению. Типичный риск: автопринятие без чтения. Главная опасность уровня A не в том, что инструмент предлагает плохой код, а в том, что разработчик привыкает нажимать «принять», не читая, и тогда уровень A де-факто деградирует до автономного ввода кода без ревью. Урок парадоксален: самый безопасный уровень автономии безопасен только пока человек реально читает то, что принимает.</a:t>
+              <a:t>Где этот уровень уже стоит и в чём его ловушка. Стоит он в IDE почти каждого инженера. Человек читает и принимает каждое предложение сам — отсюда и максимальный контроль. Но именно здесь ловушка: главная опасность уровня A не в том, что инструмент предлагает плохой код, а в том, что разработчик привыкает нажимать «принять», не читая, и тогда уровень A де-факто деградирует до автономного ввода кода без ревью. Документированная цена этого — рост клонированного кода и тиражирование уязвимых паттернов. Урок парадоксален: самый безопасный уровень автономии безопасен только пока человек реально читает то, что принимает.</a:t>
             </a:r>
           </a:p>
         </p:txBody>
@@ -2965,19 +2983,19 @@
           <a:lstStyle/>
           <a:p>
             <a:r>
-              <a:t>Уровень B — мелкие задачи через диалог: разработчик формулирует задачу в чате или inline-команде — «напиши функцию, которая делает X», «почини этот баг», «объясни, что делает этот код», — AI возвращает фрагмент или объяснение, разработчик ревьюит и интегрирует результат.</a:t>
+              <a:t>Поднимаемся на вторую ступень. Уровень B — мелкие задачи через диалог: разработчик формулирует задачу в чате или inline-команде — «напиши функцию, которая делает X», «почини этот баг», «объясни, что делает этот код», — AI возвращает фрагмент или объяснение, разработчик ревьюит и интегрирует результат.</a:t>
             </a:r>
           </a:p>
           <a:p/>
           <a:p>
             <a:r>
-              <a:t>Границу A и B важно сформулировать точно, потому что её часто стирают. На уровне A единица работы — строка-в-потоке, человек в цикле на каждом токене, ревью происходит в момент написания. На уровне B единица работы — задача-фрагмент: функция или фикс; человек в цикле после генерации, ревью происходит отдельным шагом. Это смещение — «человек проверяет после, а не во время» — и есть первое реальное делегирование в лестнице, и именно с него начинаются характерные проблемы AI-кода.</a:t>
+              <a:t>Граница между A и B — это именно различение, и его важно сформулировать точно, потому что его часто стирают. На уровне A единица работы — строка-в-потоке, человек в цикле на каждом токене, ревью происходит в момент написания. На уровне B единица работы — задача-фрагмент: функция или фикс; человек в цикле после генерации, ревью происходит отдельным шагом. Это смещение — «человек проверяет после, а не во время» — и есть первое реальное делегирование в лестнице, и именно с него начинаются характерные проблемы AI-кода.</a:t>
             </a:r>
           </a:p>
           <a:p/>
           <a:p>
             <a:r>
-              <a:t>Применим рамку. Что делает AI: генерирует законченный фрагмент по поставленной задаче. Кто решает: человек ставит задачу и принимает решение, годен ли результат. Где человек обязателен: на ревью результата до интеграции — потому что на уровне B уже нет защиты «я видел каждую строку, пока она писалась». Типичный риск: «почти правильный» код, который проходит беглый взгляд, но содержит дефект в краевом случае или в интеграции. Этот риск настолько центральный, что ему посвящён отдельный следующий слайд — там центральный вопрос лекции впервые вернётся ребром.</a:t>
+              <a:t>Что эта граница меняет на практике, и почему она важна. Во-первых, защита «я видел каждую строку, пока она писалась» на уровне B уже не работает — фрагмент пришёл готовым. Во-вторых, ревью становится отдельным шагом, а отдельный шаг легко пропустить под давлением сроков. В-третьих, именно здесь появляется «почти правильный» код — фрагмент, который проходит беглый взгляд, но содержит дефект в краевом случае или в интеграции. Этот риск настолько центральный, что ему посвящён отдельный следующий слайд — там центральный вопрос лекции впервые вернётся ребром.</a:t>
             </a:r>
           </a:p>
         </p:txBody>
@@ -6425,14 +6443,60 @@
       </p:sp>
       <p:sp>
         <p:nvSpPr>
-          <p:cNvPr id="9" name="TextBox 8"/>
-          <p:cNvSpPr txBox="1"/>
-          <p:nvPr/>
-        </p:nvSpPr>
-        <p:spPr>
-          <a:xfrm>
-            <a:off x="960120" y="3200400"/>
-            <a:ext cx="3246120" cy="292608"/>
+          <p:cNvPr id="9" name="Rounded Rectangle 8"/>
+          <p:cNvSpPr/>
+          <p:nvPr/>
+        </p:nvSpPr>
+        <p:spPr>
+          <a:xfrm>
+            <a:off x="905256" y="3300984"/>
+            <a:ext cx="1060704" cy="329184"/>
+          </a:xfrm>
+          <a:prstGeom prst="roundRect">
+            <a:avLst>
+              <a:gd name="adj" fmla="val 40000"/>
+            </a:avLst>
+          </a:prstGeom>
+          <a:solidFill>
+            <a:srgbClr val="E5EAF0"/>
+          </a:solidFill>
+          <a:ln>
+            <a:noFill/>
+          </a:ln>
+          <a:effectLst/>
+        </p:spPr>
+        <p:style>
+          <a:lnRef idx="1">
+            <a:schemeClr val="accent1"/>
+          </a:lnRef>
+          <a:fillRef idx="3">
+            <a:schemeClr val="accent1"/>
+          </a:fillRef>
+          <a:effectRef idx="2">
+            <a:schemeClr val="accent1"/>
+          </a:effectRef>
+          <a:fontRef idx="minor">
+            <a:schemeClr val="lt1"/>
+          </a:fontRef>
+        </p:style>
+        <p:txBody>
+          <a:bodyPr rtlCol="0" anchor="ctr"/>
+          <a:lstStyle/>
+          <a:p>
+            <a:pPr algn="ctr"/>
+          </a:p>
+        </p:txBody>
+      </p:sp>
+      <p:sp>
+        <p:nvSpPr>
+          <p:cNvPr id="10" name="TextBox 9"/>
+          <p:cNvSpPr txBox="1"/>
+          <p:nvPr/>
+        </p:nvSpPr>
+        <p:spPr>
+          <a:xfrm>
+            <a:off x="905256" y="3300984"/>
+            <a:ext cx="1060704" cy="329184"/>
           </a:xfrm>
           <a:prstGeom prst="rect">
             <a:avLst/>
@@ -6445,33 +6509,111 @@
           </a:bodyPr>
           <a:lstStyle/>
           <a:p>
+            <a:pPr algn="ctr">
+              <a:lnSpc>
+                <a:spcPct val="115000"/>
+              </a:lnSpc>
+            </a:pPr>
+            <a:r>
+              <a:rPr sz="1100" b="1" i="0">
+                <a:solidFill>
+                  <a:srgbClr val="065A82"/>
+                </a:solidFill>
+                <a:latin typeface="Arial"/>
+              </a:rPr>
+              <a:t>ОЖИДАЛИ</a:t>
+            </a:r>
+          </a:p>
+        </p:txBody>
+      </p:sp>
+      <p:sp>
+        <p:nvSpPr>
+          <p:cNvPr id="11" name="TextBox 10"/>
+          <p:cNvSpPr txBox="1"/>
+          <p:nvPr/>
+        </p:nvSpPr>
+        <p:spPr>
+          <a:xfrm>
+            <a:off x="2075688" y="3200400"/>
+            <a:ext cx="1847088" cy="530352"/>
+          </a:xfrm>
+          <a:prstGeom prst="rect">
+            <a:avLst/>
+          </a:prstGeom>
+          <a:noFill/>
+        </p:spPr>
+        <p:txBody>
+          <a:bodyPr wrap="square" lIns="0" rIns="0" tIns="0" bIns="0" anchor="ctr">
+            <a:spAutoFit/>
+          </a:bodyPr>
+          <a:lstStyle/>
+          <a:p>
             <a:pPr algn="l">
               <a:lnSpc>
+                <a:spcPct val="105000"/>
+              </a:lnSpc>
+            </a:pPr>
+            <a:r>
+              <a:rPr sz="1200" b="1" i="0">
+                <a:solidFill>
+                  <a:srgbClr val="21295C"/>
+                </a:solidFill>
+                <a:latin typeface="Arial"/>
+              </a:rPr>
+              <a:t>Прогноз до эксперимента</a:t>
+            </a:r>
+          </a:p>
+        </p:txBody>
+      </p:sp>
+      <p:sp>
+        <p:nvSpPr>
+          <p:cNvPr id="12" name="TextBox 11"/>
+          <p:cNvSpPr txBox="1"/>
+          <p:nvPr/>
+        </p:nvSpPr>
+        <p:spPr>
+          <a:xfrm>
+            <a:off x="3959352" y="3163824"/>
+            <a:ext cx="1280160" cy="603504"/>
+          </a:xfrm>
+          <a:prstGeom prst="rect">
+            <a:avLst/>
+          </a:prstGeom>
+          <a:noFill/>
+        </p:spPr>
+        <p:txBody>
+          <a:bodyPr wrap="square" lIns="0" rIns="0" tIns="0" bIns="0" anchor="ctr">
+            <a:spAutoFit/>
+          </a:bodyPr>
+          <a:lstStyle/>
+          <a:p>
+            <a:pPr algn="r">
+              <a:lnSpc>
                 <a:spcPct val="100000"/>
               </a:lnSpc>
             </a:pPr>
             <a:r>
-              <a:rPr sz="1300" b="1" i="0">
-                <a:solidFill>
-                  <a:srgbClr val="21295C"/>
-                </a:solidFill>
-                <a:latin typeface="Arial"/>
-              </a:rPr>
-              <a:t>Прогноз до эксперимента</a:t>
-            </a:r>
-          </a:p>
-        </p:txBody>
-      </p:sp>
-      <p:sp>
-        <p:nvSpPr>
-          <p:cNvPr id="10" name="TextBox 9"/>
-          <p:cNvSpPr txBox="1"/>
-          <p:nvPr/>
-        </p:nvSpPr>
-        <p:spPr>
-          <a:xfrm>
-            <a:off x="960120" y="3493008"/>
-            <a:ext cx="3246120" cy="274320"/>
+              <a:rPr sz="2800" b="1" i="0">
+                <a:solidFill>
+                  <a:srgbClr val="065A82"/>
+                </a:solidFill>
+                <a:latin typeface="Arial"/>
+              </a:rPr>
+              <a:t>−24%</a:t>
+            </a:r>
+          </a:p>
+        </p:txBody>
+      </p:sp>
+      <p:sp>
+        <p:nvSpPr>
+          <p:cNvPr id="13" name="TextBox 12"/>
+          <p:cNvSpPr txBox="1"/>
+          <p:nvPr/>
+        </p:nvSpPr>
+        <p:spPr>
+          <a:xfrm>
+            <a:off x="5330952" y="3163824"/>
+            <a:ext cx="1325880" cy="603504"/>
           </a:xfrm>
           <a:prstGeom prst="rect">
             <a:avLst/>
@@ -6490,59 +6632,20 @@
               </a:lnSpc>
             </a:pPr>
             <a:r>
-              <a:rPr sz="1150" b="0" i="1">
+              <a:rPr sz="1250" b="0" i="0">
                 <a:solidFill>
                   <a:srgbClr val="5B6678"/>
                 </a:solidFill>
                 <a:latin typeface="Arial"/>
               </a:rPr>
-              <a:t>ждали ускорение</a:t>
-            </a:r>
-          </a:p>
-        </p:txBody>
-      </p:sp>
-      <p:sp>
-        <p:nvSpPr>
-          <p:cNvPr id="11" name="TextBox 10"/>
-          <p:cNvSpPr txBox="1"/>
-          <p:nvPr/>
-        </p:nvSpPr>
-        <p:spPr>
-          <a:xfrm>
-            <a:off x="4343400" y="3163824"/>
-            <a:ext cx="2148839" cy="603504"/>
-          </a:xfrm>
-          <a:prstGeom prst="rect">
-            <a:avLst/>
-          </a:prstGeom>
-          <a:noFill/>
-        </p:spPr>
-        <p:txBody>
-          <a:bodyPr wrap="square" lIns="0" rIns="0" tIns="0" bIns="0" anchor="ctr">
-            <a:spAutoFit/>
-          </a:bodyPr>
-          <a:lstStyle/>
-          <a:p>
-            <a:pPr algn="r">
-              <a:lnSpc>
-                <a:spcPct val="100000"/>
-              </a:lnSpc>
-            </a:pPr>
-            <a:r>
-              <a:rPr sz="3000" b="1" i="0">
-                <a:solidFill>
-                  <a:srgbClr val="065A82"/>
-                </a:solidFill>
-                <a:latin typeface="Arial"/>
-              </a:rPr>
-              <a:t>−24%</a:t>
-            </a:r>
-          </a:p>
-        </p:txBody>
-      </p:sp>
-      <p:sp>
-        <p:nvSpPr>
-          <p:cNvPr id="12" name="Rounded Rectangle 11"/>
+              <a:t>быстрее</a:t>
+            </a:r>
+          </a:p>
+        </p:txBody>
+      </p:sp>
+      <p:sp>
+        <p:nvSpPr>
+          <p:cNvPr id="14" name="Rounded Rectangle 13"/>
           <p:cNvSpPr/>
           <p:nvPr/>
         </p:nvSpPr>
@@ -6590,14 +6693,60 @@
       </p:sp>
       <p:sp>
         <p:nvSpPr>
-          <p:cNvPr id="13" name="TextBox 12"/>
-          <p:cNvSpPr txBox="1"/>
-          <p:nvPr/>
-        </p:nvSpPr>
-        <p:spPr>
-          <a:xfrm>
-            <a:off x="960120" y="3986783"/>
-            <a:ext cx="3246120" cy="292608"/>
+          <p:cNvPr id="15" name="Rounded Rectangle 14"/>
+          <p:cNvSpPr/>
+          <p:nvPr/>
+        </p:nvSpPr>
+        <p:spPr>
+          <a:xfrm>
+            <a:off x="905256" y="4087368"/>
+            <a:ext cx="1060704" cy="329184"/>
+          </a:xfrm>
+          <a:prstGeom prst="roundRect">
+            <a:avLst>
+              <a:gd name="adj" fmla="val 40000"/>
+            </a:avLst>
+          </a:prstGeom>
+          <a:solidFill>
+            <a:srgbClr val="E5EAF0"/>
+          </a:solidFill>
+          <a:ln>
+            <a:noFill/>
+          </a:ln>
+          <a:effectLst/>
+        </p:spPr>
+        <p:style>
+          <a:lnRef idx="1">
+            <a:schemeClr val="accent1"/>
+          </a:lnRef>
+          <a:fillRef idx="3">
+            <a:schemeClr val="accent1"/>
+          </a:fillRef>
+          <a:effectRef idx="2">
+            <a:schemeClr val="accent1"/>
+          </a:effectRef>
+          <a:fontRef idx="minor">
+            <a:schemeClr val="lt1"/>
+          </a:fontRef>
+        </p:style>
+        <p:txBody>
+          <a:bodyPr rtlCol="0" anchor="ctr"/>
+          <a:lstStyle/>
+          <a:p>
+            <a:pPr algn="ctr"/>
+          </a:p>
+        </p:txBody>
+      </p:sp>
+      <p:sp>
+        <p:nvSpPr>
+          <p:cNvPr id="16" name="TextBox 15"/>
+          <p:cNvSpPr txBox="1"/>
+          <p:nvPr/>
+        </p:nvSpPr>
+        <p:spPr>
+          <a:xfrm>
+            <a:off x="905256" y="4087368"/>
+            <a:ext cx="1060704" cy="329184"/>
           </a:xfrm>
           <a:prstGeom prst="rect">
             <a:avLst/>
@@ -6610,33 +6759,111 @@
           </a:bodyPr>
           <a:lstStyle/>
           <a:p>
+            <a:pPr algn="ctr">
+              <a:lnSpc>
+                <a:spcPct val="115000"/>
+              </a:lnSpc>
+            </a:pPr>
+            <a:r>
+              <a:rPr sz="1100" b="1" i="0">
+                <a:solidFill>
+                  <a:srgbClr val="065A82"/>
+                </a:solidFill>
+                <a:latin typeface="Arial"/>
+              </a:rPr>
+              <a:t>ОЖИДАЛИ</a:t>
+            </a:r>
+          </a:p>
+        </p:txBody>
+      </p:sp>
+      <p:sp>
+        <p:nvSpPr>
+          <p:cNvPr id="17" name="TextBox 16"/>
+          <p:cNvSpPr txBox="1"/>
+          <p:nvPr/>
+        </p:nvSpPr>
+        <p:spPr>
+          <a:xfrm>
+            <a:off x="2075688" y="3986783"/>
+            <a:ext cx="1847088" cy="530352"/>
+          </a:xfrm>
+          <a:prstGeom prst="rect">
+            <a:avLst/>
+          </a:prstGeom>
+          <a:noFill/>
+        </p:spPr>
+        <p:txBody>
+          <a:bodyPr wrap="square" lIns="0" rIns="0" tIns="0" bIns="0" anchor="ctr">
+            <a:spAutoFit/>
+          </a:bodyPr>
+          <a:lstStyle/>
+          <a:p>
             <a:pPr algn="l">
               <a:lnSpc>
+                <a:spcPct val="105000"/>
+              </a:lnSpc>
+            </a:pPr>
+            <a:r>
+              <a:rPr sz="1200" b="1" i="0">
+                <a:solidFill>
+                  <a:srgbClr val="21295C"/>
+                </a:solidFill>
+                <a:latin typeface="Arial"/>
+              </a:rPr>
+              <a:t>Вера после, уже поработав</a:t>
+            </a:r>
+          </a:p>
+        </p:txBody>
+      </p:sp>
+      <p:sp>
+        <p:nvSpPr>
+          <p:cNvPr id="18" name="TextBox 17"/>
+          <p:cNvSpPr txBox="1"/>
+          <p:nvPr/>
+        </p:nvSpPr>
+        <p:spPr>
+          <a:xfrm>
+            <a:off x="3959352" y="3950207"/>
+            <a:ext cx="1280160" cy="603504"/>
+          </a:xfrm>
+          <a:prstGeom prst="rect">
+            <a:avLst/>
+          </a:prstGeom>
+          <a:noFill/>
+        </p:spPr>
+        <p:txBody>
+          <a:bodyPr wrap="square" lIns="0" rIns="0" tIns="0" bIns="0" anchor="ctr">
+            <a:spAutoFit/>
+          </a:bodyPr>
+          <a:lstStyle/>
+          <a:p>
+            <a:pPr algn="r">
+              <a:lnSpc>
                 <a:spcPct val="100000"/>
               </a:lnSpc>
             </a:pPr>
             <a:r>
-              <a:rPr sz="1300" b="1" i="0">
-                <a:solidFill>
-                  <a:srgbClr val="21295C"/>
-                </a:solidFill>
-                <a:latin typeface="Arial"/>
-              </a:rPr>
-              <a:t>Вера после, уже поработав</a:t>
-            </a:r>
-          </a:p>
-        </p:txBody>
-      </p:sp>
-      <p:sp>
-        <p:nvSpPr>
-          <p:cNvPr id="14" name="TextBox 13"/>
-          <p:cNvSpPr txBox="1"/>
-          <p:nvPr/>
-        </p:nvSpPr>
-        <p:spPr>
-          <a:xfrm>
-            <a:off x="960120" y="4279392"/>
-            <a:ext cx="3246120" cy="274320"/>
+              <a:rPr sz="2800" b="1" i="0">
+                <a:solidFill>
+                  <a:srgbClr val="065A82"/>
+                </a:solidFill>
+                <a:latin typeface="Arial"/>
+              </a:rPr>
+              <a:t>≈ −20%</a:t>
+            </a:r>
+          </a:p>
+        </p:txBody>
+      </p:sp>
+      <p:sp>
+        <p:nvSpPr>
+          <p:cNvPr id="19" name="TextBox 18"/>
+          <p:cNvSpPr txBox="1"/>
+          <p:nvPr/>
+        </p:nvSpPr>
+        <p:spPr>
+          <a:xfrm>
+            <a:off x="5330952" y="3950207"/>
+            <a:ext cx="1325880" cy="603504"/>
           </a:xfrm>
           <a:prstGeom prst="rect">
             <a:avLst/>
@@ -6655,59 +6882,20 @@
               </a:lnSpc>
             </a:pPr>
             <a:r>
-              <a:rPr sz="1150" b="0" i="1">
+              <a:rPr sz="1250" b="0" i="0">
                 <a:solidFill>
                   <a:srgbClr val="5B6678"/>
                 </a:solidFill>
                 <a:latin typeface="Arial"/>
               </a:rPr>
-              <a:t>думали, что ускорил</a:t>
-            </a:r>
-          </a:p>
-        </p:txBody>
-      </p:sp>
-      <p:sp>
-        <p:nvSpPr>
-          <p:cNvPr id="15" name="TextBox 14"/>
-          <p:cNvSpPr txBox="1"/>
-          <p:nvPr/>
-        </p:nvSpPr>
-        <p:spPr>
-          <a:xfrm>
-            <a:off x="4343400" y="3950207"/>
-            <a:ext cx="2148839" cy="603504"/>
-          </a:xfrm>
-          <a:prstGeom prst="rect">
-            <a:avLst/>
-          </a:prstGeom>
-          <a:noFill/>
-        </p:spPr>
-        <p:txBody>
-          <a:bodyPr wrap="square" lIns="0" rIns="0" tIns="0" bIns="0" anchor="ctr">
-            <a:spAutoFit/>
-          </a:bodyPr>
-          <a:lstStyle/>
-          <a:p>
-            <a:pPr algn="r">
-              <a:lnSpc>
-                <a:spcPct val="100000"/>
-              </a:lnSpc>
-            </a:pPr>
-            <a:r>
-              <a:rPr sz="3000" b="1" i="0">
-                <a:solidFill>
-                  <a:srgbClr val="065A82"/>
-                </a:solidFill>
-                <a:latin typeface="Arial"/>
-              </a:rPr>
-              <a:t>≈ −20%</a:t>
-            </a:r>
-          </a:p>
-        </p:txBody>
-      </p:sp>
-      <p:sp>
-        <p:nvSpPr>
-          <p:cNvPr id="16" name="Rounded Rectangle 15"/>
+              <a:t>быстрее</a:t>
+            </a:r>
+          </a:p>
+        </p:txBody>
+      </p:sp>
+      <p:sp>
+        <p:nvSpPr>
+          <p:cNvPr id="20" name="Rounded Rectangle 19"/>
           <p:cNvSpPr/>
           <p:nvPr/>
         </p:nvSpPr>
@@ -6755,14 +6943,60 @@
       </p:sp>
       <p:sp>
         <p:nvSpPr>
-          <p:cNvPr id="17" name="TextBox 16"/>
-          <p:cNvSpPr txBox="1"/>
-          <p:nvPr/>
-        </p:nvSpPr>
-        <p:spPr>
-          <a:xfrm>
-            <a:off x="960120" y="4773168"/>
-            <a:ext cx="3246120" cy="292608"/>
+          <p:cNvPr id="21" name="Rounded Rectangle 20"/>
+          <p:cNvSpPr/>
+          <p:nvPr/>
+        </p:nvSpPr>
+        <p:spPr>
+          <a:xfrm>
+            <a:off x="905256" y="4873752"/>
+            <a:ext cx="1060704" cy="329184"/>
+          </a:xfrm>
+          <a:prstGeom prst="roundRect">
+            <a:avLst>
+              <a:gd name="adj" fmla="val 40000"/>
+            </a:avLst>
+          </a:prstGeom>
+          <a:solidFill>
+            <a:srgbClr val="F0AB00"/>
+          </a:solidFill>
+          <a:ln>
+            <a:noFill/>
+          </a:ln>
+          <a:effectLst/>
+        </p:spPr>
+        <p:style>
+          <a:lnRef idx="1">
+            <a:schemeClr val="accent1"/>
+          </a:lnRef>
+          <a:fillRef idx="3">
+            <a:schemeClr val="accent1"/>
+          </a:fillRef>
+          <a:effectRef idx="2">
+            <a:schemeClr val="accent1"/>
+          </a:effectRef>
+          <a:fontRef idx="minor">
+            <a:schemeClr val="lt1"/>
+          </a:fontRef>
+        </p:style>
+        <p:txBody>
+          <a:bodyPr rtlCol="0" anchor="ctr"/>
+          <a:lstStyle/>
+          <a:p>
+            <a:pPr algn="ctr"/>
+          </a:p>
+        </p:txBody>
+      </p:sp>
+      <p:sp>
+        <p:nvSpPr>
+          <p:cNvPr id="22" name="TextBox 21"/>
+          <p:cNvSpPr txBox="1"/>
+          <p:nvPr/>
+        </p:nvSpPr>
+        <p:spPr>
+          <a:xfrm>
+            <a:off x="905256" y="4873752"/>
+            <a:ext cx="1060704" cy="329184"/>
           </a:xfrm>
           <a:prstGeom prst="rect">
             <a:avLst/>
@@ -6775,33 +7009,111 @@
           </a:bodyPr>
           <a:lstStyle/>
           <a:p>
+            <a:pPr algn="ctr">
+              <a:lnSpc>
+                <a:spcPct val="115000"/>
+              </a:lnSpc>
+            </a:pPr>
+            <a:r>
+              <a:rPr sz="1100" b="1" i="0">
+                <a:solidFill>
+                  <a:srgbClr val="21295C"/>
+                </a:solidFill>
+                <a:latin typeface="Arial"/>
+              </a:rPr>
+              <a:t>ВЫШЛО</a:t>
+            </a:r>
+          </a:p>
+        </p:txBody>
+      </p:sp>
+      <p:sp>
+        <p:nvSpPr>
+          <p:cNvPr id="23" name="TextBox 22"/>
+          <p:cNvSpPr txBox="1"/>
+          <p:nvPr/>
+        </p:nvSpPr>
+        <p:spPr>
+          <a:xfrm>
+            <a:off x="2075688" y="4773168"/>
+            <a:ext cx="1847088" cy="530352"/>
+          </a:xfrm>
+          <a:prstGeom prst="rect">
+            <a:avLst/>
+          </a:prstGeom>
+          <a:noFill/>
+        </p:spPr>
+        <p:txBody>
+          <a:bodyPr wrap="square" lIns="0" rIns="0" tIns="0" bIns="0" anchor="ctr">
+            <a:spAutoFit/>
+          </a:bodyPr>
+          <a:lstStyle/>
+          <a:p>
             <a:pPr algn="l">
               <a:lnSpc>
+                <a:spcPct val="105000"/>
+              </a:lnSpc>
+            </a:pPr>
+            <a:r>
+              <a:rPr sz="1200" b="1" i="0">
+                <a:solidFill>
+                  <a:srgbClr val="21295C"/>
+                </a:solidFill>
+                <a:latin typeface="Arial"/>
+              </a:rPr>
+              <a:t>Измеренный факт</a:t>
+            </a:r>
+          </a:p>
+        </p:txBody>
+      </p:sp>
+      <p:sp>
+        <p:nvSpPr>
+          <p:cNvPr id="24" name="TextBox 23"/>
+          <p:cNvSpPr txBox="1"/>
+          <p:nvPr/>
+        </p:nvSpPr>
+        <p:spPr>
+          <a:xfrm>
+            <a:off x="3959352" y="4736592"/>
+            <a:ext cx="1280160" cy="603504"/>
+          </a:xfrm>
+          <a:prstGeom prst="rect">
+            <a:avLst/>
+          </a:prstGeom>
+          <a:noFill/>
+        </p:spPr>
+        <p:txBody>
+          <a:bodyPr wrap="square" lIns="0" rIns="0" tIns="0" bIns="0" anchor="ctr">
+            <a:spAutoFit/>
+          </a:bodyPr>
+          <a:lstStyle/>
+          <a:p>
+            <a:pPr algn="r">
+              <a:lnSpc>
                 <a:spcPct val="100000"/>
               </a:lnSpc>
             </a:pPr>
             <a:r>
-              <a:rPr sz="1300" b="1" i="0">
-                <a:solidFill>
-                  <a:srgbClr val="21295C"/>
-                </a:solidFill>
-                <a:latin typeface="Arial"/>
-              </a:rPr>
-              <a:t>Измеренный факт</a:t>
-            </a:r>
-          </a:p>
-        </p:txBody>
-      </p:sp>
-      <p:sp>
-        <p:nvSpPr>
-          <p:cNvPr id="18" name="TextBox 17"/>
-          <p:cNvSpPr txBox="1"/>
-          <p:nvPr/>
-        </p:nvSpPr>
-        <p:spPr>
-          <a:xfrm>
-            <a:off x="960120" y="5065776"/>
-            <a:ext cx="3246120" cy="274320"/>
+              <a:rPr sz="2800" b="1" i="0">
+                <a:solidFill>
+                  <a:srgbClr val="F0AB00"/>
+                </a:solidFill>
+                <a:latin typeface="Arial"/>
+              </a:rPr>
+              <a:t>+19%</a:t>
+            </a:r>
+          </a:p>
+        </p:txBody>
+      </p:sp>
+      <p:sp>
+        <p:nvSpPr>
+          <p:cNvPr id="25" name="TextBox 24"/>
+          <p:cNvSpPr txBox="1"/>
+          <p:nvPr/>
+        </p:nvSpPr>
+        <p:spPr>
+          <a:xfrm>
+            <a:off x="5330952" y="4736592"/>
+            <a:ext cx="1325880" cy="603504"/>
           </a:xfrm>
           <a:prstGeom prst="rect">
             <a:avLst/>
@@ -6820,59 +7132,20 @@
               </a:lnSpc>
             </a:pPr>
             <a:r>
-              <a:rPr sz="1150" b="0" i="1">
+              <a:rPr sz="1400" b="1" i="0">
                 <a:solidFill>
                   <a:srgbClr val="F0AB00"/>
                 </a:solidFill>
                 <a:latin typeface="Arial"/>
               </a:rPr>
-              <a:t>по времени — замедление</a:t>
-            </a:r>
-          </a:p>
-        </p:txBody>
-      </p:sp>
-      <p:sp>
-        <p:nvSpPr>
-          <p:cNvPr id="19" name="TextBox 18"/>
-          <p:cNvSpPr txBox="1"/>
-          <p:nvPr/>
-        </p:nvSpPr>
-        <p:spPr>
-          <a:xfrm>
-            <a:off x="4343400" y="4736592"/>
-            <a:ext cx="2148839" cy="603504"/>
-          </a:xfrm>
-          <a:prstGeom prst="rect">
-            <a:avLst/>
-          </a:prstGeom>
-          <a:noFill/>
-        </p:spPr>
-        <p:txBody>
-          <a:bodyPr wrap="square" lIns="0" rIns="0" tIns="0" bIns="0" anchor="ctr">
-            <a:spAutoFit/>
-          </a:bodyPr>
-          <a:lstStyle/>
-          <a:p>
-            <a:pPr algn="r">
-              <a:lnSpc>
-                <a:spcPct val="100000"/>
-              </a:lnSpc>
-            </a:pPr>
-            <a:r>
-              <a:rPr sz="3000" b="1" i="0">
-                <a:solidFill>
-                  <a:srgbClr val="F0AB00"/>
-                </a:solidFill>
-                <a:latin typeface="Arial"/>
-              </a:rPr>
-              <a:t>+19%</a:t>
-            </a:r>
-          </a:p>
-        </p:txBody>
-      </p:sp>
-      <p:sp>
-        <p:nvSpPr>
-          <p:cNvPr id="20" name="Rounded Rectangle 19"/>
+              <a:t>ДОЛЬШЕ</a:t>
+            </a:r>
+          </a:p>
+        </p:txBody>
+      </p:sp>
+      <p:sp>
+        <p:nvSpPr>
+          <p:cNvPr id="26" name="Rounded Rectangle 25"/>
           <p:cNvSpPr/>
           <p:nvPr/>
         </p:nvSpPr>
@@ -6920,7 +7193,7 @@
       </p:sp>
       <p:pic>
         <p:nvPicPr>
-          <p:cNvPr id="21" name="Picture 20" descr="circle-help-teal.png"/>
+          <p:cNvPr id="27" name="Picture 26" descr="circle-help-teal.png"/>
           <p:cNvPicPr>
             <a:picLocks noChangeAspect="1"/>
           </p:cNvPicPr>
@@ -6944,7 +7217,7 @@
       </p:pic>
       <p:sp>
         <p:nvSpPr>
-          <p:cNvPr id="22" name="TextBox 21"/>
+          <p:cNvPr id="28" name="TextBox 27"/>
           <p:cNvSpPr txBox="1"/>
           <p:nvPr/>
         </p:nvSpPr>
@@ -6983,7 +7256,7 @@
       </p:sp>
       <p:sp>
         <p:nvSpPr>
-          <p:cNvPr id="23" name="TextBox 22"/>
+          <p:cNvPr id="29" name="TextBox 28"/>
           <p:cNvSpPr txBox="1"/>
           <p:nvPr/>
         </p:nvSpPr>
@@ -7022,7 +7295,7 @@
       </p:sp>
       <p:sp>
         <p:nvSpPr>
-          <p:cNvPr id="24" name="Rounded Rectangle 23"/>
+          <p:cNvPr id="30" name="Rounded Rectangle 29"/>
           <p:cNvSpPr/>
           <p:nvPr/>
         </p:nvSpPr>
@@ -7070,7 +7343,7 @@
       </p:sp>
       <p:sp>
         <p:nvSpPr>
-          <p:cNvPr id="25" name="TextBox 24"/>
+          <p:cNvPr id="31" name="TextBox 30"/>
           <p:cNvSpPr txBox="1"/>
           <p:nvPr/>
         </p:nvSpPr>
@@ -7110,7 +7383,7 @@
       </p:sp>
       <p:sp>
         <p:nvSpPr>
-          <p:cNvPr id="26" name="Rounded Rectangle 25"/>
+          <p:cNvPr id="32" name="Rounded Rectangle 31"/>
           <p:cNvSpPr/>
           <p:nvPr/>
         </p:nvSpPr>
@@ -7158,7 +7431,7 @@
       </p:sp>
       <p:sp>
         <p:nvSpPr>
-          <p:cNvPr id="27" name="TextBox 26"/>
+          <p:cNvPr id="33" name="TextBox 32"/>
           <p:cNvSpPr txBox="1"/>
           <p:nvPr/>
         </p:nvSpPr>
@@ -8489,8 +8762,8 @@
         </p:nvSpPr>
         <p:spPr>
           <a:xfrm>
-            <a:off x="822960" y="1627631"/>
-            <a:ext cx="2366010" cy="384048"/>
+            <a:off x="822960" y="1773936"/>
+            <a:ext cx="2366010" cy="457200"/>
           </a:xfrm>
           <a:prstGeom prst="rect">
             <a:avLst/>
@@ -8509,7 +8782,7 @@
               </a:lnSpc>
             </a:pPr>
             <a:r>
-              <a:rPr sz="1800" b="1" i="0">
+              <a:rPr sz="2000" b="1" i="0">
                 <a:solidFill>
                   <a:srgbClr val="065A82"/>
                 </a:solidFill>
@@ -8528,27 +8801,27 @@
         </p:nvSpPr>
         <p:spPr>
           <a:xfrm>
-            <a:off x="859536" y="2066543"/>
-            <a:ext cx="2292858" cy="841248"/>
-          </a:xfrm>
-          <a:prstGeom prst="rect">
-            <a:avLst/>
-          </a:prstGeom>
-          <a:noFill/>
-        </p:spPr>
-        <p:txBody>
-          <a:bodyPr wrap="square" lIns="0" rIns="0" tIns="0" bIns="0" anchor="t">
+            <a:off x="877824" y="2377439"/>
+            <a:ext cx="2256282" cy="1280160"/>
+          </a:xfrm>
+          <a:prstGeom prst="rect">
+            <a:avLst/>
+          </a:prstGeom>
+          <a:noFill/>
+        </p:spPr>
+        <p:txBody>
+          <a:bodyPr wrap="square" lIns="0" rIns="0" tIns="0" bIns="0" anchor="ctr">
             <a:spAutoFit/>
           </a:bodyPr>
           <a:lstStyle/>
           <a:p>
             <a:pPr algn="ctr">
               <a:lnSpc>
-                <a:spcPct val="112000"/>
-              </a:lnSpc>
-            </a:pPr>
-            <a:r>
-              <a:rPr sz="1200" b="0" i="0">
+                <a:spcPct val="118000"/>
+              </a:lnSpc>
+            </a:pPr>
+            <a:r>
+              <a:rPr sz="1350" b="0" i="0">
                 <a:solidFill>
                   <a:srgbClr val="21295C"/>
                 </a:solidFill>
@@ -8561,46 +8834,7 @@
       </p:sp>
       <p:sp>
         <p:nvSpPr>
-          <p:cNvPr id="8" name="TextBox 7"/>
-          <p:cNvSpPr txBox="1"/>
-          <p:nvPr/>
-        </p:nvSpPr>
-        <p:spPr>
-          <a:xfrm>
-            <a:off x="859536" y="2926080"/>
-            <a:ext cx="2292858" cy="932688"/>
-          </a:xfrm>
-          <a:prstGeom prst="rect">
-            <a:avLst/>
-          </a:prstGeom>
-          <a:noFill/>
-        </p:spPr>
-        <p:txBody>
-          <a:bodyPr wrap="square" lIns="0" rIns="0" tIns="0" bIns="0" anchor="t">
-            <a:spAutoFit/>
-          </a:bodyPr>
-          <a:lstStyle/>
-          <a:p>
-            <a:pPr algn="ctr">
-              <a:lnSpc>
-                <a:spcPct val="108000"/>
-              </a:lnSpc>
-            </a:pPr>
-            <a:r>
-              <a:rPr sz="1050" b="0" i="1">
-                <a:solidFill>
-                  <a:srgbClr val="5B6678"/>
-                </a:solidFill>
-                <a:latin typeface="Arial"/>
-              </a:rPr>
-              <a:t>режим отказа: близорукий план — не видит накопленную стоимость и время</a:t>
-            </a:r>
-          </a:p>
-        </p:txBody>
-      </p:sp>
-      <p:sp>
-        <p:nvSpPr>
-          <p:cNvPr id="9" name="Right Arrow 8"/>
+          <p:cNvPr id="8" name="Right Arrow 7"/>
           <p:cNvSpPr/>
           <p:nvPr/>
         </p:nvSpPr>
@@ -8644,7 +8878,7 @@
       </p:sp>
       <p:sp>
         <p:nvSpPr>
-          <p:cNvPr id="10" name="Rounded Rectangle 9"/>
+          <p:cNvPr id="9" name="Rounded Rectangle 8"/>
           <p:cNvSpPr/>
           <p:nvPr/>
         </p:nvSpPr>
@@ -8692,72 +8926,72 @@
       </p:sp>
       <p:sp>
         <p:nvSpPr>
+          <p:cNvPr id="10" name="TextBox 9"/>
+          <p:cNvSpPr txBox="1"/>
+          <p:nvPr/>
+        </p:nvSpPr>
+        <p:spPr>
+          <a:xfrm>
+            <a:off x="3554730" y="1773936"/>
+            <a:ext cx="2366010" cy="457200"/>
+          </a:xfrm>
+          <a:prstGeom prst="rect">
+            <a:avLst/>
+          </a:prstGeom>
+          <a:noFill/>
+        </p:spPr>
+        <p:txBody>
+          <a:bodyPr wrap="square" lIns="0" rIns="0" tIns="0" bIns="0" anchor="t">
+            <a:spAutoFit/>
+          </a:bodyPr>
+          <a:lstStyle/>
+          <a:p>
+            <a:pPr algn="ctr">
+              <a:lnSpc>
+                <a:spcPct val="115000"/>
+              </a:lnSpc>
+            </a:pPr>
+            <a:r>
+              <a:rPr sz="2000" b="1" i="0">
+                <a:solidFill>
+                  <a:srgbClr val="065A82"/>
+                </a:solidFill>
+                <a:latin typeface="Arial"/>
+              </a:rPr>
+              <a:t>act</a:t>
+            </a:r>
+          </a:p>
+        </p:txBody>
+      </p:sp>
+      <p:sp>
+        <p:nvSpPr>
           <p:cNvPr id="11" name="TextBox 10"/>
           <p:cNvSpPr txBox="1"/>
           <p:nvPr/>
         </p:nvSpPr>
         <p:spPr>
           <a:xfrm>
-            <a:off x="3554730" y="1627631"/>
-            <a:ext cx="2366010" cy="384048"/>
-          </a:xfrm>
-          <a:prstGeom prst="rect">
-            <a:avLst/>
-          </a:prstGeom>
-          <a:noFill/>
-        </p:spPr>
-        <p:txBody>
-          <a:bodyPr wrap="square" lIns="0" rIns="0" tIns="0" bIns="0" anchor="t">
+            <a:off x="3609594" y="2377439"/>
+            <a:ext cx="2256282" cy="1280160"/>
+          </a:xfrm>
+          <a:prstGeom prst="rect">
+            <a:avLst/>
+          </a:prstGeom>
+          <a:noFill/>
+        </p:spPr>
+        <p:txBody>
+          <a:bodyPr wrap="square" lIns="0" rIns="0" tIns="0" bIns="0" anchor="ctr">
             <a:spAutoFit/>
           </a:bodyPr>
           <a:lstStyle/>
           <a:p>
             <a:pPr algn="ctr">
               <a:lnSpc>
-                <a:spcPct val="115000"/>
-              </a:lnSpc>
-            </a:pPr>
-            <a:r>
-              <a:rPr sz="1800" b="1" i="0">
-                <a:solidFill>
-                  <a:srgbClr val="065A82"/>
-                </a:solidFill>
-                <a:latin typeface="Arial"/>
-              </a:rPr>
-              <a:t>act</a:t>
-            </a:r>
-          </a:p>
-        </p:txBody>
-      </p:sp>
-      <p:sp>
-        <p:nvSpPr>
-          <p:cNvPr id="12" name="TextBox 11"/>
-          <p:cNvSpPr txBox="1"/>
-          <p:nvPr/>
-        </p:nvSpPr>
-        <p:spPr>
-          <a:xfrm>
-            <a:off x="3591306" y="2066543"/>
-            <a:ext cx="2292858" cy="841248"/>
-          </a:xfrm>
-          <a:prstGeom prst="rect">
-            <a:avLst/>
-          </a:prstGeom>
-          <a:noFill/>
-        </p:spPr>
-        <p:txBody>
-          <a:bodyPr wrap="square" lIns="0" rIns="0" tIns="0" bIns="0" anchor="t">
-            <a:spAutoFit/>
-          </a:bodyPr>
-          <a:lstStyle/>
-          <a:p>
-            <a:pPr algn="ctr">
-              <a:lnSpc>
-                <a:spcPct val="112000"/>
-              </a:lnSpc>
-            </a:pPr>
-            <a:r>
-              <a:rPr sz="1200" b="0" i="0">
+                <a:spcPct val="118000"/>
+              </a:lnSpc>
+            </a:pPr>
+            <a:r>
+              <a:rPr sz="1350" b="0" i="0">
                 <a:solidFill>
                   <a:srgbClr val="21295C"/>
                 </a:solidFill>
@@ -8770,46 +9004,7 @@
       </p:sp>
       <p:sp>
         <p:nvSpPr>
-          <p:cNvPr id="13" name="TextBox 12"/>
-          <p:cNvSpPr txBox="1"/>
-          <p:nvPr/>
-        </p:nvSpPr>
-        <p:spPr>
-          <a:xfrm>
-            <a:off x="3591306" y="2926080"/>
-            <a:ext cx="2292858" cy="932688"/>
-          </a:xfrm>
-          <a:prstGeom prst="rect">
-            <a:avLst/>
-          </a:prstGeom>
-          <a:noFill/>
-        </p:spPr>
-        <p:txBody>
-          <a:bodyPr wrap="square" lIns="0" rIns="0" tIns="0" bIns="0" anchor="t">
-            <a:spAutoFit/>
-          </a:bodyPr>
-          <a:lstStyle/>
-          <a:p>
-            <a:pPr algn="ctr">
-              <a:lnSpc>
-                <a:spcPct val="108000"/>
-              </a:lnSpc>
-            </a:pPr>
-            <a:r>
-              <a:rPr sz="1050" b="0" i="1">
-                <a:solidFill>
-                  <a:srgbClr val="5B6678"/>
-                </a:solidFill>
-                <a:latin typeface="Arial"/>
-              </a:rPr>
-              <a:t>режим отказа: падающий или зацикленный act</a:t>
-            </a:r>
-          </a:p>
-        </p:txBody>
-      </p:sp>
-      <p:sp>
-        <p:nvSpPr>
-          <p:cNvPr id="14" name="Right Arrow 13"/>
+          <p:cNvPr id="12" name="Right Arrow 11"/>
           <p:cNvSpPr/>
           <p:nvPr/>
         </p:nvSpPr>
@@ -8853,7 +9048,7 @@
       </p:sp>
       <p:sp>
         <p:nvSpPr>
-          <p:cNvPr id="15" name="Rounded Rectangle 14"/>
+          <p:cNvPr id="13" name="Rounded Rectangle 12"/>
           <p:cNvSpPr/>
           <p:nvPr/>
         </p:nvSpPr>
@@ -8901,14 +9096,14 @@
       </p:sp>
       <p:sp>
         <p:nvSpPr>
-          <p:cNvPr id="16" name="TextBox 15"/>
-          <p:cNvSpPr txBox="1"/>
-          <p:nvPr/>
-        </p:nvSpPr>
-        <p:spPr>
-          <a:xfrm>
-            <a:off x="6286500" y="1627631"/>
-            <a:ext cx="2366010" cy="384048"/>
+          <p:cNvPr id="14" name="TextBox 13"/>
+          <p:cNvSpPr txBox="1"/>
+          <p:nvPr/>
+        </p:nvSpPr>
+        <p:spPr>
+          <a:xfrm>
+            <a:off x="6286500" y="1773936"/>
+            <a:ext cx="2366010" cy="457200"/>
           </a:xfrm>
           <a:prstGeom prst="rect">
             <a:avLst/>
@@ -8927,7 +9122,7 @@
               </a:lnSpc>
             </a:pPr>
             <a:r>
-              <a:rPr sz="1800" b="1" i="0">
+              <a:rPr sz="2000" b="1" i="0">
                 <a:solidFill>
                   <a:srgbClr val="21295C"/>
                 </a:solidFill>
@@ -8940,33 +9135,33 @@
       </p:sp>
       <p:sp>
         <p:nvSpPr>
-          <p:cNvPr id="17" name="TextBox 16"/>
-          <p:cNvSpPr txBox="1"/>
-          <p:nvPr/>
-        </p:nvSpPr>
-        <p:spPr>
-          <a:xfrm>
-            <a:off x="6323076" y="2066543"/>
-            <a:ext cx="2292858" cy="841248"/>
-          </a:xfrm>
-          <a:prstGeom prst="rect">
-            <a:avLst/>
-          </a:prstGeom>
-          <a:noFill/>
-        </p:spPr>
-        <p:txBody>
-          <a:bodyPr wrap="square" lIns="0" rIns="0" tIns="0" bIns="0" anchor="t">
+          <p:cNvPr id="15" name="TextBox 14"/>
+          <p:cNvSpPr txBox="1"/>
+          <p:nvPr/>
+        </p:nvSpPr>
+        <p:spPr>
+          <a:xfrm>
+            <a:off x="6341364" y="2377439"/>
+            <a:ext cx="2256282" cy="1280160"/>
+          </a:xfrm>
+          <a:prstGeom prst="rect">
+            <a:avLst/>
+          </a:prstGeom>
+          <a:noFill/>
+        </p:spPr>
+        <p:txBody>
+          <a:bodyPr wrap="square" lIns="0" rIns="0" tIns="0" bIns="0" anchor="ctr">
             <a:spAutoFit/>
           </a:bodyPr>
           <a:lstStyle/>
           <a:p>
             <a:pPr algn="ctr">
               <a:lnSpc>
-                <a:spcPct val="112000"/>
-              </a:lnSpc>
-            </a:pPr>
-            <a:r>
-              <a:rPr sz="1200" b="0" i="0">
+                <a:spcPct val="118000"/>
+              </a:lnSpc>
+            </a:pPr>
+            <a:r>
+              <a:rPr sz="1350" b="0" i="0">
                 <a:solidFill>
                   <a:srgbClr val="21295C"/>
                 </a:solidFill>
@@ -8979,46 +9174,7 @@
       </p:sp>
       <p:sp>
         <p:nvSpPr>
-          <p:cNvPr id="18" name="TextBox 17"/>
-          <p:cNvSpPr txBox="1"/>
-          <p:nvPr/>
-        </p:nvSpPr>
-        <p:spPr>
-          <a:xfrm>
-            <a:off x="6323076" y="2926080"/>
-            <a:ext cx="2292858" cy="932688"/>
-          </a:xfrm>
-          <a:prstGeom prst="rect">
-            <a:avLst/>
-          </a:prstGeom>
-          <a:noFill/>
-        </p:spPr>
-        <p:txBody>
-          <a:bodyPr wrap="square" lIns="0" rIns="0" tIns="0" bIns="0" anchor="t">
-            <a:spAutoFit/>
-          </a:bodyPr>
-          <a:lstStyle/>
-          <a:p>
-            <a:pPr algn="ctr">
-              <a:lnSpc>
-                <a:spcPct val="108000"/>
-              </a:lnSpc>
-            </a:pPr>
-            <a:r>
-              <a:rPr sz="1050" b="0" i="1">
-                <a:solidFill>
-                  <a:srgbClr val="5B6678"/>
-                </a:solidFill>
-                <a:latin typeface="Arial"/>
-              </a:rPr>
-              <a:t>режим отказа: подмена реальной проверки самооценкой («тесты прошли», не прогнав)</a:t>
-            </a:r>
-          </a:p>
-        </p:txBody>
-      </p:sp>
-      <p:sp>
-        <p:nvSpPr>
-          <p:cNvPr id="19" name="Right Arrow 18"/>
+          <p:cNvPr id="16" name="Right Arrow 15"/>
           <p:cNvSpPr/>
           <p:nvPr/>
         </p:nvSpPr>
@@ -9062,7 +9218,7 @@
       </p:sp>
       <p:sp>
         <p:nvSpPr>
-          <p:cNvPr id="20" name="Rounded Rectangle 19"/>
+          <p:cNvPr id="17" name="Rounded Rectangle 16"/>
           <p:cNvSpPr/>
           <p:nvPr/>
         </p:nvSpPr>
@@ -9110,14 +9266,14 @@
       </p:sp>
       <p:sp>
         <p:nvSpPr>
-          <p:cNvPr id="21" name="TextBox 20"/>
-          <p:cNvSpPr txBox="1"/>
-          <p:nvPr/>
-        </p:nvSpPr>
-        <p:spPr>
-          <a:xfrm>
-            <a:off x="9018270" y="1627631"/>
-            <a:ext cx="2366010" cy="384048"/>
+          <p:cNvPr id="18" name="TextBox 17"/>
+          <p:cNvSpPr txBox="1"/>
+          <p:nvPr/>
+        </p:nvSpPr>
+        <p:spPr>
+          <a:xfrm>
+            <a:off x="9018270" y="1773936"/>
+            <a:ext cx="2366010" cy="457200"/>
           </a:xfrm>
           <a:prstGeom prst="rect">
             <a:avLst/>
@@ -9136,7 +9292,7 @@
               </a:lnSpc>
             </a:pPr>
             <a:r>
-              <a:rPr sz="1800" b="1" i="0">
+              <a:rPr sz="2000" b="1" i="0">
                 <a:solidFill>
                   <a:srgbClr val="065A82"/>
                 </a:solidFill>
@@ -9149,85 +9305,46 @@
       </p:sp>
       <p:sp>
         <p:nvSpPr>
-          <p:cNvPr id="22" name="TextBox 21"/>
-          <p:cNvSpPr txBox="1"/>
-          <p:nvPr/>
-        </p:nvSpPr>
-        <p:spPr>
-          <a:xfrm>
-            <a:off x="9054846" y="2066543"/>
-            <a:ext cx="2292858" cy="841248"/>
-          </a:xfrm>
-          <a:prstGeom prst="rect">
-            <a:avLst/>
-          </a:prstGeom>
-          <a:noFill/>
-        </p:spPr>
-        <p:txBody>
-          <a:bodyPr wrap="square" lIns="0" rIns="0" tIns="0" bIns="0" anchor="t">
+          <p:cNvPr id="19" name="TextBox 18"/>
+          <p:cNvSpPr txBox="1"/>
+          <p:nvPr/>
+        </p:nvSpPr>
+        <p:spPr>
+          <a:xfrm>
+            <a:off x="9073134" y="2377439"/>
+            <a:ext cx="2256282" cy="1280160"/>
+          </a:xfrm>
+          <a:prstGeom prst="rect">
+            <a:avLst/>
+          </a:prstGeom>
+          <a:noFill/>
+        </p:spPr>
+        <p:txBody>
+          <a:bodyPr wrap="square" lIns="0" rIns="0" tIns="0" bIns="0" anchor="ctr">
             <a:spAutoFit/>
           </a:bodyPr>
           <a:lstStyle/>
           <a:p>
             <a:pPr algn="ctr">
               <a:lnSpc>
-                <a:spcPct val="112000"/>
-              </a:lnSpc>
-            </a:pPr>
-            <a:r>
-              <a:rPr sz="1200" b="0" i="0">
+                <a:spcPct val="118000"/>
+              </a:lnSpc>
+            </a:pPr>
+            <a:r>
+              <a:rPr sz="1350" b="0" i="0">
                 <a:solidFill>
                   <a:srgbClr val="21295C"/>
                 </a:solidFill>
                 <a:latin typeface="Arial"/>
               </a:rPr>
-              <a:t>повторяет</a:t>
-            </a:r>
-          </a:p>
-        </p:txBody>
-      </p:sp>
-      <p:sp>
-        <p:nvSpPr>
-          <p:cNvPr id="23" name="TextBox 22"/>
-          <p:cNvSpPr txBox="1"/>
-          <p:nvPr/>
-        </p:nvSpPr>
-        <p:spPr>
-          <a:xfrm>
-            <a:off x="9054846" y="2926080"/>
-            <a:ext cx="2292858" cy="932688"/>
-          </a:xfrm>
-          <a:prstGeom prst="rect">
-            <a:avLst/>
-          </a:prstGeom>
-          <a:noFill/>
-        </p:spPr>
-        <p:txBody>
-          <a:bodyPr wrap="square" lIns="0" rIns="0" tIns="0" bIns="0" anchor="t">
-            <a:spAutoFit/>
-          </a:bodyPr>
-          <a:lstStyle/>
-          <a:p>
-            <a:pPr algn="ctr">
-              <a:lnSpc>
-                <a:spcPct val="108000"/>
-              </a:lnSpc>
-            </a:pPr>
-            <a:r>
-              <a:rPr sz="1050" b="0" i="1">
-                <a:solidFill>
-                  <a:srgbClr val="5B6678"/>
-                </a:solidFill>
-                <a:latin typeface="Arial"/>
-              </a:rPr>
-              <a:t>режим отказа: нет внешнего лимита итераций</a:t>
-            </a:r>
-          </a:p>
-        </p:txBody>
-      </p:sp>
-      <p:sp>
-        <p:nvSpPr>
-          <p:cNvPr id="24" name="TextBox 23"/>
+              <a:t>повторяет цикл, пока цель не достигнута</a:t>
+            </a:r>
+          </a:p>
+        </p:txBody>
+      </p:sp>
+      <p:sp>
+        <p:nvSpPr>
+          <p:cNvPr id="20" name="TextBox 19"/>
           <p:cNvSpPr txBox="1"/>
           <p:nvPr/>
         </p:nvSpPr>
@@ -9266,7 +9383,7 @@
       </p:sp>
       <p:sp>
         <p:nvSpPr>
-          <p:cNvPr id="25" name="Rounded Rectangle 24"/>
+          <p:cNvPr id="21" name="Rounded Rectangle 20"/>
           <p:cNvSpPr/>
           <p:nvPr/>
         </p:nvSpPr>
@@ -9314,7 +9431,7 @@
       </p:sp>
       <p:sp>
         <p:nvSpPr>
-          <p:cNvPr id="26" name="TextBox 25"/>
+          <p:cNvPr id="22" name="TextBox 21"/>
           <p:cNvSpPr txBox="1"/>
           <p:nvPr/>
         </p:nvSpPr>
@@ -9353,7 +9470,7 @@
       </p:sp>
       <p:sp>
         <p:nvSpPr>
-          <p:cNvPr id="27" name="Rounded Rectangle 26"/>
+          <p:cNvPr id="23" name="Rounded Rectangle 22"/>
           <p:cNvSpPr/>
           <p:nvPr/>
         </p:nvSpPr>
@@ -9401,7 +9518,7 @@
       </p:sp>
       <p:sp>
         <p:nvSpPr>
-          <p:cNvPr id="28" name="TextBox 27"/>
+          <p:cNvPr id="24" name="TextBox 23"/>
           <p:cNvSpPr txBox="1"/>
           <p:nvPr/>
         </p:nvSpPr>
@@ -11092,7 +11209,7 @@
                 </a:solidFill>
                 <a:latin typeface="Arial"/>
               </a:rPr>
-              <a:t>GitClear 2025 (211M строк, 25 крупнейших OSS + приватные) — корреляция во времени, направление стабильно. Вторая точка возврата центрального вопроса.</a:t>
+              <a:t>GitClear 2025 (211M строк, 25 крупнейших OSS + приватные) — корреляция во времени, направление стабильно.</a:t>
             </a:r>
           </a:p>
         </p:txBody>
@@ -13060,15 +13177,15 @@
           </a:xfrm>
           <a:prstGeom prst="roundRect">
             <a:avLst>
-              <a:gd name="adj" fmla="val 22000"/>
+              <a:gd name="adj" fmla="val 10000"/>
             </a:avLst>
           </a:prstGeom>
           <a:solidFill>
-            <a:srgbClr val="F4F7FA"/>
+            <a:srgbClr val="FDF3DC"/>
           </a:solidFill>
           <a:ln w="19050">
             <a:solidFill>
-              <a:srgbClr val="1C7293"/>
+              <a:srgbClr val="F0AB00"/>
             </a:solidFill>
           </a:ln>
           <a:effectLst/>
@@ -13103,8 +13220,8 @@
         </p:nvSpPr>
         <p:spPr>
           <a:xfrm>
-            <a:off x="713232" y="4937760"/>
-            <a:ext cx="10789920" cy="694944"/>
+            <a:off x="722376" y="4882896"/>
+            <a:ext cx="10762488" cy="786384"/>
           </a:xfrm>
           <a:prstGeom prst="rect">
             <a:avLst/>
@@ -13119,17 +13236,17 @@
           <a:p>
             <a:pPr algn="l">
               <a:lnSpc>
-                <a:spcPct val="118000"/>
-              </a:lnSpc>
-            </a:pPr>
-            <a:r>
-              <a:rPr sz="1200" b="0" i="0">
+                <a:spcPct val="120000"/>
+              </a:lnSpc>
+            </a:pPr>
+            <a:r>
+              <a:rPr sz="1400" b="1" i="0">
                 <a:solidFill>
                   <a:srgbClr val="21295C"/>
                 </a:solidFill>
                 <a:latin typeface="Arial"/>
               </a:rPr>
-              <a:t>Рамка D:  что делает AI — ведёт цикл от issue до PR · кто решает — человек: стратегия, приоритеты, approval, merge, прод · где обязателен — на любом необратимом/прод-действии · риск — автономный деструктив без подтверждения</a:t>
+              <a:t>Уровень D — максимум автономии и максимум риска: человек обязателен на любом необратимом или прод-действии, иначе автономный деструктив проходит без подтверждения.</a:t>
             </a:r>
           </a:p>
         </p:txBody>
@@ -15567,7 +15684,7 @@
                 </a:solidFill>
                 <a:latin typeface="Arial"/>
               </a:rPr>
-              <a:t>METR 2025 (RCT, n=16). Поздний-2025 «разворот» сигнала и его методологическая ловушка — в главе. Третья точка возврата.</a:t>
+              <a:t>METR 2025 (RCT, n=16). Поздний-2025 «разворот» сигнала есть, но методологически слабее исходного — на него опираться рано.</a:t>
             </a:r>
           </a:p>
         </p:txBody>
@@ -16896,8 +17013,8 @@
         </p:nvSpPr>
         <p:spPr>
           <a:xfrm>
-            <a:off x="740664" y="3090672"/>
-            <a:ext cx="5971031" cy="777240"/>
+            <a:off x="740664" y="3163824"/>
+            <a:ext cx="5971031" cy="384048"/>
           </a:xfrm>
           <a:prstGeom prst="rect">
             <a:avLst/>
@@ -16912,17 +17029,17 @@
           <a:p>
             <a:pPr algn="l">
               <a:lnSpc>
-                <a:spcPct val="116000"/>
-              </a:lnSpc>
-            </a:pPr>
-            <a:r>
-              <a:rPr sz="1200" b="0" i="1">
+                <a:spcPct val="112000"/>
+              </a:lnSpc>
+            </a:pPr>
+            <a:r>
+              <a:rPr sz="1250" b="0" i="1">
                 <a:solidFill>
                   <a:srgbClr val="065A82"/>
                 </a:solidFill>
                 <a:latin typeface="Arial"/>
               </a:rPr>
-              <a:t>mutation-тестирование — в код вносят искусственные дефекты-«мутанты»; mutation score = доля упавших хотя бы на одном тесте.</a:t>
+              <a:t>mutation score — доля пойманных дефектов</a:t>
             </a:r>
           </a:p>
         </p:txBody>
@@ -16935,8 +17052,8 @@
         </p:nvSpPr>
         <p:spPr>
           <a:xfrm>
-            <a:off x="740664" y="3895344"/>
-            <a:ext cx="5971031" cy="731520"/>
+            <a:off x="740664" y="3639312"/>
+            <a:ext cx="5971031" cy="384048"/>
           </a:xfrm>
           <a:prstGeom prst="rect">
             <a:avLst/>
@@ -16951,17 +17068,17 @@
           <a:p>
             <a:pPr algn="l">
               <a:lnSpc>
-                <a:spcPct val="116000"/>
-              </a:lnSpc>
-            </a:pPr>
-            <a:r>
-              <a:rPr sz="1200" b="0" i="1">
+                <a:spcPct val="112000"/>
+              </a:lnSpc>
+            </a:pPr>
+            <a:r>
+              <a:rPr sz="1250" b="0" i="1">
                 <a:solidFill>
                   <a:srgbClr val="065A82"/>
                 </a:solidFill>
                 <a:latin typeface="Arial"/>
               </a:rPr>
-              <a:t>quality-gate — автоматический порог в CI, ниже которого изменение не проходит.</a:t>
+              <a:t>quality-gate — порог в CI</a:t>
             </a:r>
           </a:p>
         </p:txBody>
@@ -19727,7 +19844,7 @@
                 </a:solidFill>
                 <a:latin typeface="Arial"/>
               </a:rPr>
-              <a:t>CWE — стандартный каталог-классификатор типов уязвимостей (напр. CWE-89 — SQL-инъекция)</a:t>
+              <a:t>CWE — каталог типов уязвимостей</a:t>
             </a:r>
           </a:p>
         </p:txBody>
@@ -19828,7 +19945,7 @@
         <p:spPr>
           <a:xfrm>
             <a:off x="7232904" y="1810512"/>
-            <a:ext cx="1691640" cy="676656"/>
+            <a:ext cx="1874519" cy="676656"/>
           </a:xfrm>
           <a:prstGeom prst="rect">
             <a:avLst/>
@@ -19847,7 +19964,7 @@
               </a:lnSpc>
             </a:pPr>
             <a:r>
-              <a:rPr sz="1300" b="1" i="0">
+              <a:rPr sz="1400" b="1" i="0">
                 <a:solidFill>
                   <a:srgbClr val="028090"/>
                 </a:solidFill>
@@ -19866,8 +19983,8 @@
         </p:nvSpPr>
         <p:spPr>
           <a:xfrm>
-            <a:off x="8915400" y="1810512"/>
-            <a:ext cx="2551176" cy="676656"/>
+            <a:off x="9098280" y="1810512"/>
+            <a:ext cx="2368296" cy="676656"/>
           </a:xfrm>
           <a:prstGeom prst="rect">
             <a:avLst/>
@@ -19886,13 +20003,13 @@
               </a:lnSpc>
             </a:pPr>
             <a:r>
-              <a:rPr sz="1200" b="0" i="0">
+              <a:rPr sz="1300" b="0" i="0">
                 <a:solidFill>
                   <a:srgbClr val="21295C"/>
                 </a:solidFill>
                 <a:latin typeface="Arial"/>
               </a:rPr>
-              <a:t>статический анализ кода без запуска</a:t>
+              <a:t>анализ кода</a:t>
             </a:r>
           </a:p>
         </p:txBody>
@@ -19906,7 +20023,7 @@
         <p:spPr>
           <a:xfrm>
             <a:off x="7232904" y="2542032"/>
-            <a:ext cx="1691640" cy="676656"/>
+            <a:ext cx="1874519" cy="676656"/>
           </a:xfrm>
           <a:prstGeom prst="rect">
             <a:avLst/>
@@ -19925,7 +20042,7 @@
               </a:lnSpc>
             </a:pPr>
             <a:r>
-              <a:rPr sz="1300" b="1" i="0">
+              <a:rPr sz="1400" b="1" i="0">
                 <a:solidFill>
                   <a:srgbClr val="028090"/>
                 </a:solidFill>
@@ -19944,8 +20061,8 @@
         </p:nvSpPr>
         <p:spPr>
           <a:xfrm>
-            <a:off x="8915400" y="2542032"/>
-            <a:ext cx="2551176" cy="676656"/>
+            <a:off x="9098280" y="2542032"/>
+            <a:ext cx="2368296" cy="676656"/>
           </a:xfrm>
           <a:prstGeom prst="rect">
             <a:avLst/>
@@ -19964,13 +20081,13 @@
               </a:lnSpc>
             </a:pPr>
             <a:r>
-              <a:rPr sz="1200" b="0" i="0">
+              <a:rPr sz="1300" b="0" i="0">
                 <a:solidFill>
                   <a:srgbClr val="21295C"/>
                 </a:solidFill>
                 <a:latin typeface="Arial"/>
               </a:rPr>
-              <a:t>анализ работающего приложения</a:t>
+              <a:t>анализ приложения</a:t>
             </a:r>
           </a:p>
         </p:txBody>
@@ -19984,7 +20101,7 @@
         <p:spPr>
           <a:xfrm>
             <a:off x="7232904" y="3273552"/>
-            <a:ext cx="1691640" cy="676656"/>
+            <a:ext cx="1874519" cy="676656"/>
           </a:xfrm>
           <a:prstGeom prst="rect">
             <a:avLst/>
@@ -20003,7 +20120,7 @@
               </a:lnSpc>
             </a:pPr>
             <a:r>
-              <a:rPr sz="1300" b="1" i="0">
+              <a:rPr sz="1400" b="1" i="0">
                 <a:solidFill>
                   <a:srgbClr val="028090"/>
                 </a:solidFill>
@@ -20022,8 +20139,8 @@
         </p:nvSpPr>
         <p:spPr>
           <a:xfrm>
-            <a:off x="8915400" y="3273552"/>
-            <a:ext cx="2551176" cy="676656"/>
+            <a:off x="9098280" y="3273552"/>
+            <a:ext cx="2368296" cy="676656"/>
           </a:xfrm>
           <a:prstGeom prst="rect">
             <a:avLst/>
@@ -20042,13 +20159,13 @@
               </a:lnSpc>
             </a:pPr>
             <a:r>
-              <a:rPr sz="1200" b="0" i="0">
+              <a:rPr sz="1300" b="0" i="0">
                 <a:solidFill>
                   <a:srgbClr val="21295C"/>
                 </a:solidFill>
                 <a:latin typeface="Arial"/>
               </a:rPr>
-              <a:t>анализ зависимостей на известные уязвимости</a:t>
+              <a:t>анализ зависимостей</a:t>
             </a:r>
           </a:p>
         </p:txBody>
@@ -20062,7 +20179,7 @@
         <p:spPr>
           <a:xfrm>
             <a:off x="7232904" y="4005072"/>
-            <a:ext cx="1691640" cy="676656"/>
+            <a:ext cx="1874519" cy="676656"/>
           </a:xfrm>
           <a:prstGeom prst="rect">
             <a:avLst/>
@@ -20081,13 +20198,13 @@
               </a:lnSpc>
             </a:pPr>
             <a:r>
-              <a:rPr sz="1300" b="1" i="0">
+              <a:rPr sz="1400" b="1" i="0">
                 <a:solidFill>
                   <a:srgbClr val="028090"/>
                 </a:solidFill>
                 <a:latin typeface="Arial"/>
               </a:rPr>
-              <a:t>secret-scanning</a:t>
+              <a:t>secret-scan</a:t>
             </a:r>
           </a:p>
         </p:txBody>
@@ -20100,8 +20217,8 @@
         </p:nvSpPr>
         <p:spPr>
           <a:xfrm>
-            <a:off x="8915400" y="4005072"/>
-            <a:ext cx="2551176" cy="676656"/>
+            <a:off x="9098280" y="4005072"/>
+            <a:ext cx="2368296" cy="676656"/>
           </a:xfrm>
           <a:prstGeom prst="rect">
             <a:avLst/>
@@ -20120,13 +20237,13 @@
               </a:lnSpc>
             </a:pPr>
             <a:r>
-              <a:rPr sz="1200" b="0" i="0">
+              <a:rPr sz="1300" b="0" i="0">
                 <a:solidFill>
                   <a:srgbClr val="21295C"/>
                 </a:solidFill>
                 <a:latin typeface="Arial"/>
               </a:rPr>
-              <a:t>поиск утёкших ключей / токенов</a:t>
+              <a:t>поиск утёкших ключей</a:t>
             </a:r>
           </a:p>
         </p:txBody>
@@ -22192,7 +22309,7 @@
                 </a:solidFill>
                 <a:latin typeface="Arial"/>
               </a:rPr>
-              <a:t>CVE-номер и точный механизм/хронология — в главе. Полный четвёртый возврат центрального вопроса.</a:t>
+              <a:t>CamoLeak — задокументированный prompt-injection в Copilot Chat (раскрыт 2025, исправлен вендором).</a:t>
             </a:r>
           </a:p>
         </p:txBody>
@@ -27146,8 +27263,8 @@
         </p:nvSpPr>
         <p:spPr>
           <a:xfrm>
-            <a:off x="502920" y="365760"/>
-            <a:ext cx="11201400" cy="841248"/>
+            <a:off x="502920" y="292608"/>
+            <a:ext cx="11201400" cy="512064"/>
           </a:xfrm>
           <a:prstGeom prst="rect">
             <a:avLst/>
@@ -27166,13 +27283,13 @@
               </a:lnSpc>
             </a:pPr>
             <a:r>
-              <a:rPr sz="2600" b="1" i="0">
+              <a:rPr sz="2500" b="1" i="0">
                 <a:solidFill>
                   <a:srgbClr val="21295C"/>
                 </a:solidFill>
                 <a:latin typeface="Arial"/>
               </a:rPr>
-              <a:t>Что отдать AI, а что писать руками.</a:t>
+              <a:t>Чем мерить требование задачи — пять осей выбора.</a:t>
             </a:r>
           </a:p>
         </p:txBody>
@@ -27185,12 +27302,12 @@
         </p:nvSpPr>
         <p:spPr>
           <a:xfrm>
-            <a:off x="502920" y="1188720"/>
-            <a:ext cx="11201400" cy="1481328"/>
+            <a:off x="502920" y="914400"/>
+            <a:ext cx="11201400" cy="1188720"/>
           </a:xfrm>
           <a:prstGeom prst="roundRect">
             <a:avLst>
-              <a:gd name="adj" fmla="val 6000"/>
+              <a:gd name="adj" fmla="val 7000"/>
             </a:avLst>
           </a:prstGeom>
           <a:solidFill>
@@ -27241,8 +27358,8 @@
         </p:blipFill>
         <p:spPr>
           <a:xfrm>
-            <a:off x="813816" y="1645920"/>
-            <a:ext cx="566928" cy="566928"/>
+            <a:off x="795528" y="1243584"/>
+            <a:ext cx="530352" cy="530352"/>
           </a:xfrm>
           <a:prstGeom prst="rect">
             <a:avLst/>
@@ -27257,8 +27374,8 @@
         </p:nvSpPr>
         <p:spPr>
           <a:xfrm>
-            <a:off x="1600200" y="1353312"/>
-            <a:ext cx="9829800" cy="1152144"/>
+            <a:off x="1527048" y="1042416"/>
+            <a:ext cx="9902952" cy="932688"/>
           </a:xfrm>
           <a:prstGeom prst="rect">
             <a:avLst/>
@@ -27273,17 +27390,17 @@
           <a:p>
             <a:pPr algn="l">
               <a:lnSpc>
-                <a:spcPct val="118000"/>
-              </a:lnSpc>
-            </a:pPr>
-            <a:r>
-              <a:rPr sz="1800" b="1" i="0">
+                <a:spcPct val="116000"/>
+              </a:lnSpc>
+            </a:pPr>
+            <a:r>
+              <a:rPr sz="1700" b="1" i="0">
                 <a:solidFill>
                   <a:srgbClr val="21295C"/>
                 </a:solidFill>
                 <a:latin typeface="Arial"/>
               </a:rPr>
-              <a:t>Простое и повторяемое AI делает отлично. Писать код руками сейчас осмысленно для сложного и нестандартного — там, где цена ошибки и нужный контекст высоки.</a:t>
+              <a:t>Простое и обратимое AI ведёт сам; сложное, незнакомое и необратимое — руки + человеческий гейт. Решает не сумма баллов, а главная ось задачи.</a:t>
             </a:r>
           </a:p>
         </p:txBody>
@@ -27296,8 +27413,8 @@
         </p:nvSpPr>
         <p:spPr>
           <a:xfrm>
-            <a:off x="502920" y="2798064"/>
-            <a:ext cx="11201400" cy="274320"/>
+            <a:off x="502920" y="2249424"/>
+            <a:ext cx="11201400" cy="256032"/>
           </a:xfrm>
           <a:prstGeom prst="rect">
             <a:avLst/>
@@ -27316,13 +27433,13 @@
               </a:lnSpc>
             </a:pPr>
             <a:r>
-              <a:rPr sz="1350" b="1" i="0">
+              <a:rPr sz="1300" b="1" i="0">
                 <a:solidFill>
                   <a:srgbClr val="065A82"/>
                 </a:solidFill>
                 <a:latin typeface="Arial"/>
               </a:rPr>
-              <a:t>Три оси, которые решают (а не сумма баллов):</a:t>
+              <a:t>Пять осей — для каждой задачи назвать решающую, проверить остальные на блокеры:</a:t>
             </a:r>
           </a:p>
         </p:txBody>
@@ -27335,20 +27452,20 @@
         </p:nvSpPr>
         <p:spPr>
           <a:xfrm>
-            <a:off x="502920" y="3127248"/>
-            <a:ext cx="3581400" cy="1700784"/>
+            <a:off x="365760" y="2560320"/>
+            <a:ext cx="11475720" cy="457200"/>
           </a:xfrm>
           <a:prstGeom prst="roundRect">
             <a:avLst>
-              <a:gd name="adj" fmla="val 17921"/>
+              <a:gd name="adj" fmla="val 16000"/>
             </a:avLst>
           </a:prstGeom>
           <a:solidFill>
             <a:srgbClr val="F4F7FA"/>
           </a:solidFill>
-          <a:ln w="19050">
+          <a:ln w="12700">
             <a:solidFill>
-              <a:srgbClr val="1C7293"/>
+              <a:srgbClr val="E5EAF0"/>
             </a:solidFill>
           </a:ln>
           <a:effectLst/>
@@ -27377,7 +27494,7 @@
       </p:sp>
       <p:pic>
         <p:nvPicPr>
-          <p:cNvPr id="8" name="Picture 7" descr="scan-search-mid.png"/>
+          <p:cNvPr id="8" name="Picture 7" descr="git-compare-mid.png"/>
           <p:cNvPicPr>
             <a:picLocks noChangeAspect="1"/>
           </p:cNvPicPr>
@@ -27391,8 +27508,8 @@
         </p:blipFill>
         <p:spPr>
           <a:xfrm>
-            <a:off x="704088" y="3310128"/>
-            <a:ext cx="384048" cy="384048"/>
+            <a:off x="512064" y="2642615"/>
+            <a:ext cx="292608" cy="292608"/>
           </a:xfrm>
           <a:prstGeom prst="rect">
             <a:avLst/>
@@ -27407,8 +27524,8 @@
         </p:nvSpPr>
         <p:spPr>
           <a:xfrm>
-            <a:off x="1216152" y="3328416"/>
-            <a:ext cx="2712720" cy="384048"/>
+            <a:off x="932688" y="2560320"/>
+            <a:ext cx="3063240" cy="457200"/>
           </a:xfrm>
           <a:prstGeom prst="rect">
             <a:avLst/>
@@ -27427,13 +27544,13 @@
               </a:lnSpc>
             </a:pPr>
             <a:r>
-              <a:rPr sz="1500" b="1" i="0">
+              <a:rPr sz="1400" b="1" i="0">
                 <a:solidFill>
                   <a:srgbClr val="065A82"/>
                 </a:solidFill>
                 <a:latin typeface="Arial"/>
               </a:rPr>
-              <a:t>Цена ошибки</a:t>
+              <a:t>Незнакомость кода</a:t>
             </a:r>
           </a:p>
         </p:txBody>
@@ -27446,23 +27563,23 @@
         </p:nvSpPr>
         <p:spPr>
           <a:xfrm>
-            <a:off x="722376" y="3803904"/>
-            <a:ext cx="3142488" cy="475488"/>
-          </a:xfrm>
-          <a:prstGeom prst="rect">
-            <a:avLst/>
-          </a:prstGeom>
-          <a:noFill/>
-        </p:spPr>
-        <p:txBody>
-          <a:bodyPr wrap="square" lIns="0" rIns="0" tIns="0" bIns="0" anchor="t">
+            <a:off x="4069080" y="2560320"/>
+            <a:ext cx="7635240" cy="457200"/>
+          </a:xfrm>
+          <a:prstGeom prst="rect">
+            <a:avLst/>
+          </a:prstGeom>
+          <a:noFill/>
+        </p:spPr>
+        <p:txBody>
+          <a:bodyPr wrap="square" lIns="0" rIns="0" tIns="0" bIns="0" anchor="ctr">
             <a:spAutoFit/>
           </a:bodyPr>
           <a:lstStyle/>
           <a:p>
             <a:pPr algn="l">
               <a:lnSpc>
-                <a:spcPct val="110000"/>
+                <a:spcPct val="100000"/>
               </a:lnSpc>
             </a:pPr>
             <a:r>
@@ -27472,7 +27589,7 @@
                 </a:solidFill>
                 <a:latin typeface="Arial"/>
               </a:rPr>
-              <a:t>низкая, обратимо — выше автономия AI</a:t>
+              <a:t>знакомый типовой → AI надёжен · приватный/легаси → надёжность падает</a:t>
             </a:r>
           </a:p>
         </p:txBody>
@@ -27485,8 +27602,8 @@
         </p:nvSpPr>
         <p:spPr>
           <a:xfrm>
-            <a:off x="685800" y="4279392"/>
-            <a:ext cx="3215640" cy="420624"/>
+            <a:off x="365760" y="3108960"/>
+            <a:ext cx="11475720" cy="457200"/>
           </a:xfrm>
           <a:prstGeom prst="roundRect">
             <a:avLst>
@@ -27494,11 +27611,11 @@
             </a:avLst>
           </a:prstGeom>
           <a:solidFill>
-            <a:srgbClr val="FDF3DC"/>
+            <a:srgbClr val="F4F7FA"/>
           </a:solidFill>
-          <a:ln w="15240">
+          <a:ln w="12700">
             <a:solidFill>
-              <a:srgbClr val="F0AB00"/>
+              <a:srgbClr val="E5EAF0"/>
             </a:solidFill>
           </a:ln>
           <a:effectLst/>
@@ -27525,96 +27642,9 @@
           </a:p>
         </p:txBody>
       </p:sp>
-      <p:sp>
-        <p:nvSpPr>
-          <p:cNvPr id="12" name="TextBox 11"/>
-          <p:cNvSpPr txBox="1"/>
-          <p:nvPr/>
-        </p:nvSpPr>
-        <p:spPr>
-          <a:xfrm>
-            <a:off x="795528" y="4279392"/>
-            <a:ext cx="2996183" cy="420624"/>
-          </a:xfrm>
-          <a:prstGeom prst="rect">
-            <a:avLst/>
-          </a:prstGeom>
-          <a:noFill/>
-        </p:spPr>
-        <p:txBody>
-          <a:bodyPr wrap="square" lIns="0" rIns="0" tIns="0" bIns="0" anchor="ctr">
-            <a:spAutoFit/>
-          </a:bodyPr>
-          <a:lstStyle/>
-          <a:p>
-            <a:pPr algn="l">
-              <a:lnSpc>
-                <a:spcPct val="106000"/>
-              </a:lnSpc>
-            </a:pPr>
-            <a:r>
-              <a:rPr sz="1200" b="1" i="0">
-                <a:solidFill>
-                  <a:srgbClr val="21295C"/>
-                </a:solidFill>
-                <a:latin typeface="Arial"/>
-              </a:rPr>
-              <a:t>высокая, необратимо — руки + человеческий гейт</a:t>
-            </a:r>
-          </a:p>
-        </p:txBody>
-      </p:sp>
-      <p:sp>
-        <p:nvSpPr>
-          <p:cNvPr id="13" name="Rounded Rectangle 12"/>
-          <p:cNvSpPr/>
-          <p:nvPr/>
-        </p:nvSpPr>
-        <p:spPr>
-          <a:xfrm>
-            <a:off x="4312919" y="3127248"/>
-            <a:ext cx="3581400" cy="1700784"/>
-          </a:xfrm>
-          <a:prstGeom prst="roundRect">
-            <a:avLst>
-              <a:gd name="adj" fmla="val 17921"/>
-            </a:avLst>
-          </a:prstGeom>
-          <a:solidFill>
-            <a:srgbClr val="F4F7FA"/>
-          </a:solidFill>
-          <a:ln w="19050">
-            <a:solidFill>
-              <a:srgbClr val="1C7293"/>
-            </a:solidFill>
-          </a:ln>
-          <a:effectLst/>
-        </p:spPr>
-        <p:style>
-          <a:lnRef idx="1">
-            <a:schemeClr val="accent1"/>
-          </a:lnRef>
-          <a:fillRef idx="3">
-            <a:schemeClr val="accent1"/>
-          </a:fillRef>
-          <a:effectRef idx="2">
-            <a:schemeClr val="accent1"/>
-          </a:effectRef>
-          <a:fontRef idx="minor">
-            <a:schemeClr val="lt1"/>
-          </a:fontRef>
-        </p:style>
-        <p:txBody>
-          <a:bodyPr rtlCol="0" anchor="ctr"/>
-          <a:lstStyle/>
-          <a:p>
-            <a:pPr algn="ctr"/>
-          </a:p>
-        </p:txBody>
-      </p:sp>
       <p:pic>
         <p:nvPicPr>
-          <p:cNvPr id="14" name="Picture 13" descr="git-compare-mid.png"/>
+          <p:cNvPr id="12" name="Picture 11" descr="refresh-cw-mid.png"/>
           <p:cNvPicPr>
             <a:picLocks noChangeAspect="1"/>
           </p:cNvPicPr>
@@ -27628,8 +27658,8 @@
         </p:blipFill>
         <p:spPr>
           <a:xfrm>
-            <a:off x="4514087" y="3310128"/>
-            <a:ext cx="384048" cy="384048"/>
+            <a:off x="512064" y="3191256"/>
+            <a:ext cx="292608" cy="292608"/>
           </a:xfrm>
           <a:prstGeom prst="rect">
             <a:avLst/>
@@ -27638,14 +27668,14 @@
       </p:pic>
       <p:sp>
         <p:nvSpPr>
-          <p:cNvPr id="15" name="TextBox 14"/>
-          <p:cNvSpPr txBox="1"/>
-          <p:nvPr/>
-        </p:nvSpPr>
-        <p:spPr>
-          <a:xfrm>
-            <a:off x="5026151" y="3328416"/>
-            <a:ext cx="2712720" cy="384048"/>
+          <p:cNvPr id="13" name="TextBox 12"/>
+          <p:cNvSpPr txBox="1"/>
+          <p:nvPr/>
+        </p:nvSpPr>
+        <p:spPr>
+          <a:xfrm>
+            <a:off x="932688" y="3108960"/>
+            <a:ext cx="3063240" cy="457200"/>
           </a:xfrm>
           <a:prstGeom prst="rect">
             <a:avLst/>
@@ -27664,42 +27694,42 @@
               </a:lnSpc>
             </a:pPr>
             <a:r>
-              <a:rPr sz="1500" b="1" i="0">
+              <a:rPr sz="1400" b="1" i="0">
                 <a:solidFill>
                   <a:srgbClr val="065A82"/>
                 </a:solidFill>
                 <a:latin typeface="Arial"/>
               </a:rPr>
-              <a:t>Незнакомость кода</a:t>
-            </a:r>
-          </a:p>
-        </p:txBody>
-      </p:sp>
-      <p:sp>
-        <p:nvSpPr>
-          <p:cNvPr id="16" name="TextBox 15"/>
-          <p:cNvSpPr txBox="1"/>
-          <p:nvPr/>
-        </p:nvSpPr>
-        <p:spPr>
-          <a:xfrm>
-            <a:off x="4532375" y="3803904"/>
-            <a:ext cx="3142488" cy="475488"/>
-          </a:xfrm>
-          <a:prstGeom prst="rect">
-            <a:avLst/>
-          </a:prstGeom>
-          <a:noFill/>
-        </p:spPr>
-        <p:txBody>
-          <a:bodyPr wrap="square" lIns="0" rIns="0" tIns="0" bIns="0" anchor="t">
+              <a:t>Обратимость операции</a:t>
+            </a:r>
+          </a:p>
+        </p:txBody>
+      </p:sp>
+      <p:sp>
+        <p:nvSpPr>
+          <p:cNvPr id="14" name="TextBox 13"/>
+          <p:cNvSpPr txBox="1"/>
+          <p:nvPr/>
+        </p:nvSpPr>
+        <p:spPr>
+          <a:xfrm>
+            <a:off x="4069080" y="3108960"/>
+            <a:ext cx="7635240" cy="457200"/>
+          </a:xfrm>
+          <a:prstGeom prst="rect">
+            <a:avLst/>
+          </a:prstGeom>
+          <a:noFill/>
+        </p:spPr>
+        <p:txBody>
+          <a:bodyPr wrap="square" lIns="0" rIns="0" tIns="0" bIns="0" anchor="ctr">
             <a:spAutoFit/>
           </a:bodyPr>
           <a:lstStyle/>
           <a:p>
             <a:pPr algn="l">
               <a:lnSpc>
-                <a:spcPct val="110000"/>
+                <a:spcPct val="100000"/>
               </a:lnSpc>
             </a:pPr>
             <a:r>
@@ -27709,21 +27739,21 @@
                 </a:solidFill>
                 <a:latin typeface="Arial"/>
               </a:rPr>
-              <a:t>типовой, знакомый — AI надёжен</a:t>
-            </a:r>
-          </a:p>
-        </p:txBody>
-      </p:sp>
-      <p:sp>
-        <p:nvSpPr>
-          <p:cNvPr id="17" name="Rounded Rectangle 16"/>
+              <a:t>обратимо → выше автономия · необратимо → жёсткий человеческий гейт</a:t>
+            </a:r>
+          </a:p>
+        </p:txBody>
+      </p:sp>
+      <p:sp>
+        <p:nvSpPr>
+          <p:cNvPr id="15" name="Rounded Rectangle 14"/>
           <p:cNvSpPr/>
           <p:nvPr/>
         </p:nvSpPr>
         <p:spPr>
           <a:xfrm>
-            <a:off x="4495799" y="4279392"/>
-            <a:ext cx="3215640" cy="420624"/>
+            <a:off x="365760" y="3657600"/>
+            <a:ext cx="11475720" cy="457200"/>
           </a:xfrm>
           <a:prstGeom prst="roundRect">
             <a:avLst>
@@ -27731,11 +27761,11 @@
             </a:avLst>
           </a:prstGeom>
           <a:solidFill>
-            <a:srgbClr val="FDF3DC"/>
+            <a:srgbClr val="F4F7FA"/>
           </a:solidFill>
-          <a:ln w="15240">
+          <a:ln w="12700">
             <a:solidFill>
-              <a:srgbClr val="F0AB00"/>
+              <a:srgbClr val="E5EAF0"/>
             </a:solidFill>
           </a:ln>
           <a:effectLst/>
@@ -27762,96 +27792,9 @@
           </a:p>
         </p:txBody>
       </p:sp>
-      <p:sp>
-        <p:nvSpPr>
-          <p:cNvPr id="18" name="TextBox 17"/>
-          <p:cNvSpPr txBox="1"/>
-          <p:nvPr/>
-        </p:nvSpPr>
-        <p:spPr>
-          <a:xfrm>
-            <a:off x="4605528" y="4279392"/>
-            <a:ext cx="2996183" cy="420624"/>
-          </a:xfrm>
-          <a:prstGeom prst="rect">
-            <a:avLst/>
-          </a:prstGeom>
-          <a:noFill/>
-        </p:spPr>
-        <p:txBody>
-          <a:bodyPr wrap="square" lIns="0" rIns="0" tIns="0" bIns="0" anchor="ctr">
-            <a:spAutoFit/>
-          </a:bodyPr>
-          <a:lstStyle/>
-          <a:p>
-            <a:pPr algn="l">
-              <a:lnSpc>
-                <a:spcPct val="106000"/>
-              </a:lnSpc>
-            </a:pPr>
-            <a:r>
-              <a:rPr sz="1200" b="1" i="0">
-                <a:solidFill>
-                  <a:srgbClr val="21295C"/>
-                </a:solidFill>
-                <a:latin typeface="Arial"/>
-              </a:rPr>
-              <a:t>незнакомый, приватный — надёжность AI резко падает</a:t>
-            </a:r>
-          </a:p>
-        </p:txBody>
-      </p:sp>
-      <p:sp>
-        <p:nvSpPr>
-          <p:cNvPr id="19" name="Rounded Rectangle 18"/>
-          <p:cNvSpPr/>
-          <p:nvPr/>
-        </p:nvSpPr>
-        <p:spPr>
-          <a:xfrm>
-            <a:off x="8122920" y="3127248"/>
-            <a:ext cx="3581400" cy="1700784"/>
-          </a:xfrm>
-          <a:prstGeom prst="roundRect">
-            <a:avLst>
-              <a:gd name="adj" fmla="val 17921"/>
-            </a:avLst>
-          </a:prstGeom>
-          <a:solidFill>
-            <a:srgbClr val="F4F7FA"/>
-          </a:solidFill>
-          <a:ln w="19050">
-            <a:solidFill>
-              <a:srgbClr val="1C7293"/>
-            </a:solidFill>
-          </a:ln>
-          <a:effectLst/>
-        </p:spPr>
-        <p:style>
-          <a:lnRef idx="1">
-            <a:schemeClr val="accent1"/>
-          </a:lnRef>
-          <a:fillRef idx="3">
-            <a:schemeClr val="accent1"/>
-          </a:fillRef>
-          <a:effectRef idx="2">
-            <a:schemeClr val="accent1"/>
-          </a:effectRef>
-          <a:fontRef idx="minor">
-            <a:schemeClr val="lt1"/>
-          </a:fontRef>
-        </p:style>
-        <p:txBody>
-          <a:bodyPr rtlCol="0" anchor="ctr"/>
-          <a:lstStyle/>
-          <a:p>
-            <a:pPr algn="ctr"/>
-          </a:p>
-        </p:txBody>
-      </p:sp>
       <p:pic>
         <p:nvPicPr>
-          <p:cNvPr id="20" name="Picture 19" descr="refresh-cw-mid.png"/>
+          <p:cNvPr id="16" name="Picture 15" descr="flame-mid.png"/>
           <p:cNvPicPr>
             <a:picLocks noChangeAspect="1"/>
           </p:cNvPicPr>
@@ -27865,8 +27808,8 @@
         </p:blipFill>
         <p:spPr>
           <a:xfrm>
-            <a:off x="8324088" y="3310128"/>
-            <a:ext cx="384048" cy="384048"/>
+            <a:off x="512064" y="3739896"/>
+            <a:ext cx="292608" cy="292608"/>
           </a:xfrm>
           <a:prstGeom prst="rect">
             <a:avLst/>
@@ -27875,14 +27818,14 @@
       </p:pic>
       <p:sp>
         <p:nvSpPr>
-          <p:cNvPr id="21" name="TextBox 20"/>
-          <p:cNvSpPr txBox="1"/>
-          <p:nvPr/>
-        </p:nvSpPr>
-        <p:spPr>
-          <a:xfrm>
-            <a:off x="8836151" y="3328416"/>
-            <a:ext cx="2712720" cy="384048"/>
+          <p:cNvPr id="17" name="TextBox 16"/>
+          <p:cNvSpPr txBox="1"/>
+          <p:nvPr/>
+        </p:nvSpPr>
+        <p:spPr>
+          <a:xfrm>
+            <a:off x="932688" y="3657600"/>
+            <a:ext cx="3063240" cy="457200"/>
           </a:xfrm>
           <a:prstGeom prst="rect">
             <a:avLst/>
@@ -27901,42 +27844,42 @@
               </a:lnSpc>
             </a:pPr>
             <a:r>
-              <a:rPr sz="1500" b="1" i="0">
+              <a:rPr sz="1400" b="1" i="0">
                 <a:solidFill>
                   <a:srgbClr val="065A82"/>
                 </a:solidFill>
                 <a:latin typeface="Arial"/>
               </a:rPr>
-              <a:t>Повторяемость</a:t>
-            </a:r>
-          </a:p>
-        </p:txBody>
-      </p:sp>
-      <p:sp>
-        <p:nvSpPr>
-          <p:cNvPr id="22" name="TextBox 21"/>
-          <p:cNvSpPr txBox="1"/>
-          <p:nvPr/>
-        </p:nvSpPr>
-        <p:spPr>
-          <a:xfrm>
-            <a:off x="8342376" y="3803904"/>
-            <a:ext cx="3142488" cy="475488"/>
-          </a:xfrm>
-          <a:prstGeom prst="rect">
-            <a:avLst/>
-          </a:prstGeom>
-          <a:noFill/>
-        </p:spPr>
-        <p:txBody>
-          <a:bodyPr wrap="square" lIns="0" rIns="0" tIns="0" bIns="0" anchor="t">
+              <a:t>Критичность / прод</a:t>
+            </a:r>
+          </a:p>
+        </p:txBody>
+      </p:sp>
+      <p:sp>
+        <p:nvSpPr>
+          <p:cNvPr id="18" name="TextBox 17"/>
+          <p:cNvSpPr txBox="1"/>
+          <p:nvPr/>
+        </p:nvSpPr>
+        <p:spPr>
+          <a:xfrm>
+            <a:off x="4069080" y="3657600"/>
+            <a:ext cx="7635240" cy="457200"/>
+          </a:xfrm>
+          <a:prstGeom prst="rect">
+            <a:avLst/>
+          </a:prstGeom>
+          <a:noFill/>
+        </p:spPr>
+        <p:txBody>
+          <a:bodyPr wrap="square" lIns="0" rIns="0" tIns="0" bIns="0" anchor="ctr">
             <a:spAutoFit/>
           </a:bodyPr>
           <a:lstStyle/>
           <a:p>
             <a:pPr algn="l">
               <a:lnSpc>
-                <a:spcPct val="110000"/>
+                <a:spcPct val="100000"/>
               </a:lnSpc>
             </a:pPr>
             <a:r>
@@ -27946,21 +27889,21 @@
                 </a:solidFill>
                 <a:latin typeface="Arial"/>
               </a:rPr>
-              <a:t>повторяемое, по правилу — кандидат на AI</a:t>
-            </a:r>
-          </a:p>
-        </p:txBody>
-      </p:sp>
-      <p:sp>
-        <p:nvSpPr>
-          <p:cNvPr id="23" name="Rounded Rectangle 22"/>
+              <a:t>некритичное → шире автономия · прод и пользователи → строгий гейт</a:t>
+            </a:r>
+          </a:p>
+        </p:txBody>
+      </p:sp>
+      <p:sp>
+        <p:nvSpPr>
+          <p:cNvPr id="19" name="Rounded Rectangle 18"/>
           <p:cNvSpPr/>
           <p:nvPr/>
         </p:nvSpPr>
         <p:spPr>
           <a:xfrm>
-            <a:off x="8305799" y="4279392"/>
-            <a:ext cx="3215640" cy="420624"/>
+            <a:off x="365760" y="4206240"/>
+            <a:ext cx="11475720" cy="457200"/>
           </a:xfrm>
           <a:prstGeom prst="roundRect">
             <a:avLst>
@@ -27968,9 +27911,159 @@
             </a:avLst>
           </a:prstGeom>
           <a:solidFill>
+            <a:srgbClr val="F4F7FA"/>
+          </a:solidFill>
+          <a:ln w="12700">
+            <a:solidFill>
+              <a:srgbClr val="E5EAF0"/>
+            </a:solidFill>
+          </a:ln>
+          <a:effectLst/>
+        </p:spPr>
+        <p:style>
+          <a:lnRef idx="1">
+            <a:schemeClr val="accent1"/>
+          </a:lnRef>
+          <a:fillRef idx="3">
+            <a:schemeClr val="accent1"/>
+          </a:fillRef>
+          <a:effectRef idx="2">
+            <a:schemeClr val="accent1"/>
+          </a:effectRef>
+          <a:fontRef idx="minor">
+            <a:schemeClr val="lt1"/>
+          </a:fontRef>
+        </p:style>
+        <p:txBody>
+          <a:bodyPr rtlCol="0" anchor="ctr"/>
+          <a:lstStyle/>
+          <a:p>
+            <a:pPr algn="ctr"/>
+          </a:p>
+        </p:txBody>
+      </p:sp>
+      <p:pic>
+        <p:nvPicPr>
+          <p:cNvPr id="20" name="Picture 19" descr="gavel-mid.png"/>
+          <p:cNvPicPr>
+            <a:picLocks noChangeAspect="1"/>
+          </p:cNvPicPr>
+          <p:nvPr/>
+        </p:nvPicPr>
+        <p:blipFill>
+          <a:blip r:embed="rId6"/>
+          <a:stretch>
+            <a:fillRect/>
+          </a:stretch>
+        </p:blipFill>
+        <p:spPr>
+          <a:xfrm>
+            <a:off x="512064" y="4288536"/>
+            <a:ext cx="292608" cy="292608"/>
+          </a:xfrm>
+          <a:prstGeom prst="rect">
+            <a:avLst/>
+          </a:prstGeom>
+        </p:spPr>
+      </p:pic>
+      <p:sp>
+        <p:nvSpPr>
+          <p:cNvPr id="21" name="TextBox 20"/>
+          <p:cNvSpPr txBox="1"/>
+          <p:nvPr/>
+        </p:nvSpPr>
+        <p:spPr>
+          <a:xfrm>
+            <a:off x="932688" y="4206240"/>
+            <a:ext cx="3063240" cy="457200"/>
+          </a:xfrm>
+          <a:prstGeom prst="rect">
+            <a:avLst/>
+          </a:prstGeom>
+          <a:noFill/>
+        </p:spPr>
+        <p:txBody>
+          <a:bodyPr wrap="square" lIns="0" rIns="0" tIns="0" bIns="0" anchor="ctr">
+            <a:spAutoFit/>
+          </a:bodyPr>
+          <a:lstStyle/>
+          <a:p>
+            <a:pPr algn="l">
+              <a:lnSpc>
+                <a:spcPct val="115000"/>
+              </a:lnSpc>
+            </a:pPr>
+            <a:r>
+              <a:rPr sz="1400" b="1" i="0">
+                <a:solidFill>
+                  <a:srgbClr val="065A82"/>
+                </a:solidFill>
+                <a:latin typeface="Arial"/>
+              </a:rPr>
+              <a:t>Аудит / ответственность</a:t>
+            </a:r>
+          </a:p>
+        </p:txBody>
+      </p:sp>
+      <p:sp>
+        <p:nvSpPr>
+          <p:cNvPr id="22" name="TextBox 21"/>
+          <p:cNvSpPr txBox="1"/>
+          <p:nvPr/>
+        </p:nvSpPr>
+        <p:spPr>
+          <a:xfrm>
+            <a:off x="4069080" y="4206240"/>
+            <a:ext cx="7635240" cy="457200"/>
+          </a:xfrm>
+          <a:prstGeom prst="rect">
+            <a:avLst/>
+          </a:prstGeom>
+          <a:noFill/>
+        </p:spPr>
+        <p:txBody>
+          <a:bodyPr wrap="square" lIns="0" rIns="0" tIns="0" bIns="0" anchor="ctr">
+            <a:spAutoFit/>
+          </a:bodyPr>
+          <a:lstStyle/>
+          <a:p>
+            <a:pPr algn="l">
+              <a:lnSpc>
+                <a:spcPct val="100000"/>
+              </a:lnSpc>
+            </a:pPr>
+            <a:r>
+              <a:rPr sz="1200" b="0" i="0">
+                <a:solidFill>
+                  <a:srgbClr val="21295C"/>
+                </a:solidFill>
+                <a:latin typeface="Arial"/>
+              </a:rPr>
+              <a:t>нет следа → можно · нужен владелец решения → человек на merge</a:t>
+            </a:r>
+          </a:p>
+        </p:txBody>
+      </p:sp>
+      <p:sp>
+        <p:nvSpPr>
+          <p:cNvPr id="23" name="Rounded Rectangle 22"/>
+          <p:cNvSpPr/>
+          <p:nvPr/>
+        </p:nvSpPr>
+        <p:spPr>
+          <a:xfrm>
+            <a:off x="365760" y="4754879"/>
+            <a:ext cx="11475720" cy="457200"/>
+          </a:xfrm>
+          <a:prstGeom prst="roundRect">
+            <a:avLst>
+              <a:gd name="adj" fmla="val 16000"/>
+            </a:avLst>
+          </a:prstGeom>
+          <a:solidFill>
             <a:srgbClr val="FDF3DC"/>
           </a:solidFill>
-          <a:ln w="15240">
+          <a:ln w="25400">
             <a:solidFill>
               <a:srgbClr val="F0AB00"/>
             </a:solidFill>
@@ -27999,16 +28092,40 @@
           </a:p>
         </p:txBody>
       </p:sp>
-      <p:sp>
-        <p:nvSpPr>
-          <p:cNvPr id="24" name="TextBox 23"/>
-          <p:cNvSpPr txBox="1"/>
-          <p:nvPr/>
-        </p:nvSpPr>
-        <p:spPr>
-          <a:xfrm>
-            <a:off x="8415528" y="4279392"/>
-            <a:ext cx="2996183" cy="420624"/>
+      <p:pic>
+        <p:nvPicPr>
+          <p:cNvPr id="24" name="Picture 23" descr="scale-gold.png"/>
+          <p:cNvPicPr>
+            <a:picLocks noChangeAspect="1"/>
+          </p:cNvPicPr>
+          <p:nvPr/>
+        </p:nvPicPr>
+        <p:blipFill>
+          <a:blip r:embed="rId2"/>
+          <a:stretch>
+            <a:fillRect/>
+          </a:stretch>
+        </p:blipFill>
+        <p:spPr>
+          <a:xfrm>
+            <a:off x="512064" y="4837175"/>
+            <a:ext cx="292608" cy="292608"/>
+          </a:xfrm>
+          <a:prstGeom prst="rect">
+            <a:avLst/>
+          </a:prstGeom>
+        </p:spPr>
+      </p:pic>
+      <p:sp>
+        <p:nvSpPr>
+          <p:cNvPr id="25" name="TextBox 24"/>
+          <p:cNvSpPr txBox="1"/>
+          <p:nvPr/>
+        </p:nvSpPr>
+        <p:spPr>
+          <a:xfrm>
+            <a:off x="932688" y="4754879"/>
+            <a:ext cx="3063240" cy="457200"/>
           </a:xfrm>
           <a:prstGeom prst="rect">
             <a:avLst/>
@@ -28023,31 +28140,70 @@
           <a:p>
             <a:pPr algn="l">
               <a:lnSpc>
-                <a:spcPct val="106000"/>
-              </a:lnSpc>
-            </a:pPr>
-            <a:r>
-              <a:rPr sz="1200" b="1" i="0">
+                <a:spcPct val="115000"/>
+              </a:lnSpc>
+            </a:pPr>
+            <a:r>
+              <a:rPr sz="1400" b="1" i="0">
                 <a:solidFill>
                   <a:srgbClr val="21295C"/>
                 </a:solidFill>
                 <a:latin typeface="Arial"/>
               </a:rPr>
-              <a:t>разовое, нестандартное — здесь сильнее человек</a:t>
-            </a:r>
-          </a:p>
-        </p:txBody>
-      </p:sp>
-      <p:sp>
-        <p:nvSpPr>
-          <p:cNvPr id="25" name="Rounded Rectangle 24"/>
+              <a:t>Цена ошибки</a:t>
+            </a:r>
+          </a:p>
+        </p:txBody>
+      </p:sp>
+      <p:sp>
+        <p:nvSpPr>
+          <p:cNvPr id="26" name="TextBox 25"/>
+          <p:cNvSpPr txBox="1"/>
+          <p:nvPr/>
+        </p:nvSpPr>
+        <p:spPr>
+          <a:xfrm>
+            <a:off x="4069080" y="4754879"/>
+            <a:ext cx="7635240" cy="457200"/>
+          </a:xfrm>
+          <a:prstGeom prst="rect">
+            <a:avLst/>
+          </a:prstGeom>
+          <a:noFill/>
+        </p:spPr>
+        <p:txBody>
+          <a:bodyPr wrap="square" lIns="0" rIns="0" tIns="0" bIns="0" anchor="ctr">
+            <a:spAutoFit/>
+          </a:bodyPr>
+          <a:lstStyle/>
+          <a:p>
+            <a:pPr algn="l">
+              <a:lnSpc>
+                <a:spcPct val="100000"/>
+              </a:lnSpc>
+            </a:pPr>
+            <a:r>
+              <a:rPr sz="1200" b="0" i="0">
+                <a:solidFill>
+                  <a:srgbClr val="21295C"/>
+                </a:solidFill>
+                <a:latin typeface="Arial"/>
+              </a:rPr>
+              <a:t>задаёт приоритет осей — она вето: одна высокая опускает потолок</a:t>
+            </a:r>
+          </a:p>
+        </p:txBody>
+      </p:sp>
+      <p:sp>
+        <p:nvSpPr>
+          <p:cNvPr id="27" name="Rounded Rectangle 26"/>
           <p:cNvSpPr/>
           <p:nvPr/>
         </p:nvSpPr>
         <p:spPr>
           <a:xfrm>
-            <a:off x="502920" y="4992624"/>
-            <a:ext cx="11201400" cy="768096"/>
+            <a:off x="502920" y="5413248"/>
+            <a:ext cx="11201400" cy="676656"/>
           </a:xfrm>
           <a:prstGeom prst="roundRect">
             <a:avLst>
@@ -28088,14 +28244,14 @@
       </p:sp>
       <p:sp>
         <p:nvSpPr>
-          <p:cNvPr id="26" name="TextBox 25"/>
-          <p:cNvSpPr txBox="1"/>
-          <p:nvPr/>
-        </p:nvSpPr>
-        <p:spPr>
-          <a:xfrm>
-            <a:off x="722376" y="5047488"/>
-            <a:ext cx="10762488" cy="658368"/>
+          <p:cNvPr id="28" name="TextBox 27"/>
+          <p:cNvSpPr txBox="1"/>
+          <p:nvPr/>
+        </p:nvSpPr>
+        <p:spPr>
+          <a:xfrm>
+            <a:off x="722376" y="5468112"/>
+            <a:ext cx="10762488" cy="566928"/>
           </a:xfrm>
           <a:prstGeom prst="rect">
             <a:avLst/>
@@ -28120,14 +28276,14 @@
                 </a:solidFill>
                 <a:latin typeface="Arial"/>
               </a:rPr>
-              <a:t>Крайний случай: детерминированная, проверяемая, повторяемая задача (парсинг, валидация по схеме, арифметика) → обычный код, без AI вовсе. Полная матрица 5 осей × 4 уровня — в материалах лекции.</a:t>
-            </a:r>
-          </a:p>
-        </p:txBody>
-      </p:sp>
-      <p:sp>
-        <p:nvSpPr>
-          <p:cNvPr id="27" name="TextBox 26"/>
+              <a:t>Сначала отсев: детерминированная, проверяемая, повторяемая задача (парсинг, валидация по схеме, арифметика) → обычный код, без AI вовсе — остальные оси не нужны.</a:t>
+            </a:r>
+          </a:p>
+        </p:txBody>
+      </p:sp>
+      <p:sp>
+        <p:nvSpPr>
+          <p:cNvPr id="29" name="TextBox 28"/>
           <p:cNvSpPr txBox="1"/>
           <p:nvPr/>
         </p:nvSpPr>
@@ -28159,7 +28315,7 @@
                 </a:solidFill>
                 <a:latin typeface="Arial"/>
               </a:rPr>
-              <a:t>Синтез: METR (эксперты медленнее на знакомом сложном), Brooks (рутина ≠ суть), 70/80%-проблема, разрыв SWE-bench Verified ↔ Pro. Полная матрица — в главе.</a:t>
+              <a:t>Синтез разделов: METR · Brooks · 70/80%-проблема · разрыв SWE-bench Verified↔Pro · Replit/CamoLeak.</a:t>
             </a:r>
           </a:p>
         </p:txBody>
@@ -28191,7 +28347,7 @@
         <p:spPr>
           <a:xfrm>
             <a:off x="502920" y="310896"/>
-            <a:ext cx="11201400" cy="566928"/>
+            <a:ext cx="11201400" cy="548640"/>
           </a:xfrm>
           <a:prstGeom prst="rect">
             <a:avLst/>
@@ -28210,13 +28366,13 @@
               </a:lnSpc>
             </a:pPr>
             <a:r>
-              <a:rPr sz="2400" b="1" i="0">
+              <a:rPr sz="2700" b="1" i="0">
                 <a:solidFill>
                   <a:srgbClr val="21295C"/>
                 </a:solidFill>
                 <a:latin typeface="Arial"/>
               </a:rPr>
-              <a:t>Лекция 4 не вводит новый аппарат — она применяет аппарат Лекции 3.</a:t>
+              <a:t>Лестница автономности A→D — четыре уровня участия AI.</a:t>
             </a:r>
           </a:p>
         </p:txBody>
@@ -28229,8 +28385,8 @@
         </p:nvSpPr>
         <p:spPr>
           <a:xfrm>
-            <a:off x="502920" y="877824"/>
-            <a:ext cx="11201400" cy="292608"/>
+            <a:off x="502920" y="950976"/>
+            <a:ext cx="11201400" cy="310896"/>
           </a:xfrm>
           <a:prstGeom prst="rect">
             <a:avLst/>
@@ -28245,17 +28401,17 @@
           <a:p>
             <a:pPr algn="l">
               <a:lnSpc>
-                <a:spcPct val="115000"/>
-              </a:lnSpc>
-            </a:pPr>
-            <a:r>
-              <a:rPr sz="1300" b="0" i="1">
+                <a:spcPct val="110000"/>
+              </a:lnSpc>
+            </a:pPr>
+            <a:r>
+              <a:rPr sz="1400" b="0" i="1">
                 <a:solidFill>
                   <a:srgbClr val="065A82"/>
                 </a:solidFill>
                 <a:latin typeface="Arial"/>
               </a:rPr>
-              <a:t>Переносим готовым, не переобъясняем: 4 блока обзорного Модуля 1 → их проекция на разработку ПО.</a:t>
+              <a:t>Как лестница сложности из Лекции 3 — выбираешь ступень под задачу, не выше: каждый шаг вверх отдаёт AI больше решений.</a:t>
             </a:r>
           </a:p>
         </p:txBody>
@@ -28268,12 +28424,12 @@
         </p:nvSpPr>
         <p:spPr>
           <a:xfrm>
-            <a:off x="365760" y="1280160"/>
-            <a:ext cx="11475720" cy="4023360"/>
+            <a:off x="365760" y="1371600"/>
+            <a:ext cx="11475720" cy="3968496"/>
           </a:xfrm>
           <a:prstGeom prst="roundRect">
             <a:avLst>
-              <a:gd name="adj" fmla="val 7575"/>
+              <a:gd name="adj" fmla="val 7680"/>
             </a:avLst>
           </a:prstGeom>
           <a:solidFill>
@@ -28316,8 +28472,8 @@
         </p:nvSpPr>
         <p:spPr>
           <a:xfrm>
-            <a:off x="502920" y="1408176"/>
-            <a:ext cx="5532120" cy="512064"/>
+            <a:off x="512064" y="1499616"/>
+            <a:ext cx="1938528" cy="457200"/>
           </a:xfrm>
           <a:prstGeom prst="rect">
             <a:avLst/>
@@ -28360,8 +28516,8 @@
         </p:nvSpPr>
         <p:spPr>
           <a:xfrm>
-            <a:off x="649224" y="1408176"/>
-            <a:ext cx="5257800" cy="512064"/>
+            <a:off x="621792" y="1499616"/>
+            <a:ext cx="1755648" cy="457200"/>
           </a:xfrm>
           <a:prstGeom prst="rect">
             <a:avLst/>
@@ -28374,19 +28530,19 @@
           </a:bodyPr>
           <a:lstStyle/>
           <a:p>
-            <a:pPr algn="l">
+            <a:pPr algn="ctr">
               <a:lnSpc>
                 <a:spcPct val="115000"/>
               </a:lnSpc>
             </a:pPr>
             <a:r>
-              <a:rPr sz="1400" b="1" i="0">
+              <a:rPr sz="1350" b="1" i="0">
                 <a:solidFill>
                   <a:srgbClr val="FFFFFF"/>
                 </a:solidFill>
                 <a:latin typeface="Arial"/>
               </a:rPr>
-              <a:t>Из обзорного Модуля 1 (Лекции 1–3)</a:t>
+              <a:t>Уровень</a:t>
             </a:r>
           </a:p>
         </p:txBody>
@@ -28399,8 +28555,8 @@
         </p:nvSpPr>
         <p:spPr>
           <a:xfrm>
-            <a:off x="6035040" y="1408176"/>
-            <a:ext cx="5623560" cy="512064"/>
+            <a:off x="2450592" y="1499616"/>
+            <a:ext cx="2999232" cy="457200"/>
           </a:xfrm>
           <a:prstGeom prst="rect">
             <a:avLst/>
@@ -28443,8 +28599,8 @@
         </p:nvSpPr>
         <p:spPr>
           <a:xfrm>
-            <a:off x="6181344" y="1408176"/>
-            <a:ext cx="5349240" cy="512064"/>
+            <a:off x="2560320" y="1499616"/>
+            <a:ext cx="2816351" cy="457200"/>
           </a:xfrm>
           <a:prstGeom prst="rect">
             <a:avLst/>
@@ -28463,13 +28619,13 @@
               </a:lnSpc>
             </a:pPr>
             <a:r>
-              <a:rPr sz="1400" b="1" i="0">
+              <a:rPr sz="1350" b="1" i="0">
                 <a:solidFill>
                   <a:srgbClr val="FFFFFF"/>
                 </a:solidFill>
                 <a:latin typeface="Arial"/>
               </a:rPr>
-              <a:t>→ Проекция на разработку ПО (эта лекция)</a:t>
+              <a:t>Что делает AI</a:t>
             </a:r>
           </a:p>
         </p:txBody>
@@ -28482,8 +28638,174 @@
         </p:nvSpPr>
         <p:spPr>
           <a:xfrm>
-            <a:off x="502920" y="1920240"/>
-            <a:ext cx="5532120" cy="786384"/>
+            <a:off x="5449824" y="1499616"/>
+            <a:ext cx="2724912" cy="457200"/>
+          </a:xfrm>
+          <a:prstGeom prst="rect">
+            <a:avLst/>
+          </a:prstGeom>
+          <a:solidFill>
+            <a:srgbClr val="065A82"/>
+          </a:solidFill>
+          <a:ln>
+            <a:noFill/>
+          </a:ln>
+          <a:effectLst/>
+        </p:spPr>
+        <p:style>
+          <a:lnRef idx="1">
+            <a:schemeClr val="accent1"/>
+          </a:lnRef>
+          <a:fillRef idx="3">
+            <a:schemeClr val="accent1"/>
+          </a:fillRef>
+          <a:effectRef idx="2">
+            <a:schemeClr val="accent1"/>
+          </a:effectRef>
+          <a:fontRef idx="minor">
+            <a:schemeClr val="lt1"/>
+          </a:fontRef>
+        </p:style>
+        <p:txBody>
+          <a:bodyPr rtlCol="0" anchor="ctr"/>
+          <a:lstStyle/>
+          <a:p>
+            <a:pPr algn="ctr"/>
+          </a:p>
+        </p:txBody>
+      </p:sp>
+      <p:sp>
+        <p:nvSpPr>
+          <p:cNvPr id="10" name="TextBox 9"/>
+          <p:cNvSpPr txBox="1"/>
+          <p:nvPr/>
+        </p:nvSpPr>
+        <p:spPr>
+          <a:xfrm>
+            <a:off x="5559552" y="1499616"/>
+            <a:ext cx="2542032" cy="457200"/>
+          </a:xfrm>
+          <a:prstGeom prst="rect">
+            <a:avLst/>
+          </a:prstGeom>
+          <a:noFill/>
+        </p:spPr>
+        <p:txBody>
+          <a:bodyPr wrap="square" lIns="0" rIns="0" tIns="0" bIns="0" anchor="ctr">
+            <a:spAutoFit/>
+          </a:bodyPr>
+          <a:lstStyle/>
+          <a:p>
+            <a:pPr algn="l">
+              <a:lnSpc>
+                <a:spcPct val="115000"/>
+              </a:lnSpc>
+            </a:pPr>
+            <a:r>
+              <a:rPr sz="1350" b="1" i="0">
+                <a:solidFill>
+                  <a:srgbClr val="FFFFFF"/>
+                </a:solidFill>
+                <a:latin typeface="Arial"/>
+              </a:rPr>
+              <a:t>Кто принимает решение</a:t>
+            </a:r>
+          </a:p>
+        </p:txBody>
+      </p:sp>
+      <p:sp>
+        <p:nvSpPr>
+          <p:cNvPr id="11" name="Rectangle 10"/>
+          <p:cNvSpPr/>
+          <p:nvPr/>
+        </p:nvSpPr>
+        <p:spPr>
+          <a:xfrm>
+            <a:off x="8174736" y="1499616"/>
+            <a:ext cx="3666744" cy="457200"/>
+          </a:xfrm>
+          <a:prstGeom prst="rect">
+            <a:avLst/>
+          </a:prstGeom>
+          <a:solidFill>
+            <a:srgbClr val="065A82"/>
+          </a:solidFill>
+          <a:ln>
+            <a:noFill/>
+          </a:ln>
+          <a:effectLst/>
+        </p:spPr>
+        <p:style>
+          <a:lnRef idx="1">
+            <a:schemeClr val="accent1"/>
+          </a:lnRef>
+          <a:fillRef idx="3">
+            <a:schemeClr val="accent1"/>
+          </a:fillRef>
+          <a:effectRef idx="2">
+            <a:schemeClr val="accent1"/>
+          </a:effectRef>
+          <a:fontRef idx="minor">
+            <a:schemeClr val="lt1"/>
+          </a:fontRef>
+        </p:style>
+        <p:txBody>
+          <a:bodyPr rtlCol="0" anchor="ctr"/>
+          <a:lstStyle/>
+          <a:p>
+            <a:pPr algn="ctr"/>
+          </a:p>
+        </p:txBody>
+      </p:sp>
+      <p:sp>
+        <p:nvSpPr>
+          <p:cNvPr id="12" name="TextBox 11"/>
+          <p:cNvSpPr txBox="1"/>
+          <p:nvPr/>
+        </p:nvSpPr>
+        <p:spPr>
+          <a:xfrm>
+            <a:off x="8284463" y="1499616"/>
+            <a:ext cx="3483863" cy="457200"/>
+          </a:xfrm>
+          <a:prstGeom prst="rect">
+            <a:avLst/>
+          </a:prstGeom>
+          <a:noFill/>
+        </p:spPr>
+        <p:txBody>
+          <a:bodyPr wrap="square" lIns="0" rIns="0" tIns="0" bIns="0" anchor="ctr">
+            <a:spAutoFit/>
+          </a:bodyPr>
+          <a:lstStyle/>
+          <a:p>
+            <a:pPr algn="l">
+              <a:lnSpc>
+                <a:spcPct val="115000"/>
+              </a:lnSpc>
+            </a:pPr>
+            <a:r>
+              <a:rPr sz="1350" b="1" i="0">
+                <a:solidFill>
+                  <a:srgbClr val="FFFFFF"/>
+                </a:solidFill>
+                <a:latin typeface="Arial"/>
+              </a:rPr>
+              <a:t>Живой пример</a:t>
+            </a:r>
+          </a:p>
+        </p:txBody>
+      </p:sp>
+      <p:sp>
+        <p:nvSpPr>
+          <p:cNvPr id="13" name="Rectangle 12"/>
+          <p:cNvSpPr/>
+          <p:nvPr/>
+        </p:nvSpPr>
+        <p:spPr>
+          <a:xfrm>
+            <a:off x="512064" y="1956815"/>
+            <a:ext cx="1938528" cy="859536"/>
           </a:xfrm>
           <a:prstGeom prst="rect">
             <a:avLst/>
@@ -28522,14 +28844,58 @@
       </p:sp>
       <p:sp>
         <p:nvSpPr>
-          <p:cNvPr id="10" name="TextBox 9"/>
-          <p:cNvSpPr txBox="1"/>
-          <p:nvPr/>
-        </p:nvSpPr>
-        <p:spPr>
-          <a:xfrm>
-            <a:off x="649224" y="1965960"/>
-            <a:ext cx="5257800" cy="694944"/>
+          <p:cNvPr id="14" name="Oval 13"/>
+          <p:cNvSpPr/>
+          <p:nvPr/>
+        </p:nvSpPr>
+        <p:spPr>
+          <a:xfrm>
+            <a:off x="658368" y="2130551"/>
+            <a:ext cx="512064" cy="512064"/>
+          </a:xfrm>
+          <a:prstGeom prst="ellipse">
+            <a:avLst/>
+          </a:prstGeom>
+          <a:solidFill>
+            <a:srgbClr val="1C7293"/>
+          </a:solidFill>
+          <a:ln>
+            <a:noFill/>
+          </a:ln>
+          <a:effectLst/>
+        </p:spPr>
+        <p:style>
+          <a:lnRef idx="1">
+            <a:schemeClr val="accent1"/>
+          </a:lnRef>
+          <a:fillRef idx="3">
+            <a:schemeClr val="accent1"/>
+          </a:fillRef>
+          <a:effectRef idx="2">
+            <a:schemeClr val="accent1"/>
+          </a:effectRef>
+          <a:fontRef idx="minor">
+            <a:schemeClr val="lt1"/>
+          </a:fontRef>
+        </p:style>
+        <p:txBody>
+          <a:bodyPr rtlCol="0" anchor="ctr"/>
+          <a:lstStyle/>
+          <a:p>
+            <a:pPr algn="ctr"/>
+          </a:p>
+        </p:txBody>
+      </p:sp>
+      <p:sp>
+        <p:nvSpPr>
+          <p:cNvPr id="15" name="TextBox 14"/>
+          <p:cNvSpPr txBox="1"/>
+          <p:nvPr/>
+        </p:nvSpPr>
+        <p:spPr>
+          <a:xfrm>
+            <a:off x="658368" y="2130551"/>
+            <a:ext cx="512064" cy="512064"/>
           </a:xfrm>
           <a:prstGeom prst="rect">
             <a:avLst/>
@@ -28542,33 +28908,72 @@
           </a:bodyPr>
           <a:lstStyle/>
           <a:p>
+            <a:pPr algn="ctr">
+              <a:lnSpc>
+                <a:spcPct val="115000"/>
+              </a:lnSpc>
+            </a:pPr>
+            <a:r>
+              <a:rPr sz="2600" b="1" i="0">
+                <a:solidFill>
+                  <a:srgbClr val="FFFFFF"/>
+                </a:solidFill>
+                <a:latin typeface="Arial"/>
+              </a:rPr>
+              <a:t>A</a:t>
+            </a:r>
+          </a:p>
+        </p:txBody>
+      </p:sp>
+      <p:sp>
+        <p:nvSpPr>
+          <p:cNvPr id="16" name="TextBox 15"/>
+          <p:cNvSpPr txBox="1"/>
+          <p:nvPr/>
+        </p:nvSpPr>
+        <p:spPr>
+          <a:xfrm>
+            <a:off x="1243584" y="1956815"/>
+            <a:ext cx="1170432" cy="859536"/>
+          </a:xfrm>
+          <a:prstGeom prst="rect">
+            <a:avLst/>
+          </a:prstGeom>
+          <a:noFill/>
+        </p:spPr>
+        <p:txBody>
+          <a:bodyPr wrap="square" lIns="0" rIns="0" tIns="0" bIns="0" anchor="ctr">
+            <a:spAutoFit/>
+          </a:bodyPr>
+          <a:lstStyle/>
+          <a:p>
             <a:pPr algn="l">
               <a:lnSpc>
-                <a:spcPct val="108000"/>
-              </a:lnSpc>
-            </a:pPr>
-            <a:r>
-              <a:rPr sz="1250" b="0" i="0">
+                <a:spcPct val="100000"/>
+              </a:lnSpc>
+            </a:pPr>
+            <a:r>
+              <a:rPr sz="1100" b="1" i="0">
                 <a:solidFill>
                   <a:srgbClr val="21295C"/>
                 </a:solidFill>
                 <a:latin typeface="Arial"/>
               </a:rPr>
-              <a:t>Лестница сложности: оставайся на нижней ступени, поднимайся под требование</a:t>
-            </a:r>
-          </a:p>
-        </p:txBody>
-      </p:sp>
-      <p:sp>
-        <p:nvSpPr>
-          <p:cNvPr id="11" name="Rectangle 10"/>
+              <a:t>автодополнение</a:t>
+            </a:r>
+          </a:p>
+        </p:txBody>
+      </p:sp>
+      <p:sp>
+        <p:nvSpPr>
+          <p:cNvPr id="17" name="Rectangle 16"/>
           <p:cNvSpPr/>
           <p:nvPr/>
         </p:nvSpPr>
         <p:spPr>
           <a:xfrm>
-            <a:off x="6035040" y="1920240"/>
-            <a:ext cx="5623560" cy="786384"/>
+            <a:off x="2450592" y="1956815"/>
+            <a:ext cx="2999232" cy="859536"/>
           </a:xfrm>
           <a:prstGeom prst="rect">
             <a:avLst/>
@@ -28607,14 +29012,14 @@
       </p:sp>
       <p:sp>
         <p:nvSpPr>
-          <p:cNvPr id="12" name="TextBox 11"/>
-          <p:cNvSpPr txBox="1"/>
-          <p:nvPr/>
-        </p:nvSpPr>
-        <p:spPr>
-          <a:xfrm>
-            <a:off x="6181344" y="1965960"/>
-            <a:ext cx="5349240" cy="694944"/>
+          <p:cNvPr id="18" name="TextBox 17"/>
+          <p:cNvSpPr txBox="1"/>
+          <p:nvPr/>
+        </p:nvSpPr>
+        <p:spPr>
+          <a:xfrm>
+            <a:off x="2596896" y="1993391"/>
+            <a:ext cx="2724912" cy="786384"/>
           </a:xfrm>
           <a:prstGeom prst="rect">
             <a:avLst/>
@@ -28629,31 +29034,201 @@
           <a:p>
             <a:pPr algn="l">
               <a:lnSpc>
-                <a:spcPct val="108000"/>
-              </a:lnSpc>
-            </a:pPr>
-            <a:r>
-              <a:rPr sz="1250" b="0" i="0">
+                <a:spcPct val="110000"/>
+              </a:lnSpc>
+            </a:pPr>
+            <a:r>
+              <a:rPr sz="1200" b="0" i="0">
                 <a:solidFill>
                   <a:srgbClr val="21295C"/>
                 </a:solidFill>
                 <a:latin typeface="Arial"/>
               </a:rPr>
-              <a:t>Лестница автономности A→D — та же лестница, та же логика подъёма</a:t>
-            </a:r>
-          </a:p>
-        </p:txBody>
-      </p:sp>
-      <p:sp>
-        <p:nvSpPr>
-          <p:cNvPr id="13" name="Rectangle 12"/>
+              <a:t>дописывает строку или блок прямо в потоке набора</a:t>
+            </a:r>
+          </a:p>
+        </p:txBody>
+      </p:sp>
+      <p:sp>
+        <p:nvSpPr>
+          <p:cNvPr id="19" name="Rectangle 18"/>
           <p:cNvSpPr/>
           <p:nvPr/>
         </p:nvSpPr>
         <p:spPr>
           <a:xfrm>
-            <a:off x="502920" y="2706624"/>
-            <a:ext cx="5532120" cy="786384"/>
+            <a:off x="5449824" y="1956815"/>
+            <a:ext cx="2724912" cy="859536"/>
+          </a:xfrm>
+          <a:prstGeom prst="rect">
+            <a:avLst/>
+          </a:prstGeom>
+          <a:solidFill>
+            <a:srgbClr val="FFFFFF"/>
+          </a:solidFill>
+          <a:ln w="9525">
+            <a:solidFill>
+              <a:srgbClr val="E5EAF0"/>
+            </a:solidFill>
+          </a:ln>
+          <a:effectLst/>
+        </p:spPr>
+        <p:style>
+          <a:lnRef idx="1">
+            <a:schemeClr val="accent1"/>
+          </a:lnRef>
+          <a:fillRef idx="3">
+            <a:schemeClr val="accent1"/>
+          </a:fillRef>
+          <a:effectRef idx="2">
+            <a:schemeClr val="accent1"/>
+          </a:effectRef>
+          <a:fontRef idx="minor">
+            <a:schemeClr val="lt1"/>
+          </a:fontRef>
+        </p:style>
+        <p:txBody>
+          <a:bodyPr rtlCol="0" anchor="ctr"/>
+          <a:lstStyle/>
+          <a:p>
+            <a:pPr algn="ctr"/>
+          </a:p>
+        </p:txBody>
+      </p:sp>
+      <p:sp>
+        <p:nvSpPr>
+          <p:cNvPr id="20" name="TextBox 19"/>
+          <p:cNvSpPr txBox="1"/>
+          <p:nvPr/>
+        </p:nvSpPr>
+        <p:spPr>
+          <a:xfrm>
+            <a:off x="5596128" y="1993391"/>
+            <a:ext cx="2450592" cy="786384"/>
+          </a:xfrm>
+          <a:prstGeom prst="rect">
+            <a:avLst/>
+          </a:prstGeom>
+          <a:noFill/>
+        </p:spPr>
+        <p:txBody>
+          <a:bodyPr wrap="square" lIns="0" rIns="0" tIns="0" bIns="0" anchor="ctr">
+            <a:spAutoFit/>
+          </a:bodyPr>
+          <a:lstStyle/>
+          <a:p>
+            <a:pPr algn="l">
+              <a:lnSpc>
+                <a:spcPct val="110000"/>
+              </a:lnSpc>
+            </a:pPr>
+            <a:r>
+              <a:rPr sz="1200" b="0" i="0">
+                <a:solidFill>
+                  <a:srgbClr val="21295C"/>
+                </a:solidFill>
+                <a:latin typeface="Arial"/>
+              </a:rPr>
+              <a:t>человек — на каждом нажатии Tab</a:t>
+            </a:r>
+          </a:p>
+        </p:txBody>
+      </p:sp>
+      <p:sp>
+        <p:nvSpPr>
+          <p:cNvPr id="21" name="Rectangle 20"/>
+          <p:cNvSpPr/>
+          <p:nvPr/>
+        </p:nvSpPr>
+        <p:spPr>
+          <a:xfrm>
+            <a:off x="8174736" y="1956815"/>
+            <a:ext cx="3666744" cy="859536"/>
+          </a:xfrm>
+          <a:prstGeom prst="rect">
+            <a:avLst/>
+          </a:prstGeom>
+          <a:solidFill>
+            <a:srgbClr val="FFFFFF"/>
+          </a:solidFill>
+          <a:ln w="9525">
+            <a:solidFill>
+              <a:srgbClr val="E5EAF0"/>
+            </a:solidFill>
+          </a:ln>
+          <a:effectLst/>
+        </p:spPr>
+        <p:style>
+          <a:lnRef idx="1">
+            <a:schemeClr val="accent1"/>
+          </a:lnRef>
+          <a:fillRef idx="3">
+            <a:schemeClr val="accent1"/>
+          </a:fillRef>
+          <a:effectRef idx="2">
+            <a:schemeClr val="accent1"/>
+          </a:effectRef>
+          <a:fontRef idx="minor">
+            <a:schemeClr val="lt1"/>
+          </a:fontRef>
+        </p:style>
+        <p:txBody>
+          <a:bodyPr rtlCol="0" anchor="ctr"/>
+          <a:lstStyle/>
+          <a:p>
+            <a:pPr algn="ctr"/>
+          </a:p>
+        </p:txBody>
+      </p:sp>
+      <p:sp>
+        <p:nvSpPr>
+          <p:cNvPr id="22" name="TextBox 21"/>
+          <p:cNvSpPr txBox="1"/>
+          <p:nvPr/>
+        </p:nvSpPr>
+        <p:spPr>
+          <a:xfrm>
+            <a:off x="8321040" y="1993391"/>
+            <a:ext cx="3392424" cy="786384"/>
+          </a:xfrm>
+          <a:prstGeom prst="rect">
+            <a:avLst/>
+          </a:prstGeom>
+          <a:noFill/>
+        </p:spPr>
+        <p:txBody>
+          <a:bodyPr wrap="square" lIns="0" rIns="0" tIns="0" bIns="0" anchor="ctr">
+            <a:spAutoFit/>
+          </a:bodyPr>
+          <a:lstStyle/>
+          <a:p>
+            <a:pPr algn="l">
+              <a:lnSpc>
+                <a:spcPct val="110000"/>
+              </a:lnSpc>
+            </a:pPr>
+            <a:r>
+              <a:rPr sz="1200" b="0" i="0">
+                <a:solidFill>
+                  <a:srgbClr val="21295C"/>
+                </a:solidFill>
+                <a:latin typeface="Arial"/>
+              </a:rPr>
+              <a:t>Copilot подсказал хвост строки — нажал Tab, читая</a:t>
+            </a:r>
+          </a:p>
+        </p:txBody>
+      </p:sp>
+      <p:sp>
+        <p:nvSpPr>
+          <p:cNvPr id="23" name="Rectangle 22"/>
+          <p:cNvSpPr/>
+          <p:nvPr/>
+        </p:nvSpPr>
+        <p:spPr>
+          <a:xfrm>
+            <a:off x="512064" y="2816351"/>
+            <a:ext cx="1938528" cy="859536"/>
           </a:xfrm>
           <a:prstGeom prst="rect">
             <a:avLst/>
@@ -28692,14 +29267,58 @@
       </p:sp>
       <p:sp>
         <p:nvSpPr>
-          <p:cNvPr id="14" name="TextBox 13"/>
-          <p:cNvSpPr txBox="1"/>
-          <p:nvPr/>
-        </p:nvSpPr>
-        <p:spPr>
-          <a:xfrm>
-            <a:off x="649224" y="2752344"/>
-            <a:ext cx="5257800" cy="694944"/>
+          <p:cNvPr id="24" name="Oval 23"/>
+          <p:cNvSpPr/>
+          <p:nvPr/>
+        </p:nvSpPr>
+        <p:spPr>
+          <a:xfrm>
+            <a:off x="658368" y="2990087"/>
+            <a:ext cx="512064" cy="512064"/>
+          </a:xfrm>
+          <a:prstGeom prst="ellipse">
+            <a:avLst/>
+          </a:prstGeom>
+          <a:solidFill>
+            <a:srgbClr val="065A82"/>
+          </a:solidFill>
+          <a:ln>
+            <a:noFill/>
+          </a:ln>
+          <a:effectLst/>
+        </p:spPr>
+        <p:style>
+          <a:lnRef idx="1">
+            <a:schemeClr val="accent1"/>
+          </a:lnRef>
+          <a:fillRef idx="3">
+            <a:schemeClr val="accent1"/>
+          </a:fillRef>
+          <a:effectRef idx="2">
+            <a:schemeClr val="accent1"/>
+          </a:effectRef>
+          <a:fontRef idx="minor">
+            <a:schemeClr val="lt1"/>
+          </a:fontRef>
+        </p:style>
+        <p:txBody>
+          <a:bodyPr rtlCol="0" anchor="ctr"/>
+          <a:lstStyle/>
+          <a:p>
+            <a:pPr algn="ctr"/>
+          </a:p>
+        </p:txBody>
+      </p:sp>
+      <p:sp>
+        <p:nvSpPr>
+          <p:cNvPr id="25" name="TextBox 24"/>
+          <p:cNvSpPr txBox="1"/>
+          <p:nvPr/>
+        </p:nvSpPr>
+        <p:spPr>
+          <a:xfrm>
+            <a:off x="658368" y="2990087"/>
+            <a:ext cx="512064" cy="512064"/>
           </a:xfrm>
           <a:prstGeom prst="rect">
             <a:avLst/>
@@ -28712,33 +29331,72 @@
           </a:bodyPr>
           <a:lstStyle/>
           <a:p>
+            <a:pPr algn="ctr">
+              <a:lnSpc>
+                <a:spcPct val="115000"/>
+              </a:lnSpc>
+            </a:pPr>
+            <a:r>
+              <a:rPr sz="2600" b="1" i="0">
+                <a:solidFill>
+                  <a:srgbClr val="FFFFFF"/>
+                </a:solidFill>
+                <a:latin typeface="Arial"/>
+              </a:rPr>
+              <a:t>B</a:t>
+            </a:r>
+          </a:p>
+        </p:txBody>
+      </p:sp>
+      <p:sp>
+        <p:nvSpPr>
+          <p:cNvPr id="26" name="TextBox 25"/>
+          <p:cNvSpPr txBox="1"/>
+          <p:nvPr/>
+        </p:nvSpPr>
+        <p:spPr>
+          <a:xfrm>
+            <a:off x="1243584" y="2816351"/>
+            <a:ext cx="1170432" cy="859536"/>
+          </a:xfrm>
+          <a:prstGeom prst="rect">
+            <a:avLst/>
+          </a:prstGeom>
+          <a:noFill/>
+        </p:spPr>
+        <p:txBody>
+          <a:bodyPr wrap="square" lIns="0" rIns="0" tIns="0" bIns="0" anchor="ctr">
+            <a:spAutoFit/>
+          </a:bodyPr>
+          <a:lstStyle/>
+          <a:p>
             <a:pPr algn="l">
               <a:lnSpc>
-                <a:spcPct val="108000"/>
-              </a:lnSpc>
-            </a:pPr>
-            <a:r>
-              <a:rPr sz="1250" b="0" i="0">
+                <a:spcPct val="100000"/>
+              </a:lnSpc>
+            </a:pPr>
+            <a:r>
+              <a:rPr sz="1100" b="1" i="0">
                 <a:solidFill>
                   <a:srgbClr val="21295C"/>
                 </a:solidFill>
                 <a:latin typeface="Arial"/>
               </a:rPr>
-              <a:t>«Когда не ИИ вовсе»: детерминированное → обычный код</a:t>
-            </a:r>
-          </a:p>
-        </p:txBody>
-      </p:sp>
-      <p:sp>
-        <p:nvSpPr>
-          <p:cNvPr id="15" name="Rectangle 14"/>
+              <a:t>мелкие задачи</a:t>
+            </a:r>
+          </a:p>
+        </p:txBody>
+      </p:sp>
+      <p:sp>
+        <p:nvSpPr>
+          <p:cNvPr id="27" name="Rectangle 26"/>
           <p:cNvSpPr/>
           <p:nvPr/>
         </p:nvSpPr>
         <p:spPr>
           <a:xfrm>
-            <a:off x="6035040" y="2706624"/>
-            <a:ext cx="5623560" cy="786384"/>
+            <a:off x="2450592" y="2816351"/>
+            <a:ext cx="2999232" cy="859536"/>
           </a:xfrm>
           <a:prstGeom prst="rect">
             <a:avLst/>
@@ -28777,14 +29435,14 @@
       </p:sp>
       <p:sp>
         <p:nvSpPr>
-          <p:cNvPr id="16" name="TextBox 15"/>
-          <p:cNvSpPr txBox="1"/>
-          <p:nvPr/>
-        </p:nvSpPr>
-        <p:spPr>
-          <a:xfrm>
-            <a:off x="6181344" y="2752344"/>
-            <a:ext cx="5349240" cy="694944"/>
+          <p:cNvPr id="28" name="TextBox 27"/>
+          <p:cNvSpPr txBox="1"/>
+          <p:nvPr/>
+        </p:nvSpPr>
+        <p:spPr>
+          <a:xfrm>
+            <a:off x="2596896" y="2852927"/>
+            <a:ext cx="2724912" cy="786384"/>
           </a:xfrm>
           <a:prstGeom prst="rect">
             <a:avLst/>
@@ -28799,31 +29457,201 @@
           <a:p>
             <a:pPr algn="l">
               <a:lnSpc>
-                <a:spcPct val="108000"/>
-              </a:lnSpc>
-            </a:pPr>
-            <a:r>
-              <a:rPr sz="1250" b="0" i="0">
+                <a:spcPct val="110000"/>
+              </a:lnSpc>
+            </a:pPr>
+            <a:r>
+              <a:rPr sz="1200" b="0" i="0">
                 <a:solidFill>
                   <a:srgbClr val="21295C"/>
                 </a:solidFill>
                 <a:latin typeface="Arial"/>
               </a:rPr>
-              <a:t>Критерий «не AI» применяем в каждом разделе</a:t>
-            </a:r>
-          </a:p>
-        </p:txBody>
-      </p:sp>
-      <p:sp>
-        <p:nvSpPr>
-          <p:cNvPr id="17" name="Rectangle 16"/>
+              <a:t>пишет функцию или фикс по запросу в чате/inline</a:t>
+            </a:r>
+          </a:p>
+        </p:txBody>
+      </p:sp>
+      <p:sp>
+        <p:nvSpPr>
+          <p:cNvPr id="29" name="Rectangle 28"/>
           <p:cNvSpPr/>
           <p:nvPr/>
         </p:nvSpPr>
         <p:spPr>
           <a:xfrm>
-            <a:off x="502920" y="3493008"/>
-            <a:ext cx="5532120" cy="786384"/>
+            <a:off x="5449824" y="2816351"/>
+            <a:ext cx="2724912" cy="859536"/>
+          </a:xfrm>
+          <a:prstGeom prst="rect">
+            <a:avLst/>
+          </a:prstGeom>
+          <a:solidFill>
+            <a:srgbClr val="F4F7FA"/>
+          </a:solidFill>
+          <a:ln w="9525">
+            <a:solidFill>
+              <a:srgbClr val="E5EAF0"/>
+            </a:solidFill>
+          </a:ln>
+          <a:effectLst/>
+        </p:spPr>
+        <p:style>
+          <a:lnRef idx="1">
+            <a:schemeClr val="accent1"/>
+          </a:lnRef>
+          <a:fillRef idx="3">
+            <a:schemeClr val="accent1"/>
+          </a:fillRef>
+          <a:effectRef idx="2">
+            <a:schemeClr val="accent1"/>
+          </a:effectRef>
+          <a:fontRef idx="minor">
+            <a:schemeClr val="lt1"/>
+          </a:fontRef>
+        </p:style>
+        <p:txBody>
+          <a:bodyPr rtlCol="0" anchor="ctr"/>
+          <a:lstStyle/>
+          <a:p>
+            <a:pPr algn="ctr"/>
+          </a:p>
+        </p:txBody>
+      </p:sp>
+      <p:sp>
+        <p:nvSpPr>
+          <p:cNvPr id="30" name="TextBox 29"/>
+          <p:cNvSpPr txBox="1"/>
+          <p:nvPr/>
+        </p:nvSpPr>
+        <p:spPr>
+          <a:xfrm>
+            <a:off x="5596128" y="2852927"/>
+            <a:ext cx="2450592" cy="786384"/>
+          </a:xfrm>
+          <a:prstGeom prst="rect">
+            <a:avLst/>
+          </a:prstGeom>
+          <a:noFill/>
+        </p:spPr>
+        <p:txBody>
+          <a:bodyPr wrap="square" lIns="0" rIns="0" tIns="0" bIns="0" anchor="ctr">
+            <a:spAutoFit/>
+          </a:bodyPr>
+          <a:lstStyle/>
+          <a:p>
+            <a:pPr algn="l">
+              <a:lnSpc>
+                <a:spcPct val="110000"/>
+              </a:lnSpc>
+            </a:pPr>
+            <a:r>
+              <a:rPr sz="1200" b="0" i="0">
+                <a:solidFill>
+                  <a:srgbClr val="21295C"/>
+                </a:solidFill>
+                <a:latin typeface="Arial"/>
+              </a:rPr>
+              <a:t>человек ставит задачу и ревьюит результат</a:t>
+            </a:r>
+          </a:p>
+        </p:txBody>
+      </p:sp>
+      <p:sp>
+        <p:nvSpPr>
+          <p:cNvPr id="31" name="Rectangle 30"/>
+          <p:cNvSpPr/>
+          <p:nvPr/>
+        </p:nvSpPr>
+        <p:spPr>
+          <a:xfrm>
+            <a:off x="8174736" y="2816351"/>
+            <a:ext cx="3666744" cy="859536"/>
+          </a:xfrm>
+          <a:prstGeom prst="rect">
+            <a:avLst/>
+          </a:prstGeom>
+          <a:solidFill>
+            <a:srgbClr val="F4F7FA"/>
+          </a:solidFill>
+          <a:ln w="9525">
+            <a:solidFill>
+              <a:srgbClr val="E5EAF0"/>
+            </a:solidFill>
+          </a:ln>
+          <a:effectLst/>
+        </p:spPr>
+        <p:style>
+          <a:lnRef idx="1">
+            <a:schemeClr val="accent1"/>
+          </a:lnRef>
+          <a:fillRef idx="3">
+            <a:schemeClr val="accent1"/>
+          </a:fillRef>
+          <a:effectRef idx="2">
+            <a:schemeClr val="accent1"/>
+          </a:effectRef>
+          <a:fontRef idx="minor">
+            <a:schemeClr val="lt1"/>
+          </a:fontRef>
+        </p:style>
+        <p:txBody>
+          <a:bodyPr rtlCol="0" anchor="ctr"/>
+          <a:lstStyle/>
+          <a:p>
+            <a:pPr algn="ctr"/>
+          </a:p>
+        </p:txBody>
+      </p:sp>
+      <p:sp>
+        <p:nvSpPr>
+          <p:cNvPr id="32" name="TextBox 31"/>
+          <p:cNvSpPr txBox="1"/>
+          <p:nvPr/>
+        </p:nvSpPr>
+        <p:spPr>
+          <a:xfrm>
+            <a:off x="8321040" y="2852927"/>
+            <a:ext cx="3392424" cy="786384"/>
+          </a:xfrm>
+          <a:prstGeom prst="rect">
+            <a:avLst/>
+          </a:prstGeom>
+          <a:noFill/>
+        </p:spPr>
+        <p:txBody>
+          <a:bodyPr wrap="square" lIns="0" rIns="0" tIns="0" bIns="0" anchor="ctr">
+            <a:spAutoFit/>
+          </a:bodyPr>
+          <a:lstStyle/>
+          <a:p>
+            <a:pPr algn="l">
+              <a:lnSpc>
+                <a:spcPct val="110000"/>
+              </a:lnSpc>
+            </a:pPr>
+            <a:r>
+              <a:rPr sz="1200" b="0" i="0">
+                <a:solidFill>
+                  <a:srgbClr val="21295C"/>
+                </a:solidFill>
+                <a:latin typeface="Arial"/>
+              </a:rPr>
+              <a:t>«напиши парсер CSV» в чате — вставил, проверил</a:t>
+            </a:r>
+          </a:p>
+        </p:txBody>
+      </p:sp>
+      <p:sp>
+        <p:nvSpPr>
+          <p:cNvPr id="33" name="Rectangle 32"/>
+          <p:cNvSpPr/>
+          <p:nvPr/>
+        </p:nvSpPr>
+        <p:spPr>
+          <a:xfrm>
+            <a:off x="512064" y="3675887"/>
+            <a:ext cx="1938528" cy="859536"/>
           </a:xfrm>
           <a:prstGeom prst="rect">
             <a:avLst/>
@@ -28862,14 +29690,58 @@
       </p:sp>
       <p:sp>
         <p:nvSpPr>
-          <p:cNvPr id="18" name="TextBox 17"/>
-          <p:cNvSpPr txBox="1"/>
-          <p:nvPr/>
-        </p:nvSpPr>
-        <p:spPr>
-          <a:xfrm>
-            <a:off x="649224" y="3538727"/>
-            <a:ext cx="5257800" cy="694944"/>
+          <p:cNvPr id="34" name="Oval 33"/>
+          <p:cNvSpPr/>
+          <p:nvPr/>
+        </p:nvSpPr>
+        <p:spPr>
+          <a:xfrm>
+            <a:off x="658368" y="3849623"/>
+            <a:ext cx="512064" cy="512064"/>
+          </a:xfrm>
+          <a:prstGeom prst="ellipse">
+            <a:avLst/>
+          </a:prstGeom>
+          <a:solidFill>
+            <a:srgbClr val="21295C"/>
+          </a:solidFill>
+          <a:ln>
+            <a:noFill/>
+          </a:ln>
+          <a:effectLst/>
+        </p:spPr>
+        <p:style>
+          <a:lnRef idx="1">
+            <a:schemeClr val="accent1"/>
+          </a:lnRef>
+          <a:fillRef idx="3">
+            <a:schemeClr val="accent1"/>
+          </a:fillRef>
+          <a:effectRef idx="2">
+            <a:schemeClr val="accent1"/>
+          </a:effectRef>
+          <a:fontRef idx="minor">
+            <a:schemeClr val="lt1"/>
+          </a:fontRef>
+        </p:style>
+        <p:txBody>
+          <a:bodyPr rtlCol="0" anchor="ctr"/>
+          <a:lstStyle/>
+          <a:p>
+            <a:pPr algn="ctr"/>
+          </a:p>
+        </p:txBody>
+      </p:sp>
+      <p:sp>
+        <p:nvSpPr>
+          <p:cNvPr id="35" name="TextBox 34"/>
+          <p:cNvSpPr txBox="1"/>
+          <p:nvPr/>
+        </p:nvSpPr>
+        <p:spPr>
+          <a:xfrm>
+            <a:off x="658368" y="3849623"/>
+            <a:ext cx="512064" cy="512064"/>
           </a:xfrm>
           <a:prstGeom prst="rect">
             <a:avLst/>
@@ -28882,33 +29754,72 @@
           </a:bodyPr>
           <a:lstStyle/>
           <a:p>
+            <a:pPr algn="ctr">
+              <a:lnSpc>
+                <a:spcPct val="115000"/>
+              </a:lnSpc>
+            </a:pPr>
+            <a:r>
+              <a:rPr sz="2600" b="1" i="0">
+                <a:solidFill>
+                  <a:srgbClr val="FFFFFF"/>
+                </a:solidFill>
+                <a:latin typeface="Arial"/>
+              </a:rPr>
+              <a:t>C</a:t>
+            </a:r>
+          </a:p>
+        </p:txBody>
+      </p:sp>
+      <p:sp>
+        <p:nvSpPr>
+          <p:cNvPr id="36" name="TextBox 35"/>
+          <p:cNvSpPr txBox="1"/>
+          <p:nvPr/>
+        </p:nvSpPr>
+        <p:spPr>
+          <a:xfrm>
+            <a:off x="1243584" y="3675887"/>
+            <a:ext cx="1170432" cy="859536"/>
+          </a:xfrm>
+          <a:prstGeom prst="rect">
+            <a:avLst/>
+          </a:prstGeom>
+          <a:noFill/>
+        </p:spPr>
+        <p:txBody>
+          <a:bodyPr wrap="square" lIns="0" rIns="0" tIns="0" bIns="0" anchor="ctr">
+            <a:spAutoFit/>
+          </a:bodyPr>
+          <a:lstStyle/>
+          <a:p>
             <a:pPr algn="l">
               <a:lnSpc>
-                <a:spcPct val="108000"/>
-              </a:lnSpc>
-            </a:pPr>
-            <a:r>
-              <a:rPr sz="1250" b="0" i="0">
+                <a:spcPct val="100000"/>
+              </a:lnSpc>
+            </a:pPr>
+            <a:r>
+              <a:rPr sz="1100" b="1" i="0">
                 <a:solidFill>
                   <a:srgbClr val="21295C"/>
                 </a:solidFill>
                 <a:latin typeface="Arial"/>
               </a:rPr>
-              <a:t>Цикл агента: планируй → делай → проверяй → повторяй</a:t>
-            </a:r>
-          </a:p>
-        </p:txBody>
-      </p:sp>
-      <p:sp>
-        <p:nvSpPr>
-          <p:cNvPr id="19" name="Rectangle 18"/>
+              <a:t>кодинг-агент</a:t>
+            </a:r>
+          </a:p>
+        </p:txBody>
+      </p:sp>
+      <p:sp>
+        <p:nvSpPr>
+          <p:cNvPr id="37" name="Rectangle 36"/>
           <p:cNvSpPr/>
           <p:nvPr/>
         </p:nvSpPr>
         <p:spPr>
           <a:xfrm>
-            <a:off x="6035040" y="3493008"/>
-            <a:ext cx="5623560" cy="786384"/>
+            <a:off x="2450592" y="3675887"/>
+            <a:ext cx="2999232" cy="859536"/>
           </a:xfrm>
           <a:prstGeom prst="rect">
             <a:avLst/>
@@ -28947,14 +29858,14 @@
       </p:sp>
       <p:sp>
         <p:nvSpPr>
-          <p:cNvPr id="20" name="TextBox 19"/>
-          <p:cNvSpPr txBox="1"/>
-          <p:nvPr/>
-        </p:nvSpPr>
-        <p:spPr>
-          <a:xfrm>
-            <a:off x="6181344" y="3538727"/>
-            <a:ext cx="5349240" cy="694944"/>
+          <p:cNvPr id="38" name="TextBox 37"/>
+          <p:cNvSpPr txBox="1"/>
+          <p:nvPr/>
+        </p:nvSpPr>
+        <p:spPr>
+          <a:xfrm>
+            <a:off x="2596896" y="3712463"/>
+            <a:ext cx="2724912" cy="786384"/>
           </a:xfrm>
           <a:prstGeom prst="rect">
             <a:avLst/>
@@ -28969,31 +29880,201 @@
           <a:p>
             <a:pPr algn="l">
               <a:lnSpc>
-                <a:spcPct val="108000"/>
-              </a:lnSpc>
-            </a:pPr>
-            <a:r>
-              <a:rPr sz="1250" b="0" i="0">
+                <a:spcPct val="110000"/>
+              </a:lnSpc>
+            </a:pPr>
+            <a:r>
+              <a:rPr sz="1200" b="0" i="0">
                 <a:solidFill>
                   <a:srgbClr val="21295C"/>
                 </a:solidFill>
                 <a:latin typeface="Arial"/>
               </a:rPr>
-              <a:t>Кодинг-агент (уровень C) = ровно этот цикл, применённый к коду</a:t>
-            </a:r>
-          </a:p>
-        </p:txBody>
-      </p:sp>
-      <p:sp>
-        <p:nvSpPr>
-          <p:cNvPr id="21" name="Rectangle 20"/>
+              <a:t>берёт многофайловую задачу, сам гоняет тесты, итерирует</a:t>
+            </a:r>
+          </a:p>
+        </p:txBody>
+      </p:sp>
+      <p:sp>
+        <p:nvSpPr>
+          <p:cNvPr id="39" name="Rectangle 38"/>
           <p:cNvSpPr/>
           <p:nvPr/>
         </p:nvSpPr>
         <p:spPr>
           <a:xfrm>
-            <a:off x="502920" y="4279392"/>
-            <a:ext cx="5532120" cy="786384"/>
+            <a:off x="5449824" y="3675887"/>
+            <a:ext cx="2724912" cy="859536"/>
+          </a:xfrm>
+          <a:prstGeom prst="rect">
+            <a:avLst/>
+          </a:prstGeom>
+          <a:solidFill>
+            <a:srgbClr val="FFFFFF"/>
+          </a:solidFill>
+          <a:ln w="9525">
+            <a:solidFill>
+              <a:srgbClr val="E5EAF0"/>
+            </a:solidFill>
+          </a:ln>
+          <a:effectLst/>
+        </p:spPr>
+        <p:style>
+          <a:lnRef idx="1">
+            <a:schemeClr val="accent1"/>
+          </a:lnRef>
+          <a:fillRef idx="3">
+            <a:schemeClr val="accent1"/>
+          </a:fillRef>
+          <a:effectRef idx="2">
+            <a:schemeClr val="accent1"/>
+          </a:effectRef>
+          <a:fontRef idx="minor">
+            <a:schemeClr val="lt1"/>
+          </a:fontRef>
+        </p:style>
+        <p:txBody>
+          <a:bodyPr rtlCol="0" anchor="ctr"/>
+          <a:lstStyle/>
+          <a:p>
+            <a:pPr algn="ctr"/>
+          </a:p>
+        </p:txBody>
+      </p:sp>
+      <p:sp>
+        <p:nvSpPr>
+          <p:cNvPr id="40" name="TextBox 39"/>
+          <p:cNvSpPr txBox="1"/>
+          <p:nvPr/>
+        </p:nvSpPr>
+        <p:spPr>
+          <a:xfrm>
+            <a:off x="5596128" y="3712463"/>
+            <a:ext cx="2450592" cy="786384"/>
+          </a:xfrm>
+          <a:prstGeom prst="rect">
+            <a:avLst/>
+          </a:prstGeom>
+          <a:noFill/>
+        </p:spPr>
+        <p:txBody>
+          <a:bodyPr wrap="square" lIns="0" rIns="0" tIns="0" bIns="0" anchor="ctr">
+            <a:spAutoFit/>
+          </a:bodyPr>
+          <a:lstStyle/>
+          <a:p>
+            <a:pPr algn="l">
+              <a:lnSpc>
+                <a:spcPct val="110000"/>
+              </a:lnSpc>
+            </a:pPr>
+            <a:r>
+              <a:rPr sz="1200" b="0" i="0">
+                <a:solidFill>
+                  <a:srgbClr val="21295C"/>
+                </a:solidFill>
+                <a:latin typeface="Arial"/>
+              </a:rPr>
+              <a:t>человек ревьюит pull request и решает о слиянии</a:t>
+            </a:r>
+          </a:p>
+        </p:txBody>
+      </p:sp>
+      <p:sp>
+        <p:nvSpPr>
+          <p:cNvPr id="41" name="Rectangle 40"/>
+          <p:cNvSpPr/>
+          <p:nvPr/>
+        </p:nvSpPr>
+        <p:spPr>
+          <a:xfrm>
+            <a:off x="8174736" y="3675887"/>
+            <a:ext cx="3666744" cy="859536"/>
+          </a:xfrm>
+          <a:prstGeom prst="rect">
+            <a:avLst/>
+          </a:prstGeom>
+          <a:solidFill>
+            <a:srgbClr val="FFFFFF"/>
+          </a:solidFill>
+          <a:ln w="9525">
+            <a:solidFill>
+              <a:srgbClr val="E5EAF0"/>
+            </a:solidFill>
+          </a:ln>
+          <a:effectLst/>
+        </p:spPr>
+        <p:style>
+          <a:lnRef idx="1">
+            <a:schemeClr val="accent1"/>
+          </a:lnRef>
+          <a:fillRef idx="3">
+            <a:schemeClr val="accent1"/>
+          </a:fillRef>
+          <a:effectRef idx="2">
+            <a:schemeClr val="accent1"/>
+          </a:effectRef>
+          <a:fontRef idx="minor">
+            <a:schemeClr val="lt1"/>
+          </a:fontRef>
+        </p:style>
+        <p:txBody>
+          <a:bodyPr rtlCol="0" anchor="ctr"/>
+          <a:lstStyle/>
+          <a:p>
+            <a:pPr algn="ctr"/>
+          </a:p>
+        </p:txBody>
+      </p:sp>
+      <p:sp>
+        <p:nvSpPr>
+          <p:cNvPr id="42" name="TextBox 41"/>
+          <p:cNvSpPr txBox="1"/>
+          <p:nvPr/>
+        </p:nvSpPr>
+        <p:spPr>
+          <a:xfrm>
+            <a:off x="8321040" y="3712463"/>
+            <a:ext cx="3392424" cy="786384"/>
+          </a:xfrm>
+          <a:prstGeom prst="rect">
+            <a:avLst/>
+          </a:prstGeom>
+          <a:noFill/>
+        </p:spPr>
+        <p:txBody>
+          <a:bodyPr wrap="square" lIns="0" rIns="0" tIns="0" bIns="0" anchor="ctr">
+            <a:spAutoFit/>
+          </a:bodyPr>
+          <a:lstStyle/>
+          <a:p>
+            <a:pPr algn="l">
+              <a:lnSpc>
+                <a:spcPct val="110000"/>
+              </a:lnSpc>
+            </a:pPr>
+            <a:r>
+              <a:rPr sz="1200" b="0" i="0">
+                <a:solidFill>
+                  <a:srgbClr val="21295C"/>
+                </a:solidFill>
+                <a:latin typeface="Arial"/>
+              </a:rPr>
+              <a:t>«реализуй фичу X» — агент правит 5 файлов + тесты</a:t>
+            </a:r>
+          </a:p>
+        </p:txBody>
+      </p:sp>
+      <p:sp>
+        <p:nvSpPr>
+          <p:cNvPr id="43" name="Rectangle 42"/>
+          <p:cNvSpPr/>
+          <p:nvPr/>
+        </p:nvSpPr>
+        <p:spPr>
+          <a:xfrm>
+            <a:off x="512064" y="4535423"/>
+            <a:ext cx="1938528" cy="859536"/>
           </a:xfrm>
           <a:prstGeom prst="rect">
             <a:avLst/>
@@ -29032,14 +30113,102 @@
       </p:sp>
       <p:sp>
         <p:nvSpPr>
-          <p:cNvPr id="22" name="TextBox 21"/>
-          <p:cNvSpPr txBox="1"/>
-          <p:nvPr/>
-        </p:nvSpPr>
-        <p:spPr>
-          <a:xfrm>
-            <a:off x="649224" y="4325112"/>
-            <a:ext cx="5257800" cy="694944"/>
+          <p:cNvPr id="44" name="Oval 43"/>
+          <p:cNvSpPr/>
+          <p:nvPr/>
+        </p:nvSpPr>
+        <p:spPr>
+          <a:xfrm>
+            <a:off x="608076" y="4658867"/>
+            <a:ext cx="612648" cy="612648"/>
+          </a:xfrm>
+          <a:prstGeom prst="ellipse">
+            <a:avLst/>
+          </a:prstGeom>
+          <a:solidFill>
+            <a:srgbClr val="F0AB00"/>
+          </a:solidFill>
+          <a:ln>
+            <a:noFill/>
+          </a:ln>
+          <a:effectLst/>
+        </p:spPr>
+        <p:style>
+          <a:lnRef idx="1">
+            <a:schemeClr val="accent1"/>
+          </a:lnRef>
+          <a:fillRef idx="3">
+            <a:schemeClr val="accent1"/>
+          </a:fillRef>
+          <a:effectRef idx="2">
+            <a:schemeClr val="accent1"/>
+          </a:effectRef>
+          <a:fontRef idx="minor">
+            <a:schemeClr val="lt1"/>
+          </a:fontRef>
+        </p:style>
+        <p:txBody>
+          <a:bodyPr rtlCol="0" anchor="ctr"/>
+          <a:lstStyle/>
+          <a:p>
+            <a:pPr algn="ctr"/>
+          </a:p>
+        </p:txBody>
+      </p:sp>
+      <p:sp>
+        <p:nvSpPr>
+          <p:cNvPr id="45" name="Oval 44"/>
+          <p:cNvSpPr/>
+          <p:nvPr/>
+        </p:nvSpPr>
+        <p:spPr>
+          <a:xfrm>
+            <a:off x="658368" y="4709159"/>
+            <a:ext cx="512064" cy="512064"/>
+          </a:xfrm>
+          <a:prstGeom prst="ellipse">
+            <a:avLst/>
+          </a:prstGeom>
+          <a:solidFill>
+            <a:srgbClr val="21295C"/>
+          </a:solidFill>
+          <a:ln>
+            <a:noFill/>
+          </a:ln>
+          <a:effectLst/>
+        </p:spPr>
+        <p:style>
+          <a:lnRef idx="1">
+            <a:schemeClr val="accent1"/>
+          </a:lnRef>
+          <a:fillRef idx="3">
+            <a:schemeClr val="accent1"/>
+          </a:fillRef>
+          <a:effectRef idx="2">
+            <a:schemeClr val="accent1"/>
+          </a:effectRef>
+          <a:fontRef idx="minor">
+            <a:schemeClr val="lt1"/>
+          </a:fontRef>
+        </p:style>
+        <p:txBody>
+          <a:bodyPr rtlCol="0" anchor="ctr"/>
+          <a:lstStyle/>
+          <a:p>
+            <a:pPr algn="ctr"/>
+          </a:p>
+        </p:txBody>
+      </p:sp>
+      <p:sp>
+        <p:nvSpPr>
+          <p:cNvPr id="46" name="TextBox 45"/>
+          <p:cNvSpPr txBox="1"/>
+          <p:nvPr/>
+        </p:nvSpPr>
+        <p:spPr>
+          <a:xfrm>
+            <a:off x="658368" y="4709159"/>
+            <a:ext cx="512064" cy="512064"/>
           </a:xfrm>
           <a:prstGeom prst="rect">
             <a:avLst/>
@@ -29052,33 +30221,72 @@
           </a:bodyPr>
           <a:lstStyle/>
           <a:p>
+            <a:pPr algn="ctr">
+              <a:lnSpc>
+                <a:spcPct val="115000"/>
+              </a:lnSpc>
+            </a:pPr>
+            <a:r>
+              <a:rPr sz="2600" b="1" i="0">
+                <a:solidFill>
+                  <a:srgbClr val="FFFFFF"/>
+                </a:solidFill>
+                <a:latin typeface="Arial"/>
+              </a:rPr>
+              <a:t>D</a:t>
+            </a:r>
+          </a:p>
+        </p:txBody>
+      </p:sp>
+      <p:sp>
+        <p:nvSpPr>
+          <p:cNvPr id="47" name="TextBox 46"/>
+          <p:cNvSpPr txBox="1"/>
+          <p:nvPr/>
+        </p:nvSpPr>
+        <p:spPr>
+          <a:xfrm>
+            <a:off x="1243584" y="4535423"/>
+            <a:ext cx="1170432" cy="859536"/>
+          </a:xfrm>
+          <a:prstGeom prst="rect">
+            <a:avLst/>
+          </a:prstGeom>
+          <a:noFill/>
+        </p:spPr>
+        <p:txBody>
+          <a:bodyPr wrap="square" lIns="0" rIns="0" tIns="0" bIns="0" anchor="ctr">
+            <a:spAutoFit/>
+          </a:bodyPr>
+          <a:lstStyle/>
+          <a:p>
             <a:pPr algn="l">
               <a:lnSpc>
-                <a:spcPct val="108000"/>
-              </a:lnSpc>
-            </a:pPr>
-            <a:r>
-              <a:rPr sz="1250" b="0" i="0">
+                <a:spcPct val="100000"/>
+              </a:lnSpc>
+            </a:pPr>
+            <a:r>
+              <a:rPr sz="1100" b="1" i="0">
                 <a:solidFill>
                   <a:srgbClr val="21295C"/>
                 </a:solidFill>
                 <a:latin typeface="Arial"/>
               </a:rPr>
-              <a:t>Prompt injection (внедрение команды через недоверенный контент)</a:t>
-            </a:r>
-          </a:p>
-        </p:txBody>
-      </p:sp>
-      <p:sp>
-        <p:nvSpPr>
-          <p:cNvPr id="23" name="Rectangle 22"/>
+              <a:t>оркестратор</a:t>
+            </a:r>
+          </a:p>
+        </p:txBody>
+      </p:sp>
+      <p:sp>
+        <p:nvSpPr>
+          <p:cNvPr id="48" name="Rectangle 47"/>
           <p:cNvSpPr/>
           <p:nvPr/>
         </p:nvSpPr>
         <p:spPr>
           <a:xfrm>
-            <a:off x="6035040" y="4279392"/>
-            <a:ext cx="5623560" cy="786384"/>
+            <a:off x="2450592" y="4535423"/>
+            <a:ext cx="2999232" cy="859536"/>
           </a:xfrm>
           <a:prstGeom prst="rect">
             <a:avLst/>
@@ -29117,14 +30325,14 @@
       </p:sp>
       <p:sp>
         <p:nvSpPr>
-          <p:cNvPr id="24" name="TextBox 23"/>
-          <p:cNvSpPr txBox="1"/>
-          <p:nvPr/>
-        </p:nvSpPr>
-        <p:spPr>
-          <a:xfrm>
-            <a:off x="6181344" y="4325112"/>
-            <a:ext cx="5349240" cy="694944"/>
+          <p:cNvPr id="49" name="TextBox 48"/>
+          <p:cNvSpPr txBox="1"/>
+          <p:nvPr/>
+        </p:nvSpPr>
+        <p:spPr>
+          <a:xfrm>
+            <a:off x="2596896" y="4571999"/>
+            <a:ext cx="2724912" cy="786384"/>
           </a:xfrm>
           <a:prstGeom prst="rect">
             <a:avLst/>
@@ -29139,31 +30347,201 @@
           <a:p>
             <a:pPr algn="l">
               <a:lnSpc>
-                <a:spcPct val="108000"/>
-              </a:lnSpc>
-            </a:pPr>
-            <a:r>
-              <a:rPr sz="1250" b="0" i="0">
+                <a:spcPct val="110000"/>
+              </a:lnSpc>
+            </a:pPr>
+            <a:r>
+              <a:rPr sz="1200" b="0" i="0">
                 <a:solidFill>
                   <a:srgbClr val="21295C"/>
                 </a:solidFill>
                 <a:latin typeface="Arial"/>
               </a:rPr>
-              <a:t>CamoLeak — та же атака, но внутри dev-агента</a:t>
-            </a:r>
-          </a:p>
-        </p:txBody>
-      </p:sp>
-      <p:sp>
-        <p:nvSpPr>
-          <p:cNvPr id="25" name="Rounded Rectangle 24"/>
+              <a:t>берёт задачу из трекера и доводит до PR сам</a:t>
+            </a:r>
+          </a:p>
+        </p:txBody>
+      </p:sp>
+      <p:sp>
+        <p:nvSpPr>
+          <p:cNvPr id="50" name="Rectangle 49"/>
           <p:cNvSpPr/>
           <p:nvPr/>
         </p:nvSpPr>
         <p:spPr>
           <a:xfrm>
+            <a:off x="5449824" y="4535423"/>
+            <a:ext cx="2724912" cy="859536"/>
+          </a:xfrm>
+          <a:prstGeom prst="rect">
+            <a:avLst/>
+          </a:prstGeom>
+          <a:solidFill>
+            <a:srgbClr val="F4F7FA"/>
+          </a:solidFill>
+          <a:ln w="9525">
+            <a:solidFill>
+              <a:srgbClr val="E5EAF0"/>
+            </a:solidFill>
+          </a:ln>
+          <a:effectLst/>
+        </p:spPr>
+        <p:style>
+          <a:lnRef idx="1">
+            <a:schemeClr val="accent1"/>
+          </a:lnRef>
+          <a:fillRef idx="3">
+            <a:schemeClr val="accent1"/>
+          </a:fillRef>
+          <a:effectRef idx="2">
+            <a:schemeClr val="accent1"/>
+          </a:effectRef>
+          <a:fontRef idx="minor">
+            <a:schemeClr val="lt1"/>
+          </a:fontRef>
+        </p:style>
+        <p:txBody>
+          <a:bodyPr rtlCol="0" anchor="ctr"/>
+          <a:lstStyle/>
+          <a:p>
+            <a:pPr algn="ctr"/>
+          </a:p>
+        </p:txBody>
+      </p:sp>
+      <p:sp>
+        <p:nvSpPr>
+          <p:cNvPr id="51" name="TextBox 50"/>
+          <p:cNvSpPr txBox="1"/>
+          <p:nvPr/>
+        </p:nvSpPr>
+        <p:spPr>
+          <a:xfrm>
+            <a:off x="5596128" y="4571999"/>
+            <a:ext cx="2450592" cy="786384"/>
+          </a:xfrm>
+          <a:prstGeom prst="rect">
+            <a:avLst/>
+          </a:prstGeom>
+          <a:noFill/>
+        </p:spPr>
+        <p:txBody>
+          <a:bodyPr wrap="square" lIns="0" rIns="0" tIns="0" bIns="0" anchor="ctr">
+            <a:spAutoFit/>
+          </a:bodyPr>
+          <a:lstStyle/>
+          <a:p>
+            <a:pPr algn="l">
+              <a:lnSpc>
+                <a:spcPct val="110000"/>
+              </a:lnSpc>
+            </a:pPr>
+            <a:r>
+              <a:rPr sz="1200" b="0" i="0">
+                <a:solidFill>
+                  <a:srgbClr val="21295C"/>
+                </a:solidFill>
+                <a:latin typeface="Arial"/>
+              </a:rPr>
+              <a:t>человек — стратегия, approval, merge, прод-гейт</a:t>
+            </a:r>
+          </a:p>
+        </p:txBody>
+      </p:sp>
+      <p:sp>
+        <p:nvSpPr>
+          <p:cNvPr id="52" name="Rectangle 51"/>
+          <p:cNvSpPr/>
+          <p:nvPr/>
+        </p:nvSpPr>
+        <p:spPr>
+          <a:xfrm>
+            <a:off x="8174736" y="4535423"/>
+            <a:ext cx="3666744" cy="859536"/>
+          </a:xfrm>
+          <a:prstGeom prst="rect">
+            <a:avLst/>
+          </a:prstGeom>
+          <a:solidFill>
+            <a:srgbClr val="F4F7FA"/>
+          </a:solidFill>
+          <a:ln w="9525">
+            <a:solidFill>
+              <a:srgbClr val="E5EAF0"/>
+            </a:solidFill>
+          </a:ln>
+          <a:effectLst/>
+        </p:spPr>
+        <p:style>
+          <a:lnRef idx="1">
+            <a:schemeClr val="accent1"/>
+          </a:lnRef>
+          <a:fillRef idx="3">
+            <a:schemeClr val="accent1"/>
+          </a:fillRef>
+          <a:effectRef idx="2">
+            <a:schemeClr val="accent1"/>
+          </a:effectRef>
+          <a:fontRef idx="minor">
+            <a:schemeClr val="lt1"/>
+          </a:fontRef>
+        </p:style>
+        <p:txBody>
+          <a:bodyPr rtlCol="0" anchor="ctr"/>
+          <a:lstStyle/>
+          <a:p>
+            <a:pPr algn="ctr"/>
+          </a:p>
+        </p:txBody>
+      </p:sp>
+      <p:sp>
+        <p:nvSpPr>
+          <p:cNvPr id="53" name="TextBox 52"/>
+          <p:cNvSpPr txBox="1"/>
+          <p:nvPr/>
+        </p:nvSpPr>
+        <p:spPr>
+          <a:xfrm>
+            <a:off x="8321040" y="4571999"/>
+            <a:ext cx="3392424" cy="786384"/>
+          </a:xfrm>
+          <a:prstGeom prst="rect">
+            <a:avLst/>
+          </a:prstGeom>
+          <a:noFill/>
+        </p:spPr>
+        <p:txBody>
+          <a:bodyPr wrap="square" lIns="0" rIns="0" tIns="0" bIns="0" anchor="ctr">
+            <a:spAutoFit/>
+          </a:bodyPr>
+          <a:lstStyle/>
+          <a:p>
+            <a:pPr algn="l">
+              <a:lnSpc>
+                <a:spcPct val="110000"/>
+              </a:lnSpc>
+            </a:pPr>
+            <a:r>
+              <a:rPr sz="1200" b="0" i="0">
+                <a:solidFill>
+                  <a:srgbClr val="21295C"/>
+                </a:solidFill>
+                <a:latin typeface="Arial"/>
+              </a:rPr>
+              <a:t>агент взял тикет, открыл PR — человек ревьюит / мержит</a:t>
+            </a:r>
+          </a:p>
+        </p:txBody>
+      </p:sp>
+      <p:sp>
+        <p:nvSpPr>
+          <p:cNvPr id="54" name="Rounded Rectangle 53"/>
+          <p:cNvSpPr/>
+          <p:nvPr/>
+        </p:nvSpPr>
+        <p:spPr>
+          <a:xfrm>
             <a:off x="502920" y="5449824"/>
-            <a:ext cx="11201400" cy="841248"/>
+            <a:ext cx="11201400" cy="822960"/>
           </a:xfrm>
           <a:prstGeom prst="roundRect">
             <a:avLst>
@@ -29204,14 +30582,14 @@
       </p:sp>
       <p:sp>
         <p:nvSpPr>
-          <p:cNvPr id="26" name="TextBox 25"/>
+          <p:cNvPr id="55" name="TextBox 54"/>
           <p:cNvSpPr txBox="1"/>
           <p:nvPr/>
         </p:nvSpPr>
         <p:spPr>
           <a:xfrm>
             <a:off x="722376" y="5504688"/>
-            <a:ext cx="10762488" cy="731520"/>
+            <a:ext cx="10762488" cy="713232"/>
           </a:xfrm>
           <a:prstGeom prst="rect">
             <a:avLst/>
@@ -29236,7 +30614,7 @@
                 </a:solidFill>
                 <a:latin typeface="Arial"/>
               </a:rPr>
-              <a:t>A→D — это лестница сложности Лекции 3, применённая к одной индустрии. Правило не меняется: чем выше уровень автономии, тем строже критерий «здесь обязателен человек».</a:t>
+              <a:t>Чем ниже в таблице — тем больше решений у AI и тем меньше у человека. Эти три колонки — линза, как читать каждый уровень.</a:t>
             </a:r>
           </a:p>
         </p:txBody>
@@ -30019,7 +31397,7 @@
                 </a:solidFill>
                 <a:latin typeface="Arial"/>
               </a:rPr>
-              <a:t>Anthropic «How AI Impacts Skill Formation» (2026, n=52): −17% / &gt;60% делегировали / ≥65% спрашивали концепции. Это payoff центрального вопроса.</a:t>
+              <a:t>Anthropic «How AI Impacts Skill Formation» (2026, n=52): −17% / &gt;60% делегировали / ≥65% спрашивали концепции.</a:t>
             </a:r>
           </a:p>
         </p:txBody>
@@ -31889,8 +33267,8 @@
         </p:nvSpPr>
         <p:spPr>
           <a:xfrm>
-            <a:off x="502920" y="365760"/>
-            <a:ext cx="11201400" cy="841248"/>
+            <a:off x="502920" y="310896"/>
+            <a:ext cx="8686800" cy="530352"/>
           </a:xfrm>
           <a:prstGeom prst="rect">
             <a:avLst/>
@@ -31909,7 +33287,7 @@
               </a:lnSpc>
             </a:pPr>
             <a:r>
-              <a:rPr sz="2600" b="1" i="0">
+              <a:rPr sz="2700" b="1" i="0">
                 <a:solidFill>
                   <a:srgbClr val="21295C"/>
                 </a:solidFill>
@@ -31936,8 +33314,8 @@
         </p:blipFill>
         <p:spPr>
           <a:xfrm>
-            <a:off x="10744200" y="329184"/>
-            <a:ext cx="731520" cy="731520"/>
+            <a:off x="11018520" y="329184"/>
+            <a:ext cx="713232" cy="713232"/>
           </a:xfrm>
           <a:prstGeom prst="rect">
             <a:avLst/>
@@ -31952,12 +33330,12 @@
         </p:nvSpPr>
         <p:spPr>
           <a:xfrm>
-            <a:off x="502920" y="1298448"/>
-            <a:ext cx="11201400" cy="1627632"/>
+            <a:off x="502920" y="1115568"/>
+            <a:ext cx="11201400" cy="1554480"/>
           </a:xfrm>
           <a:prstGeom prst="roundRect">
             <a:avLst>
-              <a:gd name="adj" fmla="val 18726"/>
+              <a:gd name="adj" fmla="val 19607"/>
             </a:avLst>
           </a:prstGeom>
           <a:solidFill>
@@ -32000,8 +33378,8 @@
         </p:nvSpPr>
         <p:spPr>
           <a:xfrm>
-            <a:off x="868680" y="1499616"/>
-            <a:ext cx="10469880" cy="1225296"/>
+            <a:off x="868680" y="1298448"/>
+            <a:ext cx="10469880" cy="1188719"/>
           </a:xfrm>
           <a:prstGeom prst="rect">
             <a:avLst/>
@@ -32016,31 +33394,118 @@
           <a:p>
             <a:pPr algn="ctr">
               <a:lnSpc>
+                <a:spcPct val="116000"/>
+              </a:lnSpc>
+            </a:pPr>
+            <a:r>
+              <a:rPr sz="2200" b="1" i="0">
+                <a:solidFill>
+                  <a:srgbClr val="21295C"/>
+                </a:solidFill>
+                <a:latin typeface="Arial"/>
+              </a:rPr>
+              <a:t>«AI пишет код всё лучше — где он реально ускоряет, где замедляет или вредит, и что в работе инженера НЕ делегируется?»</a:t>
+            </a:r>
+          </a:p>
+        </p:txBody>
+      </p:sp>
+      <p:sp>
+        <p:nvSpPr>
+          <p:cNvPr id="6" name="Rounded Rectangle 5"/>
+          <p:cNvSpPr/>
+          <p:nvPr/>
+        </p:nvSpPr>
+        <p:spPr>
+          <a:xfrm>
+            <a:off x="502920" y="2834640"/>
+            <a:ext cx="11201400" cy="731520"/>
+          </a:xfrm>
+          <a:prstGeom prst="roundRect">
+            <a:avLst>
+              <a:gd name="adj" fmla="val 10000"/>
+            </a:avLst>
+          </a:prstGeom>
+          <a:solidFill>
+            <a:srgbClr val="E4F1F2"/>
+          </a:solidFill>
+          <a:ln w="19050">
+            <a:solidFill>
+              <a:srgbClr val="028090"/>
+            </a:solidFill>
+          </a:ln>
+          <a:effectLst/>
+        </p:spPr>
+        <p:style>
+          <a:lnRef idx="1">
+            <a:schemeClr val="accent1"/>
+          </a:lnRef>
+          <a:fillRef idx="3">
+            <a:schemeClr val="accent1"/>
+          </a:fillRef>
+          <a:effectRef idx="2">
+            <a:schemeClr val="accent1"/>
+          </a:effectRef>
+          <a:fontRef idx="minor">
+            <a:schemeClr val="lt1"/>
+          </a:fontRef>
+        </p:style>
+        <p:txBody>
+          <a:bodyPr rtlCol="0" anchor="ctr"/>
+          <a:lstStyle/>
+          <a:p>
+            <a:pPr algn="ctr"/>
+          </a:p>
+        </p:txBody>
+      </p:sp>
+      <p:sp>
+        <p:nvSpPr>
+          <p:cNvPr id="7" name="TextBox 6"/>
+          <p:cNvSpPr txBox="1"/>
+          <p:nvPr/>
+        </p:nvSpPr>
+        <p:spPr>
+          <a:xfrm>
+            <a:off x="722376" y="2889504"/>
+            <a:ext cx="10762488" cy="621792"/>
+          </a:xfrm>
+          <a:prstGeom prst="rect">
+            <a:avLst/>
+          </a:prstGeom>
+          <a:noFill/>
+        </p:spPr>
+        <p:txBody>
+          <a:bodyPr wrap="square" lIns="0" rIns="0" tIns="0" bIns="0" anchor="ctr">
+            <a:spAutoFit/>
+          </a:bodyPr>
+          <a:lstStyle/>
+          <a:p>
+            <a:pPr algn="l">
+              <a:lnSpc>
                 <a:spcPct val="118000"/>
               </a:lnSpc>
             </a:pPr>
             <a:r>
-              <a:rPr sz="2200" b="1" i="0">
+              <a:rPr sz="1450" b="1" i="0">
                 <a:solidFill>
                   <a:srgbClr val="21295C"/>
                 </a:solidFill>
                 <a:latin typeface="Arial"/>
               </a:rPr>
-              <a:t>«AI пишет код всё лучше — где он реально ускоряет, где замедляет или вредит, и что в работе инженера НЕ делегируется?»</a:t>
-            </a:r>
-          </a:p>
-        </p:txBody>
-      </p:sp>
-      <p:sp>
-        <p:nvSpPr>
-          <p:cNvPr id="6" name="TextBox 5"/>
-          <p:cNvSpPr txBox="1"/>
-          <p:nvPr/>
-        </p:nvSpPr>
-        <p:spPr>
-          <a:xfrm>
-            <a:off x="502920" y="3127248"/>
-            <a:ext cx="11201400" cy="292608"/>
+              <a:t>Ответ — не «AI хорош» или «AI плох», а: назвать уровень A–D, конфигурацию и точку, где человек обязателен.</a:t>
+            </a:r>
+          </a:p>
+        </p:txBody>
+      </p:sp>
+      <p:sp>
+        <p:nvSpPr>
+          <p:cNvPr id="8" name="TextBox 7"/>
+          <p:cNvSpPr txBox="1"/>
+          <p:nvPr/>
+        </p:nvSpPr>
+        <p:spPr>
+          <a:xfrm>
+            <a:off x="502920" y="3712463"/>
+            <a:ext cx="11201400" cy="274320"/>
           </a:xfrm>
           <a:prstGeom prst="rect">
             <a:avLst/>
@@ -32065,21 +33530,21 @@
                 </a:solidFill>
                 <a:latin typeface="Arial"/>
               </a:rPr>
-              <a:t>К второй половине вопроса — «где человек обязателен» — возвращаемся 5 раз:</a:t>
-            </a:r>
-          </a:p>
-        </p:txBody>
-      </p:sp>
-      <p:sp>
-        <p:nvSpPr>
-          <p:cNvPr id="7" name="Rounded Rectangle 6"/>
+              <a:t>Пять мест, где человек обязателен:</a:t>
+            </a:r>
+          </a:p>
+        </p:txBody>
+      </p:sp>
+      <p:sp>
+        <p:nvSpPr>
+          <p:cNvPr id="9" name="Rounded Rectangle 8"/>
           <p:cNvSpPr/>
           <p:nvPr/>
         </p:nvSpPr>
         <p:spPr>
           <a:xfrm>
-            <a:off x="502920" y="3511296"/>
-            <a:ext cx="2079345" cy="1078992"/>
+            <a:off x="502920" y="4041648"/>
+            <a:ext cx="2093976" cy="1005840"/>
           </a:xfrm>
           <a:prstGeom prst="roundRect">
             <a:avLst>
@@ -32120,20 +33585,22 @@
       </p:sp>
       <p:sp>
         <p:nvSpPr>
-          <p:cNvPr id="8" name="Oval 7"/>
+          <p:cNvPr id="10" name="Rounded Rectangle 9"/>
           <p:cNvSpPr/>
           <p:nvPr/>
         </p:nvSpPr>
         <p:spPr>
           <a:xfrm>
-            <a:off x="1387144" y="3593592"/>
-            <a:ext cx="310896" cy="310896"/>
-          </a:xfrm>
-          <a:prstGeom prst="ellipse">
-            <a:avLst/>
+            <a:off x="630936" y="4151376"/>
+            <a:ext cx="1837943" cy="256032"/>
+          </a:xfrm>
+          <a:prstGeom prst="roundRect">
+            <a:avLst>
+              <a:gd name="adj" fmla="val 40000"/>
+            </a:avLst>
           </a:prstGeom>
           <a:solidFill>
-            <a:srgbClr val="028090"/>
+            <a:srgbClr val="E4F1F2"/>
           </a:solidFill>
           <a:ln>
             <a:noFill/>
@@ -32164,14 +33631,14 @@
       </p:sp>
       <p:sp>
         <p:nvSpPr>
-          <p:cNvPr id="9" name="TextBox 8"/>
-          <p:cNvSpPr txBox="1"/>
-          <p:nvPr/>
-        </p:nvSpPr>
-        <p:spPr>
-          <a:xfrm>
-            <a:off x="1387144" y="3593592"/>
-            <a:ext cx="310896" cy="310896"/>
+          <p:cNvPr id="11" name="TextBox 10"/>
+          <p:cNvSpPr txBox="1"/>
+          <p:nvPr/>
+        </p:nvSpPr>
+        <p:spPr>
+          <a:xfrm>
+            <a:off x="630936" y="4151376"/>
+            <a:ext cx="1837943" cy="256032"/>
           </a:xfrm>
           <a:prstGeom prst="rect">
             <a:avLst/>
@@ -32190,27 +33657,27 @@
               </a:lnSpc>
             </a:pPr>
             <a:r>
-              <a:rPr sz="1400" b="1" i="0">
-                <a:solidFill>
-                  <a:srgbClr val="FFFFFF"/>
-                </a:solidFill>
-                <a:latin typeface="Arial"/>
-              </a:rPr>
-              <a:t>1</a:t>
-            </a:r>
-          </a:p>
-        </p:txBody>
-      </p:sp>
-      <p:sp>
-        <p:nvSpPr>
-          <p:cNvPr id="10" name="TextBox 9"/>
-          <p:cNvSpPr txBox="1"/>
-          <p:nvPr/>
-        </p:nvSpPr>
-        <p:spPr>
-          <a:xfrm>
-            <a:off x="557784" y="3968496"/>
-            <a:ext cx="1969617" cy="676656"/>
+              <a:rPr sz="950" b="1" i="0">
+                <a:solidFill>
+                  <a:srgbClr val="028090"/>
+                </a:solidFill>
+                <a:latin typeface="Arial"/>
+              </a:rPr>
+              <a:t>человек обязателен</a:t>
+            </a:r>
+          </a:p>
+        </p:txBody>
+      </p:sp>
+      <p:sp>
+        <p:nvSpPr>
+          <p:cNvPr id="12" name="TextBox 11"/>
+          <p:cNvSpPr txBox="1"/>
+          <p:nvPr/>
+        </p:nvSpPr>
+        <p:spPr>
+          <a:xfrm>
+            <a:off x="612648" y="4462272"/>
+            <a:ext cx="1874519" cy="493776"/>
           </a:xfrm>
           <a:prstGeom prst="rect">
             <a:avLst/>
@@ -32225,32 +33692,32 @@
           <a:p>
             <a:pPr algn="ctr">
               <a:lnSpc>
-                <a:spcPct val="102000"/>
-              </a:lnSpc>
-            </a:pPr>
-            <a:r>
-              <a:rPr sz="1250" b="1" i="0">
+                <a:spcPct val="105000"/>
+              </a:lnSpc>
+            </a:pPr>
+            <a:r>
+              <a:rPr sz="1300" b="1" i="0">
                 <a:solidFill>
                   <a:srgbClr val="21295C"/>
                 </a:solidFill>
                 <a:latin typeface="Arial"/>
               </a:rPr>
-              <a:t>«почти
-правильный» код</a:t>
-            </a:r>
-          </a:p>
-        </p:txBody>
-      </p:sp>
-      <p:sp>
-        <p:nvSpPr>
-          <p:cNvPr id="11" name="Rounded Rectangle 10"/>
+              <a:t>«почти правильный»
+код</a:t>
+            </a:r>
+          </a:p>
+        </p:txBody>
+      </p:sp>
+      <p:sp>
+        <p:nvSpPr>
+          <p:cNvPr id="13" name="Rounded Rectangle 12"/>
           <p:cNvSpPr/>
           <p:nvPr/>
         </p:nvSpPr>
         <p:spPr>
           <a:xfrm>
-            <a:off x="2783433" y="3511296"/>
-            <a:ext cx="2079345" cy="1078992"/>
+            <a:off x="2779776" y="4041648"/>
+            <a:ext cx="2093976" cy="1005840"/>
           </a:xfrm>
           <a:prstGeom prst="roundRect">
             <a:avLst>
@@ -32291,20 +33758,22 @@
       </p:sp>
       <p:sp>
         <p:nvSpPr>
-          <p:cNvPr id="12" name="Oval 11"/>
+          <p:cNvPr id="14" name="Rounded Rectangle 13"/>
           <p:cNvSpPr/>
           <p:nvPr/>
         </p:nvSpPr>
         <p:spPr>
           <a:xfrm>
-            <a:off x="3667658" y="3593592"/>
-            <a:ext cx="310896" cy="310896"/>
-          </a:xfrm>
-          <a:prstGeom prst="ellipse">
-            <a:avLst/>
+            <a:off x="2907792" y="4151376"/>
+            <a:ext cx="1837943" cy="256032"/>
+          </a:xfrm>
+          <a:prstGeom prst="roundRect">
+            <a:avLst>
+              <a:gd name="adj" fmla="val 40000"/>
+            </a:avLst>
           </a:prstGeom>
           <a:solidFill>
-            <a:srgbClr val="028090"/>
+            <a:srgbClr val="E4F1F2"/>
           </a:solidFill>
           <a:ln>
             <a:noFill/>
@@ -32335,14 +33804,14 @@
       </p:sp>
       <p:sp>
         <p:nvSpPr>
-          <p:cNvPr id="13" name="TextBox 12"/>
-          <p:cNvSpPr txBox="1"/>
-          <p:nvPr/>
-        </p:nvSpPr>
-        <p:spPr>
-          <a:xfrm>
-            <a:off x="3667658" y="3593592"/>
-            <a:ext cx="310896" cy="310896"/>
+          <p:cNvPr id="15" name="TextBox 14"/>
+          <p:cNvSpPr txBox="1"/>
+          <p:nvPr/>
+        </p:nvSpPr>
+        <p:spPr>
+          <a:xfrm>
+            <a:off x="2907792" y="4151376"/>
+            <a:ext cx="1837943" cy="256032"/>
           </a:xfrm>
           <a:prstGeom prst="rect">
             <a:avLst/>
@@ -32361,27 +33830,27 @@
               </a:lnSpc>
             </a:pPr>
             <a:r>
-              <a:rPr sz="1400" b="1" i="0">
-                <a:solidFill>
-                  <a:srgbClr val="FFFFFF"/>
-                </a:solidFill>
-                <a:latin typeface="Arial"/>
-              </a:rPr>
-              <a:t>2</a:t>
-            </a:r>
-          </a:p>
-        </p:txBody>
-      </p:sp>
-      <p:sp>
-        <p:nvSpPr>
-          <p:cNvPr id="14" name="TextBox 13"/>
-          <p:cNvSpPr txBox="1"/>
-          <p:nvPr/>
-        </p:nvSpPr>
-        <p:spPr>
-          <a:xfrm>
-            <a:off x="2838297" y="3968496"/>
-            <a:ext cx="1969617" cy="676656"/>
+              <a:rPr sz="950" b="1" i="0">
+                <a:solidFill>
+                  <a:srgbClr val="028090"/>
+                </a:solidFill>
+                <a:latin typeface="Arial"/>
+              </a:rPr>
+              <a:t>человек обязателен</a:t>
+            </a:r>
+          </a:p>
+        </p:txBody>
+      </p:sp>
+      <p:sp>
+        <p:nvSpPr>
+          <p:cNvPr id="16" name="TextBox 15"/>
+          <p:cNvSpPr txBox="1"/>
+          <p:nvPr/>
+        </p:nvSpPr>
+        <p:spPr>
+          <a:xfrm>
+            <a:off x="2889504" y="4462272"/>
+            <a:ext cx="1874519" cy="493776"/>
           </a:xfrm>
           <a:prstGeom prst="rect">
             <a:avLst/>
@@ -32396,32 +33865,32 @@
           <a:p>
             <a:pPr algn="ctr">
               <a:lnSpc>
-                <a:spcPct val="102000"/>
-              </a:lnSpc>
-            </a:pPr>
-            <a:r>
-              <a:rPr sz="1250" b="1" i="0">
+                <a:spcPct val="105000"/>
+              </a:lnSpc>
+            </a:pPr>
+            <a:r>
+              <a:rPr sz="1300" b="1" i="0">
                 <a:solidFill>
                   <a:srgbClr val="21295C"/>
                 </a:solidFill>
                 <a:latin typeface="Arial"/>
               </a:rPr>
               <a:t>merge
-без чтения</a:t>
-            </a:r>
-          </a:p>
-        </p:txBody>
-      </p:sp>
-      <p:sp>
-        <p:nvSpPr>
-          <p:cNvPr id="15" name="Rounded Rectangle 14"/>
+и ревью</a:t>
+            </a:r>
+          </a:p>
+        </p:txBody>
+      </p:sp>
+      <p:sp>
+        <p:nvSpPr>
+          <p:cNvPr id="17" name="Rounded Rectangle 16"/>
           <p:cNvSpPr/>
           <p:nvPr/>
         </p:nvSpPr>
         <p:spPr>
           <a:xfrm>
-            <a:off x="5063947" y="3511296"/>
-            <a:ext cx="2079345" cy="1078992"/>
+            <a:off x="5056632" y="4041648"/>
+            <a:ext cx="2093976" cy="1005840"/>
           </a:xfrm>
           <a:prstGeom prst="roundRect">
             <a:avLst>
@@ -32462,20 +33931,22 @@
       </p:sp>
       <p:sp>
         <p:nvSpPr>
-          <p:cNvPr id="16" name="Oval 15"/>
+          <p:cNvPr id="18" name="Rounded Rectangle 17"/>
           <p:cNvSpPr/>
           <p:nvPr/>
         </p:nvSpPr>
         <p:spPr>
           <a:xfrm>
-            <a:off x="5948172" y="3593592"/>
-            <a:ext cx="310896" cy="310896"/>
-          </a:xfrm>
-          <a:prstGeom prst="ellipse">
-            <a:avLst/>
+            <a:off x="5184648" y="4151376"/>
+            <a:ext cx="1837943" cy="256032"/>
+          </a:xfrm>
+          <a:prstGeom prst="roundRect">
+            <a:avLst>
+              <a:gd name="adj" fmla="val 40000"/>
+            </a:avLst>
           </a:prstGeom>
           <a:solidFill>
-            <a:srgbClr val="028090"/>
+            <a:srgbClr val="E4F1F2"/>
           </a:solidFill>
           <a:ln>
             <a:noFill/>
@@ -32506,14 +33977,14 @@
       </p:sp>
       <p:sp>
         <p:nvSpPr>
-          <p:cNvPr id="17" name="TextBox 16"/>
-          <p:cNvSpPr txBox="1"/>
-          <p:nvPr/>
-        </p:nvSpPr>
-        <p:spPr>
-          <a:xfrm>
-            <a:off x="5948172" y="3593592"/>
-            <a:ext cx="310896" cy="310896"/>
+          <p:cNvPr id="19" name="TextBox 18"/>
+          <p:cNvSpPr txBox="1"/>
+          <p:nvPr/>
+        </p:nvSpPr>
+        <p:spPr>
+          <a:xfrm>
+            <a:off x="5184648" y="4151376"/>
+            <a:ext cx="1837943" cy="256032"/>
           </a:xfrm>
           <a:prstGeom prst="rect">
             <a:avLst/>
@@ -32532,27 +34003,27 @@
               </a:lnSpc>
             </a:pPr>
             <a:r>
-              <a:rPr sz="1400" b="1" i="0">
-                <a:solidFill>
-                  <a:srgbClr val="FFFFFF"/>
-                </a:solidFill>
-                <a:latin typeface="Arial"/>
-              </a:rPr>
-              <a:t>3</a:t>
-            </a:r>
-          </a:p>
-        </p:txBody>
-      </p:sp>
-      <p:sp>
-        <p:nvSpPr>
-          <p:cNvPr id="18" name="TextBox 17"/>
-          <p:cNvSpPr txBox="1"/>
-          <p:nvPr/>
-        </p:nvSpPr>
-        <p:spPr>
-          <a:xfrm>
-            <a:off x="5118811" y="3968496"/>
-            <a:ext cx="1969617" cy="676656"/>
+              <a:rPr sz="950" b="1" i="0">
+                <a:solidFill>
+                  <a:srgbClr val="028090"/>
+                </a:solidFill>
+                <a:latin typeface="Arial"/>
+              </a:rPr>
+              <a:t>человек обязателен</a:t>
+            </a:r>
+          </a:p>
+        </p:txBody>
+      </p:sp>
+      <p:sp>
+        <p:nvSpPr>
+          <p:cNvPr id="20" name="TextBox 19"/>
+          <p:cNvSpPr txBox="1"/>
+          <p:nvPr/>
+        </p:nvSpPr>
+        <p:spPr>
+          <a:xfrm>
+            <a:off x="5166360" y="4462272"/>
+            <a:ext cx="1874519" cy="493776"/>
           </a:xfrm>
           <a:prstGeom prst="rect">
             <a:avLst/>
@@ -32567,32 +34038,32 @@
           <a:p>
             <a:pPr algn="ctr">
               <a:lnSpc>
-                <a:spcPct val="102000"/>
-              </a:lnSpc>
-            </a:pPr>
-            <a:r>
-              <a:rPr sz="1250" b="1" i="0">
+                <a:spcPct val="105000"/>
+              </a:lnSpc>
+            </a:pPr>
+            <a:r>
+              <a:rPr sz="1300" b="1" i="0">
                 <a:solidFill>
                   <a:srgbClr val="21295C"/>
                 </a:solidFill>
                 <a:latin typeface="Arial"/>
               </a:rPr>
-              <a:t>деструктив +
-перекос ощущения</a:t>
-            </a:r>
-          </a:p>
-        </p:txBody>
-      </p:sp>
-      <p:sp>
-        <p:nvSpPr>
-          <p:cNvPr id="19" name="Rounded Rectangle 18"/>
+              <a:t>деструктив
+на prod</a:t>
+            </a:r>
+          </a:p>
+        </p:txBody>
+      </p:sp>
+      <p:sp>
+        <p:nvSpPr>
+          <p:cNvPr id="21" name="Rounded Rectangle 20"/>
           <p:cNvSpPr/>
           <p:nvPr/>
         </p:nvSpPr>
         <p:spPr>
           <a:xfrm>
-            <a:off x="7344460" y="3511296"/>
-            <a:ext cx="2079345" cy="1078992"/>
+            <a:off x="7333488" y="4041648"/>
+            <a:ext cx="2093976" cy="1005840"/>
           </a:xfrm>
           <a:prstGeom prst="roundRect">
             <a:avLst>
@@ -32633,20 +34104,22 @@
       </p:sp>
       <p:sp>
         <p:nvSpPr>
-          <p:cNvPr id="20" name="Oval 19"/>
+          <p:cNvPr id="22" name="Rounded Rectangle 21"/>
           <p:cNvSpPr/>
           <p:nvPr/>
         </p:nvSpPr>
         <p:spPr>
           <a:xfrm>
-            <a:off x="8228685" y="3593592"/>
-            <a:ext cx="310896" cy="310896"/>
-          </a:xfrm>
-          <a:prstGeom prst="ellipse">
-            <a:avLst/>
+            <a:off x="7461504" y="4151376"/>
+            <a:ext cx="1837943" cy="256032"/>
+          </a:xfrm>
+          <a:prstGeom prst="roundRect">
+            <a:avLst>
+              <a:gd name="adj" fmla="val 40000"/>
+            </a:avLst>
           </a:prstGeom>
           <a:solidFill>
-            <a:srgbClr val="028090"/>
+            <a:srgbClr val="E4F1F2"/>
           </a:solidFill>
           <a:ln>
             <a:noFill/>
@@ -32677,14 +34150,14 @@
       </p:sp>
       <p:sp>
         <p:nvSpPr>
-          <p:cNvPr id="21" name="TextBox 20"/>
-          <p:cNvSpPr txBox="1"/>
-          <p:nvPr/>
-        </p:nvSpPr>
-        <p:spPr>
-          <a:xfrm>
-            <a:off x="8228685" y="3593592"/>
-            <a:ext cx="310896" cy="310896"/>
+          <p:cNvPr id="23" name="TextBox 22"/>
+          <p:cNvSpPr txBox="1"/>
+          <p:nvPr/>
+        </p:nvSpPr>
+        <p:spPr>
+          <a:xfrm>
+            <a:off x="7461504" y="4151376"/>
+            <a:ext cx="1837943" cy="256032"/>
           </a:xfrm>
           <a:prstGeom prst="rect">
             <a:avLst/>
@@ -32703,27 +34176,27 @@
               </a:lnSpc>
             </a:pPr>
             <a:r>
-              <a:rPr sz="1400" b="1" i="0">
-                <a:solidFill>
-                  <a:srgbClr val="FFFFFF"/>
-                </a:solidFill>
-                <a:latin typeface="Arial"/>
-              </a:rPr>
-              <a:t>4</a:t>
-            </a:r>
-          </a:p>
-        </p:txBody>
-      </p:sp>
-      <p:sp>
-        <p:nvSpPr>
-          <p:cNvPr id="22" name="TextBox 21"/>
-          <p:cNvSpPr txBox="1"/>
-          <p:nvPr/>
-        </p:nvSpPr>
-        <p:spPr>
-          <a:xfrm>
-            <a:off x="7399324" y="3968496"/>
-            <a:ext cx="1969617" cy="676656"/>
+              <a:rPr sz="950" b="1" i="0">
+                <a:solidFill>
+                  <a:srgbClr val="028090"/>
+                </a:solidFill>
+                <a:latin typeface="Arial"/>
+              </a:rPr>
+              <a:t>человек обязателен</a:t>
+            </a:r>
+          </a:p>
+        </p:txBody>
+      </p:sp>
+      <p:sp>
+        <p:nvSpPr>
+          <p:cNvPr id="24" name="TextBox 23"/>
+          <p:cNvSpPr txBox="1"/>
+          <p:nvPr/>
+        </p:nvSpPr>
+        <p:spPr>
+          <a:xfrm>
+            <a:off x="7443215" y="4462272"/>
+            <a:ext cx="1874519" cy="493776"/>
           </a:xfrm>
           <a:prstGeom prst="rect">
             <a:avLst/>
@@ -32738,32 +34211,32 @@
           <a:p>
             <a:pPr algn="ctr">
               <a:lnSpc>
-                <a:spcPct val="102000"/>
-              </a:lnSpc>
-            </a:pPr>
-            <a:r>
-              <a:rPr sz="1250" b="1" i="0">
+                <a:spcPct val="105000"/>
+              </a:lnSpc>
+            </a:pPr>
+            <a:r>
+              <a:rPr sz="1300" b="1" i="0">
                 <a:solidFill>
                   <a:srgbClr val="21295C"/>
                 </a:solidFill>
                 <a:latin typeface="Arial"/>
               </a:rPr>
-              <a:t>уязвимость +
-утечка</a:t>
-            </a:r>
-          </a:p>
-        </p:txBody>
-      </p:sp>
-      <p:sp>
-        <p:nvSpPr>
-          <p:cNvPr id="23" name="Rounded Rectangle 22"/>
+              <a:t>безопасность
+кода</a:t>
+            </a:r>
+          </a:p>
+        </p:txBody>
+      </p:sp>
+      <p:sp>
+        <p:nvSpPr>
+          <p:cNvPr id="25" name="Rounded Rectangle 24"/>
           <p:cNvSpPr/>
           <p:nvPr/>
         </p:nvSpPr>
         <p:spPr>
           <a:xfrm>
-            <a:off x="9624974" y="3511296"/>
-            <a:ext cx="2079345" cy="1078992"/>
+            <a:off x="9610344" y="4041648"/>
+            <a:ext cx="2093976" cy="1005840"/>
           </a:xfrm>
           <a:prstGeom prst="roundRect">
             <a:avLst>
@@ -32804,20 +34277,22 @@
       </p:sp>
       <p:sp>
         <p:nvSpPr>
-          <p:cNvPr id="24" name="Oval 23"/>
+          <p:cNvPr id="26" name="Rounded Rectangle 25"/>
           <p:cNvSpPr/>
           <p:nvPr/>
         </p:nvSpPr>
         <p:spPr>
           <a:xfrm>
-            <a:off x="10509199" y="3593592"/>
-            <a:ext cx="310896" cy="310896"/>
-          </a:xfrm>
-          <a:prstGeom prst="ellipse">
-            <a:avLst/>
+            <a:off x="9738360" y="4151376"/>
+            <a:ext cx="1837943" cy="256032"/>
+          </a:xfrm>
+          <a:prstGeom prst="roundRect">
+            <a:avLst>
+              <a:gd name="adj" fmla="val 40000"/>
+            </a:avLst>
           </a:prstGeom>
           <a:solidFill>
-            <a:srgbClr val="028090"/>
+            <a:srgbClr val="E4F1F2"/>
           </a:solidFill>
           <a:ln>
             <a:noFill/>
@@ -32848,14 +34323,14 @@
       </p:sp>
       <p:sp>
         <p:nvSpPr>
-          <p:cNvPr id="25" name="TextBox 24"/>
-          <p:cNvSpPr txBox="1"/>
-          <p:nvPr/>
-        </p:nvSpPr>
-        <p:spPr>
-          <a:xfrm>
-            <a:off x="10509199" y="3593592"/>
-            <a:ext cx="310896" cy="310896"/>
+          <p:cNvPr id="27" name="TextBox 26"/>
+          <p:cNvSpPr txBox="1"/>
+          <p:nvPr/>
+        </p:nvSpPr>
+        <p:spPr>
+          <a:xfrm>
+            <a:off x="9738360" y="4151376"/>
+            <a:ext cx="1837943" cy="256032"/>
           </a:xfrm>
           <a:prstGeom prst="rect">
             <a:avLst/>
@@ -32874,27 +34349,27 @@
               </a:lnSpc>
             </a:pPr>
             <a:r>
-              <a:rPr sz="1400" b="1" i="0">
-                <a:solidFill>
-                  <a:srgbClr val="FFFFFF"/>
-                </a:solidFill>
-                <a:latin typeface="Arial"/>
-              </a:rPr>
-              <a:t>5</a:t>
-            </a:r>
-          </a:p>
-        </p:txBody>
-      </p:sp>
-      <p:sp>
-        <p:nvSpPr>
-          <p:cNvPr id="26" name="TextBox 25"/>
-          <p:cNvSpPr txBox="1"/>
-          <p:nvPr/>
-        </p:nvSpPr>
-        <p:spPr>
-          <a:xfrm>
-            <a:off x="9679838" y="3968496"/>
-            <a:ext cx="1969617" cy="676656"/>
+              <a:rPr sz="950" b="1" i="0">
+                <a:solidFill>
+                  <a:srgbClr val="028090"/>
+                </a:solidFill>
+                <a:latin typeface="Arial"/>
+              </a:rPr>
+              <a:t>человек обязателен</a:t>
+            </a:r>
+          </a:p>
+        </p:txBody>
+      </p:sp>
+      <p:sp>
+        <p:nvSpPr>
+          <p:cNvPr id="28" name="TextBox 27"/>
+          <p:cNvSpPr txBox="1"/>
+          <p:nvPr/>
+        </p:nvSpPr>
+        <p:spPr>
+          <a:xfrm>
+            <a:off x="9720072" y="4462272"/>
+            <a:ext cx="1874519" cy="493776"/>
           </a:xfrm>
           <a:prstGeom prst="rect">
             <a:avLst/>
@@ -32909,32 +34384,32 @@
           <a:p>
             <a:pPr algn="ctr">
               <a:lnSpc>
-                <a:spcPct val="102000"/>
-              </a:lnSpc>
-            </a:pPr>
-            <a:r>
-              <a:rPr sz="1250" b="1" i="0">
+                <a:spcPct val="105000"/>
+              </a:lnSpc>
+            </a:pPr>
+            <a:r>
+              <a:rPr sz="1300" b="1" i="0">
                 <a:solidFill>
                   <a:srgbClr val="21295C"/>
                 </a:solidFill>
                 <a:latin typeface="Arial"/>
               </a:rPr>
               <a:t>что строить
-(Brooks / DORA)</a:t>
-            </a:r>
-          </a:p>
-        </p:txBody>
-      </p:sp>
-      <p:sp>
-        <p:nvSpPr>
-          <p:cNvPr id="27" name="Rounded Rectangle 26"/>
+(essential)</a:t>
+            </a:r>
+          </a:p>
+        </p:txBody>
+      </p:sp>
+      <p:sp>
+        <p:nvSpPr>
+          <p:cNvPr id="29" name="Rounded Rectangle 28"/>
           <p:cNvSpPr/>
           <p:nvPr/>
         </p:nvSpPr>
         <p:spPr>
           <a:xfrm>
-            <a:off x="502920" y="4754880"/>
-            <a:ext cx="11201400" cy="969264"/>
+            <a:off x="502920" y="5212080"/>
+            <a:ext cx="11201400" cy="1060704"/>
           </a:xfrm>
           <a:prstGeom prst="roundRect">
             <a:avLst>
@@ -32975,14 +34450,14 @@
       </p:sp>
       <p:sp>
         <p:nvSpPr>
-          <p:cNvPr id="28" name="TextBox 27"/>
-          <p:cNvSpPr txBox="1"/>
-          <p:nvPr/>
-        </p:nvSpPr>
-        <p:spPr>
-          <a:xfrm>
-            <a:off x="722376" y="4809744"/>
-            <a:ext cx="10762488" cy="859536"/>
+          <p:cNvPr id="30" name="TextBox 29"/>
+          <p:cNvSpPr txBox="1"/>
+          <p:nvPr/>
+        </p:nvSpPr>
+        <p:spPr>
+          <a:xfrm>
+            <a:off x="722376" y="5266944"/>
+            <a:ext cx="10762488" cy="950976"/>
           </a:xfrm>
           <a:prstGeom prst="rect">
             <a:avLst/>
@@ -33007,46 +34482,7 @@
                 </a:solidFill>
                 <a:latin typeface="Arial"/>
               </a:rPr>
-              <a:t>Ответ — не «AI хорош» и не «AI плох», а аппарат: для конкретной задачи назвать уровень автономии, конфигурацию и точку обязательного человеческого контроля. Главное в работе инженера — то, что НЕ делегируется.</a:t>
-            </a:r>
-          </a:p>
-        </p:txBody>
-      </p:sp>
-      <p:sp>
-        <p:nvSpPr>
-          <p:cNvPr id="29" name="TextBox 28"/>
-          <p:cNvSpPr txBox="1"/>
-          <p:nvPr/>
-        </p:nvSpPr>
-        <p:spPr>
-          <a:xfrm>
-            <a:off x="502920" y="6437376"/>
-            <a:ext cx="11201400" cy="310896"/>
-          </a:xfrm>
-          <a:prstGeom prst="rect">
-            <a:avLst/>
-          </a:prstGeom>
-          <a:noFill/>
-        </p:spPr>
-        <p:txBody>
-          <a:bodyPr wrap="square" lIns="0" rIns="0" tIns="0" bIns="0" anchor="t">
-            <a:spAutoFit/>
-          </a:bodyPr>
-          <a:lstStyle/>
-          <a:p>
-            <a:pPr algn="l">
-              <a:lnSpc>
-                <a:spcPct val="100000"/>
-              </a:lnSpc>
-            </a:pPr>
-            <a:r>
-              <a:rPr sz="1200" b="0" i="1">
-                <a:solidFill>
-                  <a:srgbClr val="1C7293"/>
-                </a:solidFill>
-                <a:latin typeface="Arial"/>
-              </a:rPr>
-              <a:t>Лестница автономности A–D — учебная карта этой лекции, не отраслевой стандарт. Каждый уровень разберём отдельно.</a:t>
+              <a:t>Главное в работе инженера — именно то, что НЕ делегируется. Первая половина вопроса — про скорость; вторая — про ответственность. Ответственность не делегируется.</a:t>
             </a:r>
           </a:p>
         </p:txBody>
@@ -33077,8 +34513,8 @@
         </p:nvSpPr>
         <p:spPr>
           <a:xfrm>
-            <a:off x="502920" y="365760"/>
-            <a:ext cx="11201400" cy="841248"/>
+            <a:off x="502920" y="310896"/>
+            <a:ext cx="11201400" cy="530352"/>
           </a:xfrm>
           <a:prstGeom prst="rect">
             <a:avLst/>
@@ -33097,13 +34533,13 @@
               </a:lnSpc>
             </a:pPr>
             <a:r>
-              <a:rPr sz="2600" b="1" i="0">
+              <a:rPr sz="2500" b="1" i="0">
                 <a:solidFill>
                   <a:srgbClr val="21295C"/>
                 </a:solidFill>
                 <a:latin typeface="Arial"/>
               </a:rPr>
-              <a:t>Одна рамка для всех четырёх уровней.</a:t>
+              <a:t>Чем выше автономия — тем больше радиус поражения ошибки.</a:t>
             </a:r>
           </a:p>
         </p:txBody>
@@ -33116,7 +34552,7 @@
         </p:nvSpPr>
         <p:spPr>
           <a:xfrm>
-            <a:off x="502920" y="1060704"/>
+            <a:off x="502920" y="896112"/>
             <a:ext cx="11201400" cy="310896"/>
           </a:xfrm>
           <a:prstGeom prst="rect">
@@ -33132,7 +34568,7 @@
           <a:p>
             <a:pPr algn="l">
               <a:lnSpc>
-                <a:spcPct val="115000"/>
+                <a:spcPct val="110000"/>
               </a:lnSpc>
             </a:pPr>
             <a:r>
@@ -33142,7 +34578,7 @@
                 </a:solidFill>
                 <a:latin typeface="Arial"/>
               </a:rPr>
-              <a:t>Снимает главный риск перечисления уровней — превращение их в список инструментов вместо аппарата суждения.</a:t>
+              <a:t>Поэтому точка обязательного человека не исчезает с подъёмом — она смещается и ужесточается.</a:t>
             </a:r>
           </a:p>
         </p:txBody>
@@ -33155,12 +34591,12 @@
         </p:nvSpPr>
         <p:spPr>
           <a:xfrm>
-            <a:off x="502920" y="1481328"/>
-            <a:ext cx="2649474" cy="2788920"/>
+            <a:off x="365760" y="1298448"/>
+            <a:ext cx="11475720" cy="3749039"/>
           </a:xfrm>
           <a:prstGeom prst="roundRect">
             <a:avLst>
-              <a:gd name="adj" fmla="val 11504"/>
+              <a:gd name="adj" fmla="val 8130"/>
             </a:avLst>
           </a:prstGeom>
           <a:solidFill>
@@ -33195,131 +34631,25 @@
           </a:p>
         </p:txBody>
       </p:sp>
-      <p:pic>
-        <p:nvPicPr>
-          <p:cNvPr id="5" name="Picture 4" descr="layout-grid-mid.png"/>
-          <p:cNvPicPr>
-            <a:picLocks noChangeAspect="1"/>
-          </p:cNvPicPr>
-          <p:nvPr/>
-        </p:nvPicPr>
-        <p:blipFill>
-          <a:blip r:embed="rId2"/>
-          <a:stretch>
-            <a:fillRect/>
-          </a:stretch>
-        </p:blipFill>
-        <p:spPr>
-          <a:xfrm>
-            <a:off x="1553337" y="1719072"/>
-            <a:ext cx="548640" cy="548640"/>
-          </a:xfrm>
-          <a:prstGeom prst="rect">
-            <a:avLst/>
-          </a:prstGeom>
-        </p:spPr>
-      </p:pic>
-      <p:sp>
-        <p:nvSpPr>
-          <p:cNvPr id="6" name="TextBox 5"/>
-          <p:cNvSpPr txBox="1"/>
-          <p:nvPr/>
-        </p:nvSpPr>
-        <p:spPr>
-          <a:xfrm>
-            <a:off x="630936" y="2395728"/>
-            <a:ext cx="2393441" cy="566928"/>
-          </a:xfrm>
-          <a:prstGeom prst="rect">
-            <a:avLst/>
-          </a:prstGeom>
-          <a:noFill/>
-        </p:spPr>
-        <p:txBody>
-          <a:bodyPr wrap="square" lIns="0" rIns="0" tIns="0" bIns="0" anchor="ctr">
-            <a:spAutoFit/>
-          </a:bodyPr>
-          <a:lstStyle/>
-          <a:p>
-            <a:pPr algn="ctr">
-              <a:lnSpc>
-                <a:spcPct val="100000"/>
-              </a:lnSpc>
-            </a:pPr>
-            <a:r>
-              <a:rPr sz="1500" b="1" i="0">
-                <a:solidFill>
-                  <a:srgbClr val="065A82"/>
-                </a:solidFill>
-                <a:latin typeface="Arial"/>
-              </a:rPr>
-              <a:t>1. Что делает AI</a:t>
-            </a:r>
-          </a:p>
-        </p:txBody>
-      </p:sp>
-      <p:sp>
-        <p:nvSpPr>
-          <p:cNvPr id="7" name="TextBox 6"/>
-          <p:cNvSpPr txBox="1"/>
-          <p:nvPr/>
-        </p:nvSpPr>
-        <p:spPr>
-          <a:xfrm>
-            <a:off x="667512" y="2999232"/>
-            <a:ext cx="2320290" cy="1161287"/>
-          </a:xfrm>
-          <a:prstGeom prst="rect">
-            <a:avLst/>
-          </a:prstGeom>
-          <a:noFill/>
-        </p:spPr>
-        <p:txBody>
-          <a:bodyPr wrap="square" lIns="0" rIns="0" tIns="0" bIns="0" anchor="t">
-            <a:spAutoFit/>
-          </a:bodyPr>
-          <a:lstStyle/>
-          <a:p>
-            <a:pPr algn="ctr">
-              <a:lnSpc>
-                <a:spcPct val="116000"/>
-              </a:lnSpc>
-            </a:pPr>
-            <a:r>
-              <a:rPr sz="1250" b="0" i="0">
-                <a:solidFill>
-                  <a:srgbClr val="21295C"/>
-                </a:solidFill>
-                <a:latin typeface="Arial"/>
-              </a:rPr>
-              <a:t>какой объём работы AI выполняет самостоятельно на этом уровне</a:t>
-            </a:r>
-          </a:p>
-        </p:txBody>
-      </p:sp>
-      <p:sp>
-        <p:nvSpPr>
-          <p:cNvPr id="8" name="Rounded Rectangle 7"/>
+      <p:sp>
+        <p:nvSpPr>
+          <p:cNvPr id="5" name="Oval 4"/>
           <p:cNvSpPr/>
           <p:nvPr/>
         </p:nvSpPr>
         <p:spPr>
           <a:xfrm>
-            <a:off x="3353562" y="1481328"/>
-            <a:ext cx="2649474" cy="2788920"/>
-          </a:xfrm>
-          <a:prstGeom prst="roundRect">
-            <a:avLst>
-              <a:gd name="adj" fmla="val 11504"/>
-            </a:avLst>
+            <a:off x="1688211" y="1426464"/>
+            <a:ext cx="457200" cy="457200"/>
+          </a:xfrm>
+          <a:prstGeom prst="ellipse">
+            <a:avLst/>
           </a:prstGeom>
           <a:solidFill>
-            <a:srgbClr val="F4F7FA"/>
+            <a:srgbClr val="1C7293"/>
           </a:solidFill>
-          <a:ln w="19050">
-            <a:solidFill>
-              <a:srgbClr val="1C7293"/>
-            </a:solidFill>
+          <a:ln>
+            <a:noFill/>
           </a:ln>
           <a:effectLst/>
         </p:spPr>
@@ -33345,40 +34675,16 @@
           </a:p>
         </p:txBody>
       </p:sp>
-      <p:pic>
-        <p:nvPicPr>
-          <p:cNvPr id="9" name="Picture 8" descr="users-mid.png"/>
-          <p:cNvPicPr>
-            <a:picLocks noChangeAspect="1"/>
-          </p:cNvPicPr>
-          <p:nvPr/>
-        </p:nvPicPr>
-        <p:blipFill>
-          <a:blip r:embed="rId3"/>
-          <a:stretch>
-            <a:fillRect/>
-          </a:stretch>
-        </p:blipFill>
-        <p:spPr>
-          <a:xfrm>
-            <a:off x="4403979" y="1719072"/>
-            <a:ext cx="548640" cy="548640"/>
-          </a:xfrm>
-          <a:prstGeom prst="rect">
-            <a:avLst/>
-          </a:prstGeom>
-        </p:spPr>
-      </p:pic>
-      <p:sp>
-        <p:nvSpPr>
-          <p:cNvPr id="10" name="TextBox 9"/>
-          <p:cNvSpPr txBox="1"/>
-          <p:nvPr/>
-        </p:nvSpPr>
-        <p:spPr>
-          <a:xfrm>
-            <a:off x="3481578" y="2395728"/>
-            <a:ext cx="2393441" cy="566928"/>
+      <p:sp>
+        <p:nvSpPr>
+          <p:cNvPr id="6" name="TextBox 5"/>
+          <p:cNvSpPr txBox="1"/>
+          <p:nvPr/>
+        </p:nvSpPr>
+        <p:spPr>
+          <a:xfrm>
+            <a:off x="1688211" y="1426464"/>
+            <a:ext cx="457200" cy="457200"/>
           </a:xfrm>
           <a:prstGeom prst="rect">
             <a:avLst/>
@@ -33393,31 +34699,31 @@
           <a:p>
             <a:pPr algn="ctr">
               <a:lnSpc>
-                <a:spcPct val="100000"/>
-              </a:lnSpc>
-            </a:pPr>
-            <a:r>
-              <a:rPr sz="1500" b="1" i="0">
-                <a:solidFill>
-                  <a:srgbClr val="065A82"/>
-                </a:solidFill>
-                <a:latin typeface="Arial"/>
-              </a:rPr>
-              <a:t>2. Кто решает</a:t>
-            </a:r>
-          </a:p>
-        </p:txBody>
-      </p:sp>
-      <p:sp>
-        <p:nvSpPr>
-          <p:cNvPr id="11" name="TextBox 10"/>
-          <p:cNvSpPr txBox="1"/>
-          <p:nvPr/>
-        </p:nvSpPr>
-        <p:spPr>
-          <a:xfrm>
-            <a:off x="3518154" y="2999232"/>
-            <a:ext cx="2320290" cy="1161287"/>
+                <a:spcPct val="115000"/>
+              </a:lnSpc>
+            </a:pPr>
+            <a:r>
+              <a:rPr sz="2200" b="1" i="0">
+                <a:solidFill>
+                  <a:srgbClr val="FFFFFF"/>
+                </a:solidFill>
+                <a:latin typeface="Arial"/>
+              </a:rPr>
+              <a:t>A</a:t>
+            </a:r>
+          </a:p>
+        </p:txBody>
+      </p:sp>
+      <p:sp>
+        <p:nvSpPr>
+          <p:cNvPr id="7" name="TextBox 6"/>
+          <p:cNvSpPr txBox="1"/>
+          <p:nvPr/>
+        </p:nvSpPr>
+        <p:spPr>
+          <a:xfrm>
+            <a:off x="621792" y="1920240"/>
+            <a:ext cx="2590038" cy="256032"/>
           </a:xfrm>
           <a:prstGeom prst="rect">
             <a:avLst/>
@@ -33432,44 +34738,42 @@
           <a:p>
             <a:pPr algn="ctr">
               <a:lnSpc>
-                <a:spcPct val="116000"/>
-              </a:lnSpc>
-            </a:pPr>
-            <a:r>
-              <a:rPr sz="1250" b="0" i="0">
+                <a:spcPct val="115000"/>
+              </a:lnSpc>
+            </a:pPr>
+            <a:r>
+              <a:rPr sz="1150" b="1" i="0">
                 <a:solidFill>
                   <a:srgbClr val="21295C"/>
                 </a:solidFill>
                 <a:latin typeface="Arial"/>
               </a:rPr>
-              <a:t>кто принимает содержательное решение — что строить, что принять, что слить</a:t>
-            </a:r>
-          </a:p>
-        </p:txBody>
-      </p:sp>
-      <p:sp>
-        <p:nvSpPr>
-          <p:cNvPr id="12" name="Rounded Rectangle 11"/>
+              <a:t>автодополнение</a:t>
+            </a:r>
+          </a:p>
+        </p:txBody>
+      </p:sp>
+      <p:sp>
+        <p:nvSpPr>
+          <p:cNvPr id="8" name="Rounded Rectangle 7"/>
           <p:cNvSpPr/>
           <p:nvPr/>
         </p:nvSpPr>
         <p:spPr>
           <a:xfrm>
-            <a:off x="6204204" y="1481328"/>
-            <a:ext cx="2649474" cy="2788920"/>
+            <a:off x="768096" y="4005072"/>
+            <a:ext cx="2297430" cy="548640"/>
           </a:xfrm>
           <a:prstGeom prst="roundRect">
             <a:avLst>
-              <a:gd name="adj" fmla="val 11504"/>
+              <a:gd name="adj" fmla="val 5000"/>
             </a:avLst>
           </a:prstGeom>
           <a:solidFill>
-            <a:srgbClr val="FDF3DC"/>
+            <a:srgbClr val="1C7293"/>
           </a:solidFill>
-          <a:ln w="25400">
-            <a:solidFill>
-              <a:srgbClr val="F0AB00"/>
-            </a:solidFill>
+          <a:ln>
+            <a:noFill/>
           </a:ln>
           <a:effectLst/>
         </p:spPr>
@@ -33495,40 +34799,16 @@
           </a:p>
         </p:txBody>
       </p:sp>
-      <p:pic>
-        <p:nvPicPr>
-          <p:cNvPr id="13" name="Picture 12" descr="user-check-gold.png"/>
-          <p:cNvPicPr>
-            <a:picLocks noChangeAspect="1"/>
-          </p:cNvPicPr>
-          <p:nvPr/>
-        </p:nvPicPr>
-        <p:blipFill>
-          <a:blip r:embed="rId4"/>
-          <a:stretch>
-            <a:fillRect/>
-          </a:stretch>
-        </p:blipFill>
-        <p:spPr>
-          <a:xfrm>
-            <a:off x="7254621" y="1719072"/>
-            <a:ext cx="548640" cy="548640"/>
-          </a:xfrm>
-          <a:prstGeom prst="rect">
-            <a:avLst/>
-          </a:prstGeom>
-        </p:spPr>
-      </p:pic>
-      <p:sp>
-        <p:nvSpPr>
-          <p:cNvPr id="14" name="TextBox 13"/>
-          <p:cNvSpPr txBox="1"/>
-          <p:nvPr/>
-        </p:nvSpPr>
-        <p:spPr>
-          <a:xfrm>
-            <a:off x="6332220" y="2395728"/>
-            <a:ext cx="2393441" cy="566928"/>
+      <p:sp>
+        <p:nvSpPr>
+          <p:cNvPr id="9" name="TextBox 8"/>
+          <p:cNvSpPr txBox="1"/>
+          <p:nvPr/>
+        </p:nvSpPr>
+        <p:spPr>
+          <a:xfrm>
+            <a:off x="713232" y="4078224"/>
+            <a:ext cx="2407158" cy="402335"/>
           </a:xfrm>
           <a:prstGeom prst="rect">
             <a:avLst/>
@@ -33543,83 +34823,80 @@
           <a:p>
             <a:pPr algn="ctr">
               <a:lnSpc>
+                <a:spcPct val="105000"/>
+              </a:lnSpc>
+            </a:pPr>
+            <a:r>
+              <a:rPr sz="1200" b="1" i="0">
+                <a:solidFill>
+                  <a:srgbClr val="FFFFFF"/>
+                </a:solidFill>
+                <a:latin typeface="Arial"/>
+              </a:rPr>
+              <a:t>одна строка</a:t>
+            </a:r>
+          </a:p>
+        </p:txBody>
+      </p:sp>
+      <p:sp>
+        <p:nvSpPr>
+          <p:cNvPr id="10" name="TextBox 9"/>
+          <p:cNvSpPr txBox="1"/>
+          <p:nvPr/>
+        </p:nvSpPr>
+        <p:spPr>
+          <a:xfrm>
+            <a:off x="621792" y="4626864"/>
+            <a:ext cx="2590038" cy="384048"/>
+          </a:xfrm>
+          <a:prstGeom prst="rect">
+            <a:avLst/>
+          </a:prstGeom>
+          <a:noFill/>
+        </p:spPr>
+        <p:txBody>
+          <a:bodyPr wrap="square" lIns="0" rIns="0" tIns="0" bIns="0" anchor="ctr">
+            <a:spAutoFit/>
+          </a:bodyPr>
+          <a:lstStyle/>
+          <a:p>
+            <a:pPr algn="ctr">
+              <a:lnSpc>
                 <a:spcPct val="100000"/>
               </a:lnSpc>
             </a:pPr>
             <a:r>
-              <a:rPr sz="1500" b="1" i="0">
-                <a:solidFill>
-                  <a:srgbClr val="21295C"/>
-                </a:solidFill>
-                <a:latin typeface="Arial"/>
-              </a:rPr>
-              <a:t>3. Где человек обязателен</a:t>
-            </a:r>
-          </a:p>
-        </p:txBody>
-      </p:sp>
-      <p:sp>
-        <p:nvSpPr>
-          <p:cNvPr id="15" name="TextBox 14"/>
-          <p:cNvSpPr txBox="1"/>
-          <p:nvPr/>
-        </p:nvSpPr>
-        <p:spPr>
-          <a:xfrm>
-            <a:off x="6368796" y="2999232"/>
-            <a:ext cx="2320290" cy="1161287"/>
-          </a:xfrm>
-          <a:prstGeom prst="rect">
-            <a:avLst/>
-          </a:prstGeom>
-          <a:noFill/>
-        </p:spPr>
-        <p:txBody>
-          <a:bodyPr wrap="square" lIns="0" rIns="0" tIns="0" bIns="0" anchor="t">
-            <a:spAutoFit/>
-          </a:bodyPr>
-          <a:lstStyle/>
-          <a:p>
-            <a:pPr algn="ctr">
-              <a:lnSpc>
-                <a:spcPct val="116000"/>
-              </a:lnSpc>
-            </a:pPr>
-            <a:r>
-              <a:rPr sz="1250" b="0" i="0">
-                <a:solidFill>
-                  <a:srgbClr val="21295C"/>
-                </a:solidFill>
-                <a:latin typeface="Arial"/>
-              </a:rPr>
-              <a:t>точка, где отсутствие человека превращает уровень из инструмента в источник катастрофы</a:t>
-            </a:r>
-          </a:p>
-        </p:txBody>
-      </p:sp>
-      <p:sp>
-        <p:nvSpPr>
-          <p:cNvPr id="16" name="Rounded Rectangle 15"/>
+              <a:rPr sz="1100" b="1" i="0">
+                <a:solidFill>
+                  <a:srgbClr val="065A82"/>
+                </a:solidFill>
+                <a:latin typeface="Arial"/>
+              </a:rPr>
+              <a:t>человек:
+каждый токен</a:t>
+            </a:r>
+          </a:p>
+        </p:txBody>
+      </p:sp>
+      <p:sp>
+        <p:nvSpPr>
+          <p:cNvPr id="11" name="Oval 10"/>
           <p:cNvSpPr/>
           <p:nvPr/>
         </p:nvSpPr>
         <p:spPr>
           <a:xfrm>
-            <a:off x="9054846" y="1481328"/>
-            <a:ext cx="2649474" cy="2788920"/>
-          </a:xfrm>
-          <a:prstGeom prst="roundRect">
-            <a:avLst>
-              <a:gd name="adj" fmla="val 11504"/>
-            </a:avLst>
+            <a:off x="4479417" y="1426464"/>
+            <a:ext cx="457200" cy="457200"/>
+          </a:xfrm>
+          <a:prstGeom prst="ellipse">
+            <a:avLst/>
           </a:prstGeom>
           <a:solidFill>
-            <a:srgbClr val="F4F7FA"/>
+            <a:srgbClr val="065A82"/>
           </a:solidFill>
-          <a:ln w="19050">
-            <a:solidFill>
-              <a:srgbClr val="1C7293"/>
-            </a:solidFill>
+          <a:ln>
+            <a:noFill/>
           </a:ln>
           <a:effectLst/>
         </p:spPr>
@@ -33645,30 +34922,253 @@
           </a:p>
         </p:txBody>
       </p:sp>
-      <p:pic>
-        <p:nvPicPr>
-          <p:cNvPr id="17" name="Picture 16" descr="triangle-alert-mid.png"/>
-          <p:cNvPicPr>
-            <a:picLocks noChangeAspect="1"/>
-          </p:cNvPicPr>
-          <p:nvPr/>
-        </p:nvPicPr>
-        <p:blipFill>
-          <a:blip r:embed="rId5"/>
-          <a:stretch>
-            <a:fillRect/>
-          </a:stretch>
-        </p:blipFill>
-        <p:spPr>
-          <a:xfrm>
-            <a:off x="10105263" y="1719072"/>
-            <a:ext cx="548640" cy="548640"/>
-          </a:xfrm>
-          <a:prstGeom prst="rect">
-            <a:avLst/>
-          </a:prstGeom>
-        </p:spPr>
-      </p:pic>
+      <p:sp>
+        <p:nvSpPr>
+          <p:cNvPr id="12" name="TextBox 11"/>
+          <p:cNvSpPr txBox="1"/>
+          <p:nvPr/>
+        </p:nvSpPr>
+        <p:spPr>
+          <a:xfrm>
+            <a:off x="4479417" y="1426464"/>
+            <a:ext cx="457200" cy="457200"/>
+          </a:xfrm>
+          <a:prstGeom prst="rect">
+            <a:avLst/>
+          </a:prstGeom>
+          <a:noFill/>
+        </p:spPr>
+        <p:txBody>
+          <a:bodyPr wrap="square" lIns="0" rIns="0" tIns="0" bIns="0" anchor="ctr">
+            <a:spAutoFit/>
+          </a:bodyPr>
+          <a:lstStyle/>
+          <a:p>
+            <a:pPr algn="ctr">
+              <a:lnSpc>
+                <a:spcPct val="115000"/>
+              </a:lnSpc>
+            </a:pPr>
+            <a:r>
+              <a:rPr sz="2200" b="1" i="0">
+                <a:solidFill>
+                  <a:srgbClr val="FFFFFF"/>
+                </a:solidFill>
+                <a:latin typeface="Arial"/>
+              </a:rPr>
+              <a:t>B</a:t>
+            </a:r>
+          </a:p>
+        </p:txBody>
+      </p:sp>
+      <p:sp>
+        <p:nvSpPr>
+          <p:cNvPr id="13" name="TextBox 12"/>
+          <p:cNvSpPr txBox="1"/>
+          <p:nvPr/>
+        </p:nvSpPr>
+        <p:spPr>
+          <a:xfrm>
+            <a:off x="3412998" y="1920240"/>
+            <a:ext cx="2590038" cy="256032"/>
+          </a:xfrm>
+          <a:prstGeom prst="rect">
+            <a:avLst/>
+          </a:prstGeom>
+          <a:noFill/>
+        </p:spPr>
+        <p:txBody>
+          <a:bodyPr wrap="square" lIns="0" rIns="0" tIns="0" bIns="0" anchor="t">
+            <a:spAutoFit/>
+          </a:bodyPr>
+          <a:lstStyle/>
+          <a:p>
+            <a:pPr algn="ctr">
+              <a:lnSpc>
+                <a:spcPct val="115000"/>
+              </a:lnSpc>
+            </a:pPr>
+            <a:r>
+              <a:rPr sz="1150" b="1" i="0">
+                <a:solidFill>
+                  <a:srgbClr val="21295C"/>
+                </a:solidFill>
+                <a:latin typeface="Arial"/>
+              </a:rPr>
+              <a:t>мелкие задачи</a:t>
+            </a:r>
+          </a:p>
+        </p:txBody>
+      </p:sp>
+      <p:sp>
+        <p:nvSpPr>
+          <p:cNvPr id="14" name="Rounded Rectangle 13"/>
+          <p:cNvSpPr/>
+          <p:nvPr/>
+        </p:nvSpPr>
+        <p:spPr>
+          <a:xfrm>
+            <a:off x="3559302" y="3529584"/>
+            <a:ext cx="2297430" cy="1024128"/>
+          </a:xfrm>
+          <a:prstGeom prst="roundRect">
+            <a:avLst>
+              <a:gd name="adj" fmla="val 5000"/>
+            </a:avLst>
+          </a:prstGeom>
+          <a:solidFill>
+            <a:srgbClr val="065A82"/>
+          </a:solidFill>
+          <a:ln>
+            <a:noFill/>
+          </a:ln>
+          <a:effectLst/>
+        </p:spPr>
+        <p:style>
+          <a:lnRef idx="1">
+            <a:schemeClr val="accent1"/>
+          </a:lnRef>
+          <a:fillRef idx="3">
+            <a:schemeClr val="accent1"/>
+          </a:fillRef>
+          <a:effectRef idx="2">
+            <a:schemeClr val="accent1"/>
+          </a:effectRef>
+          <a:fontRef idx="minor">
+            <a:schemeClr val="lt1"/>
+          </a:fontRef>
+        </p:style>
+        <p:txBody>
+          <a:bodyPr rtlCol="0" anchor="ctr"/>
+          <a:lstStyle/>
+          <a:p>
+            <a:pPr algn="ctr"/>
+          </a:p>
+        </p:txBody>
+      </p:sp>
+      <p:sp>
+        <p:nvSpPr>
+          <p:cNvPr id="15" name="TextBox 14"/>
+          <p:cNvSpPr txBox="1"/>
+          <p:nvPr/>
+        </p:nvSpPr>
+        <p:spPr>
+          <a:xfrm>
+            <a:off x="3504438" y="3602736"/>
+            <a:ext cx="2407158" cy="877824"/>
+          </a:xfrm>
+          <a:prstGeom prst="rect">
+            <a:avLst/>
+          </a:prstGeom>
+          <a:noFill/>
+        </p:spPr>
+        <p:txBody>
+          <a:bodyPr wrap="square" lIns="0" rIns="0" tIns="0" bIns="0" anchor="ctr">
+            <a:spAutoFit/>
+          </a:bodyPr>
+          <a:lstStyle/>
+          <a:p>
+            <a:pPr algn="ctr">
+              <a:lnSpc>
+                <a:spcPct val="105000"/>
+              </a:lnSpc>
+            </a:pPr>
+            <a:r>
+              <a:rPr sz="1200" b="1" i="0">
+                <a:solidFill>
+                  <a:srgbClr val="FFFFFF"/>
+                </a:solidFill>
+                <a:latin typeface="Arial"/>
+              </a:rPr>
+              <a:t>функция / фикс</a:t>
+            </a:r>
+          </a:p>
+        </p:txBody>
+      </p:sp>
+      <p:sp>
+        <p:nvSpPr>
+          <p:cNvPr id="16" name="TextBox 15"/>
+          <p:cNvSpPr txBox="1"/>
+          <p:nvPr/>
+        </p:nvSpPr>
+        <p:spPr>
+          <a:xfrm>
+            <a:off x="3412998" y="4626864"/>
+            <a:ext cx="2590038" cy="384048"/>
+          </a:xfrm>
+          <a:prstGeom prst="rect">
+            <a:avLst/>
+          </a:prstGeom>
+          <a:noFill/>
+        </p:spPr>
+        <p:txBody>
+          <a:bodyPr wrap="square" lIns="0" rIns="0" tIns="0" bIns="0" anchor="ctr">
+            <a:spAutoFit/>
+          </a:bodyPr>
+          <a:lstStyle/>
+          <a:p>
+            <a:pPr algn="ctr">
+              <a:lnSpc>
+                <a:spcPct val="100000"/>
+              </a:lnSpc>
+            </a:pPr>
+            <a:r>
+              <a:rPr sz="1100" b="1" i="0">
+                <a:solidFill>
+                  <a:srgbClr val="065A82"/>
+                </a:solidFill>
+                <a:latin typeface="Arial"/>
+              </a:rPr>
+              <a:t>человек:
+ревью фрагмента</a:t>
+            </a:r>
+          </a:p>
+        </p:txBody>
+      </p:sp>
+      <p:sp>
+        <p:nvSpPr>
+          <p:cNvPr id="17" name="Oval 16"/>
+          <p:cNvSpPr/>
+          <p:nvPr/>
+        </p:nvSpPr>
+        <p:spPr>
+          <a:xfrm>
+            <a:off x="7270623" y="1426464"/>
+            <a:ext cx="457200" cy="457200"/>
+          </a:xfrm>
+          <a:prstGeom prst="ellipse">
+            <a:avLst/>
+          </a:prstGeom>
+          <a:solidFill>
+            <a:srgbClr val="21295C"/>
+          </a:solidFill>
+          <a:ln>
+            <a:noFill/>
+          </a:ln>
+          <a:effectLst/>
+        </p:spPr>
+        <p:style>
+          <a:lnRef idx="1">
+            <a:schemeClr val="accent1"/>
+          </a:lnRef>
+          <a:fillRef idx="3">
+            <a:schemeClr val="accent1"/>
+          </a:fillRef>
+          <a:effectRef idx="2">
+            <a:schemeClr val="accent1"/>
+          </a:effectRef>
+          <a:fontRef idx="minor">
+            <a:schemeClr val="lt1"/>
+          </a:fontRef>
+        </p:style>
+        <p:txBody>
+          <a:bodyPr rtlCol="0" anchor="ctr"/>
+          <a:lstStyle/>
+          <a:p>
+            <a:pPr algn="ctr"/>
+          </a:p>
+        </p:txBody>
+      </p:sp>
       <p:sp>
         <p:nvSpPr>
           <p:cNvPr id="18" name="TextBox 17"/>
@@ -33677,8 +35177,8 @@
         </p:nvSpPr>
         <p:spPr>
           <a:xfrm>
-            <a:off x="9182862" y="2395728"/>
-            <a:ext cx="2393441" cy="566928"/>
+            <a:off x="7270623" y="1426464"/>
+            <a:ext cx="457200" cy="457200"/>
           </a:xfrm>
           <a:prstGeom prst="rect">
             <a:avLst/>
@@ -33693,17 +35193,17 @@
           <a:p>
             <a:pPr algn="ctr">
               <a:lnSpc>
-                <a:spcPct val="100000"/>
-              </a:lnSpc>
-            </a:pPr>
-            <a:r>
-              <a:rPr sz="1500" b="1" i="0">
-                <a:solidFill>
-                  <a:srgbClr val="065A82"/>
-                </a:solidFill>
-                <a:latin typeface="Arial"/>
-              </a:rPr>
-              <a:t>4. Типичный риск</a:t>
+                <a:spcPct val="115000"/>
+              </a:lnSpc>
+            </a:pPr>
+            <a:r>
+              <a:rPr sz="2200" b="1" i="0">
+                <a:solidFill>
+                  <a:srgbClr val="FFFFFF"/>
+                </a:solidFill>
+                <a:latin typeface="Arial"/>
+              </a:rPr>
+              <a:t>C</a:t>
             </a:r>
           </a:p>
         </p:txBody>
@@ -33716,8 +35216,8 @@
         </p:nvSpPr>
         <p:spPr>
           <a:xfrm>
-            <a:off x="9219438" y="2999232"/>
-            <a:ext cx="2320290" cy="1161287"/>
+            <a:off x="6204204" y="1920240"/>
+            <a:ext cx="2590038" cy="256032"/>
           </a:xfrm>
           <a:prstGeom prst="rect">
             <a:avLst/>
@@ -33732,17 +35232,17 @@
           <a:p>
             <a:pPr algn="ctr">
               <a:lnSpc>
-                <a:spcPct val="116000"/>
-              </a:lnSpc>
-            </a:pPr>
-            <a:r>
-              <a:rPr sz="1250" b="0" i="0">
+                <a:spcPct val="115000"/>
+              </a:lnSpc>
+            </a:pPr>
+            <a:r>
+              <a:rPr sz="1150" b="1" i="0">
                 <a:solidFill>
                   <a:srgbClr val="21295C"/>
                 </a:solidFill>
                 <a:latin typeface="Arial"/>
               </a:rPr>
-              <a:t>характерный режим отказа именно этого уровня</a:t>
+              <a:t>кодинг-агент</a:t>
             </a:r>
           </a:p>
         </p:txBody>
@@ -33755,8 +35255,425 @@
         </p:nvSpPr>
         <p:spPr>
           <a:xfrm>
-            <a:off x="502920" y="4498848"/>
-            <a:ext cx="11201400" cy="1225296"/>
+            <a:off x="6350508" y="2962656"/>
+            <a:ext cx="2297430" cy="1591056"/>
+          </a:xfrm>
+          <a:prstGeom prst="roundRect">
+            <a:avLst>
+              <a:gd name="adj" fmla="val 5000"/>
+            </a:avLst>
+          </a:prstGeom>
+          <a:solidFill>
+            <a:srgbClr val="21295C"/>
+          </a:solidFill>
+          <a:ln>
+            <a:noFill/>
+          </a:ln>
+          <a:effectLst/>
+        </p:spPr>
+        <p:style>
+          <a:lnRef idx="1">
+            <a:schemeClr val="accent1"/>
+          </a:lnRef>
+          <a:fillRef idx="3">
+            <a:schemeClr val="accent1"/>
+          </a:fillRef>
+          <a:effectRef idx="2">
+            <a:schemeClr val="accent1"/>
+          </a:effectRef>
+          <a:fontRef idx="minor">
+            <a:schemeClr val="lt1"/>
+          </a:fontRef>
+        </p:style>
+        <p:txBody>
+          <a:bodyPr rtlCol="0" anchor="ctr"/>
+          <a:lstStyle/>
+          <a:p>
+            <a:pPr algn="ctr"/>
+          </a:p>
+        </p:txBody>
+      </p:sp>
+      <p:sp>
+        <p:nvSpPr>
+          <p:cNvPr id="21" name="TextBox 20"/>
+          <p:cNvSpPr txBox="1"/>
+          <p:nvPr/>
+        </p:nvSpPr>
+        <p:spPr>
+          <a:xfrm>
+            <a:off x="6295644" y="3035808"/>
+            <a:ext cx="2407158" cy="1444752"/>
+          </a:xfrm>
+          <a:prstGeom prst="rect">
+            <a:avLst/>
+          </a:prstGeom>
+          <a:noFill/>
+        </p:spPr>
+        <p:txBody>
+          <a:bodyPr wrap="square" lIns="0" rIns="0" tIns="0" bIns="0" anchor="ctr">
+            <a:spAutoFit/>
+          </a:bodyPr>
+          <a:lstStyle/>
+          <a:p>
+            <a:pPr algn="ctr">
+              <a:lnSpc>
+                <a:spcPct val="105000"/>
+              </a:lnSpc>
+            </a:pPr>
+            <a:r>
+              <a:rPr sz="1200" b="1" i="0">
+                <a:solidFill>
+                  <a:srgbClr val="FFFFFF"/>
+                </a:solidFill>
+                <a:latin typeface="Arial"/>
+              </a:rPr>
+              <a:t>много файлов сразу</a:t>
+            </a:r>
+          </a:p>
+        </p:txBody>
+      </p:sp>
+      <p:sp>
+        <p:nvSpPr>
+          <p:cNvPr id="22" name="TextBox 21"/>
+          <p:cNvSpPr txBox="1"/>
+          <p:nvPr/>
+        </p:nvSpPr>
+        <p:spPr>
+          <a:xfrm>
+            <a:off x="6204204" y="4626864"/>
+            <a:ext cx="2590038" cy="384048"/>
+          </a:xfrm>
+          <a:prstGeom prst="rect">
+            <a:avLst/>
+          </a:prstGeom>
+          <a:noFill/>
+        </p:spPr>
+        <p:txBody>
+          <a:bodyPr wrap="square" lIns="0" rIns="0" tIns="0" bIns="0" anchor="ctr">
+            <a:spAutoFit/>
+          </a:bodyPr>
+          <a:lstStyle/>
+          <a:p>
+            <a:pPr algn="ctr">
+              <a:lnSpc>
+                <a:spcPct val="100000"/>
+              </a:lnSpc>
+            </a:pPr>
+            <a:r>
+              <a:rPr sz="1100" b="1" i="0">
+                <a:solidFill>
+                  <a:srgbClr val="065A82"/>
+                </a:solidFill>
+                <a:latin typeface="Arial"/>
+              </a:rPr>
+              <a:t>человек:
+ревью PR до merge</a:t>
+            </a:r>
+          </a:p>
+        </p:txBody>
+      </p:sp>
+      <p:sp>
+        <p:nvSpPr>
+          <p:cNvPr id="23" name="Oval 22"/>
+          <p:cNvSpPr/>
+          <p:nvPr/>
+        </p:nvSpPr>
+        <p:spPr>
+          <a:xfrm>
+            <a:off x="10011537" y="1376172"/>
+            <a:ext cx="557784" cy="557784"/>
+          </a:xfrm>
+          <a:prstGeom prst="ellipse">
+            <a:avLst/>
+          </a:prstGeom>
+          <a:solidFill>
+            <a:srgbClr val="F0AB00"/>
+          </a:solidFill>
+          <a:ln>
+            <a:noFill/>
+          </a:ln>
+          <a:effectLst/>
+        </p:spPr>
+        <p:style>
+          <a:lnRef idx="1">
+            <a:schemeClr val="accent1"/>
+          </a:lnRef>
+          <a:fillRef idx="3">
+            <a:schemeClr val="accent1"/>
+          </a:fillRef>
+          <a:effectRef idx="2">
+            <a:schemeClr val="accent1"/>
+          </a:effectRef>
+          <a:fontRef idx="minor">
+            <a:schemeClr val="lt1"/>
+          </a:fontRef>
+        </p:style>
+        <p:txBody>
+          <a:bodyPr rtlCol="0" anchor="ctr"/>
+          <a:lstStyle/>
+          <a:p>
+            <a:pPr algn="ctr"/>
+          </a:p>
+        </p:txBody>
+      </p:sp>
+      <p:sp>
+        <p:nvSpPr>
+          <p:cNvPr id="24" name="Oval 23"/>
+          <p:cNvSpPr/>
+          <p:nvPr/>
+        </p:nvSpPr>
+        <p:spPr>
+          <a:xfrm>
+            <a:off x="10061829" y="1426464"/>
+            <a:ext cx="457200" cy="457200"/>
+          </a:xfrm>
+          <a:prstGeom prst="ellipse">
+            <a:avLst/>
+          </a:prstGeom>
+          <a:solidFill>
+            <a:srgbClr val="21295C"/>
+          </a:solidFill>
+          <a:ln>
+            <a:noFill/>
+          </a:ln>
+          <a:effectLst/>
+        </p:spPr>
+        <p:style>
+          <a:lnRef idx="1">
+            <a:schemeClr val="accent1"/>
+          </a:lnRef>
+          <a:fillRef idx="3">
+            <a:schemeClr val="accent1"/>
+          </a:fillRef>
+          <a:effectRef idx="2">
+            <a:schemeClr val="accent1"/>
+          </a:effectRef>
+          <a:fontRef idx="minor">
+            <a:schemeClr val="lt1"/>
+          </a:fontRef>
+        </p:style>
+        <p:txBody>
+          <a:bodyPr rtlCol="0" anchor="ctr"/>
+          <a:lstStyle/>
+          <a:p>
+            <a:pPr algn="ctr"/>
+          </a:p>
+        </p:txBody>
+      </p:sp>
+      <p:sp>
+        <p:nvSpPr>
+          <p:cNvPr id="25" name="TextBox 24"/>
+          <p:cNvSpPr txBox="1"/>
+          <p:nvPr/>
+        </p:nvSpPr>
+        <p:spPr>
+          <a:xfrm>
+            <a:off x="10061829" y="1426464"/>
+            <a:ext cx="457200" cy="457200"/>
+          </a:xfrm>
+          <a:prstGeom prst="rect">
+            <a:avLst/>
+          </a:prstGeom>
+          <a:noFill/>
+        </p:spPr>
+        <p:txBody>
+          <a:bodyPr wrap="square" lIns="0" rIns="0" tIns="0" bIns="0" anchor="ctr">
+            <a:spAutoFit/>
+          </a:bodyPr>
+          <a:lstStyle/>
+          <a:p>
+            <a:pPr algn="ctr">
+              <a:lnSpc>
+                <a:spcPct val="115000"/>
+              </a:lnSpc>
+            </a:pPr>
+            <a:r>
+              <a:rPr sz="2200" b="1" i="0">
+                <a:solidFill>
+                  <a:srgbClr val="FFFFFF"/>
+                </a:solidFill>
+                <a:latin typeface="Arial"/>
+              </a:rPr>
+              <a:t>D</a:t>
+            </a:r>
+          </a:p>
+        </p:txBody>
+      </p:sp>
+      <p:sp>
+        <p:nvSpPr>
+          <p:cNvPr id="26" name="TextBox 25"/>
+          <p:cNvSpPr txBox="1"/>
+          <p:nvPr/>
+        </p:nvSpPr>
+        <p:spPr>
+          <a:xfrm>
+            <a:off x="8995410" y="1920240"/>
+            <a:ext cx="2590038" cy="256032"/>
+          </a:xfrm>
+          <a:prstGeom prst="rect">
+            <a:avLst/>
+          </a:prstGeom>
+          <a:noFill/>
+        </p:spPr>
+        <p:txBody>
+          <a:bodyPr wrap="square" lIns="0" rIns="0" tIns="0" bIns="0" anchor="t">
+            <a:spAutoFit/>
+          </a:bodyPr>
+          <a:lstStyle/>
+          <a:p>
+            <a:pPr algn="ctr">
+              <a:lnSpc>
+                <a:spcPct val="115000"/>
+              </a:lnSpc>
+            </a:pPr>
+            <a:r>
+              <a:rPr sz="1150" b="1" i="0">
+                <a:solidFill>
+                  <a:srgbClr val="21295C"/>
+                </a:solidFill>
+                <a:latin typeface="Arial"/>
+              </a:rPr>
+              <a:t>оркестратор</a:t>
+            </a:r>
+          </a:p>
+        </p:txBody>
+      </p:sp>
+      <p:sp>
+        <p:nvSpPr>
+          <p:cNvPr id="27" name="Rounded Rectangle 26"/>
+          <p:cNvSpPr/>
+          <p:nvPr/>
+        </p:nvSpPr>
+        <p:spPr>
+          <a:xfrm>
+            <a:off x="9141714" y="2340864"/>
+            <a:ext cx="2297430" cy="2212848"/>
+          </a:xfrm>
+          <a:prstGeom prst="roundRect">
+            <a:avLst>
+              <a:gd name="adj" fmla="val 5000"/>
+            </a:avLst>
+          </a:prstGeom>
+          <a:solidFill>
+            <a:srgbClr val="F0AB00"/>
+          </a:solidFill>
+          <a:ln>
+            <a:noFill/>
+          </a:ln>
+          <a:effectLst/>
+        </p:spPr>
+        <p:style>
+          <a:lnRef idx="1">
+            <a:schemeClr val="accent1"/>
+          </a:lnRef>
+          <a:fillRef idx="3">
+            <a:schemeClr val="accent1"/>
+          </a:fillRef>
+          <a:effectRef idx="2">
+            <a:schemeClr val="accent1"/>
+          </a:effectRef>
+          <a:fontRef idx="minor">
+            <a:schemeClr val="lt1"/>
+          </a:fontRef>
+        </p:style>
+        <p:txBody>
+          <a:bodyPr rtlCol="0" anchor="ctr"/>
+          <a:lstStyle/>
+          <a:p>
+            <a:pPr algn="ctr"/>
+          </a:p>
+        </p:txBody>
+      </p:sp>
+      <p:sp>
+        <p:nvSpPr>
+          <p:cNvPr id="28" name="TextBox 27"/>
+          <p:cNvSpPr txBox="1"/>
+          <p:nvPr/>
+        </p:nvSpPr>
+        <p:spPr>
+          <a:xfrm>
+            <a:off x="9086850" y="2414016"/>
+            <a:ext cx="2407158" cy="2066543"/>
+          </a:xfrm>
+          <a:prstGeom prst="rect">
+            <a:avLst/>
+          </a:prstGeom>
+          <a:noFill/>
+        </p:spPr>
+        <p:txBody>
+          <a:bodyPr wrap="square" lIns="0" rIns="0" tIns="0" bIns="0" anchor="ctr">
+            <a:spAutoFit/>
+          </a:bodyPr>
+          <a:lstStyle/>
+          <a:p>
+            <a:pPr algn="ctr">
+              <a:lnSpc>
+                <a:spcPct val="105000"/>
+              </a:lnSpc>
+            </a:pPr>
+            <a:r>
+              <a:rPr sz="1200" b="1" i="0">
+                <a:solidFill>
+                  <a:srgbClr val="21295C"/>
+                </a:solidFill>
+                <a:latin typeface="Arial"/>
+              </a:rPr>
+              <a:t>прод-данные,
+необратимое</a:t>
+            </a:r>
+          </a:p>
+        </p:txBody>
+      </p:sp>
+      <p:sp>
+        <p:nvSpPr>
+          <p:cNvPr id="29" name="TextBox 28"/>
+          <p:cNvSpPr txBox="1"/>
+          <p:nvPr/>
+        </p:nvSpPr>
+        <p:spPr>
+          <a:xfrm>
+            <a:off x="8995410" y="4626864"/>
+            <a:ext cx="2590038" cy="384048"/>
+          </a:xfrm>
+          <a:prstGeom prst="rect">
+            <a:avLst/>
+          </a:prstGeom>
+          <a:noFill/>
+        </p:spPr>
+        <p:txBody>
+          <a:bodyPr wrap="square" lIns="0" rIns="0" tIns="0" bIns="0" anchor="ctr">
+            <a:spAutoFit/>
+          </a:bodyPr>
+          <a:lstStyle/>
+          <a:p>
+            <a:pPr algn="ctr">
+              <a:lnSpc>
+                <a:spcPct val="100000"/>
+              </a:lnSpc>
+            </a:pPr>
+            <a:r>
+              <a:rPr sz="1100" b="1" i="0">
+                <a:solidFill>
+                  <a:srgbClr val="21295C"/>
+                </a:solidFill>
+                <a:latin typeface="Arial"/>
+              </a:rPr>
+              <a:t>человек:
+только вход / выход</a:t>
+            </a:r>
+          </a:p>
+        </p:txBody>
+      </p:sp>
+      <p:sp>
+        <p:nvSpPr>
+          <p:cNvPr id="30" name="Rounded Rectangle 29"/>
+          <p:cNvSpPr/>
+          <p:nvPr/>
+        </p:nvSpPr>
+        <p:spPr>
+          <a:xfrm>
+            <a:off x="502920" y="5248656"/>
+            <a:ext cx="11201400" cy="1005840"/>
           </a:xfrm>
           <a:prstGeom prst="roundRect">
             <a:avLst>
@@ -33797,14 +35714,14 @@
       </p:sp>
       <p:sp>
         <p:nvSpPr>
-          <p:cNvPr id="21" name="TextBox 20"/>
-          <p:cNvSpPr txBox="1"/>
-          <p:nvPr/>
-        </p:nvSpPr>
-        <p:spPr>
-          <a:xfrm>
-            <a:off x="722376" y="4553712"/>
-            <a:ext cx="10762488" cy="1115568"/>
+          <p:cNvPr id="31" name="TextBox 30"/>
+          <p:cNvSpPr txBox="1"/>
+          <p:nvPr/>
+        </p:nvSpPr>
+        <p:spPr>
+          <a:xfrm>
+            <a:off x="722376" y="5303520"/>
+            <a:ext cx="10762488" cy="896112"/>
           </a:xfrm>
           <a:prstGeom prst="rect">
             <a:avLst/>
@@ -33829,7 +35746,7 @@
                 </a:solidFill>
                 <a:latin typeface="Arial"/>
               </a:rPr>
-              <a:t>Не повышай уровень автономии AI без явного требования задачи, которого уровень ниже не закрывает — каждый подъём оплачивается ослаблением человеческого контроля над тем, что попадает в кодовую базу. Это отраслевая проекция правила лестницы Лекции 3.</a:t>
+              <a:t>Тот же провал на уровне D стоит несравнимо дороже, чем на A. Поднимать автономию имеет смысл только под требование задачи — и только с гейтом под выросшую цену ошибки.</a:t>
             </a:r>
           </a:p>
         </p:txBody>
@@ -33860,8 +35777,8 @@
         </p:nvSpPr>
         <p:spPr>
           <a:xfrm>
-            <a:off x="502920" y="329184"/>
-            <a:ext cx="11201400" cy="475488"/>
+            <a:off x="502920" y="310896"/>
+            <a:ext cx="11201400" cy="512064"/>
           </a:xfrm>
           <a:prstGeom prst="rect">
             <a:avLst/>
@@ -33880,13 +35797,13 @@
               </a:lnSpc>
             </a:pPr>
             <a:r>
-              <a:rPr sz="2000" b="1" i="0">
+              <a:rPr sz="2100" b="1" i="0">
                 <a:solidFill>
                   <a:srgbClr val="21295C"/>
                 </a:solidFill>
                 <a:latin typeface="Arial"/>
               </a:rPr>
-              <a:t>Самый безопасный уровень безопасен только пока человек реально читает.</a:t>
+              <a:t>Уровень A — автодополнение: безопасен только пока человек реально читает.</a:t>
             </a:r>
           </a:p>
         </p:txBody>
@@ -33900,7 +35817,7 @@
         <p:spPr>
           <a:xfrm>
             <a:off x="502920" y="877824"/>
-            <a:ext cx="11201400" cy="457200"/>
+            <a:ext cx="11201400" cy="420624"/>
           </a:xfrm>
           <a:prstGeom prst="rect">
             <a:avLst/>
@@ -33915,7 +35832,7 @@
           <a:p>
             <a:pPr algn="l">
               <a:lnSpc>
-                <a:spcPct val="115000"/>
+                <a:spcPct val="112000"/>
               </a:lnSpc>
             </a:pPr>
             <a:r>
@@ -33925,7 +35842,7 @@
                 </a:solidFill>
                 <a:latin typeface="Arial"/>
               </a:rPr>
-              <a:t>Автодополнение — AI дописывает строку/блок по контексту файла; человек принимает или отклоняет каждое предложение в момент написания.</a:t>
+              <a:t>Первая ступень лестницы: AI дописывает строку или блок по контексту файла; человек принимает или отклоняет каждое предложение в момент написания.</a:t>
             </a:r>
           </a:p>
         </p:txBody>
@@ -34128,7 +36045,7 @@
           <a:p>
             <a:pPr algn="r">
               <a:lnSpc>
-                <a:spcPct val="115000"/>
+                <a:spcPct val="100000"/>
               </a:lnSpc>
             </a:pPr>
             <a:r>
@@ -34254,7 +36171,7 @@
           <a:p>
             <a:pPr algn="r">
               <a:lnSpc>
-                <a:spcPct val="115000"/>
+                <a:spcPct val="100000"/>
               </a:lnSpc>
             </a:pPr>
             <a:r>
@@ -34351,7 +36268,7 @@
                 </a:solidFill>
                 <a:latin typeface="Arial"/>
               </a:rPr>
-              <a:t>Знакомое легаси — эксперты (METR)</a:t>
+              <a:t>Знакомое легаси у экспертов</a:t>
             </a:r>
           </a:p>
         </p:txBody>
@@ -34380,17 +36297,18 @@
           <a:p>
             <a:pPr algn="r">
               <a:lnSpc>
-                <a:spcPct val="115000"/>
-              </a:lnSpc>
-            </a:pPr>
-            <a:r>
-              <a:rPr sz="3300" b="1" i="0">
+                <a:spcPct val="100000"/>
+              </a:lnSpc>
+            </a:pPr>
+            <a:r>
+              <a:rPr sz="1800" b="1" i="0">
                 <a:solidFill>
                   <a:srgbClr val="F0AB00"/>
                 </a:solidFill>
                 <a:latin typeface="Arial"/>
               </a:rPr>
-              <a:t>−19%</a:t>
+              <a:t>выигрыш
+исчезает</a:t>
             </a:r>
           </a:p>
         </p:txBody>
@@ -34477,7 +36395,7 @@
                 </a:solidFill>
                 <a:latin typeface="Arial"/>
               </a:rPr>
-              <a:t>Рамка уровня A</a:t>
+              <a:t>Где уже стоит — и в чём ловушка</a:t>
             </a:r>
           </a:p>
         </p:txBody>
@@ -34491,7 +36409,7 @@
         <p:spPr>
           <a:xfrm>
             <a:off x="7370064" y="1920240"/>
-            <a:ext cx="1691640" cy="420624"/>
+            <a:ext cx="1188720" cy="420624"/>
           </a:xfrm>
           <a:prstGeom prst="rect">
             <a:avLst/>
@@ -34510,13 +36428,13 @@
               </a:lnSpc>
             </a:pPr>
             <a:r>
-              <a:rPr sz="1250" b="1" i="0">
+              <a:rPr sz="1200" b="1" i="0">
                 <a:solidFill>
                   <a:srgbClr val="028090"/>
                 </a:solidFill>
                 <a:latin typeface="Arial"/>
               </a:rPr>
-              <a:t>Что делает AI:</a:t>
+              <a:t>Где стоит:</a:t>
             </a:r>
           </a:p>
         </p:txBody>
@@ -34529,8 +36447,8 @@
         </p:nvSpPr>
         <p:spPr>
           <a:xfrm>
-            <a:off x="9070848" y="1920240"/>
-            <a:ext cx="2395728" cy="420624"/>
+            <a:off x="8577072" y="1920240"/>
+            <a:ext cx="2889504" cy="420624"/>
           </a:xfrm>
           <a:prstGeom prst="rect">
             <a:avLst/>
@@ -34549,13 +36467,13 @@
               </a:lnSpc>
             </a:pPr>
             <a:r>
-              <a:rPr sz="1250" b="0" i="0">
+              <a:rPr sz="1200" b="0" i="0">
                 <a:solidFill>
                   <a:srgbClr val="21295C"/>
                 </a:solidFill>
                 <a:latin typeface="Arial"/>
               </a:rPr>
-              <a:t>предлагает продолжение по контексту</a:t>
+              <a:t>в IDE почти каждого инженера — Copilot-класс</a:t>
             </a:r>
           </a:p>
         </p:txBody>
@@ -34569,7 +36487,7 @@
         <p:spPr>
           <a:xfrm>
             <a:off x="7370064" y="2377440"/>
-            <a:ext cx="1691640" cy="420624"/>
+            <a:ext cx="1188720" cy="420624"/>
           </a:xfrm>
           <a:prstGeom prst="rect">
             <a:avLst/>
@@ -34588,13 +36506,13 @@
               </a:lnSpc>
             </a:pPr>
             <a:r>
-              <a:rPr sz="1250" b="1" i="0">
+              <a:rPr sz="1200" b="1" i="0">
                 <a:solidFill>
                   <a:srgbClr val="028090"/>
                 </a:solidFill>
                 <a:latin typeface="Arial"/>
               </a:rPr>
-              <a:t>Кто решает:</a:t>
+              <a:t>Человек:</a:t>
             </a:r>
           </a:p>
         </p:txBody>
@@ -34607,8 +36525,8 @@
         </p:nvSpPr>
         <p:spPr>
           <a:xfrm>
-            <a:off x="9070848" y="2377440"/>
-            <a:ext cx="2395728" cy="420624"/>
+            <a:off x="8577072" y="2377440"/>
+            <a:ext cx="2889504" cy="420624"/>
           </a:xfrm>
           <a:prstGeom prst="rect">
             <a:avLst/>
@@ -34627,13 +36545,13 @@
               </a:lnSpc>
             </a:pPr>
             <a:r>
-              <a:rPr sz="1250" b="0" i="0">
+              <a:rPr sz="1200" b="0" i="0">
                 <a:solidFill>
                   <a:srgbClr val="21295C"/>
                 </a:solidFill>
                 <a:latin typeface="Arial"/>
               </a:rPr>
-              <a:t>человек, на каждом предложении</a:t>
+              <a:t>читает и принимает каждое предложение сам</a:t>
             </a:r>
           </a:p>
         </p:txBody>
@@ -34647,7 +36565,7 @@
         <p:spPr>
           <a:xfrm>
             <a:off x="7370064" y="2834640"/>
-            <a:ext cx="1691640" cy="420624"/>
+            <a:ext cx="1188720" cy="420624"/>
           </a:xfrm>
           <a:prstGeom prst="rect">
             <a:avLst/>
@@ -34666,13 +36584,13 @@
               </a:lnSpc>
             </a:pPr>
             <a:r>
-              <a:rPr sz="1250" b="1" i="0">
+              <a:rPr sz="1200" b="1" i="0">
                 <a:solidFill>
                   <a:srgbClr val="028090"/>
                 </a:solidFill>
                 <a:latin typeface="Arial"/>
               </a:rPr>
-              <a:t>Где обязателен:</a:t>
+              <a:t>Ловушка:</a:t>
             </a:r>
           </a:p>
         </p:txBody>
@@ -34685,8 +36603,8 @@
         </p:nvSpPr>
         <p:spPr>
           <a:xfrm>
-            <a:off x="9070848" y="2834640"/>
-            <a:ext cx="2395728" cy="420624"/>
+            <a:off x="8577072" y="2834640"/>
+            <a:ext cx="2889504" cy="420624"/>
           </a:xfrm>
           <a:prstGeom prst="rect">
             <a:avLst/>
@@ -34705,13 +36623,13 @@
               </a:lnSpc>
             </a:pPr>
             <a:r>
-              <a:rPr sz="1250" b="0" i="0">
+              <a:rPr sz="1200" b="0" i="0">
                 <a:solidFill>
                   <a:srgbClr val="21295C"/>
                 </a:solidFill>
                 <a:latin typeface="Arial"/>
               </a:rPr>
-              <a:t>везде — максимум контроля</a:t>
+              <a:t>привычка жать «принять», не читая</a:t>
             </a:r>
           </a:p>
         </p:txBody>
@@ -34725,7 +36643,7 @@
         <p:spPr>
           <a:xfrm>
             <a:off x="7370064" y="3291840"/>
-            <a:ext cx="1691640" cy="420624"/>
+            <a:ext cx="1188720" cy="420624"/>
           </a:xfrm>
           <a:prstGeom prst="rect">
             <a:avLst/>
@@ -34744,13 +36662,13 @@
               </a:lnSpc>
             </a:pPr>
             <a:r>
-              <a:rPr sz="1250" b="1" i="0">
+              <a:rPr sz="1200" b="1" i="0">
                 <a:solidFill>
                   <a:srgbClr val="028090"/>
                 </a:solidFill>
                 <a:latin typeface="Arial"/>
               </a:rPr>
-              <a:t>Типичный риск:</a:t>
+              <a:t>Цена:</a:t>
             </a:r>
           </a:p>
         </p:txBody>
@@ -34763,8 +36681,8 @@
         </p:nvSpPr>
         <p:spPr>
           <a:xfrm>
-            <a:off x="9070848" y="3291840"/>
-            <a:ext cx="2395728" cy="420624"/>
+            <a:off x="8577072" y="3291840"/>
+            <a:ext cx="2889504" cy="420624"/>
           </a:xfrm>
           <a:prstGeom prst="rect">
             <a:avLst/>
@@ -34783,13 +36701,13 @@
               </a:lnSpc>
             </a:pPr>
             <a:r>
-              <a:rPr sz="1250" b="0" i="0">
+              <a:rPr sz="1200" b="0" i="0">
                 <a:solidFill>
                   <a:srgbClr val="21295C"/>
                 </a:solidFill>
                 <a:latin typeface="Arial"/>
               </a:rPr>
-              <a:t>автопринятие без чтения</a:t>
+              <a:t>клоны и уязвимые паттерны попадают молча</a:t>
             </a:r>
           </a:p>
         </p:txBody>
@@ -34876,7 +36794,7 @@
                 </a:solidFill>
                 <a:latin typeface="Arial"/>
               </a:rPr>
-              <a:t>Сними чтение — и самый безопасный уровень становится поставщиком техдолга на скорости набора текста. Gold-факт: −19% на знакомом легаси у экспертов (METR).</a:t>
+              <a:t>Сними чтение — и самый безопасный уровень становится поставщиком техдолга на скорости набора текста: на знакомом коде у экспертов выигрыш в скорости исчезает совсем.</a:t>
             </a:r>
           </a:p>
         </p:txBody>
@@ -34947,7 +36865,7 @@
         <p:spPr>
           <a:xfrm>
             <a:off x="502920" y="310896"/>
-            <a:ext cx="11201400" cy="822960"/>
+            <a:ext cx="11201400" cy="512064"/>
           </a:xfrm>
           <a:prstGeom prst="rect">
             <a:avLst/>
@@ -34966,13 +36884,13 @@
               </a:lnSpc>
             </a:pPr>
             <a:r>
-              <a:rPr sz="2000" b="1" i="0">
+              <a:rPr sz="2100" b="1" i="0">
                 <a:solidFill>
                   <a:srgbClr val="21295C"/>
                 </a:solidFill>
                 <a:latin typeface="Arial"/>
               </a:rPr>
-              <a:t>Граница A↔B — первое реальное делегирование: человек проверяет после, а не во время.</a:t>
+              <a:t>Уровень B: человек проверяет после, а не во время — первое делегирование.</a:t>
             </a:r>
           </a:p>
         </p:txBody>
@@ -34985,7 +36903,7 @@
         </p:nvSpPr>
         <p:spPr>
           <a:xfrm>
-            <a:off x="502920" y="1371600"/>
+            <a:off x="502920" y="1353312"/>
             <a:ext cx="11201400" cy="2432304"/>
           </a:xfrm>
           <a:prstGeom prst="roundRect">
@@ -35033,7 +36951,7 @@
         </p:nvSpPr>
         <p:spPr>
           <a:xfrm>
-            <a:off x="685800" y="1536192"/>
+            <a:off x="685800" y="1517904"/>
             <a:ext cx="2788920" cy="457200"/>
           </a:xfrm>
           <a:prstGeom prst="rect">
@@ -35079,7 +36997,7 @@
         </p:nvSpPr>
         <p:spPr>
           <a:xfrm>
-            <a:off x="3474720" y="1536192"/>
+            <a:off x="3474720" y="1517904"/>
             <a:ext cx="4160520" cy="457200"/>
           </a:xfrm>
           <a:prstGeom prst="rect">
@@ -35123,7 +37041,7 @@
         </p:nvSpPr>
         <p:spPr>
           <a:xfrm>
-            <a:off x="3474720" y="1536192"/>
+            <a:off x="3474720" y="1517904"/>
             <a:ext cx="4160520" cy="457200"/>
           </a:xfrm>
           <a:prstGeom prst="rect">
@@ -35162,7 +37080,7 @@
         </p:nvSpPr>
         <p:spPr>
           <a:xfrm>
-            <a:off x="7635240" y="1536192"/>
+            <a:off x="7635240" y="1517904"/>
             <a:ext cx="4160520" cy="457200"/>
           </a:xfrm>
           <a:prstGeom prst="rect">
@@ -35206,7 +37124,7 @@
         </p:nvSpPr>
         <p:spPr>
           <a:xfrm>
-            <a:off x="7635240" y="1536192"/>
+            <a:off x="7635240" y="1517904"/>
             <a:ext cx="4160520" cy="457200"/>
           </a:xfrm>
           <a:prstGeom prst="rect">
@@ -35245,7 +37163,7 @@
         </p:nvSpPr>
         <p:spPr>
           <a:xfrm>
-            <a:off x="685800" y="1993391"/>
+            <a:off x="685800" y="1975104"/>
             <a:ext cx="2788920" cy="566928"/>
           </a:xfrm>
           <a:prstGeom prst="rect">
@@ -35291,7 +37209,7 @@
         </p:nvSpPr>
         <p:spPr>
           <a:xfrm>
-            <a:off x="795528" y="1993391"/>
+            <a:off x="795528" y="1975104"/>
             <a:ext cx="2569463" cy="566928"/>
           </a:xfrm>
           <a:prstGeom prst="rect">
@@ -35330,7 +37248,7 @@
         </p:nvSpPr>
         <p:spPr>
           <a:xfrm>
-            <a:off x="3474720" y="1993391"/>
+            <a:off x="3474720" y="1975104"/>
             <a:ext cx="4160520" cy="566928"/>
           </a:xfrm>
           <a:prstGeom prst="rect">
@@ -35376,7 +37294,7 @@
         </p:nvSpPr>
         <p:spPr>
           <a:xfrm>
-            <a:off x="3584448" y="1993391"/>
+            <a:off x="3584448" y="1975104"/>
             <a:ext cx="3941063" cy="566928"/>
           </a:xfrm>
           <a:prstGeom prst="rect">
@@ -35415,7 +37333,7 @@
         </p:nvSpPr>
         <p:spPr>
           <a:xfrm>
-            <a:off x="7635240" y="1993391"/>
+            <a:off x="7635240" y="1975104"/>
             <a:ext cx="4160520" cy="566928"/>
           </a:xfrm>
           <a:prstGeom prst="rect">
@@ -35461,7 +37379,7 @@
         </p:nvSpPr>
         <p:spPr>
           <a:xfrm>
-            <a:off x="7744967" y="1993391"/>
+            <a:off x="7744967" y="1975104"/>
             <a:ext cx="3941063" cy="566928"/>
           </a:xfrm>
           <a:prstGeom prst="rect">
@@ -35500,7 +37418,7 @@
         </p:nvSpPr>
         <p:spPr>
           <a:xfrm>
-            <a:off x="685800" y="2560320"/>
+            <a:off x="685800" y="2542032"/>
             <a:ext cx="2788920" cy="566928"/>
           </a:xfrm>
           <a:prstGeom prst="rect">
@@ -35546,7 +37464,7 @@
         </p:nvSpPr>
         <p:spPr>
           <a:xfrm>
-            <a:off x="795528" y="2560320"/>
+            <a:off x="795528" y="2542032"/>
             <a:ext cx="2569463" cy="566928"/>
           </a:xfrm>
           <a:prstGeom prst="rect">
@@ -35585,7 +37503,7 @@
         </p:nvSpPr>
         <p:spPr>
           <a:xfrm>
-            <a:off x="3474720" y="2560320"/>
+            <a:off x="3474720" y="2542032"/>
             <a:ext cx="4160520" cy="566928"/>
           </a:xfrm>
           <a:prstGeom prst="rect">
@@ -35631,7 +37549,7 @@
         </p:nvSpPr>
         <p:spPr>
           <a:xfrm>
-            <a:off x="3584448" y="2560320"/>
+            <a:off x="3584448" y="2542032"/>
             <a:ext cx="3941063" cy="566928"/>
           </a:xfrm>
           <a:prstGeom prst="rect">
@@ -35670,7 +37588,7 @@
         </p:nvSpPr>
         <p:spPr>
           <a:xfrm>
-            <a:off x="7635240" y="2560320"/>
+            <a:off x="7635240" y="2542032"/>
             <a:ext cx="4160520" cy="566928"/>
           </a:xfrm>
           <a:prstGeom prst="rect">
@@ -35716,7 +37634,7 @@
         </p:nvSpPr>
         <p:spPr>
           <a:xfrm>
-            <a:off x="7744967" y="2560320"/>
+            <a:off x="7744967" y="2542032"/>
             <a:ext cx="3941063" cy="566928"/>
           </a:xfrm>
           <a:prstGeom prst="rect">
@@ -35755,7 +37673,7 @@
         </p:nvSpPr>
         <p:spPr>
           <a:xfrm>
-            <a:off x="685800" y="3127248"/>
+            <a:off x="685800" y="3108960"/>
             <a:ext cx="2788920" cy="566928"/>
           </a:xfrm>
           <a:prstGeom prst="rect">
@@ -35801,7 +37719,7 @@
         </p:nvSpPr>
         <p:spPr>
           <a:xfrm>
-            <a:off x="795528" y="3127248"/>
+            <a:off x="795528" y="3108960"/>
             <a:ext cx="2569463" cy="566928"/>
           </a:xfrm>
           <a:prstGeom prst="rect">
@@ -35840,7 +37758,7 @@
         </p:nvSpPr>
         <p:spPr>
           <a:xfrm>
-            <a:off x="3474720" y="3127248"/>
+            <a:off x="3474720" y="3108960"/>
             <a:ext cx="4160520" cy="566928"/>
           </a:xfrm>
           <a:prstGeom prst="rect">
@@ -35886,7 +37804,7 @@
         </p:nvSpPr>
         <p:spPr>
           <a:xfrm>
-            <a:off x="3584448" y="3127248"/>
+            <a:off x="3584448" y="3108960"/>
             <a:ext cx="3941063" cy="566928"/>
           </a:xfrm>
           <a:prstGeom prst="rect">
@@ -35925,7 +37843,7 @@
         </p:nvSpPr>
         <p:spPr>
           <a:xfrm>
-            <a:off x="7635240" y="3127248"/>
+            <a:off x="7635240" y="3108960"/>
             <a:ext cx="4160520" cy="566928"/>
           </a:xfrm>
           <a:prstGeom prst="rect">
@@ -35971,7 +37889,7 @@
         </p:nvSpPr>
         <p:spPr>
           <a:xfrm>
-            <a:off x="7744967" y="3127248"/>
+            <a:off x="7744967" y="3108960"/>
             <a:ext cx="3941063" cy="566928"/>
           </a:xfrm>
           <a:prstGeom prst="rect">
@@ -36010,8 +37928,8 @@
         </p:nvSpPr>
         <p:spPr>
           <a:xfrm>
-            <a:off x="502920" y="3931920"/>
-            <a:ext cx="11201400" cy="676656"/>
+            <a:off x="502920" y="3913632"/>
+            <a:ext cx="11201400" cy="713232"/>
           </a:xfrm>
           <a:prstGeom prst="roundRect">
             <a:avLst>
@@ -36058,8 +37976,8 @@
         </p:nvSpPr>
         <p:spPr>
           <a:xfrm>
-            <a:off x="722376" y="3986783"/>
-            <a:ext cx="10762488" cy="566928"/>
+            <a:off x="722376" y="3968496"/>
+            <a:ext cx="10762488" cy="603504"/>
           </a:xfrm>
           <a:prstGeom prst="rect">
             <a:avLst/>
@@ -36097,12 +38015,12 @@
         </p:nvSpPr>
         <p:spPr>
           <a:xfrm>
-            <a:off x="502920" y="4736592"/>
-            <a:ext cx="11201400" cy="1572768"/>
+            <a:off x="502920" y="4754880"/>
+            <a:ext cx="11201400" cy="1517904"/>
           </a:xfrm>
           <a:prstGeom prst="roundRect">
             <a:avLst>
-              <a:gd name="adj" fmla="val 19379"/>
+              <a:gd name="adj" fmla="val 20080"/>
             </a:avLst>
           </a:prstGeom>
           <a:solidFill>
@@ -36145,8 +38063,8 @@
         </p:nvSpPr>
         <p:spPr>
           <a:xfrm>
-            <a:off x="713232" y="4846320"/>
-            <a:ext cx="2743200" cy="274320"/>
+            <a:off x="731520" y="4864608"/>
+            <a:ext cx="4572000" cy="274320"/>
           </a:xfrm>
           <a:prstGeom prst="rect">
             <a:avLst/>
@@ -36171,7 +38089,7 @@
                 </a:solidFill>
                 <a:latin typeface="Arial"/>
               </a:rPr>
-              <a:t>Рамка уровня B</a:t>
+              <a:t>Что эта граница меняет на практике</a:t>
             </a:r>
           </a:p>
         </p:txBody>
@@ -36184,8 +38102,8 @@
         </p:nvSpPr>
         <p:spPr>
           <a:xfrm>
-            <a:off x="713232" y="5175504"/>
-            <a:ext cx="1508760" cy="420624"/>
+            <a:off x="731520" y="5230368"/>
+            <a:ext cx="3429000" cy="384048"/>
           </a:xfrm>
           <a:prstGeom prst="rect">
             <a:avLst/>
@@ -36200,31 +38118,70 @@
           <a:p>
             <a:pPr algn="l">
               <a:lnSpc>
-                <a:spcPct val="115000"/>
+                <a:spcPct val="102000"/>
               </a:lnSpc>
             </a:pPr>
             <a:r>
               <a:rPr sz="1200" b="1" i="0">
                 <a:solidFill>
+                  <a:srgbClr val="21295C"/>
+                </a:solidFill>
+                <a:latin typeface="Arial"/>
+              </a:rPr>
+              <a:t>Защита «я видел каждую строку»</a:t>
+            </a:r>
+          </a:p>
+        </p:txBody>
+      </p:sp>
+      <p:sp>
+        <p:nvSpPr>
+          <p:cNvPr id="32" name="TextBox 31"/>
+          <p:cNvSpPr txBox="1"/>
+          <p:nvPr/>
+        </p:nvSpPr>
+        <p:spPr>
+          <a:xfrm>
+            <a:off x="731520" y="5650992"/>
+            <a:ext cx="3429000" cy="365760"/>
+          </a:xfrm>
+          <a:prstGeom prst="rect">
+            <a:avLst/>
+          </a:prstGeom>
+          <a:noFill/>
+        </p:spPr>
+        <p:txBody>
+          <a:bodyPr wrap="square" lIns="0" rIns="0" tIns="0" bIns="0" anchor="ctr">
+            <a:spAutoFit/>
+          </a:bodyPr>
+          <a:lstStyle/>
+          <a:p>
+            <a:pPr algn="l">
+              <a:lnSpc>
+                <a:spcPct val="100000"/>
+              </a:lnSpc>
+            </a:pPr>
+            <a:r>
+              <a:rPr sz="1150" b="0" i="1">
+                <a:solidFill>
                   <a:srgbClr val="028090"/>
                 </a:solidFill>
                 <a:latin typeface="Arial"/>
               </a:rPr>
-              <a:t>Что делает AI:</a:t>
-            </a:r>
-          </a:p>
-        </p:txBody>
-      </p:sp>
-      <p:sp>
-        <p:nvSpPr>
-          <p:cNvPr id="32" name="TextBox 31"/>
-          <p:cNvSpPr txBox="1"/>
-          <p:nvPr/>
-        </p:nvSpPr>
-        <p:spPr>
-          <a:xfrm>
-            <a:off x="2249424" y="5175504"/>
-            <a:ext cx="3794760" cy="420624"/>
+              <a:t>→ на B уже не работает</a:t>
+            </a:r>
+          </a:p>
+        </p:txBody>
+      </p:sp>
+      <p:sp>
+        <p:nvSpPr>
+          <p:cNvPr id="33" name="TextBox 32"/>
+          <p:cNvSpPr txBox="1"/>
+          <p:nvPr/>
+        </p:nvSpPr>
+        <p:spPr>
+          <a:xfrm>
+            <a:off x="4343400" y="5230368"/>
+            <a:ext cx="3429000" cy="384048"/>
           </a:xfrm>
           <a:prstGeom prst="rect">
             <a:avLst/>
@@ -36239,31 +38196,109 @@
           <a:p>
             <a:pPr algn="l">
               <a:lnSpc>
+                <a:spcPct val="102000"/>
+              </a:lnSpc>
+            </a:pPr>
+            <a:r>
+              <a:rPr sz="1200" b="1" i="0">
+                <a:solidFill>
+                  <a:srgbClr val="21295C"/>
+                </a:solidFill>
+                <a:latin typeface="Arial"/>
+              </a:rPr>
+              <a:t>Ревью становится отдельным шагом</a:t>
+            </a:r>
+          </a:p>
+        </p:txBody>
+      </p:sp>
+      <p:sp>
+        <p:nvSpPr>
+          <p:cNvPr id="34" name="TextBox 33"/>
+          <p:cNvSpPr txBox="1"/>
+          <p:nvPr/>
+        </p:nvSpPr>
+        <p:spPr>
+          <a:xfrm>
+            <a:off x="4343400" y="5650992"/>
+            <a:ext cx="3429000" cy="365760"/>
+          </a:xfrm>
+          <a:prstGeom prst="rect">
+            <a:avLst/>
+          </a:prstGeom>
+          <a:noFill/>
+        </p:spPr>
+        <p:txBody>
+          <a:bodyPr wrap="square" lIns="0" rIns="0" tIns="0" bIns="0" anchor="ctr">
+            <a:spAutoFit/>
+          </a:bodyPr>
+          <a:lstStyle/>
+          <a:p>
+            <a:pPr algn="l">
+              <a:lnSpc>
                 <a:spcPct val="100000"/>
               </a:lnSpc>
             </a:pPr>
             <a:r>
-              <a:rPr sz="1200" b="0" i="0">
+              <a:rPr sz="1150" b="0" i="1">
+                <a:solidFill>
+                  <a:srgbClr val="028090"/>
+                </a:solidFill>
+                <a:latin typeface="Arial"/>
+              </a:rPr>
+              <a:t>→ его легко пропустить</a:t>
+            </a:r>
+          </a:p>
+        </p:txBody>
+      </p:sp>
+      <p:sp>
+        <p:nvSpPr>
+          <p:cNvPr id="35" name="TextBox 34"/>
+          <p:cNvSpPr txBox="1"/>
+          <p:nvPr/>
+        </p:nvSpPr>
+        <p:spPr>
+          <a:xfrm>
+            <a:off x="7955280" y="5230368"/>
+            <a:ext cx="3429000" cy="384048"/>
+          </a:xfrm>
+          <a:prstGeom prst="rect">
+            <a:avLst/>
+          </a:prstGeom>
+          <a:noFill/>
+        </p:spPr>
+        <p:txBody>
+          <a:bodyPr wrap="square" lIns="0" rIns="0" tIns="0" bIns="0" anchor="ctr">
+            <a:spAutoFit/>
+          </a:bodyPr>
+          <a:lstStyle/>
+          <a:p>
+            <a:pPr algn="l">
+              <a:lnSpc>
+                <a:spcPct val="102000"/>
+              </a:lnSpc>
+            </a:pPr>
+            <a:r>
+              <a:rPr sz="1200" b="1" i="0">
                 <a:solidFill>
                   <a:srgbClr val="21295C"/>
                 </a:solidFill>
                 <a:latin typeface="Arial"/>
               </a:rPr>
-              <a:t>генерирует законченный фрагмент по задаче</a:t>
-            </a:r>
-          </a:p>
-        </p:txBody>
-      </p:sp>
-      <p:sp>
-        <p:nvSpPr>
-          <p:cNvPr id="33" name="TextBox 32"/>
-          <p:cNvSpPr txBox="1"/>
-          <p:nvPr/>
-        </p:nvSpPr>
-        <p:spPr>
-          <a:xfrm>
-            <a:off x="6199632" y="5175504"/>
-            <a:ext cx="1508760" cy="420624"/>
+              <a:t>Появляется «почти правильный» код</a:t>
+            </a:r>
+          </a:p>
+        </p:txBody>
+      </p:sp>
+      <p:sp>
+        <p:nvSpPr>
+          <p:cNvPr id="36" name="TextBox 35"/>
+          <p:cNvSpPr txBox="1"/>
+          <p:nvPr/>
+        </p:nvSpPr>
+        <p:spPr>
+          <a:xfrm>
+            <a:off x="7955280" y="5650992"/>
+            <a:ext cx="3429000" cy="365760"/>
           </a:xfrm>
           <a:prstGeom prst="rect">
             <a:avLst/>
@@ -36278,212 +38313,17 @@
           <a:p>
             <a:pPr algn="l">
               <a:lnSpc>
-                <a:spcPct val="115000"/>
-              </a:lnSpc>
-            </a:pPr>
-            <a:r>
-              <a:rPr sz="1200" b="1" i="0">
+                <a:spcPct val="100000"/>
+              </a:lnSpc>
+            </a:pPr>
+            <a:r>
+              <a:rPr sz="1150" b="0" i="1">
                 <a:solidFill>
                   <a:srgbClr val="028090"/>
                 </a:solidFill>
                 <a:latin typeface="Arial"/>
               </a:rPr>
-              <a:t>Кто решает:</a:t>
-            </a:r>
-          </a:p>
-        </p:txBody>
-      </p:sp>
-      <p:sp>
-        <p:nvSpPr>
-          <p:cNvPr id="34" name="TextBox 33"/>
-          <p:cNvSpPr txBox="1"/>
-          <p:nvPr/>
-        </p:nvSpPr>
-        <p:spPr>
-          <a:xfrm>
-            <a:off x="7735824" y="5175504"/>
-            <a:ext cx="3794760" cy="420624"/>
-          </a:xfrm>
-          <a:prstGeom prst="rect">
-            <a:avLst/>
-          </a:prstGeom>
-          <a:noFill/>
-        </p:spPr>
-        <p:txBody>
-          <a:bodyPr wrap="square" lIns="0" rIns="0" tIns="0" bIns="0" anchor="ctr">
-            <a:spAutoFit/>
-          </a:bodyPr>
-          <a:lstStyle/>
-          <a:p>
-            <a:pPr algn="l">
-              <a:lnSpc>
-                <a:spcPct val="100000"/>
-              </a:lnSpc>
-            </a:pPr>
-            <a:r>
-              <a:rPr sz="1200" b="0" i="0">
-                <a:solidFill>
-                  <a:srgbClr val="21295C"/>
-                </a:solidFill>
-                <a:latin typeface="Arial"/>
-              </a:rPr>
-              <a:t>человек ставит задачу и принимает результат</a:t>
-            </a:r>
-          </a:p>
-        </p:txBody>
-      </p:sp>
-      <p:sp>
-        <p:nvSpPr>
-          <p:cNvPr id="35" name="TextBox 34"/>
-          <p:cNvSpPr txBox="1"/>
-          <p:nvPr/>
-        </p:nvSpPr>
-        <p:spPr>
-          <a:xfrm>
-            <a:off x="713232" y="5687568"/>
-            <a:ext cx="1508760" cy="420624"/>
-          </a:xfrm>
-          <a:prstGeom prst="rect">
-            <a:avLst/>
-          </a:prstGeom>
-          <a:noFill/>
-        </p:spPr>
-        <p:txBody>
-          <a:bodyPr wrap="square" lIns="0" rIns="0" tIns="0" bIns="0" anchor="ctr">
-            <a:spAutoFit/>
-          </a:bodyPr>
-          <a:lstStyle/>
-          <a:p>
-            <a:pPr algn="l">
-              <a:lnSpc>
-                <a:spcPct val="115000"/>
-              </a:lnSpc>
-            </a:pPr>
-            <a:r>
-              <a:rPr sz="1200" b="1" i="0">
-                <a:solidFill>
-                  <a:srgbClr val="028090"/>
-                </a:solidFill>
-                <a:latin typeface="Arial"/>
-              </a:rPr>
-              <a:t>Где обязателен:</a:t>
-            </a:r>
-          </a:p>
-        </p:txBody>
-      </p:sp>
-      <p:sp>
-        <p:nvSpPr>
-          <p:cNvPr id="36" name="TextBox 35"/>
-          <p:cNvSpPr txBox="1"/>
-          <p:nvPr/>
-        </p:nvSpPr>
-        <p:spPr>
-          <a:xfrm>
-            <a:off x="2249424" y="5687568"/>
-            <a:ext cx="3794760" cy="420624"/>
-          </a:xfrm>
-          <a:prstGeom prst="rect">
-            <a:avLst/>
-          </a:prstGeom>
-          <a:noFill/>
-        </p:spPr>
-        <p:txBody>
-          <a:bodyPr wrap="square" lIns="0" rIns="0" tIns="0" bIns="0" anchor="ctr">
-            <a:spAutoFit/>
-          </a:bodyPr>
-          <a:lstStyle/>
-          <a:p>
-            <a:pPr algn="l">
-              <a:lnSpc>
-                <a:spcPct val="100000"/>
-              </a:lnSpc>
-            </a:pPr>
-            <a:r>
-              <a:rPr sz="1200" b="0" i="0">
-                <a:solidFill>
-                  <a:srgbClr val="21295C"/>
-                </a:solidFill>
-                <a:latin typeface="Arial"/>
-              </a:rPr>
-              <a:t>на ревью результата до интеграции</a:t>
-            </a:r>
-          </a:p>
-        </p:txBody>
-      </p:sp>
-      <p:sp>
-        <p:nvSpPr>
-          <p:cNvPr id="37" name="TextBox 36"/>
-          <p:cNvSpPr txBox="1"/>
-          <p:nvPr/>
-        </p:nvSpPr>
-        <p:spPr>
-          <a:xfrm>
-            <a:off x="6199632" y="5687568"/>
-            <a:ext cx="1508760" cy="420624"/>
-          </a:xfrm>
-          <a:prstGeom prst="rect">
-            <a:avLst/>
-          </a:prstGeom>
-          <a:noFill/>
-        </p:spPr>
-        <p:txBody>
-          <a:bodyPr wrap="square" lIns="0" rIns="0" tIns="0" bIns="0" anchor="ctr">
-            <a:spAutoFit/>
-          </a:bodyPr>
-          <a:lstStyle/>
-          <a:p>
-            <a:pPr algn="l">
-              <a:lnSpc>
-                <a:spcPct val="115000"/>
-              </a:lnSpc>
-            </a:pPr>
-            <a:r>
-              <a:rPr sz="1200" b="1" i="0">
-                <a:solidFill>
-                  <a:srgbClr val="028090"/>
-                </a:solidFill>
-                <a:latin typeface="Arial"/>
-              </a:rPr>
-              <a:t>Типичный риск:</a:t>
-            </a:r>
-          </a:p>
-        </p:txBody>
-      </p:sp>
-      <p:sp>
-        <p:nvSpPr>
-          <p:cNvPr id="38" name="TextBox 37"/>
-          <p:cNvSpPr txBox="1"/>
-          <p:nvPr/>
-        </p:nvSpPr>
-        <p:spPr>
-          <a:xfrm>
-            <a:off x="7735824" y="5687568"/>
-            <a:ext cx="3794760" cy="420624"/>
-          </a:xfrm>
-          <a:prstGeom prst="rect">
-            <a:avLst/>
-          </a:prstGeom>
-          <a:noFill/>
-        </p:spPr>
-        <p:txBody>
-          <a:bodyPr wrap="square" lIns="0" rIns="0" tIns="0" bIns="0" anchor="ctr">
-            <a:spAutoFit/>
-          </a:bodyPr>
-          <a:lstStyle/>
-          <a:p>
-            <a:pPr algn="l">
-              <a:lnSpc>
-                <a:spcPct val="100000"/>
-              </a:lnSpc>
-            </a:pPr>
-            <a:r>
-              <a:rPr sz="1200" b="0" i="0">
-                <a:solidFill>
-                  <a:srgbClr val="21295C"/>
-                </a:solidFill>
-                <a:latin typeface="Arial"/>
-              </a:rPr>
-              <a:t>«почти правильный» код — разберём далее</a:t>
+              <a:t>→ разберём следующим</a:t>
             </a:r>
           </a:p>
         </p:txBody>
@@ -37167,7 +39007,7 @@
                 </a:solidFill>
                 <a:latin typeface="Arial"/>
               </a:rPr>
-              <a:t>Osmani (70%-проблема, 2024); Stack Overflow Survey 2025 (66% — опрос, направление стабильно). Первая точка возврата центрального вопроса.</a:t>
+              <a:t>Osmani (70%-проблема, 2024); Stack Overflow Survey 2025 (66% — опрос, направление стабильно).</a:t>
             </a:r>
           </a:p>
         </p:txBody>

--- a/library/lectures/lec-04/rendered/lec-04.pptx
+++ b/library/lectures/lec-04/rendered/lec-04.pptx
@@ -10508,8 +10508,8 @@
         </p:nvSpPr>
         <p:spPr>
           <a:xfrm>
-            <a:off x="502920" y="1042415"/>
-            <a:ext cx="11201400" cy="512064"/>
+            <a:off x="502920" y="950976"/>
+            <a:ext cx="11201400" cy="420624"/>
           </a:xfrm>
           <a:prstGeom prst="rect">
             <a:avLst/>
@@ -10524,7 +10524,7 @@
           <a:p>
             <a:pPr algn="l">
               <a:lnSpc>
-                <a:spcPct val="115000"/>
+                <a:spcPct val="110000"/>
               </a:lnSpc>
             </a:pPr>
             <a:r>
@@ -10547,12 +10547,12 @@
         </p:nvSpPr>
         <p:spPr>
           <a:xfrm>
-            <a:off x="502920" y="1645920"/>
-            <a:ext cx="6446520" cy="3200400"/>
+            <a:off x="502920" y="1408176"/>
+            <a:ext cx="6446520" cy="2871216"/>
           </a:xfrm>
           <a:prstGeom prst="roundRect">
             <a:avLst>
-              <a:gd name="adj" fmla="val 9523"/>
+              <a:gd name="adj" fmla="val 10615"/>
             </a:avLst>
           </a:prstGeom>
           <a:solidFill>
@@ -10595,8 +10595,8 @@
         </p:nvSpPr>
         <p:spPr>
           <a:xfrm>
-            <a:off x="740664" y="1847088"/>
-            <a:ext cx="5971031" cy="1188720"/>
+            <a:off x="740664" y="1554480"/>
+            <a:ext cx="5971031" cy="1042415"/>
           </a:xfrm>
           <a:prstGeom prst="roundRect">
             <a:avLst>
@@ -10643,8 +10643,8 @@
         </p:nvSpPr>
         <p:spPr>
           <a:xfrm>
-            <a:off x="960120" y="1956816"/>
-            <a:ext cx="4233671" cy="969264"/>
+            <a:off x="960120" y="1627632"/>
+            <a:ext cx="4233671" cy="896112"/>
           </a:xfrm>
           <a:prstGeom prst="rect">
             <a:avLst/>
@@ -10659,7 +10659,7 @@
           <a:p>
             <a:pPr algn="l">
               <a:lnSpc>
-                <a:spcPct val="110000"/>
+                <a:spcPct val="106000"/>
               </a:lnSpc>
             </a:pPr>
             <a:r>
@@ -10683,8 +10683,8 @@
         </p:nvSpPr>
         <p:spPr>
           <a:xfrm>
-            <a:off x="4837176" y="1920240"/>
-            <a:ext cx="1691640" cy="1042415"/>
+            <a:off x="4837176" y="1572768"/>
+            <a:ext cx="1691640" cy="1005840"/>
           </a:xfrm>
           <a:prstGeom prst="rect">
             <a:avLst/>
@@ -10722,8 +10722,8 @@
         </p:nvSpPr>
         <p:spPr>
           <a:xfrm>
-            <a:off x="740664" y="3108960"/>
-            <a:ext cx="5971031" cy="420624"/>
+            <a:off x="740664" y="2651760"/>
+            <a:ext cx="5971031" cy="384048"/>
           </a:xfrm>
           <a:prstGeom prst="roundRect">
             <a:avLst>
@@ -10768,8 +10768,8 @@
         </p:nvSpPr>
         <p:spPr>
           <a:xfrm>
-            <a:off x="740664" y="3108960"/>
-            <a:ext cx="5971031" cy="420624"/>
+            <a:off x="740664" y="2651760"/>
+            <a:ext cx="5971031" cy="384048"/>
           </a:xfrm>
           <a:prstGeom prst="rect">
             <a:avLst/>
@@ -10807,8 +10807,8 @@
         </p:nvSpPr>
         <p:spPr>
           <a:xfrm>
-            <a:off x="740664" y="3602736"/>
-            <a:ext cx="5971031" cy="1188720"/>
+            <a:off x="740664" y="3090672"/>
+            <a:ext cx="5971031" cy="1042415"/>
           </a:xfrm>
           <a:prstGeom prst="roundRect">
             <a:avLst>
@@ -10855,8 +10855,8 @@
         </p:nvSpPr>
         <p:spPr>
           <a:xfrm>
-            <a:off x="960120" y="3712463"/>
-            <a:ext cx="4233671" cy="969264"/>
+            <a:off x="960120" y="3163824"/>
+            <a:ext cx="4233671" cy="896112"/>
           </a:xfrm>
           <a:prstGeom prst="rect">
             <a:avLst/>
@@ -10871,7 +10871,7 @@
           <a:p>
             <a:pPr algn="l">
               <a:lnSpc>
-                <a:spcPct val="110000"/>
+                <a:spcPct val="106000"/>
               </a:lnSpc>
             </a:pPr>
             <a:r>
@@ -10895,8 +10895,8 @@
         </p:nvSpPr>
         <p:spPr>
           <a:xfrm>
-            <a:off x="4837176" y="3675888"/>
-            <a:ext cx="1691640" cy="1042415"/>
+            <a:off x="4837176" y="3108960"/>
+            <a:ext cx="1691640" cy="1005840"/>
           </a:xfrm>
           <a:prstGeom prst="rect">
             <a:avLst/>
@@ -10934,12 +10934,12 @@
         </p:nvSpPr>
         <p:spPr>
           <a:xfrm>
-            <a:off x="7132320" y="1645920"/>
-            <a:ext cx="4572000" cy="1417320"/>
+            <a:off x="7132320" y="1408176"/>
+            <a:ext cx="4572000" cy="1280160"/>
           </a:xfrm>
           <a:prstGeom prst="roundRect">
             <a:avLst>
-              <a:gd name="adj" fmla="val 21505"/>
+              <a:gd name="adj" fmla="val 22000"/>
             </a:avLst>
           </a:prstGeom>
           <a:solidFill>
@@ -10982,8 +10982,8 @@
         </p:nvSpPr>
         <p:spPr>
           <a:xfrm>
-            <a:off x="7370064" y="1792224"/>
-            <a:ext cx="4096512" cy="1143000"/>
+            <a:off x="7370064" y="1517904"/>
+            <a:ext cx="4096512" cy="1060704"/>
           </a:xfrm>
           <a:prstGeom prst="rect">
             <a:avLst/>
@@ -10998,7 +10998,7 @@
           <a:p>
             <a:pPr algn="l">
               <a:lnSpc>
-                <a:spcPct val="116000"/>
+                <a:spcPct val="112000"/>
               </a:lnSpc>
             </a:pPr>
             <a:r>
@@ -11021,12 +11021,12 @@
         </p:nvSpPr>
         <p:spPr>
           <a:xfrm>
-            <a:off x="7132320" y="3200400"/>
-            <a:ext cx="4572000" cy="1645920"/>
+            <a:off x="7132320" y="2798064"/>
+            <a:ext cx="4572000" cy="1481328"/>
           </a:xfrm>
           <a:prstGeom prst="roundRect">
             <a:avLst>
-              <a:gd name="adj" fmla="val 18518"/>
+              <a:gd name="adj" fmla="val 20576"/>
             </a:avLst>
           </a:prstGeom>
           <a:solidFill>
@@ -11069,8 +11069,8 @@
         </p:nvSpPr>
         <p:spPr>
           <a:xfrm>
-            <a:off x="7370064" y="3346704"/>
-            <a:ext cx="4096512" cy="1371600"/>
+            <a:off x="7370064" y="2907791"/>
+            <a:ext cx="4096512" cy="1280160"/>
           </a:xfrm>
           <a:prstGeom prst="rect">
             <a:avLst/>
@@ -11085,7 +11085,7 @@
           <a:p>
             <a:pPr algn="l">
               <a:lnSpc>
-                <a:spcPct val="118000"/>
+                <a:spcPct val="114000"/>
               </a:lnSpc>
             </a:pPr>
             <a:r>
@@ -11108,8 +11108,8 @@
         </p:nvSpPr>
         <p:spPr>
           <a:xfrm>
-            <a:off x="502920" y="4956048"/>
-            <a:ext cx="11201400" cy="768096"/>
+            <a:off x="502920" y="4389120"/>
+            <a:ext cx="11201400" cy="676656"/>
           </a:xfrm>
           <a:prstGeom prst="roundRect">
             <a:avLst>
@@ -11156,8 +11156,8 @@
         </p:nvSpPr>
         <p:spPr>
           <a:xfrm>
-            <a:off x="722376" y="5010912"/>
-            <a:ext cx="10762488" cy="658368"/>
+            <a:off x="722376" y="4443983"/>
+            <a:ext cx="10762488" cy="566928"/>
           </a:xfrm>
           <a:prstGeom prst="rect">
             <a:avLst/>
@@ -11189,7 +11189,394 @@
       </p:sp>
       <p:sp>
         <p:nvSpPr>
-          <p:cNvPr id="19" name="TextBox 18"/>
+          <p:cNvPr id="19" name="Rounded Rectangle 18"/>
+          <p:cNvSpPr/>
+          <p:nvPr/>
+        </p:nvSpPr>
+        <p:spPr>
+          <a:xfrm>
+            <a:off x="502920" y="5138928"/>
+            <a:ext cx="11201400" cy="1243584"/>
+          </a:xfrm>
+          <a:prstGeom prst="roundRect">
+            <a:avLst>
+              <a:gd name="adj" fmla="val 22000"/>
+            </a:avLst>
+          </a:prstGeom>
+          <a:solidFill>
+            <a:srgbClr val="F4F7FA"/>
+          </a:solidFill>
+          <a:ln w="19050">
+            <a:solidFill>
+              <a:srgbClr val="1C7293"/>
+            </a:solidFill>
+          </a:ln>
+          <a:effectLst/>
+        </p:spPr>
+        <p:style>
+          <a:lnRef idx="1">
+            <a:schemeClr val="accent1"/>
+          </a:lnRef>
+          <a:fillRef idx="3">
+            <a:schemeClr val="accent1"/>
+          </a:fillRef>
+          <a:effectRef idx="2">
+            <a:schemeClr val="accent1"/>
+          </a:effectRef>
+          <a:fontRef idx="minor">
+            <a:schemeClr val="lt1"/>
+          </a:fontRef>
+        </p:style>
+        <p:txBody>
+          <a:bodyPr rtlCol="0" anchor="ctr"/>
+          <a:lstStyle/>
+          <a:p>
+            <a:pPr algn="ctr"/>
+          </a:p>
+        </p:txBody>
+      </p:sp>
+      <p:sp>
+        <p:nvSpPr>
+          <p:cNvPr id="20" name="TextBox 19"/>
+          <p:cNvSpPr txBox="1"/>
+          <p:nvPr/>
+        </p:nvSpPr>
+        <p:spPr>
+          <a:xfrm>
+            <a:off x="704088" y="5248656"/>
+            <a:ext cx="5993480" cy="237744"/>
+          </a:xfrm>
+          <a:prstGeom prst="rect">
+            <a:avLst/>
+          </a:prstGeom>
+          <a:noFill/>
+        </p:spPr>
+        <p:txBody>
+          <a:bodyPr wrap="square" lIns="0" rIns="0" tIns="0" bIns="0" anchor="ctr">
+            <a:spAutoFit/>
+          </a:bodyPr>
+          <a:lstStyle/>
+          <a:p>
+            <a:pPr algn="l">
+              <a:lnSpc>
+                <a:spcPct val="115000"/>
+              </a:lnSpc>
+            </a:pPr>
+            <a:r>
+              <a:rPr sz="1200" b="1" i="0">
+                <a:solidFill>
+                  <a:srgbClr val="065A82"/>
+                </a:solidFill>
+                <a:latin typeface="Arial"/>
+              </a:rPr>
+              <a:t>Инструменты 2026</a:t>
+            </a:r>
+          </a:p>
+        </p:txBody>
+      </p:sp>
+      <p:sp>
+        <p:nvSpPr>
+          <p:cNvPr id="21" name="Rounded Rectangle 20"/>
+          <p:cNvSpPr/>
+          <p:nvPr/>
+        </p:nvSpPr>
+        <p:spPr>
+          <a:xfrm>
+            <a:off x="704088" y="5541264"/>
+            <a:ext cx="1025956" cy="292608"/>
+          </a:xfrm>
+          <a:prstGeom prst="roundRect">
+            <a:avLst>
+              <a:gd name="adj" fmla="val 50000"/>
+            </a:avLst>
+          </a:prstGeom>
+          <a:solidFill>
+            <a:srgbClr val="065A82"/>
+          </a:solidFill>
+          <a:ln>
+            <a:noFill/>
+          </a:ln>
+          <a:effectLst/>
+        </p:spPr>
+        <p:style>
+          <a:lnRef idx="1">
+            <a:schemeClr val="accent1"/>
+          </a:lnRef>
+          <a:fillRef idx="3">
+            <a:schemeClr val="accent1"/>
+          </a:fillRef>
+          <a:effectRef idx="2">
+            <a:schemeClr val="accent1"/>
+          </a:effectRef>
+          <a:fontRef idx="minor">
+            <a:schemeClr val="lt1"/>
+          </a:fontRef>
+        </p:style>
+        <p:txBody>
+          <a:bodyPr rtlCol="0" anchor="ctr" lIns="45720" rIns="45720" tIns="18288" bIns="18288" wrap="none"/>
+          <a:lstStyle/>
+          <a:p>
+            <a:pPr algn="ctr"/>
+            <a:r>
+              <a:rPr sz="1150" b="1">
+                <a:solidFill>
+                  <a:srgbClr val="FFFFFF"/>
+                </a:solidFill>
+                <a:latin typeface="Arial"/>
+              </a:rPr>
+              <a:t>Claude Code</a:t>
+            </a:r>
+          </a:p>
+        </p:txBody>
+      </p:sp>
+      <p:sp>
+        <p:nvSpPr>
+          <p:cNvPr id="22" name="Rounded Rectangle 21"/>
+          <p:cNvSpPr/>
+          <p:nvPr/>
+        </p:nvSpPr>
+        <p:spPr>
+          <a:xfrm>
+            <a:off x="1821484" y="5541264"/>
+            <a:ext cx="1325880" cy="292608"/>
+          </a:xfrm>
+          <a:prstGeom prst="roundRect">
+            <a:avLst>
+              <a:gd name="adj" fmla="val 50000"/>
+            </a:avLst>
+          </a:prstGeom>
+          <a:solidFill>
+            <a:srgbClr val="065A82"/>
+          </a:solidFill>
+          <a:ln>
+            <a:noFill/>
+          </a:ln>
+          <a:effectLst/>
+        </p:spPr>
+        <p:style>
+          <a:lnRef idx="1">
+            <a:schemeClr val="accent1"/>
+          </a:lnRef>
+          <a:fillRef idx="3">
+            <a:schemeClr val="accent1"/>
+          </a:fillRef>
+          <a:effectRef idx="2">
+            <a:schemeClr val="accent1"/>
+          </a:effectRef>
+          <a:fontRef idx="minor">
+            <a:schemeClr val="lt1"/>
+          </a:fontRef>
+        </p:style>
+        <p:txBody>
+          <a:bodyPr rtlCol="0" anchor="ctr" lIns="45720" rIns="45720" tIns="18288" bIns="18288" wrap="none"/>
+          <a:lstStyle/>
+          <a:p>
+            <a:pPr algn="ctr"/>
+            <a:r>
+              <a:rPr sz="1150" b="1">
+                <a:solidFill>
+                  <a:srgbClr val="FFFFFF"/>
+                </a:solidFill>
+                <a:latin typeface="Arial"/>
+              </a:rPr>
+              <a:t>Cursor Composer</a:t>
+            </a:r>
+          </a:p>
+        </p:txBody>
+      </p:sp>
+      <p:sp>
+        <p:nvSpPr>
+          <p:cNvPr id="23" name="Rounded Rectangle 22"/>
+          <p:cNvSpPr/>
+          <p:nvPr/>
+        </p:nvSpPr>
+        <p:spPr>
+          <a:xfrm>
+            <a:off x="3238804" y="5541264"/>
+            <a:ext cx="875995" cy="292608"/>
+          </a:xfrm>
+          <a:prstGeom prst="roundRect">
+            <a:avLst>
+              <a:gd name="adj" fmla="val 50000"/>
+            </a:avLst>
+          </a:prstGeom>
+          <a:solidFill>
+            <a:srgbClr val="065A82"/>
+          </a:solidFill>
+          <a:ln>
+            <a:noFill/>
+          </a:ln>
+          <a:effectLst/>
+        </p:spPr>
+        <p:style>
+          <a:lnRef idx="1">
+            <a:schemeClr val="accent1"/>
+          </a:lnRef>
+          <a:fillRef idx="3">
+            <a:schemeClr val="accent1"/>
+          </a:fillRef>
+          <a:effectRef idx="2">
+            <a:schemeClr val="accent1"/>
+          </a:effectRef>
+          <a:fontRef idx="minor">
+            <a:schemeClr val="lt1"/>
+          </a:fontRef>
+        </p:style>
+        <p:txBody>
+          <a:bodyPr rtlCol="0" anchor="ctr" lIns="45720" rIns="45720" tIns="18288" bIns="18288" wrap="none"/>
+          <a:lstStyle/>
+          <a:p>
+            <a:pPr algn="ctr"/>
+            <a:r>
+              <a:rPr sz="1150" b="1">
+                <a:solidFill>
+                  <a:srgbClr val="FFFFFF"/>
+                </a:solidFill>
+                <a:latin typeface="Arial"/>
+              </a:rPr>
+              <a:t>Codex CLI</a:t>
+            </a:r>
+          </a:p>
+        </p:txBody>
+      </p:sp>
+      <p:sp>
+        <p:nvSpPr>
+          <p:cNvPr id="24" name="TextBox 23"/>
+          <p:cNvSpPr txBox="1"/>
+          <p:nvPr/>
+        </p:nvSpPr>
+        <p:spPr>
+          <a:xfrm>
+            <a:off x="704088" y="5888736"/>
+            <a:ext cx="5993480" cy="384048"/>
+          </a:xfrm>
+          <a:prstGeom prst="rect">
+            <a:avLst/>
+          </a:prstGeom>
+          <a:noFill/>
+        </p:spPr>
+        <p:txBody>
+          <a:bodyPr wrap="square" lIns="0" rIns="0" tIns="0" bIns="0" anchor="ctr">
+            <a:spAutoFit/>
+          </a:bodyPr>
+          <a:lstStyle/>
+          <a:p>
+            <a:pPr algn="l">
+              <a:lnSpc>
+                <a:spcPct val="108000"/>
+              </a:lnSpc>
+            </a:pPr>
+            <a:r>
+              <a:rPr sz="1200" b="0" i="0">
+                <a:solidFill>
+                  <a:srgbClr val="21295C"/>
+                </a:solidFill>
+                <a:latin typeface="Arial"/>
+              </a:rPr>
+              <a:t>Adoption: C — самый быстрорастущий уровень; частый паттерн «связка инструментов» (редактор-агент + кодинг-агент).</a:t>
+            </a:r>
+          </a:p>
+        </p:txBody>
+      </p:sp>
+      <p:sp>
+        <p:nvSpPr>
+          <p:cNvPr id="25" name="Rounded Rectangle 24"/>
+          <p:cNvSpPr/>
+          <p:nvPr/>
+        </p:nvSpPr>
+        <p:spPr>
+          <a:xfrm>
+            <a:off x="6880448" y="5248656"/>
+            <a:ext cx="4622703" cy="1024128"/>
+          </a:xfrm>
+          <a:prstGeom prst="roundRect">
+            <a:avLst>
+              <a:gd name="adj" fmla="val 7000"/>
+            </a:avLst>
+          </a:prstGeom>
+          <a:solidFill>
+            <a:srgbClr val="E4F1F2"/>
+          </a:solidFill>
+          <a:ln w="15875">
+            <a:solidFill>
+              <a:srgbClr val="028090"/>
+            </a:solidFill>
+          </a:ln>
+          <a:effectLst/>
+        </p:spPr>
+        <p:style>
+          <a:lnRef idx="1">
+            <a:schemeClr val="accent1"/>
+          </a:lnRef>
+          <a:fillRef idx="3">
+            <a:schemeClr val="accent1"/>
+          </a:fillRef>
+          <a:effectRef idx="2">
+            <a:schemeClr val="accent1"/>
+          </a:effectRef>
+          <a:fontRef idx="minor">
+            <a:schemeClr val="lt1"/>
+          </a:fontRef>
+        </p:style>
+        <p:txBody>
+          <a:bodyPr rtlCol="0" anchor="ctr"/>
+          <a:lstStyle/>
+          <a:p>
+            <a:pPr algn="ctr"/>
+          </a:p>
+        </p:txBody>
+      </p:sp>
+      <p:sp>
+        <p:nvSpPr>
+          <p:cNvPr id="26" name="TextBox 25"/>
+          <p:cNvSpPr txBox="1"/>
+          <p:nvPr/>
+        </p:nvSpPr>
+        <p:spPr>
+          <a:xfrm>
+            <a:off x="7026752" y="5285232"/>
+            <a:ext cx="4330095" cy="950976"/>
+          </a:xfrm>
+          <a:prstGeom prst="rect">
+            <a:avLst/>
+          </a:prstGeom>
+          <a:noFill/>
+        </p:spPr>
+        <p:txBody>
+          <a:bodyPr wrap="square" lIns="0" rIns="0" tIns="0" bIns="0" anchor="ctr">
+            <a:spAutoFit/>
+          </a:bodyPr>
+          <a:lstStyle/>
+          <a:p>
+            <a:pPr algn="l">
+              <a:lnSpc>
+                <a:spcPct val="108000"/>
+              </a:lnSpc>
+            </a:pPr>
+            <a:r>
+              <a:rPr sz="1250" b="1" i="0">
+                <a:solidFill>
+                  <a:srgbClr val="028090"/>
+                </a:solidFill>
+                <a:latin typeface="Arial"/>
+              </a:rPr>
+              <a:t>⚠  </a:t>
+            </a:r>
+            <a:r>
+              <a:rPr sz="1150" b="1" i="0">
+                <a:solidFill>
+                  <a:srgbClr val="21295C"/>
+                </a:solidFill>
+                <a:latin typeface="Arial"/>
+              </a:rPr>
+              <a:t>SWE-bench как доказательство автономии дыряв: высокая цифра ≠ «мерджить без senior-ревью». Уровень задаёт режим (сам итерирует и гоняет тесты), а не бренд.</a:t>
+            </a:r>
+          </a:p>
+        </p:txBody>
+      </p:sp>
+      <p:sp>
+        <p:nvSpPr>
+          <p:cNvPr id="27" name="TextBox 26"/>
           <p:cNvSpPr txBox="1"/>
           <p:nvPr/>
         </p:nvSpPr>
@@ -11221,7 +11608,7 @@
                 </a:solidFill>
                 <a:latin typeface="Arial"/>
               </a:rPr>
-              <a:t>SWE-bench — это бенчмарк (мерило): набор реальных задач, на котором сравнивают модели; лидеры меняются почти еженедельно. Цифра без среза («Verified или Pro?») и без даты для решения не информативна.</a:t>
+              <a:t>SWE-bench — мерило: набор реальных задач, на котором сравнивают модели; лидеры меняются почти еженедельно. Цифра без среза («Verified или Pro?») и без даты не информативна.</a:t>
             </a:r>
           </a:p>
         </p:txBody>
@@ -13276,8 +13663,8 @@
         </p:nvSpPr>
         <p:spPr>
           <a:xfrm>
-            <a:off x="502920" y="1280160"/>
-            <a:ext cx="11201400" cy="1280160"/>
+            <a:off x="502920" y="1243584"/>
+            <a:ext cx="11201400" cy="1188720"/>
           </a:xfrm>
           <a:prstGeom prst="roundRect">
             <a:avLst>
@@ -13324,8 +13711,8 @@
         </p:nvSpPr>
         <p:spPr>
           <a:xfrm>
-            <a:off x="731520" y="1481328"/>
-            <a:ext cx="2329434" cy="877824"/>
+            <a:off x="731520" y="1444752"/>
+            <a:ext cx="2329434" cy="786384"/>
           </a:xfrm>
           <a:prstGeom prst="roundRect">
             <a:avLst>
@@ -13372,8 +13759,8 @@
         </p:nvSpPr>
         <p:spPr>
           <a:xfrm>
-            <a:off x="786384" y="1481328"/>
-            <a:ext cx="2219706" cy="877824"/>
+            <a:off x="786384" y="1444752"/>
+            <a:ext cx="2219706" cy="786384"/>
           </a:xfrm>
           <a:prstGeom prst="rect">
             <a:avLst/>
@@ -13412,7 +13799,7 @@
         </p:nvSpPr>
         <p:spPr>
           <a:xfrm>
-            <a:off x="3079242" y="1728215"/>
+            <a:off x="3079242" y="1645920"/>
             <a:ext cx="438912" cy="384048"/>
           </a:xfrm>
           <a:prstGeom prst="rightArrow">
@@ -13456,8 +13843,8 @@
         </p:nvSpPr>
         <p:spPr>
           <a:xfrm>
-            <a:off x="3536441" y="1481328"/>
-            <a:ext cx="2329434" cy="877824"/>
+            <a:off x="3536441" y="1444752"/>
+            <a:ext cx="2329434" cy="786384"/>
           </a:xfrm>
           <a:prstGeom prst="roundRect">
             <a:avLst>
@@ -13504,8 +13891,8 @@
         </p:nvSpPr>
         <p:spPr>
           <a:xfrm>
-            <a:off x="3591306" y="1481328"/>
-            <a:ext cx="2219706" cy="877824"/>
+            <a:off x="3591306" y="1444752"/>
+            <a:ext cx="2219706" cy="786384"/>
           </a:xfrm>
           <a:prstGeom prst="rect">
             <a:avLst/>
@@ -13544,7 +13931,7 @@
         </p:nvSpPr>
         <p:spPr>
           <a:xfrm>
-            <a:off x="5884163" y="1728215"/>
+            <a:off x="5884163" y="1645920"/>
             <a:ext cx="438912" cy="384048"/>
           </a:xfrm>
           <a:prstGeom prst="rightArrow">
@@ -13588,8 +13975,8 @@
         </p:nvSpPr>
         <p:spPr>
           <a:xfrm>
-            <a:off x="6341364" y="1481328"/>
-            <a:ext cx="2329434" cy="877824"/>
+            <a:off x="6341364" y="1444752"/>
+            <a:ext cx="2329434" cy="786384"/>
           </a:xfrm>
           <a:prstGeom prst="roundRect">
             <a:avLst>
@@ -13636,8 +14023,8 @@
         </p:nvSpPr>
         <p:spPr>
           <a:xfrm>
-            <a:off x="6396227" y="1481328"/>
-            <a:ext cx="2219706" cy="877824"/>
+            <a:off x="6396227" y="1444752"/>
+            <a:ext cx="2219706" cy="786384"/>
           </a:xfrm>
           <a:prstGeom prst="rect">
             <a:avLst/>
@@ -13676,7 +14063,7 @@
         </p:nvSpPr>
         <p:spPr>
           <a:xfrm>
-            <a:off x="8689086" y="1728215"/>
+            <a:off x="8689086" y="1645920"/>
             <a:ext cx="438912" cy="384048"/>
           </a:xfrm>
           <a:prstGeom prst="rightArrow">
@@ -13720,8 +14107,8 @@
         </p:nvSpPr>
         <p:spPr>
           <a:xfrm>
-            <a:off x="9146286" y="1481328"/>
-            <a:ext cx="2329434" cy="877824"/>
+            <a:off x="9146286" y="1444752"/>
+            <a:ext cx="2329434" cy="786384"/>
           </a:xfrm>
           <a:prstGeom prst="roundRect">
             <a:avLst>
@@ -13768,8 +14155,8 @@
         </p:nvSpPr>
         <p:spPr>
           <a:xfrm>
-            <a:off x="9201150" y="1481328"/>
-            <a:ext cx="2219706" cy="877824"/>
+            <a:off x="9201150" y="1444752"/>
+            <a:ext cx="2219706" cy="786384"/>
           </a:xfrm>
           <a:prstGeom prst="rect">
             <a:avLst/>
@@ -13808,12 +14195,12 @@
         </p:nvSpPr>
         <p:spPr>
           <a:xfrm>
-            <a:off x="502920" y="2743200"/>
-            <a:ext cx="5486400" cy="1920240"/>
+            <a:off x="502920" y="2596896"/>
+            <a:ext cx="5486400" cy="1755648"/>
           </a:xfrm>
           <a:prstGeom prst="roundRect">
             <a:avLst>
-              <a:gd name="adj" fmla="val 15873"/>
+              <a:gd name="adj" fmla="val 17361"/>
             </a:avLst>
           </a:prstGeom>
           <a:solidFill>
@@ -13856,8 +14243,8 @@
         </p:nvSpPr>
         <p:spPr>
           <a:xfrm>
-            <a:off x="713232" y="2871216"/>
-            <a:ext cx="5074920" cy="365760"/>
+            <a:off x="713232" y="2706624"/>
+            <a:ext cx="5074920" cy="347472"/>
           </a:xfrm>
           <a:prstGeom prst="rect">
             <a:avLst/>
@@ -13895,8 +14282,8 @@
         </p:nvSpPr>
         <p:spPr>
           <a:xfrm>
-            <a:off x="713232" y="3310128"/>
-            <a:ext cx="5074920" cy="1234440"/>
+            <a:off x="713232" y="3108960"/>
+            <a:ext cx="5074920" cy="1170432"/>
           </a:xfrm>
           <a:prstGeom prst="rect">
             <a:avLst/>
@@ -13911,7 +14298,7 @@
           <a:p>
             <a:pPr algn="l">
               <a:lnSpc>
-                <a:spcPct val="120000"/>
+                <a:spcPct val="116000"/>
               </a:lnSpc>
             </a:pPr>
             <a:r>
@@ -13934,12 +14321,12 @@
         </p:nvSpPr>
         <p:spPr>
           <a:xfrm>
-            <a:off x="6217920" y="2743200"/>
-            <a:ext cx="5486400" cy="1920240"/>
+            <a:off x="6217920" y="2596896"/>
+            <a:ext cx="5486400" cy="1755648"/>
           </a:xfrm>
           <a:prstGeom prst="roundRect">
             <a:avLst>
-              <a:gd name="adj" fmla="val 15873"/>
+              <a:gd name="adj" fmla="val 17361"/>
             </a:avLst>
           </a:prstGeom>
           <a:solidFill>
@@ -13982,8 +14369,8 @@
         </p:nvSpPr>
         <p:spPr>
           <a:xfrm>
-            <a:off x="6428232" y="2871216"/>
-            <a:ext cx="5074920" cy="365760"/>
+            <a:off x="6428232" y="2706624"/>
+            <a:ext cx="5074920" cy="347472"/>
           </a:xfrm>
           <a:prstGeom prst="rect">
             <a:avLst/>
@@ -14021,8 +14408,8 @@
         </p:nvSpPr>
         <p:spPr>
           <a:xfrm>
-            <a:off x="6428232" y="3310128"/>
-            <a:ext cx="5074920" cy="1234440"/>
+            <a:off x="6428232" y="3108960"/>
+            <a:ext cx="5074920" cy="1170432"/>
           </a:xfrm>
           <a:prstGeom prst="rect">
             <a:avLst/>
@@ -14037,7 +14424,7 @@
           <a:p>
             <a:pPr algn="l">
               <a:lnSpc>
-                <a:spcPct val="120000"/>
+                <a:spcPct val="116000"/>
               </a:lnSpc>
             </a:pPr>
             <a:r>
@@ -14060,8 +14447,8 @@
         </p:nvSpPr>
         <p:spPr>
           <a:xfrm>
-            <a:off x="502920" y="4828032"/>
-            <a:ext cx="11201400" cy="896112"/>
+            <a:off x="502920" y="4462272"/>
+            <a:ext cx="11201400" cy="786384"/>
           </a:xfrm>
           <a:prstGeom prst="roundRect">
             <a:avLst>
@@ -14108,8 +14495,8 @@
         </p:nvSpPr>
         <p:spPr>
           <a:xfrm>
-            <a:off x="722376" y="4882896"/>
-            <a:ext cx="10762488" cy="786384"/>
+            <a:off x="722376" y="4517136"/>
+            <a:ext cx="10762488" cy="676656"/>
           </a:xfrm>
           <a:prstGeom prst="rect">
             <a:avLst/>
@@ -14135,6 +14522,448 @@
                 <a:latin typeface="Arial"/>
               </a:rPr>
               <a:t>Уровень D — максимум автономии и максимум риска: человек обязателен на любом необратимом или прод-действии, иначе автономный деструктив проходит без подтверждения.</a:t>
+            </a:r>
+          </a:p>
+        </p:txBody>
+      </p:sp>
+      <p:sp>
+        <p:nvSpPr>
+          <p:cNvPr id="23" name="Rounded Rectangle 22"/>
+          <p:cNvSpPr/>
+          <p:nvPr/>
+        </p:nvSpPr>
+        <p:spPr>
+          <a:xfrm>
+            <a:off x="502920" y="5340096"/>
+            <a:ext cx="11201400" cy="1243584"/>
+          </a:xfrm>
+          <a:prstGeom prst="roundRect">
+            <a:avLst>
+              <a:gd name="adj" fmla="val 22000"/>
+            </a:avLst>
+          </a:prstGeom>
+          <a:solidFill>
+            <a:srgbClr val="F4F7FA"/>
+          </a:solidFill>
+          <a:ln w="19050">
+            <a:solidFill>
+              <a:srgbClr val="1C7293"/>
+            </a:solidFill>
+          </a:ln>
+          <a:effectLst/>
+        </p:spPr>
+        <p:style>
+          <a:lnRef idx="1">
+            <a:schemeClr val="accent1"/>
+          </a:lnRef>
+          <a:fillRef idx="3">
+            <a:schemeClr val="accent1"/>
+          </a:fillRef>
+          <a:effectRef idx="2">
+            <a:schemeClr val="accent1"/>
+          </a:effectRef>
+          <a:fontRef idx="minor">
+            <a:schemeClr val="lt1"/>
+          </a:fontRef>
+        </p:style>
+        <p:txBody>
+          <a:bodyPr rtlCol="0" anchor="ctr"/>
+          <a:lstStyle/>
+          <a:p>
+            <a:pPr algn="ctr"/>
+          </a:p>
+        </p:txBody>
+      </p:sp>
+      <p:sp>
+        <p:nvSpPr>
+          <p:cNvPr id="24" name="TextBox 23"/>
+          <p:cNvSpPr txBox="1"/>
+          <p:nvPr/>
+        </p:nvSpPr>
+        <p:spPr>
+          <a:xfrm>
+            <a:off x="704088" y="5449824"/>
+            <a:ext cx="6263457" cy="237744"/>
+          </a:xfrm>
+          <a:prstGeom prst="rect">
+            <a:avLst/>
+          </a:prstGeom>
+          <a:noFill/>
+        </p:spPr>
+        <p:txBody>
+          <a:bodyPr wrap="square" lIns="0" rIns="0" tIns="0" bIns="0" anchor="ctr">
+            <a:spAutoFit/>
+          </a:bodyPr>
+          <a:lstStyle/>
+          <a:p>
+            <a:pPr algn="l">
+              <a:lnSpc>
+                <a:spcPct val="115000"/>
+              </a:lnSpc>
+            </a:pPr>
+            <a:r>
+              <a:rPr sz="1200" b="1" i="0">
+                <a:solidFill>
+                  <a:srgbClr val="065A82"/>
+                </a:solidFill>
+                <a:latin typeface="Arial"/>
+              </a:rPr>
+              <a:t>Инструменты 2026</a:t>
+            </a:r>
+          </a:p>
+        </p:txBody>
+      </p:sp>
+      <p:sp>
+        <p:nvSpPr>
+          <p:cNvPr id="25" name="Rounded Rectangle 24"/>
+          <p:cNvSpPr/>
+          <p:nvPr/>
+        </p:nvSpPr>
+        <p:spPr>
+          <a:xfrm>
+            <a:off x="704088" y="5742432"/>
+            <a:ext cx="1175918" cy="292608"/>
+          </a:xfrm>
+          <a:prstGeom prst="roundRect">
+            <a:avLst>
+              <a:gd name="adj" fmla="val 50000"/>
+            </a:avLst>
+          </a:prstGeom>
+          <a:solidFill>
+            <a:srgbClr val="065A82"/>
+          </a:solidFill>
+          <a:ln>
+            <a:noFill/>
+          </a:ln>
+          <a:effectLst/>
+        </p:spPr>
+        <p:style>
+          <a:lnRef idx="1">
+            <a:schemeClr val="accent1"/>
+          </a:lnRef>
+          <a:fillRef idx="3">
+            <a:schemeClr val="accent1"/>
+          </a:fillRef>
+          <a:effectRef idx="2">
+            <a:schemeClr val="accent1"/>
+          </a:effectRef>
+          <a:fontRef idx="minor">
+            <a:schemeClr val="lt1"/>
+          </a:fontRef>
+        </p:style>
+        <p:txBody>
+          <a:bodyPr rtlCol="0" anchor="ctr" lIns="45720" rIns="45720" tIns="18288" bIns="18288" wrap="none"/>
+          <a:lstStyle/>
+          <a:p>
+            <a:pPr algn="ctr"/>
+            <a:r>
+              <a:rPr sz="1150" b="1">
+                <a:solidFill>
+                  <a:srgbClr val="FFFFFF"/>
+                </a:solidFill>
+                <a:latin typeface="Arial"/>
+              </a:rPr>
+              <a:t>Copilot agent</a:t>
+            </a:r>
+          </a:p>
+        </p:txBody>
+      </p:sp>
+      <p:sp>
+        <p:nvSpPr>
+          <p:cNvPr id="26" name="Rounded Rectangle 25"/>
+          <p:cNvSpPr/>
+          <p:nvPr/>
+        </p:nvSpPr>
+        <p:spPr>
+          <a:xfrm>
+            <a:off x="1971446" y="5742432"/>
+            <a:ext cx="875995" cy="292608"/>
+          </a:xfrm>
+          <a:prstGeom prst="roundRect">
+            <a:avLst>
+              <a:gd name="adj" fmla="val 50000"/>
+            </a:avLst>
+          </a:prstGeom>
+          <a:solidFill>
+            <a:srgbClr val="065A82"/>
+          </a:solidFill>
+          <a:ln>
+            <a:noFill/>
+          </a:ln>
+          <a:effectLst/>
+        </p:spPr>
+        <p:style>
+          <a:lnRef idx="1">
+            <a:schemeClr val="accent1"/>
+          </a:lnRef>
+          <a:fillRef idx="3">
+            <a:schemeClr val="accent1"/>
+          </a:fillRef>
+          <a:effectRef idx="2">
+            <a:schemeClr val="accent1"/>
+          </a:effectRef>
+          <a:fontRef idx="minor">
+            <a:schemeClr val="lt1"/>
+          </a:fontRef>
+        </p:style>
+        <p:txBody>
+          <a:bodyPr rtlCol="0" anchor="ctr" lIns="45720" rIns="45720" tIns="18288" bIns="18288" wrap="none"/>
+          <a:lstStyle/>
+          <a:p>
+            <a:pPr algn="ctr"/>
+            <a:r>
+              <a:rPr sz="1150" b="1">
+                <a:solidFill>
+                  <a:srgbClr val="FFFFFF"/>
+                </a:solidFill>
+                <a:latin typeface="Arial"/>
+              </a:rPr>
+              <a:t>Devin 2.0</a:t>
+            </a:r>
+          </a:p>
+        </p:txBody>
+      </p:sp>
+      <p:sp>
+        <p:nvSpPr>
+          <p:cNvPr id="27" name="Rounded Rectangle 26"/>
+          <p:cNvSpPr/>
+          <p:nvPr/>
+        </p:nvSpPr>
+        <p:spPr>
+          <a:xfrm>
+            <a:off x="2938881" y="5742432"/>
+            <a:ext cx="576072" cy="292608"/>
+          </a:xfrm>
+          <a:prstGeom prst="roundRect">
+            <a:avLst>
+              <a:gd name="adj" fmla="val 50000"/>
+            </a:avLst>
+          </a:prstGeom>
+          <a:solidFill>
+            <a:srgbClr val="065A82"/>
+          </a:solidFill>
+          <a:ln>
+            <a:noFill/>
+          </a:ln>
+          <a:effectLst/>
+        </p:spPr>
+        <p:style>
+          <a:lnRef idx="1">
+            <a:schemeClr val="accent1"/>
+          </a:lnRef>
+          <a:fillRef idx="3">
+            <a:schemeClr val="accent1"/>
+          </a:fillRef>
+          <a:effectRef idx="2">
+            <a:schemeClr val="accent1"/>
+          </a:effectRef>
+          <a:fontRef idx="minor">
+            <a:schemeClr val="lt1"/>
+          </a:fontRef>
+        </p:style>
+        <p:txBody>
+          <a:bodyPr rtlCol="0" anchor="ctr" lIns="45720" rIns="45720" tIns="18288" bIns="18288" wrap="none"/>
+          <a:lstStyle/>
+          <a:p>
+            <a:pPr algn="ctr"/>
+            <a:r>
+              <a:rPr sz="1150" b="1">
+                <a:solidFill>
+                  <a:srgbClr val="FFFFFF"/>
+                </a:solidFill>
+                <a:latin typeface="Arial"/>
+              </a:rPr>
+              <a:t>Jules</a:t>
+            </a:r>
+          </a:p>
+        </p:txBody>
+      </p:sp>
+      <p:sp>
+        <p:nvSpPr>
+          <p:cNvPr id="28" name="Rounded Rectangle 27"/>
+          <p:cNvSpPr/>
+          <p:nvPr/>
+        </p:nvSpPr>
+        <p:spPr>
+          <a:xfrm>
+            <a:off x="3606393" y="5742432"/>
+            <a:ext cx="1025956" cy="292608"/>
+          </a:xfrm>
+          <a:prstGeom prst="roundRect">
+            <a:avLst>
+              <a:gd name="adj" fmla="val 50000"/>
+            </a:avLst>
+          </a:prstGeom>
+          <a:solidFill>
+            <a:srgbClr val="065A82"/>
+          </a:solidFill>
+          <a:ln>
+            <a:noFill/>
+          </a:ln>
+          <a:effectLst/>
+        </p:spPr>
+        <p:style>
+          <a:lnRef idx="1">
+            <a:schemeClr val="accent1"/>
+          </a:lnRef>
+          <a:fillRef idx="3">
+            <a:schemeClr val="accent1"/>
+          </a:fillRef>
+          <a:effectRef idx="2">
+            <a:schemeClr val="accent1"/>
+          </a:effectRef>
+          <a:fontRef idx="minor">
+            <a:schemeClr val="lt1"/>
+          </a:fontRef>
+        </p:style>
+        <p:txBody>
+          <a:bodyPr rtlCol="0" anchor="ctr" lIns="45720" rIns="45720" tIns="18288" bIns="18288" wrap="none"/>
+          <a:lstStyle/>
+          <a:p>
+            <a:pPr algn="ctr"/>
+            <a:r>
+              <a:rPr sz="1150" b="1">
+                <a:solidFill>
+                  <a:srgbClr val="FFFFFF"/>
+                </a:solidFill>
+                <a:latin typeface="Arial"/>
+              </a:rPr>
+              <a:t>Codex Cloud</a:t>
+            </a:r>
+          </a:p>
+        </p:txBody>
+      </p:sp>
+      <p:sp>
+        <p:nvSpPr>
+          <p:cNvPr id="29" name="TextBox 28"/>
+          <p:cNvSpPr txBox="1"/>
+          <p:nvPr/>
+        </p:nvSpPr>
+        <p:spPr>
+          <a:xfrm>
+            <a:off x="704088" y="6089904"/>
+            <a:ext cx="6263457" cy="384048"/>
+          </a:xfrm>
+          <a:prstGeom prst="rect">
+            <a:avLst/>
+          </a:prstGeom>
+          <a:noFill/>
+        </p:spPr>
+        <p:txBody>
+          <a:bodyPr wrap="square" lIns="0" rIns="0" tIns="0" bIns="0" anchor="ctr">
+            <a:spAutoFit/>
+          </a:bodyPr>
+          <a:lstStyle/>
+          <a:p>
+            <a:pPr algn="l">
+              <a:lnSpc>
+                <a:spcPct val="108000"/>
+              </a:lnSpc>
+            </a:pPr>
+            <a:r>
+              <a:rPr sz="1200" b="0" i="0">
+                <a:solidFill>
+                  <a:srgbClr val="21295C"/>
+                </a:solidFill>
+                <a:latin typeface="Arial"/>
+              </a:rPr>
+              <a:t>Adoption: D — самый молодой сегмент; мульти-агентные системы — верхняя кромка, emerging, а не мейнстрим.</a:t>
+            </a:r>
+          </a:p>
+        </p:txBody>
+      </p:sp>
+      <p:sp>
+        <p:nvSpPr>
+          <p:cNvPr id="30" name="Rounded Rectangle 29"/>
+          <p:cNvSpPr/>
+          <p:nvPr/>
+        </p:nvSpPr>
+        <p:spPr>
+          <a:xfrm>
+            <a:off x="7150425" y="5449824"/>
+            <a:ext cx="4352726" cy="1024128"/>
+          </a:xfrm>
+          <a:prstGeom prst="roundRect">
+            <a:avLst>
+              <a:gd name="adj" fmla="val 7000"/>
+            </a:avLst>
+          </a:prstGeom>
+          <a:solidFill>
+            <a:srgbClr val="E4F1F2"/>
+          </a:solidFill>
+          <a:ln w="15875">
+            <a:solidFill>
+              <a:srgbClr val="028090"/>
+            </a:solidFill>
+          </a:ln>
+          <a:effectLst/>
+        </p:spPr>
+        <p:style>
+          <a:lnRef idx="1">
+            <a:schemeClr val="accent1"/>
+          </a:lnRef>
+          <a:fillRef idx="3">
+            <a:schemeClr val="accent1"/>
+          </a:fillRef>
+          <a:effectRef idx="2">
+            <a:schemeClr val="accent1"/>
+          </a:effectRef>
+          <a:fontRef idx="minor">
+            <a:schemeClr val="lt1"/>
+          </a:fontRef>
+        </p:style>
+        <p:txBody>
+          <a:bodyPr rtlCol="0" anchor="ctr"/>
+          <a:lstStyle/>
+          <a:p>
+            <a:pPr algn="ctr"/>
+          </a:p>
+        </p:txBody>
+      </p:sp>
+      <p:sp>
+        <p:nvSpPr>
+          <p:cNvPr id="31" name="TextBox 30"/>
+          <p:cNvSpPr txBox="1"/>
+          <p:nvPr/>
+        </p:nvSpPr>
+        <p:spPr>
+          <a:xfrm>
+            <a:off x="7296729" y="5486400"/>
+            <a:ext cx="4060118" cy="950976"/>
+          </a:xfrm>
+          <a:prstGeom prst="rect">
+            <a:avLst/>
+          </a:prstGeom>
+          <a:noFill/>
+        </p:spPr>
+        <p:txBody>
+          <a:bodyPr wrap="square" lIns="0" rIns="0" tIns="0" bIns="0" anchor="ctr">
+            <a:spAutoFit/>
+          </a:bodyPr>
+          <a:lstStyle/>
+          <a:p>
+            <a:pPr algn="l">
+              <a:lnSpc>
+                <a:spcPct val="108000"/>
+              </a:lnSpc>
+            </a:pPr>
+            <a:r>
+              <a:rPr sz="1250" b="1" i="0">
+                <a:solidFill>
+                  <a:srgbClr val="028090"/>
+                </a:solidFill>
+                <a:latin typeface="Arial"/>
+              </a:rPr>
+              <a:t>⚠  </a:t>
+            </a:r>
+            <a:r>
+              <a:rPr sz="1150" b="1" i="0">
+                <a:solidFill>
+                  <a:srgbClr val="21295C"/>
+                </a:solidFill>
+                <a:latin typeface="Arial"/>
+              </a:rPr>
+              <a:t>«Полностью автономный инженер» (Devin) — overclaim, не факт. Copilot coding agent в проде = 5 отказов + «аварийный выключатель» → гейты обязательны.</a:t>
             </a:r>
           </a:p>
         </p:txBody>
@@ -40030,8 +40859,8 @@
         </p:nvSpPr>
         <p:spPr>
           <a:xfrm>
-            <a:off x="502920" y="877824"/>
-            <a:ext cx="11201400" cy="420624"/>
+            <a:off x="502920" y="859536"/>
+            <a:ext cx="11201400" cy="384048"/>
           </a:xfrm>
           <a:prstGeom prst="rect">
             <a:avLst/>
@@ -40046,7 +40875,7 @@
           <a:p>
             <a:pPr algn="l">
               <a:lnSpc>
-                <a:spcPct val="112000"/>
+                <a:spcPct val="110000"/>
               </a:lnSpc>
             </a:pPr>
             <a:r>
@@ -40069,12 +40898,12 @@
         </p:nvSpPr>
         <p:spPr>
           <a:xfrm>
-            <a:off x="502920" y="1444752"/>
-            <a:ext cx="6446520" cy="3611880"/>
+            <a:off x="502920" y="1316736"/>
+            <a:ext cx="6446520" cy="3163824"/>
           </a:xfrm>
           <a:prstGeom prst="roundRect">
             <a:avLst>
-              <a:gd name="adj" fmla="val 8438"/>
+              <a:gd name="adj" fmla="val 9633"/>
             </a:avLst>
           </a:prstGeom>
           <a:solidFill>
@@ -40117,8 +40946,8 @@
         </p:nvSpPr>
         <p:spPr>
           <a:xfrm>
-            <a:off x="740664" y="1591056"/>
-            <a:ext cx="5971031" cy="292608"/>
+            <a:off x="740664" y="1444752"/>
+            <a:ext cx="5971031" cy="274320"/>
           </a:xfrm>
           <a:prstGeom prst="rect">
             <a:avLst/>
@@ -40156,8 +40985,8 @@
         </p:nvSpPr>
         <p:spPr>
           <a:xfrm>
-            <a:off x="740664" y="1975104"/>
-            <a:ext cx="5971031" cy="950976"/>
+            <a:off x="740664" y="1792224"/>
+            <a:ext cx="5971031" cy="822960"/>
           </a:xfrm>
           <a:prstGeom prst="roundRect">
             <a:avLst>
@@ -40204,8 +41033,8 @@
         </p:nvSpPr>
         <p:spPr>
           <a:xfrm>
-            <a:off x="923544" y="2084832"/>
-            <a:ext cx="3840479" cy="731520"/>
+            <a:off x="923544" y="1901952"/>
+            <a:ext cx="3840479" cy="603504"/>
           </a:xfrm>
           <a:prstGeom prst="rect">
             <a:avLst/>
@@ -40243,8 +41072,8 @@
         </p:nvSpPr>
         <p:spPr>
           <a:xfrm>
-            <a:off x="4709159" y="2048256"/>
-            <a:ext cx="1874519" cy="804672"/>
+            <a:off x="4709159" y="1865376"/>
+            <a:ext cx="1874519" cy="676656"/>
           </a:xfrm>
           <a:prstGeom prst="rect">
             <a:avLst/>
@@ -40263,7 +41092,7 @@
               </a:lnSpc>
             </a:pPr>
             <a:r>
-              <a:rPr sz="3300" b="1" i="0">
+              <a:rPr sz="3100" b="1" i="0">
                 <a:solidFill>
                   <a:srgbClr val="21295C"/>
                 </a:solidFill>
@@ -40282,8 +41111,8 @@
         </p:nvSpPr>
         <p:spPr>
           <a:xfrm>
-            <a:off x="740664" y="2990088"/>
-            <a:ext cx="5971031" cy="950976"/>
+            <a:off x="740664" y="2679191"/>
+            <a:ext cx="5971031" cy="822960"/>
           </a:xfrm>
           <a:prstGeom prst="roundRect">
             <a:avLst>
@@ -40330,8 +41159,8 @@
         </p:nvSpPr>
         <p:spPr>
           <a:xfrm>
-            <a:off x="923544" y="3099816"/>
-            <a:ext cx="3840479" cy="731520"/>
+            <a:off x="923544" y="2788920"/>
+            <a:ext cx="3840479" cy="603504"/>
           </a:xfrm>
           <a:prstGeom prst="rect">
             <a:avLst/>
@@ -40369,8 +41198,8 @@
         </p:nvSpPr>
         <p:spPr>
           <a:xfrm>
-            <a:off x="4709159" y="3063240"/>
-            <a:ext cx="1874519" cy="804672"/>
+            <a:off x="4709159" y="2752344"/>
+            <a:ext cx="1874519" cy="676656"/>
           </a:xfrm>
           <a:prstGeom prst="rect">
             <a:avLst/>
@@ -40389,7 +41218,7 @@
               </a:lnSpc>
             </a:pPr>
             <a:r>
-              <a:rPr sz="3300" b="1" i="0">
+              <a:rPr sz="3100" b="1" i="0">
                 <a:solidFill>
                   <a:srgbClr val="21295C"/>
                 </a:solidFill>
@@ -40408,8 +41237,8 @@
         </p:nvSpPr>
         <p:spPr>
           <a:xfrm>
-            <a:off x="740664" y="4005072"/>
-            <a:ext cx="5971031" cy="950976"/>
+            <a:off x="740664" y="3566159"/>
+            <a:ext cx="5971031" cy="822960"/>
           </a:xfrm>
           <a:prstGeom prst="roundRect">
             <a:avLst>
@@ -40456,8 +41285,8 @@
         </p:nvSpPr>
         <p:spPr>
           <a:xfrm>
-            <a:off x="923544" y="4114800"/>
-            <a:ext cx="3840479" cy="731520"/>
+            <a:off x="923544" y="3675887"/>
+            <a:ext cx="3840479" cy="603504"/>
           </a:xfrm>
           <a:prstGeom prst="rect">
             <a:avLst/>
@@ -40495,8 +41324,8 @@
         </p:nvSpPr>
         <p:spPr>
           <a:xfrm>
-            <a:off x="4709159" y="4078224"/>
-            <a:ext cx="1874519" cy="804672"/>
+            <a:off x="4709159" y="3639311"/>
+            <a:ext cx="1874519" cy="676656"/>
           </a:xfrm>
           <a:prstGeom prst="rect">
             <a:avLst/>
@@ -40515,7 +41344,7 @@
               </a:lnSpc>
             </a:pPr>
             <a:r>
-              <a:rPr sz="1800" b="1" i="0">
+              <a:rPr sz="1700" b="1" i="0">
                 <a:solidFill>
                   <a:srgbClr val="F0AB00"/>
                 </a:solidFill>
@@ -40535,12 +41364,12 @@
         </p:nvSpPr>
         <p:spPr>
           <a:xfrm>
-            <a:off x="7132320" y="1444752"/>
-            <a:ext cx="4572000" cy="2331720"/>
+            <a:off x="7132320" y="1316736"/>
+            <a:ext cx="4572000" cy="2139696"/>
           </a:xfrm>
           <a:prstGeom prst="roundRect">
             <a:avLst>
-              <a:gd name="adj" fmla="val 13071"/>
+              <a:gd name="adj" fmla="val 14245"/>
             </a:avLst>
           </a:prstGeom>
           <a:solidFill>
@@ -40583,8 +41412,8 @@
         </p:nvSpPr>
         <p:spPr>
           <a:xfrm>
-            <a:off x="7370064" y="1591056"/>
-            <a:ext cx="4096512" cy="274320"/>
+            <a:off x="7370064" y="1444752"/>
+            <a:ext cx="4096512" cy="256032"/>
           </a:xfrm>
           <a:prstGeom prst="rect">
             <a:avLst/>
@@ -40622,8 +41451,8 @@
         </p:nvSpPr>
         <p:spPr>
           <a:xfrm>
-            <a:off x="7370064" y="1920240"/>
-            <a:ext cx="1188720" cy="420624"/>
+            <a:off x="7370064" y="1755648"/>
+            <a:ext cx="1188720" cy="402336"/>
           </a:xfrm>
           <a:prstGeom prst="rect">
             <a:avLst/>
@@ -40661,8 +41490,8 @@
         </p:nvSpPr>
         <p:spPr>
           <a:xfrm>
-            <a:off x="8577072" y="1920240"/>
-            <a:ext cx="2889504" cy="420624"/>
+            <a:off x="8577072" y="1755648"/>
+            <a:ext cx="2889504" cy="402336"/>
           </a:xfrm>
           <a:prstGeom prst="rect">
             <a:avLst/>
@@ -40700,8 +41529,8 @@
         </p:nvSpPr>
         <p:spPr>
           <a:xfrm>
-            <a:off x="7370064" y="2377440"/>
-            <a:ext cx="1188720" cy="420624"/>
+            <a:off x="7370064" y="2176272"/>
+            <a:ext cx="1188720" cy="402336"/>
           </a:xfrm>
           <a:prstGeom prst="rect">
             <a:avLst/>
@@ -40739,8 +41568,8 @@
         </p:nvSpPr>
         <p:spPr>
           <a:xfrm>
-            <a:off x="8577072" y="2377440"/>
-            <a:ext cx="2889504" cy="420624"/>
+            <a:off x="8577072" y="2176272"/>
+            <a:ext cx="2889504" cy="402336"/>
           </a:xfrm>
           <a:prstGeom prst="rect">
             <a:avLst/>
@@ -40778,8 +41607,8 @@
         </p:nvSpPr>
         <p:spPr>
           <a:xfrm>
-            <a:off x="7370064" y="2834640"/>
-            <a:ext cx="1188720" cy="420624"/>
+            <a:off x="7370064" y="2596896"/>
+            <a:ext cx="1188720" cy="402336"/>
           </a:xfrm>
           <a:prstGeom prst="rect">
             <a:avLst/>
@@ -40817,8 +41646,8 @@
         </p:nvSpPr>
         <p:spPr>
           <a:xfrm>
-            <a:off x="8577072" y="2834640"/>
-            <a:ext cx="2889504" cy="420624"/>
+            <a:off x="8577072" y="2596896"/>
+            <a:ext cx="2889504" cy="402336"/>
           </a:xfrm>
           <a:prstGeom prst="rect">
             <a:avLst/>
@@ -40856,8 +41685,8 @@
         </p:nvSpPr>
         <p:spPr>
           <a:xfrm>
-            <a:off x="7370064" y="3291840"/>
-            <a:ext cx="1188720" cy="420624"/>
+            <a:off x="7370064" y="3017520"/>
+            <a:ext cx="1188720" cy="402336"/>
           </a:xfrm>
           <a:prstGeom prst="rect">
             <a:avLst/>
@@ -40895,8 +41724,8 @@
         </p:nvSpPr>
         <p:spPr>
           <a:xfrm>
-            <a:off x="8577072" y="3291840"/>
-            <a:ext cx="2889504" cy="420624"/>
+            <a:off x="8577072" y="3017520"/>
+            <a:ext cx="2889504" cy="402336"/>
           </a:xfrm>
           <a:prstGeom prst="rect">
             <a:avLst/>
@@ -40934,8 +41763,8 @@
         </p:nvSpPr>
         <p:spPr>
           <a:xfrm>
-            <a:off x="7132320" y="3931920"/>
-            <a:ext cx="4572000" cy="1335024"/>
+            <a:off x="7132320" y="3602736"/>
+            <a:ext cx="4572000" cy="877824"/>
           </a:xfrm>
           <a:prstGeom prst="roundRect">
             <a:avLst>
@@ -40982,8 +41811,8 @@
         </p:nvSpPr>
         <p:spPr>
           <a:xfrm>
-            <a:off x="7351775" y="3986784"/>
-            <a:ext cx="4133087" cy="1225295"/>
+            <a:off x="7351775" y="3657600"/>
+            <a:ext cx="4133087" cy="768096"/>
           </a:xfrm>
           <a:prstGeom prst="rect">
             <a:avLst/>
@@ -41002,7 +41831,7 @@
               </a:lnSpc>
             </a:pPr>
             <a:r>
-              <a:rPr sz="1300" b="1" i="0">
+              <a:rPr sz="1250" b="1" i="0">
                 <a:solidFill>
                   <a:srgbClr val="21295C"/>
                 </a:solidFill>
@@ -41015,7 +41844,394 @@
       </p:sp>
       <p:sp>
         <p:nvSpPr>
-          <p:cNvPr id="27" name="TextBox 26"/>
+          <p:cNvPr id="27" name="Rounded Rectangle 26"/>
+          <p:cNvSpPr/>
+          <p:nvPr/>
+        </p:nvSpPr>
+        <p:spPr>
+          <a:xfrm>
+            <a:off x="502920" y="4590288"/>
+            <a:ext cx="11201400" cy="1298448"/>
+          </a:xfrm>
+          <a:prstGeom prst="roundRect">
+            <a:avLst>
+              <a:gd name="adj" fmla="val 22000"/>
+            </a:avLst>
+          </a:prstGeom>
+          <a:solidFill>
+            <a:srgbClr val="F4F7FA"/>
+          </a:solidFill>
+          <a:ln w="19050">
+            <a:solidFill>
+              <a:srgbClr val="1C7293"/>
+            </a:solidFill>
+          </a:ln>
+          <a:effectLst/>
+        </p:spPr>
+        <p:style>
+          <a:lnRef idx="1">
+            <a:schemeClr val="accent1"/>
+          </a:lnRef>
+          <a:fillRef idx="3">
+            <a:schemeClr val="accent1"/>
+          </a:fillRef>
+          <a:effectRef idx="2">
+            <a:schemeClr val="accent1"/>
+          </a:effectRef>
+          <a:fontRef idx="minor">
+            <a:schemeClr val="lt1"/>
+          </a:fontRef>
+        </p:style>
+        <p:txBody>
+          <a:bodyPr rtlCol="0" anchor="ctr"/>
+          <a:lstStyle/>
+          <a:p>
+            <a:pPr algn="ctr"/>
+          </a:p>
+        </p:txBody>
+      </p:sp>
+      <p:sp>
+        <p:nvSpPr>
+          <p:cNvPr id="28" name="TextBox 27"/>
+          <p:cNvSpPr txBox="1"/>
+          <p:nvPr/>
+        </p:nvSpPr>
+        <p:spPr>
+          <a:xfrm>
+            <a:off x="704088" y="4700016"/>
+            <a:ext cx="5993480" cy="237744"/>
+          </a:xfrm>
+          <a:prstGeom prst="rect">
+            <a:avLst/>
+          </a:prstGeom>
+          <a:noFill/>
+        </p:spPr>
+        <p:txBody>
+          <a:bodyPr wrap="square" lIns="0" rIns="0" tIns="0" bIns="0" anchor="ctr">
+            <a:spAutoFit/>
+          </a:bodyPr>
+          <a:lstStyle/>
+          <a:p>
+            <a:pPr algn="l">
+              <a:lnSpc>
+                <a:spcPct val="115000"/>
+              </a:lnSpc>
+            </a:pPr>
+            <a:r>
+              <a:rPr sz="1200" b="1" i="0">
+                <a:solidFill>
+                  <a:srgbClr val="065A82"/>
+                </a:solidFill>
+                <a:latin typeface="Arial"/>
+              </a:rPr>
+              <a:t>Инструменты 2026</a:t>
+            </a:r>
+          </a:p>
+        </p:txBody>
+      </p:sp>
+      <p:sp>
+        <p:nvSpPr>
+          <p:cNvPr id="29" name="Rounded Rectangle 28"/>
+          <p:cNvSpPr/>
+          <p:nvPr/>
+        </p:nvSpPr>
+        <p:spPr>
+          <a:xfrm>
+            <a:off x="704088" y="4992624"/>
+            <a:ext cx="1550822" cy="292608"/>
+          </a:xfrm>
+          <a:prstGeom prst="roundRect">
+            <a:avLst>
+              <a:gd name="adj" fmla="val 50000"/>
+            </a:avLst>
+          </a:prstGeom>
+          <a:solidFill>
+            <a:srgbClr val="065A82"/>
+          </a:solidFill>
+          <a:ln>
+            <a:noFill/>
+          </a:ln>
+          <a:effectLst/>
+        </p:spPr>
+        <p:style>
+          <a:lnRef idx="1">
+            <a:schemeClr val="accent1"/>
+          </a:lnRef>
+          <a:fillRef idx="3">
+            <a:schemeClr val="accent1"/>
+          </a:fillRef>
+          <a:effectRef idx="2">
+            <a:schemeClr val="accent1"/>
+          </a:effectRef>
+          <a:fontRef idx="minor">
+            <a:schemeClr val="lt1"/>
+          </a:fontRef>
+        </p:style>
+        <p:txBody>
+          <a:bodyPr rtlCol="0" anchor="ctr" lIns="45720" rIns="45720" tIns="18288" bIns="18288" wrap="none"/>
+          <a:lstStyle/>
+          <a:p>
+            <a:pPr algn="ctr"/>
+            <a:r>
+              <a:rPr sz="1150" b="1">
+                <a:solidFill>
+                  <a:srgbClr val="FFFFFF"/>
+                </a:solidFill>
+                <a:latin typeface="Arial"/>
+              </a:rPr>
+              <a:t>Copilot ghost-text</a:t>
+            </a:r>
+          </a:p>
+        </p:txBody>
+      </p:sp>
+      <p:sp>
+        <p:nvSpPr>
+          <p:cNvPr id="30" name="Rounded Rectangle 29"/>
+          <p:cNvSpPr/>
+          <p:nvPr/>
+        </p:nvSpPr>
+        <p:spPr>
+          <a:xfrm>
+            <a:off x="2346350" y="4992624"/>
+            <a:ext cx="950976" cy="292608"/>
+          </a:xfrm>
+          <a:prstGeom prst="roundRect">
+            <a:avLst>
+              <a:gd name="adj" fmla="val 50000"/>
+            </a:avLst>
+          </a:prstGeom>
+          <a:solidFill>
+            <a:srgbClr val="065A82"/>
+          </a:solidFill>
+          <a:ln>
+            <a:noFill/>
+          </a:ln>
+          <a:effectLst/>
+        </p:spPr>
+        <p:style>
+          <a:lnRef idx="1">
+            <a:schemeClr val="accent1"/>
+          </a:lnRef>
+          <a:fillRef idx="3">
+            <a:schemeClr val="accent1"/>
+          </a:fillRef>
+          <a:effectRef idx="2">
+            <a:schemeClr val="accent1"/>
+          </a:effectRef>
+          <a:fontRef idx="minor">
+            <a:schemeClr val="lt1"/>
+          </a:fontRef>
+        </p:style>
+        <p:txBody>
+          <a:bodyPr rtlCol="0" anchor="ctr" lIns="45720" rIns="45720" tIns="18288" bIns="18288" wrap="none"/>
+          <a:lstStyle/>
+          <a:p>
+            <a:pPr algn="ctr"/>
+            <a:r>
+              <a:rPr sz="1150" b="1">
+                <a:solidFill>
+                  <a:srgbClr val="FFFFFF"/>
+                </a:solidFill>
+                <a:latin typeface="Arial"/>
+              </a:rPr>
+              <a:t>Cursor Tab</a:t>
+            </a:r>
+          </a:p>
+        </p:txBody>
+      </p:sp>
+      <p:sp>
+        <p:nvSpPr>
+          <p:cNvPr id="31" name="Rounded Rectangle 30"/>
+          <p:cNvSpPr/>
+          <p:nvPr/>
+        </p:nvSpPr>
+        <p:spPr>
+          <a:xfrm>
+            <a:off x="3388766" y="4992624"/>
+            <a:ext cx="1850745" cy="292608"/>
+          </a:xfrm>
+          <a:prstGeom prst="roundRect">
+            <a:avLst>
+              <a:gd name="adj" fmla="val 50000"/>
+            </a:avLst>
+          </a:prstGeom>
+          <a:solidFill>
+            <a:srgbClr val="065A82"/>
+          </a:solidFill>
+          <a:ln>
+            <a:noFill/>
+          </a:ln>
+          <a:effectLst/>
+        </p:spPr>
+        <p:style>
+          <a:lnRef idx="1">
+            <a:schemeClr val="accent1"/>
+          </a:lnRef>
+          <a:fillRef idx="3">
+            <a:schemeClr val="accent1"/>
+          </a:fillRef>
+          <a:effectRef idx="2">
+            <a:schemeClr val="accent1"/>
+          </a:effectRef>
+          <a:fontRef idx="minor">
+            <a:schemeClr val="lt1"/>
+          </a:fontRef>
+        </p:style>
+        <p:txBody>
+          <a:bodyPr rtlCol="0" anchor="ctr" lIns="45720" rIns="45720" tIns="18288" bIns="18288" wrap="none"/>
+          <a:lstStyle/>
+          <a:p>
+            <a:pPr algn="ctr"/>
+            <a:r>
+              <a:rPr sz="1150" b="1">
+                <a:solidFill>
+                  <a:srgbClr val="FFFFFF"/>
+                </a:solidFill>
+                <a:latin typeface="Arial"/>
+              </a:rPr>
+              <a:t>JetBrains AI Assistant</a:t>
+            </a:r>
+          </a:p>
+        </p:txBody>
+      </p:sp>
+      <p:sp>
+        <p:nvSpPr>
+          <p:cNvPr id="32" name="TextBox 31"/>
+          <p:cNvSpPr txBox="1"/>
+          <p:nvPr/>
+        </p:nvSpPr>
+        <p:spPr>
+          <a:xfrm>
+            <a:off x="704088" y="5340096"/>
+            <a:ext cx="5993480" cy="438912"/>
+          </a:xfrm>
+          <a:prstGeom prst="rect">
+            <a:avLst/>
+          </a:prstGeom>
+          <a:noFill/>
+        </p:spPr>
+        <p:txBody>
+          <a:bodyPr wrap="square" lIns="0" rIns="0" tIns="0" bIns="0" anchor="ctr">
+            <a:spAutoFit/>
+          </a:bodyPr>
+          <a:lstStyle/>
+          <a:p>
+            <a:pPr algn="l">
+              <a:lnSpc>
+                <a:spcPct val="108000"/>
+              </a:lnSpc>
+            </a:pPr>
+            <a:r>
+              <a:rPr sz="1200" b="0" i="0">
+                <a:solidFill>
+                  <a:srgbClr val="21295C"/>
+                </a:solidFill>
+                <a:latin typeface="Arial"/>
+              </a:rPr>
+              <a:t>Adoption: A — самый зрелый и широкий по охвату уровень; лидер по охвату — Copilot-класс, но рост лидера остановился.</a:t>
+            </a:r>
+          </a:p>
+        </p:txBody>
+      </p:sp>
+      <p:sp>
+        <p:nvSpPr>
+          <p:cNvPr id="33" name="Rounded Rectangle 32"/>
+          <p:cNvSpPr/>
+          <p:nvPr/>
+        </p:nvSpPr>
+        <p:spPr>
+          <a:xfrm>
+            <a:off x="6880448" y="4700016"/>
+            <a:ext cx="4622703" cy="1078992"/>
+          </a:xfrm>
+          <a:prstGeom prst="roundRect">
+            <a:avLst>
+              <a:gd name="adj" fmla="val 7000"/>
+            </a:avLst>
+          </a:prstGeom>
+          <a:solidFill>
+            <a:srgbClr val="E4F1F2"/>
+          </a:solidFill>
+          <a:ln w="15875">
+            <a:solidFill>
+              <a:srgbClr val="028090"/>
+            </a:solidFill>
+          </a:ln>
+          <a:effectLst/>
+        </p:spPr>
+        <p:style>
+          <a:lnRef idx="1">
+            <a:schemeClr val="accent1"/>
+          </a:lnRef>
+          <a:fillRef idx="3">
+            <a:schemeClr val="accent1"/>
+          </a:fillRef>
+          <a:effectRef idx="2">
+            <a:schemeClr val="accent1"/>
+          </a:effectRef>
+          <a:fontRef idx="minor">
+            <a:schemeClr val="lt1"/>
+          </a:fontRef>
+        </p:style>
+        <p:txBody>
+          <a:bodyPr rtlCol="0" anchor="ctr"/>
+          <a:lstStyle/>
+          <a:p>
+            <a:pPr algn="ctr"/>
+          </a:p>
+        </p:txBody>
+      </p:sp>
+      <p:sp>
+        <p:nvSpPr>
+          <p:cNvPr id="34" name="TextBox 33"/>
+          <p:cNvSpPr txBox="1"/>
+          <p:nvPr/>
+        </p:nvSpPr>
+        <p:spPr>
+          <a:xfrm>
+            <a:off x="7026752" y="4736592"/>
+            <a:ext cx="4330095" cy="1005839"/>
+          </a:xfrm>
+          <a:prstGeom prst="rect">
+            <a:avLst/>
+          </a:prstGeom>
+          <a:noFill/>
+        </p:spPr>
+        <p:txBody>
+          <a:bodyPr wrap="square" lIns="0" rIns="0" tIns="0" bIns="0" anchor="ctr">
+            <a:spAutoFit/>
+          </a:bodyPr>
+          <a:lstStyle/>
+          <a:p>
+            <a:pPr algn="l">
+              <a:lnSpc>
+                <a:spcPct val="108000"/>
+              </a:lnSpc>
+            </a:pPr>
+            <a:r>
+              <a:rPr sz="1250" b="1" i="0">
+                <a:solidFill>
+                  <a:srgbClr val="028090"/>
+                </a:solidFill>
+                <a:latin typeface="Arial"/>
+              </a:rPr>
+              <a:t>⚠  </a:t>
+            </a:r>
+            <a:r>
+              <a:rPr sz="1150" b="1" i="0">
+                <a:solidFill>
+                  <a:srgbClr val="21295C"/>
+                </a:solidFill>
+                <a:latin typeface="Arial"/>
+              </a:rPr>
+              <a:t>«Copilot — №1» — это охват, не динамика. Стагнация лидера ≠ «инструмент умер». На уровень A ставит режим tab-completion, а не логотип.</a:t>
+            </a:r>
+          </a:p>
+        </p:txBody>
+      </p:sp>
+      <p:sp>
+        <p:nvSpPr>
+          <p:cNvPr id="35" name="TextBox 34"/>
           <p:cNvSpPr txBox="1"/>
           <p:nvPr/>
         </p:nvSpPr>
@@ -41117,12 +42333,12 @@
         </p:nvSpPr>
         <p:spPr>
           <a:xfrm>
-            <a:off x="502920" y="1353312"/>
-            <a:ext cx="11201400" cy="2432304"/>
+            <a:off x="502920" y="1225296"/>
+            <a:ext cx="11201400" cy="2212848"/>
           </a:xfrm>
           <a:prstGeom prst="roundRect">
             <a:avLst>
-              <a:gd name="adj" fmla="val 12531"/>
+              <a:gd name="adj" fmla="val 13774"/>
             </a:avLst>
           </a:prstGeom>
           <a:solidFill>
@@ -41165,8 +42381,8 @@
         </p:nvSpPr>
         <p:spPr>
           <a:xfrm>
-            <a:off x="685800" y="1517904"/>
-            <a:ext cx="2788920" cy="457200"/>
+            <a:off x="685800" y="1371600"/>
+            <a:ext cx="2788920" cy="420624"/>
           </a:xfrm>
           <a:prstGeom prst="rect">
             <a:avLst/>
@@ -41211,8 +42427,8 @@
         </p:nvSpPr>
         <p:spPr>
           <a:xfrm>
-            <a:off x="3474720" y="1517904"/>
-            <a:ext cx="4160520" cy="457200"/>
+            <a:off x="3474720" y="1371600"/>
+            <a:ext cx="4160520" cy="420624"/>
           </a:xfrm>
           <a:prstGeom prst="rect">
             <a:avLst/>
@@ -41255,8 +42471,8 @@
         </p:nvSpPr>
         <p:spPr>
           <a:xfrm>
-            <a:off x="3474720" y="1517904"/>
-            <a:ext cx="4160520" cy="457200"/>
+            <a:off x="3474720" y="1371600"/>
+            <a:ext cx="4160520" cy="420624"/>
           </a:xfrm>
           <a:prstGeom prst="rect">
             <a:avLst/>
@@ -41294,8 +42510,8 @@
         </p:nvSpPr>
         <p:spPr>
           <a:xfrm>
-            <a:off x="7635240" y="1517904"/>
-            <a:ext cx="4160520" cy="457200"/>
+            <a:off x="7635240" y="1371600"/>
+            <a:ext cx="4160520" cy="420624"/>
           </a:xfrm>
           <a:prstGeom prst="rect">
             <a:avLst/>
@@ -41338,8 +42554,8 @@
         </p:nvSpPr>
         <p:spPr>
           <a:xfrm>
-            <a:off x="7635240" y="1517904"/>
-            <a:ext cx="4160520" cy="457200"/>
+            <a:off x="7635240" y="1371600"/>
+            <a:ext cx="4160520" cy="420624"/>
           </a:xfrm>
           <a:prstGeom prst="rect">
             <a:avLst/>
@@ -41377,8 +42593,8 @@
         </p:nvSpPr>
         <p:spPr>
           <a:xfrm>
-            <a:off x="685800" y="1975104"/>
-            <a:ext cx="2788920" cy="566928"/>
+            <a:off x="685800" y="1792224"/>
+            <a:ext cx="2788920" cy="493776"/>
           </a:xfrm>
           <a:prstGeom prst="rect">
             <a:avLst/>
@@ -41423,8 +42639,8 @@
         </p:nvSpPr>
         <p:spPr>
           <a:xfrm>
-            <a:off x="795528" y="1975104"/>
-            <a:ext cx="2569463" cy="566928"/>
+            <a:off x="795528" y="1792224"/>
+            <a:ext cx="2569463" cy="493776"/>
           </a:xfrm>
           <a:prstGeom prst="rect">
             <a:avLst/>
@@ -41462,8 +42678,8 @@
         </p:nvSpPr>
         <p:spPr>
           <a:xfrm>
-            <a:off x="3474720" y="1975104"/>
-            <a:ext cx="4160520" cy="566928"/>
+            <a:off x="3474720" y="1792224"/>
+            <a:ext cx="4160520" cy="493776"/>
           </a:xfrm>
           <a:prstGeom prst="rect">
             <a:avLst/>
@@ -41508,8 +42724,8 @@
         </p:nvSpPr>
         <p:spPr>
           <a:xfrm>
-            <a:off x="3584448" y="1975104"/>
-            <a:ext cx="3941063" cy="566928"/>
+            <a:off x="3584448" y="1792224"/>
+            <a:ext cx="3941063" cy="493776"/>
           </a:xfrm>
           <a:prstGeom prst="rect">
             <a:avLst/>
@@ -41547,8 +42763,8 @@
         </p:nvSpPr>
         <p:spPr>
           <a:xfrm>
-            <a:off x="7635240" y="1975104"/>
-            <a:ext cx="4160520" cy="566928"/>
+            <a:off x="7635240" y="1792224"/>
+            <a:ext cx="4160520" cy="493776"/>
           </a:xfrm>
           <a:prstGeom prst="rect">
             <a:avLst/>
@@ -41593,8 +42809,8 @@
         </p:nvSpPr>
         <p:spPr>
           <a:xfrm>
-            <a:off x="7744967" y="1975104"/>
-            <a:ext cx="3941063" cy="566928"/>
+            <a:off x="7744967" y="1792224"/>
+            <a:ext cx="3941063" cy="493776"/>
           </a:xfrm>
           <a:prstGeom prst="rect">
             <a:avLst/>
@@ -41632,8 +42848,8 @@
         </p:nvSpPr>
         <p:spPr>
           <a:xfrm>
-            <a:off x="685800" y="2542032"/>
-            <a:ext cx="2788920" cy="566928"/>
+            <a:off x="685800" y="2286000"/>
+            <a:ext cx="2788920" cy="493776"/>
           </a:xfrm>
           <a:prstGeom prst="rect">
             <a:avLst/>
@@ -41678,8 +42894,8 @@
         </p:nvSpPr>
         <p:spPr>
           <a:xfrm>
-            <a:off x="795528" y="2542032"/>
-            <a:ext cx="2569463" cy="566928"/>
+            <a:off x="795528" y="2286000"/>
+            <a:ext cx="2569463" cy="493776"/>
           </a:xfrm>
           <a:prstGeom prst="rect">
             <a:avLst/>
@@ -41717,8 +42933,8 @@
         </p:nvSpPr>
         <p:spPr>
           <a:xfrm>
-            <a:off x="3474720" y="2542032"/>
-            <a:ext cx="4160520" cy="566928"/>
+            <a:off x="3474720" y="2286000"/>
+            <a:ext cx="4160520" cy="493776"/>
           </a:xfrm>
           <a:prstGeom prst="rect">
             <a:avLst/>
@@ -41763,8 +42979,8 @@
         </p:nvSpPr>
         <p:spPr>
           <a:xfrm>
-            <a:off x="3584448" y="2542032"/>
-            <a:ext cx="3941063" cy="566928"/>
+            <a:off x="3584448" y="2286000"/>
+            <a:ext cx="3941063" cy="493776"/>
           </a:xfrm>
           <a:prstGeom prst="rect">
             <a:avLst/>
@@ -41802,8 +43018,8 @@
         </p:nvSpPr>
         <p:spPr>
           <a:xfrm>
-            <a:off x="7635240" y="2542032"/>
-            <a:ext cx="4160520" cy="566928"/>
+            <a:off x="7635240" y="2286000"/>
+            <a:ext cx="4160520" cy="493776"/>
           </a:xfrm>
           <a:prstGeom prst="rect">
             <a:avLst/>
@@ -41848,8 +43064,8 @@
         </p:nvSpPr>
         <p:spPr>
           <a:xfrm>
-            <a:off x="7744967" y="2542032"/>
-            <a:ext cx="3941063" cy="566928"/>
+            <a:off x="7744967" y="2286000"/>
+            <a:ext cx="3941063" cy="493776"/>
           </a:xfrm>
           <a:prstGeom prst="rect">
             <a:avLst/>
@@ -41887,8 +43103,8 @@
         </p:nvSpPr>
         <p:spPr>
           <a:xfrm>
-            <a:off x="685800" y="3108960"/>
-            <a:ext cx="2788920" cy="566928"/>
+            <a:off x="685800" y="2779776"/>
+            <a:ext cx="2788920" cy="493776"/>
           </a:xfrm>
           <a:prstGeom prst="rect">
             <a:avLst/>
@@ -41933,8 +43149,8 @@
         </p:nvSpPr>
         <p:spPr>
           <a:xfrm>
-            <a:off x="795528" y="3108960"/>
-            <a:ext cx="2569463" cy="566928"/>
+            <a:off x="795528" y="2779776"/>
+            <a:ext cx="2569463" cy="493776"/>
           </a:xfrm>
           <a:prstGeom prst="rect">
             <a:avLst/>
@@ -41972,8 +43188,8 @@
         </p:nvSpPr>
         <p:spPr>
           <a:xfrm>
-            <a:off x="3474720" y="3108960"/>
-            <a:ext cx="4160520" cy="566928"/>
+            <a:off x="3474720" y="2779776"/>
+            <a:ext cx="4160520" cy="493776"/>
           </a:xfrm>
           <a:prstGeom prst="rect">
             <a:avLst/>
@@ -42018,8 +43234,8 @@
         </p:nvSpPr>
         <p:spPr>
           <a:xfrm>
-            <a:off x="3584448" y="3108960"/>
-            <a:ext cx="3941063" cy="566928"/>
+            <a:off x="3584448" y="2779776"/>
+            <a:ext cx="3941063" cy="493776"/>
           </a:xfrm>
           <a:prstGeom prst="rect">
             <a:avLst/>
@@ -42057,8 +43273,8 @@
         </p:nvSpPr>
         <p:spPr>
           <a:xfrm>
-            <a:off x="7635240" y="3108960"/>
-            <a:ext cx="4160520" cy="566928"/>
+            <a:off x="7635240" y="2779776"/>
+            <a:ext cx="4160520" cy="493776"/>
           </a:xfrm>
           <a:prstGeom prst="rect">
             <a:avLst/>
@@ -42103,8 +43319,8 @@
         </p:nvSpPr>
         <p:spPr>
           <a:xfrm>
-            <a:off x="7744967" y="3108960"/>
-            <a:ext cx="3941063" cy="566928"/>
+            <a:off x="7744967" y="2779776"/>
+            <a:ext cx="3941063" cy="493776"/>
           </a:xfrm>
           <a:prstGeom prst="rect">
             <a:avLst/>
@@ -42142,8 +43358,8 @@
         </p:nvSpPr>
         <p:spPr>
           <a:xfrm>
-            <a:off x="502920" y="3913632"/>
-            <a:ext cx="11201400" cy="713232"/>
+            <a:off x="502920" y="3584448"/>
+            <a:ext cx="11201400" cy="676656"/>
           </a:xfrm>
           <a:prstGeom prst="roundRect">
             <a:avLst>
@@ -42190,8 +43406,8 @@
         </p:nvSpPr>
         <p:spPr>
           <a:xfrm>
-            <a:off x="722376" y="3968496"/>
-            <a:ext cx="10762488" cy="603504"/>
+            <a:off x="722376" y="3639312"/>
+            <a:ext cx="10762488" cy="566928"/>
           </a:xfrm>
           <a:prstGeom prst="rect">
             <a:avLst/>
@@ -42210,7 +43426,7 @@
               </a:lnSpc>
             </a:pPr>
             <a:r>
-              <a:rPr sz="1450" b="1" i="0">
+              <a:rPr sz="1400" b="1" i="0">
                 <a:solidFill>
                   <a:srgbClr val="21295C"/>
                 </a:solidFill>
@@ -42229,12 +43445,12 @@
         </p:nvSpPr>
         <p:spPr>
           <a:xfrm>
-            <a:off x="502920" y="4754880"/>
-            <a:ext cx="11201400" cy="1517904"/>
+            <a:off x="502920" y="4315968"/>
+            <a:ext cx="11201400" cy="1170432"/>
           </a:xfrm>
           <a:prstGeom prst="roundRect">
             <a:avLst>
-              <a:gd name="adj" fmla="val 20080"/>
+              <a:gd name="adj" fmla="val 22000"/>
             </a:avLst>
           </a:prstGeom>
           <a:solidFill>
@@ -42277,8 +43493,8 @@
         </p:nvSpPr>
         <p:spPr>
           <a:xfrm>
-            <a:off x="731520" y="4864608"/>
-            <a:ext cx="4572000" cy="274320"/>
+            <a:off x="731520" y="4398264"/>
+            <a:ext cx="4572000" cy="256032"/>
           </a:xfrm>
           <a:prstGeom prst="rect">
             <a:avLst/>
@@ -42297,7 +43513,7 @@
               </a:lnSpc>
             </a:pPr>
             <a:r>
-              <a:rPr sz="1400" b="1" i="0">
+              <a:rPr sz="1300" b="1" i="0">
                 <a:solidFill>
                   <a:srgbClr val="065A82"/>
                 </a:solidFill>
@@ -42316,8 +43532,8 @@
         </p:nvSpPr>
         <p:spPr>
           <a:xfrm>
-            <a:off x="731520" y="5230368"/>
-            <a:ext cx="3429000" cy="384048"/>
+            <a:off x="731520" y="4690872"/>
+            <a:ext cx="3429000" cy="347472"/>
           </a:xfrm>
           <a:prstGeom prst="rect">
             <a:avLst/>
@@ -42355,8 +43571,8 @@
         </p:nvSpPr>
         <p:spPr>
           <a:xfrm>
-            <a:off x="731520" y="5650992"/>
-            <a:ext cx="3429000" cy="365760"/>
+            <a:off x="731520" y="5056632"/>
+            <a:ext cx="3429000" cy="329184"/>
           </a:xfrm>
           <a:prstGeom prst="rect">
             <a:avLst/>
@@ -42394,8 +43610,8 @@
         </p:nvSpPr>
         <p:spPr>
           <a:xfrm>
-            <a:off x="4343400" y="5230368"/>
-            <a:ext cx="3429000" cy="384048"/>
+            <a:off x="4343400" y="4690872"/>
+            <a:ext cx="3429000" cy="347472"/>
           </a:xfrm>
           <a:prstGeom prst="rect">
             <a:avLst/>
@@ -42433,8 +43649,8 @@
         </p:nvSpPr>
         <p:spPr>
           <a:xfrm>
-            <a:off x="4343400" y="5650992"/>
-            <a:ext cx="3429000" cy="365760"/>
+            <a:off x="4343400" y="5056632"/>
+            <a:ext cx="3429000" cy="329184"/>
           </a:xfrm>
           <a:prstGeom prst="rect">
             <a:avLst/>
@@ -42472,8 +43688,8 @@
         </p:nvSpPr>
         <p:spPr>
           <a:xfrm>
-            <a:off x="7955280" y="5230368"/>
-            <a:ext cx="3429000" cy="384048"/>
+            <a:off x="7955280" y="4690872"/>
+            <a:ext cx="3429000" cy="347472"/>
           </a:xfrm>
           <a:prstGeom prst="rect">
             <a:avLst/>
@@ -42511,8 +43727,8 @@
         </p:nvSpPr>
         <p:spPr>
           <a:xfrm>
-            <a:off x="7955280" y="5650992"/>
-            <a:ext cx="3429000" cy="365760"/>
+            <a:off x="7955280" y="5056632"/>
+            <a:ext cx="3429000" cy="329184"/>
           </a:xfrm>
           <a:prstGeom prst="rect">
             <a:avLst/>
@@ -42538,6 +43754,393 @@
                 <a:latin typeface="Arial"/>
               </a:rPr>
               <a:t>→ разберём следующим</a:t>
+            </a:r>
+          </a:p>
+        </p:txBody>
+      </p:sp>
+      <p:sp>
+        <p:nvSpPr>
+          <p:cNvPr id="37" name="Rounded Rectangle 36"/>
+          <p:cNvSpPr/>
+          <p:nvPr/>
+        </p:nvSpPr>
+        <p:spPr>
+          <a:xfrm>
+            <a:off x="502920" y="5541264"/>
+            <a:ext cx="11201400" cy="1225296"/>
+          </a:xfrm>
+          <a:prstGeom prst="roundRect">
+            <a:avLst>
+              <a:gd name="adj" fmla="val 22000"/>
+            </a:avLst>
+          </a:prstGeom>
+          <a:solidFill>
+            <a:srgbClr val="F4F7FA"/>
+          </a:solidFill>
+          <a:ln w="19050">
+            <a:solidFill>
+              <a:srgbClr val="1C7293"/>
+            </a:solidFill>
+          </a:ln>
+          <a:effectLst/>
+        </p:spPr>
+        <p:style>
+          <a:lnRef idx="1">
+            <a:schemeClr val="accent1"/>
+          </a:lnRef>
+          <a:fillRef idx="3">
+            <a:schemeClr val="accent1"/>
+          </a:fillRef>
+          <a:effectRef idx="2">
+            <a:schemeClr val="accent1"/>
+          </a:effectRef>
+          <a:fontRef idx="minor">
+            <a:schemeClr val="lt1"/>
+          </a:fontRef>
+        </p:style>
+        <p:txBody>
+          <a:bodyPr rtlCol="0" anchor="ctr"/>
+          <a:lstStyle/>
+          <a:p>
+            <a:pPr algn="ctr"/>
+          </a:p>
+        </p:txBody>
+      </p:sp>
+      <p:sp>
+        <p:nvSpPr>
+          <p:cNvPr id="38" name="TextBox 37"/>
+          <p:cNvSpPr txBox="1"/>
+          <p:nvPr/>
+        </p:nvSpPr>
+        <p:spPr>
+          <a:xfrm>
+            <a:off x="704088" y="5650992"/>
+            <a:ext cx="5993480" cy="237744"/>
+          </a:xfrm>
+          <a:prstGeom prst="rect">
+            <a:avLst/>
+          </a:prstGeom>
+          <a:noFill/>
+        </p:spPr>
+        <p:txBody>
+          <a:bodyPr wrap="square" lIns="0" rIns="0" tIns="0" bIns="0" anchor="ctr">
+            <a:spAutoFit/>
+          </a:bodyPr>
+          <a:lstStyle/>
+          <a:p>
+            <a:pPr algn="l">
+              <a:lnSpc>
+                <a:spcPct val="115000"/>
+              </a:lnSpc>
+            </a:pPr>
+            <a:r>
+              <a:rPr sz="1200" b="1" i="0">
+                <a:solidFill>
+                  <a:srgbClr val="065A82"/>
+                </a:solidFill>
+                <a:latin typeface="Arial"/>
+              </a:rPr>
+              <a:t>Инструменты 2026</a:t>
+            </a:r>
+          </a:p>
+        </p:txBody>
+      </p:sp>
+      <p:sp>
+        <p:nvSpPr>
+          <p:cNvPr id="39" name="Rounded Rectangle 38"/>
+          <p:cNvSpPr/>
+          <p:nvPr/>
+        </p:nvSpPr>
+        <p:spPr>
+          <a:xfrm>
+            <a:off x="704088" y="5943600"/>
+            <a:ext cx="1025956" cy="292608"/>
+          </a:xfrm>
+          <a:prstGeom prst="roundRect">
+            <a:avLst>
+              <a:gd name="adj" fmla="val 50000"/>
+            </a:avLst>
+          </a:prstGeom>
+          <a:solidFill>
+            <a:srgbClr val="065A82"/>
+          </a:solidFill>
+          <a:ln>
+            <a:noFill/>
+          </a:ln>
+          <a:effectLst/>
+        </p:spPr>
+        <p:style>
+          <a:lnRef idx="1">
+            <a:schemeClr val="accent1"/>
+          </a:lnRef>
+          <a:fillRef idx="3">
+            <a:schemeClr val="accent1"/>
+          </a:fillRef>
+          <a:effectRef idx="2">
+            <a:schemeClr val="accent1"/>
+          </a:effectRef>
+          <a:fontRef idx="minor">
+            <a:schemeClr val="lt1"/>
+          </a:fontRef>
+        </p:style>
+        <p:txBody>
+          <a:bodyPr rtlCol="0" anchor="ctr" lIns="45720" rIns="45720" tIns="18288" bIns="18288" wrap="none"/>
+          <a:lstStyle/>
+          <a:p>
+            <a:pPr algn="ctr"/>
+            <a:r>
+              <a:rPr sz="1150" b="1">
+                <a:solidFill>
+                  <a:srgbClr val="FFFFFF"/>
+                </a:solidFill>
+                <a:latin typeface="Arial"/>
+              </a:rPr>
+              <a:t>ChatGPT-чат</a:t>
+            </a:r>
+          </a:p>
+        </p:txBody>
+      </p:sp>
+      <p:sp>
+        <p:nvSpPr>
+          <p:cNvPr id="40" name="Rounded Rectangle 39"/>
+          <p:cNvSpPr/>
+          <p:nvPr/>
+        </p:nvSpPr>
+        <p:spPr>
+          <a:xfrm>
+            <a:off x="1821484" y="5943600"/>
+            <a:ext cx="1100937" cy="292608"/>
+          </a:xfrm>
+          <a:prstGeom prst="roundRect">
+            <a:avLst>
+              <a:gd name="adj" fmla="val 50000"/>
+            </a:avLst>
+          </a:prstGeom>
+          <a:solidFill>
+            <a:srgbClr val="065A82"/>
+          </a:solidFill>
+          <a:ln>
+            <a:noFill/>
+          </a:ln>
+          <a:effectLst/>
+        </p:spPr>
+        <p:style>
+          <a:lnRef idx="1">
+            <a:schemeClr val="accent1"/>
+          </a:lnRef>
+          <a:fillRef idx="3">
+            <a:schemeClr val="accent1"/>
+          </a:fillRef>
+          <a:effectRef idx="2">
+            <a:schemeClr val="accent1"/>
+          </a:effectRef>
+          <a:fontRef idx="minor">
+            <a:schemeClr val="lt1"/>
+          </a:fontRef>
+        </p:style>
+        <p:txBody>
+          <a:bodyPr rtlCol="0" anchor="ctr" lIns="45720" rIns="45720" tIns="18288" bIns="18288" wrap="none"/>
+          <a:lstStyle/>
+          <a:p>
+            <a:pPr algn="ctr"/>
+            <a:r>
+              <a:rPr sz="1150" b="1">
+                <a:solidFill>
+                  <a:srgbClr val="FFFFFF"/>
+                </a:solidFill>
+                <a:latin typeface="Arial"/>
+              </a:rPr>
+              <a:t>Copilot Chat</a:t>
+            </a:r>
+          </a:p>
+        </p:txBody>
+      </p:sp>
+      <p:sp>
+        <p:nvSpPr>
+          <p:cNvPr id="41" name="Rounded Rectangle 40"/>
+          <p:cNvSpPr/>
+          <p:nvPr/>
+        </p:nvSpPr>
+        <p:spPr>
+          <a:xfrm>
+            <a:off x="3013862" y="5943600"/>
+            <a:ext cx="1100937" cy="292608"/>
+          </a:xfrm>
+          <a:prstGeom prst="roundRect">
+            <a:avLst>
+              <a:gd name="adj" fmla="val 50000"/>
+            </a:avLst>
+          </a:prstGeom>
+          <a:solidFill>
+            <a:srgbClr val="065A82"/>
+          </a:solidFill>
+          <a:ln>
+            <a:noFill/>
+          </a:ln>
+          <a:effectLst/>
+        </p:spPr>
+        <p:style>
+          <a:lnRef idx="1">
+            <a:schemeClr val="accent1"/>
+          </a:lnRef>
+          <a:fillRef idx="3">
+            <a:schemeClr val="accent1"/>
+          </a:fillRef>
+          <a:effectRef idx="2">
+            <a:schemeClr val="accent1"/>
+          </a:effectRef>
+          <a:fontRef idx="minor">
+            <a:schemeClr val="lt1"/>
+          </a:fontRef>
+        </p:style>
+        <p:txBody>
+          <a:bodyPr rtlCol="0" anchor="ctr" lIns="45720" rIns="45720" tIns="18288" bIns="18288" wrap="none"/>
+          <a:lstStyle/>
+          <a:p>
+            <a:pPr algn="ctr"/>
+            <a:r>
+              <a:rPr sz="1150" b="1">
+                <a:solidFill>
+                  <a:srgbClr val="FFFFFF"/>
+                </a:solidFill>
+                <a:latin typeface="Arial"/>
+              </a:rPr>
+              <a:t>Cursor Cmd-K</a:t>
+            </a:r>
+          </a:p>
+        </p:txBody>
+      </p:sp>
+      <p:sp>
+        <p:nvSpPr>
+          <p:cNvPr id="42" name="TextBox 41"/>
+          <p:cNvSpPr txBox="1"/>
+          <p:nvPr/>
+        </p:nvSpPr>
+        <p:spPr>
+          <a:xfrm>
+            <a:off x="704088" y="6291072"/>
+            <a:ext cx="5993480" cy="365760"/>
+          </a:xfrm>
+          <a:prstGeom prst="rect">
+            <a:avLst/>
+          </a:prstGeom>
+          <a:noFill/>
+        </p:spPr>
+        <p:txBody>
+          <a:bodyPr wrap="square" lIns="0" rIns="0" tIns="0" bIns="0" anchor="ctr">
+            <a:spAutoFit/>
+          </a:bodyPr>
+          <a:lstStyle/>
+          <a:p>
+            <a:pPr algn="l">
+              <a:lnSpc>
+                <a:spcPct val="108000"/>
+              </a:lnSpc>
+            </a:pPr>
+            <a:r>
+              <a:rPr sz="1200" b="0" i="0">
+                <a:solidFill>
+                  <a:srgbClr val="21295C"/>
+                </a:solidFill>
+                <a:latin typeface="Arial"/>
+              </a:rPr>
+              <a:t>Adoption: чат-LLM — самый массовый способ применять AI к коду (не требует интеграции, доступен каждому).</a:t>
+            </a:r>
+          </a:p>
+        </p:txBody>
+      </p:sp>
+      <p:sp>
+        <p:nvSpPr>
+          <p:cNvPr id="43" name="Rounded Rectangle 42"/>
+          <p:cNvSpPr/>
+          <p:nvPr/>
+        </p:nvSpPr>
+        <p:spPr>
+          <a:xfrm>
+            <a:off x="6880448" y="5650992"/>
+            <a:ext cx="4622703" cy="1005840"/>
+          </a:xfrm>
+          <a:prstGeom prst="roundRect">
+            <a:avLst>
+              <a:gd name="adj" fmla="val 7000"/>
+            </a:avLst>
+          </a:prstGeom>
+          <a:solidFill>
+            <a:srgbClr val="E4F1F2"/>
+          </a:solidFill>
+          <a:ln w="15875">
+            <a:solidFill>
+              <a:srgbClr val="028090"/>
+            </a:solidFill>
+          </a:ln>
+          <a:effectLst/>
+        </p:spPr>
+        <p:style>
+          <a:lnRef idx="1">
+            <a:schemeClr val="accent1"/>
+          </a:lnRef>
+          <a:fillRef idx="3">
+            <a:schemeClr val="accent1"/>
+          </a:fillRef>
+          <a:effectRef idx="2">
+            <a:schemeClr val="accent1"/>
+          </a:effectRef>
+          <a:fontRef idx="minor">
+            <a:schemeClr val="lt1"/>
+          </a:fontRef>
+        </p:style>
+        <p:txBody>
+          <a:bodyPr rtlCol="0" anchor="ctr"/>
+          <a:lstStyle/>
+          <a:p>
+            <a:pPr algn="ctr"/>
+          </a:p>
+        </p:txBody>
+      </p:sp>
+      <p:sp>
+        <p:nvSpPr>
+          <p:cNvPr id="44" name="TextBox 43"/>
+          <p:cNvSpPr txBox="1"/>
+          <p:nvPr/>
+        </p:nvSpPr>
+        <p:spPr>
+          <a:xfrm>
+            <a:off x="7026752" y="5687568"/>
+            <a:ext cx="4330095" cy="932688"/>
+          </a:xfrm>
+          <a:prstGeom prst="rect">
+            <a:avLst/>
+          </a:prstGeom>
+          <a:noFill/>
+        </p:spPr>
+        <p:txBody>
+          <a:bodyPr wrap="square" lIns="0" rIns="0" tIns="0" bIns="0" anchor="ctr">
+            <a:spAutoFit/>
+          </a:bodyPr>
+          <a:lstStyle/>
+          <a:p>
+            <a:pPr algn="l">
+              <a:lnSpc>
+                <a:spcPct val="108000"/>
+              </a:lnSpc>
+            </a:pPr>
+            <a:r>
+              <a:rPr sz="1250" b="1" i="0">
+                <a:solidFill>
+                  <a:srgbClr val="028090"/>
+                </a:solidFill>
+                <a:latin typeface="Arial"/>
+              </a:rPr>
+              <a:t>⚠  </a:t>
+            </a:r>
+            <a:r>
+              <a:rPr sz="1150" b="1" i="0">
+                <a:solidFill>
+                  <a:srgbClr val="21295C"/>
+                </a:solidFill>
+                <a:latin typeface="Arial"/>
+              </a:rPr>
+              <a:t>Чат-LLM — строго уровень B (петля copy-paste, человек после каждого шага), даже если вендор обещает «агентно»: без обвязки «может агентно» — маркетинг.</a:t>
             </a:r>
           </a:p>
         </p:txBody>

--- a/library/lectures/lec-04/rendered/lec-04.pptx
+++ b/library/lectures/lec-04/rendered/lec-04.pptx
@@ -877,13 +877,13 @@
           <a:p/>
           <a:p>
             <a:r>
-              <a:t>SWE-bench Verified — подмножество примерно пятисот задач, вручную отвалидированных как корректно поставленные. На нём топовые системы показывают около восьмидесяти восьми–восьмидесяти девяти процентов. Цифра близка к девяноста и звучит как «агент почти решает реальную разработку». Но есть второй срез. SWE-bench Pro — версия на приватных кодовых базах, устойчивая к контаминации: задачи, которых модель не могла видеть в обучении, в незнакомом ей коде. На нём лидер показывает около шестидесяти четырёх процентов. Один и тот же класс систем: около восьмидесяти восьми на знакомом публичном коде и около шестидесяти четырёх на честном незнакомом. Разрыв примерно в двадцать четыре процентных пункта — это и есть главный инженерный факт уровня C.</a:t>
+              <a:t>SWE-bench Verified — подмножество примерно пятисот задач, вручную отвалидированных как корректно поставленные. На нём топовые системы к августу 2026 кластеризуются в диапазоне девяносто пять–девяносто шесть процентов. Цифра близка к ста и звучит как «агент решает реальную разработку». Но есть второй срез. SWE-bench Pro — версия на приватных кодовых базах, устойчивая к контаминации: задачи, которых модель не могла видеть в обучении, в незнакомом ей коде. На нём лидер показывает, в зависимости от источника измерения, от примерно шестидесяти девяти процентов (консервативная методология Scale SEAL) до семидесяти девяти–восьмидесяти процентов (вендорские лидерборды новейшего поколения моделей). Один и тот же класс систем: около девяноста пяти на знакомом публичном коде и от шестидесяти девяти до восьмидесяти на честном незнакомом. Разрыв сузился относительно прошлогодней картины — тогда было около двадцати четырёх процентных пунктов — до примерно пятнадцати–семнадцати по консервативной оценке. Это по-прежнему главный инженерный факт уровня C, только с уточнением: сокращение разрыва не отменяет тезиса, оно лишь говорит, что цена незнакомости стала немного ниже, чем год назад, — не то, что она исчезла.</a:t>
             </a:r>
           </a:p>
           <a:p/>
           <a:p>
             <a:r>
-              <a:t>Сформулируем правило, которое прямо обслуживает центральный вопрос: доверие к кодинг-агенту обратно пропорционально незнакомости и критичности кода. Чем менее код знаком агенту и чем критичнее последствия ошибки, тем ниже фактическая надёжность и тем строже должен быть человеческий gate на выходе. На типовом публичном коде с хорошими тестами агент — мощный ускоритель; на приватном легаси в критичном модуле его «почти 90%» превращается в «примерно 2 из 3». И добавлю урок свежести из Лекции 1: ARC-AGI устарел за два дня — любая цифра бенчмарка без среза и без даты для инженерного решения не информативна.</a:t>
+              <a:t>Сформулируем правило, которое прямо обслуживает центральный вопрос: доверие к кодинг-агенту обратно пропорционально незнакомости и критичности кода. Чем менее код знаком агенту и чем критичнее последствия ошибки, тем ниже фактическая надёжность и тем строже должен быть человеческий gate на выходе. На типовом публичном коде с хорошими тестами агент — мощный ускоритель; на приватном легаси в критичном модуле его «почти 95%» превращается в «семь-восемь из десяти». И добавлю урок свежести из Лекции 1: ARC-AGI устарел за два дня — любая цифра бенчмарка без среза и без даты для инженерного решения не информативна.</a:t>
             </a:r>
           </a:p>
         </p:txBody>
@@ -953,7 +953,7 @@
           <a:lstStyle/>
           <a:p>
             <a:r>
-              <a:t>Здесь центральный вопрос возвращается ребром второй раз. Уровень C производит pull request — и появляется новый, специфический именно для этого уровня антипаттерн: принять PR агента, не прочитав его, потому что «тесты же зелёные» и «агент обычно справляется». Разберём, почему это конкретно опасно, на данных.</a:t>
+              <a:t>Уровень C производит pull request — и появляется новый, специфический именно для этого уровня антипаттерн: принять PR агента, не прочитав его, потому что «тесты же зелёные» и «агент обычно справляется». Разберём, почему это конкретно опасно, на данных.</a:t>
             </a:r>
           </a:p>
           <a:p/>
@@ -1299,7 +1299,7 @@
           <a:p/>
           <a:p>
             <a:r>
-              <a:t>Теперь практический payoff. Не доверяйте ощущению — оно систематически смещено. Минимальный честный протокол: возьмите сопоставимый класс своих задач; случайно распределите их на «с AI» и «без AI», не «лёгкие без AI, сложные с AI»; фиксируйте реальное время, а не самооценку; считайте не только время, но и дефекты за две недели; применяйте вывод селективно — AI скорее ускорит на изолированном типовом, скорее замедлит на знакомом легаси. Это операционализация навыка LO7: уровень и место AI — измеряемое решение, а не культурная установка. Подумайте тридцать секунд: как бы вы измерили реальный эффект AI на свою работу, не опираясь на ощущение?</a:t>
+              <a:t>Теперь практический payoff. Не доверяйте ощущению — оно систематически смещено. Минимальный честный протокол: возьмите сопоставимый класс своих задач; случайно распределите их на «с AI» и «без AI», не «лёгкие без AI, сложные с AI»; фиксируйте реальное время, а не самооценку; считайте не только время, но и дефекты за две недели; применяйте вывод селективно — AI скорее ускорит на изолированном типовом, скорее замедлит на знакомом легаси. Уровень и место AI — измеряемое решение, а не культурная установка. Подумайте тридцать секунд: как бы вы измерили реальный эффект AI на свою работу, не опираясь на ощущение?</a:t>
             </a:r>
           </a:p>
         </p:txBody>
@@ -1381,7 +1381,7 @@
           <a:p/>
           <a:p>
             <a:r>
-              <a:t>Общий принцип раздела, удерживающий его от превращения в «страшилку»: на каждый риск ниже есть конкретный, часто не-AI контроль. Задача — не пугаться AI и не слепо ему доверять, а на каждой задаче знать, какой именно контроль ставится и почему он не делегируется. К концу раздела мы консолидируем все четыре точки возврата центрального вопроса в одну карту: каждый риск — и его конкретный контроль.</a:t>
+              <a:t>Общий принцип раздела, удерживающий его от превращения в «страшилку»: на каждый риск ниже есть конкретный, часто не-AI контроль. Задача — не пугаться AI и не слепо ему доверять, а на каждой задаче знать, какой именно контроль ставится и почему он не делегируется. К концу раздела мы консолидируем все разобранные риски в одну карту: каждый риск — и его конкретный контроль.</a:t>
             </a:r>
           </a:p>
         </p:txBody>
@@ -1873,7 +1873,7 @@
           <a:lstStyle/>
           <a:p>
             <a:r>
-              <a:t>До сих пор риски были про то, как AI вредит вашему коду. Этот кейс — про другое: AI масштабирует и шум, и шум бьёт по людям-сопровождающим. curl — критически важная open-source-библиотека, встроенная буквально везде; её ведёт небольшая команда. В её программу bug-bounty хлынул поток сгенерированных моделями «отчётов об уязвимостях»: объём кратно вырос, доля валидных обрушилась. Характерный пример — правдоподобный отчёт с GDB-дампами, ссылавшийся на несуществующую функцию: чистая фикция, по форме неотличимая от настоящего без ручной проверки. С начала 2026 года curl свернул открытый приём заявок. `[FACT-CHECK: curl valid-rate &lt;5%, ×8 объём, дата сворачивания — recent news/analysis, corroborate]`</a:t>
+              <a:t>До сих пор риски были про то, как AI вредит вашему коду. Этот кейс — про другое: AI масштабирует и шум, и шум бьёт по людям-сопровождающим. curl — критически важная open-source-библиотека, встроенная буквально везде; её ведёт небольшая команда. В её программу bug-bounty хлынул поток сгенерированных моделями «отчётов об уязвимостях»: к июлю 2025 объём вырос примерно в восемь раз, а доля валидных упала с исторической базы около пятнадцати процентов до менее пяти. Характерный пример — правдоподобный отчёт с GDB-дампами, ссылавшийся на несуществующую функцию: чистая фикция, по форме неотличимая от настоящего без ручной проверки. Платную bug-bounty-программу curl закрыл 26 января 2026 года, а ситуация после этого не стабилизировалась: команда объявила полный мораторий на приём любых отчётов об уязвимостях с 1 июля по 3 августа 2026 года — то есть шум дорос до точки, где единственным доступным ответом небольшой команды сопровождающих стала полная остановка канала на месяц.</a:t>
             </a:r>
           </a:p>
           <a:p/>
@@ -2037,13 +2037,13 @@
           <a:lstStyle/>
           <a:p>
             <a:r>
-              <a:t>Перед переходом к методологиям консолидируем четыре точки возврата центрального вопроса. Это анти-«страшилка»: каждый риск, который мы разобрали, сопровождён конкретным контролем, и вот их карта.</a:t>
+              <a:t>Перед переходом к методологиям консолидируем разобранные риски. Это анти-«страшилка»: каждый риск, который мы разобрали, сопровождён конкретным контролем, и вот их карта.</a:t>
             </a:r>
           </a:p>
           <a:p/>
           <a:p>
             <a:r>
-              <a:t>Точка первая, из раздела про уровни A и B: риск — «почти правильный» код; контроль — человеческое ревью плюс тест до того, как доверять фрагменту. Точка вторая, из раздела про уровень C: риск — merge без чтения и рост технического долга; контроль — человеческое ревью pull request плюс continuous integration-гейт на клоны, churn и mutation score. Точка третья, из раздела про уровень D: риск — автономный деструктив без гейта и perception-gap; контроль — жёсткий человеческий гейт на необратимое и измерять, а не ощущать. Точка четвёртая, из раздела про безопасность: риск — уязвимый код с ложной уверенностью и утечка через инъекцию; контроль — обязательный SAST и secret-scan плюс least-privilege, изоляция недоверенного контента и egress-контроль.</a:t>
+              <a:t>Первое, из раздела про уровни A и B: риск — «почти правильный» код; контроль — человеческое ревью плюс тест до того, как доверять фрагменту. Второе, из раздела про уровень C: риск — merge без чтения и рост технического долга; контроль — человеческое ревью pull request плюс continuous integration-гейт на клоны, churn и mutation score. Третье, из раздела про уровень D: риск — автономный деструктив без гейта и perception-gap; контроль — жёсткий человеческий гейт на необратимое и измерять, а не ощущать. Четвёртое, из раздела про безопасность: риск — уязвимый код с ложной уверенностью и утечка через инъекцию; контроль — обязательный SAST и secret-scan плюс least-privilege, изоляция недоверенного контента и egress-контроль.</a:t>
             </a:r>
           </a:p>
           <a:p/>
@@ -2119,7 +2119,7 @@
           <a:lstStyle/>
           <a:p>
             <a:r>
-              <a:t>Разделы один–четыре разобрали уровни автономии и риски «технического» AI-кода: автодополнение и мелкие задачи, кодинг-агент, оркестратор, затем тестирование, ревью и безопасность. Мы свели четыре точки возврата центрального вопроса в одну карту: каждый риск — и его конкретный контроль. Теперь меняем угол: с самого кода на процесс и людей вокруг него.</a:t>
+              <a:t>Разделы один–четыре разобрали уровни автономии и риски «технического» AI-кода: автодополнение и мелкие задачи, кодинг-агент, оркестратор, затем тестирование, ревью и безопасность. Мы свели разобранные риски в одну карту: каждый риск — и его конкретный контроль. Теперь меняем угол: с самого кода на процесс и людей вокруг него.</a:t>
             </a:r>
           </a:p>
           <a:p/>
@@ -2289,19 +2289,19 @@
           <a:lstStyle/>
           <a:p>
             <a:r>
-              <a:t>Пятая точка возврата центрального вопроса — и концептуальное ядро ответа на «что не делегируется». Опирается на классический первоисточник. Фредерик Брукс в эссе «No Silver Bullet» разделил сложность ПО на два рода. Accidental complexity, привнесённая сложность, — трудности, идущие не от существа задачи, а от инструментов и среды: рутина, boilerplate, ручная отладка, написание документации. Essential complexity, существенная сложность, — трудность самой задачи, и центральная её формулировка у Брукса: труднейшая часть построения системы — точно решить, что именно строить. Тезис Брукса: ни один инструмент не даёт серебряной пули против существенной сложности, потому что она в природе задачи, не в инструментах. Применение к AI прямое: AI бьёт по привнесённой сложности — boilerplate, рутинный debug, доки, — но не по существенной; «решить, что строить» по-прежнему человеческое и труднейшее. Это и есть концептуальный ответ на «что не делегируется».</a:t>
+              <a:t>Концептуальное ядро ответа на «что не делегируется» опирается на классический первоисточник. Фредерик Брукс в эссе «No Silver Bullet» разделил сложность ПО на два рода. Accidental complexity, привнесённая сложность, — трудности, идущие не от существа задачи, а от инструментов и среды: рутина, boilerplate, ручная отладка, написание документации. Essential complexity, существенная сложность, — трудность самой задачи, и центральная её формулировка у Брукса: труднейшая часть построения системы — точно решить, что именно строить. Тезис Брукса: ни один инструмент не даёт серебряной пули против существенной сложности, потому что она в природе задачи, не в инструментах. Применение к AI прямое: AI бьёт по привнесённой сложности — boilerplate, рутинный debug, доки, — но не по существенной; «решить, что строить» по-прежнему человеческое и труднейшее. Это и есть концептуальный ответ на «что не делегируется».</a:t>
             </a:r>
           </a:p>
           <a:p/>
           <a:p>
             <a:r>
-              <a:t>Неочевидное следствие, и пятый возврат ребром. AI убирает трение ручного кода — а это трение исторически служило естественным тормозом плохого дизайна: плохую архитектуру было дорого писать руками, и эта дороговизна часто останавливала. Убрав трение, AI позволяет плохим практикам коллапсировать быстрее и масштабнее. DORA 2025 при выборке около пяти тысяч фиксирует это эмпирически: при adoption около девяноста процентов и широкой вере в рост продуктивности — отрицательная связь AI со стабильностью доставки, продолжающаяся второй год; формулировка DORA — «AI не чинит команду, он усиливает то, что уже есть».</a:t>
+              <a:t>Неочевидное следствие. AI убирает трение ручного кода — а это трение исторически служило естественным тормозом плохого дизайна: плохую архитектуру было дорого писать руками, и эта дороговизна часто останавливала. Убрав трение, AI позволяет плохим практикам коллапсировать быстрее и масштабнее. DORA 2025 при выборке около пяти тысяч фиксирует это эмпирически: при adoption около девяноста процентов и широкой вере в рост продуктивности — отрицательная связь AI со стабильностью доставки, продолжающаяся второй год; формулировка DORA — «AI не чинит команду, он усиливает то, что уже есть». Последующий отчёт той же организации, «ROI of AI-assisted Software Development» (май 2026), не смягчает вывод, а заостряет его количественно: та же условность — AI сам по себе не чинит сломанные инженерные системы, как эту мысль формулирует интерпретирующее освещение отчёта в прессе, — плюс модельная оценка конкретной цены нестабильности: рост доли неудачных изменений всего с пяти до шести процентов в их выборке соответствует смоделированному эффекту порядка минус триста сорок четыре тысячи долларов для типичной организации. Отчёт вводит и полезный образ — J-кривую: при масштабировании AI поверх слабого процесса стабильность сначала временно проседает, и только команды, инвестировавшие в инженерные основы заранее, проходят этот провал и выходят на устойчивый выигрыш.</a:t>
             </a:r>
           </a:p>
           <a:p/>
           <a:p>
             <a:r>
-              <a:t>Урок, несущий критерий: AI — амплификатор, не корректор. Сильная инженерная культура с тестами, ревью, гейтами с AI становится сильнее; слабая — деградирует быстрее. Поэтому исторические методики не отмирают — они калибруются и становятся критичнее, потому что цена их отсутствия с AI растёт. Критерий «когда AI скорее навредит»: команда без работающих ревью, тестов и гейтов — для неё внедрение AI скорее ускорит деградацию; правильный порядок — инвестировать в платформу и процесс до масштабирования AI, а не вместо.</a:t>
+              <a:t>Урок, несущий критерий: AI — амплификатор, не корректор. Сильная инженерная культура с тестами, ревью, гейтами с AI становится сильнее; слабая — деградирует быстрее, и это теперь измеримо в конкретных долларах, а не только в абстрактной «стабильности». Поэтому исторические методики не отмирают — они калибруются и становятся критичнее, потому что цена их отсутствия с AI растёт. Критерий «когда AI скорее навредит»: команда без работающих ревью, тестов и гейтов — для неё внедрение AI скорее ускорит деградацию (и войдёт в J-кривую без выхода из неё); правильный порядок — инвестировать в платформу и процесс до масштабирования AI, а не вместо.</a:t>
             </a:r>
           </a:p>
         </p:txBody>
@@ -2389,7 +2389,7 @@
           <a:p/>
           <a:p>
             <a:r>
-              <a:t>Важно понимать статус этой лестницы. Это дидактическая карта именно этой лекции, course-scaffold-конструкт, а не отраслевой стандарт и не общепринятая классификация: у вендоров и в литературе встречаются другие разбиения. Мы выбрали именно эти четыре уровня, потому что они монотонно наращивают одну величину — степень автономии AI — и потому что это прямое продолжение лестницы сложности Лекции 3: подъём по A→D — это подъём по той же лестнице, и то же правило действует буквально — оставайся на нижней ступени, поднимайся только под явное требование задачи, и чем выше уровень, тем строже должен быть критерий «здесь обязателен человек». Сама ось A→D — нейтральная карта, а не разбор ошибки.</a:t>
+              <a:t>Важно понимать статус этой лестницы. Это дидактическая карта именно этой лекции, а не отраслевой стандарт и не общепринятая классификация: у вендоров и в литературе встречаются другие разбиения. Мы выбрали именно эти четыре уровня, потому что они монотонно наращивают одну величину — степень автономии AI — и потому что это прямое продолжение лестницы сложности Лекции 3: подъём по A→D — это подъём по той же лестнице, и то же правило действует буквально — оставайся на нижней ступени, поднимайся только под явное требование задачи, и чем выше уровень, тем строже должен быть критерий «здесь обязателен человек». Сама ось A→D — нейтральная карта, а не разбор ошибки.</a:t>
             </a:r>
           </a:p>
         </p:txBody>
@@ -2899,7 +2899,7 @@
           <a:p/>
           <a:p>
             <a:r>
-              <a:t>Покажу образец рассуждения на задаче A: на уровне C попросить кодинг-агента реализовать фичу в приватном платёжном модуле с неполными тестами. Проход: не детерминированная, AI уместен в принципе; платёж — последствия критичны и частично необратимы, нужен жёсткий гейт; тесты неполные — нет надёжного оракула, нельзя доверять pull request без построчного senior-ревью; merge — senior, не агент; секреты есть — least-privilege; приватный код — доверие по Pro, около шестидесяти четырёх процентов; цель артефакт; критично плюс аудит — команда плюс AI. Вывод в формате success-критерия: уровень C с обязательным senior-ревью и жёстким гейтом, конфигурация команда плюс AI; решающая ось — необратимость и критичность; условие смены: будь это обратимый внутренний инструмент с полным покрытием на знакомом коде — допустим уровень D.</a:t>
+              <a:t>Покажу образец рассуждения на задаче A: на уровне C попросить кодинг-агента реализовать фичу в приватном платёжном модуле с неполными тестами. Проход: не детерминированная, AI уместен в принципе; платёж — последствия критичны и частично необратимы, нужен жёсткий гейт; тесты неполные — нет надёжного оракула, нельзя доверять pull request без построчного senior-ревью; merge — senior, не агент; секреты есть — least-privilege; приватный код — доверие по Pro, около семидесяти-восьмидесяти процентов; цель артефакт; критично плюс аудит — команда плюс AI. Вывод в формате success-критерия: уровень C с обязательным senior-ревью и жёстким гейтом, конфигурация команда плюс AI; решающая ось — необратимость и критичность; условие смены: будь это обратимый внутренний инструмент с полным покрытием на знакомом коде — допустим уровень D.</a:t>
             </a:r>
           </a:p>
           <a:p/>
@@ -6933,7 +6933,7 @@
             <a:r>
               <a:rPr sz="2800" b="1" i="0">
                 <a:solidFill>
-                  <a:srgbClr val="065A82"/>
+                  <a:srgbClr val="21295C"/>
                 </a:solidFill>
                 <a:latin typeface="Arial"/>
               </a:rPr>
@@ -7183,7 +7183,7 @@
             <a:r>
               <a:rPr sz="2800" b="1" i="0">
                 <a:solidFill>
-                  <a:srgbClr val="065A82"/>
+                  <a:srgbClr val="21295C"/>
                 </a:solidFill>
                 <a:latin typeface="Arial"/>
               </a:rPr>
@@ -7241,6 +7241,406 @@
           <a:xfrm>
             <a:off x="777240" y="4681728"/>
             <a:ext cx="5897880" cy="713232"/>
+          </a:xfrm>
+          <a:prstGeom prst="roundRect">
+            <a:avLst>
+              <a:gd name="adj" fmla="val 10000"/>
+            </a:avLst>
+          </a:prstGeom>
+          <a:solidFill>
+            <a:srgbClr val="F0AB00"/>
+          </a:solidFill>
+          <a:ln w="19050">
+            <a:solidFill>
+              <a:srgbClr val="F0AB00"/>
+            </a:solidFill>
+          </a:ln>
+          <a:effectLst/>
+        </p:spPr>
+        <p:style>
+          <a:lnRef idx="1">
+            <a:schemeClr val="accent1"/>
+          </a:lnRef>
+          <a:fillRef idx="3">
+            <a:schemeClr val="accent1"/>
+          </a:fillRef>
+          <a:effectRef idx="2">
+            <a:schemeClr val="accent1"/>
+          </a:effectRef>
+          <a:fontRef idx="minor">
+            <a:schemeClr val="lt1"/>
+          </a:fontRef>
+        </p:style>
+        <p:txBody>
+          <a:bodyPr rtlCol="0" anchor="ctr"/>
+          <a:lstStyle/>
+          <a:p>
+            <a:pPr algn="ctr"/>
+          </a:p>
+        </p:txBody>
+      </p:sp>
+      <p:sp>
+        <p:nvSpPr>
+          <p:cNvPr id="21" name="Rounded Rectangle 20"/>
+          <p:cNvSpPr/>
+          <p:nvPr/>
+        </p:nvSpPr>
+        <p:spPr>
+          <a:xfrm>
+            <a:off x="905256" y="4873752"/>
+            <a:ext cx="1060704" cy="329184"/>
+          </a:xfrm>
+          <a:prstGeom prst="roundRect">
+            <a:avLst>
+              <a:gd name="adj" fmla="val 40000"/>
+            </a:avLst>
+          </a:prstGeom>
+          <a:solidFill>
+            <a:srgbClr val="FFFFFF"/>
+          </a:solidFill>
+          <a:ln>
+            <a:noFill/>
+          </a:ln>
+          <a:effectLst/>
+        </p:spPr>
+        <p:style>
+          <a:lnRef idx="1">
+            <a:schemeClr val="accent1"/>
+          </a:lnRef>
+          <a:fillRef idx="3">
+            <a:schemeClr val="accent1"/>
+          </a:fillRef>
+          <a:effectRef idx="2">
+            <a:schemeClr val="accent1"/>
+          </a:effectRef>
+          <a:fontRef idx="minor">
+            <a:schemeClr val="lt1"/>
+          </a:fontRef>
+        </p:style>
+        <p:txBody>
+          <a:bodyPr rtlCol="0" anchor="ctr"/>
+          <a:lstStyle/>
+          <a:p>
+            <a:pPr algn="ctr"/>
+          </a:p>
+        </p:txBody>
+      </p:sp>
+      <p:sp>
+        <p:nvSpPr>
+          <p:cNvPr id="22" name="TextBox 21"/>
+          <p:cNvSpPr txBox="1"/>
+          <p:nvPr/>
+        </p:nvSpPr>
+        <p:spPr>
+          <a:xfrm>
+            <a:off x="905256" y="4873752"/>
+            <a:ext cx="1060704" cy="329184"/>
+          </a:xfrm>
+          <a:prstGeom prst="rect">
+            <a:avLst/>
+          </a:prstGeom>
+          <a:noFill/>
+        </p:spPr>
+        <p:txBody>
+          <a:bodyPr wrap="square" lIns="0" rIns="0" tIns="0" bIns="0" anchor="ctr">
+            <a:spAutoFit/>
+          </a:bodyPr>
+          <a:lstStyle/>
+          <a:p>
+            <a:pPr algn="ctr">
+              <a:lnSpc>
+                <a:spcPct val="115000"/>
+              </a:lnSpc>
+            </a:pPr>
+            <a:r>
+              <a:rPr sz="1100" b="1" i="0">
+                <a:solidFill>
+                  <a:srgbClr val="21295C"/>
+                </a:solidFill>
+                <a:latin typeface="Arial"/>
+              </a:rPr>
+              <a:t>ВЫШЛО</a:t>
+            </a:r>
+          </a:p>
+        </p:txBody>
+      </p:sp>
+      <p:sp>
+        <p:nvSpPr>
+          <p:cNvPr id="23" name="TextBox 22"/>
+          <p:cNvSpPr txBox="1"/>
+          <p:nvPr/>
+        </p:nvSpPr>
+        <p:spPr>
+          <a:xfrm>
+            <a:off x="2075688" y="4773168"/>
+            <a:ext cx="1847088" cy="530352"/>
+          </a:xfrm>
+          <a:prstGeom prst="rect">
+            <a:avLst/>
+          </a:prstGeom>
+          <a:noFill/>
+        </p:spPr>
+        <p:txBody>
+          <a:bodyPr wrap="square" lIns="0" rIns="0" tIns="0" bIns="0" anchor="ctr">
+            <a:spAutoFit/>
+          </a:bodyPr>
+          <a:lstStyle/>
+          <a:p>
+            <a:pPr algn="l">
+              <a:lnSpc>
+                <a:spcPct val="105000"/>
+              </a:lnSpc>
+            </a:pPr>
+            <a:r>
+              <a:rPr sz="1200" b="1" i="0">
+                <a:solidFill>
+                  <a:srgbClr val="21295C"/>
+                </a:solidFill>
+                <a:latin typeface="Arial"/>
+              </a:rPr>
+              <a:t>Измеренный факт</a:t>
+            </a:r>
+          </a:p>
+        </p:txBody>
+      </p:sp>
+      <p:sp>
+        <p:nvSpPr>
+          <p:cNvPr id="24" name="TextBox 23"/>
+          <p:cNvSpPr txBox="1"/>
+          <p:nvPr/>
+        </p:nvSpPr>
+        <p:spPr>
+          <a:xfrm>
+            <a:off x="3959352" y="4736592"/>
+            <a:ext cx="1280160" cy="603504"/>
+          </a:xfrm>
+          <a:prstGeom prst="rect">
+            <a:avLst/>
+          </a:prstGeom>
+          <a:noFill/>
+        </p:spPr>
+        <p:txBody>
+          <a:bodyPr wrap="square" lIns="0" rIns="0" tIns="0" bIns="0" anchor="ctr">
+            <a:spAutoFit/>
+          </a:bodyPr>
+          <a:lstStyle/>
+          <a:p>
+            <a:pPr algn="r">
+              <a:lnSpc>
+                <a:spcPct val="100000"/>
+              </a:lnSpc>
+            </a:pPr>
+            <a:r>
+              <a:rPr sz="2800" b="1" i="0">
+                <a:solidFill>
+                  <a:srgbClr val="21295C"/>
+                </a:solidFill>
+                <a:latin typeface="Arial"/>
+              </a:rPr>
+              <a:t>+19%</a:t>
+            </a:r>
+          </a:p>
+        </p:txBody>
+      </p:sp>
+      <p:sp>
+        <p:nvSpPr>
+          <p:cNvPr id="25" name="TextBox 24"/>
+          <p:cNvSpPr txBox="1"/>
+          <p:nvPr/>
+        </p:nvSpPr>
+        <p:spPr>
+          <a:xfrm>
+            <a:off x="5330952" y="4736592"/>
+            <a:ext cx="1325880" cy="603504"/>
+          </a:xfrm>
+          <a:prstGeom prst="rect">
+            <a:avLst/>
+          </a:prstGeom>
+          <a:noFill/>
+        </p:spPr>
+        <p:txBody>
+          <a:bodyPr wrap="square" lIns="0" rIns="0" tIns="0" bIns="0" anchor="ctr">
+            <a:spAutoFit/>
+          </a:bodyPr>
+          <a:lstStyle/>
+          <a:p>
+            <a:pPr algn="l">
+              <a:lnSpc>
+                <a:spcPct val="100000"/>
+              </a:lnSpc>
+            </a:pPr>
+            <a:r>
+              <a:rPr sz="1400" b="1" i="0">
+                <a:solidFill>
+                  <a:srgbClr val="21295C"/>
+                </a:solidFill>
+                <a:latin typeface="Arial"/>
+              </a:rPr>
+              <a:t>ДОЛЬШЕ</a:t>
+            </a:r>
+          </a:p>
+        </p:txBody>
+      </p:sp>
+      <p:sp>
+        <p:nvSpPr>
+          <p:cNvPr id="26" name="Rounded Rectangle 25"/>
+          <p:cNvSpPr/>
+          <p:nvPr/>
+        </p:nvSpPr>
+        <p:spPr>
+          <a:xfrm>
+            <a:off x="7132320" y="1335024"/>
+            <a:ext cx="4572000" cy="4160520"/>
+          </a:xfrm>
+          <a:prstGeom prst="roundRect">
+            <a:avLst>
+              <a:gd name="adj" fmla="val 7326"/>
+            </a:avLst>
+          </a:prstGeom>
+          <a:solidFill>
+            <a:srgbClr val="FFFFFF"/>
+          </a:solidFill>
+          <a:ln w="19050">
+            <a:solidFill>
+              <a:srgbClr val="1C7293"/>
+            </a:solidFill>
+          </a:ln>
+          <a:effectLst/>
+        </p:spPr>
+        <p:style>
+          <a:lnRef idx="1">
+            <a:schemeClr val="accent1"/>
+          </a:lnRef>
+          <a:fillRef idx="3">
+            <a:schemeClr val="accent1"/>
+          </a:fillRef>
+          <a:effectRef idx="2">
+            <a:schemeClr val="accent1"/>
+          </a:effectRef>
+          <a:fontRef idx="minor">
+            <a:schemeClr val="lt1"/>
+          </a:fontRef>
+        </p:style>
+        <p:txBody>
+          <a:bodyPr rtlCol="0" anchor="ctr"/>
+          <a:lstStyle/>
+          <a:p>
+            <a:pPr algn="ctr"/>
+          </a:p>
+        </p:txBody>
+      </p:sp>
+      <p:pic>
+        <p:nvPicPr>
+          <p:cNvPr id="27" name="Picture 26" descr="s01-metr-real-source.png"/>
+          <p:cNvPicPr>
+            <a:picLocks noChangeAspect="1"/>
+          </p:cNvPicPr>
+          <p:nvPr/>
+        </p:nvPicPr>
+        <p:blipFill>
+          <a:blip r:embed="rId3"/>
+          <a:stretch>
+            <a:fillRect/>
+          </a:stretch>
+        </p:blipFill>
+        <p:spPr>
+          <a:xfrm>
+            <a:off x="7260336" y="2090318"/>
+            <a:ext cx="4315968" cy="2265883"/>
+          </a:xfrm>
+          <a:prstGeom prst="rect">
+            <a:avLst/>
+          </a:prstGeom>
+        </p:spPr>
+      </p:pic>
+      <p:sp>
+        <p:nvSpPr>
+          <p:cNvPr id="28" name="TextBox 27"/>
+          <p:cNvSpPr txBox="1"/>
+          <p:nvPr/>
+        </p:nvSpPr>
+        <p:spPr>
+          <a:xfrm>
+            <a:off x="7260336" y="5029200"/>
+            <a:ext cx="4315968" cy="219456"/>
+          </a:xfrm>
+          <a:prstGeom prst="rect">
+            <a:avLst/>
+          </a:prstGeom>
+          <a:noFill/>
+        </p:spPr>
+        <p:txBody>
+          <a:bodyPr wrap="square" lIns="0" rIns="0" tIns="0" bIns="0" anchor="t">
+            <a:spAutoFit/>
+          </a:bodyPr>
+          <a:lstStyle/>
+          <a:p>
+            <a:pPr algn="l">
+              <a:lnSpc>
+                <a:spcPct val="115000"/>
+              </a:lnSpc>
+            </a:pPr>
+            <a:r>
+              <a:rPr sz="1000" b="0" i="1">
+                <a:solidFill>
+                  <a:srgbClr val="5B6678"/>
+                </a:solidFill>
+                <a:latin typeface="Arial"/>
+              </a:rPr>
+              <a:t>METR · официальный график исследования · CC-BY · metr.org</a:t>
+            </a:r>
+          </a:p>
+        </p:txBody>
+      </p:sp>
+      <p:sp>
+        <p:nvSpPr>
+          <p:cNvPr id="29" name="TextBox 28"/>
+          <p:cNvSpPr txBox="1"/>
+          <p:nvPr/>
+        </p:nvSpPr>
+        <p:spPr>
+          <a:xfrm>
+            <a:off x="7260336" y="5248656"/>
+            <a:ext cx="4315968" cy="219456"/>
+          </a:xfrm>
+          <a:prstGeom prst="rect">
+            <a:avLst/>
+          </a:prstGeom>
+          <a:noFill/>
+        </p:spPr>
+        <p:txBody>
+          <a:bodyPr wrap="square" lIns="0" rIns="0" tIns="0" bIns="0" anchor="t">
+            <a:spAutoFit/>
+          </a:bodyPr>
+          <a:lstStyle/>
+          <a:p>
+            <a:pPr algn="l">
+              <a:lnSpc>
+                <a:spcPct val="115000"/>
+              </a:lnSpc>
+            </a:pPr>
+            <a:r>
+              <a:rPr sz="1150" b="1" i="1">
+                <a:solidFill>
+                  <a:srgbClr val="028090"/>
+                </a:solidFill>
+                <a:latin typeface="Arial"/>
+              </a:rPr>
+              <a:t>perception-gap: ощущение скорости ≠ факт</a:t>
+            </a:r>
+          </a:p>
+        </p:txBody>
+      </p:sp>
+      <p:sp>
+        <p:nvSpPr>
+          <p:cNvPr id="30" name="Rounded Rectangle 29"/>
+          <p:cNvSpPr/>
+          <p:nvPr/>
+        </p:nvSpPr>
+        <p:spPr>
+          <a:xfrm>
+            <a:off x="502920" y="5632704"/>
+            <a:ext cx="11201400" cy="676656"/>
           </a:xfrm>
           <a:prstGeom prst="roundRect">
             <a:avLst>
@@ -7281,495 +7681,7 @@
       </p:sp>
       <p:sp>
         <p:nvSpPr>
-          <p:cNvPr id="21" name="Rounded Rectangle 20"/>
-          <p:cNvSpPr/>
-          <p:nvPr/>
-        </p:nvSpPr>
-        <p:spPr>
-          <a:xfrm>
-            <a:off x="905256" y="4873752"/>
-            <a:ext cx="1060704" cy="329184"/>
-          </a:xfrm>
-          <a:prstGeom prst="roundRect">
-            <a:avLst>
-              <a:gd name="adj" fmla="val 40000"/>
-            </a:avLst>
-          </a:prstGeom>
-          <a:solidFill>
-            <a:srgbClr val="F0AB00"/>
-          </a:solidFill>
-          <a:ln>
-            <a:noFill/>
-          </a:ln>
-          <a:effectLst/>
-        </p:spPr>
-        <p:style>
-          <a:lnRef idx="1">
-            <a:schemeClr val="accent1"/>
-          </a:lnRef>
-          <a:fillRef idx="3">
-            <a:schemeClr val="accent1"/>
-          </a:fillRef>
-          <a:effectRef idx="2">
-            <a:schemeClr val="accent1"/>
-          </a:effectRef>
-          <a:fontRef idx="minor">
-            <a:schemeClr val="lt1"/>
-          </a:fontRef>
-        </p:style>
-        <p:txBody>
-          <a:bodyPr rtlCol="0" anchor="ctr"/>
-          <a:lstStyle/>
-          <a:p>
-            <a:pPr algn="ctr"/>
-          </a:p>
-        </p:txBody>
-      </p:sp>
-      <p:sp>
-        <p:nvSpPr>
-          <p:cNvPr id="22" name="TextBox 21"/>
-          <p:cNvSpPr txBox="1"/>
-          <p:nvPr/>
-        </p:nvSpPr>
-        <p:spPr>
-          <a:xfrm>
-            <a:off x="905256" y="4873752"/>
-            <a:ext cx="1060704" cy="329184"/>
-          </a:xfrm>
-          <a:prstGeom prst="rect">
-            <a:avLst/>
-          </a:prstGeom>
-          <a:noFill/>
-        </p:spPr>
-        <p:txBody>
-          <a:bodyPr wrap="square" lIns="0" rIns="0" tIns="0" bIns="0" anchor="ctr">
-            <a:spAutoFit/>
-          </a:bodyPr>
-          <a:lstStyle/>
-          <a:p>
-            <a:pPr algn="ctr">
-              <a:lnSpc>
-                <a:spcPct val="115000"/>
-              </a:lnSpc>
-            </a:pPr>
-            <a:r>
-              <a:rPr sz="1100" b="1" i="0">
-                <a:solidFill>
-                  <a:srgbClr val="21295C"/>
-                </a:solidFill>
-                <a:latin typeface="Arial"/>
-              </a:rPr>
-              <a:t>ВЫШЛО</a:t>
-            </a:r>
-          </a:p>
-        </p:txBody>
-      </p:sp>
-      <p:sp>
-        <p:nvSpPr>
-          <p:cNvPr id="23" name="TextBox 22"/>
-          <p:cNvSpPr txBox="1"/>
-          <p:nvPr/>
-        </p:nvSpPr>
-        <p:spPr>
-          <a:xfrm>
-            <a:off x="2075688" y="4773168"/>
-            <a:ext cx="1847088" cy="530352"/>
-          </a:xfrm>
-          <a:prstGeom prst="rect">
-            <a:avLst/>
-          </a:prstGeom>
-          <a:noFill/>
-        </p:spPr>
-        <p:txBody>
-          <a:bodyPr wrap="square" lIns="0" rIns="0" tIns="0" bIns="0" anchor="ctr">
-            <a:spAutoFit/>
-          </a:bodyPr>
-          <a:lstStyle/>
-          <a:p>
-            <a:pPr algn="l">
-              <a:lnSpc>
-                <a:spcPct val="105000"/>
-              </a:lnSpc>
-            </a:pPr>
-            <a:r>
-              <a:rPr sz="1200" b="1" i="0">
-                <a:solidFill>
-                  <a:srgbClr val="21295C"/>
-                </a:solidFill>
-                <a:latin typeface="Arial"/>
-              </a:rPr>
-              <a:t>Измеренный факт</a:t>
-            </a:r>
-          </a:p>
-        </p:txBody>
-      </p:sp>
-      <p:sp>
-        <p:nvSpPr>
-          <p:cNvPr id="24" name="TextBox 23"/>
-          <p:cNvSpPr txBox="1"/>
-          <p:nvPr/>
-        </p:nvSpPr>
-        <p:spPr>
-          <a:xfrm>
-            <a:off x="3959352" y="4736592"/>
-            <a:ext cx="1280160" cy="603504"/>
-          </a:xfrm>
-          <a:prstGeom prst="rect">
-            <a:avLst/>
-          </a:prstGeom>
-          <a:noFill/>
-        </p:spPr>
-        <p:txBody>
-          <a:bodyPr wrap="square" lIns="0" rIns="0" tIns="0" bIns="0" anchor="ctr">
-            <a:spAutoFit/>
-          </a:bodyPr>
-          <a:lstStyle/>
-          <a:p>
-            <a:pPr algn="r">
-              <a:lnSpc>
-                <a:spcPct val="100000"/>
-              </a:lnSpc>
-            </a:pPr>
-            <a:r>
-              <a:rPr sz="2800" b="1" i="0">
-                <a:solidFill>
-                  <a:srgbClr val="F0AB00"/>
-                </a:solidFill>
-                <a:latin typeface="Arial"/>
-              </a:rPr>
-              <a:t>+19%</a:t>
-            </a:r>
-          </a:p>
-        </p:txBody>
-      </p:sp>
-      <p:sp>
-        <p:nvSpPr>
-          <p:cNvPr id="25" name="TextBox 24"/>
-          <p:cNvSpPr txBox="1"/>
-          <p:nvPr/>
-        </p:nvSpPr>
-        <p:spPr>
-          <a:xfrm>
-            <a:off x="5330952" y="4736592"/>
-            <a:ext cx="1325880" cy="603504"/>
-          </a:xfrm>
-          <a:prstGeom prst="rect">
-            <a:avLst/>
-          </a:prstGeom>
-          <a:noFill/>
-        </p:spPr>
-        <p:txBody>
-          <a:bodyPr wrap="square" lIns="0" rIns="0" tIns="0" bIns="0" anchor="ctr">
-            <a:spAutoFit/>
-          </a:bodyPr>
-          <a:lstStyle/>
-          <a:p>
-            <a:pPr algn="l">
-              <a:lnSpc>
-                <a:spcPct val="100000"/>
-              </a:lnSpc>
-            </a:pPr>
-            <a:r>
-              <a:rPr sz="1400" b="1" i="0">
-                <a:solidFill>
-                  <a:srgbClr val="F0AB00"/>
-                </a:solidFill>
-                <a:latin typeface="Arial"/>
-              </a:rPr>
-              <a:t>ДОЛЬШЕ</a:t>
-            </a:r>
-          </a:p>
-        </p:txBody>
-      </p:sp>
-      <p:sp>
-        <p:nvSpPr>
-          <p:cNvPr id="26" name="Rounded Rectangle 25"/>
-          <p:cNvSpPr/>
-          <p:nvPr/>
-        </p:nvSpPr>
-        <p:spPr>
-          <a:xfrm>
-            <a:off x="7132320" y="1335024"/>
-            <a:ext cx="4572000" cy="2331720"/>
-          </a:xfrm>
-          <a:prstGeom prst="roundRect">
-            <a:avLst>
-              <a:gd name="adj" fmla="val 13071"/>
-            </a:avLst>
-          </a:prstGeom>
-          <a:solidFill>
-            <a:srgbClr val="E4F1F2"/>
-          </a:solidFill>
-          <a:ln w="25400">
-            <a:solidFill>
-              <a:srgbClr val="028090"/>
-            </a:solidFill>
-          </a:ln>
-          <a:effectLst/>
-        </p:spPr>
-        <p:style>
-          <a:lnRef idx="1">
-            <a:schemeClr val="accent1"/>
-          </a:lnRef>
-          <a:fillRef idx="3">
-            <a:schemeClr val="accent1"/>
-          </a:fillRef>
-          <a:effectRef idx="2">
-            <a:schemeClr val="accent1"/>
-          </a:effectRef>
-          <a:fontRef idx="minor">
-            <a:schemeClr val="lt1"/>
-          </a:fontRef>
-        </p:style>
-        <p:txBody>
-          <a:bodyPr rtlCol="0" anchor="ctr"/>
-          <a:lstStyle/>
-          <a:p>
-            <a:pPr algn="ctr"/>
-          </a:p>
-        </p:txBody>
-      </p:sp>
-      <p:pic>
-        <p:nvPicPr>
-          <p:cNvPr id="27" name="Picture 26" descr="circle-help-teal.png"/>
-          <p:cNvPicPr>
-            <a:picLocks noChangeAspect="1"/>
-          </p:cNvPicPr>
-          <p:nvPr/>
-        </p:nvPicPr>
-        <p:blipFill>
-          <a:blip r:embed="rId3"/>
-          <a:stretch>
-            <a:fillRect/>
-          </a:stretch>
-        </p:blipFill>
-        <p:spPr>
-          <a:xfrm>
-            <a:off x="7388352" y="1536192"/>
-            <a:ext cx="457200" cy="457200"/>
-          </a:xfrm>
-          <a:prstGeom prst="rect">
-            <a:avLst/>
-          </a:prstGeom>
-        </p:spPr>
-      </p:pic>
-      <p:sp>
-        <p:nvSpPr>
-          <p:cNvPr id="28" name="TextBox 27"/>
-          <p:cNvSpPr txBox="1"/>
-          <p:nvPr/>
-        </p:nvSpPr>
-        <p:spPr>
-          <a:xfrm>
-            <a:off x="7973568" y="1572768"/>
-            <a:ext cx="3566160" cy="411480"/>
-          </a:xfrm>
-          <a:prstGeom prst="rect">
-            <a:avLst/>
-          </a:prstGeom>
-          <a:noFill/>
-        </p:spPr>
-        <p:txBody>
-          <a:bodyPr wrap="square" lIns="0" rIns="0" tIns="0" bIns="0" anchor="ctr">
-            <a:spAutoFit/>
-          </a:bodyPr>
-          <a:lstStyle/>
-          <a:p>
-            <a:pPr algn="l">
-              <a:lnSpc>
-                <a:spcPct val="115000"/>
-              </a:lnSpc>
-            </a:pPr>
-            <a:r>
-              <a:rPr sz="1800" b="1" i="0">
-                <a:solidFill>
-                  <a:srgbClr val="028090"/>
-                </a:solidFill>
-                <a:latin typeface="Arial"/>
-              </a:rPr>
-              <a:t>perception-gap</a:t>
-            </a:r>
-          </a:p>
-        </p:txBody>
-      </p:sp>
-      <p:sp>
-        <p:nvSpPr>
-          <p:cNvPr id="29" name="TextBox 28"/>
-          <p:cNvSpPr txBox="1"/>
-          <p:nvPr/>
-        </p:nvSpPr>
-        <p:spPr>
-          <a:xfrm>
-            <a:off x="7388352" y="2176272"/>
-            <a:ext cx="4059935" cy="1371600"/>
-          </a:xfrm>
-          <a:prstGeom prst="rect">
-            <a:avLst/>
-          </a:prstGeom>
-          <a:noFill/>
-        </p:spPr>
-        <p:txBody>
-          <a:bodyPr wrap="square" lIns="0" rIns="0" tIns="0" bIns="0" anchor="t">
-            <a:spAutoFit/>
-          </a:bodyPr>
-          <a:lstStyle/>
-          <a:p>
-            <a:pPr algn="l">
-              <a:lnSpc>
-                <a:spcPct val="122000"/>
-              </a:lnSpc>
-            </a:pPr>
-            <a:r>
-              <a:rPr sz="1450" b="0" i="0">
-                <a:solidFill>
-                  <a:srgbClr val="21295C"/>
-                </a:solidFill>
-                <a:latin typeface="Arial"/>
-              </a:rPr>
-              <a:t>разрыв между субъективным ощущением скорости («AI меня ускоряет») и объективно измеренным фактом</a:t>
-            </a:r>
-          </a:p>
-        </p:txBody>
-      </p:sp>
-      <p:sp>
-        <p:nvSpPr>
-          <p:cNvPr id="30" name="Rounded Rectangle 29"/>
-          <p:cNvSpPr/>
-          <p:nvPr/>
-        </p:nvSpPr>
-        <p:spPr>
-          <a:xfrm>
-            <a:off x="7132320" y="3822191"/>
-            <a:ext cx="4572000" cy="1673352"/>
-          </a:xfrm>
-          <a:prstGeom prst="roundRect">
-            <a:avLst>
-              <a:gd name="adj" fmla="val 18214"/>
-            </a:avLst>
-          </a:prstGeom>
-          <a:solidFill>
-            <a:srgbClr val="F4F7FA"/>
-          </a:solidFill>
-          <a:ln w="19050">
-            <a:solidFill>
-              <a:srgbClr val="1C7293"/>
-            </a:solidFill>
-          </a:ln>
-          <a:effectLst/>
-        </p:spPr>
-        <p:style>
-          <a:lnRef idx="1">
-            <a:schemeClr val="accent1"/>
-          </a:lnRef>
-          <a:fillRef idx="3">
-            <a:schemeClr val="accent1"/>
-          </a:fillRef>
-          <a:effectRef idx="2">
-            <a:schemeClr val="accent1"/>
-          </a:effectRef>
-          <a:fontRef idx="minor">
-            <a:schemeClr val="lt1"/>
-          </a:fontRef>
-        </p:style>
-        <p:txBody>
-          <a:bodyPr rtlCol="0" anchor="ctr"/>
-          <a:lstStyle/>
-          <a:p>
-            <a:pPr algn="ctr"/>
-          </a:p>
-        </p:txBody>
-      </p:sp>
-      <p:sp>
-        <p:nvSpPr>
           <p:cNvPr id="31" name="TextBox 30"/>
-          <p:cNvSpPr txBox="1"/>
-          <p:nvPr/>
-        </p:nvSpPr>
-        <p:spPr>
-          <a:xfrm>
-            <a:off x="7388352" y="3986783"/>
-            <a:ext cx="4059935" cy="1371600"/>
-          </a:xfrm>
-          <a:prstGeom prst="rect">
-            <a:avLst/>
-          </a:prstGeom>
-          <a:noFill/>
-        </p:spPr>
-        <p:txBody>
-          <a:bodyPr wrap="square" lIns="0" rIns="0" tIns="0" bIns="0" anchor="ctr">
-            <a:spAutoFit/>
-          </a:bodyPr>
-          <a:lstStyle/>
-          <a:p>
-            <a:pPr algn="l">
-              <a:lnSpc>
-                <a:spcPct val="125000"/>
-              </a:lnSpc>
-            </a:pPr>
-            <a:r>
-              <a:rPr sz="1500" b="0" i="1">
-                <a:solidFill>
-                  <a:srgbClr val="065A82"/>
-                </a:solidFill>
-                <a:latin typeface="Arial"/>
-              </a:rPr>
-              <a:t>Ускоряет ли AI лично вас — на сколько?
-И откуда вы это знаете?</a:t>
-            </a:r>
-          </a:p>
-        </p:txBody>
-      </p:sp>
-      <p:sp>
-        <p:nvSpPr>
-          <p:cNvPr id="32" name="Rounded Rectangle 31"/>
-          <p:cNvSpPr/>
-          <p:nvPr/>
-        </p:nvSpPr>
-        <p:spPr>
-          <a:xfrm>
-            <a:off x="502920" y="5632704"/>
-            <a:ext cx="11201400" cy="676656"/>
-          </a:xfrm>
-          <a:prstGeom prst="roundRect">
-            <a:avLst>
-              <a:gd name="adj" fmla="val 10000"/>
-            </a:avLst>
-          </a:prstGeom>
-          <a:solidFill>
-            <a:srgbClr val="FDF3DC"/>
-          </a:solidFill>
-          <a:ln w="19050">
-            <a:solidFill>
-              <a:srgbClr val="F0AB00"/>
-            </a:solidFill>
-          </a:ln>
-          <a:effectLst/>
-        </p:spPr>
-        <p:style>
-          <a:lnRef idx="1">
-            <a:schemeClr val="accent1"/>
-          </a:lnRef>
-          <a:fillRef idx="3">
-            <a:schemeClr val="accent1"/>
-          </a:fillRef>
-          <a:effectRef idx="2">
-            <a:schemeClr val="accent1"/>
-          </a:effectRef>
-          <a:fontRef idx="minor">
-            <a:schemeClr val="lt1"/>
-          </a:fontRef>
-        </p:style>
-        <p:txBody>
-          <a:bodyPr rtlCol="0" anchor="ctr"/>
-          <a:lstStyle/>
-          <a:p>
-            <a:pPr algn="ctr"/>
-          </a:p>
-        </p:txBody>
-      </p:sp>
-      <p:sp>
-        <p:nvSpPr>
-          <p:cNvPr id="33" name="TextBox 32"/>
           <p:cNvSpPr txBox="1"/>
           <p:nvPr/>
         </p:nvSpPr>
@@ -7795,13 +7707,13 @@
               </a:lnSpc>
             </a:pPr>
             <a:r>
-              <a:rPr sz="1500" b="1" i="0">
+              <a:rPr sz="1400" b="1" i="0">
                 <a:solidFill>
                   <a:srgbClr val="21295C"/>
                 </a:solidFill>
                 <a:latin typeface="Arial"/>
               </a:rPr>
-              <a:t>Профессионалы, годами пишущие код, ошиблись не в величине — в знаке. «Мне кажется, инструмент помогает» — это гипотеза, а не данные.</a:t>
+              <a:t>Профессионалы, годами пишущие код, ошиблись не в величине — в знаке. Ускоряет ли AI лично вас — и откуда вы это знаете? «Мне кажется, помогает» — гипотеза, не данные.</a:t>
             </a:r>
           </a:p>
         </p:txBody>
@@ -10786,13 +10698,13 @@
               </a:lnSpc>
             </a:pPr>
             <a:r>
-              <a:rPr sz="4200" b="1" i="0">
+              <a:rPr sz="3600" b="1" i="0">
                 <a:solidFill>
                   <a:srgbClr val="21295C"/>
                 </a:solidFill>
                 <a:latin typeface="Arial"/>
               </a:rPr>
-              <a:t>88,7%</a:t>
+              <a:t>~95–96%</a:t>
             </a:r>
           </a:p>
         </p:txBody>
@@ -10877,7 +10789,7 @@
                 </a:solidFill>
                 <a:latin typeface="Arial"/>
               </a:rPr>
-              <a:t>разрыв −24 процентных пункта</a:t>
+              <a:t>разрыв ~15–17 процентных пунктов</a:t>
             </a:r>
           </a:p>
         </p:txBody>
@@ -10998,13 +10910,13 @@
               </a:lnSpc>
             </a:pPr>
             <a:r>
-              <a:rPr sz="4200" b="1" i="0">
-                <a:solidFill>
-                  <a:srgbClr val="F0AB00"/>
-                </a:solidFill>
-                <a:latin typeface="Arial"/>
-              </a:rPr>
-              <a:t>64,3%</a:t>
+              <a:rPr sz="3600" b="1" i="0">
+                <a:solidFill>
+                  <a:srgbClr val="21295C"/>
+                </a:solidFill>
+                <a:latin typeface="Arial"/>
+              </a:rPr>
+              <a:t>~69–80%</a:t>
             </a:r>
           </a:p>
         </p:txBody>
@@ -11091,7 +11003,7 @@
                 </a:solidFill>
                 <a:latin typeface="Arial"/>
               </a:rPr>
-              <a:t>Главный инженерный факт уровня C: «почти 90%» на знакомом коде → «примерно 2 из 3» на незнакомом</a:t>
+              <a:t>Главный инженерный факт уровня C: «почти 95%» на знакомом коде → «7–8 из 10» на незнакомом</a:t>
             </a:r>
           </a:p>
         </p:txBody>
@@ -12046,7 +11958,7 @@
             </a:avLst>
           </a:prstGeom>
           <a:solidFill>
-            <a:srgbClr val="FDF3DC"/>
+            <a:srgbClr val="F0AB00"/>
           </a:solidFill>
           <a:ln w="19050">
             <a:solidFill>
@@ -12107,7 +12019,7 @@
             <a:r>
               <a:rPr sz="1250" b="1" i="0">
                 <a:solidFill>
-                  <a:srgbClr val="065A82"/>
+                  <a:srgbClr val="21295C"/>
                 </a:solidFill>
                 <a:latin typeface="Arial"/>
               </a:rPr>
@@ -12146,7 +12058,7 @@
             <a:r>
               <a:rPr sz="2500" b="1" i="0">
                 <a:solidFill>
-                  <a:srgbClr val="F0AB00"/>
+                  <a:srgbClr val="21295C"/>
                 </a:solidFill>
                 <a:latin typeface="Arial"/>
               </a:rPr>
@@ -12409,22 +12321,68 @@
       </p:sp>
       <p:sp>
         <p:nvSpPr>
-          <p:cNvPr id="19" name="TextBox 18"/>
-          <p:cNvSpPr txBox="1"/>
-          <p:nvPr/>
-        </p:nvSpPr>
-        <p:spPr>
-          <a:xfrm>
-            <a:off x="6711696" y="4206239"/>
-            <a:ext cx="4773168" cy="274320"/>
-          </a:xfrm>
-          <a:prstGeom prst="rect">
-            <a:avLst/>
-          </a:prstGeom>
-          <a:noFill/>
-        </p:spPr>
-        <p:txBody>
-          <a:bodyPr wrap="square" lIns="0" rIns="0" tIns="0" bIns="0" anchor="t">
+          <p:cNvPr id="19" name="Rounded Rectangle 18"/>
+          <p:cNvSpPr/>
+          <p:nvPr/>
+        </p:nvSpPr>
+        <p:spPr>
+          <a:xfrm>
+            <a:off x="6711696" y="4169663"/>
+            <a:ext cx="4773168" cy="329184"/>
+          </a:xfrm>
+          <a:prstGeom prst="roundRect">
+            <a:avLst>
+              <a:gd name="adj" fmla="val 20000"/>
+            </a:avLst>
+          </a:prstGeom>
+          <a:solidFill>
+            <a:srgbClr val="F0AB00"/>
+          </a:solidFill>
+          <a:ln>
+            <a:noFill/>
+          </a:ln>
+          <a:effectLst/>
+        </p:spPr>
+        <p:style>
+          <a:lnRef idx="1">
+            <a:schemeClr val="accent1"/>
+          </a:lnRef>
+          <a:fillRef idx="3">
+            <a:schemeClr val="accent1"/>
+          </a:fillRef>
+          <a:effectRef idx="2">
+            <a:schemeClr val="accent1"/>
+          </a:effectRef>
+          <a:fontRef idx="minor">
+            <a:schemeClr val="lt1"/>
+          </a:fontRef>
+        </p:style>
+        <p:txBody>
+          <a:bodyPr rtlCol="0" anchor="ctr"/>
+          <a:lstStyle/>
+          <a:p>
+            <a:pPr algn="ctr"/>
+          </a:p>
+        </p:txBody>
+      </p:sp>
+      <p:sp>
+        <p:nvSpPr>
+          <p:cNvPr id="20" name="TextBox 19"/>
+          <p:cNvSpPr txBox="1"/>
+          <p:nvPr/>
+        </p:nvSpPr>
+        <p:spPr>
+          <a:xfrm>
+            <a:off x="6711696" y="4169663"/>
+            <a:ext cx="4773168" cy="329184"/>
+          </a:xfrm>
+          <a:prstGeom prst="rect">
+            <a:avLst/>
+          </a:prstGeom>
+          <a:noFill/>
+        </p:spPr>
+        <p:txBody>
+          <a:bodyPr wrap="square" lIns="0" rIns="0" tIns="0" bIns="0" anchor="ctr">
             <a:spAutoFit/>
           </a:bodyPr>
           <a:lstStyle/>
@@ -12437,7 +12395,7 @@
             <a:r>
               <a:rPr sz="1200" b="1" i="1">
                 <a:solidFill>
-                  <a:srgbClr val="F0AB00"/>
+                  <a:srgbClr val="21295C"/>
                 </a:solidFill>
                 <a:latin typeface="Arial"/>
               </a:rPr>
@@ -12448,7 +12406,7 @@
       </p:sp>
       <p:sp>
         <p:nvSpPr>
-          <p:cNvPr id="20" name="Rounded Rectangle 19"/>
+          <p:cNvPr id="21" name="Rounded Rectangle 20"/>
           <p:cNvSpPr/>
           <p:nvPr/>
         </p:nvSpPr>
@@ -12496,7 +12454,7 @@
       </p:sp>
       <p:sp>
         <p:nvSpPr>
-          <p:cNvPr id="21" name="TextBox 20"/>
+          <p:cNvPr id="22" name="TextBox 21"/>
           <p:cNvSpPr txBox="1"/>
           <p:nvPr/>
         </p:nvSpPr>
@@ -12535,7 +12493,7 @@
       </p:sp>
       <p:sp>
         <p:nvSpPr>
-          <p:cNvPr id="22" name="TextBox 21"/>
+          <p:cNvPr id="23" name="TextBox 22"/>
           <p:cNvSpPr txBox="1"/>
           <p:nvPr/>
         </p:nvSpPr>
@@ -16479,7 +16437,7 @@
             </a:avLst>
           </a:prstGeom>
           <a:solidFill>
-            <a:srgbClr val="FDF3DC"/>
+            <a:srgbClr val="F0AB00"/>
           </a:solidFill>
           <a:ln w="19050">
             <a:solidFill>
@@ -16540,7 +16498,7 @@
             <a:r>
               <a:rPr sz="1350" b="1" i="0">
                 <a:solidFill>
-                  <a:srgbClr val="065A82"/>
+                  <a:srgbClr val="21295C"/>
                 </a:solidFill>
                 <a:latin typeface="Arial"/>
               </a:rPr>
@@ -16579,7 +16537,7 @@
             <a:r>
               <a:rPr sz="1150" b="0" i="1">
                 <a:solidFill>
-                  <a:srgbClr val="5B6678"/>
+                  <a:srgbClr val="21295C"/>
                 </a:solidFill>
                 <a:latin typeface="Arial"/>
               </a:rPr>
@@ -16618,7 +16576,7 @@
             <a:r>
               <a:rPr sz="3100" b="1" i="0">
                 <a:solidFill>
-                  <a:srgbClr val="F0AB00"/>
+                  <a:srgbClr val="21295C"/>
                 </a:solidFill>
                 <a:latin typeface="Arial"/>
               </a:rPr>
@@ -23043,8 +23001,8 @@
       </p:sp>
       <p:sp>
         <p:nvSpPr>
-          <p:cNvPr id="22" name="TextBox 21"/>
-          <p:cNvSpPr txBox="1"/>
+          <p:cNvPr id="22" name="Rounded Rectangle 21"/>
+          <p:cNvSpPr/>
           <p:nvPr/>
         </p:nvSpPr>
         <p:spPr>
@@ -23052,6 +23010,52 @@
             <a:off x="640080" y="3511296"/>
             <a:ext cx="3017520" cy="1042415"/>
           </a:xfrm>
+          <a:prstGeom prst="roundRect">
+            <a:avLst>
+              <a:gd name="adj" fmla="val 10000"/>
+            </a:avLst>
+          </a:prstGeom>
+          <a:solidFill>
+            <a:srgbClr val="F0AB00"/>
+          </a:solidFill>
+          <a:ln>
+            <a:noFill/>
+          </a:ln>
+          <a:effectLst/>
+        </p:spPr>
+        <p:style>
+          <a:lnRef idx="1">
+            <a:schemeClr val="accent1"/>
+          </a:lnRef>
+          <a:fillRef idx="3">
+            <a:schemeClr val="accent1"/>
+          </a:fillRef>
+          <a:effectRef idx="2">
+            <a:schemeClr val="accent1"/>
+          </a:effectRef>
+          <a:fontRef idx="minor">
+            <a:schemeClr val="lt1"/>
+          </a:fontRef>
+        </p:style>
+        <p:txBody>
+          <a:bodyPr rtlCol="0" anchor="ctr"/>
+          <a:lstStyle/>
+          <a:p>
+            <a:pPr algn="ctr"/>
+          </a:p>
+        </p:txBody>
+      </p:sp>
+      <p:sp>
+        <p:nvSpPr>
+          <p:cNvPr id="23" name="TextBox 22"/>
+          <p:cNvSpPr txBox="1"/>
+          <p:nvPr/>
+        </p:nvSpPr>
+        <p:spPr>
+          <a:xfrm>
+            <a:off x="640080" y="3511296"/>
+            <a:ext cx="3017520" cy="1042415"/>
+          </a:xfrm>
           <a:prstGeom prst="rect">
             <a:avLst/>
           </a:prstGeom>
@@ -23071,7 +23075,7 @@
             <a:r>
               <a:rPr sz="6800" b="1" i="0">
                 <a:solidFill>
-                  <a:srgbClr val="F0AB00"/>
+                  <a:srgbClr val="21295C"/>
                 </a:solidFill>
                 <a:latin typeface="Arial"/>
               </a:rPr>
@@ -23082,7 +23086,7 @@
       </p:sp>
       <p:cxnSp>
         <p:nvCxnSpPr>
-          <p:cNvPr id="23" name="Connector 22"/>
+          <p:cNvPr id="24" name="Connector 23"/>
           <p:cNvCxnSpPr/>
           <p:nvPr/>
         </p:nvCxnSpPr>
@@ -23117,7 +23121,7 @@
       </p:cxnSp>
       <p:sp>
         <p:nvSpPr>
-          <p:cNvPr id="24" name="TextBox 23"/>
+          <p:cNvPr id="25" name="TextBox 24"/>
           <p:cNvSpPr txBox="1"/>
           <p:nvPr/>
         </p:nvSpPr>
@@ -23156,7 +23160,7 @@
       </p:sp>
       <p:sp>
         <p:nvSpPr>
-          <p:cNvPr id="25" name="Rounded Rectangle 24"/>
+          <p:cNvPr id="26" name="Rounded Rectangle 25"/>
           <p:cNvSpPr/>
           <p:nvPr/>
         </p:nvSpPr>
@@ -23204,7 +23208,7 @@
       </p:sp>
       <p:sp>
         <p:nvSpPr>
-          <p:cNvPr id="26" name="TextBox 25"/>
+          <p:cNvPr id="27" name="TextBox 26"/>
           <p:cNvSpPr txBox="1"/>
           <p:nvPr/>
         </p:nvSpPr>
@@ -23243,7 +23247,7 @@
       </p:sp>
       <p:sp>
         <p:nvSpPr>
-          <p:cNvPr id="27" name="TextBox 26"/>
+          <p:cNvPr id="28" name="TextBox 27"/>
           <p:cNvSpPr txBox="1"/>
           <p:nvPr/>
         </p:nvSpPr>
@@ -23369,8 +23373,8 @@
         </p:nvSpPr>
         <p:spPr>
           <a:xfrm>
-            <a:off x="502920" y="841248"/>
-            <a:ext cx="10104120" cy="676656"/>
+            <a:off x="502920" y="822960"/>
+            <a:ext cx="11201400" cy="841248"/>
           </a:xfrm>
           <a:prstGeom prst="rect">
             <a:avLst/>
@@ -23385,17 +23389,17 @@
           <a:p>
             <a:pPr algn="l">
               <a:lnSpc>
-                <a:spcPct val="118000"/>
-              </a:lnSpc>
-            </a:pPr>
-            <a:r>
-              <a:rPr sz="1250" b="0" i="1">
+                <a:spcPct val="114000"/>
+              </a:lnSpc>
+            </a:pPr>
+            <a:r>
+              <a:rPr sz="1150" b="0" i="1">
                 <a:solidFill>
                   <a:srgbClr val="065A82"/>
                 </a:solidFill>
                 <a:latin typeface="Arial"/>
               </a:rPr>
-              <a:t>curl — критичная open-source-библиотека, её ведёт небольшая команда. В её bug-bounty хлынул поток AI-сгенерированных «отчётов об уязвимостях»: объём кратно вырос, доля валидных рухнула (пример — фиктивные GDB-дампы + ссылка на несуществующую функцию). Открытый приём свёрнут.</a:t>
+              <a:t>curl — критичная open-source-библиотека, её ведёт небольшая команда. В её bug-bounty хлынул поток AI-сгенерированных «отчётов»: к июлю 2025 объём вырос ×8, доля валидных упала с ~15% до &lt;5% (пример — фиктивные GDB-дампы + ссылка на несуществующую функцию). Платный bounty закрыт 26.01.2026; полный мораторий на приём — 01.07–03.08.2026.</a:t>
             </a:r>
           </a:p>
         </p:txBody>
@@ -23408,12 +23412,12 @@
         </p:nvSpPr>
         <p:spPr>
           <a:xfrm>
-            <a:off x="365760" y="1645920"/>
-            <a:ext cx="11475720" cy="1975104"/>
+            <a:off x="365760" y="1773936"/>
+            <a:ext cx="11475720" cy="1847088"/>
           </a:xfrm>
           <a:prstGeom prst="roundRect">
             <a:avLst>
-              <a:gd name="adj" fmla="val 15432"/>
+              <a:gd name="adj" fmla="val 16501"/>
             </a:avLst>
           </a:prstGeom>
           <a:solidFill>
@@ -23456,7 +23460,7 @@
         </p:nvSpPr>
         <p:spPr>
           <a:xfrm>
-            <a:off x="585216" y="1755648"/>
+            <a:off x="585216" y="1883664"/>
             <a:ext cx="11036808" cy="274320"/>
           </a:xfrm>
           <a:prstGeom prst="rect">
@@ -23495,8 +23499,8 @@
         </p:nvSpPr>
         <p:spPr>
           <a:xfrm>
-            <a:off x="585216" y="2121408"/>
-            <a:ext cx="4978908" cy="1353312"/>
+            <a:off x="585216" y="2249424"/>
+            <a:ext cx="4978908" cy="1225295"/>
           </a:xfrm>
           <a:prstGeom prst="roundRect">
             <a:avLst>
@@ -23543,7 +23547,7 @@
         </p:nvSpPr>
         <p:spPr>
           <a:xfrm>
-            <a:off x="749808" y="2267712"/>
+            <a:off x="749808" y="2395728"/>
             <a:ext cx="4649724" cy="292608"/>
           </a:xfrm>
           <a:prstGeom prst="rect">
@@ -23582,7 +23586,7 @@
         </p:nvSpPr>
         <p:spPr>
           <a:xfrm>
-            <a:off x="749808" y="2596896"/>
+            <a:off x="749808" y="2724912"/>
             <a:ext cx="4649724" cy="384048"/>
           </a:xfrm>
           <a:prstGeom prst="rect">
@@ -23621,8 +23625,8 @@
         </p:nvSpPr>
         <p:spPr>
           <a:xfrm>
-            <a:off x="749808" y="2999232"/>
-            <a:ext cx="4649724" cy="365759"/>
+            <a:off x="749808" y="3127248"/>
+            <a:ext cx="4649724" cy="237743"/>
           </a:xfrm>
           <a:prstGeom prst="rect">
             <a:avLst/>
@@ -23654,56 +23658,19 @@
       </p:sp>
       <p:sp>
         <p:nvSpPr>
-          <p:cNvPr id="11" name="TextBox 10"/>
-          <p:cNvSpPr txBox="1"/>
-          <p:nvPr/>
-        </p:nvSpPr>
-        <p:spPr>
-          <a:xfrm>
-            <a:off x="5655564" y="2231136"/>
+          <p:cNvPr id="11" name="Rounded Rectangle 10"/>
+          <p:cNvSpPr/>
+          <p:nvPr/>
+        </p:nvSpPr>
+        <p:spPr>
+          <a:xfrm>
+            <a:off x="5655564" y="2295144"/>
             <a:ext cx="896112" cy="274320"/>
           </a:xfrm>
-          <a:prstGeom prst="rect">
-            <a:avLst/>
-          </a:prstGeom>
-          <a:noFill/>
-        </p:spPr>
-        <p:txBody>
-          <a:bodyPr wrap="square" lIns="0" rIns="0" tIns="0" bIns="0" anchor="t">
-            <a:spAutoFit/>
-          </a:bodyPr>
-          <a:lstStyle/>
-          <a:p>
-            <a:pPr algn="ctr">
-              <a:lnSpc>
-                <a:spcPct val="115000"/>
-              </a:lnSpc>
-            </a:pPr>
-            <a:r>
-              <a:rPr sz="1300" b="1" i="0">
-                <a:solidFill>
-                  <a:srgbClr val="F0AB00"/>
-                </a:solidFill>
-                <a:latin typeface="Arial"/>
-              </a:rPr>
-              <a:t>× 1000+</a:t>
-            </a:r>
-          </a:p>
-        </p:txBody>
-      </p:sp>
-      <p:sp>
-        <p:nvSpPr>
-          <p:cNvPr id="12" name="Right Arrow 11"/>
-          <p:cNvSpPr/>
-          <p:nvPr/>
-        </p:nvSpPr>
-        <p:spPr>
-          <a:xfrm>
-            <a:off x="5692140" y="2578608"/>
-            <a:ext cx="822960" cy="457200"/>
-          </a:xfrm>
-          <a:prstGeom prst="rightArrow">
-            <a:avLst/>
+          <a:prstGeom prst="roundRect">
+            <a:avLst>
+              <a:gd name="adj" fmla="val 30000"/>
+            </a:avLst>
           </a:prstGeom>
           <a:solidFill>
             <a:srgbClr val="F0AB00"/>
@@ -23737,13 +23704,13 @@
       </p:sp>
       <p:sp>
         <p:nvSpPr>
-          <p:cNvPr id="13" name="TextBox 12"/>
-          <p:cNvSpPr txBox="1"/>
-          <p:nvPr/>
-        </p:nvSpPr>
-        <p:spPr>
-          <a:xfrm>
-            <a:off x="5655564" y="3090672"/>
+          <p:cNvPr id="12" name="TextBox 11"/>
+          <p:cNvSpPr txBox="1"/>
+          <p:nvPr/>
+        </p:nvSpPr>
+        <p:spPr>
+          <a:xfrm>
+            <a:off x="5655564" y="2295144"/>
             <a:ext cx="896112" cy="274320"/>
           </a:xfrm>
           <a:prstGeom prst="rect">
@@ -23752,7 +23719,7 @@
           <a:noFill/>
         </p:spPr>
         <p:txBody>
-          <a:bodyPr wrap="square" lIns="0" rIns="0" tIns="0" bIns="0" anchor="t">
+          <a:bodyPr wrap="square" lIns="0" rIns="0" tIns="0" bIns="0" anchor="ctr">
             <a:spAutoFit/>
           </a:bodyPr>
           <a:lstStyle/>
@@ -23763,14 +23730,58 @@
               </a:lnSpc>
             </a:pPr>
             <a:r>
-              <a:rPr sz="1150" b="1" i="1">
-                <a:solidFill>
-                  <a:srgbClr val="F0AB00"/>
-                </a:solidFill>
-                <a:latin typeface="Arial"/>
-              </a:rPr>
-              <a:t>разрыв</a:t>
-            </a:r>
+              <a:rPr sz="1300" b="1" i="0">
+                <a:solidFill>
+                  <a:srgbClr val="21295C"/>
+                </a:solidFill>
+                <a:latin typeface="Arial"/>
+              </a:rPr>
+              <a:t>× 1000+</a:t>
+            </a:r>
+          </a:p>
+        </p:txBody>
+      </p:sp>
+      <p:sp>
+        <p:nvSpPr>
+          <p:cNvPr id="13" name="Right Arrow 12"/>
+          <p:cNvSpPr/>
+          <p:nvPr/>
+        </p:nvSpPr>
+        <p:spPr>
+          <a:xfrm>
+            <a:off x="5692140" y="2642615"/>
+            <a:ext cx="822960" cy="457200"/>
+          </a:xfrm>
+          <a:prstGeom prst="rightArrow">
+            <a:avLst/>
+          </a:prstGeom>
+          <a:solidFill>
+            <a:srgbClr val="F0AB00"/>
+          </a:solidFill>
+          <a:ln>
+            <a:noFill/>
+          </a:ln>
+          <a:effectLst/>
+        </p:spPr>
+        <p:style>
+          <a:lnRef idx="1">
+            <a:schemeClr val="accent1"/>
+          </a:lnRef>
+          <a:fillRef idx="3">
+            <a:schemeClr val="accent1"/>
+          </a:fillRef>
+          <a:effectRef idx="2">
+            <a:schemeClr val="accent1"/>
+          </a:effectRef>
+          <a:fontRef idx="minor">
+            <a:schemeClr val="lt1"/>
+          </a:fontRef>
+        </p:style>
+        <p:txBody>
+          <a:bodyPr rtlCol="0" anchor="ctr"/>
+          <a:lstStyle/>
+          <a:p>
+            <a:pPr algn="ctr"/>
           </a:p>
         </p:txBody>
       </p:sp>
@@ -23782,8 +23793,93 @@
         </p:nvSpPr>
         <p:spPr>
           <a:xfrm>
-            <a:off x="6588252" y="2121408"/>
-            <a:ext cx="4978908" cy="1353312"/>
+            <a:off x="5655564" y="3154679"/>
+            <a:ext cx="896112" cy="274320"/>
+          </a:xfrm>
+          <a:prstGeom prst="roundRect">
+            <a:avLst>
+              <a:gd name="adj" fmla="val 30000"/>
+            </a:avLst>
+          </a:prstGeom>
+          <a:solidFill>
+            <a:srgbClr val="F0AB00"/>
+          </a:solidFill>
+          <a:ln>
+            <a:noFill/>
+          </a:ln>
+          <a:effectLst/>
+        </p:spPr>
+        <p:style>
+          <a:lnRef idx="1">
+            <a:schemeClr val="accent1"/>
+          </a:lnRef>
+          <a:fillRef idx="3">
+            <a:schemeClr val="accent1"/>
+          </a:fillRef>
+          <a:effectRef idx="2">
+            <a:schemeClr val="accent1"/>
+          </a:effectRef>
+          <a:fontRef idx="minor">
+            <a:schemeClr val="lt1"/>
+          </a:fontRef>
+        </p:style>
+        <p:txBody>
+          <a:bodyPr rtlCol="0" anchor="ctr"/>
+          <a:lstStyle/>
+          <a:p>
+            <a:pPr algn="ctr"/>
+          </a:p>
+        </p:txBody>
+      </p:sp>
+      <p:sp>
+        <p:nvSpPr>
+          <p:cNvPr id="15" name="TextBox 14"/>
+          <p:cNvSpPr txBox="1"/>
+          <p:nvPr/>
+        </p:nvSpPr>
+        <p:spPr>
+          <a:xfrm>
+            <a:off x="5655564" y="3154679"/>
+            <a:ext cx="896112" cy="274320"/>
+          </a:xfrm>
+          <a:prstGeom prst="rect">
+            <a:avLst/>
+          </a:prstGeom>
+          <a:noFill/>
+        </p:spPr>
+        <p:txBody>
+          <a:bodyPr wrap="square" lIns="0" rIns="0" tIns="0" bIns="0" anchor="ctr">
+            <a:spAutoFit/>
+          </a:bodyPr>
+          <a:lstStyle/>
+          <a:p>
+            <a:pPr algn="ctr">
+              <a:lnSpc>
+                <a:spcPct val="115000"/>
+              </a:lnSpc>
+            </a:pPr>
+            <a:r>
+              <a:rPr sz="1150" b="1" i="1">
+                <a:solidFill>
+                  <a:srgbClr val="21295C"/>
+                </a:solidFill>
+                <a:latin typeface="Arial"/>
+              </a:rPr>
+              <a:t>разрыв</a:t>
+            </a:r>
+          </a:p>
+        </p:txBody>
+      </p:sp>
+      <p:sp>
+        <p:nvSpPr>
+          <p:cNvPr id="16" name="Rounded Rectangle 15"/>
+          <p:cNvSpPr/>
+          <p:nvPr/>
+        </p:nvSpPr>
+        <p:spPr>
+          <a:xfrm>
+            <a:off x="6588252" y="2249424"/>
+            <a:ext cx="4978908" cy="1225295"/>
           </a:xfrm>
           <a:prstGeom prst="roundRect">
             <a:avLst>
@@ -23824,13 +23920,13 @@
       </p:sp>
       <p:sp>
         <p:nvSpPr>
-          <p:cNvPr id="15" name="TextBox 14"/>
-          <p:cNvSpPr txBox="1"/>
-          <p:nvPr/>
-        </p:nvSpPr>
-        <p:spPr>
-          <a:xfrm>
-            <a:off x="6752844" y="2267712"/>
+          <p:cNvPr id="17" name="TextBox 16"/>
+          <p:cNvSpPr txBox="1"/>
+          <p:nvPr/>
+        </p:nvSpPr>
+        <p:spPr>
+          <a:xfrm>
+            <a:off x="6752844" y="2395728"/>
             <a:ext cx="4649724" cy="292608"/>
           </a:xfrm>
           <a:prstGeom prst="rect">
@@ -23863,13 +23959,13 @@
       </p:sp>
       <p:sp>
         <p:nvSpPr>
-          <p:cNvPr id="16" name="TextBox 15"/>
-          <p:cNvSpPr txBox="1"/>
-          <p:nvPr/>
-        </p:nvSpPr>
-        <p:spPr>
-          <a:xfrm>
-            <a:off x="6752844" y="2596896"/>
+          <p:cNvPr id="18" name="TextBox 17"/>
+          <p:cNvSpPr txBox="1"/>
+          <p:nvPr/>
+        </p:nvSpPr>
+        <p:spPr>
+          <a:xfrm>
+            <a:off x="6752844" y="2724912"/>
             <a:ext cx="4649724" cy="384048"/>
           </a:xfrm>
           <a:prstGeom prst="rect">
@@ -23891,7 +23987,7 @@
             <a:r>
               <a:rPr sz="1600" b="1" i="0">
                 <a:solidFill>
-                  <a:srgbClr val="F0AB00"/>
+                  <a:srgbClr val="21295C"/>
                 </a:solidFill>
                 <a:latin typeface="Arial"/>
               </a:rPr>
@@ -23902,14 +23998,14 @@
       </p:sp>
       <p:sp>
         <p:nvSpPr>
-          <p:cNvPr id="17" name="TextBox 16"/>
-          <p:cNvSpPr txBox="1"/>
-          <p:nvPr/>
-        </p:nvSpPr>
-        <p:spPr>
-          <a:xfrm>
-            <a:off x="6752844" y="2999232"/>
-            <a:ext cx="4649724" cy="365759"/>
+          <p:cNvPr id="19" name="TextBox 18"/>
+          <p:cNvSpPr txBox="1"/>
+          <p:nvPr/>
+        </p:nvSpPr>
+        <p:spPr>
+          <a:xfrm>
+            <a:off x="6752844" y="3127248"/>
+            <a:ext cx="4649724" cy="237743"/>
           </a:xfrm>
           <a:prstGeom prst="rect">
             <a:avLst/>
@@ -23941,7 +24037,7 @@
       </p:sp>
       <p:sp>
         <p:nvSpPr>
-          <p:cNvPr id="18" name="Rounded Rectangle 17"/>
+          <p:cNvPr id="20" name="Rounded Rectangle 19"/>
           <p:cNvSpPr/>
           <p:nvPr/>
         </p:nvSpPr>
@@ -23989,7 +24085,7 @@
       </p:sp>
       <p:sp>
         <p:nvSpPr>
-          <p:cNvPr id="19" name="TextBox 18"/>
+          <p:cNvPr id="21" name="TextBox 20"/>
           <p:cNvSpPr txBox="1"/>
           <p:nvPr/>
         </p:nvSpPr>
@@ -24028,7 +24124,7 @@
       </p:sp>
       <p:sp>
         <p:nvSpPr>
-          <p:cNvPr id="20" name="Rounded Rectangle 19"/>
+          <p:cNvPr id="22" name="Rounded Rectangle 21"/>
           <p:cNvSpPr/>
           <p:nvPr/>
         </p:nvSpPr>
@@ -24076,7 +24172,7 @@
       </p:sp>
       <p:sp>
         <p:nvSpPr>
-          <p:cNvPr id="21" name="TextBox 20"/>
+          <p:cNvPr id="23" name="TextBox 22"/>
           <p:cNvSpPr txBox="1"/>
           <p:nvPr/>
         </p:nvSpPr>
@@ -24115,7 +24211,7 @@
       </p:sp>
       <p:sp>
         <p:nvSpPr>
-          <p:cNvPr id="22" name="TextBox 21"/>
+          <p:cNvPr id="24" name="TextBox 23"/>
           <p:cNvSpPr txBox="1"/>
           <p:nvPr/>
         </p:nvSpPr>
@@ -29107,7 +29203,7 @@
         <p:spPr>
           <a:xfrm>
             <a:off x="502920" y="3602736"/>
-            <a:ext cx="11201400" cy="1188720"/>
+            <a:ext cx="11201400" cy="1298448"/>
           </a:xfrm>
           <a:prstGeom prst="roundRect">
             <a:avLst>
@@ -29154,8 +29250,8 @@
         </p:nvSpPr>
         <p:spPr>
           <a:xfrm>
-            <a:off x="722376" y="3712463"/>
-            <a:ext cx="10698480" cy="292608"/>
+            <a:off x="722376" y="3694176"/>
+            <a:ext cx="10698480" cy="274320"/>
           </a:xfrm>
           <a:prstGeom prst="rect">
             <a:avLst/>
@@ -29180,7 +29276,7 @@
                 </a:solidFill>
                 <a:latin typeface="Arial"/>
               </a:rPr>
-              <a:t>DORA 2025 (опрос ~5000 команд) — почему практики не уходят:</a:t>
+              <a:t>DORA 2025 (~5000 команд) + ROI-отчёт (май 2026) — почему практики не уходят:</a:t>
             </a:r>
           </a:p>
         </p:txBody>
@@ -29193,8 +29289,8 @@
         </p:nvSpPr>
         <p:spPr>
           <a:xfrm>
-            <a:off x="722376" y="4023360"/>
-            <a:ext cx="10698480" cy="713232"/>
+            <a:off x="722376" y="3986784"/>
+            <a:ext cx="10698480" cy="384048"/>
           </a:xfrm>
           <a:prstGeom prst="rect">
             <a:avLst/>
@@ -29209,7 +29305,7 @@
           <a:p>
             <a:pPr algn="l">
               <a:lnSpc>
-                <a:spcPct val="118000"/>
+                <a:spcPct val="116000"/>
               </a:lnSpc>
             </a:pPr>
             <a:r>
@@ -29219,20 +29315,59 @@
                 </a:solidFill>
                 <a:latin typeface="Arial"/>
               </a:rPr>
-              <a:t>AI внедрили ~90% команд, но связь AI со стабильностью доставки — отрицательная, второй год подряд. Вывод DORA: AI не чинит команду — он усиливает то, что уже есть.</a:t>
-            </a:r>
-          </a:p>
-        </p:txBody>
-      </p:sp>
-      <p:sp>
-        <p:nvSpPr>
-          <p:cNvPr id="15" name="Rounded Rectangle 14"/>
+              <a:t>AI внедрили ~90% команд, но связь AI со стабильностью доставки — отрицательная, второй год подряд: «AI не чинит команду — он усиливает то, что уже есть».</a:t>
+            </a:r>
+          </a:p>
+        </p:txBody>
+      </p:sp>
+      <p:sp>
+        <p:nvSpPr>
+          <p:cNvPr id="15" name="TextBox 14"/>
+          <p:cNvSpPr txBox="1"/>
+          <p:nvPr/>
+        </p:nvSpPr>
+        <p:spPr>
+          <a:xfrm>
+            <a:off x="722376" y="4407408"/>
+            <a:ext cx="10698480" cy="384048"/>
+          </a:xfrm>
+          <a:prstGeom prst="rect">
+            <a:avLst/>
+          </a:prstGeom>
+          <a:noFill/>
+        </p:spPr>
+        <p:txBody>
+          <a:bodyPr wrap="square" lIns="0" rIns="0" tIns="0" bIns="0" anchor="t">
+            <a:spAutoFit/>
+          </a:bodyPr>
+          <a:lstStyle/>
+          <a:p>
+            <a:pPr algn="l">
+              <a:lnSpc>
+                <a:spcPct val="116000"/>
+              </a:lnSpc>
+            </a:pPr>
+            <a:r>
+              <a:rPr sz="1250" b="0" i="0">
+                <a:solidFill>
+                  <a:srgbClr val="21295C"/>
+                </a:solidFill>
+                <a:latin typeface="Arial"/>
+              </a:rPr>
+              <a:t>ROI-отчёт (2026): та же условность количественно — рост доли неудачных изменений 5%→6% ≈ −$344 000; J-кривая — временный провал стабильности без готовых gate заранее.</a:t>
+            </a:r>
+          </a:p>
+        </p:txBody>
+      </p:sp>
+      <p:sp>
+        <p:nvSpPr>
+          <p:cNvPr id="16" name="Rounded Rectangle 15"/>
           <p:cNvSpPr/>
           <p:nvPr/>
         </p:nvSpPr>
         <p:spPr>
           <a:xfrm>
-            <a:off x="502920" y="4901184"/>
+            <a:off x="502920" y="5010912"/>
             <a:ext cx="11201400" cy="859536"/>
           </a:xfrm>
           <a:prstGeom prst="roundRect">
@@ -29274,13 +29409,13 @@
       </p:sp>
       <p:sp>
         <p:nvSpPr>
-          <p:cNvPr id="16" name="TextBox 15"/>
-          <p:cNvSpPr txBox="1"/>
-          <p:nvPr/>
-        </p:nvSpPr>
-        <p:spPr>
-          <a:xfrm>
-            <a:off x="722376" y="4956048"/>
+          <p:cNvPr id="17" name="TextBox 16"/>
+          <p:cNvSpPr txBox="1"/>
+          <p:nvPr/>
+        </p:nvSpPr>
+        <p:spPr>
+          <a:xfrm>
+            <a:off x="722376" y="5065776"/>
             <a:ext cx="10762488" cy="749808"/>
           </a:xfrm>
           <a:prstGeom prst="rect">
@@ -29300,13 +29435,13 @@
               </a:lnSpc>
             </a:pPr>
             <a:r>
-              <a:rPr sz="1400" b="1" i="0">
+              <a:rPr sz="1350" b="1" i="0">
                 <a:solidFill>
                   <a:srgbClr val="21295C"/>
                 </a:solidFill>
                 <a:latin typeface="Arial"/>
               </a:rPr>
-              <a:t>AI — усилитель, не исправитель. Сильную инженерную культуру (тесты, ревью, гейты) AI делает сильнее; слабую — ломает быстрее. Поэтому исторические практики и управление командой не исчезают — они уточняются.</a:t>
+              <a:t>AI — усилитель, не исправитель. Сильную инженерную культуру (тесты, ревью, гейты) AI делает сильнее; слабую — ломает быстрее, и это теперь измеримо в долларах, а не только в абстрактной «стабильности».</a:t>
             </a:r>
           </a:p>
         </p:txBody>
@@ -32095,27 +32230,73 @@
       </p:sp>
       <p:sp>
         <p:nvSpPr>
-          <p:cNvPr id="13" name="TextBox 12"/>
-          <p:cNvSpPr txBox="1"/>
-          <p:nvPr/>
-        </p:nvSpPr>
-        <p:spPr>
-          <a:xfrm>
-            <a:off x="713232" y="3566160"/>
-            <a:ext cx="5074920" cy="274320"/>
-          </a:xfrm>
-          <a:prstGeom prst="rect">
-            <a:avLst/>
-          </a:prstGeom>
-          <a:noFill/>
-        </p:spPr>
-        <p:txBody>
-          <a:bodyPr wrap="square" lIns="0" rIns="0" tIns="0" bIns="0" anchor="t">
-            <a:spAutoFit/>
-          </a:bodyPr>
-          <a:lstStyle/>
-          <a:p>
-            <a:pPr algn="l">
+          <p:cNvPr id="13" name="Rounded Rectangle 12"/>
+          <p:cNvSpPr/>
+          <p:nvPr/>
+        </p:nvSpPr>
+        <p:spPr>
+          <a:xfrm>
+            <a:off x="713232" y="3547872"/>
+            <a:ext cx="1481328" cy="310896"/>
+          </a:xfrm>
+          <a:prstGeom prst="roundRect">
+            <a:avLst>
+              <a:gd name="adj" fmla="val 25000"/>
+            </a:avLst>
+          </a:prstGeom>
+          <a:solidFill>
+            <a:srgbClr val="F0AB00"/>
+          </a:solidFill>
+          <a:ln>
+            <a:noFill/>
+          </a:ln>
+          <a:effectLst/>
+        </p:spPr>
+        <p:style>
+          <a:lnRef idx="1">
+            <a:schemeClr val="accent1"/>
+          </a:lnRef>
+          <a:fillRef idx="3">
+            <a:schemeClr val="accent1"/>
+          </a:fillRef>
+          <a:effectRef idx="2">
+            <a:schemeClr val="accent1"/>
+          </a:effectRef>
+          <a:fontRef idx="minor">
+            <a:schemeClr val="lt1"/>
+          </a:fontRef>
+        </p:style>
+        <p:txBody>
+          <a:bodyPr rtlCol="0" anchor="ctr"/>
+          <a:lstStyle/>
+          <a:p>
+            <a:pPr algn="ctr"/>
+          </a:p>
+        </p:txBody>
+      </p:sp>
+      <p:sp>
+        <p:nvSpPr>
+          <p:cNvPr id="14" name="TextBox 13"/>
+          <p:cNvSpPr txBox="1"/>
+          <p:nvPr/>
+        </p:nvSpPr>
+        <p:spPr>
+          <a:xfrm>
+            <a:off x="713232" y="3547872"/>
+            <a:ext cx="1481328" cy="310896"/>
+          </a:xfrm>
+          <a:prstGeom prst="rect">
+            <a:avLst/>
+          </a:prstGeom>
+          <a:noFill/>
+        </p:spPr>
+        <p:txBody>
+          <a:bodyPr wrap="square" lIns="0" rIns="0" tIns="0" bIns="0" anchor="ctr">
+            <a:spAutoFit/>
+          </a:bodyPr>
+          <a:lstStyle/>
+          <a:p>
+            <a:pPr algn="ctr">
               <a:lnSpc>
                 <a:spcPct val="115000"/>
               </a:lnSpc>
@@ -32123,7 +32304,7 @@
             <a:r>
               <a:rPr sz="1300" b="1" i="0">
                 <a:solidFill>
-                  <a:srgbClr val="F0AB00"/>
+                  <a:srgbClr val="21295C"/>
                 </a:solidFill>
                 <a:latin typeface="Arial"/>
               </a:rPr>
@@ -32134,7 +32315,7 @@
       </p:sp>
       <p:sp>
         <p:nvSpPr>
-          <p:cNvPr id="14" name="TextBox 13"/>
+          <p:cNvPr id="15" name="TextBox 14"/>
           <p:cNvSpPr txBox="1"/>
           <p:nvPr/>
         </p:nvSpPr>
@@ -32173,7 +32354,7 @@
       </p:sp>
       <p:sp>
         <p:nvSpPr>
-          <p:cNvPr id="15" name="Rounded Rectangle 14"/>
+          <p:cNvPr id="16" name="Rounded Rectangle 15"/>
           <p:cNvSpPr/>
           <p:nvPr/>
         </p:nvSpPr>
@@ -32221,7 +32402,7 @@
       </p:sp>
       <p:sp>
         <p:nvSpPr>
-          <p:cNvPr id="16" name="TextBox 15"/>
+          <p:cNvPr id="17" name="TextBox 16"/>
           <p:cNvSpPr txBox="1"/>
           <p:nvPr/>
         </p:nvSpPr>
@@ -32260,7 +32441,7 @@
       </p:sp>
       <p:sp>
         <p:nvSpPr>
-          <p:cNvPr id="17" name="TextBox 16"/>
+          <p:cNvPr id="18" name="TextBox 17"/>
           <p:cNvSpPr txBox="1"/>
           <p:nvPr/>
         </p:nvSpPr>
@@ -32299,7 +32480,7 @@
       </p:sp>
       <p:sp>
         <p:nvSpPr>
-          <p:cNvPr id="18" name="Rounded Rectangle 17"/>
+          <p:cNvPr id="19" name="Rounded Rectangle 18"/>
           <p:cNvSpPr/>
           <p:nvPr/>
         </p:nvSpPr>
@@ -32347,7 +32528,7 @@
       </p:sp>
       <p:sp>
         <p:nvSpPr>
-          <p:cNvPr id="19" name="TextBox 18"/>
+          <p:cNvPr id="20" name="TextBox 19"/>
           <p:cNvSpPr txBox="1"/>
           <p:nvPr/>
         </p:nvSpPr>
@@ -32386,7 +32567,7 @@
       </p:sp>
       <p:sp>
         <p:nvSpPr>
-          <p:cNvPr id="20" name="TextBox 19"/>
+          <p:cNvPr id="21" name="TextBox 20"/>
           <p:cNvSpPr txBox="1"/>
           <p:nvPr/>
         </p:nvSpPr>
@@ -37123,7 +37304,7 @@
                 </a:solidFill>
                 <a:latin typeface="Arial"/>
               </a:rPr>
-              <a:t>Насколько код знаком AI? Незнакомый → доверие по Pro (~64%)</a:t>
+              <a:t>Насколько код знаком AI? Незнакомый → доверие по Pro (~69–80%)</a:t>
             </a:r>
           </a:p>
         </p:txBody>
@@ -37746,7 +37927,7 @@
         <p:spPr>
           <a:xfrm>
             <a:off x="502920" y="502920"/>
-            <a:ext cx="11201400" cy="1371600"/>
+            <a:ext cx="5806440" cy="1298448"/>
           </a:xfrm>
           <a:prstGeom prst="roundRect">
             <a:avLst>
@@ -37801,8 +37982,8 @@
         </p:blipFill>
         <p:spPr>
           <a:xfrm>
-            <a:off x="740664" y="777240"/>
-            <a:ext cx="457200" cy="457200"/>
+            <a:off x="704088" y="740664"/>
+            <a:ext cx="402336" cy="402336"/>
           </a:xfrm>
           <a:prstGeom prst="rect">
             <a:avLst/>
@@ -37817,8 +37998,8 @@
         </p:nvSpPr>
         <p:spPr>
           <a:xfrm>
-            <a:off x="1380744" y="667512"/>
-            <a:ext cx="10104120" cy="384048"/>
+            <a:off x="1216152" y="630936"/>
+            <a:ext cx="4910327" cy="347472"/>
           </a:xfrm>
           <a:prstGeom prst="rect">
             <a:avLst/>
@@ -37837,7 +38018,7 @@
               </a:lnSpc>
             </a:pPr>
             <a:r>
-              <a:rPr sz="1500" b="1" i="0">
+              <a:rPr sz="1350" b="1" i="0">
                 <a:solidFill>
                   <a:srgbClr val="21295C"/>
                 </a:solidFill>
@@ -37856,8 +38037,8 @@
         </p:nvSpPr>
         <p:spPr>
           <a:xfrm>
-            <a:off x="1380744" y="1069848"/>
-            <a:ext cx="10104120" cy="713232"/>
+            <a:off x="1216152" y="996696"/>
+            <a:ext cx="4910327" cy="713232"/>
           </a:xfrm>
           <a:prstGeom prst="rect">
             <a:avLst/>
@@ -37872,11 +38053,11 @@
           <a:p>
             <a:pPr algn="l">
               <a:lnSpc>
-                <a:spcPct val="116000"/>
-              </a:lnSpc>
-            </a:pPr>
-            <a:r>
-              <a:rPr sz="1300" b="0" i="0">
+                <a:spcPct val="114000"/>
+              </a:lnSpc>
+            </a:pPr>
+            <a:r>
+              <a:rPr sz="1200" b="0" i="0">
                 <a:solidFill>
                   <a:srgbClr val="21295C"/>
                 </a:solidFill>
@@ -37895,12 +38076,12 @@
         </p:nvSpPr>
         <p:spPr>
           <a:xfrm>
-            <a:off x="502920" y="2011680"/>
-            <a:ext cx="11201400" cy="1188720"/>
+            <a:off x="502920" y="1947672"/>
+            <a:ext cx="5806440" cy="1481328"/>
           </a:xfrm>
           <a:prstGeom prst="roundRect">
             <a:avLst>
-              <a:gd name="adj" fmla="val 22000"/>
+              <a:gd name="adj" fmla="val 20576"/>
             </a:avLst>
           </a:prstGeom>
           <a:solidFill>
@@ -37943,8 +38124,8 @@
         </p:nvSpPr>
         <p:spPr>
           <a:xfrm>
-            <a:off x="777240" y="2121408"/>
-            <a:ext cx="10652760" cy="329184"/>
+            <a:off x="740664" y="2057400"/>
+            <a:ext cx="5330952" cy="512064"/>
           </a:xfrm>
           <a:prstGeom prst="rect">
             <a:avLst/>
@@ -37959,11 +38140,11 @@
           <a:p>
             <a:pPr algn="l">
               <a:lnSpc>
-                <a:spcPct val="105000"/>
-              </a:lnSpc>
-            </a:pPr>
-            <a:r>
-              <a:rPr sz="1400" b="1" i="0">
+                <a:spcPct val="108000"/>
+              </a:lnSpc>
+            </a:pPr>
+            <a:r>
+              <a:rPr sz="1300" b="1" i="0">
                 <a:solidFill>
                   <a:srgbClr val="21295C"/>
                 </a:solidFill>
@@ -37982,8 +38163,8 @@
         </p:nvSpPr>
         <p:spPr>
           <a:xfrm>
-            <a:off x="777240" y="2487168"/>
-            <a:ext cx="10652760" cy="640080"/>
+            <a:off x="740664" y="2587752"/>
+            <a:ext cx="5330952" cy="768096"/>
           </a:xfrm>
           <a:prstGeom prst="rect">
             <a:avLst/>
@@ -37998,11 +38179,11 @@
           <a:p>
             <a:pPr algn="l">
               <a:lnSpc>
-                <a:spcPct val="116000"/>
-              </a:lnSpc>
-            </a:pPr>
-            <a:r>
-              <a:rPr sz="1250" b="0" i="0">
+                <a:spcPct val="114000"/>
+              </a:lnSpc>
+            </a:pPr>
+            <a:r>
+              <a:rPr sz="1150" b="0" i="0">
                 <a:solidFill>
                   <a:srgbClr val="21295C"/>
                 </a:solidFill>
@@ -38021,8 +38202,8 @@
         </p:nvSpPr>
         <p:spPr>
           <a:xfrm>
-            <a:off x="502920" y="3520440"/>
-            <a:ext cx="11201400" cy="1691640"/>
+            <a:off x="502920" y="3630168"/>
+            <a:ext cx="5806440" cy="1234440"/>
           </a:xfrm>
           <a:prstGeom prst="rect">
             <a:avLst/>
@@ -38041,7 +38222,7 @@
               </a:lnSpc>
             </a:pPr>
             <a:r>
-              <a:rPr sz="10400" b="1" i="0">
+              <a:rPr sz="5600" b="1" i="0">
                 <a:solidFill>
                   <a:srgbClr val="21295C"/>
                 </a:solidFill>
@@ -38060,8 +38241,8 @@
         </p:nvSpPr>
         <p:spPr>
           <a:xfrm>
-            <a:off x="502920" y="5285232"/>
-            <a:ext cx="11201400" cy="603504"/>
+            <a:off x="502920" y="4818888"/>
+            <a:ext cx="5806440" cy="402336"/>
           </a:xfrm>
           <a:prstGeom prst="rect">
             <a:avLst/>
@@ -38076,11 +38257,11 @@
           <a:p>
             <a:pPr algn="ctr">
               <a:lnSpc>
-                <a:spcPct val="110000"/>
-              </a:lnSpc>
-            </a:pPr>
-            <a:r>
-              <a:rPr sz="2800" b="0" i="0">
+                <a:spcPct val="115000"/>
+              </a:lnSpc>
+            </a:pPr>
+            <a:r>
+              <a:rPr sz="1800" b="0" i="0">
                 <a:solidFill>
                   <a:srgbClr val="065A82"/>
                 </a:solidFill>
@@ -38099,8 +38280,8 @@
         </p:nvSpPr>
         <p:spPr>
           <a:xfrm>
-            <a:off x="502920" y="5989320"/>
-            <a:ext cx="11201400" cy="384048"/>
+            <a:off x="502920" y="5257800"/>
+            <a:ext cx="5806440" cy="548640"/>
           </a:xfrm>
           <a:prstGeom prst="rect">
             <a:avLst/>
@@ -38119,13 +38300,163 @@
               </a:lnSpc>
             </a:pPr>
             <a:r>
-              <a:rPr sz="1300" b="0" i="1">
+              <a:rPr sz="1150" b="0" i="1">
                 <a:solidFill>
                   <a:srgbClr val="1C7293"/>
                 </a:solidFill>
                 <a:latin typeface="Arial"/>
               </a:rPr>
-              <a:t>Семинар 4 — на следующей неделе.  Дополнительные вопросы — на e-mail.</a:t>
+              <a:t>Семинар 4 — на следующей неделе. Дополнительные вопросы — на e-mail.</a:t>
+            </a:r>
+          </a:p>
+        </p:txBody>
+      </p:sp>
+      <p:sp>
+        <p:nvSpPr>
+          <p:cNvPr id="12" name="Rounded Rectangle 11"/>
+          <p:cNvSpPr/>
+          <p:nvPr/>
+        </p:nvSpPr>
+        <p:spPr>
+          <a:xfrm>
+            <a:off x="6537960" y="502920"/>
+            <a:ext cx="5166360" cy="5120640"/>
+          </a:xfrm>
+          <a:prstGeom prst="roundRect">
+            <a:avLst>
+              <a:gd name="adj" fmla="val 5952"/>
+            </a:avLst>
+          </a:prstGeom>
+          <a:solidFill>
+            <a:srgbClr val="FFFFFF"/>
+          </a:solidFill>
+          <a:ln w="19050">
+            <a:solidFill>
+              <a:srgbClr val="1C7293"/>
+            </a:solidFill>
+          </a:ln>
+          <a:effectLst/>
+        </p:spPr>
+        <p:style>
+          <a:lnRef idx="1">
+            <a:schemeClr val="accent1"/>
+          </a:lnRef>
+          <a:fillRef idx="3">
+            <a:schemeClr val="accent1"/>
+          </a:fillRef>
+          <a:effectRef idx="2">
+            <a:schemeClr val="accent1"/>
+          </a:effectRef>
+          <a:fontRef idx="minor">
+            <a:schemeClr val="lt1"/>
+          </a:fontRef>
+        </p:style>
+        <p:txBody>
+          <a:bodyPr rtlCol="0" anchor="ctr"/>
+          <a:lstStyle/>
+          <a:p>
+            <a:pPr algn="ctr"/>
+          </a:p>
+        </p:txBody>
+      </p:sp>
+      <p:pic>
+        <p:nvPicPr>
+          <p:cNvPr id="13" name="Picture 12" descr="s32-replit-real-source.jpg"/>
+          <p:cNvPicPr>
+            <a:picLocks noChangeAspect="1"/>
+          </p:cNvPicPr>
+          <p:nvPr/>
+        </p:nvPicPr>
+        <p:blipFill>
+          <a:blip r:embed="rId3"/>
+          <a:stretch>
+            <a:fillRect/>
+          </a:stretch>
+        </p:blipFill>
+        <p:spPr>
+          <a:xfrm>
+            <a:off x="7488517" y="630936"/>
+            <a:ext cx="3265245" cy="4480560"/>
+          </a:xfrm>
+          <a:prstGeom prst="rect">
+            <a:avLst/>
+          </a:prstGeom>
+        </p:spPr>
+      </p:pic>
+      <p:sp>
+        <p:nvSpPr>
+          <p:cNvPr id="14" name="TextBox 13"/>
+          <p:cNvSpPr txBox="1"/>
+          <p:nvPr/>
+        </p:nvSpPr>
+        <p:spPr>
+          <a:xfrm>
+            <a:off x="6665976" y="5148072"/>
+            <a:ext cx="4910328" cy="219456"/>
+          </a:xfrm>
+          <a:prstGeom prst="rect">
+            <a:avLst/>
+          </a:prstGeom>
+          <a:noFill/>
+        </p:spPr>
+        <p:txBody>
+          <a:bodyPr wrap="square" lIns="0" rIns="0" tIns="0" bIns="0" anchor="t">
+            <a:spAutoFit/>
+          </a:bodyPr>
+          <a:lstStyle/>
+          <a:p>
+            <a:pPr algn="l">
+              <a:lnSpc>
+                <a:spcPct val="115000"/>
+              </a:lnSpc>
+            </a:pPr>
+            <a:r>
+              <a:rPr sz="1000" b="0" i="1">
+                <a:solidFill>
+                  <a:srgbClr val="5B6678"/>
+                </a:solidFill>
+                <a:latin typeface="Arial"/>
+              </a:rPr>
+              <a:t>X (Jason Lemkin) · 18 июля 2025 · архив Wayback Machine</a:t>
+            </a:r>
+          </a:p>
+        </p:txBody>
+      </p:sp>
+      <p:sp>
+        <p:nvSpPr>
+          <p:cNvPr id="15" name="TextBox 14"/>
+          <p:cNvSpPr txBox="1"/>
+          <p:nvPr/>
+        </p:nvSpPr>
+        <p:spPr>
+          <a:xfrm>
+            <a:off x="6665976" y="5349240"/>
+            <a:ext cx="4910328" cy="256032"/>
+          </a:xfrm>
+          <a:prstGeom prst="rect">
+            <a:avLst/>
+          </a:prstGeom>
+          <a:noFill/>
+        </p:spPr>
+        <p:txBody>
+          <a:bodyPr wrap="square" lIns="0" rIns="0" tIns="0" bIns="0" anchor="t">
+            <a:spAutoFit/>
+          </a:bodyPr>
+          <a:lstStyle/>
+          <a:p>
+            <a:pPr algn="l">
+              <a:lnSpc>
+                <a:spcPct val="115000"/>
+              </a:lnSpc>
+            </a:pPr>
+            <a:r>
+              <a:rPr sz="1150" b="1" i="1">
+                <a:solidFill>
+                  <a:srgbClr val="21295C"/>
+                </a:solidFill>
+                <a:latin typeface="Arial"/>
+              </a:rPr>
+              <a:t>Агент подтверждает: удалил прод-БД в code-freeze</a:t>
             </a:r>
           </a:p>
         </p:txBody>
@@ -42201,7 +42532,7 @@
             </a:avLst>
           </a:prstGeom>
           <a:solidFill>
-            <a:srgbClr val="FDF3DC"/>
+            <a:srgbClr val="F0AB00"/>
           </a:solidFill>
           <a:ln w="19050">
             <a:solidFill>
@@ -42262,7 +42593,7 @@
             <a:r>
               <a:rPr sz="1300" b="1" i="0">
                 <a:solidFill>
-                  <a:srgbClr val="065A82"/>
+                  <a:srgbClr val="21295C"/>
                 </a:solidFill>
                 <a:latin typeface="Arial"/>
               </a:rPr>
@@ -42301,7 +42632,7 @@
             <a:r>
               <a:rPr sz="1700" b="1" i="0">
                 <a:solidFill>
-                  <a:srgbClr val="F0AB00"/>
+                  <a:srgbClr val="21295C"/>
                 </a:solidFill>
                 <a:latin typeface="Arial"/>
               </a:rPr>
@@ -45543,7 +45874,53 @@
       </p:sp>
       <p:sp>
         <p:nvSpPr>
-          <p:cNvPr id="12" name="TextBox 11"/>
+          <p:cNvPr id="12" name="Rounded Rectangle 11"/>
+          <p:cNvSpPr/>
+          <p:nvPr/>
+        </p:nvSpPr>
+        <p:spPr>
+          <a:xfrm>
+            <a:off x="6949440" y="1481328"/>
+            <a:ext cx="4480560" cy="1444752"/>
+          </a:xfrm>
+          <a:prstGeom prst="roundRect">
+            <a:avLst>
+              <a:gd name="adj" fmla="val 10000"/>
+            </a:avLst>
+          </a:prstGeom>
+          <a:solidFill>
+            <a:srgbClr val="F0AB00"/>
+          </a:solidFill>
+          <a:ln>
+            <a:noFill/>
+          </a:ln>
+          <a:effectLst/>
+        </p:spPr>
+        <p:style>
+          <a:lnRef idx="1">
+            <a:schemeClr val="accent1"/>
+          </a:lnRef>
+          <a:fillRef idx="3">
+            <a:schemeClr val="accent1"/>
+          </a:fillRef>
+          <a:effectRef idx="2">
+            <a:schemeClr val="accent1"/>
+          </a:effectRef>
+          <a:fontRef idx="minor">
+            <a:schemeClr val="lt1"/>
+          </a:fontRef>
+        </p:style>
+        <p:txBody>
+          <a:bodyPr rtlCol="0" anchor="ctr"/>
+          <a:lstStyle/>
+          <a:p>
+            <a:pPr algn="ctr"/>
+          </a:p>
+        </p:txBody>
+      </p:sp>
+      <p:sp>
+        <p:nvSpPr>
+          <p:cNvPr id="13" name="TextBox 12"/>
           <p:cNvSpPr txBox="1"/>
           <p:nvPr/>
         </p:nvSpPr>
@@ -45563,7 +45940,7 @@
           </a:bodyPr>
           <a:lstStyle/>
           <a:p>
-            <a:pPr algn="l">
+            <a:pPr algn="ctr">
               <a:lnSpc>
                 <a:spcPct val="95000"/>
               </a:lnSpc>
@@ -45571,7 +45948,7 @@
             <a:r>
               <a:rPr sz="9200" b="1" i="0">
                 <a:solidFill>
-                  <a:srgbClr val="F0AB00"/>
+                  <a:srgbClr val="21295C"/>
                 </a:solidFill>
                 <a:latin typeface="Arial"/>
               </a:rPr>
@@ -45582,7 +45959,7 @@
       </p:sp>
       <p:sp>
         <p:nvSpPr>
-          <p:cNvPr id="13" name="TextBox 12"/>
+          <p:cNvPr id="14" name="TextBox 13"/>
           <p:cNvSpPr txBox="1"/>
           <p:nvPr/>
         </p:nvSpPr>
@@ -45621,7 +45998,7 @@
       </p:sp>
       <p:sp>
         <p:nvSpPr>
-          <p:cNvPr id="14" name="TextBox 13"/>
+          <p:cNvPr id="15" name="TextBox 14"/>
           <p:cNvSpPr txBox="1"/>
           <p:nvPr/>
         </p:nvSpPr>
@@ -45660,7 +46037,7 @@
       </p:sp>
       <p:sp>
         <p:nvSpPr>
-          <p:cNvPr id="15" name="Rounded Rectangle 14"/>
+          <p:cNvPr id="16" name="Rounded Rectangle 15"/>
           <p:cNvSpPr/>
           <p:nvPr/>
         </p:nvSpPr>
@@ -45708,7 +46085,7 @@
       </p:sp>
       <p:sp>
         <p:nvSpPr>
-          <p:cNvPr id="16" name="TextBox 15"/>
+          <p:cNvPr id="17" name="TextBox 16"/>
           <p:cNvSpPr txBox="1"/>
           <p:nvPr/>
         </p:nvSpPr>
@@ -45747,7 +46124,7 @@
       </p:sp>
       <p:sp>
         <p:nvSpPr>
-          <p:cNvPr id="17" name="TextBox 16"/>
+          <p:cNvPr id="18" name="TextBox 17"/>
           <p:cNvSpPr txBox="1"/>
           <p:nvPr/>
         </p:nvSpPr>

--- a/library/lectures/lec-04/rendered/lec-04.pptx
+++ b/library/lectures/lec-04/rendered/lec-04.pptx
@@ -1449,7 +1449,7 @@
           <a:p/>
           <a:p>
             <a:r>
-              <a:t>Есть и второй риск. Если агенту разрешено самому править свой steering-файл — «запиши, что понял по итогам сессии», — это то же уязвимое место, что написанные самим агентом (self-authored) заметки в целом. Исследование Honest Lying показало: такие заметки могут не исправлять неверное убеждение, а закреплять его через повторные попытки. Конкретный пример: агент на раннем шаге ошибочно записал в файл «тест X не проходит из-за Y» — следующая сессия унаследует эту запись как данность и не станет перепроверять её заново, даже когда реальная причина давно другая.</a:t>
+              <a:t>Есть и второй риск. Если агенту разрешено самому править свой steering-файл — «запиши, что понял по итогам сессии», — это то же уязвимое место, что написанные самим агентом (self-authored) заметки в целом. Исследование «Honest Lying» (правдоподобное самозакрепление ошибки) показало: такие заметки могут не исправлять неверное убеждение, а закреплять его через повторные попытки. Конкретный пример: агент на раннем шаге ошибочно записал в файл «тест X не проходит из-за Y» — следующая сессия унаследует эту запись как данность и не станет перепроверять её заново, даже когда реальная причина давно другая.</a:t>
             </a:r>
           </a:p>
           <a:p/>
@@ -17978,13 +17978,13 @@
               </a:lnSpc>
             </a:pPr>
             <a:r>
-              <a:rPr sz="1300" b="1" i="0">
+              <a:rPr sz="1200" b="1" i="0">
                 <a:solidFill>
                   <a:srgbClr val="065A82"/>
                 </a:solidFill>
                 <a:latin typeface="Arial"/>
               </a:rPr>
-              <a:t>Honest Lying: риск самостоятельной правки агентом</a:t>
+              <a:t>«Honest Lying» (правдоподобное самозакрепление ошибки): риск самостоятельной правки агентом</a:t>
             </a:r>
           </a:p>
         </p:txBody>

--- a/library/lectures/lec-04/rendered/lec-04.pptx
+++ b/library/lectures/lec-04/rendered/lec-04.pptx
@@ -885,13 +885,13 @@
           <a:p/>
           <a:p>
             <a:r>
-              <a:t>SWE-bench Verified — подмножество примерно пятисот задач, вручную отвалидированных как корректно поставленные. На нём топовые системы к августу 2026 кластеризуются в диапазоне девяносто пять–девяносто шесть процентов. Цифра близка к ста и звучит как «агент решает реальную разработку». Но есть второй срез. SWE-bench Pro — версия на приватных кодовых базах, устойчивая к контаминации: задачи, которых модель не могла видеть в обучении, в незнакомом ей коде. На нём лидер показывает, в зависимости от источника измерения, от примерно шестидесяти девяти процентов (консервативная методология Scale SEAL) до семидесяти девяти–восьмидесяти процентов (вендорские лидерборды новейшего поколения моделей). Один и тот же класс систем: около девяноста пяти на знакомом публичном коде и от шестидесяти девяти до восьмидесяти на честном незнакомом. Разрыв сузился относительно прошлогодней картины — тогда было около двадцати четырёх процентных пунктов — до примерно пятнадцати–семнадцати по консервативной оценке. Это по-прежнему главный инженерный факт уровня C, только с уточнением: сокращение разрыва не отменяет тезиса, оно лишь говорит, что цена незнакомости стала немного ниже, чем год назад, — не то, что она исчезла.</a:t>
+              <a:t>SWE-bench Verified — подмножество примерно пятисот задач, вручную отвалидированных как корректно поставленные. На нём топовые системы к августу 2026 кластеризуются в диапазоне девяносто пять–девяносто шесть процентов. Цифра близка к ста и звучит как «агент решает реальную разработку». Но есть второй срез. SWE-bench Pro — версия на приватных кодовых базах, устойчивая к контаминации: задачи, которых модель не могла видеть в обучении, в незнакомом ей коде. Прямая проверка публичного лидерборда — labs.scale.com/leaderboard/swe_bench_pro_public, снимок на десятое августа две тысячи двадцать шестого — показывает верх таблицы заметно ниже, чем ожидалось бы: лидер, Muse Spark 1.1 от Meta, — около шестидесяти одной с половиной процента, следом gpt-5.4 — около пятидесяти девяти. Один и тот же класс систем: около девяноста пяти–девяноста шести на знакомом публичном коде и порядка пятидесяти девяти–шестидесяти двух на честном незнакомом. Разрыв на этом снимке — порядка тридцати четырёх–тридцати семи процентных пунктов, то есть шире, а не уже, чем называли на более ранних этапах развития этой темы, около двадцати четырёх пунктов. Это по-прежнему главный инженерный факт уровня C, и широкий разрыв этот факт не ослабляет, а подтверждает сильнее: цена незнакомости оказалась больше, чем предполагали более ранние, менее строгие замеры.</a:t>
             </a:r>
           </a:p>
           <a:p/>
           <a:p>
             <a:r>
-              <a:t>Сформулируем правило, которое прямо обслуживает центральный вопрос: доверие к кодинг-агенту обратно пропорционально незнакомости и критичности кода. Чем менее код знаком агенту и чем критичнее последствия ошибки, тем ниже фактическая надёжность и тем строже должен быть человеческий gate на выходе. На типовом публичном коде с хорошими тестами агент — мощный ускоритель; на приватном легаси в критичном модуле его «почти 95%» превращается в «семь-восемь из десяти». И добавлю урок свежести из Лекции 1: ARC-AGI устарел за два дня — любая цифра бенчмарка без среза и без даты для инженерного решения не информативна.</a:t>
+              <a:t>Сформулируем правило, которое прямо обслуживает центральный вопрос: доверие к кодинг-агенту обратно пропорционально незнакомости и критичности кода. Чем менее код знаком агенту и чем критичнее последствия ошибки, тем ниже фактическая надёжность и тем строже должен быть человеческий gate на выходе. На типовом публичном коде с хорошими тестами агент — мощный ускоритель; на приватном легаси в критичном модуле его «почти девяносто шесть» превращается в «примерно шесть из десяти». И добавлю урок свежести из Лекции 1: ARC-AGI устарел за два дня — любая цифра бенчмарка без среза и без даты для инженерного решения не информативна.</a:t>
             </a:r>
           </a:p>
         </p:txBody>
@@ -11537,13 +11537,13 @@
               </a:lnSpc>
             </a:pPr>
             <a:r>
-              <a:rPr sz="1500" b="1" i="0">
+              <a:rPr sz="1400" b="1" i="0">
                 <a:solidFill>
                   <a:srgbClr val="21295C"/>
                 </a:solidFill>
                 <a:latin typeface="Arial"/>
               </a:rPr>
-              <a:t>разрыв ~15–17 процентных пунктов</a:t>
+              <a:t>разрыв ~34–37 процентных пунктов — шире, а не уже</a:t>
             </a:r>
           </a:p>
         </p:txBody>
@@ -11670,7 +11670,7 @@
                 </a:solidFill>
                 <a:latin typeface="Arial"/>
               </a:rPr>
-              <a:t>~69–80%</a:t>
+              <a:t>~59–62%</a:t>
             </a:r>
           </a:p>
         </p:txBody>
@@ -11757,7 +11757,7 @@
                 </a:solidFill>
                 <a:latin typeface="Arial"/>
               </a:rPr>
-              <a:t>Главный инженерный факт уровня C: «почти 95%» на знакомом коде → «7–8 из 10» на незнакомом</a:t>
+              <a:t>Главный инженерный факт уровня C: «почти 96%» на знакомом коде → «примерно 6 из 10» на незнакомом</a:t>
             </a:r>
           </a:p>
         </p:txBody>
